--- a/docs/client-demo-deck.pptx
+++ b/docs/client-demo-deck.pptx
@@ -19,6 +19,7 @@
     <p:sldId id="267" r:id="rId18"/>
     <p:sldId id="268" r:id="rId19"/>
     <p:sldId id="269" r:id="rId20"/>
+    <p:sldId id="270" r:id="rId21"/>
   </p:sldIdLst>
   <p:sldSz cx="12191695" cy="6858000" type="screen4x3"/>
   <p:notesSz cx="6858000" cy="9144000"/>
@@ -3466,7 +3467,7 @@
                 </a:solidFill>
                 <a:latin typeface="Calibri"/>
               </a:rPr>
-              <a:t>FROM YOUR LEDGER TO A LIVE PREDICTION</a:t>
+              <a:t>BUILT TO PASS REVIEW</a:t>
             </a:r>
           </a:p>
           <a:p>
@@ -3477,7 +3478,7 @@
                 </a:solidFill>
                 <a:latin typeface="Calibri"/>
               </a:rPr>
-              <a:t>Data and model lifecycle</a:t>
+              <a:t>Security and compliance posture</a:t>
             </a:r>
           </a:p>
         </p:txBody>
@@ -3562,7 +3563,7 @@
                 </a:solidFill>
                 <a:latin typeface="Calibri"/>
               </a:rPr>
-              <a:t>Ingestion</a:t>
+              <a:t>Identity and access</a:t>
             </a:r>
           </a:p>
           <a:p>
@@ -3590,7 +3591,7 @@
                 </a:solidFill>
                 <a:latin typeface="Calibri"/>
               </a:rPr>
-              <a:t>Real click events arrive via Pub/Sub or push-down query into BigQuery — schema and freshness are agreed in the data contract.</a:t>
+              <a:t>Per-service service accounts; least-privilege IAM encoded in Terraform — every grant is reviewable in git.</a:t>
             </a:r>
           </a:p>
           <a:p>
@@ -3618,7 +3619,35 @@
                 </a:solidFill>
                 <a:latin typeface="Calibri"/>
               </a:rPr>
-              <a:t>Sales-ledger data is loaded via scheduled query or transfer service from the client source of truth.</a:t>
+              <a:t>No long-lived secrets in CI: GitHub OIDC federates into Google Cloud via Workload Identity.</a:t>
+            </a:r>
+          </a:p>
+          <a:p>
+            <a:pPr>
+              <a:lnSpc>
+                <a:spcPct val="120000"/>
+              </a:lnSpc>
+              <a:spcAft>
+                <a:spcPts val="300"/>
+              </a:spcAft>
+            </a:pPr>
+            <a:r>
+              <a:rPr sz="1300" b="1" i="0">
+                <a:solidFill>
+                  <a:srgbClr val="D97306"/>
+                </a:solidFill>
+                <a:latin typeface="Calibri"/>
+              </a:rPr>
+              <a:t>•  </a:t>
+            </a:r>
+            <a:r>
+              <a:rPr sz="1300" b="0" i="0">
+                <a:solidFill>
+                  <a:srgbClr val="333F52"/>
+                </a:solidFill>
+                <a:latin typeface="Calibri"/>
+              </a:rPr>
+              <a:t>Secrets in Secret Manager with versioning; rotation is a runbooked one-liner.</a:t>
             </a:r>
           </a:p>
           <a:p>
@@ -3637,7 +3666,7 @@
                 </a:solidFill>
                 <a:latin typeface="Calibri"/>
               </a:rPr>
-              <a:t>Training</a:t>
+              <a:t>Data protection</a:t>
             </a:r>
           </a:p>
           <a:p>
@@ -3665,7 +3694,7 @@
                 </a:solidFill>
                 <a:latin typeface="Calibri"/>
               </a:rPr>
-              <a:t>Model is trained in a Vertex AI pipeline run from the same monorepo — fully reproducible from a commit.</a:t>
+              <a:t>All data resident in europe-west2 (London). No US-region replicas.</a:t>
             </a:r>
           </a:p>
           <a:p>
@@ -3693,7 +3722,35 @@
                 </a:solidFill>
                 <a:latin typeface="Calibri"/>
               </a:rPr>
-              <a:t>Each model version is registered in the Vertex Model Registry; we never deploy an unversioned artifact.</a:t>
+              <a:t>Google-managed encryption keys by default; customer-managed keys (CMEK) available on request.</a:t>
+            </a:r>
+          </a:p>
+          <a:p>
+            <a:pPr>
+              <a:lnSpc>
+                <a:spcPct val="120000"/>
+              </a:lnSpc>
+              <a:spcAft>
+                <a:spcPts val="300"/>
+              </a:spcAft>
+            </a:pPr>
+            <a:r>
+              <a:rPr sz="1300" b="1" i="0">
+                <a:solidFill>
+                  <a:srgbClr val="D97306"/>
+                </a:solidFill>
+                <a:latin typeface="Calibri"/>
+              </a:rPr>
+              <a:t>•  </a:t>
+            </a:r>
+            <a:r>
+              <a:rPr sz="1300" b="0" i="0">
+                <a:solidFill>
+                  <a:srgbClr val="333F52"/>
+                </a:solidFill>
+                <a:latin typeface="Calibri"/>
+              </a:rPr>
+              <a:t>Predictions are persisted to BigQuery with the same access controls as your existing analytics estate.</a:t>
             </a:r>
           </a:p>
           <a:p>
@@ -3712,7 +3769,7 @@
                 </a:solidFill>
                 <a:latin typeface="Calibri"/>
               </a:rPr>
-              <a:t>Release</a:t>
+              <a:t>Supply chain</a:t>
             </a:r>
           </a:p>
           <a:p>
@@ -3740,51 +3797,7 @@
                 </a:solidFill>
                 <a:latin typeface="Calibri"/>
               </a:rPr>
-              <a:t>New versions deploy behind a traffic split — 10% canary, then ramp — with automatic rollback if breaker trip rates spike.</a:t>
-            </a:r>
-          </a:p>
-          <a:p>
-            <a:pPr>
-              <a:lnSpc>
-                <a:spcPct val="120000"/>
-              </a:lnSpc>
-              <a:spcAft>
-                <a:spcPts val="300"/>
-              </a:spcAft>
-            </a:pPr>
-            <a:r>
-              <a:rPr sz="1300" b="1" i="0">
-                <a:solidFill>
-                  <a:srgbClr val="D97306"/>
-                </a:solidFill>
-                <a:latin typeface="Calibri"/>
-              </a:rPr>
-              <a:t>•  </a:t>
-            </a:r>
-            <a:r>
-              <a:rPr sz="1300" b="0" i="0">
-                <a:solidFill>
-                  <a:srgbClr val="333F52"/>
-                </a:solidFill>
-                <a:latin typeface="Calibri"/>
-              </a:rPr>
-              <a:t>Drift monitoring on inputs (PSI) and on outputs vs the reconciled ledger keeps the model honest in production.</a:t>
-            </a:r>
-          </a:p>
-          <a:p>
-            <a:pPr>
-              <a:lnSpc>
-                <a:spcPct val="120000"/>
-              </a:lnSpc>
-            </a:pPr>
-            <a:r>
-              <a:rPr sz="1100" b="0" i="1">
-                <a:solidFill>
-                  <a:srgbClr val="6B7380"/>
-                </a:solidFill>
-                <a:latin typeface="Calibri"/>
-              </a:rPr>
-              <a:t>Today's demo runs against a model trained on a synthetic dataset that mirrors the agreed schema. Retraining on real data is the first work item once the data contract is signed.</a:t>
+              <a:t>Container images pinned by digest; dependency scanning runs on every PR; no third-party model weights are downloaded at runtime.</a:t>
             </a:r>
           </a:p>
         </p:txBody>
@@ -3871,7 +3884,7 @@
                 </a:solidFill>
                 <a:latin typeface="Calibri"/>
               </a:rPr>
-              <a:t>10 / 14</a:t>
+              <a:t>10 / 15</a:t>
             </a:r>
           </a:p>
         </p:txBody>
@@ -3941,7 +3954,7 @@
                 </a:solidFill>
                 <a:latin typeface="Calibri"/>
               </a:rPr>
-              <a:t>RUN-BOOK READY, ON DAY ONE</a:t>
+              <a:t>FROM YOUR LEDGER TO A LIVE PREDICTION</a:t>
             </a:r>
           </a:p>
           <a:p>
@@ -3952,7 +3965,7 @@
                 </a:solidFill>
                 <a:latin typeface="Calibri"/>
               </a:rPr>
-              <a:t>Operational readiness</a:t>
+              <a:t>Data and model lifecycle</a:t>
             </a:r>
           </a:p>
         </p:txBody>
@@ -4037,7 +4050,7 @@
                 </a:solidFill>
                 <a:latin typeface="Calibri"/>
               </a:rPr>
-              <a:t>Service-level objectives</a:t>
+              <a:t>Ingestion</a:t>
             </a:r>
           </a:p>
           <a:p>
@@ -4065,7 +4078,7 @@
                 </a:solidFill>
                 <a:latin typeface="Calibri"/>
               </a:rPr>
-              <a:t>Availability target 99.5% on /v1/score; latency SLO sized from the live load profile.</a:t>
+              <a:t>Real click events arrive via Pub/Sub or push-down query into BigQuery — schema and freshness are agreed in the data contract.</a:t>
             </a:r>
           </a:p>
           <a:p>
@@ -4093,7 +4106,7 @@
                 </a:solidFill>
                 <a:latin typeface="Calibri"/>
               </a:rPr>
-              <a:t>Error-budget policy: breaches automatically open an incident channel.</a:t>
+              <a:t>Sales-ledger data is loaded via scheduled query or transfer service from the client source of truth.</a:t>
             </a:r>
           </a:p>
           <a:p>
@@ -4112,7 +4125,7 @@
                 </a:solidFill>
                 <a:latin typeface="Calibri"/>
               </a:rPr>
-              <a:t>Observability</a:t>
+              <a:t>Training</a:t>
             </a:r>
           </a:p>
           <a:p>
@@ -4140,7 +4153,7 @@
                 </a:solidFill>
                 <a:latin typeface="Calibri"/>
               </a:rPr>
-              <a:t>Cloud Logging, Cloud Trace, and Cloud Monitoring out of the box — one pane of glass for the on-call engineer.</a:t>
+              <a:t>Model is trained in a Vertex AI pipeline run from the same monorepo — fully reproducible from a commit.</a:t>
             </a:r>
           </a:p>
           <a:p>
@@ -4168,7 +4181,7 @@
                 </a:solidFill>
                 <a:latin typeface="Calibri"/>
               </a:rPr>
-              <a:t>Four alert policies pre-wired: latency, error rate, breaker trips, anomaly state.</a:t>
+              <a:t>Each model version is registered in the Vertex Model Registry; we never deploy an unversioned artifact.</a:t>
             </a:r>
           </a:p>
           <a:p>
@@ -4187,7 +4200,7 @@
                 </a:solidFill>
                 <a:latin typeface="Calibri"/>
               </a:rPr>
-              <a:t>Runbooks committed to the repository</a:t>
+              <a:t>Release</a:t>
             </a:r>
           </a:p>
           <a:p>
@@ -4215,26 +4228,7 @@
                 </a:solidFill>
                 <a:latin typeface="Calibri"/>
               </a:rPr>
-              <a:t>Reset the breaker · Roll back a model version · Scale Vertex to zero for cost · Rotate a secret · Migrate the BigQuery schema.</a:t>
-            </a:r>
-          </a:p>
-          <a:p>
-            <a:pPr>
-              <a:lnSpc>
-                <a:spcPct val="120000"/>
-              </a:lnSpc>
-              <a:spcAft>
-                <a:spcPts val="600"/>
-              </a:spcAft>
-            </a:pPr>
-            <a:r>
-              <a:rPr sz="1700" b="1" i="0">
-                <a:solidFill>
-                  <a:srgbClr val="0F6E7A"/>
-                </a:solidFill>
-                <a:latin typeface="Calibri"/>
-              </a:rPr>
-              <a:t>Rollback</a:t>
+              <a:t>New versions deploy behind a traffic split — 10% canary, then ramp — with automatic rollback if breaker trip rates spike.</a:t>
             </a:r>
           </a:p>
           <a:p>
@@ -4262,7 +4256,23 @@
                 </a:solidFill>
                 <a:latin typeface="Calibri"/>
               </a:rPr>
-              <a:t>Vertex traffic-split rollback to the previous model version is a single command; Cloud Run revisions are pinned and revertible.</a:t>
+              <a:t>Drift monitoring on inputs (PSI) and on outputs vs the reconciled ledger keeps the model honest in production.</a:t>
+            </a:r>
+          </a:p>
+          <a:p>
+            <a:pPr>
+              <a:lnSpc>
+                <a:spcPct val="120000"/>
+              </a:lnSpc>
+            </a:pPr>
+            <a:r>
+              <a:rPr sz="1100" b="0" i="1">
+                <a:solidFill>
+                  <a:srgbClr val="6B7380"/>
+                </a:solidFill>
+                <a:latin typeface="Calibri"/>
+              </a:rPr>
+              <a:t>Today's demo runs against a model trained on a synthetic dataset that mirrors the agreed schema. Retraining on real data is the first work item once the data contract is signed.</a:t>
             </a:r>
           </a:p>
         </p:txBody>
@@ -4349,7 +4359,7 @@
                 </a:solidFill>
                 <a:latin typeface="Calibri"/>
               </a:rPr>
-              <a:t>11 / 14</a:t>
+              <a:t>11 / 15</a:t>
             </a:r>
           </a:p>
         </p:txBody>
@@ -4419,7 +4429,7 @@
                 </a:solidFill>
                 <a:latin typeface="Calibri"/>
               </a:rPr>
-              <a:t>FROM HERE TO PRODUCTION</a:t>
+              <a:t>RUN-BOOK READY, ON DAY ONE</a:t>
             </a:r>
           </a:p>
           <a:p>
@@ -4430,7 +4440,7 @@
                 </a:solidFill>
                 <a:latin typeface="Calibri"/>
               </a:rPr>
-              <a:t>Delivery roadmap</a:t>
+              <a:t>Operational readiness</a:t>
             </a:r>
           </a:p>
         </p:txBody>
@@ -4480,183 +4490,14 @@
       </p:sp>
       <p:sp>
         <p:nvSpPr>
-          <p:cNvPr id="4" name="Rounded Rectangle 3"/>
-          <p:cNvSpPr/>
-          <p:nvPr/>
-        </p:nvSpPr>
-        <p:spPr>
-          <a:xfrm>
-            <a:off x="502920" y="1188720"/>
-            <a:ext cx="3840480" cy="3657600"/>
-          </a:xfrm>
-          <a:prstGeom prst="roundRect">
-            <a:avLst>
-              <a:gd name="adj" fmla="val 5000"/>
-            </a:avLst>
-          </a:prstGeom>
-          <a:solidFill>
-            <a:srgbClr val="FFFFFF"/>
-          </a:solidFill>
-          <a:ln w="9525">
-            <a:solidFill>
-              <a:srgbClr val="D7DBE3"/>
-            </a:solidFill>
-          </a:ln>
-        </p:spPr>
-        <p:style>
-          <a:lnRef idx="1">
-            <a:schemeClr val="accent1"/>
-          </a:lnRef>
-          <a:fillRef idx="3">
-            <a:schemeClr val="accent1"/>
-          </a:fillRef>
-          <a:effectRef idx="2">
-            <a:schemeClr val="accent1"/>
-          </a:effectRef>
-          <a:fontRef idx="minor">
-            <a:schemeClr val="lt1"/>
-          </a:fontRef>
-        </p:style>
-        <p:txBody>
-          <a:bodyPr rtlCol="0" anchor="ctr"/>
-          <a:lstStyle/>
-          <a:p>
-            <a:pPr algn="ctr"/>
-          </a:p>
-        </p:txBody>
-      </p:sp>
-      <p:sp>
-        <p:nvSpPr>
-          <p:cNvPr id="5" name="Rectangle 4"/>
-          <p:cNvSpPr/>
-          <p:nvPr/>
-        </p:nvSpPr>
-        <p:spPr>
-          <a:xfrm>
-            <a:off x="502920" y="1188720"/>
-            <a:ext cx="3840480" cy="502920"/>
-          </a:xfrm>
-          <a:prstGeom prst="rect">
-            <a:avLst/>
-          </a:prstGeom>
-          <a:solidFill>
-            <a:srgbClr val="1F8A4F"/>
-          </a:solidFill>
-          <a:ln>
-            <a:noFill/>
-          </a:ln>
-        </p:spPr>
-        <p:style>
-          <a:lnRef idx="1">
-            <a:schemeClr val="accent1"/>
-          </a:lnRef>
-          <a:fillRef idx="3">
-            <a:schemeClr val="accent1"/>
-          </a:fillRef>
-          <a:effectRef idx="2">
-            <a:schemeClr val="accent1"/>
-          </a:effectRef>
-          <a:fontRef idx="minor">
-            <a:schemeClr val="lt1"/>
-          </a:fontRef>
-        </p:style>
-        <p:txBody>
-          <a:bodyPr rtlCol="0" anchor="ctr"/>
-          <a:lstStyle/>
-          <a:p>
-            <a:pPr algn="ctr"/>
-          </a:p>
-        </p:txBody>
-      </p:sp>
-      <p:sp>
-        <p:nvSpPr>
-          <p:cNvPr id="6" name="TextBox 5"/>
+          <p:cNvPr id="4" name="TextBox 3"/>
           <p:cNvSpPr txBox="1"/>
           <p:nvPr/>
         </p:nvSpPr>
         <p:spPr>
           <a:xfrm>
-            <a:off x="685800" y="1252728"/>
-            <a:ext cx="3474720" cy="457200"/>
-          </a:xfrm>
-          <a:prstGeom prst="rect">
-            <a:avLst/>
-          </a:prstGeom>
-          <a:noFill/>
-        </p:spPr>
-        <p:txBody>
-          <a:bodyPr wrap="none">
-            <a:spAutoFit/>
-          </a:bodyPr>
-          <a:lstStyle/>
-          <a:p>
-            <a:r>
-              <a:rPr sz="1100" b="1" i="0">
-                <a:solidFill>
-                  <a:srgbClr val="FFFFFF"/>
-                </a:solidFill>
-                <a:latin typeface="Calibri"/>
-              </a:rPr>
-              <a:t>Phase 1</a:t>
-            </a:r>
-          </a:p>
-          <a:p>
-            <a:r>
-              <a:rPr sz="1500" b="1" i="0">
-                <a:solidFill>
-                  <a:srgbClr val="FFFFFF"/>
-                </a:solidFill>
-                <a:latin typeface="Calibri"/>
-              </a:rPr>
-              <a:t>Staging hardened</a:t>
-            </a:r>
-          </a:p>
-        </p:txBody>
-      </p:sp>
-      <p:sp>
-        <p:nvSpPr>
-          <p:cNvPr id="7" name="TextBox 6"/>
-          <p:cNvSpPr txBox="1"/>
-          <p:nvPr/>
-        </p:nvSpPr>
-        <p:spPr>
-          <a:xfrm>
-            <a:off x="685800" y="1874520"/>
-            <a:ext cx="3474720" cy="274320"/>
-          </a:xfrm>
-          <a:prstGeom prst="rect">
-            <a:avLst/>
-          </a:prstGeom>
-          <a:noFill/>
-        </p:spPr>
-        <p:txBody>
-          <a:bodyPr wrap="none">
-            <a:spAutoFit/>
-          </a:bodyPr>
-          <a:lstStyle/>
-          <a:p>
-            <a:r>
-              <a:rPr sz="1000" b="1" i="0">
-                <a:solidFill>
-                  <a:srgbClr val="1F8A4F"/>
-                </a:solidFill>
-                <a:latin typeface="Calibri"/>
-              </a:rPr>
-              <a:t>COMPLETE</a:t>
-            </a:r>
-          </a:p>
-        </p:txBody>
-      </p:sp>
-      <p:sp>
-        <p:nvSpPr>
-          <p:cNvPr id="8" name="TextBox 7"/>
-          <p:cNvSpPr txBox="1"/>
-          <p:nvPr/>
-        </p:nvSpPr>
-        <p:spPr>
-          <a:xfrm>
-            <a:off x="731520" y="2240280"/>
-            <a:ext cx="3383280" cy="2468880"/>
+            <a:off x="548640" y="1143000"/>
+            <a:ext cx="11094415" cy="5303520"/>
           </a:xfrm>
           <a:prstGeom prst="rect">
             <a:avLst/>
@@ -4671,303 +4512,108 @@
           <a:p>
             <a:pPr>
               <a:lnSpc>
-                <a:spcPct val="125000"/>
+                <a:spcPct val="120000"/>
               </a:lnSpc>
+              <a:spcAft>
+                <a:spcPts val="600"/>
+              </a:spcAft>
             </a:pPr>
             <a:r>
-              <a:rPr sz="1200" b="1" i="0">
-                <a:solidFill>
-                  <a:srgbClr val="1F8A4F"/>
-                </a:solidFill>
-                <a:latin typeface="Calibri"/>
-              </a:rPr>
-              <a:t>✓  </a:t>
-            </a:r>
-            <a:r>
-              <a:rPr sz="1200" b="0" i="0">
-                <a:solidFill>
-                  <a:srgbClr val="333F52"/>
-                </a:solidFill>
-                <a:latin typeface="Calibri"/>
-              </a:rPr>
-              <a:t>Real explain path live</a:t>
+              <a:rPr sz="1700" b="1" i="0">
+                <a:solidFill>
+                  <a:srgbClr val="0F6E7A"/>
+                </a:solidFill>
+                <a:latin typeface="Calibri"/>
+              </a:rPr>
+              <a:t>Service-level objectives</a:t>
             </a:r>
           </a:p>
           <a:p>
             <a:pPr>
               <a:lnSpc>
-                <a:spcPct val="125000"/>
+                <a:spcPct val="120000"/>
               </a:lnSpc>
+              <a:spcAft>
+                <a:spcPts val="300"/>
+              </a:spcAft>
             </a:pPr>
             <a:r>
-              <a:rPr sz="1200" b="1" i="0">
-                <a:solidFill>
-                  <a:srgbClr val="1F8A4F"/>
-                </a:solidFill>
-                <a:latin typeface="Calibri"/>
-              </a:rPr>
-              <a:t>✓  </a:t>
-            </a:r>
-            <a:r>
-              <a:rPr sz="1200" b="0" i="0">
+              <a:rPr sz="1300" b="1" i="0">
+                <a:solidFill>
+                  <a:srgbClr val="D97306"/>
+                </a:solidFill>
+                <a:latin typeface="Calibri"/>
+              </a:rPr>
+              <a:t>•  </a:t>
+            </a:r>
+            <a:r>
+              <a:rPr sz="1300" b="0" i="0">
                 <a:solidFill>
                   <a:srgbClr val="333F52"/>
                 </a:solidFill>
                 <a:latin typeface="Calibri"/>
               </a:rPr>
-              <a:t>Sliding anomaly window</a:t>
+              <a:t>Availability target 99.5% on /v1/score; latency SLO sized from the live load profile.</a:t>
             </a:r>
           </a:p>
           <a:p>
             <a:pPr>
               <a:lnSpc>
-                <a:spcPct val="125000"/>
+                <a:spcPct val="120000"/>
               </a:lnSpc>
+              <a:spcAft>
+                <a:spcPts val="300"/>
+              </a:spcAft>
             </a:pPr>
             <a:r>
-              <a:rPr sz="1200" b="1" i="0">
-                <a:solidFill>
-                  <a:srgbClr val="1F8A4F"/>
-                </a:solidFill>
-                <a:latin typeface="Calibri"/>
-              </a:rPr>
-              <a:t>✓  </a:t>
-            </a:r>
-            <a:r>
-              <a:rPr sz="1200" b="0" i="0">
+              <a:rPr sz="1300" b="1" i="0">
+                <a:solidFill>
+                  <a:srgbClr val="D97306"/>
+                </a:solidFill>
+                <a:latin typeface="Calibri"/>
+              </a:rPr>
+              <a:t>•  </a:t>
+            </a:r>
+            <a:r>
+              <a:rPr sz="1300" b="0" i="0">
                 <a:solidFill>
                   <a:srgbClr val="333F52"/>
                 </a:solidFill>
                 <a:latin typeface="Calibri"/>
               </a:rPr>
-              <a:t>IaC for IAM</a:t>
+              <a:t>Error-budget policy: breaches automatically open an incident channel.</a:t>
             </a:r>
           </a:p>
           <a:p>
             <a:pPr>
               <a:lnSpc>
-                <a:spcPct val="125000"/>
+                <a:spcPct val="120000"/>
               </a:lnSpc>
+              <a:spcAft>
+                <a:spcPts val="600"/>
+              </a:spcAft>
             </a:pPr>
             <a:r>
-              <a:rPr sz="1200" b="1" i="0">
-                <a:solidFill>
-                  <a:srgbClr val="1F8A4F"/>
-                </a:solidFill>
-                <a:latin typeface="Calibri"/>
-              </a:rPr>
-              <a:t>✓  </a:t>
-            </a:r>
-            <a:r>
-              <a:rPr sz="1200" b="0" i="0">
-                <a:solidFill>
-                  <a:srgbClr val="333F52"/>
-                </a:solidFill>
-                <a:latin typeface="Calibri"/>
-              </a:rPr>
-              <a:t>Load profile captured</a:t>
-            </a:r>
-          </a:p>
-        </p:txBody>
-      </p:sp>
-      <p:sp>
-        <p:nvSpPr>
-          <p:cNvPr id="9" name="Rounded Rectangle 8"/>
-          <p:cNvSpPr/>
-          <p:nvPr/>
-        </p:nvSpPr>
-        <p:spPr>
-          <a:xfrm>
-            <a:off x="4572000" y="1188720"/>
-            <a:ext cx="3840480" cy="3657600"/>
-          </a:xfrm>
-          <a:prstGeom prst="roundRect">
-            <a:avLst>
-              <a:gd name="adj" fmla="val 5000"/>
-            </a:avLst>
-          </a:prstGeom>
-          <a:solidFill>
-            <a:srgbClr val="FFFFFF"/>
-          </a:solidFill>
-          <a:ln w="9525">
-            <a:solidFill>
-              <a:srgbClr val="D7DBE3"/>
-            </a:solidFill>
-          </a:ln>
-        </p:spPr>
-        <p:style>
-          <a:lnRef idx="1">
-            <a:schemeClr val="accent1"/>
-          </a:lnRef>
-          <a:fillRef idx="3">
-            <a:schemeClr val="accent1"/>
-          </a:fillRef>
-          <a:effectRef idx="2">
-            <a:schemeClr val="accent1"/>
-          </a:effectRef>
-          <a:fontRef idx="minor">
-            <a:schemeClr val="lt1"/>
-          </a:fontRef>
-        </p:style>
-        <p:txBody>
-          <a:bodyPr rtlCol="0" anchor="ctr"/>
-          <a:lstStyle/>
-          <a:p>
-            <a:pPr algn="ctr"/>
-          </a:p>
-        </p:txBody>
-      </p:sp>
-      <p:sp>
-        <p:nvSpPr>
-          <p:cNvPr id="10" name="Rectangle 9"/>
-          <p:cNvSpPr/>
-          <p:nvPr/>
-        </p:nvSpPr>
-        <p:spPr>
-          <a:xfrm>
-            <a:off x="4572000" y="1188720"/>
-            <a:ext cx="3840480" cy="502920"/>
-          </a:xfrm>
-          <a:prstGeom prst="rect">
-            <a:avLst/>
-          </a:prstGeom>
-          <a:solidFill>
-            <a:srgbClr val="D97306"/>
-          </a:solidFill>
-          <a:ln>
-            <a:noFill/>
-          </a:ln>
-        </p:spPr>
-        <p:style>
-          <a:lnRef idx="1">
-            <a:schemeClr val="accent1"/>
-          </a:lnRef>
-          <a:fillRef idx="3">
-            <a:schemeClr val="accent1"/>
-          </a:fillRef>
-          <a:effectRef idx="2">
-            <a:schemeClr val="accent1"/>
-          </a:effectRef>
-          <a:fontRef idx="minor">
-            <a:schemeClr val="lt1"/>
-          </a:fontRef>
-        </p:style>
-        <p:txBody>
-          <a:bodyPr rtlCol="0" anchor="ctr"/>
-          <a:lstStyle/>
-          <a:p>
-            <a:pPr algn="ctr"/>
-          </a:p>
-        </p:txBody>
-      </p:sp>
-      <p:sp>
-        <p:nvSpPr>
-          <p:cNvPr id="11" name="TextBox 10"/>
-          <p:cNvSpPr txBox="1"/>
-          <p:nvPr/>
-        </p:nvSpPr>
-        <p:spPr>
-          <a:xfrm>
-            <a:off x="4754880" y="1252728"/>
-            <a:ext cx="3474720" cy="457200"/>
-          </a:xfrm>
-          <a:prstGeom prst="rect">
-            <a:avLst/>
-          </a:prstGeom>
-          <a:noFill/>
-        </p:spPr>
-        <p:txBody>
-          <a:bodyPr wrap="none">
-            <a:spAutoFit/>
-          </a:bodyPr>
-          <a:lstStyle/>
-          <a:p>
-            <a:r>
-              <a:rPr sz="1100" b="1" i="0">
-                <a:solidFill>
-                  <a:srgbClr val="FFFFFF"/>
-                </a:solidFill>
-                <a:latin typeface="Calibri"/>
-              </a:rPr>
-              <a:t>Phase 2</a:t>
-            </a:r>
-          </a:p>
-          <a:p>
-            <a:r>
-              <a:rPr sz="1500" b="1" i="0">
-                <a:solidFill>
-                  <a:srgbClr val="FFFFFF"/>
-                </a:solidFill>
-                <a:latin typeface="Calibri"/>
-              </a:rPr>
-              <a:t>Real data</a:t>
-            </a:r>
-          </a:p>
-        </p:txBody>
-      </p:sp>
-      <p:sp>
-        <p:nvSpPr>
-          <p:cNvPr id="12" name="TextBox 11"/>
-          <p:cNvSpPr txBox="1"/>
-          <p:nvPr/>
-        </p:nvSpPr>
-        <p:spPr>
-          <a:xfrm>
-            <a:off x="4754880" y="1874520"/>
-            <a:ext cx="3474720" cy="274320"/>
-          </a:xfrm>
-          <a:prstGeom prst="rect">
-            <a:avLst/>
-          </a:prstGeom>
-          <a:noFill/>
-        </p:spPr>
-        <p:txBody>
-          <a:bodyPr wrap="none">
-            <a:spAutoFit/>
-          </a:bodyPr>
-          <a:lstStyle/>
-          <a:p>
-            <a:r>
-              <a:rPr sz="1000" b="1" i="0">
-                <a:solidFill>
-                  <a:srgbClr val="D97306"/>
-                </a:solidFill>
-                <a:latin typeface="Calibri"/>
-              </a:rPr>
-              <a:t>IN FLIGHT</a:t>
-            </a:r>
-          </a:p>
-        </p:txBody>
-      </p:sp>
-      <p:sp>
-        <p:nvSpPr>
-          <p:cNvPr id="13" name="TextBox 12"/>
-          <p:cNvSpPr txBox="1"/>
-          <p:nvPr/>
-        </p:nvSpPr>
-        <p:spPr>
-          <a:xfrm>
-            <a:off x="4800600" y="2240280"/>
-            <a:ext cx="3383280" cy="2468880"/>
-          </a:xfrm>
-          <a:prstGeom prst="rect">
-            <a:avLst/>
-          </a:prstGeom>
-          <a:noFill/>
-        </p:spPr>
-        <p:txBody>
-          <a:bodyPr wrap="square">
-            <a:spAutoFit/>
-          </a:bodyPr>
-          <a:lstStyle/>
+              <a:rPr sz="1700" b="1" i="0">
+                <a:solidFill>
+                  <a:srgbClr val="0F6E7A"/>
+                </a:solidFill>
+                <a:latin typeface="Calibri"/>
+              </a:rPr>
+              <a:t>Observability</a:t>
+            </a:r>
+          </a:p>
           <a:p>
             <a:pPr>
               <a:lnSpc>
-                <a:spcPct val="125000"/>
+                <a:spcPct val="120000"/>
               </a:lnSpc>
+              <a:spcAft>
+                <a:spcPts val="300"/>
+              </a:spcAft>
             </a:pPr>
             <a:r>
-              <a:rPr sz="1200" b="1" i="0">
+              <a:rPr sz="1300" b="1" i="0">
                 <a:solidFill>
                   <a:srgbClr val="D97306"/>
                 </a:solidFill>
@@ -4976,23 +4622,26 @@
               <a:t>•  </a:t>
             </a:r>
             <a:r>
-              <a:rPr sz="1200" b="0" i="0">
+              <a:rPr sz="1300" b="0" i="0">
                 <a:solidFill>
                   <a:srgbClr val="333F52"/>
                 </a:solidFill>
                 <a:latin typeface="Calibri"/>
               </a:rPr>
-              <a:t>Data contract sign-off</a:t>
+              <a:t>Cloud Logging, Cloud Trace, and Cloud Monitoring out of the box — one pane of glass for the on-call engineer.</a:t>
             </a:r>
           </a:p>
           <a:p>
             <a:pPr>
               <a:lnSpc>
-                <a:spcPct val="125000"/>
+                <a:spcPct val="120000"/>
               </a:lnSpc>
+              <a:spcAft>
+                <a:spcPts val="300"/>
+              </a:spcAft>
             </a:pPr>
             <a:r>
-              <a:rPr sz="1200" b="1" i="0">
+              <a:rPr sz="1300" b="1" i="0">
                 <a:solidFill>
                   <a:srgbClr val="D97306"/>
                 </a:solidFill>
@@ -5001,48 +4650,45 @@
               <a:t>•  </a:t>
             </a:r>
             <a:r>
-              <a:rPr sz="1200" b="0" i="0">
+              <a:rPr sz="1300" b="0" i="0">
                 <a:solidFill>
                   <a:srgbClr val="333F52"/>
                 </a:solidFill>
                 <a:latin typeface="Calibri"/>
               </a:rPr>
-              <a:t>Ingestion of client feeds</a:t>
+              <a:t>Four alert policies pre-wired: latency, error rate, breaker trips, anomaly state.</a:t>
             </a:r>
           </a:p>
           <a:p>
             <a:pPr>
               <a:lnSpc>
-                <a:spcPct val="125000"/>
+                <a:spcPct val="120000"/>
               </a:lnSpc>
+              <a:spcAft>
+                <a:spcPts val="600"/>
+              </a:spcAft>
             </a:pPr>
             <a:r>
-              <a:rPr sz="1200" b="1" i="0">
-                <a:solidFill>
-                  <a:srgbClr val="D97306"/>
-                </a:solidFill>
-                <a:latin typeface="Calibri"/>
-              </a:rPr>
-              <a:t>•  </a:t>
-            </a:r>
-            <a:r>
-              <a:rPr sz="1200" b="0" i="0">
-                <a:solidFill>
-                  <a:srgbClr val="333F52"/>
-                </a:solidFill>
-                <a:latin typeface="Calibri"/>
-              </a:rPr>
-              <a:t>Retrain on real data</a:t>
+              <a:rPr sz="1700" b="1" i="0">
+                <a:solidFill>
+                  <a:srgbClr val="0F6E7A"/>
+                </a:solidFill>
+                <a:latin typeface="Calibri"/>
+              </a:rPr>
+              <a:t>Runbooks committed to the repository</a:t>
             </a:r>
           </a:p>
           <a:p>
             <a:pPr>
               <a:lnSpc>
-                <a:spcPct val="125000"/>
+                <a:spcPct val="120000"/>
               </a:lnSpc>
+              <a:spcAft>
+                <a:spcPts val="300"/>
+              </a:spcAft>
             </a:pPr>
             <a:r>
-              <a:rPr sz="1200" b="1" i="0">
+              <a:rPr sz="1300" b="1" i="0">
                 <a:solidFill>
                   <a:srgbClr val="D97306"/>
                 </a:solidFill>
@@ -5051,347 +4697,67 @@
               <a:t>•  </a:t>
             </a:r>
             <a:r>
-              <a:rPr sz="1200" b="0" i="0">
+              <a:rPr sz="1300" b="0" i="0">
                 <a:solidFill>
                   <a:srgbClr val="333F52"/>
                 </a:solidFill>
                 <a:latin typeface="Calibri"/>
               </a:rPr>
-              <a:t>Canary 10% → 100%</a:t>
-            </a:r>
-          </a:p>
-        </p:txBody>
-      </p:sp>
-      <p:sp>
-        <p:nvSpPr>
-          <p:cNvPr id="14" name="Rounded Rectangle 13"/>
-          <p:cNvSpPr/>
-          <p:nvPr/>
-        </p:nvSpPr>
-        <p:spPr>
-          <a:xfrm>
-            <a:off x="8641080" y="1188720"/>
-            <a:ext cx="3840480" cy="3657600"/>
-          </a:xfrm>
-          <a:prstGeom prst="roundRect">
-            <a:avLst>
-              <a:gd name="adj" fmla="val 5000"/>
-            </a:avLst>
-          </a:prstGeom>
-          <a:solidFill>
-            <a:srgbClr val="FFFFFF"/>
-          </a:solidFill>
-          <a:ln w="9525">
-            <a:solidFill>
-              <a:srgbClr val="D7DBE3"/>
-            </a:solidFill>
-          </a:ln>
-        </p:spPr>
-        <p:style>
-          <a:lnRef idx="1">
-            <a:schemeClr val="accent1"/>
-          </a:lnRef>
-          <a:fillRef idx="3">
-            <a:schemeClr val="accent1"/>
-          </a:fillRef>
-          <a:effectRef idx="2">
-            <a:schemeClr val="accent1"/>
-          </a:effectRef>
-          <a:fontRef idx="minor">
-            <a:schemeClr val="lt1"/>
-          </a:fontRef>
-        </p:style>
-        <p:txBody>
-          <a:bodyPr rtlCol="0" anchor="ctr"/>
-          <a:lstStyle/>
-          <a:p>
-            <a:pPr algn="ctr"/>
-          </a:p>
-        </p:txBody>
-      </p:sp>
-      <p:sp>
-        <p:nvSpPr>
-          <p:cNvPr id="15" name="Rectangle 14"/>
-          <p:cNvSpPr/>
-          <p:nvPr/>
-        </p:nvSpPr>
-        <p:spPr>
-          <a:xfrm>
-            <a:off x="8641080" y="1188720"/>
-            <a:ext cx="3840480" cy="502920"/>
-          </a:xfrm>
-          <a:prstGeom prst="rect">
-            <a:avLst/>
-          </a:prstGeom>
-          <a:solidFill>
-            <a:srgbClr val="0F6E7A"/>
-          </a:solidFill>
-          <a:ln>
-            <a:noFill/>
-          </a:ln>
-        </p:spPr>
-        <p:style>
-          <a:lnRef idx="1">
-            <a:schemeClr val="accent1"/>
-          </a:lnRef>
-          <a:fillRef idx="3">
-            <a:schemeClr val="accent1"/>
-          </a:fillRef>
-          <a:effectRef idx="2">
-            <a:schemeClr val="accent1"/>
-          </a:effectRef>
-          <a:fontRef idx="minor">
-            <a:schemeClr val="lt1"/>
-          </a:fontRef>
-        </p:style>
-        <p:txBody>
-          <a:bodyPr rtlCol="0" anchor="ctr"/>
-          <a:lstStyle/>
-          <a:p>
-            <a:pPr algn="ctr"/>
-          </a:p>
-        </p:txBody>
-      </p:sp>
-      <p:sp>
-        <p:nvSpPr>
-          <p:cNvPr id="16" name="TextBox 15"/>
-          <p:cNvSpPr txBox="1"/>
-          <p:nvPr/>
-        </p:nvSpPr>
-        <p:spPr>
-          <a:xfrm>
-            <a:off x="8823960" y="1252728"/>
-            <a:ext cx="3474720" cy="457200"/>
-          </a:xfrm>
-          <a:prstGeom prst="rect">
-            <a:avLst/>
-          </a:prstGeom>
-          <a:noFill/>
-        </p:spPr>
-        <p:txBody>
-          <a:bodyPr wrap="none">
-            <a:spAutoFit/>
-          </a:bodyPr>
-          <a:lstStyle/>
-          <a:p>
-            <a:r>
-              <a:rPr sz="1100" b="1" i="0">
-                <a:solidFill>
-                  <a:srgbClr val="FFFFFF"/>
-                </a:solidFill>
-                <a:latin typeface="Calibri"/>
-              </a:rPr>
-              <a:t>Phase 3</a:t>
-            </a:r>
-          </a:p>
-          <a:p>
-            <a:r>
-              <a:rPr sz="1500" b="1" i="0">
-                <a:solidFill>
-                  <a:srgbClr val="FFFFFF"/>
-                </a:solidFill>
-                <a:latin typeface="Calibri"/>
-              </a:rPr>
-              <a:t>Production</a:t>
-            </a:r>
-          </a:p>
-        </p:txBody>
-      </p:sp>
-      <p:sp>
-        <p:nvSpPr>
-          <p:cNvPr id="17" name="TextBox 16"/>
-          <p:cNvSpPr txBox="1"/>
-          <p:nvPr/>
-        </p:nvSpPr>
-        <p:spPr>
-          <a:xfrm>
-            <a:off x="8823960" y="1874520"/>
-            <a:ext cx="3474720" cy="274320"/>
-          </a:xfrm>
-          <a:prstGeom prst="rect">
-            <a:avLst/>
-          </a:prstGeom>
-          <a:noFill/>
-        </p:spPr>
-        <p:txBody>
-          <a:bodyPr wrap="none">
-            <a:spAutoFit/>
-          </a:bodyPr>
-          <a:lstStyle/>
-          <a:p>
-            <a:r>
-              <a:rPr sz="1000" b="1" i="0">
-                <a:solidFill>
-                  <a:srgbClr val="0F6E7A"/>
-                </a:solidFill>
-                <a:latin typeface="Calibri"/>
-              </a:rPr>
-              <a:t>READY TO START</a:t>
-            </a:r>
-          </a:p>
-        </p:txBody>
-      </p:sp>
-      <p:sp>
-        <p:nvSpPr>
-          <p:cNvPr id="18" name="TextBox 17"/>
-          <p:cNvSpPr txBox="1"/>
-          <p:nvPr/>
-        </p:nvSpPr>
-        <p:spPr>
-          <a:xfrm>
-            <a:off x="8869680" y="2240280"/>
-            <a:ext cx="3383280" cy="2468880"/>
-          </a:xfrm>
-          <a:prstGeom prst="rect">
-            <a:avLst/>
-          </a:prstGeom>
-          <a:noFill/>
-        </p:spPr>
-        <p:txBody>
-          <a:bodyPr wrap="square">
-            <a:spAutoFit/>
-          </a:bodyPr>
-          <a:lstStyle/>
+              <a:t>Reset the breaker · Roll back a model version · Scale Vertex to zero for cost · Rotate a secret · Migrate the BigQuery schema.</a:t>
+            </a:r>
+          </a:p>
           <a:p>
             <a:pPr>
               <a:lnSpc>
-                <a:spcPct val="125000"/>
+                <a:spcPct val="120000"/>
               </a:lnSpc>
+              <a:spcAft>
+                <a:spcPts val="600"/>
+              </a:spcAft>
             </a:pPr>
             <a:r>
-              <a:rPr sz="1200" b="1" i="0">
+              <a:rPr sz="1700" b="1" i="0">
                 <a:solidFill>
                   <a:srgbClr val="0F6E7A"/>
                 </a:solidFill>
                 <a:latin typeface="Calibri"/>
               </a:rPr>
-              <a:t>•  </a:t>
-            </a:r>
-            <a:r>
-              <a:rPr sz="1200" b="0" i="0">
-                <a:solidFill>
-                  <a:srgbClr val="333F52"/>
-                </a:solidFill>
-                <a:latin typeface="Calibri"/>
-              </a:rPr>
-              <a:t>Prod Terraform workspace</a:t>
+              <a:t>Rollback</a:t>
             </a:r>
           </a:p>
           <a:p>
             <a:pPr>
               <a:lnSpc>
-                <a:spcPct val="125000"/>
+                <a:spcPct val="120000"/>
               </a:lnSpc>
+              <a:spcAft>
+                <a:spcPts val="300"/>
+              </a:spcAft>
             </a:pPr>
             <a:r>
-              <a:rPr sz="1200" b="1" i="0">
-                <a:solidFill>
-                  <a:srgbClr val="0F6E7A"/>
+              <a:rPr sz="1300" b="1" i="0">
+                <a:solidFill>
+                  <a:srgbClr val="D97306"/>
                 </a:solidFill>
                 <a:latin typeface="Calibri"/>
               </a:rPr>
               <a:t>•  </a:t>
             </a:r>
             <a:r>
-              <a:rPr sz="1200" b="0" i="0">
+              <a:rPr sz="1300" b="0" i="0">
                 <a:solidFill>
                   <a:srgbClr val="333F52"/>
                 </a:solidFill>
                 <a:latin typeface="Calibri"/>
               </a:rPr>
-              <a:t>Prod CD with approvals</a:t>
-            </a:r>
-          </a:p>
-          <a:p>
-            <a:pPr>
-              <a:lnSpc>
-                <a:spcPct val="125000"/>
-              </a:lnSpc>
-            </a:pPr>
-            <a:r>
-              <a:rPr sz="1200" b="1" i="0">
-                <a:solidFill>
-                  <a:srgbClr val="0F6E7A"/>
-                </a:solidFill>
-                <a:latin typeface="Calibri"/>
-              </a:rPr>
-              <a:t>•  </a:t>
-            </a:r>
-            <a:r>
-              <a:rPr sz="1200" b="0" i="0">
-                <a:solidFill>
-                  <a:srgbClr val="333F52"/>
-                </a:solidFill>
-                <a:latin typeface="Calibri"/>
-              </a:rPr>
-              <a:t>Right-sized Vertex</a:t>
-            </a:r>
-          </a:p>
-          <a:p>
-            <a:pPr>
-              <a:lnSpc>
-                <a:spcPct val="125000"/>
-              </a:lnSpc>
-            </a:pPr>
-            <a:r>
-              <a:rPr sz="1200" b="1" i="0">
-                <a:solidFill>
-                  <a:srgbClr val="0F6E7A"/>
-                </a:solidFill>
-                <a:latin typeface="Calibri"/>
-              </a:rPr>
-              <a:t>•  </a:t>
-            </a:r>
-            <a:r>
-              <a:rPr sz="1200" b="0" i="0">
-                <a:solidFill>
-                  <a:srgbClr val="333F52"/>
-                </a:solidFill>
-                <a:latin typeface="Calibri"/>
-              </a:rPr>
-              <a:t>Sign-off and handover</a:t>
-            </a:r>
-          </a:p>
-        </p:txBody>
-      </p:sp>
-      <p:sp>
-        <p:nvSpPr>
-          <p:cNvPr id="19" name="TextBox 18"/>
-          <p:cNvSpPr txBox="1"/>
-          <p:nvPr/>
-        </p:nvSpPr>
-        <p:spPr>
-          <a:xfrm>
-            <a:off x="502920" y="4983480"/>
-            <a:ext cx="11185855" cy="640080"/>
-          </a:xfrm>
-          <a:prstGeom prst="rect">
-            <a:avLst/>
-          </a:prstGeom>
-          <a:noFill/>
-        </p:spPr>
-        <p:txBody>
-          <a:bodyPr wrap="none">
-            <a:spAutoFit/>
-          </a:bodyPr>
-          <a:lstStyle/>
-          <a:p>
-            <a:pPr algn="ctr"/>
-            <a:r>
-              <a:rPr sz="1100" b="0" i="1">
-                <a:solidFill>
-                  <a:srgbClr val="6B7380"/>
-                </a:solidFill>
-                <a:latin typeface="Calibri"/>
-              </a:rPr>
-              <a:t>Indicative timeline: ~8 weeks from kickoff, gated on data access. Each phase ends in a working, demoable artefact.</a:t>
-            </a:r>
-          </a:p>
-        </p:txBody>
-      </p:sp>
-      <p:sp>
-        <p:nvSpPr>
-          <p:cNvPr id="20" name="Rectangle 19"/>
+              <a:t>Vertex traffic-split rollback to the previous model version is a single command; Cloud Run revisions are pinned and revertible.</a:t>
+            </a:r>
+          </a:p>
+        </p:txBody>
+      </p:sp>
+      <p:sp>
+        <p:nvSpPr>
+          <p:cNvPr id="5" name="Rectangle 4"/>
           <p:cNvSpPr/>
           <p:nvPr/>
         </p:nvSpPr>
@@ -5443,7 +4809,7 @@
       </p:sp>
       <p:sp>
         <p:nvSpPr>
-          <p:cNvPr id="21" name="TextBox 20"/>
+          <p:cNvPr id="6" name="TextBox 5"/>
           <p:cNvSpPr txBox="1"/>
           <p:nvPr/>
         </p:nvSpPr>
@@ -5471,7 +4837,7 @@
                 </a:solidFill>
                 <a:latin typeface="Calibri"/>
               </a:rPr>
-              <a:t>12 / 14</a:t>
+              <a:t>12 / 15</a:t>
             </a:r>
           </a:p>
         </p:txBody>
@@ -5541,7 +4907,7 @@
                 </a:solidFill>
                 <a:latin typeface="Calibri"/>
               </a:rPr>
-              <a:t>NEXT STEPS TO UNLOCK VALUE</a:t>
+              <a:t>FROM HERE TO PRODUCTION</a:t>
             </a:r>
           </a:p>
           <a:p>
@@ -5552,7 +4918,7 @@
                 </a:solidFill>
                 <a:latin typeface="Calibri"/>
               </a:rPr>
-              <a:t>What we need from you</a:t>
+              <a:t>Delivery roadmap</a:t>
             </a:r>
           </a:p>
         </p:txBody>
@@ -5602,14 +4968,183 @@
       </p:sp>
       <p:sp>
         <p:nvSpPr>
-          <p:cNvPr id="4" name="TextBox 3"/>
+          <p:cNvPr id="4" name="Rounded Rectangle 3"/>
+          <p:cNvSpPr/>
+          <p:nvPr/>
+        </p:nvSpPr>
+        <p:spPr>
+          <a:xfrm>
+            <a:off x="502920" y="1188720"/>
+            <a:ext cx="3840480" cy="3657600"/>
+          </a:xfrm>
+          <a:prstGeom prst="roundRect">
+            <a:avLst>
+              <a:gd name="adj" fmla="val 5000"/>
+            </a:avLst>
+          </a:prstGeom>
+          <a:solidFill>
+            <a:srgbClr val="FFFFFF"/>
+          </a:solidFill>
+          <a:ln w="9525">
+            <a:solidFill>
+              <a:srgbClr val="D7DBE3"/>
+            </a:solidFill>
+          </a:ln>
+        </p:spPr>
+        <p:style>
+          <a:lnRef idx="1">
+            <a:schemeClr val="accent1"/>
+          </a:lnRef>
+          <a:fillRef idx="3">
+            <a:schemeClr val="accent1"/>
+          </a:fillRef>
+          <a:effectRef idx="2">
+            <a:schemeClr val="accent1"/>
+          </a:effectRef>
+          <a:fontRef idx="minor">
+            <a:schemeClr val="lt1"/>
+          </a:fontRef>
+        </p:style>
+        <p:txBody>
+          <a:bodyPr rtlCol="0" anchor="ctr"/>
+          <a:lstStyle/>
+          <a:p>
+            <a:pPr algn="ctr"/>
+          </a:p>
+        </p:txBody>
+      </p:sp>
+      <p:sp>
+        <p:nvSpPr>
+          <p:cNvPr id="5" name="Rectangle 4"/>
+          <p:cNvSpPr/>
+          <p:nvPr/>
+        </p:nvSpPr>
+        <p:spPr>
+          <a:xfrm>
+            <a:off x="502920" y="1188720"/>
+            <a:ext cx="3840480" cy="502920"/>
+          </a:xfrm>
+          <a:prstGeom prst="rect">
+            <a:avLst/>
+          </a:prstGeom>
+          <a:solidFill>
+            <a:srgbClr val="1F8A4F"/>
+          </a:solidFill>
+          <a:ln>
+            <a:noFill/>
+          </a:ln>
+        </p:spPr>
+        <p:style>
+          <a:lnRef idx="1">
+            <a:schemeClr val="accent1"/>
+          </a:lnRef>
+          <a:fillRef idx="3">
+            <a:schemeClr val="accent1"/>
+          </a:fillRef>
+          <a:effectRef idx="2">
+            <a:schemeClr val="accent1"/>
+          </a:effectRef>
+          <a:fontRef idx="minor">
+            <a:schemeClr val="lt1"/>
+          </a:fontRef>
+        </p:style>
+        <p:txBody>
+          <a:bodyPr rtlCol="0" anchor="ctr"/>
+          <a:lstStyle/>
+          <a:p>
+            <a:pPr algn="ctr"/>
+          </a:p>
+        </p:txBody>
+      </p:sp>
+      <p:sp>
+        <p:nvSpPr>
+          <p:cNvPr id="6" name="TextBox 5"/>
           <p:cNvSpPr txBox="1"/>
           <p:nvPr/>
         </p:nvSpPr>
         <p:spPr>
           <a:xfrm>
-            <a:off x="548640" y="1143000"/>
-            <a:ext cx="11094415" cy="5303520"/>
+            <a:off x="685800" y="1252728"/>
+            <a:ext cx="3474720" cy="457200"/>
+          </a:xfrm>
+          <a:prstGeom prst="rect">
+            <a:avLst/>
+          </a:prstGeom>
+          <a:noFill/>
+        </p:spPr>
+        <p:txBody>
+          <a:bodyPr wrap="none">
+            <a:spAutoFit/>
+          </a:bodyPr>
+          <a:lstStyle/>
+          <a:p>
+            <a:r>
+              <a:rPr sz="1100" b="1" i="0">
+                <a:solidFill>
+                  <a:srgbClr val="FFFFFF"/>
+                </a:solidFill>
+                <a:latin typeface="Calibri"/>
+              </a:rPr>
+              <a:t>Phase 1</a:t>
+            </a:r>
+          </a:p>
+          <a:p>
+            <a:r>
+              <a:rPr sz="1500" b="1" i="0">
+                <a:solidFill>
+                  <a:srgbClr val="FFFFFF"/>
+                </a:solidFill>
+                <a:latin typeface="Calibri"/>
+              </a:rPr>
+              <a:t>Staging hardened</a:t>
+            </a:r>
+          </a:p>
+        </p:txBody>
+      </p:sp>
+      <p:sp>
+        <p:nvSpPr>
+          <p:cNvPr id="7" name="TextBox 6"/>
+          <p:cNvSpPr txBox="1"/>
+          <p:nvPr/>
+        </p:nvSpPr>
+        <p:spPr>
+          <a:xfrm>
+            <a:off x="685800" y="1874520"/>
+            <a:ext cx="3474720" cy="274320"/>
+          </a:xfrm>
+          <a:prstGeom prst="rect">
+            <a:avLst/>
+          </a:prstGeom>
+          <a:noFill/>
+        </p:spPr>
+        <p:txBody>
+          <a:bodyPr wrap="none">
+            <a:spAutoFit/>
+          </a:bodyPr>
+          <a:lstStyle/>
+          <a:p>
+            <a:r>
+              <a:rPr sz="1000" b="1" i="0">
+                <a:solidFill>
+                  <a:srgbClr val="1F8A4F"/>
+                </a:solidFill>
+                <a:latin typeface="Calibri"/>
+              </a:rPr>
+              <a:t>COMPLETE</a:t>
+            </a:r>
+          </a:p>
+        </p:txBody>
+      </p:sp>
+      <p:sp>
+        <p:nvSpPr>
+          <p:cNvPr id="8" name="TextBox 7"/>
+          <p:cNvSpPr txBox="1"/>
+          <p:nvPr/>
+        </p:nvSpPr>
+        <p:spPr>
+          <a:xfrm>
+            <a:off x="731520" y="2240280"/>
+            <a:ext cx="3383280" cy="2468880"/>
           </a:xfrm>
           <a:prstGeom prst="rect">
             <a:avLst/>
@@ -5624,136 +5159,328 @@
           <a:p>
             <a:pPr>
               <a:lnSpc>
-                <a:spcPct val="120000"/>
+                <a:spcPct val="125000"/>
               </a:lnSpc>
-              <a:spcAft>
-                <a:spcPts val="600"/>
-              </a:spcAft>
             </a:pPr>
             <a:r>
-              <a:rPr sz="1800" b="1" i="0">
-                <a:solidFill>
-                  <a:srgbClr val="0F6E7A"/>
-                </a:solidFill>
-                <a:latin typeface="Calibri"/>
-              </a:rPr>
-              <a:t>Three decisions</a:t>
+              <a:rPr sz="1200" b="1" i="0">
+                <a:solidFill>
+                  <a:srgbClr val="1F8A4F"/>
+                </a:solidFill>
+                <a:latin typeface="Calibri"/>
+              </a:rPr>
+              <a:t>✓  </a:t>
+            </a:r>
+            <a:r>
+              <a:rPr sz="1200" b="0" i="0">
+                <a:solidFill>
+                  <a:srgbClr val="333F52"/>
+                </a:solidFill>
+                <a:latin typeface="Calibri"/>
+              </a:rPr>
+              <a:t>Real explain path live</a:t>
             </a:r>
           </a:p>
           <a:p>
             <a:pPr>
               <a:lnSpc>
-                <a:spcPct val="120000"/>
+                <a:spcPct val="125000"/>
               </a:lnSpc>
-              <a:spcAft>
-                <a:spcPts val="300"/>
-              </a:spcAft>
             </a:pPr>
             <a:r>
-              <a:rPr sz="1400" b="1" i="0">
-                <a:solidFill>
-                  <a:srgbClr val="D97306"/>
-                </a:solidFill>
-                <a:latin typeface="Calibri"/>
-              </a:rPr>
-              <a:t>•  </a:t>
-            </a:r>
-            <a:r>
-              <a:rPr sz="1400" b="0" i="0">
+              <a:rPr sz="1200" b="1" i="0">
+                <a:solidFill>
+                  <a:srgbClr val="1F8A4F"/>
+                </a:solidFill>
+                <a:latin typeface="Calibri"/>
+              </a:rPr>
+              <a:t>✓  </a:t>
+            </a:r>
+            <a:r>
+              <a:rPr sz="1200" b="0" i="0">
                 <a:solidFill>
                   <a:srgbClr val="333F52"/>
                 </a:solidFill>
                 <a:latin typeface="Calibri"/>
               </a:rPr>
-              <a:t>Sign off the data contract — schema, freshness, and PII handling for click and sales-ledger feeds.</a:t>
+              <a:t>Sliding anomaly window</a:t>
             </a:r>
           </a:p>
           <a:p>
             <a:pPr>
               <a:lnSpc>
-                <a:spcPct val="120000"/>
+                <a:spcPct val="125000"/>
               </a:lnSpc>
-              <a:spcAft>
-                <a:spcPts val="300"/>
-              </a:spcAft>
             </a:pPr>
             <a:r>
-              <a:rPr sz="1400" b="1" i="0">
-                <a:solidFill>
-                  <a:srgbClr val="D97306"/>
-                </a:solidFill>
-                <a:latin typeface="Calibri"/>
-              </a:rPr>
-              <a:t>•  </a:t>
-            </a:r>
-            <a:r>
-              <a:rPr sz="1400" b="0" i="0">
+              <a:rPr sz="1200" b="1" i="0">
+                <a:solidFill>
+                  <a:srgbClr val="1F8A4F"/>
+                </a:solidFill>
+                <a:latin typeface="Calibri"/>
+              </a:rPr>
+              <a:t>✓  </a:t>
+            </a:r>
+            <a:r>
+              <a:rPr sz="1200" b="0" i="0">
                 <a:solidFill>
                   <a:srgbClr val="333F52"/>
                 </a:solidFill>
                 <a:latin typeface="Calibri"/>
               </a:rPr>
-              <a:t>Nominate one data owner and one on-call engineer on your side for joint working sessions.</a:t>
+              <a:t>IaC for IAM</a:t>
             </a:r>
           </a:p>
           <a:p>
             <a:pPr>
               <a:lnSpc>
-                <a:spcPct val="120000"/>
+                <a:spcPct val="125000"/>
               </a:lnSpc>
-              <a:spcAft>
-                <a:spcPts val="300"/>
-              </a:spcAft>
             </a:pPr>
             <a:r>
-              <a:rPr sz="1400" b="1" i="0">
+              <a:rPr sz="1200" b="1" i="0">
+                <a:solidFill>
+                  <a:srgbClr val="1F8A4F"/>
+                </a:solidFill>
+                <a:latin typeface="Calibri"/>
+              </a:rPr>
+              <a:t>✓  </a:t>
+            </a:r>
+            <a:r>
+              <a:rPr sz="1200" b="0" i="0">
+                <a:solidFill>
+                  <a:srgbClr val="333F52"/>
+                </a:solidFill>
+                <a:latin typeface="Calibri"/>
+              </a:rPr>
+              <a:t>Load profile captured</a:t>
+            </a:r>
+          </a:p>
+        </p:txBody>
+      </p:sp>
+      <p:sp>
+        <p:nvSpPr>
+          <p:cNvPr id="9" name="Rounded Rectangle 8"/>
+          <p:cNvSpPr/>
+          <p:nvPr/>
+        </p:nvSpPr>
+        <p:spPr>
+          <a:xfrm>
+            <a:off x="4572000" y="1188720"/>
+            <a:ext cx="3840480" cy="3657600"/>
+          </a:xfrm>
+          <a:prstGeom prst="roundRect">
+            <a:avLst>
+              <a:gd name="adj" fmla="val 5000"/>
+            </a:avLst>
+          </a:prstGeom>
+          <a:solidFill>
+            <a:srgbClr val="FFFFFF"/>
+          </a:solidFill>
+          <a:ln w="9525">
+            <a:solidFill>
+              <a:srgbClr val="D7DBE3"/>
+            </a:solidFill>
+          </a:ln>
+        </p:spPr>
+        <p:style>
+          <a:lnRef idx="1">
+            <a:schemeClr val="accent1"/>
+          </a:lnRef>
+          <a:fillRef idx="3">
+            <a:schemeClr val="accent1"/>
+          </a:fillRef>
+          <a:effectRef idx="2">
+            <a:schemeClr val="accent1"/>
+          </a:effectRef>
+          <a:fontRef idx="minor">
+            <a:schemeClr val="lt1"/>
+          </a:fontRef>
+        </p:style>
+        <p:txBody>
+          <a:bodyPr rtlCol="0" anchor="ctr"/>
+          <a:lstStyle/>
+          <a:p>
+            <a:pPr algn="ctr"/>
+          </a:p>
+        </p:txBody>
+      </p:sp>
+      <p:sp>
+        <p:nvSpPr>
+          <p:cNvPr id="10" name="Rectangle 9"/>
+          <p:cNvSpPr/>
+          <p:nvPr/>
+        </p:nvSpPr>
+        <p:spPr>
+          <a:xfrm>
+            <a:off x="4572000" y="1188720"/>
+            <a:ext cx="3840480" cy="502920"/>
+          </a:xfrm>
+          <a:prstGeom prst="rect">
+            <a:avLst/>
+          </a:prstGeom>
+          <a:solidFill>
+            <a:srgbClr val="D97306"/>
+          </a:solidFill>
+          <a:ln>
+            <a:noFill/>
+          </a:ln>
+        </p:spPr>
+        <p:style>
+          <a:lnRef idx="1">
+            <a:schemeClr val="accent1"/>
+          </a:lnRef>
+          <a:fillRef idx="3">
+            <a:schemeClr val="accent1"/>
+          </a:fillRef>
+          <a:effectRef idx="2">
+            <a:schemeClr val="accent1"/>
+          </a:effectRef>
+          <a:fontRef idx="minor">
+            <a:schemeClr val="lt1"/>
+          </a:fontRef>
+        </p:style>
+        <p:txBody>
+          <a:bodyPr rtlCol="0" anchor="ctr"/>
+          <a:lstStyle/>
+          <a:p>
+            <a:pPr algn="ctr"/>
+          </a:p>
+        </p:txBody>
+      </p:sp>
+      <p:sp>
+        <p:nvSpPr>
+          <p:cNvPr id="11" name="TextBox 10"/>
+          <p:cNvSpPr txBox="1"/>
+          <p:nvPr/>
+        </p:nvSpPr>
+        <p:spPr>
+          <a:xfrm>
+            <a:off x="4754880" y="1252728"/>
+            <a:ext cx="3474720" cy="457200"/>
+          </a:xfrm>
+          <a:prstGeom prst="rect">
+            <a:avLst/>
+          </a:prstGeom>
+          <a:noFill/>
+        </p:spPr>
+        <p:txBody>
+          <a:bodyPr wrap="none">
+            <a:spAutoFit/>
+          </a:bodyPr>
+          <a:lstStyle/>
+          <a:p>
+            <a:r>
+              <a:rPr sz="1100" b="1" i="0">
+                <a:solidFill>
+                  <a:srgbClr val="FFFFFF"/>
+                </a:solidFill>
+                <a:latin typeface="Calibri"/>
+              </a:rPr>
+              <a:t>Phase 2</a:t>
+            </a:r>
+          </a:p>
+          <a:p>
+            <a:r>
+              <a:rPr sz="1500" b="1" i="0">
+                <a:solidFill>
+                  <a:srgbClr val="FFFFFF"/>
+                </a:solidFill>
+                <a:latin typeface="Calibri"/>
+              </a:rPr>
+              <a:t>Real data</a:t>
+            </a:r>
+          </a:p>
+        </p:txBody>
+      </p:sp>
+      <p:sp>
+        <p:nvSpPr>
+          <p:cNvPr id="12" name="TextBox 11"/>
+          <p:cNvSpPr txBox="1"/>
+          <p:nvPr/>
+        </p:nvSpPr>
+        <p:spPr>
+          <a:xfrm>
+            <a:off x="4754880" y="1874520"/>
+            <a:ext cx="3474720" cy="274320"/>
+          </a:xfrm>
+          <a:prstGeom prst="rect">
+            <a:avLst/>
+          </a:prstGeom>
+          <a:noFill/>
+        </p:spPr>
+        <p:txBody>
+          <a:bodyPr wrap="none">
+            <a:spAutoFit/>
+          </a:bodyPr>
+          <a:lstStyle/>
+          <a:p>
+            <a:r>
+              <a:rPr sz="1000" b="1" i="0">
                 <a:solidFill>
                   <a:srgbClr val="D97306"/>
                 </a:solidFill>
                 <a:latin typeface="Calibri"/>
               </a:rPr>
-              <a:t>•  </a:t>
-            </a:r>
-            <a:r>
-              <a:rPr sz="1400" b="0" i="0">
-                <a:solidFill>
-                  <a:srgbClr val="333F52"/>
-                </a:solidFill>
-                <a:latin typeface="Calibri"/>
-              </a:rPr>
-              <a:t>Confirm production GCP project (or authorise a prod-isolated namespace in the existing one).</a:t>
-            </a:r>
-          </a:p>
+              <a:t>IN FLIGHT</a:t>
+            </a:r>
+          </a:p>
+        </p:txBody>
+      </p:sp>
+      <p:sp>
+        <p:nvSpPr>
+          <p:cNvPr id="13" name="TextBox 12"/>
+          <p:cNvSpPr txBox="1"/>
+          <p:nvPr/>
+        </p:nvSpPr>
+        <p:spPr>
+          <a:xfrm>
+            <a:off x="4800600" y="2240280"/>
+            <a:ext cx="3383280" cy="2468880"/>
+          </a:xfrm>
+          <a:prstGeom prst="rect">
+            <a:avLst/>
+          </a:prstGeom>
+          <a:noFill/>
+        </p:spPr>
+        <p:txBody>
+          <a:bodyPr wrap="square">
+            <a:spAutoFit/>
+          </a:bodyPr>
+          <a:lstStyle/>
           <a:p>
             <a:pPr>
               <a:lnSpc>
-                <a:spcPct val="120000"/>
+                <a:spcPct val="125000"/>
               </a:lnSpc>
-              <a:spcAft>
-                <a:spcPts val="600"/>
-              </a:spcAft>
             </a:pPr>
             <a:r>
-              <a:rPr sz="1800" b="1" i="0">
-                <a:solidFill>
-                  <a:srgbClr val="0F6E7A"/>
-                </a:solidFill>
-                <a:latin typeface="Calibri"/>
-              </a:rPr>
-              <a:t>Two artefacts we will share this week</a:t>
+              <a:rPr sz="1200" b="1" i="0">
+                <a:solidFill>
+                  <a:srgbClr val="D97306"/>
+                </a:solidFill>
+                <a:latin typeface="Calibri"/>
+              </a:rPr>
+              <a:t>•  </a:t>
+            </a:r>
+            <a:r>
+              <a:rPr sz="1200" b="0" i="0">
+                <a:solidFill>
+                  <a:srgbClr val="333F52"/>
+                </a:solidFill>
+                <a:latin typeface="Calibri"/>
+              </a:rPr>
+              <a:t>Data contract sign-off</a:t>
             </a:r>
           </a:p>
           <a:p>
             <a:pPr>
               <a:lnSpc>
-                <a:spcPct val="120000"/>
+                <a:spcPct val="125000"/>
               </a:lnSpc>
-              <a:spcAft>
-                <a:spcPts val="300"/>
-              </a:spcAft>
             </a:pPr>
             <a:r>
-              <a:rPr sz="1400" b="1" i="0">
+              <a:rPr sz="1200" b="1" i="0">
                 <a:solidFill>
                   <a:srgbClr val="D97306"/>
                 </a:solidFill>
@@ -5762,26 +5489,23 @@
               <a:t>•  </a:t>
             </a:r>
             <a:r>
-              <a:rPr sz="1400" b="0" i="0">
+              <a:rPr sz="1200" b="0" i="0">
                 <a:solidFill>
                   <a:srgbClr val="333F52"/>
                 </a:solidFill>
                 <a:latin typeface="Calibri"/>
               </a:rPr>
-              <a:t>A short data-contract template ready for legal and engineering review.</a:t>
+              <a:t>Ingestion of client feeds</a:t>
             </a:r>
           </a:p>
           <a:p>
             <a:pPr>
               <a:lnSpc>
-                <a:spcPct val="120000"/>
+                <a:spcPct val="125000"/>
               </a:lnSpc>
-              <a:spcAft>
-                <a:spcPts val="300"/>
-              </a:spcAft>
             </a:pPr>
             <a:r>
-              <a:rPr sz="1400" b="1" i="0">
+              <a:rPr sz="1200" b="1" i="0">
                 <a:solidFill>
                   <a:srgbClr val="D97306"/>
                 </a:solidFill>
@@ -5790,67 +5514,372 @@
               <a:t>•  </a:t>
             </a:r>
             <a:r>
-              <a:rPr sz="1400" b="0" i="0">
+              <a:rPr sz="1200" b="0" i="0">
                 <a:solidFill>
                   <a:srgbClr val="333F52"/>
                 </a:solidFill>
                 <a:latin typeface="Calibri"/>
               </a:rPr>
-              <a:t>Read-only access to the live staging environment for your team to probe.</a:t>
+              <a:t>Retrain on real data</a:t>
             </a:r>
           </a:p>
           <a:p>
             <a:pPr>
               <a:lnSpc>
-                <a:spcPct val="120000"/>
+                <a:spcPct val="125000"/>
               </a:lnSpc>
-              <a:spcAft>
-                <a:spcPts val="600"/>
-              </a:spcAft>
             </a:pPr>
             <a:r>
-              <a:rPr sz="1800" b="1" i="0">
+              <a:rPr sz="1200" b="1" i="0">
+                <a:solidFill>
+                  <a:srgbClr val="D97306"/>
+                </a:solidFill>
+                <a:latin typeface="Calibri"/>
+              </a:rPr>
+              <a:t>•  </a:t>
+            </a:r>
+            <a:r>
+              <a:rPr sz="1200" b="0" i="0">
+                <a:solidFill>
+                  <a:srgbClr val="333F52"/>
+                </a:solidFill>
+                <a:latin typeface="Calibri"/>
+              </a:rPr>
+              <a:t>Canary 10% → 100%</a:t>
+            </a:r>
+          </a:p>
+        </p:txBody>
+      </p:sp>
+      <p:sp>
+        <p:nvSpPr>
+          <p:cNvPr id="14" name="Rounded Rectangle 13"/>
+          <p:cNvSpPr/>
+          <p:nvPr/>
+        </p:nvSpPr>
+        <p:spPr>
+          <a:xfrm>
+            <a:off x="8641080" y="1188720"/>
+            <a:ext cx="3840480" cy="3657600"/>
+          </a:xfrm>
+          <a:prstGeom prst="roundRect">
+            <a:avLst>
+              <a:gd name="adj" fmla="val 5000"/>
+            </a:avLst>
+          </a:prstGeom>
+          <a:solidFill>
+            <a:srgbClr val="FFFFFF"/>
+          </a:solidFill>
+          <a:ln w="9525">
+            <a:solidFill>
+              <a:srgbClr val="D7DBE3"/>
+            </a:solidFill>
+          </a:ln>
+        </p:spPr>
+        <p:style>
+          <a:lnRef idx="1">
+            <a:schemeClr val="accent1"/>
+          </a:lnRef>
+          <a:fillRef idx="3">
+            <a:schemeClr val="accent1"/>
+          </a:fillRef>
+          <a:effectRef idx="2">
+            <a:schemeClr val="accent1"/>
+          </a:effectRef>
+          <a:fontRef idx="minor">
+            <a:schemeClr val="lt1"/>
+          </a:fontRef>
+        </p:style>
+        <p:txBody>
+          <a:bodyPr rtlCol="0" anchor="ctr"/>
+          <a:lstStyle/>
+          <a:p>
+            <a:pPr algn="ctr"/>
+          </a:p>
+        </p:txBody>
+      </p:sp>
+      <p:sp>
+        <p:nvSpPr>
+          <p:cNvPr id="15" name="Rectangle 14"/>
+          <p:cNvSpPr/>
+          <p:nvPr/>
+        </p:nvSpPr>
+        <p:spPr>
+          <a:xfrm>
+            <a:off x="8641080" y="1188720"/>
+            <a:ext cx="3840480" cy="502920"/>
+          </a:xfrm>
+          <a:prstGeom prst="rect">
+            <a:avLst/>
+          </a:prstGeom>
+          <a:solidFill>
+            <a:srgbClr val="0F6E7A"/>
+          </a:solidFill>
+          <a:ln>
+            <a:noFill/>
+          </a:ln>
+        </p:spPr>
+        <p:style>
+          <a:lnRef idx="1">
+            <a:schemeClr val="accent1"/>
+          </a:lnRef>
+          <a:fillRef idx="3">
+            <a:schemeClr val="accent1"/>
+          </a:fillRef>
+          <a:effectRef idx="2">
+            <a:schemeClr val="accent1"/>
+          </a:effectRef>
+          <a:fontRef idx="minor">
+            <a:schemeClr val="lt1"/>
+          </a:fontRef>
+        </p:style>
+        <p:txBody>
+          <a:bodyPr rtlCol="0" anchor="ctr"/>
+          <a:lstStyle/>
+          <a:p>
+            <a:pPr algn="ctr"/>
+          </a:p>
+        </p:txBody>
+      </p:sp>
+      <p:sp>
+        <p:nvSpPr>
+          <p:cNvPr id="16" name="TextBox 15"/>
+          <p:cNvSpPr txBox="1"/>
+          <p:nvPr/>
+        </p:nvSpPr>
+        <p:spPr>
+          <a:xfrm>
+            <a:off x="8823960" y="1252728"/>
+            <a:ext cx="3474720" cy="457200"/>
+          </a:xfrm>
+          <a:prstGeom prst="rect">
+            <a:avLst/>
+          </a:prstGeom>
+          <a:noFill/>
+        </p:spPr>
+        <p:txBody>
+          <a:bodyPr wrap="none">
+            <a:spAutoFit/>
+          </a:bodyPr>
+          <a:lstStyle/>
+          <a:p>
+            <a:r>
+              <a:rPr sz="1100" b="1" i="0">
+                <a:solidFill>
+                  <a:srgbClr val="FFFFFF"/>
+                </a:solidFill>
+                <a:latin typeface="Calibri"/>
+              </a:rPr>
+              <a:t>Phase 3</a:t>
+            </a:r>
+          </a:p>
+          <a:p>
+            <a:r>
+              <a:rPr sz="1500" b="1" i="0">
+                <a:solidFill>
+                  <a:srgbClr val="FFFFFF"/>
+                </a:solidFill>
+                <a:latin typeface="Calibri"/>
+              </a:rPr>
+              <a:t>Production</a:t>
+            </a:r>
+          </a:p>
+        </p:txBody>
+      </p:sp>
+      <p:sp>
+        <p:nvSpPr>
+          <p:cNvPr id="17" name="TextBox 16"/>
+          <p:cNvSpPr txBox="1"/>
+          <p:nvPr/>
+        </p:nvSpPr>
+        <p:spPr>
+          <a:xfrm>
+            <a:off x="8823960" y="1874520"/>
+            <a:ext cx="3474720" cy="274320"/>
+          </a:xfrm>
+          <a:prstGeom prst="rect">
+            <a:avLst/>
+          </a:prstGeom>
+          <a:noFill/>
+        </p:spPr>
+        <p:txBody>
+          <a:bodyPr wrap="none">
+            <a:spAutoFit/>
+          </a:bodyPr>
+          <a:lstStyle/>
+          <a:p>
+            <a:r>
+              <a:rPr sz="1000" b="1" i="0">
                 <a:solidFill>
                   <a:srgbClr val="0F6E7A"/>
                 </a:solidFill>
                 <a:latin typeface="Calibri"/>
               </a:rPr>
-              <a:t>What you get in eight weeks</a:t>
-            </a:r>
-          </a:p>
+              <a:t>READY TO START</a:t>
+            </a:r>
+          </a:p>
+        </p:txBody>
+      </p:sp>
+      <p:sp>
+        <p:nvSpPr>
+          <p:cNvPr id="18" name="TextBox 17"/>
+          <p:cNvSpPr txBox="1"/>
+          <p:nvPr/>
+        </p:nvSpPr>
+        <p:spPr>
+          <a:xfrm>
+            <a:off x="8869680" y="2240280"/>
+            <a:ext cx="3383280" cy="2468880"/>
+          </a:xfrm>
+          <a:prstGeom prst="rect">
+            <a:avLst/>
+          </a:prstGeom>
+          <a:noFill/>
+        </p:spPr>
+        <p:txBody>
+          <a:bodyPr wrap="square">
+            <a:spAutoFit/>
+          </a:bodyPr>
+          <a:lstStyle/>
           <a:p>
             <a:pPr>
               <a:lnSpc>
-                <a:spcPct val="120000"/>
+                <a:spcPct val="125000"/>
               </a:lnSpc>
-              <a:spcAft>
-                <a:spcPts val="300"/>
-              </a:spcAft>
             </a:pPr>
             <a:r>
-              <a:rPr sz="1400" b="1" i="0">
-                <a:solidFill>
-                  <a:srgbClr val="D97306"/>
+              <a:rPr sz="1200" b="1" i="0">
+                <a:solidFill>
+                  <a:srgbClr val="0F6E7A"/>
                 </a:solidFill>
                 <a:latin typeface="Calibri"/>
               </a:rPr>
               <a:t>•  </a:t>
             </a:r>
             <a:r>
-              <a:rPr sz="1400" b="0" i="0">
+              <a:rPr sz="1200" b="0" i="0">
                 <a:solidFill>
                   <a:srgbClr val="333F52"/>
                 </a:solidFill>
                 <a:latin typeface="Calibri"/>
               </a:rPr>
-              <a:t>A production service, on your data, with your on-call team in the cockpit and a signed handover.</a:t>
-            </a:r>
-          </a:p>
-        </p:txBody>
-      </p:sp>
-      <p:sp>
-        <p:nvSpPr>
-          <p:cNvPr id="5" name="Rectangle 4"/>
+              <a:t>Prod Terraform workspace</a:t>
+            </a:r>
+          </a:p>
+          <a:p>
+            <a:pPr>
+              <a:lnSpc>
+                <a:spcPct val="125000"/>
+              </a:lnSpc>
+            </a:pPr>
+            <a:r>
+              <a:rPr sz="1200" b="1" i="0">
+                <a:solidFill>
+                  <a:srgbClr val="0F6E7A"/>
+                </a:solidFill>
+                <a:latin typeface="Calibri"/>
+              </a:rPr>
+              <a:t>•  </a:t>
+            </a:r>
+            <a:r>
+              <a:rPr sz="1200" b="0" i="0">
+                <a:solidFill>
+                  <a:srgbClr val="333F52"/>
+                </a:solidFill>
+                <a:latin typeface="Calibri"/>
+              </a:rPr>
+              <a:t>Prod CD with approvals</a:t>
+            </a:r>
+          </a:p>
+          <a:p>
+            <a:pPr>
+              <a:lnSpc>
+                <a:spcPct val="125000"/>
+              </a:lnSpc>
+            </a:pPr>
+            <a:r>
+              <a:rPr sz="1200" b="1" i="0">
+                <a:solidFill>
+                  <a:srgbClr val="0F6E7A"/>
+                </a:solidFill>
+                <a:latin typeface="Calibri"/>
+              </a:rPr>
+              <a:t>•  </a:t>
+            </a:r>
+            <a:r>
+              <a:rPr sz="1200" b="0" i="0">
+                <a:solidFill>
+                  <a:srgbClr val="333F52"/>
+                </a:solidFill>
+                <a:latin typeface="Calibri"/>
+              </a:rPr>
+              <a:t>Right-sized Vertex</a:t>
+            </a:r>
+          </a:p>
+          <a:p>
+            <a:pPr>
+              <a:lnSpc>
+                <a:spcPct val="125000"/>
+              </a:lnSpc>
+            </a:pPr>
+            <a:r>
+              <a:rPr sz="1200" b="1" i="0">
+                <a:solidFill>
+                  <a:srgbClr val="0F6E7A"/>
+                </a:solidFill>
+                <a:latin typeface="Calibri"/>
+              </a:rPr>
+              <a:t>•  </a:t>
+            </a:r>
+            <a:r>
+              <a:rPr sz="1200" b="0" i="0">
+                <a:solidFill>
+                  <a:srgbClr val="333F52"/>
+                </a:solidFill>
+                <a:latin typeface="Calibri"/>
+              </a:rPr>
+              <a:t>Sign-off and handover</a:t>
+            </a:r>
+          </a:p>
+        </p:txBody>
+      </p:sp>
+      <p:sp>
+        <p:nvSpPr>
+          <p:cNvPr id="19" name="TextBox 18"/>
+          <p:cNvSpPr txBox="1"/>
+          <p:nvPr/>
+        </p:nvSpPr>
+        <p:spPr>
+          <a:xfrm>
+            <a:off x="502920" y="4983480"/>
+            <a:ext cx="11185855" cy="640080"/>
+          </a:xfrm>
+          <a:prstGeom prst="rect">
+            <a:avLst/>
+          </a:prstGeom>
+          <a:noFill/>
+        </p:spPr>
+        <p:txBody>
+          <a:bodyPr wrap="none">
+            <a:spAutoFit/>
+          </a:bodyPr>
+          <a:lstStyle/>
+          <a:p>
+            <a:pPr algn="ctr"/>
+            <a:r>
+              <a:rPr sz="1100" b="0" i="1">
+                <a:solidFill>
+                  <a:srgbClr val="6B7380"/>
+                </a:solidFill>
+                <a:latin typeface="Calibri"/>
+              </a:rPr>
+              <a:t>Indicative timeline: ~8 weeks from kickoff, gated on data access. Each phase ends in a working, demoable artefact.</a:t>
+            </a:r>
+          </a:p>
+        </p:txBody>
+      </p:sp>
+      <p:sp>
+        <p:nvSpPr>
+          <p:cNvPr id="20" name="Rectangle 19"/>
           <p:cNvSpPr/>
           <p:nvPr/>
         </p:nvSpPr>
@@ -5902,7 +5931,7 @@
       </p:sp>
       <p:sp>
         <p:nvSpPr>
-          <p:cNvPr id="6" name="TextBox 5"/>
+          <p:cNvPr id="21" name="TextBox 20"/>
           <p:cNvSpPr txBox="1"/>
           <p:nvPr/>
         </p:nvSpPr>
@@ -5930,7 +5959,7 @@
                 </a:solidFill>
                 <a:latin typeface="Calibri"/>
               </a:rPr>
-              <a:t>13 / 14</a:t>
+              <a:t>13 / 15</a:t>
             </a:r>
           </a:p>
         </p:txBody>
@@ -5962,6 +5991,465 @@
         <p:spPr>
           <a:xfrm>
             <a:off x="0" y="0"/>
+            <a:ext cx="12191695" cy="914400"/>
+          </a:xfrm>
+          <a:prstGeom prst="rect">
+            <a:avLst/>
+          </a:prstGeom>
+          <a:solidFill>
+            <a:srgbClr val="0B1F3A"/>
+          </a:solidFill>
+          <a:ln>
+            <a:noFill/>
+          </a:ln>
+        </p:spPr>
+        <p:style>
+          <a:lnRef idx="1">
+            <a:schemeClr val="accent1"/>
+          </a:lnRef>
+          <a:fillRef idx="3">
+            <a:schemeClr val="accent1"/>
+          </a:fillRef>
+          <a:effectRef idx="2">
+            <a:schemeClr val="accent1"/>
+          </a:effectRef>
+          <a:fontRef idx="minor">
+            <a:schemeClr val="lt1"/>
+          </a:fontRef>
+        </p:style>
+        <p:txBody>
+          <a:bodyPr rtlCol="0" anchor="ctr" lIns="548640" tIns="164592" wrap="square"/>
+          <a:lstStyle/>
+          <a:p>
+            <a:pPr algn="ctr"/>
+            <a:r>
+              <a:rPr sz="1000" b="1" i="0">
+                <a:solidFill>
+                  <a:srgbClr val="D97306"/>
+                </a:solidFill>
+                <a:latin typeface="Calibri"/>
+              </a:rPr>
+              <a:t>NEXT STEPS TO UNLOCK VALUE</a:t>
+            </a:r>
+          </a:p>
+          <a:p>
+            <a:r>
+              <a:rPr sz="2400" b="1" i="0">
+                <a:solidFill>
+                  <a:srgbClr val="FFFFFF"/>
+                </a:solidFill>
+                <a:latin typeface="Calibri"/>
+              </a:rPr>
+              <a:t>What we need from you</a:t>
+            </a:r>
+          </a:p>
+        </p:txBody>
+      </p:sp>
+      <p:sp>
+        <p:nvSpPr>
+          <p:cNvPr id="3" name="Rectangle 2"/>
+          <p:cNvSpPr/>
+          <p:nvPr/>
+        </p:nvSpPr>
+        <p:spPr>
+          <a:xfrm>
+            <a:off x="548640" y="868680"/>
+            <a:ext cx="1097280" cy="38100"/>
+          </a:xfrm>
+          <a:prstGeom prst="rect">
+            <a:avLst/>
+          </a:prstGeom>
+          <a:solidFill>
+            <a:srgbClr val="D97306"/>
+          </a:solidFill>
+          <a:ln>
+            <a:noFill/>
+          </a:ln>
+        </p:spPr>
+        <p:style>
+          <a:lnRef idx="1">
+            <a:schemeClr val="accent1"/>
+          </a:lnRef>
+          <a:fillRef idx="3">
+            <a:schemeClr val="accent1"/>
+          </a:fillRef>
+          <a:effectRef idx="2">
+            <a:schemeClr val="accent1"/>
+          </a:effectRef>
+          <a:fontRef idx="minor">
+            <a:schemeClr val="lt1"/>
+          </a:fontRef>
+        </p:style>
+        <p:txBody>
+          <a:bodyPr rtlCol="0" anchor="ctr"/>
+          <a:lstStyle/>
+          <a:p>
+            <a:pPr algn="ctr"/>
+          </a:p>
+        </p:txBody>
+      </p:sp>
+      <p:sp>
+        <p:nvSpPr>
+          <p:cNvPr id="4" name="TextBox 3"/>
+          <p:cNvSpPr txBox="1"/>
+          <p:nvPr/>
+        </p:nvSpPr>
+        <p:spPr>
+          <a:xfrm>
+            <a:off x="548640" y="1143000"/>
+            <a:ext cx="11094415" cy="5303520"/>
+          </a:xfrm>
+          <a:prstGeom prst="rect">
+            <a:avLst/>
+          </a:prstGeom>
+          <a:noFill/>
+        </p:spPr>
+        <p:txBody>
+          <a:bodyPr wrap="square">
+            <a:spAutoFit/>
+          </a:bodyPr>
+          <a:lstStyle/>
+          <a:p>
+            <a:pPr>
+              <a:lnSpc>
+                <a:spcPct val="120000"/>
+              </a:lnSpc>
+              <a:spcAft>
+                <a:spcPts val="600"/>
+              </a:spcAft>
+            </a:pPr>
+            <a:r>
+              <a:rPr sz="1800" b="1" i="0">
+                <a:solidFill>
+                  <a:srgbClr val="0F6E7A"/>
+                </a:solidFill>
+                <a:latin typeface="Calibri"/>
+              </a:rPr>
+              <a:t>Three decisions</a:t>
+            </a:r>
+          </a:p>
+          <a:p>
+            <a:pPr>
+              <a:lnSpc>
+                <a:spcPct val="120000"/>
+              </a:lnSpc>
+              <a:spcAft>
+                <a:spcPts val="300"/>
+              </a:spcAft>
+            </a:pPr>
+            <a:r>
+              <a:rPr sz="1400" b="1" i="0">
+                <a:solidFill>
+                  <a:srgbClr val="D97306"/>
+                </a:solidFill>
+                <a:latin typeface="Calibri"/>
+              </a:rPr>
+              <a:t>•  </a:t>
+            </a:r>
+            <a:r>
+              <a:rPr sz="1400" b="0" i="0">
+                <a:solidFill>
+                  <a:srgbClr val="333F52"/>
+                </a:solidFill>
+                <a:latin typeface="Calibri"/>
+              </a:rPr>
+              <a:t>Sign off the data contract — schema, freshness, and PII handling for click and sales-ledger feeds.</a:t>
+            </a:r>
+          </a:p>
+          <a:p>
+            <a:pPr>
+              <a:lnSpc>
+                <a:spcPct val="120000"/>
+              </a:lnSpc>
+              <a:spcAft>
+                <a:spcPts val="300"/>
+              </a:spcAft>
+            </a:pPr>
+            <a:r>
+              <a:rPr sz="1400" b="1" i="0">
+                <a:solidFill>
+                  <a:srgbClr val="D97306"/>
+                </a:solidFill>
+                <a:latin typeface="Calibri"/>
+              </a:rPr>
+              <a:t>•  </a:t>
+            </a:r>
+            <a:r>
+              <a:rPr sz="1400" b="0" i="0">
+                <a:solidFill>
+                  <a:srgbClr val="333F52"/>
+                </a:solidFill>
+                <a:latin typeface="Calibri"/>
+              </a:rPr>
+              <a:t>Nominate one data owner and one on-call engineer on your side for joint working sessions.</a:t>
+            </a:r>
+          </a:p>
+          <a:p>
+            <a:pPr>
+              <a:lnSpc>
+                <a:spcPct val="120000"/>
+              </a:lnSpc>
+              <a:spcAft>
+                <a:spcPts val="300"/>
+              </a:spcAft>
+            </a:pPr>
+            <a:r>
+              <a:rPr sz="1400" b="1" i="0">
+                <a:solidFill>
+                  <a:srgbClr val="D97306"/>
+                </a:solidFill>
+                <a:latin typeface="Calibri"/>
+              </a:rPr>
+              <a:t>•  </a:t>
+            </a:r>
+            <a:r>
+              <a:rPr sz="1400" b="0" i="0">
+                <a:solidFill>
+                  <a:srgbClr val="333F52"/>
+                </a:solidFill>
+                <a:latin typeface="Calibri"/>
+              </a:rPr>
+              <a:t>Confirm production GCP project (or authorise a prod-isolated namespace in the existing one).</a:t>
+            </a:r>
+          </a:p>
+          <a:p>
+            <a:pPr>
+              <a:lnSpc>
+                <a:spcPct val="120000"/>
+              </a:lnSpc>
+              <a:spcAft>
+                <a:spcPts val="600"/>
+              </a:spcAft>
+            </a:pPr>
+            <a:r>
+              <a:rPr sz="1800" b="1" i="0">
+                <a:solidFill>
+                  <a:srgbClr val="0F6E7A"/>
+                </a:solidFill>
+                <a:latin typeface="Calibri"/>
+              </a:rPr>
+              <a:t>Two artefacts we will share this week</a:t>
+            </a:r>
+          </a:p>
+          <a:p>
+            <a:pPr>
+              <a:lnSpc>
+                <a:spcPct val="120000"/>
+              </a:lnSpc>
+              <a:spcAft>
+                <a:spcPts val="300"/>
+              </a:spcAft>
+            </a:pPr>
+            <a:r>
+              <a:rPr sz="1400" b="1" i="0">
+                <a:solidFill>
+                  <a:srgbClr val="D97306"/>
+                </a:solidFill>
+                <a:latin typeface="Calibri"/>
+              </a:rPr>
+              <a:t>•  </a:t>
+            </a:r>
+            <a:r>
+              <a:rPr sz="1400" b="0" i="0">
+                <a:solidFill>
+                  <a:srgbClr val="333F52"/>
+                </a:solidFill>
+                <a:latin typeface="Calibri"/>
+              </a:rPr>
+              <a:t>A short data-contract template ready for legal and engineering review.</a:t>
+            </a:r>
+          </a:p>
+          <a:p>
+            <a:pPr>
+              <a:lnSpc>
+                <a:spcPct val="120000"/>
+              </a:lnSpc>
+              <a:spcAft>
+                <a:spcPts val="300"/>
+              </a:spcAft>
+            </a:pPr>
+            <a:r>
+              <a:rPr sz="1400" b="1" i="0">
+                <a:solidFill>
+                  <a:srgbClr val="D97306"/>
+                </a:solidFill>
+                <a:latin typeface="Calibri"/>
+              </a:rPr>
+              <a:t>•  </a:t>
+            </a:r>
+            <a:r>
+              <a:rPr sz="1400" b="0" i="0">
+                <a:solidFill>
+                  <a:srgbClr val="333F52"/>
+                </a:solidFill>
+                <a:latin typeface="Calibri"/>
+              </a:rPr>
+              <a:t>Read-only access to the live staging environment for your team to probe.</a:t>
+            </a:r>
+          </a:p>
+          <a:p>
+            <a:pPr>
+              <a:lnSpc>
+                <a:spcPct val="120000"/>
+              </a:lnSpc>
+              <a:spcAft>
+                <a:spcPts val="600"/>
+              </a:spcAft>
+            </a:pPr>
+            <a:r>
+              <a:rPr sz="1800" b="1" i="0">
+                <a:solidFill>
+                  <a:srgbClr val="0F6E7A"/>
+                </a:solidFill>
+                <a:latin typeface="Calibri"/>
+              </a:rPr>
+              <a:t>What you get in eight weeks</a:t>
+            </a:r>
+          </a:p>
+          <a:p>
+            <a:pPr>
+              <a:lnSpc>
+                <a:spcPct val="120000"/>
+              </a:lnSpc>
+              <a:spcAft>
+                <a:spcPts val="300"/>
+              </a:spcAft>
+            </a:pPr>
+            <a:r>
+              <a:rPr sz="1400" b="1" i="0">
+                <a:solidFill>
+                  <a:srgbClr val="D97306"/>
+                </a:solidFill>
+                <a:latin typeface="Calibri"/>
+              </a:rPr>
+              <a:t>•  </a:t>
+            </a:r>
+            <a:r>
+              <a:rPr sz="1400" b="0" i="0">
+                <a:solidFill>
+                  <a:srgbClr val="333F52"/>
+                </a:solidFill>
+                <a:latin typeface="Calibri"/>
+              </a:rPr>
+              <a:t>A production service, on your data, with your on-call team in the cockpit and a signed handover.</a:t>
+            </a:r>
+          </a:p>
+        </p:txBody>
+      </p:sp>
+      <p:sp>
+        <p:nvSpPr>
+          <p:cNvPr id="5" name="Rectangle 4"/>
+          <p:cNvSpPr/>
+          <p:nvPr/>
+        </p:nvSpPr>
+        <p:spPr>
+          <a:xfrm>
+            <a:off x="0" y="6537960"/>
+            <a:ext cx="12191695" cy="320040"/>
+          </a:xfrm>
+          <a:prstGeom prst="rect">
+            <a:avLst/>
+          </a:prstGeom>
+          <a:solidFill>
+            <a:srgbClr val="F4F6FA"/>
+          </a:solidFill>
+          <a:ln>
+            <a:noFill/>
+          </a:ln>
+        </p:spPr>
+        <p:style>
+          <a:lnRef idx="1">
+            <a:schemeClr val="accent1"/>
+          </a:lnRef>
+          <a:fillRef idx="3">
+            <a:schemeClr val="accent1"/>
+          </a:fillRef>
+          <a:effectRef idx="2">
+            <a:schemeClr val="accent1"/>
+          </a:effectRef>
+          <a:fontRef idx="minor">
+            <a:schemeClr val="lt1"/>
+          </a:fontRef>
+        </p:style>
+        <p:txBody>
+          <a:bodyPr rtlCol="0" anchor="ctr" lIns="548640" tIns="54864"/>
+          <a:lstStyle/>
+          <a:p>
+            <a:pPr algn="ctr"/>
+            <a:r>
+              <a:rPr sz="900" b="0" i="0">
+                <a:solidFill>
+                  <a:srgbClr val="6B7380"/>
+                </a:solidFill>
+                <a:latin typeface="Calibri"/>
+              </a:rPr>
+              <a:t>Predictive RPC Estimator — Client Demo</a:t>
+            </a:r>
+          </a:p>
+        </p:txBody>
+      </p:sp>
+      <p:sp>
+        <p:nvSpPr>
+          <p:cNvPr id="6" name="TextBox 5"/>
+          <p:cNvSpPr txBox="1"/>
+          <p:nvPr/>
+        </p:nvSpPr>
+        <p:spPr>
+          <a:xfrm>
+            <a:off x="11094415" y="6547104"/>
+            <a:ext cx="914400" cy="274320"/>
+          </a:xfrm>
+          <a:prstGeom prst="rect">
+            <a:avLst/>
+          </a:prstGeom>
+          <a:noFill/>
+        </p:spPr>
+        <p:txBody>
+          <a:bodyPr wrap="none">
+            <a:spAutoFit/>
+          </a:bodyPr>
+          <a:lstStyle/>
+          <a:p>
+            <a:pPr algn="r"/>
+            <a:r>
+              <a:rPr sz="900" b="0" i="0">
+                <a:solidFill>
+                  <a:srgbClr val="6B7380"/>
+                </a:solidFill>
+                <a:latin typeface="Calibri"/>
+              </a:rPr>
+              <a:t>14 / 15</a:t>
+            </a:r>
+          </a:p>
+        </p:txBody>
+      </p:sp>
+    </p:spTree>
+  </p:cSld>
+  <p:clrMapOvr>
+    <a:masterClrMapping/>
+  </p:clrMapOvr>
+</p:sld>
+</file>
+
+<file path=ppt/slides/slide15.xml><?xml version="1.0" encoding="utf-8"?>
+<p:sld xmlns:a="http://schemas.openxmlformats.org/drawingml/2006/main" xmlns:p="http://schemas.openxmlformats.org/presentationml/2006/main" xmlns:r="http://schemas.openxmlformats.org/officeDocument/2006/relationships">
+  <p:cSld>
+    <p:spTree>
+      <p:nvGrpSpPr>
+        <p:cNvPr id="1" name=""/>
+        <p:cNvGrpSpPr/>
+        <p:nvPr/>
+      </p:nvGrpSpPr>
+      <p:grpSpPr/>
+      <p:sp>
+        <p:nvSpPr>
+          <p:cNvPr id="2" name="Rectangle 1"/>
+          <p:cNvSpPr/>
+          <p:nvPr/>
+        </p:nvSpPr>
+        <p:spPr>
+          <a:xfrm>
+            <a:off x="0" y="0"/>
             <a:ext cx="12191695" cy="6858000"/>
           </a:xfrm>
           <a:prstGeom prst="rect">
@@ -6511,7 +6999,7 @@
                 </a:solidFill>
                 <a:latin typeface="Calibri"/>
               </a:rPr>
-              <a:t>2 / 14</a:t>
+              <a:t>2 / 15</a:t>
             </a:r>
           </a:p>
         </p:txBody>
@@ -6914,7 +7402,7 @@
                 </a:solidFill>
                 <a:latin typeface="Calibri"/>
               </a:rPr>
-              <a:t>3 / 14</a:t>
+              <a:t>3 / 15</a:t>
             </a:r>
           </a:p>
         </p:txBody>
@@ -7342,7 +7830,7 @@
                 </a:solidFill>
                 <a:latin typeface="Calibri"/>
               </a:rPr>
-              <a:t>4 / 14</a:t>
+              <a:t>4 / 15</a:t>
             </a:r>
           </a:p>
         </p:txBody>
@@ -7412,7 +7900,7 @@
                 </a:solidFill>
                 <a:latin typeface="Calibri"/>
               </a:rPr>
-              <a:t>ARCHITECTURE, IN ONE PICTURE</a:t>
+              <a:t>WHAT YOU RECEIVE, WHO CONSUMES IT</a:t>
             </a:r>
           </a:p>
           <a:p>
@@ -7423,7 +7911,7 @@
                 </a:solidFill>
                 <a:latin typeface="Calibri"/>
               </a:rPr>
-              <a:t>How it works</a:t>
+              <a:t>Deliverables and audience</a:t>
             </a:r>
           </a:p>
         </p:txBody>
@@ -7473,22 +7961,20 @@
       </p:sp>
       <p:sp>
         <p:nvSpPr>
-          <p:cNvPr id="4" name="Rounded Rectangle 3"/>
+          <p:cNvPr id="4" name="Rectangle 3"/>
           <p:cNvSpPr/>
           <p:nvPr/>
         </p:nvSpPr>
         <p:spPr>
           <a:xfrm>
-            <a:off x="457200" y="1463040"/>
-            <a:ext cx="1554480" cy="822960"/>
-          </a:xfrm>
-          <a:prstGeom prst="roundRect">
-            <a:avLst>
-              <a:gd name="adj" fmla="val 15000"/>
-            </a:avLst>
+            <a:off x="457200" y="1143000"/>
+            <a:ext cx="4206240" cy="411480"/>
+          </a:xfrm>
+          <a:prstGeom prst="rect">
+            <a:avLst/>
           </a:prstGeom>
           <a:solidFill>
-            <a:srgbClr val="333F52"/>
+            <a:srgbClr val="0B1F3A"/>
           </a:solidFill>
           <a:ln>
             <a:noFill/>
@@ -7509,49 +7995,383 @@
           </a:fontRef>
         </p:style>
         <p:txBody>
-          <a:bodyPr rtlCol="0" anchor="ctr" wrap="square"/>
+          <a:bodyPr rtlCol="0" anchor="ctr" lIns="164592" tIns="73152"/>
           <a:lstStyle/>
           <a:p>
             <a:pPr algn="ctr"/>
             <a:r>
-              <a:rPr sz="1300" b="1" i="0">
+              <a:rPr sz="1000" b="1" i="0">
                 <a:solidFill>
                   <a:srgbClr val="FFFFFF"/>
                 </a:solidFill>
                 <a:latin typeface="Calibri"/>
               </a:rPr>
-              <a:t>Client app</a:t>
-            </a:r>
-          </a:p>
+              <a:t>WHAT</a:t>
+            </a:r>
+          </a:p>
+        </p:txBody>
+      </p:sp>
+      <p:sp>
+        <p:nvSpPr>
+          <p:cNvPr id="5" name="Rectangle 4"/>
+          <p:cNvSpPr/>
+          <p:nvPr/>
+        </p:nvSpPr>
+        <p:spPr>
+          <a:xfrm>
+            <a:off x="4663440" y="1143000"/>
+            <a:ext cx="3108960" cy="411480"/>
+          </a:xfrm>
+          <a:prstGeom prst="rect">
+            <a:avLst/>
+          </a:prstGeom>
+          <a:solidFill>
+            <a:srgbClr val="0B1F3A"/>
+          </a:solidFill>
+          <a:ln>
+            <a:noFill/>
+          </a:ln>
+        </p:spPr>
+        <p:style>
+          <a:lnRef idx="1">
+            <a:schemeClr val="accent1"/>
+          </a:lnRef>
+          <a:fillRef idx="3">
+            <a:schemeClr val="accent1"/>
+          </a:fillRef>
+          <a:effectRef idx="2">
+            <a:schemeClr val="accent1"/>
+          </a:effectRef>
+          <a:fontRef idx="minor">
+            <a:schemeClr val="lt1"/>
+          </a:fontRef>
+        </p:style>
+        <p:txBody>
+          <a:bodyPr rtlCol="0" anchor="ctr" lIns="164592" tIns="73152"/>
+          <a:lstStyle/>
           <a:p>
             <a:pPr algn="ctr"/>
             <a:r>
-              <a:rPr sz="900" b="0" i="0">
-                <a:solidFill>
-                  <a:srgbClr val="F4F6FA"/>
-                </a:solidFill>
-                <a:latin typeface="Calibri"/>
-              </a:rPr>
-              <a:t>browser / server</a:t>
-            </a:r>
-          </a:p>
-        </p:txBody>
-      </p:sp>
-      <p:sp>
-        <p:nvSpPr>
-          <p:cNvPr id="5" name="Rounded Rectangle 4"/>
+              <a:rPr sz="1000" b="1" i="0">
+                <a:solidFill>
+                  <a:srgbClr val="FFFFFF"/>
+                </a:solidFill>
+                <a:latin typeface="Calibri"/>
+              </a:rPr>
+              <a:t>AUDIENCE</a:t>
+            </a:r>
+          </a:p>
+        </p:txBody>
+      </p:sp>
+      <p:sp>
+        <p:nvSpPr>
+          <p:cNvPr id="6" name="Rectangle 5"/>
           <p:cNvSpPr/>
           <p:nvPr/>
         </p:nvSpPr>
         <p:spPr>
           <a:xfrm>
-            <a:off x="2331720" y="1463040"/>
-            <a:ext cx="1554480" cy="822960"/>
-          </a:xfrm>
-          <a:prstGeom prst="roundRect">
-            <a:avLst>
-              <a:gd name="adj" fmla="val 15000"/>
-            </a:avLst>
+            <a:off x="7772400" y="1143000"/>
+            <a:ext cx="3962095" cy="411480"/>
+          </a:xfrm>
+          <a:prstGeom prst="rect">
+            <a:avLst/>
+          </a:prstGeom>
+          <a:solidFill>
+            <a:srgbClr val="0B1F3A"/>
+          </a:solidFill>
+          <a:ln>
+            <a:noFill/>
+          </a:ln>
+        </p:spPr>
+        <p:style>
+          <a:lnRef idx="1">
+            <a:schemeClr val="accent1"/>
+          </a:lnRef>
+          <a:fillRef idx="3">
+            <a:schemeClr val="accent1"/>
+          </a:fillRef>
+          <a:effectRef idx="2">
+            <a:schemeClr val="accent1"/>
+          </a:effectRef>
+          <a:fontRef idx="minor">
+            <a:schemeClr val="lt1"/>
+          </a:fontRef>
+        </p:style>
+        <p:txBody>
+          <a:bodyPr rtlCol="0" anchor="ctr" lIns="164592" tIns="73152"/>
+          <a:lstStyle/>
+          <a:p>
+            <a:pPr algn="ctr"/>
+            <a:r>
+              <a:rPr sz="1000" b="1" i="0">
+                <a:solidFill>
+                  <a:srgbClr val="FFFFFF"/>
+                </a:solidFill>
+                <a:latin typeface="Calibri"/>
+              </a:rPr>
+              <a:t>CLIENT-FACING?</a:t>
+            </a:r>
+          </a:p>
+        </p:txBody>
+      </p:sp>
+      <p:sp>
+        <p:nvSpPr>
+          <p:cNvPr id="7" name="Rectangle 6"/>
+          <p:cNvSpPr/>
+          <p:nvPr/>
+        </p:nvSpPr>
+        <p:spPr>
+          <a:xfrm>
+            <a:off x="457200" y="1554480"/>
+            <a:ext cx="11277295" cy="502920"/>
+          </a:xfrm>
+          <a:prstGeom prst="rect">
+            <a:avLst/>
+          </a:prstGeom>
+          <a:solidFill>
+            <a:srgbClr val="F4F6FA"/>
+          </a:solidFill>
+          <a:ln w="6350">
+            <a:solidFill>
+              <a:srgbClr val="D7DBE3"/>
+            </a:solidFill>
+          </a:ln>
+        </p:spPr>
+        <p:style>
+          <a:lnRef idx="1">
+            <a:schemeClr val="accent1"/>
+          </a:lnRef>
+          <a:fillRef idx="3">
+            <a:schemeClr val="accent1"/>
+          </a:fillRef>
+          <a:effectRef idx="2">
+            <a:schemeClr val="accent1"/>
+          </a:effectRef>
+          <a:fontRef idx="minor">
+            <a:schemeClr val="lt1"/>
+          </a:fontRef>
+        </p:style>
+        <p:txBody>
+          <a:bodyPr rtlCol="0" anchor="ctr"/>
+          <a:lstStyle/>
+          <a:p>
+            <a:pPr algn="ctr"/>
+          </a:p>
+        </p:txBody>
+      </p:sp>
+      <p:sp>
+        <p:nvSpPr>
+          <p:cNvPr id="8" name="Rectangle 7"/>
+          <p:cNvSpPr/>
+          <p:nvPr/>
+        </p:nvSpPr>
+        <p:spPr>
+          <a:xfrm>
+            <a:off x="457200" y="1554480"/>
+            <a:ext cx="54864" cy="502920"/>
+          </a:xfrm>
+          <a:prstGeom prst="rect">
+            <a:avLst/>
+          </a:prstGeom>
+          <a:solidFill>
+            <a:srgbClr val="1F8A4F"/>
+          </a:solidFill>
+          <a:ln>
+            <a:noFill/>
+          </a:ln>
+        </p:spPr>
+        <p:style>
+          <a:lnRef idx="1">
+            <a:schemeClr val="accent1"/>
+          </a:lnRef>
+          <a:fillRef idx="3">
+            <a:schemeClr val="accent1"/>
+          </a:fillRef>
+          <a:effectRef idx="2">
+            <a:schemeClr val="accent1"/>
+          </a:effectRef>
+          <a:fontRef idx="minor">
+            <a:schemeClr val="lt1"/>
+          </a:fontRef>
+        </p:style>
+        <p:txBody>
+          <a:bodyPr rtlCol="0" anchor="ctr"/>
+          <a:lstStyle/>
+          <a:p>
+            <a:pPr algn="ctr"/>
+          </a:p>
+        </p:txBody>
+      </p:sp>
+      <p:sp>
+        <p:nvSpPr>
+          <p:cNvPr id="9" name="TextBox 8"/>
+          <p:cNvSpPr txBox="1"/>
+          <p:nvPr/>
+        </p:nvSpPr>
+        <p:spPr>
+          <a:xfrm>
+            <a:off x="621792" y="1554480"/>
+            <a:ext cx="4041648" cy="502920"/>
+          </a:xfrm>
+          <a:prstGeom prst="rect">
+            <a:avLst/>
+          </a:prstGeom>
+          <a:noFill/>
+        </p:spPr>
+        <p:txBody>
+          <a:bodyPr wrap="none" anchor="ctr">
+            <a:spAutoFit/>
+          </a:bodyPr>
+          <a:lstStyle/>
+          <a:p>
+            <a:r>
+              <a:rPr sz="1100" b="1" i="0">
+                <a:solidFill>
+                  <a:srgbClr val="0B1F3A"/>
+                </a:solidFill>
+                <a:latin typeface="Consolas"/>
+              </a:rPr>
+              <a:t>dashboard/  (React + nginx)</a:t>
+            </a:r>
+          </a:p>
+        </p:txBody>
+      </p:sp>
+      <p:sp>
+        <p:nvSpPr>
+          <p:cNvPr id="10" name="TextBox 9"/>
+          <p:cNvSpPr txBox="1"/>
+          <p:nvPr/>
+        </p:nvSpPr>
+        <p:spPr>
+          <a:xfrm>
+            <a:off x="4663440" y="1554480"/>
+            <a:ext cx="3108960" cy="502920"/>
+          </a:xfrm>
+          <a:prstGeom prst="rect">
+            <a:avLst/>
+          </a:prstGeom>
+          <a:noFill/>
+        </p:spPr>
+        <p:txBody>
+          <a:bodyPr wrap="none" anchor="ctr">
+            <a:spAutoFit/>
+          </a:bodyPr>
+          <a:lstStyle/>
+          <a:p>
+            <a:r>
+              <a:rPr sz="1100" b="0" i="0">
+                <a:solidFill>
+                  <a:srgbClr val="333F52"/>
+                </a:solidFill>
+                <a:latin typeface="Calibri"/>
+              </a:rPr>
+              <a:t>Executive UI</a:t>
+            </a:r>
+          </a:p>
+        </p:txBody>
+      </p:sp>
+      <p:sp>
+        <p:nvSpPr>
+          <p:cNvPr id="11" name="TextBox 10"/>
+          <p:cNvSpPr txBox="1"/>
+          <p:nvPr/>
+        </p:nvSpPr>
+        <p:spPr>
+          <a:xfrm>
+            <a:off x="7772400" y="1554480"/>
+            <a:ext cx="3962095" cy="502920"/>
+          </a:xfrm>
+          <a:prstGeom prst="rect">
+            <a:avLst/>
+          </a:prstGeom>
+          <a:noFill/>
+        </p:spPr>
+        <p:txBody>
+          <a:bodyPr wrap="square" anchor="ctr">
+            <a:spAutoFit/>
+          </a:bodyPr>
+          <a:lstStyle/>
+          <a:p>
+            <a:r>
+              <a:rPr sz="1100" b="1" i="0">
+                <a:solidFill>
+                  <a:srgbClr val="1F8A4F"/>
+                </a:solidFill>
+                <a:latin typeface="Calibri"/>
+              </a:rPr>
+              <a:t>● </a:t>
+            </a:r>
+            <a:r>
+              <a:rPr sz="1100" b="1" i="0">
+                <a:solidFill>
+                  <a:srgbClr val="0B1F3A"/>
+                </a:solidFill>
+                <a:latin typeface="Calibri"/>
+              </a:rPr>
+              <a:t>Yes — primary demo</a:t>
+            </a:r>
+          </a:p>
+        </p:txBody>
+      </p:sp>
+      <p:sp>
+        <p:nvSpPr>
+          <p:cNvPr id="12" name="Rectangle 11"/>
+          <p:cNvSpPr/>
+          <p:nvPr/>
+        </p:nvSpPr>
+        <p:spPr>
+          <a:xfrm>
+            <a:off x="457200" y="2057400"/>
+            <a:ext cx="11277295" cy="502920"/>
+          </a:xfrm>
+          <a:prstGeom prst="rect">
+            <a:avLst/>
+          </a:prstGeom>
+          <a:solidFill>
+            <a:srgbClr val="FFFFFF"/>
+          </a:solidFill>
+          <a:ln w="6350">
+            <a:solidFill>
+              <a:srgbClr val="D7DBE3"/>
+            </a:solidFill>
+          </a:ln>
+        </p:spPr>
+        <p:style>
+          <a:lnRef idx="1">
+            <a:schemeClr val="accent1"/>
+          </a:lnRef>
+          <a:fillRef idx="3">
+            <a:schemeClr val="accent1"/>
+          </a:fillRef>
+          <a:effectRef idx="2">
+            <a:schemeClr val="accent1"/>
+          </a:effectRef>
+          <a:fontRef idx="minor">
+            <a:schemeClr val="lt1"/>
+          </a:fontRef>
+        </p:style>
+        <p:txBody>
+          <a:bodyPr rtlCol="0" anchor="ctr"/>
+          <a:lstStyle/>
+          <a:p>
+            <a:pPr algn="ctr"/>
+          </a:p>
+        </p:txBody>
+      </p:sp>
+      <p:sp>
+        <p:nvSpPr>
+          <p:cNvPr id="13" name="Rectangle 12"/>
+          <p:cNvSpPr/>
+          <p:nvPr/>
+        </p:nvSpPr>
+        <p:spPr>
+          <a:xfrm>
+            <a:off x="457200" y="2057400"/>
+            <a:ext cx="54864" cy="502920"/>
+          </a:xfrm>
+          <a:prstGeom prst="rect">
+            <a:avLst/>
           </a:prstGeom>
           <a:solidFill>
             <a:srgbClr val="0F6E7A"/>
@@ -7575,55 +8395,145 @@
           </a:fontRef>
         </p:style>
         <p:txBody>
-          <a:bodyPr rtlCol="0" anchor="ctr" wrap="square"/>
+          <a:bodyPr rtlCol="0" anchor="ctr"/>
           <a:lstStyle/>
           <a:p>
             <a:pPr algn="ctr"/>
-            <a:r>
-              <a:rPr sz="1300" b="1" i="0">
-                <a:solidFill>
-                  <a:srgbClr val="FFFFFF"/>
-                </a:solidFill>
-                <a:latin typeface="Calibri"/>
-              </a:rPr>
-              <a:t>Scoring API</a:t>
-            </a:r>
-          </a:p>
-          <a:p>
-            <a:pPr algn="ctr"/>
-            <a:r>
-              <a:rPr sz="900" b="0" i="0">
-                <a:solidFill>
-                  <a:srgbClr val="F4F6FA"/>
-                </a:solidFill>
-                <a:latin typeface="Calibri"/>
-              </a:rPr>
-              <a:t>Cloud Run · Rust</a:t>
-            </a:r>
-          </a:p>
-        </p:txBody>
-      </p:sp>
-      <p:sp>
-        <p:nvSpPr>
-          <p:cNvPr id="6" name="Rounded Rectangle 5"/>
+          </a:p>
+        </p:txBody>
+      </p:sp>
+      <p:sp>
+        <p:nvSpPr>
+          <p:cNvPr id="14" name="TextBox 13"/>
+          <p:cNvSpPr txBox="1"/>
+          <p:nvPr/>
+        </p:nvSpPr>
+        <p:spPr>
+          <a:xfrm>
+            <a:off x="621792" y="2057400"/>
+            <a:ext cx="4041648" cy="502920"/>
+          </a:xfrm>
+          <a:prstGeom prst="rect">
+            <a:avLst/>
+          </a:prstGeom>
+          <a:noFill/>
+        </p:spPr>
+        <p:txBody>
+          <a:bodyPr wrap="none" anchor="ctr">
+            <a:spAutoFit/>
+          </a:bodyPr>
+          <a:lstStyle/>
+          <a:p>
+            <a:r>
+              <a:rPr sz="1100" b="1" i="0">
+                <a:solidFill>
+                  <a:srgbClr val="0B1F3A"/>
+                </a:solidFill>
+                <a:latin typeface="Consolas"/>
+              </a:rPr>
+              <a:t>scoring-api  /v1/score, /v1/explain</a:t>
+            </a:r>
+          </a:p>
+        </p:txBody>
+      </p:sp>
+      <p:sp>
+        <p:nvSpPr>
+          <p:cNvPr id="15" name="TextBox 14"/>
+          <p:cNvSpPr txBox="1"/>
+          <p:nvPr/>
+        </p:nvSpPr>
+        <p:spPr>
+          <a:xfrm>
+            <a:off x="4663440" y="2057400"/>
+            <a:ext cx="3108960" cy="502920"/>
+          </a:xfrm>
+          <a:prstGeom prst="rect">
+            <a:avLst/>
+          </a:prstGeom>
+          <a:noFill/>
+        </p:spPr>
+        <p:txBody>
+          <a:bodyPr wrap="none" anchor="ctr">
+            <a:spAutoFit/>
+          </a:bodyPr>
+          <a:lstStyle/>
+          <a:p>
+            <a:r>
+              <a:rPr sz="1100" b="0" i="0">
+                <a:solidFill>
+                  <a:srgbClr val="333F52"/>
+                </a:solidFill>
+                <a:latin typeface="Calibri"/>
+              </a:rPr>
+              <a:t>Their backend / SA360 integration</a:t>
+            </a:r>
+          </a:p>
+        </p:txBody>
+      </p:sp>
+      <p:sp>
+        <p:nvSpPr>
+          <p:cNvPr id="16" name="TextBox 15"/>
+          <p:cNvSpPr txBox="1"/>
+          <p:nvPr/>
+        </p:nvSpPr>
+        <p:spPr>
+          <a:xfrm>
+            <a:off x="7772400" y="2057400"/>
+            <a:ext cx="3962095" cy="502920"/>
+          </a:xfrm>
+          <a:prstGeom prst="rect">
+            <a:avLst/>
+          </a:prstGeom>
+          <a:noFill/>
+        </p:spPr>
+        <p:txBody>
+          <a:bodyPr wrap="square" anchor="ctr">
+            <a:spAutoFit/>
+          </a:bodyPr>
+          <a:lstStyle/>
+          <a:p>
+            <a:r>
+              <a:rPr sz="1100" b="1" i="0">
+                <a:solidFill>
+                  <a:srgbClr val="0F6E7A"/>
+                </a:solidFill>
+                <a:latin typeface="Calibri"/>
+              </a:rPr>
+              <a:t>● </a:t>
+            </a:r>
+            <a:r>
+              <a:rPr sz="1100" b="0" i="0">
+                <a:solidFill>
+                  <a:srgbClr val="333F52"/>
+                </a:solidFill>
+                <a:latin typeface="Calibri"/>
+              </a:rPr>
+              <a:t>API only — show via curl / Postman on slide 7</a:t>
+            </a:r>
+          </a:p>
+        </p:txBody>
+      </p:sp>
+      <p:sp>
+        <p:nvSpPr>
+          <p:cNvPr id="17" name="Rectangle 16"/>
           <p:cNvSpPr/>
           <p:nvPr/>
         </p:nvSpPr>
         <p:spPr>
           <a:xfrm>
-            <a:off x="4206240" y="1463040"/>
-            <a:ext cx="1554480" cy="822960"/>
-          </a:xfrm>
-          <a:prstGeom prst="roundRect">
-            <a:avLst>
-              <a:gd name="adj" fmla="val 15000"/>
-            </a:avLst>
+            <a:off x="457200" y="2560320"/>
+            <a:ext cx="11277295" cy="502920"/>
+          </a:xfrm>
+          <a:prstGeom prst="rect">
+            <a:avLst/>
           </a:prstGeom>
           <a:solidFill>
-            <a:srgbClr val="0B1F3A"/>
+            <a:srgbClr val="F4F6FA"/>
           </a:solidFill>
-          <a:ln>
-            <a:noFill/>
+          <a:ln w="6350">
+            <a:solidFill>
+              <a:srgbClr val="D7DBE3"/>
+            </a:solidFill>
           </a:ln>
         </p:spPr>
         <p:style>
@@ -7641,49 +8551,822 @@
           </a:fontRef>
         </p:style>
         <p:txBody>
-          <a:bodyPr rtlCol="0" anchor="ctr" wrap="square"/>
+          <a:bodyPr rtlCol="0" anchor="ctr"/>
           <a:lstStyle/>
           <a:p>
             <a:pPr algn="ctr"/>
-            <a:r>
-              <a:rPr sz="1300" b="1" i="0">
-                <a:solidFill>
-                  <a:srgbClr val="FFFFFF"/>
-                </a:solidFill>
-                <a:latin typeface="Calibri"/>
-              </a:rPr>
-              <a:t>Vertex AI</a:t>
-            </a:r>
-          </a:p>
+          </a:p>
+        </p:txBody>
+      </p:sp>
+      <p:sp>
+        <p:nvSpPr>
+          <p:cNvPr id="18" name="Rectangle 17"/>
+          <p:cNvSpPr/>
+          <p:nvPr/>
+        </p:nvSpPr>
+        <p:spPr>
+          <a:xfrm>
+            <a:off x="457200" y="2560320"/>
+            <a:ext cx="54864" cy="502920"/>
+          </a:xfrm>
+          <a:prstGeom prst="rect">
+            <a:avLst/>
+          </a:prstGeom>
+          <a:solidFill>
+            <a:srgbClr val="0F6E7A"/>
+          </a:solidFill>
+          <a:ln>
+            <a:noFill/>
+          </a:ln>
+        </p:spPr>
+        <p:style>
+          <a:lnRef idx="1">
+            <a:schemeClr val="accent1"/>
+          </a:lnRef>
+          <a:fillRef idx="3">
+            <a:schemeClr val="accent1"/>
+          </a:fillRef>
+          <a:effectRef idx="2">
+            <a:schemeClr val="accent1"/>
+          </a:effectRef>
+          <a:fontRef idx="minor">
+            <a:schemeClr val="lt1"/>
+          </a:fontRef>
+        </p:style>
+        <p:txBody>
+          <a:bodyPr rtlCol="0" anchor="ctr"/>
+          <a:lstStyle/>
           <a:p>
             <a:pPr algn="ctr"/>
-            <a:r>
-              <a:rPr sz="900" b="0" i="0">
-                <a:solidFill>
-                  <a:srgbClr val="F4F6FA"/>
-                </a:solidFill>
-                <a:latin typeface="Calibri"/>
-              </a:rPr>
-              <a:t>XGBoost regressor</a:t>
-            </a:r>
-          </a:p>
-        </p:txBody>
-      </p:sp>
-      <p:sp>
-        <p:nvSpPr>
-          <p:cNvPr id="7" name="Rounded Rectangle 6"/>
+          </a:p>
+        </p:txBody>
+      </p:sp>
+      <p:sp>
+        <p:nvSpPr>
+          <p:cNvPr id="19" name="TextBox 18"/>
+          <p:cNvSpPr txBox="1"/>
+          <p:nvPr/>
+        </p:nvSpPr>
+        <p:spPr>
+          <a:xfrm>
+            <a:off x="621792" y="2560320"/>
+            <a:ext cx="4041648" cy="502920"/>
+          </a:xfrm>
+          <a:prstGeom prst="rect">
+            <a:avLst/>
+          </a:prstGeom>
+          <a:noFill/>
+        </p:spPr>
+        <p:txBody>
+          <a:bodyPr wrap="none" anchor="ctr">
+            <a:spAutoFit/>
+          </a:bodyPr>
+          <a:lstStyle/>
+          <a:p>
+            <a:r>
+              <a:rPr sz="1100" b="1" i="0">
+                <a:solidFill>
+                  <a:srgbClr val="0B1F3A"/>
+                </a:solidFill>
+                <a:latin typeface="Consolas"/>
+              </a:rPr>
+              <a:t>reconciliation  /reconciliation</a:t>
+            </a:r>
+          </a:p>
+        </p:txBody>
+      </p:sp>
+      <p:sp>
+        <p:nvSpPr>
+          <p:cNvPr id="20" name="TextBox 19"/>
+          <p:cNvSpPr txBox="1"/>
+          <p:nvPr/>
+        </p:nvSpPr>
+        <p:spPr>
+          <a:xfrm>
+            <a:off x="4663440" y="2560320"/>
+            <a:ext cx="3108960" cy="502920"/>
+          </a:xfrm>
+          <a:prstGeom prst="rect">
+            <a:avLst/>
+          </a:prstGeom>
+          <a:noFill/>
+        </p:spPr>
+        <p:txBody>
+          <a:bodyPr wrap="none" anchor="ctr">
+            <a:spAutoFit/>
+          </a:bodyPr>
+          <a:lstStyle/>
+          <a:p>
+            <a:r>
+              <a:rPr sz="1100" b="0" i="0">
+                <a:solidFill>
+                  <a:srgbClr val="333F52"/>
+                </a:solidFill>
+                <a:latin typeface="Calibri"/>
+              </a:rPr>
+              <a:t>Powers the dashboard</a:t>
+            </a:r>
+          </a:p>
+        </p:txBody>
+      </p:sp>
+      <p:sp>
+        <p:nvSpPr>
+          <p:cNvPr id="21" name="TextBox 20"/>
+          <p:cNvSpPr txBox="1"/>
+          <p:nvPr/>
+        </p:nvSpPr>
+        <p:spPr>
+          <a:xfrm>
+            <a:off x="7772400" y="2560320"/>
+            <a:ext cx="3962095" cy="502920"/>
+          </a:xfrm>
+          <a:prstGeom prst="rect">
+            <a:avLst/>
+          </a:prstGeom>
+          <a:noFill/>
+        </p:spPr>
+        <p:txBody>
+          <a:bodyPr wrap="square" anchor="ctr">
+            <a:spAutoFit/>
+          </a:bodyPr>
+          <a:lstStyle/>
+          <a:p>
+            <a:r>
+              <a:rPr sz="1100" b="1" i="0">
+                <a:solidFill>
+                  <a:srgbClr val="0F6E7A"/>
+                </a:solidFill>
+                <a:latin typeface="Calibri"/>
+              </a:rPr>
+              <a:t>● </a:t>
+            </a:r>
+            <a:r>
+              <a:rPr sz="1100" b="0" i="0">
+                <a:solidFill>
+                  <a:srgbClr val="333F52"/>
+                </a:solidFill>
+                <a:latin typeface="Calibri"/>
+              </a:rPr>
+              <a:t>API only — invisible to client</a:t>
+            </a:r>
+          </a:p>
+        </p:txBody>
+      </p:sp>
+      <p:sp>
+        <p:nvSpPr>
+          <p:cNvPr id="22" name="Rectangle 21"/>
           <p:cNvSpPr/>
           <p:nvPr/>
         </p:nvSpPr>
         <p:spPr>
           <a:xfrm>
-            <a:off x="6080760" y="1463040"/>
-            <a:ext cx="1554480" cy="822960"/>
-          </a:xfrm>
-          <a:prstGeom prst="roundRect">
-            <a:avLst>
-              <a:gd name="adj" fmla="val 15000"/>
-            </a:avLst>
+            <a:off x="457200" y="3063240"/>
+            <a:ext cx="11277295" cy="502920"/>
+          </a:xfrm>
+          <a:prstGeom prst="rect">
+            <a:avLst/>
+          </a:prstGeom>
+          <a:solidFill>
+            <a:srgbClr val="FFFFFF"/>
+          </a:solidFill>
+          <a:ln w="6350">
+            <a:solidFill>
+              <a:srgbClr val="D7DBE3"/>
+            </a:solidFill>
+          </a:ln>
+        </p:spPr>
+        <p:style>
+          <a:lnRef idx="1">
+            <a:schemeClr val="accent1"/>
+          </a:lnRef>
+          <a:fillRef idx="3">
+            <a:schemeClr val="accent1"/>
+          </a:fillRef>
+          <a:effectRef idx="2">
+            <a:schemeClr val="accent1"/>
+          </a:effectRef>
+          <a:fontRef idx="minor">
+            <a:schemeClr val="lt1"/>
+          </a:fontRef>
+        </p:style>
+        <p:txBody>
+          <a:bodyPr rtlCol="0" anchor="ctr"/>
+          <a:lstStyle/>
+          <a:p>
+            <a:pPr algn="ctr"/>
+          </a:p>
+        </p:txBody>
+      </p:sp>
+      <p:sp>
+        <p:nvSpPr>
+          <p:cNvPr id="23" name="Rectangle 22"/>
+          <p:cNvSpPr/>
+          <p:nvPr/>
+        </p:nvSpPr>
+        <p:spPr>
+          <a:xfrm>
+            <a:off x="457200" y="3063240"/>
+            <a:ext cx="54864" cy="502920"/>
+          </a:xfrm>
+          <a:prstGeom prst="rect">
+            <a:avLst/>
+          </a:prstGeom>
+          <a:solidFill>
+            <a:srgbClr val="6B7380"/>
+          </a:solidFill>
+          <a:ln>
+            <a:noFill/>
+          </a:ln>
+        </p:spPr>
+        <p:style>
+          <a:lnRef idx="1">
+            <a:schemeClr val="accent1"/>
+          </a:lnRef>
+          <a:fillRef idx="3">
+            <a:schemeClr val="accent1"/>
+          </a:fillRef>
+          <a:effectRef idx="2">
+            <a:schemeClr val="accent1"/>
+          </a:effectRef>
+          <a:fontRef idx="minor">
+            <a:schemeClr val="lt1"/>
+          </a:fontRef>
+        </p:style>
+        <p:txBody>
+          <a:bodyPr rtlCol="0" anchor="ctr"/>
+          <a:lstStyle/>
+          <a:p>
+            <a:pPr algn="ctr"/>
+          </a:p>
+        </p:txBody>
+      </p:sp>
+      <p:sp>
+        <p:nvSpPr>
+          <p:cNvPr id="24" name="TextBox 23"/>
+          <p:cNvSpPr txBox="1"/>
+          <p:nvPr/>
+        </p:nvSpPr>
+        <p:spPr>
+          <a:xfrm>
+            <a:off x="621792" y="3063240"/>
+            <a:ext cx="4041648" cy="502920"/>
+          </a:xfrm>
+          <a:prstGeom prst="rect">
+            <a:avLst/>
+          </a:prstGeom>
+          <a:noFill/>
+        </p:spPr>
+        <p:txBody>
+          <a:bodyPr wrap="none" anchor="ctr">
+            <a:spAutoFit/>
+          </a:bodyPr>
+          <a:lstStyle/>
+          <a:p>
+            <a:r>
+              <a:rPr sz="1100" b="1" i="0">
+                <a:solidFill>
+                  <a:srgbClr val="0B1F3A"/>
+                </a:solidFill>
+                <a:latin typeface="Consolas"/>
+              </a:rPr>
+              <a:t>activation</a:t>
+            </a:r>
+          </a:p>
+        </p:txBody>
+      </p:sp>
+      <p:sp>
+        <p:nvSpPr>
+          <p:cNvPr id="25" name="TextBox 24"/>
+          <p:cNvSpPr txBox="1"/>
+          <p:nvPr/>
+        </p:nvSpPr>
+        <p:spPr>
+          <a:xfrm>
+            <a:off x="4663440" y="3063240"/>
+            <a:ext cx="3108960" cy="502920"/>
+          </a:xfrm>
+          <a:prstGeom prst="rect">
+            <a:avLst/>
+          </a:prstGeom>
+          <a:noFill/>
+        </p:spPr>
+        <p:txBody>
+          <a:bodyPr wrap="none" anchor="ctr">
+            <a:spAutoFit/>
+          </a:bodyPr>
+          <a:lstStyle/>
+          <a:p>
+            <a:r>
+              <a:rPr sz="1100" b="0" i="0">
+                <a:solidFill>
+                  <a:srgbClr val="333F52"/>
+                </a:solidFill>
+                <a:latin typeface="Calibri"/>
+              </a:rPr>
+              <a:t>SA360 / SSGTM push</a:t>
+            </a:r>
+          </a:p>
+        </p:txBody>
+      </p:sp>
+      <p:sp>
+        <p:nvSpPr>
+          <p:cNvPr id="26" name="TextBox 25"/>
+          <p:cNvSpPr txBox="1"/>
+          <p:nvPr/>
+        </p:nvSpPr>
+        <p:spPr>
+          <a:xfrm>
+            <a:off x="7772400" y="3063240"/>
+            <a:ext cx="3962095" cy="502920"/>
+          </a:xfrm>
+          <a:prstGeom prst="rect">
+            <a:avLst/>
+          </a:prstGeom>
+          <a:noFill/>
+        </p:spPr>
+        <p:txBody>
+          <a:bodyPr wrap="square" anchor="ctr">
+            <a:spAutoFit/>
+          </a:bodyPr>
+          <a:lstStyle/>
+          <a:p>
+            <a:r>
+              <a:rPr sz="1100" b="1" i="0">
+                <a:solidFill>
+                  <a:srgbClr val="6B7380"/>
+                </a:solidFill>
+                <a:latin typeface="Calibri"/>
+              </a:rPr>
+              <a:t>● </a:t>
+            </a:r>
+            <a:r>
+              <a:rPr sz="1100" b="0" i="0">
+                <a:solidFill>
+                  <a:srgbClr val="333F52"/>
+                </a:solidFill>
+                <a:latin typeface="Calibri"/>
+              </a:rPr>
+              <a:t>Backend, no UI</a:t>
+            </a:r>
+          </a:p>
+        </p:txBody>
+      </p:sp>
+      <p:sp>
+        <p:nvSpPr>
+          <p:cNvPr id="27" name="Rectangle 26"/>
+          <p:cNvSpPr/>
+          <p:nvPr/>
+        </p:nvSpPr>
+        <p:spPr>
+          <a:xfrm>
+            <a:off x="457200" y="3566160"/>
+            <a:ext cx="11277295" cy="502920"/>
+          </a:xfrm>
+          <a:prstGeom prst="rect">
+            <a:avLst/>
+          </a:prstGeom>
+          <a:solidFill>
+            <a:srgbClr val="F4F6FA"/>
+          </a:solidFill>
+          <a:ln w="6350">
+            <a:solidFill>
+              <a:srgbClr val="D7DBE3"/>
+            </a:solidFill>
+          </a:ln>
+        </p:spPr>
+        <p:style>
+          <a:lnRef idx="1">
+            <a:schemeClr val="accent1"/>
+          </a:lnRef>
+          <a:fillRef idx="3">
+            <a:schemeClr val="accent1"/>
+          </a:fillRef>
+          <a:effectRef idx="2">
+            <a:schemeClr val="accent1"/>
+          </a:effectRef>
+          <a:fontRef idx="minor">
+            <a:schemeClr val="lt1"/>
+          </a:fontRef>
+        </p:style>
+        <p:txBody>
+          <a:bodyPr rtlCol="0" anchor="ctr"/>
+          <a:lstStyle/>
+          <a:p>
+            <a:pPr algn="ctr"/>
+          </a:p>
+        </p:txBody>
+      </p:sp>
+      <p:sp>
+        <p:nvSpPr>
+          <p:cNvPr id="28" name="Rectangle 27"/>
+          <p:cNvSpPr/>
+          <p:nvPr/>
+        </p:nvSpPr>
+        <p:spPr>
+          <a:xfrm>
+            <a:off x="457200" y="3566160"/>
+            <a:ext cx="54864" cy="502920"/>
+          </a:xfrm>
+          <a:prstGeom prst="rect">
+            <a:avLst/>
+          </a:prstGeom>
+          <a:solidFill>
+            <a:srgbClr val="6B7380"/>
+          </a:solidFill>
+          <a:ln>
+            <a:noFill/>
+          </a:ln>
+        </p:spPr>
+        <p:style>
+          <a:lnRef idx="1">
+            <a:schemeClr val="accent1"/>
+          </a:lnRef>
+          <a:fillRef idx="3">
+            <a:schemeClr val="accent1"/>
+          </a:fillRef>
+          <a:effectRef idx="2">
+            <a:schemeClr val="accent1"/>
+          </a:effectRef>
+          <a:fontRef idx="minor">
+            <a:schemeClr val="lt1"/>
+          </a:fontRef>
+        </p:style>
+        <p:txBody>
+          <a:bodyPr rtlCol="0" anchor="ctr"/>
+          <a:lstStyle/>
+          <a:p>
+            <a:pPr algn="ctr"/>
+          </a:p>
+        </p:txBody>
+      </p:sp>
+      <p:sp>
+        <p:nvSpPr>
+          <p:cNvPr id="29" name="TextBox 28"/>
+          <p:cNvSpPr txBox="1"/>
+          <p:nvPr/>
+        </p:nvSpPr>
+        <p:spPr>
+          <a:xfrm>
+            <a:off x="621792" y="3566160"/>
+            <a:ext cx="4041648" cy="502920"/>
+          </a:xfrm>
+          <a:prstGeom prst="rect">
+            <a:avLst/>
+          </a:prstGeom>
+          <a:noFill/>
+        </p:spPr>
+        <p:txBody>
+          <a:bodyPr wrap="none" anchor="ctr">
+            <a:spAutoFit/>
+          </a:bodyPr>
+          <a:lstStyle/>
+          <a:p>
+            <a:r>
+              <a:rPr sz="1100" b="1" i="0">
+                <a:solidFill>
+                  <a:srgbClr val="0B1F3A"/>
+                </a:solidFill>
+                <a:latin typeface="Consolas"/>
+              </a:rPr>
+              <a:t>breaker-automation, ml-pipeline, bounds-calibration</a:t>
+            </a:r>
+          </a:p>
+        </p:txBody>
+      </p:sp>
+      <p:sp>
+        <p:nvSpPr>
+          <p:cNvPr id="30" name="TextBox 29"/>
+          <p:cNvSpPr txBox="1"/>
+          <p:nvPr/>
+        </p:nvSpPr>
+        <p:spPr>
+          <a:xfrm>
+            <a:off x="4663440" y="3566160"/>
+            <a:ext cx="3108960" cy="502920"/>
+          </a:xfrm>
+          <a:prstGeom prst="rect">
+            <a:avLst/>
+          </a:prstGeom>
+          <a:noFill/>
+        </p:spPr>
+        <p:txBody>
+          <a:bodyPr wrap="none" anchor="ctr">
+            <a:spAutoFit/>
+          </a:bodyPr>
+          <a:lstStyle/>
+          <a:p>
+            <a:r>
+              <a:rPr sz="1100" b="0" i="0">
+                <a:solidFill>
+                  <a:srgbClr val="333F52"/>
+                </a:solidFill>
+                <a:latin typeface="Calibri"/>
+              </a:rPr>
+              <a:t>Internal / scheduled</a:t>
+            </a:r>
+          </a:p>
+        </p:txBody>
+      </p:sp>
+      <p:sp>
+        <p:nvSpPr>
+          <p:cNvPr id="31" name="TextBox 30"/>
+          <p:cNvSpPr txBox="1"/>
+          <p:nvPr/>
+        </p:nvSpPr>
+        <p:spPr>
+          <a:xfrm>
+            <a:off x="7772400" y="3566160"/>
+            <a:ext cx="3962095" cy="502920"/>
+          </a:xfrm>
+          <a:prstGeom prst="rect">
+            <a:avLst/>
+          </a:prstGeom>
+          <a:noFill/>
+        </p:spPr>
+        <p:txBody>
+          <a:bodyPr wrap="square" anchor="ctr">
+            <a:spAutoFit/>
+          </a:bodyPr>
+          <a:lstStyle/>
+          <a:p>
+            <a:r>
+              <a:rPr sz="1100" b="1" i="0">
+                <a:solidFill>
+                  <a:srgbClr val="6B7380"/>
+                </a:solidFill>
+                <a:latin typeface="Calibri"/>
+              </a:rPr>
+              <a:t>● </a:t>
+            </a:r>
+            <a:r>
+              <a:rPr sz="1100" b="0" i="0">
+                <a:solidFill>
+                  <a:srgbClr val="333F52"/>
+                </a:solidFill>
+                <a:latin typeface="Calibri"/>
+              </a:rPr>
+              <a:t>Backend</a:t>
+            </a:r>
+          </a:p>
+        </p:txBody>
+      </p:sp>
+      <p:sp>
+        <p:nvSpPr>
+          <p:cNvPr id="32" name="Rectangle 31"/>
+          <p:cNvSpPr/>
+          <p:nvPr/>
+        </p:nvSpPr>
+        <p:spPr>
+          <a:xfrm>
+            <a:off x="457200" y="4069080"/>
+            <a:ext cx="11277295" cy="502920"/>
+          </a:xfrm>
+          <a:prstGeom prst="rect">
+            <a:avLst/>
+          </a:prstGeom>
+          <a:solidFill>
+            <a:srgbClr val="FFFFFF"/>
+          </a:solidFill>
+          <a:ln w="6350">
+            <a:solidFill>
+              <a:srgbClr val="D7DBE3"/>
+            </a:solidFill>
+          </a:ln>
+        </p:spPr>
+        <p:style>
+          <a:lnRef idx="1">
+            <a:schemeClr val="accent1"/>
+          </a:lnRef>
+          <a:fillRef idx="3">
+            <a:schemeClr val="accent1"/>
+          </a:fillRef>
+          <a:effectRef idx="2">
+            <a:schemeClr val="accent1"/>
+          </a:effectRef>
+          <a:fontRef idx="minor">
+            <a:schemeClr val="lt1"/>
+          </a:fontRef>
+        </p:style>
+        <p:txBody>
+          <a:bodyPr rtlCol="0" anchor="ctr"/>
+          <a:lstStyle/>
+          <a:p>
+            <a:pPr algn="ctr"/>
+          </a:p>
+        </p:txBody>
+      </p:sp>
+      <p:sp>
+        <p:nvSpPr>
+          <p:cNvPr id="33" name="Rectangle 32"/>
+          <p:cNvSpPr/>
+          <p:nvPr/>
+        </p:nvSpPr>
+        <p:spPr>
+          <a:xfrm>
+            <a:off x="457200" y="4069080"/>
+            <a:ext cx="54864" cy="502920"/>
+          </a:xfrm>
+          <a:prstGeom prst="rect">
+            <a:avLst/>
+          </a:prstGeom>
+          <a:solidFill>
+            <a:srgbClr val="6B7380"/>
+          </a:solidFill>
+          <a:ln>
+            <a:noFill/>
+          </a:ln>
+        </p:spPr>
+        <p:style>
+          <a:lnRef idx="1">
+            <a:schemeClr val="accent1"/>
+          </a:lnRef>
+          <a:fillRef idx="3">
+            <a:schemeClr val="accent1"/>
+          </a:fillRef>
+          <a:effectRef idx="2">
+            <a:schemeClr val="accent1"/>
+          </a:effectRef>
+          <a:fontRef idx="minor">
+            <a:schemeClr val="lt1"/>
+          </a:fontRef>
+        </p:style>
+        <p:txBody>
+          <a:bodyPr rtlCol="0" anchor="ctr"/>
+          <a:lstStyle/>
+          <a:p>
+            <a:pPr algn="ctr"/>
+          </a:p>
+        </p:txBody>
+      </p:sp>
+      <p:sp>
+        <p:nvSpPr>
+          <p:cNvPr id="34" name="TextBox 33"/>
+          <p:cNvSpPr txBox="1"/>
+          <p:nvPr/>
+        </p:nvSpPr>
+        <p:spPr>
+          <a:xfrm>
+            <a:off x="621792" y="4069080"/>
+            <a:ext cx="4041648" cy="502920"/>
+          </a:xfrm>
+          <a:prstGeom prst="rect">
+            <a:avLst/>
+          </a:prstGeom>
+          <a:noFill/>
+        </p:spPr>
+        <p:txBody>
+          <a:bodyPr wrap="none" anchor="ctr">
+            <a:spAutoFit/>
+          </a:bodyPr>
+          <a:lstStyle/>
+          <a:p>
+            <a:r>
+              <a:rPr sz="1100" b="1" i="0">
+                <a:solidFill>
+                  <a:srgbClr val="0B1F3A"/>
+                </a:solidFill>
+                <a:latin typeface="Consolas"/>
+              </a:rPr>
+              <a:t>mcp-servers/scoring-mcp, mlops-mcp</a:t>
+            </a:r>
+          </a:p>
+        </p:txBody>
+      </p:sp>
+      <p:sp>
+        <p:nvSpPr>
+          <p:cNvPr id="35" name="TextBox 34"/>
+          <p:cNvSpPr txBox="1"/>
+          <p:nvPr/>
+        </p:nvSpPr>
+        <p:spPr>
+          <a:xfrm>
+            <a:off x="4663440" y="4069080"/>
+            <a:ext cx="3108960" cy="502920"/>
+          </a:xfrm>
+          <a:prstGeom prst="rect">
+            <a:avLst/>
+          </a:prstGeom>
+          <a:noFill/>
+        </p:spPr>
+        <p:txBody>
+          <a:bodyPr wrap="none" anchor="ctr">
+            <a:spAutoFit/>
+          </a:bodyPr>
+          <a:lstStyle/>
+          <a:p>
+            <a:r>
+              <a:rPr sz="1100" b="0" i="0">
+                <a:solidFill>
+                  <a:srgbClr val="333F52"/>
+                </a:solidFill>
+                <a:latin typeface="Calibri"/>
+              </a:rPr>
+              <a:t>Agent tooling for engineers</a:t>
+            </a:r>
+          </a:p>
+        </p:txBody>
+      </p:sp>
+      <p:sp>
+        <p:nvSpPr>
+          <p:cNvPr id="36" name="TextBox 35"/>
+          <p:cNvSpPr txBox="1"/>
+          <p:nvPr/>
+        </p:nvSpPr>
+        <p:spPr>
+          <a:xfrm>
+            <a:off x="7772400" y="4069080"/>
+            <a:ext cx="3962095" cy="502920"/>
+          </a:xfrm>
+          <a:prstGeom prst="rect">
+            <a:avLst/>
+          </a:prstGeom>
+          <a:noFill/>
+        </p:spPr>
+        <p:txBody>
+          <a:bodyPr wrap="square" anchor="ctr">
+            <a:spAutoFit/>
+          </a:bodyPr>
+          <a:lstStyle/>
+          <a:p>
+            <a:r>
+              <a:rPr sz="1100" b="1" i="0">
+                <a:solidFill>
+                  <a:srgbClr val="6B7380"/>
+                </a:solidFill>
+                <a:latin typeface="Calibri"/>
+              </a:rPr>
+              <a:t>● </a:t>
+            </a:r>
+            <a:r>
+              <a:rPr sz="1100" b="0" i="0">
+                <a:solidFill>
+                  <a:srgbClr val="333F52"/>
+                </a:solidFill>
+                <a:latin typeface="Calibri"/>
+              </a:rPr>
+              <a:t>Not client-facing</a:t>
+            </a:r>
+          </a:p>
+        </p:txBody>
+      </p:sp>
+      <p:sp>
+        <p:nvSpPr>
+          <p:cNvPr id="37" name="Rectangle 36"/>
+          <p:cNvSpPr/>
+          <p:nvPr/>
+        </p:nvSpPr>
+        <p:spPr>
+          <a:xfrm>
+            <a:off x="457200" y="4572000"/>
+            <a:ext cx="11277295" cy="502920"/>
+          </a:xfrm>
+          <a:prstGeom prst="rect">
+            <a:avLst/>
+          </a:prstGeom>
+          <a:solidFill>
+            <a:srgbClr val="F4F6FA"/>
+          </a:solidFill>
+          <a:ln w="6350">
+            <a:solidFill>
+              <a:srgbClr val="D7DBE3"/>
+            </a:solidFill>
+          </a:ln>
+        </p:spPr>
+        <p:style>
+          <a:lnRef idx="1">
+            <a:schemeClr val="accent1"/>
+          </a:lnRef>
+          <a:fillRef idx="3">
+            <a:schemeClr val="accent1"/>
+          </a:fillRef>
+          <a:effectRef idx="2">
+            <a:schemeClr val="accent1"/>
+          </a:effectRef>
+          <a:fontRef idx="minor">
+            <a:schemeClr val="lt1"/>
+          </a:fontRef>
+        </p:style>
+        <p:txBody>
+          <a:bodyPr rtlCol="0" anchor="ctr"/>
+          <a:lstStyle/>
+          <a:p>
+            <a:pPr algn="ctr"/>
+          </a:p>
+        </p:txBody>
+      </p:sp>
+      <p:sp>
+        <p:nvSpPr>
+          <p:cNvPr id="38" name="Rectangle 37"/>
+          <p:cNvSpPr/>
+          <p:nvPr/>
+        </p:nvSpPr>
+        <p:spPr>
+          <a:xfrm>
+            <a:off x="457200" y="4572000"/>
+            <a:ext cx="54864" cy="502920"/>
+          </a:xfrm>
+          <a:prstGeom prst="rect">
+            <a:avLst/>
           </a:prstGeom>
           <a:solidFill>
             <a:srgbClr val="D97306"/>
@@ -7707,250 +9390,134 @@
           </a:fontRef>
         </p:style>
         <p:txBody>
-          <a:bodyPr rtlCol="0" anchor="ctr" wrap="square"/>
+          <a:bodyPr rtlCol="0" anchor="ctr"/>
           <a:lstStyle/>
           <a:p>
             <a:pPr algn="ctr"/>
-            <a:r>
-              <a:rPr sz="1300" b="1" i="0">
-                <a:solidFill>
-                  <a:srgbClr val="FFFFFF"/>
-                </a:solidFill>
-                <a:latin typeface="Calibri"/>
-              </a:rPr>
-              <a:t>Pub/Sub</a:t>
-            </a:r>
-          </a:p>
-          <a:p>
-            <a:pPr algn="ctr"/>
-            <a:r>
-              <a:rPr sz="900" b="0" i="0">
-                <a:solidFill>
-                  <a:srgbClr val="F4F6FA"/>
-                </a:solidFill>
-                <a:latin typeface="Calibri"/>
-              </a:rPr>
-              <a:t>predictions stream</a:t>
-            </a:r>
-          </a:p>
-        </p:txBody>
-      </p:sp>
-      <p:sp>
-        <p:nvSpPr>
-          <p:cNvPr id="8" name="Rounded Rectangle 7"/>
-          <p:cNvSpPr/>
-          <p:nvPr/>
-        </p:nvSpPr>
-        <p:spPr>
-          <a:xfrm>
-            <a:off x="7955280" y="1463040"/>
-            <a:ext cx="1554480" cy="822960"/>
-          </a:xfrm>
-          <a:prstGeom prst="roundRect">
-            <a:avLst>
-              <a:gd name="adj" fmla="val 15000"/>
-            </a:avLst>
-          </a:prstGeom>
-          <a:solidFill>
-            <a:srgbClr val="0F6E7A"/>
-          </a:solidFill>
-          <a:ln>
-            <a:noFill/>
-          </a:ln>
-        </p:spPr>
-        <p:style>
-          <a:lnRef idx="1">
-            <a:schemeClr val="accent1"/>
-          </a:lnRef>
-          <a:fillRef idx="3">
-            <a:schemeClr val="accent1"/>
-          </a:fillRef>
-          <a:effectRef idx="2">
-            <a:schemeClr val="accent1"/>
-          </a:effectRef>
-          <a:fontRef idx="minor">
-            <a:schemeClr val="lt1"/>
-          </a:fontRef>
-        </p:style>
-        <p:txBody>
-          <a:bodyPr rtlCol="0" anchor="ctr" wrap="square"/>
-          <a:lstStyle/>
-          <a:p>
-            <a:pPr algn="ctr"/>
-            <a:r>
-              <a:rPr sz="1300" b="1" i="0">
-                <a:solidFill>
-                  <a:srgbClr val="FFFFFF"/>
-                </a:solidFill>
-                <a:latin typeface="Calibri"/>
-              </a:rPr>
-              <a:t>BigQuery</a:t>
-            </a:r>
-          </a:p>
-          <a:p>
-            <a:pPr algn="ctr"/>
-            <a:r>
-              <a:rPr sz="900" b="0" i="0">
-                <a:solidFill>
-                  <a:srgbClr val="F4F6FA"/>
-                </a:solidFill>
-                <a:latin typeface="Calibri"/>
-              </a:rPr>
-              <a:t>analytics + drift</a:t>
-            </a:r>
-          </a:p>
-        </p:txBody>
-      </p:sp>
-      <p:cxnSp>
-        <p:nvCxnSpPr>
-          <p:cNvPr id="9" name="Connector 8"/>
-          <p:cNvCxnSpPr/>
-          <p:nvPr/>
-        </p:nvCxnSpPr>
-        <p:spPr>
-          <a:xfrm>
-            <a:off x="2011680" y="1874520"/>
-            <a:ext cx="320040" cy="0"/>
-          </a:xfrm>
-          <a:prstGeom prst="curvedConnector3">
-            <a:avLst/>
-          </a:prstGeom>
-          <a:ln w="19050">
-            <a:solidFill>
-              <a:srgbClr val="333F52"/>
-            </a:solidFill>
-          </a:ln>
-        </p:spPr>
-        <p:style>
-          <a:lnRef idx="2">
-            <a:schemeClr val="accent1"/>
-          </a:lnRef>
-          <a:fillRef idx="0">
-            <a:schemeClr val="accent1"/>
-          </a:fillRef>
-          <a:effectRef idx="1">
-            <a:schemeClr val="accent1"/>
-          </a:effectRef>
-          <a:fontRef idx="minor">
-            <a:schemeClr val="tx1"/>
-          </a:fontRef>
-        </p:style>
-      </p:cxnSp>
-      <p:cxnSp>
-        <p:nvCxnSpPr>
-          <p:cNvPr id="10" name="Connector 9"/>
-          <p:cNvCxnSpPr/>
-          <p:nvPr/>
-        </p:nvCxnSpPr>
-        <p:spPr>
-          <a:xfrm>
-            <a:off x="3886200" y="1874520"/>
-            <a:ext cx="320040" cy="0"/>
-          </a:xfrm>
-          <a:prstGeom prst="curvedConnector3">
-            <a:avLst/>
-          </a:prstGeom>
-          <a:ln w="19050">
-            <a:solidFill>
-              <a:srgbClr val="333F52"/>
-            </a:solidFill>
-          </a:ln>
-        </p:spPr>
-        <p:style>
-          <a:lnRef idx="2">
-            <a:schemeClr val="accent1"/>
-          </a:lnRef>
-          <a:fillRef idx="0">
-            <a:schemeClr val="accent1"/>
-          </a:fillRef>
-          <a:effectRef idx="1">
-            <a:schemeClr val="accent1"/>
-          </a:effectRef>
-          <a:fontRef idx="minor">
-            <a:schemeClr val="tx1"/>
-          </a:fontRef>
-        </p:style>
-      </p:cxnSp>
-      <p:cxnSp>
-        <p:nvCxnSpPr>
-          <p:cNvPr id="11" name="Connector 10"/>
-          <p:cNvCxnSpPr/>
-          <p:nvPr/>
-        </p:nvCxnSpPr>
-        <p:spPr>
-          <a:xfrm>
-            <a:off x="5760720" y="1874520"/>
-            <a:ext cx="320040" cy="0"/>
-          </a:xfrm>
-          <a:prstGeom prst="curvedConnector3">
-            <a:avLst/>
-          </a:prstGeom>
-          <a:ln w="19050">
-            <a:solidFill>
-              <a:srgbClr val="333F52"/>
-            </a:solidFill>
-          </a:ln>
-        </p:spPr>
-        <p:style>
-          <a:lnRef idx="2">
-            <a:schemeClr val="accent1"/>
-          </a:lnRef>
-          <a:fillRef idx="0">
-            <a:schemeClr val="accent1"/>
-          </a:fillRef>
-          <a:effectRef idx="1">
-            <a:schemeClr val="accent1"/>
-          </a:effectRef>
-          <a:fontRef idx="minor">
-            <a:schemeClr val="tx1"/>
-          </a:fontRef>
-        </p:style>
-      </p:cxnSp>
-      <p:cxnSp>
-        <p:nvCxnSpPr>
-          <p:cNvPr id="12" name="Connector 11"/>
-          <p:cNvCxnSpPr/>
-          <p:nvPr/>
-        </p:nvCxnSpPr>
-        <p:spPr>
-          <a:xfrm>
-            <a:off x="7635240" y="1874520"/>
-            <a:ext cx="320040" cy="0"/>
-          </a:xfrm>
-          <a:prstGeom prst="curvedConnector3">
-            <a:avLst/>
-          </a:prstGeom>
-          <a:ln w="19050">
-            <a:solidFill>
-              <a:srgbClr val="333F52"/>
-            </a:solidFill>
-          </a:ln>
-        </p:spPr>
-        <p:style>
-          <a:lnRef idx="2">
-            <a:schemeClr val="accent1"/>
-          </a:lnRef>
-          <a:fillRef idx="0">
-            <a:schemeClr val="accent1"/>
-          </a:fillRef>
-          <a:effectRef idx="1">
-            <a:schemeClr val="accent1"/>
-          </a:effectRef>
-          <a:fontRef idx="minor">
-            <a:schemeClr val="tx1"/>
-          </a:fontRef>
-        </p:style>
-      </p:cxnSp>
-      <p:sp>
-        <p:nvSpPr>
-          <p:cNvPr id="13" name="TextBox 12"/>
+          </a:p>
+        </p:txBody>
+      </p:sp>
+      <p:sp>
+        <p:nvSpPr>
+          <p:cNvPr id="39" name="TextBox 38"/>
           <p:cNvSpPr txBox="1"/>
           <p:nvPr/>
         </p:nvSpPr>
         <p:spPr>
           <a:xfrm>
-            <a:off x="457200" y="2651760"/>
-            <a:ext cx="11277295" cy="411480"/>
+            <a:off x="621792" y="4572000"/>
+            <a:ext cx="4041648" cy="502920"/>
+          </a:xfrm>
+          <a:prstGeom prst="rect">
+            <a:avLst/>
+          </a:prstGeom>
+          <a:noFill/>
+        </p:spPr>
+        <p:txBody>
+          <a:bodyPr wrap="none" anchor="ctr">
+            <a:spAutoFit/>
+          </a:bodyPr>
+          <a:lstStyle/>
+          <a:p>
+            <a:r>
+              <a:rPr sz="1100" b="1" i="0">
+                <a:solidFill>
+                  <a:srgbClr val="0B1F3A"/>
+                </a:solidFill>
+                <a:latin typeface="Consolas"/>
+              </a:rPr>
+              <a:t>Dataform models, BigQuery views</a:t>
+            </a:r>
+          </a:p>
+        </p:txBody>
+      </p:sp>
+      <p:sp>
+        <p:nvSpPr>
+          <p:cNvPr id="40" name="TextBox 39"/>
+          <p:cNvSpPr txBox="1"/>
+          <p:nvPr/>
+        </p:nvSpPr>
+        <p:spPr>
+          <a:xfrm>
+            <a:off x="4663440" y="4572000"/>
+            <a:ext cx="3108960" cy="502920"/>
+          </a:xfrm>
+          <a:prstGeom prst="rect">
+            <a:avLst/>
+          </a:prstGeom>
+          <a:noFill/>
+        </p:spPr>
+        <p:txBody>
+          <a:bodyPr wrap="none" anchor="ctr">
+            <a:spAutoFit/>
+          </a:bodyPr>
+          <a:lstStyle/>
+          <a:p>
+            <a:r>
+              <a:rPr sz="1100" b="0" i="0">
+                <a:solidFill>
+                  <a:srgbClr val="333F52"/>
+                </a:solidFill>
+                <a:latin typeface="Calibri"/>
+              </a:rPr>
+              <a:t>Analyst layer</a:t>
+            </a:r>
+          </a:p>
+        </p:txBody>
+      </p:sp>
+      <p:sp>
+        <p:nvSpPr>
+          <p:cNvPr id="41" name="TextBox 40"/>
+          <p:cNvSpPr txBox="1"/>
+          <p:nvPr/>
+        </p:nvSpPr>
+        <p:spPr>
+          <a:xfrm>
+            <a:off x="7772400" y="4572000"/>
+            <a:ext cx="3962095" cy="502920"/>
+          </a:xfrm>
+          <a:prstGeom prst="rect">
+            <a:avLst/>
+          </a:prstGeom>
+          <a:noFill/>
+        </p:spPr>
+        <p:txBody>
+          <a:bodyPr wrap="square" anchor="ctr">
+            <a:spAutoFit/>
+          </a:bodyPr>
+          <a:lstStyle/>
+          <a:p>
+            <a:r>
+              <a:rPr sz="1100" b="1" i="0">
+                <a:solidFill>
+                  <a:srgbClr val="D97306"/>
+                </a:solidFill>
+                <a:latin typeface="Calibri"/>
+              </a:rPr>
+              <a:t>● </a:t>
+            </a:r>
+            <a:r>
+              <a:rPr sz="1100" b="0" i="0">
+                <a:solidFill>
+                  <a:srgbClr val="333F52"/>
+                </a:solidFill>
+                <a:latin typeface="Calibri"/>
+              </a:rPr>
+              <a:t>Available in Looker Studio as a second visual artefact (optional)</a:t>
+            </a:r>
+          </a:p>
+        </p:txBody>
+      </p:sp>
+      <p:sp>
+        <p:nvSpPr>
+          <p:cNvPr id="42" name="TextBox 41"/>
+          <p:cNvSpPr txBox="1"/>
+          <p:nvPr/>
+        </p:nvSpPr>
+        <p:spPr>
+          <a:xfrm>
+            <a:off x="457200" y="5184648"/>
+            <a:ext cx="11277295" cy="457200"/>
           </a:xfrm>
           <a:prstGeom prst="rect">
             <a:avLst/>
@@ -7963,34 +9530,31 @@
           </a:bodyPr>
           <a:lstStyle/>
           <a:p>
-            <a:pPr algn="ctr"/>
-            <a:r>
-              <a:rPr sz="1100" b="0" i="1">
+            <a:r>
+              <a:rPr sz="1000" b="0" i="1">
                 <a:solidFill>
                   <a:srgbClr val="6B7380"/>
                 </a:solidFill>
                 <a:latin typeface="Calibri"/>
               </a:rPr>
-              <a:t>Each request is wrapped in production safety controls</a:t>
-            </a:r>
-          </a:p>
-        </p:txBody>
-      </p:sp>
-      <p:sp>
-        <p:nvSpPr>
-          <p:cNvPr id="14" name="Rounded Rectangle 13"/>
+              <a:t>Nothing else in the repository is a runnable demo. The dashboard plus a handful of API calls against the scoring service is the complete client-facing surface.</a:t>
+            </a:r>
+          </a:p>
+        </p:txBody>
+      </p:sp>
+      <p:sp>
+        <p:nvSpPr>
+          <p:cNvPr id="43" name="Rectangle 42"/>
           <p:cNvSpPr/>
           <p:nvPr/>
         </p:nvSpPr>
         <p:spPr>
           <a:xfrm>
-            <a:off x="457200" y="3154680"/>
-            <a:ext cx="1554480" cy="822960"/>
-          </a:xfrm>
-          <a:prstGeom prst="roundRect">
-            <a:avLst>
-              <a:gd name="adj" fmla="val 15000"/>
-            </a:avLst>
+            <a:off x="0" y="6537960"/>
+            <a:ext cx="12191695" cy="320040"/>
+          </a:xfrm>
+          <a:prstGeom prst="rect">
+            <a:avLst/>
           </a:prstGeom>
           <a:solidFill>
             <a:srgbClr val="F4F6FA"/>
@@ -8014,444 +9578,17 @@
           </a:fontRef>
         </p:style>
         <p:txBody>
-          <a:bodyPr rtlCol="0" anchor="ctr" wrap="square"/>
+          <a:bodyPr rtlCol="0" anchor="ctr" lIns="548640" tIns="54864"/>
           <a:lstStyle/>
           <a:p>
             <a:pPr algn="ctr"/>
             <a:r>
-              <a:rPr sz="1300" b="1" i="0">
-                <a:solidFill>
-                  <a:srgbClr val="0B1F3A"/>
-                </a:solidFill>
-                <a:latin typeface="Calibri"/>
-              </a:rPr>
-              <a:t>Timeouts</a:t>
-            </a:r>
-          </a:p>
-          <a:p>
-            <a:pPr algn="ctr"/>
-            <a:r>
               <a:rPr sz="900" b="0" i="0">
                 <a:solidFill>
                   <a:srgbClr val="6B7380"/>
                 </a:solidFill>
                 <a:latin typeface="Calibri"/>
               </a:rPr>
-              <a:t>model + BQ budgets</a:t>
-            </a:r>
-          </a:p>
-        </p:txBody>
-      </p:sp>
-      <p:sp>
-        <p:nvSpPr>
-          <p:cNvPr id="15" name="Rounded Rectangle 14"/>
-          <p:cNvSpPr/>
-          <p:nvPr/>
-        </p:nvSpPr>
-        <p:spPr>
-          <a:xfrm>
-            <a:off x="2148840" y="3154680"/>
-            <a:ext cx="1554480" cy="822960"/>
-          </a:xfrm>
-          <a:prstGeom prst="roundRect">
-            <a:avLst>
-              <a:gd name="adj" fmla="val 15000"/>
-            </a:avLst>
-          </a:prstGeom>
-          <a:solidFill>
-            <a:srgbClr val="F4F6FA"/>
-          </a:solidFill>
-          <a:ln>
-            <a:noFill/>
-          </a:ln>
-        </p:spPr>
-        <p:style>
-          <a:lnRef idx="1">
-            <a:schemeClr val="accent1"/>
-          </a:lnRef>
-          <a:fillRef idx="3">
-            <a:schemeClr val="accent1"/>
-          </a:fillRef>
-          <a:effectRef idx="2">
-            <a:schemeClr val="accent1"/>
-          </a:effectRef>
-          <a:fontRef idx="minor">
-            <a:schemeClr val="lt1"/>
-          </a:fontRef>
-        </p:style>
-        <p:txBody>
-          <a:bodyPr rtlCol="0" anchor="ctr" wrap="square"/>
-          <a:lstStyle/>
-          <a:p>
-            <a:pPr algn="ctr"/>
-            <a:r>
-              <a:rPr sz="1300" b="1" i="0">
-                <a:solidFill>
-                  <a:srgbClr val="0B1F3A"/>
-                </a:solidFill>
-                <a:latin typeface="Calibri"/>
-              </a:rPr>
-              <a:t>Circuit breaker</a:t>
-            </a:r>
-          </a:p>
-          <a:p>
-            <a:pPr algn="ctr"/>
-            <a:r>
-              <a:rPr sz="900" b="0" i="0">
-                <a:solidFill>
-                  <a:srgbClr val="6B7380"/>
-                </a:solidFill>
-                <a:latin typeface="Calibri"/>
-              </a:rPr>
-              <a:t>fail fast, recover</a:t>
-            </a:r>
-          </a:p>
-        </p:txBody>
-      </p:sp>
-      <p:sp>
-        <p:nvSpPr>
-          <p:cNvPr id="16" name="Rounded Rectangle 15"/>
-          <p:cNvSpPr/>
-          <p:nvPr/>
-        </p:nvSpPr>
-        <p:spPr>
-          <a:xfrm>
-            <a:off x="3840480" y="3154680"/>
-            <a:ext cx="1554480" cy="822960"/>
-          </a:xfrm>
-          <a:prstGeom prst="roundRect">
-            <a:avLst>
-              <a:gd name="adj" fmla="val 15000"/>
-            </a:avLst>
-          </a:prstGeom>
-          <a:solidFill>
-            <a:srgbClr val="F4F6FA"/>
-          </a:solidFill>
-          <a:ln>
-            <a:noFill/>
-          </a:ln>
-        </p:spPr>
-        <p:style>
-          <a:lnRef idx="1">
-            <a:schemeClr val="accent1"/>
-          </a:lnRef>
-          <a:fillRef idx="3">
-            <a:schemeClr val="accent1"/>
-          </a:fillRef>
-          <a:effectRef idx="2">
-            <a:schemeClr val="accent1"/>
-          </a:effectRef>
-          <a:fontRef idx="minor">
-            <a:schemeClr val="lt1"/>
-          </a:fontRef>
-        </p:style>
-        <p:txBody>
-          <a:bodyPr rtlCol="0" anchor="ctr" wrap="square"/>
-          <a:lstStyle/>
-          <a:p>
-            <a:pPr algn="ctr"/>
-            <a:r>
-              <a:rPr sz="1300" b="1" i="0">
-                <a:solidFill>
-                  <a:srgbClr val="0B1F3A"/>
-                </a:solidFill>
-                <a:latin typeface="Calibri"/>
-              </a:rPr>
-              <a:t>Anomaly detection</a:t>
-            </a:r>
-          </a:p>
-          <a:p>
-            <a:pPr algn="ctr"/>
-            <a:r>
-              <a:rPr sz="900" b="0" i="0">
-                <a:solidFill>
-                  <a:srgbClr val="6B7380"/>
-                </a:solidFill>
-                <a:latin typeface="Calibri"/>
-              </a:rPr>
-              <a:t>null-rate window</a:t>
-            </a:r>
-          </a:p>
-        </p:txBody>
-      </p:sp>
-      <p:sp>
-        <p:nvSpPr>
-          <p:cNvPr id="17" name="Rounded Rectangle 16"/>
-          <p:cNvSpPr/>
-          <p:nvPr/>
-        </p:nvSpPr>
-        <p:spPr>
-          <a:xfrm>
-            <a:off x="5532120" y="3154680"/>
-            <a:ext cx="1554480" cy="822960"/>
-          </a:xfrm>
-          <a:prstGeom prst="roundRect">
-            <a:avLst>
-              <a:gd name="adj" fmla="val 15000"/>
-            </a:avLst>
-          </a:prstGeom>
-          <a:solidFill>
-            <a:srgbClr val="F4F6FA"/>
-          </a:solidFill>
-          <a:ln>
-            <a:noFill/>
-          </a:ln>
-        </p:spPr>
-        <p:style>
-          <a:lnRef idx="1">
-            <a:schemeClr val="accent1"/>
-          </a:lnRef>
-          <a:fillRef idx="3">
-            <a:schemeClr val="accent1"/>
-          </a:fillRef>
-          <a:effectRef idx="2">
-            <a:schemeClr val="accent1"/>
-          </a:effectRef>
-          <a:fontRef idx="minor">
-            <a:schemeClr val="lt1"/>
-          </a:fontRef>
-        </p:style>
-        <p:txBody>
-          <a:bodyPr rtlCol="0" anchor="ctr" wrap="square"/>
-          <a:lstStyle/>
-          <a:p>
-            <a:pPr algn="ctr"/>
-            <a:r>
-              <a:rPr sz="1300" b="1" i="0">
-                <a:solidFill>
-                  <a:srgbClr val="0B1F3A"/>
-                </a:solidFill>
-                <a:latin typeface="Calibri"/>
-              </a:rPr>
-              <a:t>Range clamp</a:t>
-            </a:r>
-          </a:p>
-          <a:p>
-            <a:pPr algn="ctr"/>
-            <a:r>
-              <a:rPr sz="900" b="0" i="0">
-                <a:solidFill>
-                  <a:srgbClr val="6B7380"/>
-                </a:solidFill>
-                <a:latin typeface="Calibri"/>
-              </a:rPr>
-              <a:t>no negative RPC</a:t>
-            </a:r>
-          </a:p>
-        </p:txBody>
-      </p:sp>
-      <p:sp>
-        <p:nvSpPr>
-          <p:cNvPr id="18" name="Rounded Rectangle 17"/>
-          <p:cNvSpPr/>
-          <p:nvPr/>
-        </p:nvSpPr>
-        <p:spPr>
-          <a:xfrm>
-            <a:off x="7223760" y="3154680"/>
-            <a:ext cx="1554480" cy="822960"/>
-          </a:xfrm>
-          <a:prstGeom prst="roundRect">
-            <a:avLst>
-              <a:gd name="adj" fmla="val 15000"/>
-            </a:avLst>
-          </a:prstGeom>
-          <a:solidFill>
-            <a:srgbClr val="F4F6FA"/>
-          </a:solidFill>
-          <a:ln>
-            <a:noFill/>
-          </a:ln>
-        </p:spPr>
-        <p:style>
-          <a:lnRef idx="1">
-            <a:schemeClr val="accent1"/>
-          </a:lnRef>
-          <a:fillRef idx="3">
-            <a:schemeClr val="accent1"/>
-          </a:fillRef>
-          <a:effectRef idx="2">
-            <a:schemeClr val="accent1"/>
-          </a:effectRef>
-          <a:fontRef idx="minor">
-            <a:schemeClr val="lt1"/>
-          </a:fontRef>
-        </p:style>
-        <p:txBody>
-          <a:bodyPr rtlCol="0" anchor="ctr" wrap="square"/>
-          <a:lstStyle/>
-          <a:p>
-            <a:pPr algn="ctr"/>
-            <a:r>
-              <a:rPr sz="1300" b="1" i="0">
-                <a:solidFill>
-                  <a:srgbClr val="0B1F3A"/>
-                </a:solidFill>
-                <a:latin typeface="Calibri"/>
-              </a:rPr>
-              <a:t>Explanations</a:t>
-            </a:r>
-          </a:p>
-          <a:p>
-            <a:pPr algn="ctr"/>
-            <a:r>
-              <a:rPr sz="900" b="0" i="0">
-                <a:solidFill>
-                  <a:srgbClr val="6B7380"/>
-                </a:solidFill>
-                <a:latin typeface="Calibri"/>
-              </a:rPr>
-              <a:t>per-feature SHAP</a:t>
-            </a:r>
-          </a:p>
-        </p:txBody>
-      </p:sp>
-      <p:sp>
-        <p:nvSpPr>
-          <p:cNvPr id="19" name="TextBox 18"/>
-          <p:cNvSpPr txBox="1"/>
-          <p:nvPr/>
-        </p:nvSpPr>
-        <p:spPr>
-          <a:xfrm>
-            <a:off x="457200" y="4297680"/>
-            <a:ext cx="11277295" cy="1097280"/>
-          </a:xfrm>
-          <a:prstGeom prst="rect">
-            <a:avLst/>
-          </a:prstGeom>
-          <a:noFill/>
-        </p:spPr>
-        <p:txBody>
-          <a:bodyPr wrap="square">
-            <a:spAutoFit/>
-          </a:bodyPr>
-          <a:lstStyle/>
-          <a:p>
-            <a:pPr>
-              <a:spcAft>
-                <a:spcPts val="300"/>
-              </a:spcAft>
-            </a:pPr>
-            <a:r>
-              <a:rPr sz="1400" b="1" i="0">
-                <a:solidFill>
-                  <a:srgbClr val="0F6E7A"/>
-                </a:solidFill>
-                <a:latin typeface="Calibri"/>
-              </a:rPr>
-              <a:t>Why this shape</a:t>
-            </a:r>
-          </a:p>
-          <a:p>
-            <a:r>
-              <a:rPr sz="1200" b="1" i="0">
-                <a:solidFill>
-                  <a:srgbClr val="D97306"/>
-                </a:solidFill>
-                <a:latin typeface="Calibri"/>
-              </a:rPr>
-              <a:t>•  </a:t>
-            </a:r>
-            <a:r>
-              <a:rPr sz="1200" b="0" i="0">
-                <a:solidFill>
-                  <a:srgbClr val="333F52"/>
-                </a:solidFill>
-                <a:latin typeface="Calibri"/>
-              </a:rPr>
-              <a:t>Stateless API tier scales horizontally with traffic — pay only for what you use.</a:t>
-            </a:r>
-          </a:p>
-          <a:p>
-            <a:r>
-              <a:rPr sz="1200" b="1" i="0">
-                <a:solidFill>
-                  <a:srgbClr val="D97306"/>
-                </a:solidFill>
-                <a:latin typeface="Calibri"/>
-              </a:rPr>
-              <a:t>•  </a:t>
-            </a:r>
-            <a:r>
-              <a:rPr sz="1200" b="0" i="0">
-                <a:solidFill>
-                  <a:srgbClr val="333F52"/>
-                </a:solidFill>
-                <a:latin typeface="Calibri"/>
-              </a:rPr>
-              <a:t>Vertex AI hosts the model, so retraining and versioning never touch the API.</a:t>
-            </a:r>
-          </a:p>
-          <a:p>
-            <a:r>
-              <a:rPr sz="1200" b="1" i="0">
-                <a:solidFill>
-                  <a:srgbClr val="D97306"/>
-                </a:solidFill>
-                <a:latin typeface="Calibri"/>
-              </a:rPr>
-              <a:t>•  </a:t>
-            </a:r>
-            <a:r>
-              <a:rPr sz="1200" b="0" i="0">
-                <a:solidFill>
-                  <a:srgbClr val="333F52"/>
-                </a:solidFill>
-                <a:latin typeface="Calibri"/>
-              </a:rPr>
-              <a:t>Every prediction is captured in BigQuery — same dataset your analysts already use.</a:t>
-            </a:r>
-          </a:p>
-        </p:txBody>
-      </p:sp>
-      <p:sp>
-        <p:nvSpPr>
-          <p:cNvPr id="20" name="Rectangle 19"/>
-          <p:cNvSpPr/>
-          <p:nvPr/>
-        </p:nvSpPr>
-        <p:spPr>
-          <a:xfrm>
-            <a:off x="0" y="6537960"/>
-            <a:ext cx="12191695" cy="320040"/>
-          </a:xfrm>
-          <a:prstGeom prst="rect">
-            <a:avLst/>
-          </a:prstGeom>
-          <a:solidFill>
-            <a:srgbClr val="F4F6FA"/>
-          </a:solidFill>
-          <a:ln>
-            <a:noFill/>
-          </a:ln>
-        </p:spPr>
-        <p:style>
-          <a:lnRef idx="1">
-            <a:schemeClr val="accent1"/>
-          </a:lnRef>
-          <a:fillRef idx="3">
-            <a:schemeClr val="accent1"/>
-          </a:fillRef>
-          <a:effectRef idx="2">
-            <a:schemeClr val="accent1"/>
-          </a:effectRef>
-          <a:fontRef idx="minor">
-            <a:schemeClr val="lt1"/>
-          </a:fontRef>
-        </p:style>
-        <p:txBody>
-          <a:bodyPr rtlCol="0" anchor="ctr" lIns="548640" tIns="54864"/>
-          <a:lstStyle/>
-          <a:p>
-            <a:pPr algn="ctr"/>
-            <a:r>
-              <a:rPr sz="900" b="0" i="0">
-                <a:solidFill>
-                  <a:srgbClr val="6B7380"/>
-                </a:solidFill>
-                <a:latin typeface="Calibri"/>
-              </a:rPr>
               <a:t>Predictive RPC Estimator — Client Demo</a:t>
             </a:r>
           </a:p>
@@ -8459,7 +9596,7 @@
       </p:sp>
       <p:sp>
         <p:nvSpPr>
-          <p:cNvPr id="21" name="TextBox 20"/>
+          <p:cNvPr id="44" name="TextBox 43"/>
           <p:cNvSpPr txBox="1"/>
           <p:nvPr/>
         </p:nvSpPr>
@@ -8487,7 +9624,7 @@
                 </a:solidFill>
                 <a:latin typeface="Calibri"/>
               </a:rPr>
-              <a:t>5 / 14</a:t>
+              <a:t>6 / 15</a:t>
             </a:r>
           </a:p>
         </p:txBody>
@@ -8557,7 +9694,7 @@
                 </a:solidFill>
                 <a:latin typeface="Calibri"/>
               </a:rPr>
-              <a:t>FIVE MINUTES, THREE SCREENS</a:t>
+              <a:t>ARCHITECTURE, IN ONE PICTURE</a:t>
             </a:r>
           </a:p>
           <a:p>
@@ -8568,7 +9705,7 @@
                 </a:solidFill>
                 <a:latin typeface="Calibri"/>
               </a:rPr>
-              <a:t>Live demo — what you will see</a:t>
+              <a:t>How it works</a:t>
             </a:r>
           </a:p>
         </p:txBody>
@@ -8618,14 +9755,484 @@
       </p:sp>
       <p:sp>
         <p:nvSpPr>
-          <p:cNvPr id="4" name="TextBox 3"/>
+          <p:cNvPr id="4" name="Rounded Rectangle 3"/>
+          <p:cNvSpPr/>
+          <p:nvPr/>
+        </p:nvSpPr>
+        <p:spPr>
+          <a:xfrm>
+            <a:off x="457200" y="1463040"/>
+            <a:ext cx="1554480" cy="822960"/>
+          </a:xfrm>
+          <a:prstGeom prst="roundRect">
+            <a:avLst>
+              <a:gd name="adj" fmla="val 15000"/>
+            </a:avLst>
+          </a:prstGeom>
+          <a:solidFill>
+            <a:srgbClr val="333F52"/>
+          </a:solidFill>
+          <a:ln>
+            <a:noFill/>
+          </a:ln>
+        </p:spPr>
+        <p:style>
+          <a:lnRef idx="1">
+            <a:schemeClr val="accent1"/>
+          </a:lnRef>
+          <a:fillRef idx="3">
+            <a:schemeClr val="accent1"/>
+          </a:fillRef>
+          <a:effectRef idx="2">
+            <a:schemeClr val="accent1"/>
+          </a:effectRef>
+          <a:fontRef idx="minor">
+            <a:schemeClr val="lt1"/>
+          </a:fontRef>
+        </p:style>
+        <p:txBody>
+          <a:bodyPr rtlCol="0" anchor="ctr" wrap="square"/>
+          <a:lstStyle/>
+          <a:p>
+            <a:pPr algn="ctr"/>
+            <a:r>
+              <a:rPr sz="1300" b="1" i="0">
+                <a:solidFill>
+                  <a:srgbClr val="FFFFFF"/>
+                </a:solidFill>
+                <a:latin typeface="Calibri"/>
+              </a:rPr>
+              <a:t>Client app</a:t>
+            </a:r>
+          </a:p>
+          <a:p>
+            <a:pPr algn="ctr"/>
+            <a:r>
+              <a:rPr sz="900" b="0" i="0">
+                <a:solidFill>
+                  <a:srgbClr val="F4F6FA"/>
+                </a:solidFill>
+                <a:latin typeface="Calibri"/>
+              </a:rPr>
+              <a:t>browser / server</a:t>
+            </a:r>
+          </a:p>
+        </p:txBody>
+      </p:sp>
+      <p:sp>
+        <p:nvSpPr>
+          <p:cNvPr id="5" name="Rounded Rectangle 4"/>
+          <p:cNvSpPr/>
+          <p:nvPr/>
+        </p:nvSpPr>
+        <p:spPr>
+          <a:xfrm>
+            <a:off x="2331720" y="1463040"/>
+            <a:ext cx="1554480" cy="822960"/>
+          </a:xfrm>
+          <a:prstGeom prst="roundRect">
+            <a:avLst>
+              <a:gd name="adj" fmla="val 15000"/>
+            </a:avLst>
+          </a:prstGeom>
+          <a:solidFill>
+            <a:srgbClr val="0F6E7A"/>
+          </a:solidFill>
+          <a:ln>
+            <a:noFill/>
+          </a:ln>
+        </p:spPr>
+        <p:style>
+          <a:lnRef idx="1">
+            <a:schemeClr val="accent1"/>
+          </a:lnRef>
+          <a:fillRef idx="3">
+            <a:schemeClr val="accent1"/>
+          </a:fillRef>
+          <a:effectRef idx="2">
+            <a:schemeClr val="accent1"/>
+          </a:effectRef>
+          <a:fontRef idx="minor">
+            <a:schemeClr val="lt1"/>
+          </a:fontRef>
+        </p:style>
+        <p:txBody>
+          <a:bodyPr rtlCol="0" anchor="ctr" wrap="square"/>
+          <a:lstStyle/>
+          <a:p>
+            <a:pPr algn="ctr"/>
+            <a:r>
+              <a:rPr sz="1300" b="1" i="0">
+                <a:solidFill>
+                  <a:srgbClr val="FFFFFF"/>
+                </a:solidFill>
+                <a:latin typeface="Calibri"/>
+              </a:rPr>
+              <a:t>Scoring API</a:t>
+            </a:r>
+          </a:p>
+          <a:p>
+            <a:pPr algn="ctr"/>
+            <a:r>
+              <a:rPr sz="900" b="0" i="0">
+                <a:solidFill>
+                  <a:srgbClr val="F4F6FA"/>
+                </a:solidFill>
+                <a:latin typeface="Calibri"/>
+              </a:rPr>
+              <a:t>Cloud Run · Rust</a:t>
+            </a:r>
+          </a:p>
+        </p:txBody>
+      </p:sp>
+      <p:sp>
+        <p:nvSpPr>
+          <p:cNvPr id="6" name="Rounded Rectangle 5"/>
+          <p:cNvSpPr/>
+          <p:nvPr/>
+        </p:nvSpPr>
+        <p:spPr>
+          <a:xfrm>
+            <a:off x="4206240" y="1463040"/>
+            <a:ext cx="1554480" cy="822960"/>
+          </a:xfrm>
+          <a:prstGeom prst="roundRect">
+            <a:avLst>
+              <a:gd name="adj" fmla="val 15000"/>
+            </a:avLst>
+          </a:prstGeom>
+          <a:solidFill>
+            <a:srgbClr val="0B1F3A"/>
+          </a:solidFill>
+          <a:ln>
+            <a:noFill/>
+          </a:ln>
+        </p:spPr>
+        <p:style>
+          <a:lnRef idx="1">
+            <a:schemeClr val="accent1"/>
+          </a:lnRef>
+          <a:fillRef idx="3">
+            <a:schemeClr val="accent1"/>
+          </a:fillRef>
+          <a:effectRef idx="2">
+            <a:schemeClr val="accent1"/>
+          </a:effectRef>
+          <a:fontRef idx="minor">
+            <a:schemeClr val="lt1"/>
+          </a:fontRef>
+        </p:style>
+        <p:txBody>
+          <a:bodyPr rtlCol="0" anchor="ctr" wrap="square"/>
+          <a:lstStyle/>
+          <a:p>
+            <a:pPr algn="ctr"/>
+            <a:r>
+              <a:rPr sz="1300" b="1" i="0">
+                <a:solidFill>
+                  <a:srgbClr val="FFFFFF"/>
+                </a:solidFill>
+                <a:latin typeface="Calibri"/>
+              </a:rPr>
+              <a:t>Vertex AI</a:t>
+            </a:r>
+          </a:p>
+          <a:p>
+            <a:pPr algn="ctr"/>
+            <a:r>
+              <a:rPr sz="900" b="0" i="0">
+                <a:solidFill>
+                  <a:srgbClr val="F4F6FA"/>
+                </a:solidFill>
+                <a:latin typeface="Calibri"/>
+              </a:rPr>
+              <a:t>XGBoost regressor</a:t>
+            </a:r>
+          </a:p>
+        </p:txBody>
+      </p:sp>
+      <p:sp>
+        <p:nvSpPr>
+          <p:cNvPr id="7" name="Rounded Rectangle 6"/>
+          <p:cNvSpPr/>
+          <p:nvPr/>
+        </p:nvSpPr>
+        <p:spPr>
+          <a:xfrm>
+            <a:off x="6080760" y="1463040"/>
+            <a:ext cx="1554480" cy="822960"/>
+          </a:xfrm>
+          <a:prstGeom prst="roundRect">
+            <a:avLst>
+              <a:gd name="adj" fmla="val 15000"/>
+            </a:avLst>
+          </a:prstGeom>
+          <a:solidFill>
+            <a:srgbClr val="D97306"/>
+          </a:solidFill>
+          <a:ln>
+            <a:noFill/>
+          </a:ln>
+        </p:spPr>
+        <p:style>
+          <a:lnRef idx="1">
+            <a:schemeClr val="accent1"/>
+          </a:lnRef>
+          <a:fillRef idx="3">
+            <a:schemeClr val="accent1"/>
+          </a:fillRef>
+          <a:effectRef idx="2">
+            <a:schemeClr val="accent1"/>
+          </a:effectRef>
+          <a:fontRef idx="minor">
+            <a:schemeClr val="lt1"/>
+          </a:fontRef>
+        </p:style>
+        <p:txBody>
+          <a:bodyPr rtlCol="0" anchor="ctr" wrap="square"/>
+          <a:lstStyle/>
+          <a:p>
+            <a:pPr algn="ctr"/>
+            <a:r>
+              <a:rPr sz="1300" b="1" i="0">
+                <a:solidFill>
+                  <a:srgbClr val="FFFFFF"/>
+                </a:solidFill>
+                <a:latin typeface="Calibri"/>
+              </a:rPr>
+              <a:t>Pub/Sub</a:t>
+            </a:r>
+          </a:p>
+          <a:p>
+            <a:pPr algn="ctr"/>
+            <a:r>
+              <a:rPr sz="900" b="0" i="0">
+                <a:solidFill>
+                  <a:srgbClr val="F4F6FA"/>
+                </a:solidFill>
+                <a:latin typeface="Calibri"/>
+              </a:rPr>
+              <a:t>predictions stream</a:t>
+            </a:r>
+          </a:p>
+        </p:txBody>
+      </p:sp>
+      <p:sp>
+        <p:nvSpPr>
+          <p:cNvPr id="8" name="Rounded Rectangle 7"/>
+          <p:cNvSpPr/>
+          <p:nvPr/>
+        </p:nvSpPr>
+        <p:spPr>
+          <a:xfrm>
+            <a:off x="7955280" y="1463040"/>
+            <a:ext cx="1554480" cy="822960"/>
+          </a:xfrm>
+          <a:prstGeom prst="roundRect">
+            <a:avLst>
+              <a:gd name="adj" fmla="val 15000"/>
+            </a:avLst>
+          </a:prstGeom>
+          <a:solidFill>
+            <a:srgbClr val="0F6E7A"/>
+          </a:solidFill>
+          <a:ln>
+            <a:noFill/>
+          </a:ln>
+        </p:spPr>
+        <p:style>
+          <a:lnRef idx="1">
+            <a:schemeClr val="accent1"/>
+          </a:lnRef>
+          <a:fillRef idx="3">
+            <a:schemeClr val="accent1"/>
+          </a:fillRef>
+          <a:effectRef idx="2">
+            <a:schemeClr val="accent1"/>
+          </a:effectRef>
+          <a:fontRef idx="minor">
+            <a:schemeClr val="lt1"/>
+          </a:fontRef>
+        </p:style>
+        <p:txBody>
+          <a:bodyPr rtlCol="0" anchor="ctr" wrap="square"/>
+          <a:lstStyle/>
+          <a:p>
+            <a:pPr algn="ctr"/>
+            <a:r>
+              <a:rPr sz="1300" b="1" i="0">
+                <a:solidFill>
+                  <a:srgbClr val="FFFFFF"/>
+                </a:solidFill>
+                <a:latin typeface="Calibri"/>
+              </a:rPr>
+              <a:t>BigQuery</a:t>
+            </a:r>
+          </a:p>
+          <a:p>
+            <a:pPr algn="ctr"/>
+            <a:r>
+              <a:rPr sz="900" b="0" i="0">
+                <a:solidFill>
+                  <a:srgbClr val="F4F6FA"/>
+                </a:solidFill>
+                <a:latin typeface="Calibri"/>
+              </a:rPr>
+              <a:t>analytics + drift</a:t>
+            </a:r>
+          </a:p>
+        </p:txBody>
+      </p:sp>
+      <p:cxnSp>
+        <p:nvCxnSpPr>
+          <p:cNvPr id="9" name="Connector 8"/>
+          <p:cNvCxnSpPr/>
+          <p:nvPr/>
+        </p:nvCxnSpPr>
+        <p:spPr>
+          <a:xfrm>
+            <a:off x="2011680" y="1874520"/>
+            <a:ext cx="320040" cy="0"/>
+          </a:xfrm>
+          <a:prstGeom prst="curvedConnector3">
+            <a:avLst/>
+          </a:prstGeom>
+          <a:ln w="19050">
+            <a:solidFill>
+              <a:srgbClr val="333F52"/>
+            </a:solidFill>
+          </a:ln>
+        </p:spPr>
+        <p:style>
+          <a:lnRef idx="2">
+            <a:schemeClr val="accent1"/>
+          </a:lnRef>
+          <a:fillRef idx="0">
+            <a:schemeClr val="accent1"/>
+          </a:fillRef>
+          <a:effectRef idx="1">
+            <a:schemeClr val="accent1"/>
+          </a:effectRef>
+          <a:fontRef idx="minor">
+            <a:schemeClr val="tx1"/>
+          </a:fontRef>
+        </p:style>
+      </p:cxnSp>
+      <p:cxnSp>
+        <p:nvCxnSpPr>
+          <p:cNvPr id="10" name="Connector 9"/>
+          <p:cNvCxnSpPr/>
+          <p:nvPr/>
+        </p:nvCxnSpPr>
+        <p:spPr>
+          <a:xfrm>
+            <a:off x="3886200" y="1874520"/>
+            <a:ext cx="320040" cy="0"/>
+          </a:xfrm>
+          <a:prstGeom prst="curvedConnector3">
+            <a:avLst/>
+          </a:prstGeom>
+          <a:ln w="19050">
+            <a:solidFill>
+              <a:srgbClr val="333F52"/>
+            </a:solidFill>
+          </a:ln>
+        </p:spPr>
+        <p:style>
+          <a:lnRef idx="2">
+            <a:schemeClr val="accent1"/>
+          </a:lnRef>
+          <a:fillRef idx="0">
+            <a:schemeClr val="accent1"/>
+          </a:fillRef>
+          <a:effectRef idx="1">
+            <a:schemeClr val="accent1"/>
+          </a:effectRef>
+          <a:fontRef idx="minor">
+            <a:schemeClr val="tx1"/>
+          </a:fontRef>
+        </p:style>
+      </p:cxnSp>
+      <p:cxnSp>
+        <p:nvCxnSpPr>
+          <p:cNvPr id="11" name="Connector 10"/>
+          <p:cNvCxnSpPr/>
+          <p:nvPr/>
+        </p:nvCxnSpPr>
+        <p:spPr>
+          <a:xfrm>
+            <a:off x="5760720" y="1874520"/>
+            <a:ext cx="320040" cy="0"/>
+          </a:xfrm>
+          <a:prstGeom prst="curvedConnector3">
+            <a:avLst/>
+          </a:prstGeom>
+          <a:ln w="19050">
+            <a:solidFill>
+              <a:srgbClr val="333F52"/>
+            </a:solidFill>
+          </a:ln>
+        </p:spPr>
+        <p:style>
+          <a:lnRef idx="2">
+            <a:schemeClr val="accent1"/>
+          </a:lnRef>
+          <a:fillRef idx="0">
+            <a:schemeClr val="accent1"/>
+          </a:fillRef>
+          <a:effectRef idx="1">
+            <a:schemeClr val="accent1"/>
+          </a:effectRef>
+          <a:fontRef idx="minor">
+            <a:schemeClr val="tx1"/>
+          </a:fontRef>
+        </p:style>
+      </p:cxnSp>
+      <p:cxnSp>
+        <p:nvCxnSpPr>
+          <p:cNvPr id="12" name="Connector 11"/>
+          <p:cNvCxnSpPr/>
+          <p:nvPr/>
+        </p:nvCxnSpPr>
+        <p:spPr>
+          <a:xfrm>
+            <a:off x="7635240" y="1874520"/>
+            <a:ext cx="320040" cy="0"/>
+          </a:xfrm>
+          <a:prstGeom prst="curvedConnector3">
+            <a:avLst/>
+          </a:prstGeom>
+          <a:ln w="19050">
+            <a:solidFill>
+              <a:srgbClr val="333F52"/>
+            </a:solidFill>
+          </a:ln>
+        </p:spPr>
+        <p:style>
+          <a:lnRef idx="2">
+            <a:schemeClr val="accent1"/>
+          </a:lnRef>
+          <a:fillRef idx="0">
+            <a:schemeClr val="accent1"/>
+          </a:fillRef>
+          <a:effectRef idx="1">
+            <a:schemeClr val="accent1"/>
+          </a:effectRef>
+          <a:fontRef idx="minor">
+            <a:schemeClr val="tx1"/>
+          </a:fontRef>
+        </p:style>
+      </p:cxnSp>
+      <p:sp>
+        <p:nvSpPr>
+          <p:cNvPr id="13" name="TextBox 12"/>
           <p:cNvSpPr txBox="1"/>
           <p:nvPr/>
         </p:nvSpPr>
         <p:spPr>
           <a:xfrm>
-            <a:off x="548640" y="1143000"/>
-            <a:ext cx="11094415" cy="5303520"/>
+            <a:off x="457200" y="2651760"/>
+            <a:ext cx="11277295" cy="411480"/>
           </a:xfrm>
           <a:prstGeom prst="rect">
             <a:avLst/>
@@ -8633,171 +10240,39 @@
           <a:noFill/>
         </p:spPr>
         <p:txBody>
-          <a:bodyPr wrap="square">
+          <a:bodyPr wrap="none">
             <a:spAutoFit/>
           </a:bodyPr>
           <a:lstStyle/>
           <a:p>
-            <a:pPr>
-              <a:lnSpc>
-                <a:spcPct val="120000"/>
-              </a:lnSpc>
-              <a:spcAft>
-                <a:spcPts val="600"/>
-              </a:spcAft>
-            </a:pPr>
-            <a:r>
-              <a:rPr sz="1800" b="1" i="0">
-                <a:solidFill>
-                  <a:srgbClr val="0F6E7A"/>
-                </a:solidFill>
-                <a:latin typeface="Calibri"/>
-              </a:rPr>
-              <a:t>1.  The reconciliation dashboard</a:t>
-            </a:r>
-          </a:p>
-          <a:p>
-            <a:pPr>
-              <a:lnSpc>
-                <a:spcPct val="120000"/>
-              </a:lnSpc>
-              <a:spcAft>
-                <a:spcPts val="600"/>
-              </a:spcAft>
-            </a:pPr>
-            <a:r>
-              <a:rPr sz="1400" b="0" i="0">
-                <a:solidFill>
-                  <a:srgbClr val="333F52"/>
-                </a:solidFill>
-                <a:latin typeface="Calibri"/>
-              </a:rPr>
-              <a:t>We open the live dashboard. It shows the last seven days of predictions paired with realized revenue from the sales ledger — predicted RPC, realized RPC, residual, and which model branch served each click.</a:t>
-            </a:r>
-          </a:p>
-          <a:p>
-            <a:pPr>
-              <a:lnSpc>
-                <a:spcPct val="120000"/>
-              </a:lnSpc>
-              <a:spcAft>
-                <a:spcPts val="600"/>
-              </a:spcAft>
-            </a:pPr>
-            <a:r>
-              <a:rPr sz="1800" b="1" i="0">
-                <a:solidFill>
-                  <a:srgbClr val="0F6E7A"/>
-                </a:solidFill>
-                <a:latin typeface="Calibri"/>
-              </a:rPr>
-              <a:t>2.  A prediction in flight</a:t>
-            </a:r>
-          </a:p>
-          <a:p>
-            <a:pPr>
-              <a:lnSpc>
-                <a:spcPct val="120000"/>
-              </a:lnSpc>
-              <a:spcAft>
-                <a:spcPts val="600"/>
-              </a:spcAft>
-            </a:pPr>
-            <a:r>
-              <a:rPr sz="1400" b="0" i="0">
-                <a:solidFill>
-                  <a:srgbClr val="333F52"/>
-                </a:solidFill>
-                <a:latin typeface="Calibri"/>
-              </a:rPr>
-              <a:t>We send a sample click context to the live scoring API and receive an RPC estimate, end-to-end, in under a second. The same input is then sent to the explain path to show per-feature attributions.</a:t>
-            </a:r>
-          </a:p>
-          <a:p>
-            <a:pPr>
-              <a:lnSpc>
-                <a:spcPct val="120000"/>
-              </a:lnSpc>
-              <a:spcAft>
-                <a:spcPts val="600"/>
-              </a:spcAft>
-            </a:pPr>
-            <a:r>
-              <a:rPr sz="1800" b="1" i="0">
-                <a:solidFill>
-                  <a:srgbClr val="0F6E7A"/>
-                </a:solidFill>
-                <a:latin typeface="Calibri"/>
-              </a:rPr>
-              <a:t>3.  The safety net in action</a:t>
-            </a:r>
-          </a:p>
-          <a:p>
-            <a:pPr>
-              <a:lnSpc>
-                <a:spcPct val="120000"/>
-              </a:lnSpc>
-              <a:spcAft>
-                <a:spcPts val="600"/>
-              </a:spcAft>
-            </a:pPr>
-            <a:r>
-              <a:rPr sz="1400" b="0" i="0">
-                <a:solidFill>
-                  <a:srgbClr val="333F52"/>
-                </a:solidFill>
-                <a:latin typeface="Calibri"/>
-              </a:rPr>
-              <a:t>We send a deliberately malformed payload. The service rejects it cleanly, the circuit-breaker counters tick, and the request never reaches the model. No degradation visible to clean traffic.</a:t>
-            </a:r>
-          </a:p>
-          <a:p>
-            <a:pPr>
-              <a:lnSpc>
-                <a:spcPct val="120000"/>
-              </a:lnSpc>
-            </a:pPr>
-            <a:r>
-              <a:rPr sz="1200" b="0" i="1">
+            <a:pPr algn="ctr"/>
+            <a:r>
+              <a:rPr sz="1100" b="0" i="1">
                 <a:solidFill>
                   <a:srgbClr val="6B7380"/>
                 </a:solidFill>
                 <a:latin typeface="Calibri"/>
               </a:rPr>
-              <a:t>Dashboard  ·  https://dashboard-staging-794974391956.europe-west2.run.app</a:t>
-            </a:r>
-          </a:p>
-          <a:p>
-            <a:pPr>
-              <a:lnSpc>
-                <a:spcPct val="120000"/>
-              </a:lnSpc>
-            </a:pPr>
-            <a:r>
-              <a:rPr sz="1200" b="0" i="1">
-                <a:solidFill>
-                  <a:srgbClr val="6B7380"/>
-                </a:solidFill>
-                <a:latin typeface="Calibri"/>
-              </a:rPr>
-              <a:t>Scoring API  ·  https://scoring-api-staging-794974391956.europe-west2.run.app</a:t>
-            </a:r>
-          </a:p>
-        </p:txBody>
-      </p:sp>
-      <p:sp>
-        <p:nvSpPr>
-          <p:cNvPr id="5" name="Rectangle 4"/>
+              <a:t>Each request is wrapped in production safety controls</a:t>
+            </a:r>
+          </a:p>
+        </p:txBody>
+      </p:sp>
+      <p:sp>
+        <p:nvSpPr>
+          <p:cNvPr id="14" name="Rounded Rectangle 13"/>
           <p:cNvSpPr/>
           <p:nvPr/>
         </p:nvSpPr>
         <p:spPr>
           <a:xfrm>
-            <a:off x="0" y="6537960"/>
-            <a:ext cx="12191695" cy="320040"/>
-          </a:xfrm>
-          <a:prstGeom prst="rect">
-            <a:avLst/>
+            <a:off x="457200" y="3154680"/>
+            <a:ext cx="1554480" cy="822960"/>
+          </a:xfrm>
+          <a:prstGeom prst="roundRect">
+            <a:avLst>
+              <a:gd name="adj" fmla="val 15000"/>
+            </a:avLst>
           </a:prstGeom>
           <a:solidFill>
             <a:srgbClr val="F4F6FA"/>
@@ -8821,6 +10296,433 @@
           </a:fontRef>
         </p:style>
         <p:txBody>
+          <a:bodyPr rtlCol="0" anchor="ctr" wrap="square"/>
+          <a:lstStyle/>
+          <a:p>
+            <a:pPr algn="ctr"/>
+            <a:r>
+              <a:rPr sz="1300" b="1" i="0">
+                <a:solidFill>
+                  <a:srgbClr val="0B1F3A"/>
+                </a:solidFill>
+                <a:latin typeface="Calibri"/>
+              </a:rPr>
+              <a:t>Timeouts</a:t>
+            </a:r>
+          </a:p>
+          <a:p>
+            <a:pPr algn="ctr"/>
+            <a:r>
+              <a:rPr sz="900" b="0" i="0">
+                <a:solidFill>
+                  <a:srgbClr val="6B7380"/>
+                </a:solidFill>
+                <a:latin typeface="Calibri"/>
+              </a:rPr>
+              <a:t>model + BQ budgets</a:t>
+            </a:r>
+          </a:p>
+        </p:txBody>
+      </p:sp>
+      <p:sp>
+        <p:nvSpPr>
+          <p:cNvPr id="15" name="Rounded Rectangle 14"/>
+          <p:cNvSpPr/>
+          <p:nvPr/>
+        </p:nvSpPr>
+        <p:spPr>
+          <a:xfrm>
+            <a:off x="2148840" y="3154680"/>
+            <a:ext cx="1554480" cy="822960"/>
+          </a:xfrm>
+          <a:prstGeom prst="roundRect">
+            <a:avLst>
+              <a:gd name="adj" fmla="val 15000"/>
+            </a:avLst>
+          </a:prstGeom>
+          <a:solidFill>
+            <a:srgbClr val="F4F6FA"/>
+          </a:solidFill>
+          <a:ln>
+            <a:noFill/>
+          </a:ln>
+        </p:spPr>
+        <p:style>
+          <a:lnRef idx="1">
+            <a:schemeClr val="accent1"/>
+          </a:lnRef>
+          <a:fillRef idx="3">
+            <a:schemeClr val="accent1"/>
+          </a:fillRef>
+          <a:effectRef idx="2">
+            <a:schemeClr val="accent1"/>
+          </a:effectRef>
+          <a:fontRef idx="minor">
+            <a:schemeClr val="lt1"/>
+          </a:fontRef>
+        </p:style>
+        <p:txBody>
+          <a:bodyPr rtlCol="0" anchor="ctr" wrap="square"/>
+          <a:lstStyle/>
+          <a:p>
+            <a:pPr algn="ctr"/>
+            <a:r>
+              <a:rPr sz="1300" b="1" i="0">
+                <a:solidFill>
+                  <a:srgbClr val="0B1F3A"/>
+                </a:solidFill>
+                <a:latin typeface="Calibri"/>
+              </a:rPr>
+              <a:t>Circuit breaker</a:t>
+            </a:r>
+          </a:p>
+          <a:p>
+            <a:pPr algn="ctr"/>
+            <a:r>
+              <a:rPr sz="900" b="0" i="0">
+                <a:solidFill>
+                  <a:srgbClr val="6B7380"/>
+                </a:solidFill>
+                <a:latin typeface="Calibri"/>
+              </a:rPr>
+              <a:t>fail fast, recover</a:t>
+            </a:r>
+          </a:p>
+        </p:txBody>
+      </p:sp>
+      <p:sp>
+        <p:nvSpPr>
+          <p:cNvPr id="16" name="Rounded Rectangle 15"/>
+          <p:cNvSpPr/>
+          <p:nvPr/>
+        </p:nvSpPr>
+        <p:spPr>
+          <a:xfrm>
+            <a:off x="3840480" y="3154680"/>
+            <a:ext cx="1554480" cy="822960"/>
+          </a:xfrm>
+          <a:prstGeom prst="roundRect">
+            <a:avLst>
+              <a:gd name="adj" fmla="val 15000"/>
+            </a:avLst>
+          </a:prstGeom>
+          <a:solidFill>
+            <a:srgbClr val="F4F6FA"/>
+          </a:solidFill>
+          <a:ln>
+            <a:noFill/>
+          </a:ln>
+        </p:spPr>
+        <p:style>
+          <a:lnRef idx="1">
+            <a:schemeClr val="accent1"/>
+          </a:lnRef>
+          <a:fillRef idx="3">
+            <a:schemeClr val="accent1"/>
+          </a:fillRef>
+          <a:effectRef idx="2">
+            <a:schemeClr val="accent1"/>
+          </a:effectRef>
+          <a:fontRef idx="minor">
+            <a:schemeClr val="lt1"/>
+          </a:fontRef>
+        </p:style>
+        <p:txBody>
+          <a:bodyPr rtlCol="0" anchor="ctr" wrap="square"/>
+          <a:lstStyle/>
+          <a:p>
+            <a:pPr algn="ctr"/>
+            <a:r>
+              <a:rPr sz="1300" b="1" i="0">
+                <a:solidFill>
+                  <a:srgbClr val="0B1F3A"/>
+                </a:solidFill>
+                <a:latin typeface="Calibri"/>
+              </a:rPr>
+              <a:t>Anomaly detection</a:t>
+            </a:r>
+          </a:p>
+          <a:p>
+            <a:pPr algn="ctr"/>
+            <a:r>
+              <a:rPr sz="900" b="0" i="0">
+                <a:solidFill>
+                  <a:srgbClr val="6B7380"/>
+                </a:solidFill>
+                <a:latin typeface="Calibri"/>
+              </a:rPr>
+              <a:t>null-rate window</a:t>
+            </a:r>
+          </a:p>
+        </p:txBody>
+      </p:sp>
+      <p:sp>
+        <p:nvSpPr>
+          <p:cNvPr id="17" name="Rounded Rectangle 16"/>
+          <p:cNvSpPr/>
+          <p:nvPr/>
+        </p:nvSpPr>
+        <p:spPr>
+          <a:xfrm>
+            <a:off x="5532120" y="3154680"/>
+            <a:ext cx="1554480" cy="822960"/>
+          </a:xfrm>
+          <a:prstGeom prst="roundRect">
+            <a:avLst>
+              <a:gd name="adj" fmla="val 15000"/>
+            </a:avLst>
+          </a:prstGeom>
+          <a:solidFill>
+            <a:srgbClr val="F4F6FA"/>
+          </a:solidFill>
+          <a:ln>
+            <a:noFill/>
+          </a:ln>
+        </p:spPr>
+        <p:style>
+          <a:lnRef idx="1">
+            <a:schemeClr val="accent1"/>
+          </a:lnRef>
+          <a:fillRef idx="3">
+            <a:schemeClr val="accent1"/>
+          </a:fillRef>
+          <a:effectRef idx="2">
+            <a:schemeClr val="accent1"/>
+          </a:effectRef>
+          <a:fontRef idx="minor">
+            <a:schemeClr val="lt1"/>
+          </a:fontRef>
+        </p:style>
+        <p:txBody>
+          <a:bodyPr rtlCol="0" anchor="ctr" wrap="square"/>
+          <a:lstStyle/>
+          <a:p>
+            <a:pPr algn="ctr"/>
+            <a:r>
+              <a:rPr sz="1300" b="1" i="0">
+                <a:solidFill>
+                  <a:srgbClr val="0B1F3A"/>
+                </a:solidFill>
+                <a:latin typeface="Calibri"/>
+              </a:rPr>
+              <a:t>Range clamp</a:t>
+            </a:r>
+          </a:p>
+          <a:p>
+            <a:pPr algn="ctr"/>
+            <a:r>
+              <a:rPr sz="900" b="0" i="0">
+                <a:solidFill>
+                  <a:srgbClr val="6B7380"/>
+                </a:solidFill>
+                <a:latin typeface="Calibri"/>
+              </a:rPr>
+              <a:t>no negative RPC</a:t>
+            </a:r>
+          </a:p>
+        </p:txBody>
+      </p:sp>
+      <p:sp>
+        <p:nvSpPr>
+          <p:cNvPr id="18" name="Rounded Rectangle 17"/>
+          <p:cNvSpPr/>
+          <p:nvPr/>
+        </p:nvSpPr>
+        <p:spPr>
+          <a:xfrm>
+            <a:off x="7223760" y="3154680"/>
+            <a:ext cx="1554480" cy="822960"/>
+          </a:xfrm>
+          <a:prstGeom prst="roundRect">
+            <a:avLst>
+              <a:gd name="adj" fmla="val 15000"/>
+            </a:avLst>
+          </a:prstGeom>
+          <a:solidFill>
+            <a:srgbClr val="F4F6FA"/>
+          </a:solidFill>
+          <a:ln>
+            <a:noFill/>
+          </a:ln>
+        </p:spPr>
+        <p:style>
+          <a:lnRef idx="1">
+            <a:schemeClr val="accent1"/>
+          </a:lnRef>
+          <a:fillRef idx="3">
+            <a:schemeClr val="accent1"/>
+          </a:fillRef>
+          <a:effectRef idx="2">
+            <a:schemeClr val="accent1"/>
+          </a:effectRef>
+          <a:fontRef idx="minor">
+            <a:schemeClr val="lt1"/>
+          </a:fontRef>
+        </p:style>
+        <p:txBody>
+          <a:bodyPr rtlCol="0" anchor="ctr" wrap="square"/>
+          <a:lstStyle/>
+          <a:p>
+            <a:pPr algn="ctr"/>
+            <a:r>
+              <a:rPr sz="1300" b="1" i="0">
+                <a:solidFill>
+                  <a:srgbClr val="0B1F3A"/>
+                </a:solidFill>
+                <a:latin typeface="Calibri"/>
+              </a:rPr>
+              <a:t>Explanations</a:t>
+            </a:r>
+          </a:p>
+          <a:p>
+            <a:pPr algn="ctr"/>
+            <a:r>
+              <a:rPr sz="900" b="0" i="0">
+                <a:solidFill>
+                  <a:srgbClr val="6B7380"/>
+                </a:solidFill>
+                <a:latin typeface="Calibri"/>
+              </a:rPr>
+              <a:t>per-feature SHAP</a:t>
+            </a:r>
+          </a:p>
+        </p:txBody>
+      </p:sp>
+      <p:sp>
+        <p:nvSpPr>
+          <p:cNvPr id="19" name="TextBox 18"/>
+          <p:cNvSpPr txBox="1"/>
+          <p:nvPr/>
+        </p:nvSpPr>
+        <p:spPr>
+          <a:xfrm>
+            <a:off x="457200" y="4297680"/>
+            <a:ext cx="11277295" cy="1097280"/>
+          </a:xfrm>
+          <a:prstGeom prst="rect">
+            <a:avLst/>
+          </a:prstGeom>
+          <a:noFill/>
+        </p:spPr>
+        <p:txBody>
+          <a:bodyPr wrap="square">
+            <a:spAutoFit/>
+          </a:bodyPr>
+          <a:lstStyle/>
+          <a:p>
+            <a:pPr>
+              <a:spcAft>
+                <a:spcPts val="300"/>
+              </a:spcAft>
+            </a:pPr>
+            <a:r>
+              <a:rPr sz="1400" b="1" i="0">
+                <a:solidFill>
+                  <a:srgbClr val="0F6E7A"/>
+                </a:solidFill>
+                <a:latin typeface="Calibri"/>
+              </a:rPr>
+              <a:t>Why this shape</a:t>
+            </a:r>
+          </a:p>
+          <a:p>
+            <a:r>
+              <a:rPr sz="1200" b="1" i="0">
+                <a:solidFill>
+                  <a:srgbClr val="D97306"/>
+                </a:solidFill>
+                <a:latin typeface="Calibri"/>
+              </a:rPr>
+              <a:t>•  </a:t>
+            </a:r>
+            <a:r>
+              <a:rPr sz="1200" b="0" i="0">
+                <a:solidFill>
+                  <a:srgbClr val="333F52"/>
+                </a:solidFill>
+                <a:latin typeface="Calibri"/>
+              </a:rPr>
+              <a:t>Stateless API tier scales horizontally with traffic — pay only for what you use.</a:t>
+            </a:r>
+          </a:p>
+          <a:p>
+            <a:r>
+              <a:rPr sz="1200" b="1" i="0">
+                <a:solidFill>
+                  <a:srgbClr val="D97306"/>
+                </a:solidFill>
+                <a:latin typeface="Calibri"/>
+              </a:rPr>
+              <a:t>•  </a:t>
+            </a:r>
+            <a:r>
+              <a:rPr sz="1200" b="0" i="0">
+                <a:solidFill>
+                  <a:srgbClr val="333F52"/>
+                </a:solidFill>
+                <a:latin typeface="Calibri"/>
+              </a:rPr>
+              <a:t>Vertex AI hosts the model, so retraining and versioning never touch the API.</a:t>
+            </a:r>
+          </a:p>
+          <a:p>
+            <a:r>
+              <a:rPr sz="1200" b="1" i="0">
+                <a:solidFill>
+                  <a:srgbClr val="D97306"/>
+                </a:solidFill>
+                <a:latin typeface="Calibri"/>
+              </a:rPr>
+              <a:t>•  </a:t>
+            </a:r>
+            <a:r>
+              <a:rPr sz="1200" b="0" i="0">
+                <a:solidFill>
+                  <a:srgbClr val="333F52"/>
+                </a:solidFill>
+                <a:latin typeface="Calibri"/>
+              </a:rPr>
+              <a:t>Every prediction is captured in BigQuery — same dataset your analysts already use.</a:t>
+            </a:r>
+          </a:p>
+        </p:txBody>
+      </p:sp>
+      <p:sp>
+        <p:nvSpPr>
+          <p:cNvPr id="20" name="Rectangle 19"/>
+          <p:cNvSpPr/>
+          <p:nvPr/>
+        </p:nvSpPr>
+        <p:spPr>
+          <a:xfrm>
+            <a:off x="0" y="6537960"/>
+            <a:ext cx="12191695" cy="320040"/>
+          </a:xfrm>
+          <a:prstGeom prst="rect">
+            <a:avLst/>
+          </a:prstGeom>
+          <a:solidFill>
+            <a:srgbClr val="F4F6FA"/>
+          </a:solidFill>
+          <a:ln>
+            <a:noFill/>
+          </a:ln>
+        </p:spPr>
+        <p:style>
+          <a:lnRef idx="1">
+            <a:schemeClr val="accent1"/>
+          </a:lnRef>
+          <a:fillRef idx="3">
+            <a:schemeClr val="accent1"/>
+          </a:fillRef>
+          <a:effectRef idx="2">
+            <a:schemeClr val="accent1"/>
+          </a:effectRef>
+          <a:fontRef idx="minor">
+            <a:schemeClr val="lt1"/>
+          </a:fontRef>
+        </p:style>
+        <p:txBody>
           <a:bodyPr rtlCol="0" anchor="ctr" lIns="548640" tIns="54864"/>
           <a:lstStyle/>
           <a:p>
@@ -8839,7 +10741,7 @@
       </p:sp>
       <p:sp>
         <p:nvSpPr>
-          <p:cNvPr id="6" name="TextBox 5"/>
+          <p:cNvPr id="21" name="TextBox 20"/>
           <p:cNvSpPr txBox="1"/>
           <p:nvPr/>
         </p:nvSpPr>
@@ -8867,7 +10769,7 @@
                 </a:solidFill>
                 <a:latin typeface="Calibri"/>
               </a:rPr>
-              <a:t>6 / 14</a:t>
+              <a:t>5 / 15</a:t>
             </a:r>
           </a:p>
         </p:txBody>
@@ -8937,7 +10839,7 @@
                 </a:solidFill>
                 <a:latin typeface="Calibri"/>
               </a:rPr>
-              <a:t>LOAD TEST, LIVE STAGING</a:t>
+              <a:t>FIVE MINUTES, THREE SCREENS</a:t>
             </a:r>
           </a:p>
           <a:p>
@@ -8948,7 +10850,7 @@
                 </a:solidFill>
                 <a:latin typeface="Calibri"/>
               </a:rPr>
-              <a:t>Measured performance</a:t>
+              <a:t>Live demo — what you will see</a:t>
             </a:r>
           </a:p>
         </p:txBody>
@@ -8998,669 +10900,13 @@
       </p:sp>
       <p:sp>
         <p:nvSpPr>
-          <p:cNvPr id="4" name="Rounded Rectangle 3"/>
-          <p:cNvSpPr/>
-          <p:nvPr/>
-        </p:nvSpPr>
-        <p:spPr>
-          <a:xfrm>
-            <a:off x="548640" y="1234440"/>
-            <a:ext cx="1965960" cy="1417320"/>
-          </a:xfrm>
-          <a:prstGeom prst="roundRect">
-            <a:avLst>
-              <a:gd name="adj" fmla="val 6000"/>
-            </a:avLst>
-          </a:prstGeom>
-          <a:solidFill>
-            <a:srgbClr val="FFFFFF"/>
-          </a:solidFill>
-          <a:ln w="9525">
-            <a:solidFill>
-              <a:srgbClr val="D7DBE3"/>
-            </a:solidFill>
-          </a:ln>
-        </p:spPr>
-        <p:style>
-          <a:lnRef idx="1">
-            <a:schemeClr val="accent1"/>
-          </a:lnRef>
-          <a:fillRef idx="3">
-            <a:schemeClr val="accent1"/>
-          </a:fillRef>
-          <a:effectRef idx="2">
-            <a:schemeClr val="accent1"/>
-          </a:effectRef>
-          <a:fontRef idx="minor">
-            <a:schemeClr val="lt1"/>
-          </a:fontRef>
-        </p:style>
-        <p:txBody>
-          <a:bodyPr rtlCol="0" anchor="ctr"/>
-          <a:lstStyle/>
-          <a:p>
-            <a:pPr algn="ctr"/>
-          </a:p>
-        </p:txBody>
-      </p:sp>
-      <p:sp>
-        <p:nvSpPr>
-          <p:cNvPr id="5" name="Rectangle 4"/>
-          <p:cNvSpPr/>
-          <p:nvPr/>
-        </p:nvSpPr>
-        <p:spPr>
-          <a:xfrm>
-            <a:off x="548640" y="1234440"/>
-            <a:ext cx="1965960" cy="73152"/>
-          </a:xfrm>
-          <a:prstGeom prst="rect">
-            <a:avLst/>
-          </a:prstGeom>
-          <a:solidFill>
-            <a:srgbClr val="0F6E7A"/>
-          </a:solidFill>
-          <a:ln>
-            <a:noFill/>
-          </a:ln>
-        </p:spPr>
-        <p:style>
-          <a:lnRef idx="1">
-            <a:schemeClr val="accent1"/>
-          </a:lnRef>
-          <a:fillRef idx="3">
-            <a:schemeClr val="accent1"/>
-          </a:fillRef>
-          <a:effectRef idx="2">
-            <a:schemeClr val="accent1"/>
-          </a:effectRef>
-          <a:fontRef idx="minor">
-            <a:schemeClr val="lt1"/>
-          </a:fontRef>
-        </p:style>
-        <p:txBody>
-          <a:bodyPr rtlCol="0" anchor="ctr"/>
-          <a:lstStyle/>
-          <a:p>
-            <a:pPr algn="ctr"/>
-          </a:p>
-        </p:txBody>
-      </p:sp>
-      <p:sp>
-        <p:nvSpPr>
-          <p:cNvPr id="6" name="TextBox 5"/>
+          <p:cNvPr id="4" name="TextBox 3"/>
           <p:cNvSpPr txBox="1"/>
           <p:nvPr/>
         </p:nvSpPr>
         <p:spPr>
           <a:xfrm>
-            <a:off x="548640" y="1463040"/>
-            <a:ext cx="1965960" cy="640080"/>
-          </a:xfrm>
-          <a:prstGeom prst="rect">
-            <a:avLst/>
-          </a:prstGeom>
-          <a:noFill/>
-        </p:spPr>
-        <p:txBody>
-          <a:bodyPr wrap="none">
-            <a:spAutoFit/>
-          </a:bodyPr>
-          <a:lstStyle/>
-          <a:p>
-            <a:pPr algn="ctr"/>
-            <a:r>
-              <a:rPr sz="2800" b="1" i="0">
-                <a:solidFill>
-                  <a:srgbClr val="0B1F3A"/>
-                </a:solidFill>
-                <a:latin typeface="Calibri"/>
-              </a:rPr>
-              <a:t>561 ms</a:t>
-            </a:r>
-          </a:p>
-        </p:txBody>
-      </p:sp>
-      <p:sp>
-        <p:nvSpPr>
-          <p:cNvPr id="7" name="TextBox 6"/>
-          <p:cNvSpPr txBox="1"/>
-          <p:nvPr/>
-        </p:nvSpPr>
-        <p:spPr>
-          <a:xfrm>
-            <a:off x="548640" y="2103120"/>
-            <a:ext cx="1965960" cy="457200"/>
-          </a:xfrm>
-          <a:prstGeom prst="rect">
-            <a:avLst/>
-          </a:prstGeom>
-          <a:noFill/>
-        </p:spPr>
-        <p:txBody>
-          <a:bodyPr wrap="none">
-            <a:spAutoFit/>
-          </a:bodyPr>
-          <a:lstStyle/>
-          <a:p>
-            <a:pPr algn="ctr">
-              <a:lnSpc>
-                <a:spcPct val="110000"/>
-              </a:lnSpc>
-            </a:pPr>
-            <a:r>
-              <a:rPr sz="1100" b="0" i="0">
-                <a:solidFill>
-                  <a:srgbClr val="6B7380"/>
-                </a:solidFill>
-                <a:latin typeface="Calibri"/>
-              </a:rPr>
-              <a:t>Median (p50) /v1/score</a:t>
-            </a:r>
-          </a:p>
-        </p:txBody>
-      </p:sp>
-      <p:sp>
-        <p:nvSpPr>
-          <p:cNvPr id="8" name="Rounded Rectangle 7"/>
-          <p:cNvSpPr/>
-          <p:nvPr/>
-        </p:nvSpPr>
-        <p:spPr>
-          <a:xfrm>
-            <a:off x="2697480" y="1234440"/>
-            <a:ext cx="1965960" cy="1417320"/>
-          </a:xfrm>
-          <a:prstGeom prst="roundRect">
-            <a:avLst>
-              <a:gd name="adj" fmla="val 6000"/>
-            </a:avLst>
-          </a:prstGeom>
-          <a:solidFill>
-            <a:srgbClr val="FFFFFF"/>
-          </a:solidFill>
-          <a:ln w="9525">
-            <a:solidFill>
-              <a:srgbClr val="D7DBE3"/>
-            </a:solidFill>
-          </a:ln>
-        </p:spPr>
-        <p:style>
-          <a:lnRef idx="1">
-            <a:schemeClr val="accent1"/>
-          </a:lnRef>
-          <a:fillRef idx="3">
-            <a:schemeClr val="accent1"/>
-          </a:fillRef>
-          <a:effectRef idx="2">
-            <a:schemeClr val="accent1"/>
-          </a:effectRef>
-          <a:fontRef idx="minor">
-            <a:schemeClr val="lt1"/>
-          </a:fontRef>
-        </p:style>
-        <p:txBody>
-          <a:bodyPr rtlCol="0" anchor="ctr"/>
-          <a:lstStyle/>
-          <a:p>
-            <a:pPr algn="ctr"/>
-          </a:p>
-        </p:txBody>
-      </p:sp>
-      <p:sp>
-        <p:nvSpPr>
-          <p:cNvPr id="9" name="Rectangle 8"/>
-          <p:cNvSpPr/>
-          <p:nvPr/>
-        </p:nvSpPr>
-        <p:spPr>
-          <a:xfrm>
-            <a:off x="2697480" y="1234440"/>
-            <a:ext cx="1965960" cy="73152"/>
-          </a:xfrm>
-          <a:prstGeom prst="rect">
-            <a:avLst/>
-          </a:prstGeom>
-          <a:solidFill>
-            <a:srgbClr val="1F8A4F"/>
-          </a:solidFill>
-          <a:ln>
-            <a:noFill/>
-          </a:ln>
-        </p:spPr>
-        <p:style>
-          <a:lnRef idx="1">
-            <a:schemeClr val="accent1"/>
-          </a:lnRef>
-          <a:fillRef idx="3">
-            <a:schemeClr val="accent1"/>
-          </a:fillRef>
-          <a:effectRef idx="2">
-            <a:schemeClr val="accent1"/>
-          </a:effectRef>
-          <a:fontRef idx="minor">
-            <a:schemeClr val="lt1"/>
-          </a:fontRef>
-        </p:style>
-        <p:txBody>
-          <a:bodyPr rtlCol="0" anchor="ctr"/>
-          <a:lstStyle/>
-          <a:p>
-            <a:pPr algn="ctr"/>
-          </a:p>
-        </p:txBody>
-      </p:sp>
-      <p:sp>
-        <p:nvSpPr>
-          <p:cNvPr id="10" name="TextBox 9"/>
-          <p:cNvSpPr txBox="1"/>
-          <p:nvPr/>
-        </p:nvSpPr>
-        <p:spPr>
-          <a:xfrm>
-            <a:off x="2697480" y="1463040"/>
-            <a:ext cx="1965960" cy="640080"/>
-          </a:xfrm>
-          <a:prstGeom prst="rect">
-            <a:avLst/>
-          </a:prstGeom>
-          <a:noFill/>
-        </p:spPr>
-        <p:txBody>
-          <a:bodyPr wrap="none">
-            <a:spAutoFit/>
-          </a:bodyPr>
-          <a:lstStyle/>
-          <a:p>
-            <a:pPr algn="ctr"/>
-            <a:r>
-              <a:rPr sz="2800" b="1" i="0">
-                <a:solidFill>
-                  <a:srgbClr val="0B1F3A"/>
-                </a:solidFill>
-                <a:latin typeface="Calibri"/>
-              </a:rPr>
-              <a:t>762 ms</a:t>
-            </a:r>
-          </a:p>
-        </p:txBody>
-      </p:sp>
-      <p:sp>
-        <p:nvSpPr>
-          <p:cNvPr id="11" name="TextBox 10"/>
-          <p:cNvSpPr txBox="1"/>
-          <p:nvPr/>
-        </p:nvSpPr>
-        <p:spPr>
-          <a:xfrm>
-            <a:off x="2697480" y="2103120"/>
-            <a:ext cx="1965960" cy="457200"/>
-          </a:xfrm>
-          <a:prstGeom prst="rect">
-            <a:avLst/>
-          </a:prstGeom>
-          <a:noFill/>
-        </p:spPr>
-        <p:txBody>
-          <a:bodyPr wrap="none">
-            <a:spAutoFit/>
-          </a:bodyPr>
-          <a:lstStyle/>
-          <a:p>
-            <a:pPr algn="ctr">
-              <a:lnSpc>
-                <a:spcPct val="110000"/>
-              </a:lnSpc>
-            </a:pPr>
-            <a:r>
-              <a:rPr sz="1100" b="0" i="0">
-                <a:solidFill>
-                  <a:srgbClr val="6B7380"/>
-                </a:solidFill>
-                <a:latin typeface="Calibri"/>
-              </a:rPr>
-              <a:t>p95 /v1/score</a:t>
-            </a:r>
-          </a:p>
-        </p:txBody>
-      </p:sp>
-      <p:sp>
-        <p:nvSpPr>
-          <p:cNvPr id="12" name="Rounded Rectangle 11"/>
-          <p:cNvSpPr/>
-          <p:nvPr/>
-        </p:nvSpPr>
-        <p:spPr>
-          <a:xfrm>
-            <a:off x="4846320" y="1234440"/>
-            <a:ext cx="1965960" cy="1417320"/>
-          </a:xfrm>
-          <a:prstGeom prst="roundRect">
-            <a:avLst>
-              <a:gd name="adj" fmla="val 6000"/>
-            </a:avLst>
-          </a:prstGeom>
-          <a:solidFill>
-            <a:srgbClr val="FFFFFF"/>
-          </a:solidFill>
-          <a:ln w="9525">
-            <a:solidFill>
-              <a:srgbClr val="D7DBE3"/>
-            </a:solidFill>
-          </a:ln>
-        </p:spPr>
-        <p:style>
-          <a:lnRef idx="1">
-            <a:schemeClr val="accent1"/>
-          </a:lnRef>
-          <a:fillRef idx="3">
-            <a:schemeClr val="accent1"/>
-          </a:fillRef>
-          <a:effectRef idx="2">
-            <a:schemeClr val="accent1"/>
-          </a:effectRef>
-          <a:fontRef idx="minor">
-            <a:schemeClr val="lt1"/>
-          </a:fontRef>
-        </p:style>
-        <p:txBody>
-          <a:bodyPr rtlCol="0" anchor="ctr"/>
-          <a:lstStyle/>
-          <a:p>
-            <a:pPr algn="ctr"/>
-          </a:p>
-        </p:txBody>
-      </p:sp>
-      <p:sp>
-        <p:nvSpPr>
-          <p:cNvPr id="13" name="Rectangle 12"/>
-          <p:cNvSpPr/>
-          <p:nvPr/>
-        </p:nvSpPr>
-        <p:spPr>
-          <a:xfrm>
-            <a:off x="4846320" y="1234440"/>
-            <a:ext cx="1965960" cy="73152"/>
-          </a:xfrm>
-          <a:prstGeom prst="rect">
-            <a:avLst/>
-          </a:prstGeom>
-          <a:solidFill>
-            <a:srgbClr val="0F6E7A"/>
-          </a:solidFill>
-          <a:ln>
-            <a:noFill/>
-          </a:ln>
-        </p:spPr>
-        <p:style>
-          <a:lnRef idx="1">
-            <a:schemeClr val="accent1"/>
-          </a:lnRef>
-          <a:fillRef idx="3">
-            <a:schemeClr val="accent1"/>
-          </a:fillRef>
-          <a:effectRef idx="2">
-            <a:schemeClr val="accent1"/>
-          </a:effectRef>
-          <a:fontRef idx="minor">
-            <a:schemeClr val="lt1"/>
-          </a:fontRef>
-        </p:style>
-        <p:txBody>
-          <a:bodyPr rtlCol="0" anchor="ctr"/>
-          <a:lstStyle/>
-          <a:p>
-            <a:pPr algn="ctr"/>
-          </a:p>
-        </p:txBody>
-      </p:sp>
-      <p:sp>
-        <p:nvSpPr>
-          <p:cNvPr id="14" name="TextBox 13"/>
-          <p:cNvSpPr txBox="1"/>
-          <p:nvPr/>
-        </p:nvSpPr>
-        <p:spPr>
-          <a:xfrm>
-            <a:off x="4846320" y="1463040"/>
-            <a:ext cx="1965960" cy="640080"/>
-          </a:xfrm>
-          <a:prstGeom prst="rect">
-            <a:avLst/>
-          </a:prstGeom>
-          <a:noFill/>
-        </p:spPr>
-        <p:txBody>
-          <a:bodyPr wrap="none">
-            <a:spAutoFit/>
-          </a:bodyPr>
-          <a:lstStyle/>
-          <a:p>
-            <a:pPr algn="ctr"/>
-            <a:r>
-              <a:rPr sz="2800" b="1" i="0">
-                <a:solidFill>
-                  <a:srgbClr val="0B1F3A"/>
-                </a:solidFill>
-                <a:latin typeface="Calibri"/>
-              </a:rPr>
-              <a:t>993 ms</a:t>
-            </a:r>
-          </a:p>
-        </p:txBody>
-      </p:sp>
-      <p:sp>
-        <p:nvSpPr>
-          <p:cNvPr id="15" name="TextBox 14"/>
-          <p:cNvSpPr txBox="1"/>
-          <p:nvPr/>
-        </p:nvSpPr>
-        <p:spPr>
-          <a:xfrm>
-            <a:off x="4846320" y="2103120"/>
-            <a:ext cx="1965960" cy="457200"/>
-          </a:xfrm>
-          <a:prstGeom prst="rect">
-            <a:avLst/>
-          </a:prstGeom>
-          <a:noFill/>
-        </p:spPr>
-        <p:txBody>
-          <a:bodyPr wrap="none">
-            <a:spAutoFit/>
-          </a:bodyPr>
-          <a:lstStyle/>
-          <a:p>
-            <a:pPr algn="ctr">
-              <a:lnSpc>
-                <a:spcPct val="110000"/>
-              </a:lnSpc>
-            </a:pPr>
-            <a:r>
-              <a:rPr sz="1100" b="0" i="0">
-                <a:solidFill>
-                  <a:srgbClr val="6B7380"/>
-                </a:solidFill>
-                <a:latin typeface="Calibri"/>
-              </a:rPr>
-              <a:t>p99 /v1/score</a:t>
-            </a:r>
-          </a:p>
-        </p:txBody>
-      </p:sp>
-      <p:sp>
-        <p:nvSpPr>
-          <p:cNvPr id="16" name="Rounded Rectangle 15"/>
-          <p:cNvSpPr/>
-          <p:nvPr/>
-        </p:nvSpPr>
-        <p:spPr>
-          <a:xfrm>
-            <a:off x="6995160" y="1234440"/>
-            <a:ext cx="1965960" cy="1417320"/>
-          </a:xfrm>
-          <a:prstGeom prst="roundRect">
-            <a:avLst>
-              <a:gd name="adj" fmla="val 6000"/>
-            </a:avLst>
-          </a:prstGeom>
-          <a:solidFill>
-            <a:srgbClr val="FFFFFF"/>
-          </a:solidFill>
-          <a:ln w="9525">
-            <a:solidFill>
-              <a:srgbClr val="D7DBE3"/>
-            </a:solidFill>
-          </a:ln>
-        </p:spPr>
-        <p:style>
-          <a:lnRef idx="1">
-            <a:schemeClr val="accent1"/>
-          </a:lnRef>
-          <a:fillRef idx="3">
-            <a:schemeClr val="accent1"/>
-          </a:fillRef>
-          <a:effectRef idx="2">
-            <a:schemeClr val="accent1"/>
-          </a:effectRef>
-          <a:fontRef idx="minor">
-            <a:schemeClr val="lt1"/>
-          </a:fontRef>
-        </p:style>
-        <p:txBody>
-          <a:bodyPr rtlCol="0" anchor="ctr"/>
-          <a:lstStyle/>
-          <a:p>
-            <a:pPr algn="ctr"/>
-          </a:p>
-        </p:txBody>
-      </p:sp>
-      <p:sp>
-        <p:nvSpPr>
-          <p:cNvPr id="17" name="Rectangle 16"/>
-          <p:cNvSpPr/>
-          <p:nvPr/>
-        </p:nvSpPr>
-        <p:spPr>
-          <a:xfrm>
-            <a:off x="6995160" y="1234440"/>
-            <a:ext cx="1965960" cy="73152"/>
-          </a:xfrm>
-          <a:prstGeom prst="rect">
-            <a:avLst/>
-          </a:prstGeom>
-          <a:solidFill>
-            <a:srgbClr val="1F8A4F"/>
-          </a:solidFill>
-          <a:ln>
-            <a:noFill/>
-          </a:ln>
-        </p:spPr>
-        <p:style>
-          <a:lnRef idx="1">
-            <a:schemeClr val="accent1"/>
-          </a:lnRef>
-          <a:fillRef idx="3">
-            <a:schemeClr val="accent1"/>
-          </a:fillRef>
-          <a:effectRef idx="2">
-            <a:schemeClr val="accent1"/>
-          </a:effectRef>
-          <a:fontRef idx="minor">
-            <a:schemeClr val="lt1"/>
-          </a:fontRef>
-        </p:style>
-        <p:txBody>
-          <a:bodyPr rtlCol="0" anchor="ctr"/>
-          <a:lstStyle/>
-          <a:p>
-            <a:pPr algn="ctr"/>
-          </a:p>
-        </p:txBody>
-      </p:sp>
-      <p:sp>
-        <p:nvSpPr>
-          <p:cNvPr id="18" name="TextBox 17"/>
-          <p:cNvSpPr txBox="1"/>
-          <p:nvPr/>
-        </p:nvSpPr>
-        <p:spPr>
-          <a:xfrm>
-            <a:off x="6995160" y="1463040"/>
-            <a:ext cx="1965960" cy="640080"/>
-          </a:xfrm>
-          <a:prstGeom prst="rect">
-            <a:avLst/>
-          </a:prstGeom>
-          <a:noFill/>
-        </p:spPr>
-        <p:txBody>
-          <a:bodyPr wrap="none">
-            <a:spAutoFit/>
-          </a:bodyPr>
-          <a:lstStyle/>
-          <a:p>
-            <a:pPr algn="ctr"/>
-            <a:r>
-              <a:rPr sz="2800" b="1" i="0">
-                <a:solidFill>
-                  <a:srgbClr val="1F8A4F"/>
-                </a:solidFill>
-                <a:latin typeface="Calibri"/>
-              </a:rPr>
-              <a:t>100 %</a:t>
-            </a:r>
-          </a:p>
-        </p:txBody>
-      </p:sp>
-      <p:sp>
-        <p:nvSpPr>
-          <p:cNvPr id="19" name="TextBox 18"/>
-          <p:cNvSpPr txBox="1"/>
-          <p:nvPr/>
-        </p:nvSpPr>
-        <p:spPr>
-          <a:xfrm>
-            <a:off x="6995160" y="2103120"/>
-            <a:ext cx="1965960" cy="457200"/>
-          </a:xfrm>
-          <a:prstGeom prst="rect">
-            <a:avLst/>
-          </a:prstGeom>
-          <a:noFill/>
-        </p:spPr>
-        <p:txBody>
-          <a:bodyPr wrap="none">
-            <a:spAutoFit/>
-          </a:bodyPr>
-          <a:lstStyle/>
-          <a:p>
-            <a:pPr algn="ctr">
-              <a:lnSpc>
-                <a:spcPct val="110000"/>
-              </a:lnSpc>
-            </a:pPr>
-            <a:r>
-              <a:rPr sz="1100" b="0" i="0">
-                <a:solidFill>
-                  <a:srgbClr val="6B7380"/>
-                </a:solidFill>
-                <a:latin typeface="Calibri"/>
-              </a:rPr>
-              <a:t>Success rate</a:t>
-            </a:r>
-          </a:p>
-        </p:txBody>
-      </p:sp>
-      <p:sp>
-        <p:nvSpPr>
-          <p:cNvPr id="20" name="TextBox 19"/>
-          <p:cNvSpPr txBox="1"/>
-          <p:nvPr/>
-        </p:nvSpPr>
-        <p:spPr>
-          <a:xfrm>
-            <a:off x="548640" y="2834640"/>
+            <a:off x="548640" y="1143000"/>
             <a:ext cx="11094415" cy="5303520"/>
           </a:xfrm>
           <a:prstGeom prst="rect">
@@ -9683,13 +10929,13 @@
               </a:spcAft>
             </a:pPr>
             <a:r>
-              <a:rPr sz="1700" b="1" i="0">
+              <a:rPr sz="1800" b="1" i="0">
                 <a:solidFill>
                   <a:srgbClr val="0F6E7A"/>
                 </a:solidFill>
                 <a:latin typeface="Calibri"/>
               </a:rPr>
-              <a:t>Headroom against the SLO</a:t>
+              <a:t>1.  The reconciliation dashboard</a:t>
             </a:r>
           </a:p>
           <a:p>
@@ -9698,26 +10944,17 @@
                 <a:spcPct val="120000"/>
               </a:lnSpc>
               <a:spcAft>
-                <a:spcPts val="300"/>
+                <a:spcPts val="600"/>
               </a:spcAft>
             </a:pPr>
             <a:r>
-              <a:rPr sz="1300" b="1" i="0">
-                <a:solidFill>
-                  <a:srgbClr val="D97306"/>
-                </a:solidFill>
-                <a:latin typeface="Calibri"/>
-              </a:rPr>
-              <a:t>•  </a:t>
-            </a:r>
-            <a:r>
-              <a:rPr sz="1300" b="0" i="0">
+              <a:rPr sz="1400" b="0" i="0">
                 <a:solidFill>
                   <a:srgbClr val="333F52"/>
                 </a:solidFill>
                 <a:latin typeface="Calibri"/>
               </a:rPr>
-              <a:t>Staging p95 latency budget is 1500 ms — observed 762 ms leaves roughly a 2× margin before alerts fire.</a:t>
+              <a:t>We open the live dashboard. It shows the last seven days of predictions paired with realized revenue from the sales ledger — predicted RPC, realized RPC, residual, and which model branch served each click.</a:t>
             </a:r>
           </a:p>
           <a:p>
@@ -9726,26 +10963,17 @@
                 <a:spcPct val="120000"/>
               </a:lnSpc>
               <a:spcAft>
-                <a:spcPts val="300"/>
+                <a:spcPts val="600"/>
               </a:spcAft>
             </a:pPr>
             <a:r>
-              <a:rPr sz="1300" b="1" i="0">
-                <a:solidFill>
-                  <a:srgbClr val="D97306"/>
-                </a:solidFill>
-                <a:latin typeface="Calibri"/>
-              </a:rPr>
-              <a:t>•  </a:t>
-            </a:r>
-            <a:r>
-              <a:rPr sz="1300" b="0" i="0">
-                <a:solidFill>
-                  <a:srgbClr val="333F52"/>
-                </a:solidFill>
-                <a:latin typeface="Calibri"/>
-              </a:rPr>
-              <a:t>Zero errors at the tested rate; prior runs showed the service recovers cleanly under autoscaling load.</a:t>
+              <a:rPr sz="1800" b="1" i="0">
+                <a:solidFill>
+                  <a:srgbClr val="0F6E7A"/>
+                </a:solidFill>
+                <a:latin typeface="Calibri"/>
+              </a:rPr>
+              <a:t>2.  A prediction in flight</a:t>
             </a:r>
           </a:p>
           <a:p>
@@ -9754,26 +10982,55 @@
                 <a:spcPct val="120000"/>
               </a:lnSpc>
               <a:spcAft>
-                <a:spcPts val="300"/>
+                <a:spcPts val="600"/>
               </a:spcAft>
             </a:pPr>
             <a:r>
-              <a:rPr sz="1300" b="1" i="0">
-                <a:solidFill>
-                  <a:srgbClr val="D97306"/>
-                </a:solidFill>
-                <a:latin typeface="Calibri"/>
-              </a:rPr>
-              <a:t>•  </a:t>
-            </a:r>
-            <a:r>
-              <a:rPr sz="1300" b="0" i="0">
+              <a:rPr sz="1400" b="0" i="0">
                 <a:solidFill>
                   <a:srgbClr val="333F52"/>
                 </a:solidFill>
                 <a:latin typeface="Calibri"/>
               </a:rPr>
-              <a:t>Production sizing has been pre-computed from these numbers — a larger Vertex machine and a minimum of two replicas keep the same headroom under client traffic.</a:t>
+              <a:t>We send a sample click context to the live scoring API and receive an RPC estimate, end-to-end, in under a second. The same input is then sent to the explain path to show per-feature attributions.</a:t>
+            </a:r>
+          </a:p>
+          <a:p>
+            <a:pPr>
+              <a:lnSpc>
+                <a:spcPct val="120000"/>
+              </a:lnSpc>
+              <a:spcAft>
+                <a:spcPts val="600"/>
+              </a:spcAft>
+            </a:pPr>
+            <a:r>
+              <a:rPr sz="1800" b="1" i="0">
+                <a:solidFill>
+                  <a:srgbClr val="0F6E7A"/>
+                </a:solidFill>
+                <a:latin typeface="Calibri"/>
+              </a:rPr>
+              <a:t>3.  The safety net in action</a:t>
+            </a:r>
+          </a:p>
+          <a:p>
+            <a:pPr>
+              <a:lnSpc>
+                <a:spcPct val="120000"/>
+              </a:lnSpc>
+              <a:spcAft>
+                <a:spcPts val="600"/>
+              </a:spcAft>
+            </a:pPr>
+            <a:r>
+              <a:rPr sz="1400" b="0" i="0">
+                <a:solidFill>
+                  <a:srgbClr val="333F52"/>
+                </a:solidFill>
+                <a:latin typeface="Calibri"/>
+              </a:rPr>
+              <a:t>We send a deliberately malformed payload. The service rejects it cleanly, the circuit-breaker counters tick, and the request never reaches the model. No degradation visible to clean traffic.</a:t>
             </a:r>
           </a:p>
           <a:p>
@@ -9783,20 +11040,36 @@
               </a:lnSpc>
             </a:pPr>
             <a:r>
-              <a:rPr sz="1100" b="0" i="1">
+              <a:rPr sz="1200" b="0" i="1">
                 <a:solidFill>
                   <a:srgbClr val="6B7380"/>
                 </a:solidFill>
                 <a:latin typeface="Calibri"/>
               </a:rPr>
-              <a:t>Source: ops/perf/20260428T094507Z__v1_score.json  ·  tool: oha, 30s @ c=10  ·  europe-west2</a:t>
-            </a:r>
-          </a:p>
-        </p:txBody>
-      </p:sp>
-      <p:sp>
-        <p:nvSpPr>
-          <p:cNvPr id="21" name="Rectangle 20"/>
+              <a:t>Dashboard  ·  https://dashboard-staging-794974391956.europe-west2.run.app</a:t>
+            </a:r>
+          </a:p>
+          <a:p>
+            <a:pPr>
+              <a:lnSpc>
+                <a:spcPct val="120000"/>
+              </a:lnSpc>
+            </a:pPr>
+            <a:r>
+              <a:rPr sz="1200" b="0" i="1">
+                <a:solidFill>
+                  <a:srgbClr val="6B7380"/>
+                </a:solidFill>
+                <a:latin typeface="Calibri"/>
+              </a:rPr>
+              <a:t>Scoring API  ·  https://scoring-api-staging-794974391956.europe-west2.run.app</a:t>
+            </a:r>
+          </a:p>
+        </p:txBody>
+      </p:sp>
+      <p:sp>
+        <p:nvSpPr>
+          <p:cNvPr id="5" name="Rectangle 4"/>
           <p:cNvSpPr/>
           <p:nvPr/>
         </p:nvSpPr>
@@ -9848,7 +11121,7 @@
       </p:sp>
       <p:sp>
         <p:nvSpPr>
-          <p:cNvPr id="22" name="TextBox 21"/>
+          <p:cNvPr id="6" name="TextBox 5"/>
           <p:cNvSpPr txBox="1"/>
           <p:nvPr/>
         </p:nvSpPr>
@@ -9876,7 +11149,7 @@
                 </a:solidFill>
                 <a:latin typeface="Calibri"/>
               </a:rPr>
-              <a:t>7 / 14</a:t>
+              <a:t>7 / 15</a:t>
             </a:r>
           </a:p>
         </p:txBody>
@@ -9946,7 +11219,7 @@
                 </a:solidFill>
                 <a:latin typeface="Calibri"/>
               </a:rPr>
-              <a:t>WHAT RUNS UNDERNEATH THE DEMO</a:t>
+              <a:t>LOAD TEST, LIVE STAGING</a:t>
             </a:r>
           </a:p>
           <a:p>
@@ -9957,7 +11230,7 @@
                 </a:solidFill>
                 <a:latin typeface="Calibri"/>
               </a:rPr>
-              <a:t>Production-grade engineering</a:t>
+              <a:t>Measured performance</a:t>
             </a:r>
           </a:p>
         </p:txBody>
@@ -10007,14 +11280,670 @@
       </p:sp>
       <p:sp>
         <p:nvSpPr>
-          <p:cNvPr id="4" name="TextBox 3"/>
+          <p:cNvPr id="4" name="Rounded Rectangle 3"/>
+          <p:cNvSpPr/>
+          <p:nvPr/>
+        </p:nvSpPr>
+        <p:spPr>
+          <a:xfrm>
+            <a:off x="548640" y="1234440"/>
+            <a:ext cx="1965960" cy="1417320"/>
+          </a:xfrm>
+          <a:prstGeom prst="roundRect">
+            <a:avLst>
+              <a:gd name="adj" fmla="val 6000"/>
+            </a:avLst>
+          </a:prstGeom>
+          <a:solidFill>
+            <a:srgbClr val="FFFFFF"/>
+          </a:solidFill>
+          <a:ln w="9525">
+            <a:solidFill>
+              <a:srgbClr val="D7DBE3"/>
+            </a:solidFill>
+          </a:ln>
+        </p:spPr>
+        <p:style>
+          <a:lnRef idx="1">
+            <a:schemeClr val="accent1"/>
+          </a:lnRef>
+          <a:fillRef idx="3">
+            <a:schemeClr val="accent1"/>
+          </a:fillRef>
+          <a:effectRef idx="2">
+            <a:schemeClr val="accent1"/>
+          </a:effectRef>
+          <a:fontRef idx="minor">
+            <a:schemeClr val="lt1"/>
+          </a:fontRef>
+        </p:style>
+        <p:txBody>
+          <a:bodyPr rtlCol="0" anchor="ctr"/>
+          <a:lstStyle/>
+          <a:p>
+            <a:pPr algn="ctr"/>
+          </a:p>
+        </p:txBody>
+      </p:sp>
+      <p:sp>
+        <p:nvSpPr>
+          <p:cNvPr id="5" name="Rectangle 4"/>
+          <p:cNvSpPr/>
+          <p:nvPr/>
+        </p:nvSpPr>
+        <p:spPr>
+          <a:xfrm>
+            <a:off x="548640" y="1234440"/>
+            <a:ext cx="1965960" cy="73152"/>
+          </a:xfrm>
+          <a:prstGeom prst="rect">
+            <a:avLst/>
+          </a:prstGeom>
+          <a:solidFill>
+            <a:srgbClr val="0F6E7A"/>
+          </a:solidFill>
+          <a:ln>
+            <a:noFill/>
+          </a:ln>
+        </p:spPr>
+        <p:style>
+          <a:lnRef idx="1">
+            <a:schemeClr val="accent1"/>
+          </a:lnRef>
+          <a:fillRef idx="3">
+            <a:schemeClr val="accent1"/>
+          </a:fillRef>
+          <a:effectRef idx="2">
+            <a:schemeClr val="accent1"/>
+          </a:effectRef>
+          <a:fontRef idx="minor">
+            <a:schemeClr val="lt1"/>
+          </a:fontRef>
+        </p:style>
+        <p:txBody>
+          <a:bodyPr rtlCol="0" anchor="ctr"/>
+          <a:lstStyle/>
+          <a:p>
+            <a:pPr algn="ctr"/>
+          </a:p>
+        </p:txBody>
+      </p:sp>
+      <p:sp>
+        <p:nvSpPr>
+          <p:cNvPr id="6" name="TextBox 5"/>
           <p:cNvSpPr txBox="1"/>
           <p:nvPr/>
         </p:nvSpPr>
         <p:spPr>
           <a:xfrm>
-            <a:off x="548640" y="1143000"/>
-            <a:ext cx="5486400" cy="5303520"/>
+            <a:off x="548640" y="1463040"/>
+            <a:ext cx="1965960" cy="640080"/>
+          </a:xfrm>
+          <a:prstGeom prst="rect">
+            <a:avLst/>
+          </a:prstGeom>
+          <a:noFill/>
+        </p:spPr>
+        <p:txBody>
+          <a:bodyPr wrap="none">
+            <a:spAutoFit/>
+          </a:bodyPr>
+          <a:lstStyle/>
+          <a:p>
+            <a:pPr algn="ctr"/>
+            <a:r>
+              <a:rPr sz="2800" b="1" i="0">
+                <a:solidFill>
+                  <a:srgbClr val="0B1F3A"/>
+                </a:solidFill>
+                <a:latin typeface="Calibri"/>
+              </a:rPr>
+              <a:t>561 ms</a:t>
+            </a:r>
+          </a:p>
+        </p:txBody>
+      </p:sp>
+      <p:sp>
+        <p:nvSpPr>
+          <p:cNvPr id="7" name="TextBox 6"/>
+          <p:cNvSpPr txBox="1"/>
+          <p:nvPr/>
+        </p:nvSpPr>
+        <p:spPr>
+          <a:xfrm>
+            <a:off x="548640" y="2103120"/>
+            <a:ext cx="1965960" cy="457200"/>
+          </a:xfrm>
+          <a:prstGeom prst="rect">
+            <a:avLst/>
+          </a:prstGeom>
+          <a:noFill/>
+        </p:spPr>
+        <p:txBody>
+          <a:bodyPr wrap="none">
+            <a:spAutoFit/>
+          </a:bodyPr>
+          <a:lstStyle/>
+          <a:p>
+            <a:pPr algn="ctr">
+              <a:lnSpc>
+                <a:spcPct val="110000"/>
+              </a:lnSpc>
+            </a:pPr>
+            <a:r>
+              <a:rPr sz="1100" b="0" i="0">
+                <a:solidFill>
+                  <a:srgbClr val="6B7380"/>
+                </a:solidFill>
+                <a:latin typeface="Calibri"/>
+              </a:rPr>
+              <a:t>Median (p50) /v1/score</a:t>
+            </a:r>
+          </a:p>
+        </p:txBody>
+      </p:sp>
+      <p:sp>
+        <p:nvSpPr>
+          <p:cNvPr id="8" name="Rounded Rectangle 7"/>
+          <p:cNvSpPr/>
+          <p:nvPr/>
+        </p:nvSpPr>
+        <p:spPr>
+          <a:xfrm>
+            <a:off x="2697480" y="1234440"/>
+            <a:ext cx="1965960" cy="1417320"/>
+          </a:xfrm>
+          <a:prstGeom prst="roundRect">
+            <a:avLst>
+              <a:gd name="adj" fmla="val 6000"/>
+            </a:avLst>
+          </a:prstGeom>
+          <a:solidFill>
+            <a:srgbClr val="FFFFFF"/>
+          </a:solidFill>
+          <a:ln w="9525">
+            <a:solidFill>
+              <a:srgbClr val="D7DBE3"/>
+            </a:solidFill>
+          </a:ln>
+        </p:spPr>
+        <p:style>
+          <a:lnRef idx="1">
+            <a:schemeClr val="accent1"/>
+          </a:lnRef>
+          <a:fillRef idx="3">
+            <a:schemeClr val="accent1"/>
+          </a:fillRef>
+          <a:effectRef idx="2">
+            <a:schemeClr val="accent1"/>
+          </a:effectRef>
+          <a:fontRef idx="minor">
+            <a:schemeClr val="lt1"/>
+          </a:fontRef>
+        </p:style>
+        <p:txBody>
+          <a:bodyPr rtlCol="0" anchor="ctr"/>
+          <a:lstStyle/>
+          <a:p>
+            <a:pPr algn="ctr"/>
+          </a:p>
+        </p:txBody>
+      </p:sp>
+      <p:sp>
+        <p:nvSpPr>
+          <p:cNvPr id="9" name="Rectangle 8"/>
+          <p:cNvSpPr/>
+          <p:nvPr/>
+        </p:nvSpPr>
+        <p:spPr>
+          <a:xfrm>
+            <a:off x="2697480" y="1234440"/>
+            <a:ext cx="1965960" cy="73152"/>
+          </a:xfrm>
+          <a:prstGeom prst="rect">
+            <a:avLst/>
+          </a:prstGeom>
+          <a:solidFill>
+            <a:srgbClr val="1F8A4F"/>
+          </a:solidFill>
+          <a:ln>
+            <a:noFill/>
+          </a:ln>
+        </p:spPr>
+        <p:style>
+          <a:lnRef idx="1">
+            <a:schemeClr val="accent1"/>
+          </a:lnRef>
+          <a:fillRef idx="3">
+            <a:schemeClr val="accent1"/>
+          </a:fillRef>
+          <a:effectRef idx="2">
+            <a:schemeClr val="accent1"/>
+          </a:effectRef>
+          <a:fontRef idx="minor">
+            <a:schemeClr val="lt1"/>
+          </a:fontRef>
+        </p:style>
+        <p:txBody>
+          <a:bodyPr rtlCol="0" anchor="ctr"/>
+          <a:lstStyle/>
+          <a:p>
+            <a:pPr algn="ctr"/>
+          </a:p>
+        </p:txBody>
+      </p:sp>
+      <p:sp>
+        <p:nvSpPr>
+          <p:cNvPr id="10" name="TextBox 9"/>
+          <p:cNvSpPr txBox="1"/>
+          <p:nvPr/>
+        </p:nvSpPr>
+        <p:spPr>
+          <a:xfrm>
+            <a:off x="2697480" y="1463040"/>
+            <a:ext cx="1965960" cy="640080"/>
+          </a:xfrm>
+          <a:prstGeom prst="rect">
+            <a:avLst/>
+          </a:prstGeom>
+          <a:noFill/>
+        </p:spPr>
+        <p:txBody>
+          <a:bodyPr wrap="none">
+            <a:spAutoFit/>
+          </a:bodyPr>
+          <a:lstStyle/>
+          <a:p>
+            <a:pPr algn="ctr"/>
+            <a:r>
+              <a:rPr sz="2800" b="1" i="0">
+                <a:solidFill>
+                  <a:srgbClr val="0B1F3A"/>
+                </a:solidFill>
+                <a:latin typeface="Calibri"/>
+              </a:rPr>
+              <a:t>762 ms</a:t>
+            </a:r>
+          </a:p>
+        </p:txBody>
+      </p:sp>
+      <p:sp>
+        <p:nvSpPr>
+          <p:cNvPr id="11" name="TextBox 10"/>
+          <p:cNvSpPr txBox="1"/>
+          <p:nvPr/>
+        </p:nvSpPr>
+        <p:spPr>
+          <a:xfrm>
+            <a:off x="2697480" y="2103120"/>
+            <a:ext cx="1965960" cy="457200"/>
+          </a:xfrm>
+          <a:prstGeom prst="rect">
+            <a:avLst/>
+          </a:prstGeom>
+          <a:noFill/>
+        </p:spPr>
+        <p:txBody>
+          <a:bodyPr wrap="none">
+            <a:spAutoFit/>
+          </a:bodyPr>
+          <a:lstStyle/>
+          <a:p>
+            <a:pPr algn="ctr">
+              <a:lnSpc>
+                <a:spcPct val="110000"/>
+              </a:lnSpc>
+            </a:pPr>
+            <a:r>
+              <a:rPr sz="1100" b="0" i="0">
+                <a:solidFill>
+                  <a:srgbClr val="6B7380"/>
+                </a:solidFill>
+                <a:latin typeface="Calibri"/>
+              </a:rPr>
+              <a:t>p95 /v1/score</a:t>
+            </a:r>
+          </a:p>
+        </p:txBody>
+      </p:sp>
+      <p:sp>
+        <p:nvSpPr>
+          <p:cNvPr id="12" name="Rounded Rectangle 11"/>
+          <p:cNvSpPr/>
+          <p:nvPr/>
+        </p:nvSpPr>
+        <p:spPr>
+          <a:xfrm>
+            <a:off x="4846320" y="1234440"/>
+            <a:ext cx="1965960" cy="1417320"/>
+          </a:xfrm>
+          <a:prstGeom prst="roundRect">
+            <a:avLst>
+              <a:gd name="adj" fmla="val 6000"/>
+            </a:avLst>
+          </a:prstGeom>
+          <a:solidFill>
+            <a:srgbClr val="FFFFFF"/>
+          </a:solidFill>
+          <a:ln w="9525">
+            <a:solidFill>
+              <a:srgbClr val="D7DBE3"/>
+            </a:solidFill>
+          </a:ln>
+        </p:spPr>
+        <p:style>
+          <a:lnRef idx="1">
+            <a:schemeClr val="accent1"/>
+          </a:lnRef>
+          <a:fillRef idx="3">
+            <a:schemeClr val="accent1"/>
+          </a:fillRef>
+          <a:effectRef idx="2">
+            <a:schemeClr val="accent1"/>
+          </a:effectRef>
+          <a:fontRef idx="minor">
+            <a:schemeClr val="lt1"/>
+          </a:fontRef>
+        </p:style>
+        <p:txBody>
+          <a:bodyPr rtlCol="0" anchor="ctr"/>
+          <a:lstStyle/>
+          <a:p>
+            <a:pPr algn="ctr"/>
+          </a:p>
+        </p:txBody>
+      </p:sp>
+      <p:sp>
+        <p:nvSpPr>
+          <p:cNvPr id="13" name="Rectangle 12"/>
+          <p:cNvSpPr/>
+          <p:nvPr/>
+        </p:nvSpPr>
+        <p:spPr>
+          <a:xfrm>
+            <a:off x="4846320" y="1234440"/>
+            <a:ext cx="1965960" cy="73152"/>
+          </a:xfrm>
+          <a:prstGeom prst="rect">
+            <a:avLst/>
+          </a:prstGeom>
+          <a:solidFill>
+            <a:srgbClr val="0F6E7A"/>
+          </a:solidFill>
+          <a:ln>
+            <a:noFill/>
+          </a:ln>
+        </p:spPr>
+        <p:style>
+          <a:lnRef idx="1">
+            <a:schemeClr val="accent1"/>
+          </a:lnRef>
+          <a:fillRef idx="3">
+            <a:schemeClr val="accent1"/>
+          </a:fillRef>
+          <a:effectRef idx="2">
+            <a:schemeClr val="accent1"/>
+          </a:effectRef>
+          <a:fontRef idx="minor">
+            <a:schemeClr val="lt1"/>
+          </a:fontRef>
+        </p:style>
+        <p:txBody>
+          <a:bodyPr rtlCol="0" anchor="ctr"/>
+          <a:lstStyle/>
+          <a:p>
+            <a:pPr algn="ctr"/>
+          </a:p>
+        </p:txBody>
+      </p:sp>
+      <p:sp>
+        <p:nvSpPr>
+          <p:cNvPr id="14" name="TextBox 13"/>
+          <p:cNvSpPr txBox="1"/>
+          <p:nvPr/>
+        </p:nvSpPr>
+        <p:spPr>
+          <a:xfrm>
+            <a:off x="4846320" y="1463040"/>
+            <a:ext cx="1965960" cy="640080"/>
+          </a:xfrm>
+          <a:prstGeom prst="rect">
+            <a:avLst/>
+          </a:prstGeom>
+          <a:noFill/>
+        </p:spPr>
+        <p:txBody>
+          <a:bodyPr wrap="none">
+            <a:spAutoFit/>
+          </a:bodyPr>
+          <a:lstStyle/>
+          <a:p>
+            <a:pPr algn="ctr"/>
+            <a:r>
+              <a:rPr sz="2800" b="1" i="0">
+                <a:solidFill>
+                  <a:srgbClr val="0B1F3A"/>
+                </a:solidFill>
+                <a:latin typeface="Calibri"/>
+              </a:rPr>
+              <a:t>993 ms</a:t>
+            </a:r>
+          </a:p>
+        </p:txBody>
+      </p:sp>
+      <p:sp>
+        <p:nvSpPr>
+          <p:cNvPr id="15" name="TextBox 14"/>
+          <p:cNvSpPr txBox="1"/>
+          <p:nvPr/>
+        </p:nvSpPr>
+        <p:spPr>
+          <a:xfrm>
+            <a:off x="4846320" y="2103120"/>
+            <a:ext cx="1965960" cy="457200"/>
+          </a:xfrm>
+          <a:prstGeom prst="rect">
+            <a:avLst/>
+          </a:prstGeom>
+          <a:noFill/>
+        </p:spPr>
+        <p:txBody>
+          <a:bodyPr wrap="none">
+            <a:spAutoFit/>
+          </a:bodyPr>
+          <a:lstStyle/>
+          <a:p>
+            <a:pPr algn="ctr">
+              <a:lnSpc>
+                <a:spcPct val="110000"/>
+              </a:lnSpc>
+            </a:pPr>
+            <a:r>
+              <a:rPr sz="1100" b="0" i="0">
+                <a:solidFill>
+                  <a:srgbClr val="6B7380"/>
+                </a:solidFill>
+                <a:latin typeface="Calibri"/>
+              </a:rPr>
+              <a:t>p99 /v1/score</a:t>
+            </a:r>
+          </a:p>
+        </p:txBody>
+      </p:sp>
+      <p:sp>
+        <p:nvSpPr>
+          <p:cNvPr id="16" name="Rounded Rectangle 15"/>
+          <p:cNvSpPr/>
+          <p:nvPr/>
+        </p:nvSpPr>
+        <p:spPr>
+          <a:xfrm>
+            <a:off x="6995160" y="1234440"/>
+            <a:ext cx="1965960" cy="1417320"/>
+          </a:xfrm>
+          <a:prstGeom prst="roundRect">
+            <a:avLst>
+              <a:gd name="adj" fmla="val 6000"/>
+            </a:avLst>
+          </a:prstGeom>
+          <a:solidFill>
+            <a:srgbClr val="FFFFFF"/>
+          </a:solidFill>
+          <a:ln w="9525">
+            <a:solidFill>
+              <a:srgbClr val="D7DBE3"/>
+            </a:solidFill>
+          </a:ln>
+        </p:spPr>
+        <p:style>
+          <a:lnRef idx="1">
+            <a:schemeClr val="accent1"/>
+          </a:lnRef>
+          <a:fillRef idx="3">
+            <a:schemeClr val="accent1"/>
+          </a:fillRef>
+          <a:effectRef idx="2">
+            <a:schemeClr val="accent1"/>
+          </a:effectRef>
+          <a:fontRef idx="minor">
+            <a:schemeClr val="lt1"/>
+          </a:fontRef>
+        </p:style>
+        <p:txBody>
+          <a:bodyPr rtlCol="0" anchor="ctr"/>
+          <a:lstStyle/>
+          <a:p>
+            <a:pPr algn="ctr"/>
+          </a:p>
+        </p:txBody>
+      </p:sp>
+      <p:sp>
+        <p:nvSpPr>
+          <p:cNvPr id="17" name="Rectangle 16"/>
+          <p:cNvSpPr/>
+          <p:nvPr/>
+        </p:nvSpPr>
+        <p:spPr>
+          <a:xfrm>
+            <a:off x="6995160" y="1234440"/>
+            <a:ext cx="1965960" cy="73152"/>
+          </a:xfrm>
+          <a:prstGeom prst="rect">
+            <a:avLst/>
+          </a:prstGeom>
+          <a:solidFill>
+            <a:srgbClr val="1F8A4F"/>
+          </a:solidFill>
+          <a:ln>
+            <a:noFill/>
+          </a:ln>
+        </p:spPr>
+        <p:style>
+          <a:lnRef idx="1">
+            <a:schemeClr val="accent1"/>
+          </a:lnRef>
+          <a:fillRef idx="3">
+            <a:schemeClr val="accent1"/>
+          </a:fillRef>
+          <a:effectRef idx="2">
+            <a:schemeClr val="accent1"/>
+          </a:effectRef>
+          <a:fontRef idx="minor">
+            <a:schemeClr val="lt1"/>
+          </a:fontRef>
+        </p:style>
+        <p:txBody>
+          <a:bodyPr rtlCol="0" anchor="ctr"/>
+          <a:lstStyle/>
+          <a:p>
+            <a:pPr algn="ctr"/>
+          </a:p>
+        </p:txBody>
+      </p:sp>
+      <p:sp>
+        <p:nvSpPr>
+          <p:cNvPr id="18" name="TextBox 17"/>
+          <p:cNvSpPr txBox="1"/>
+          <p:nvPr/>
+        </p:nvSpPr>
+        <p:spPr>
+          <a:xfrm>
+            <a:off x="6995160" y="1463040"/>
+            <a:ext cx="1965960" cy="640080"/>
+          </a:xfrm>
+          <a:prstGeom prst="rect">
+            <a:avLst/>
+          </a:prstGeom>
+          <a:noFill/>
+        </p:spPr>
+        <p:txBody>
+          <a:bodyPr wrap="none">
+            <a:spAutoFit/>
+          </a:bodyPr>
+          <a:lstStyle/>
+          <a:p>
+            <a:pPr algn="ctr"/>
+            <a:r>
+              <a:rPr sz="2800" b="1" i="0">
+                <a:solidFill>
+                  <a:srgbClr val="1F8A4F"/>
+                </a:solidFill>
+                <a:latin typeface="Calibri"/>
+              </a:rPr>
+              <a:t>100 %</a:t>
+            </a:r>
+          </a:p>
+        </p:txBody>
+      </p:sp>
+      <p:sp>
+        <p:nvSpPr>
+          <p:cNvPr id="19" name="TextBox 18"/>
+          <p:cNvSpPr txBox="1"/>
+          <p:nvPr/>
+        </p:nvSpPr>
+        <p:spPr>
+          <a:xfrm>
+            <a:off x="6995160" y="2103120"/>
+            <a:ext cx="1965960" cy="457200"/>
+          </a:xfrm>
+          <a:prstGeom prst="rect">
+            <a:avLst/>
+          </a:prstGeom>
+          <a:noFill/>
+        </p:spPr>
+        <p:txBody>
+          <a:bodyPr wrap="none">
+            <a:spAutoFit/>
+          </a:bodyPr>
+          <a:lstStyle/>
+          <a:p>
+            <a:pPr algn="ctr">
+              <a:lnSpc>
+                <a:spcPct val="110000"/>
+              </a:lnSpc>
+            </a:pPr>
+            <a:r>
+              <a:rPr sz="1100" b="0" i="0">
+                <a:solidFill>
+                  <a:srgbClr val="6B7380"/>
+                </a:solidFill>
+                <a:latin typeface="Calibri"/>
+              </a:rPr>
+              <a:t>Success rate</a:t>
+            </a:r>
+          </a:p>
+        </p:txBody>
+      </p:sp>
+      <p:sp>
+        <p:nvSpPr>
+          <p:cNvPr id="20" name="TextBox 19"/>
+          <p:cNvSpPr txBox="1"/>
+          <p:nvPr/>
+        </p:nvSpPr>
+        <p:spPr>
+          <a:xfrm>
+            <a:off x="548640" y="2834640"/>
+            <a:ext cx="11094415" cy="5303520"/>
           </a:xfrm>
           <a:prstGeom prst="rect">
             <a:avLst/>
@@ -10042,7 +11971,7 @@
                 </a:solidFill>
                 <a:latin typeface="Calibri"/>
               </a:rPr>
-              <a:t>Reliability</a:t>
+              <a:t>Headroom against the SLO</a:t>
             </a:r>
           </a:p>
           <a:p>
@@ -10070,7 +11999,7 @@
                 </a:solidFill>
                 <a:latin typeface="Calibri"/>
               </a:rPr>
-              <a:t>Circuit-breaker on the upstream model — fails fast and recovers automatically.</a:t>
+              <a:t>Staging p95 latency budget is 1500 ms — observed 762 ms leaves roughly a 2× margin before alerts fire.</a:t>
             </a:r>
           </a:p>
           <a:p>
@@ -10098,7 +12027,7 @@
                 </a:solidFill>
                 <a:latin typeface="Calibri"/>
               </a:rPr>
-              <a:t>Configurable timeouts for model and warehouse calls — no request hangs indefinitely.</a:t>
+              <a:t>Zero errors at the tested rate; prior runs showed the service recovers cleanly under autoscaling load.</a:t>
             </a:r>
           </a:p>
           <a:p>
@@ -10126,7 +12055,7 @@
                 </a:solidFill>
                 <a:latin typeface="Calibri"/>
               </a:rPr>
-              <a:t>Negative-prediction clamp and input validation at the edge.</a:t>
+              <a:t>Production sizing has been pre-computed from these numbers — a larger Vertex machine and a minimum of two replicas keep the same headroom under client traffic.</a:t>
             </a:r>
           </a:p>
           <a:p>
@@ -10134,188 +12063,22 @@
               <a:lnSpc>
                 <a:spcPct val="120000"/>
               </a:lnSpc>
-              <a:spcAft>
-                <a:spcPts val="300"/>
-              </a:spcAft>
             </a:pPr>
             <a:r>
-              <a:rPr sz="1300" b="1" i="0">
-                <a:solidFill>
-                  <a:srgbClr val="D97306"/>
-                </a:solidFill>
-                <a:latin typeface="Calibri"/>
-              </a:rPr>
-              <a:t>•  </a:t>
-            </a:r>
-            <a:r>
-              <a:rPr sz="1300" b="0" i="0">
-                <a:solidFill>
-                  <a:srgbClr val="333F52"/>
-                </a:solidFill>
-                <a:latin typeface="Calibri"/>
-              </a:rPr>
-              <a:t>Anomaly window on null-rates flips the breaker before bad data reaches finance.</a:t>
-            </a:r>
-          </a:p>
-        </p:txBody>
-      </p:sp>
-      <p:sp>
-        <p:nvSpPr>
-          <p:cNvPr id="5" name="TextBox 4"/>
-          <p:cNvSpPr txBox="1"/>
-          <p:nvPr/>
-        </p:nvSpPr>
-        <p:spPr>
-          <a:xfrm>
-            <a:off x="6400800" y="1143000"/>
-            <a:ext cx="5486400" cy="5303520"/>
-          </a:xfrm>
-          <a:prstGeom prst="rect">
-            <a:avLst/>
-          </a:prstGeom>
-          <a:noFill/>
-        </p:spPr>
-        <p:txBody>
-          <a:bodyPr wrap="square">
-            <a:spAutoFit/>
-          </a:bodyPr>
-          <a:lstStyle/>
-          <a:p>
-            <a:pPr>
-              <a:lnSpc>
-                <a:spcPct val="120000"/>
-              </a:lnSpc>
-              <a:spcAft>
-                <a:spcPts val="600"/>
-              </a:spcAft>
-            </a:pPr>
-            <a:r>
-              <a:rPr sz="1700" b="1" i="0">
-                <a:solidFill>
-                  <a:srgbClr val="0F6E7A"/>
-                </a:solidFill>
-                <a:latin typeface="Calibri"/>
-              </a:rPr>
-              <a:t>Operability</a:t>
-            </a:r>
-          </a:p>
-          <a:p>
-            <a:pPr>
-              <a:lnSpc>
-                <a:spcPct val="120000"/>
-              </a:lnSpc>
-              <a:spcAft>
-                <a:spcPts val="300"/>
-              </a:spcAft>
-            </a:pPr>
-            <a:r>
-              <a:rPr sz="1300" b="1" i="0">
-                <a:solidFill>
-                  <a:srgbClr val="D97306"/>
-                </a:solidFill>
-                <a:latin typeface="Calibri"/>
-              </a:rPr>
-              <a:t>•  </a:t>
-            </a:r>
-            <a:r>
-              <a:rPr sz="1300" b="0" i="0">
-                <a:solidFill>
-                  <a:srgbClr val="333F52"/>
-                </a:solidFill>
-                <a:latin typeface="Calibri"/>
-              </a:rPr>
-              <a:t>Every change ships through GitHub Actions on tag push, gated by tests, type checks, and security scan.</a:t>
-            </a:r>
-          </a:p>
-          <a:p>
-            <a:pPr>
-              <a:lnSpc>
-                <a:spcPct val="120000"/>
-              </a:lnSpc>
-              <a:spcAft>
-                <a:spcPts val="300"/>
-              </a:spcAft>
-            </a:pPr>
-            <a:r>
-              <a:rPr sz="1300" b="1" i="0">
-                <a:solidFill>
-                  <a:srgbClr val="D97306"/>
-                </a:solidFill>
-                <a:latin typeface="Calibri"/>
-              </a:rPr>
-              <a:t>•  </a:t>
-            </a:r>
-            <a:r>
-              <a:rPr sz="1300" b="0" i="0">
-                <a:solidFill>
-                  <a:srgbClr val="333F52"/>
-                </a:solidFill>
-                <a:latin typeface="Calibri"/>
-              </a:rPr>
-              <a:t>Workload Identity Federation — no service-account keys to manage or rotate.</a:t>
-            </a:r>
-          </a:p>
-          <a:p>
-            <a:pPr>
-              <a:lnSpc>
-                <a:spcPct val="120000"/>
-              </a:lnSpc>
-              <a:spcAft>
-                <a:spcPts val="300"/>
-              </a:spcAft>
-            </a:pPr>
-            <a:r>
-              <a:rPr sz="1300" b="1" i="0">
-                <a:solidFill>
-                  <a:srgbClr val="D97306"/>
-                </a:solidFill>
-                <a:latin typeface="Calibri"/>
-              </a:rPr>
-              <a:t>•  </a:t>
-            </a:r>
-            <a:r>
-              <a:rPr sz="1300" b="0" i="0">
-                <a:solidFill>
-                  <a:srgbClr val="333F52"/>
-                </a:solidFill>
-                <a:latin typeface="Calibri"/>
-              </a:rPr>
-              <a:t>Cloud Monitoring alerts on latency, error rate, breaker trips, and anomaly state.</a:t>
-            </a:r>
-          </a:p>
-          <a:p>
-            <a:pPr>
-              <a:lnSpc>
-                <a:spcPct val="120000"/>
-              </a:lnSpc>
-              <a:spcAft>
-                <a:spcPts val="300"/>
-              </a:spcAft>
-            </a:pPr>
-            <a:r>
-              <a:rPr sz="1300" b="1" i="0">
-                <a:solidFill>
-                  <a:srgbClr val="D97306"/>
-                </a:solidFill>
-                <a:latin typeface="Calibri"/>
-              </a:rPr>
-              <a:t>•  </a:t>
-            </a:r>
-            <a:r>
-              <a:rPr sz="1300" b="0" i="0">
-                <a:solidFill>
-                  <a:srgbClr val="333F52"/>
-                </a:solidFill>
-                <a:latin typeface="Calibri"/>
-              </a:rPr>
-              <a:t>Runbooks committed for breaker reset, model rollback, secret rotation, and cost scale-down.</a:t>
-            </a:r>
-          </a:p>
-        </p:txBody>
-      </p:sp>
-      <p:sp>
-        <p:nvSpPr>
-          <p:cNvPr id="6" name="Rectangle 5"/>
+              <a:rPr sz="1100" b="0" i="1">
+                <a:solidFill>
+                  <a:srgbClr val="6B7380"/>
+                </a:solidFill>
+                <a:latin typeface="Calibri"/>
+              </a:rPr>
+              <a:t>Source: ops/perf/20260428T094507Z__v1_score.json  ·  tool: oha, 30s @ c=10  ·  europe-west2</a:t>
+            </a:r>
+          </a:p>
+        </p:txBody>
+      </p:sp>
+      <p:sp>
+        <p:nvSpPr>
+          <p:cNvPr id="21" name="Rectangle 20"/>
           <p:cNvSpPr/>
           <p:nvPr/>
         </p:nvSpPr>
@@ -10367,7 +12130,7 @@
       </p:sp>
       <p:sp>
         <p:nvSpPr>
-          <p:cNvPr id="7" name="TextBox 6"/>
+          <p:cNvPr id="22" name="TextBox 21"/>
           <p:cNvSpPr txBox="1"/>
           <p:nvPr/>
         </p:nvSpPr>
@@ -10395,7 +12158,7 @@
                 </a:solidFill>
                 <a:latin typeface="Calibri"/>
               </a:rPr>
-              <a:t>8 / 14</a:t>
+              <a:t>8 / 15</a:t>
             </a:r>
           </a:p>
         </p:txBody>
@@ -10465,7 +12228,7 @@
                 </a:solidFill>
                 <a:latin typeface="Calibri"/>
               </a:rPr>
-              <a:t>BUILT TO PASS REVIEW</a:t>
+              <a:t>WHAT RUNS UNDERNEATH THE DEMO</a:t>
             </a:r>
           </a:p>
           <a:p>
@@ -10476,7 +12239,7 @@
                 </a:solidFill>
                 <a:latin typeface="Calibri"/>
               </a:rPr>
-              <a:t>Security and compliance posture</a:t>
+              <a:t>Production-grade engineering</a:t>
             </a:r>
           </a:p>
         </p:txBody>
@@ -10533,7 +12296,7 @@
         <p:spPr>
           <a:xfrm>
             <a:off x="548640" y="1143000"/>
-            <a:ext cx="11094415" cy="5303520"/>
+            <a:ext cx="5486400" cy="5303520"/>
           </a:xfrm>
           <a:prstGeom prst="rect">
             <a:avLst/>
@@ -10561,7 +12324,7 @@
                 </a:solidFill>
                 <a:latin typeface="Calibri"/>
               </a:rPr>
-              <a:t>Identity and access</a:t>
+              <a:t>Reliability</a:t>
             </a:r>
           </a:p>
           <a:p>
@@ -10589,7 +12352,7 @@
                 </a:solidFill>
                 <a:latin typeface="Calibri"/>
               </a:rPr>
-              <a:t>Per-service service accounts; least-privilege IAM encoded in Terraform — every grant is reviewable in git.</a:t>
+              <a:t>Circuit-breaker on the upstream model — fails fast and recovers automatically.</a:t>
             </a:r>
           </a:p>
           <a:p>
@@ -10617,7 +12380,7 @@
                 </a:solidFill>
                 <a:latin typeface="Calibri"/>
               </a:rPr>
-              <a:t>No long-lived secrets in CI: GitHub OIDC federates into Google Cloud via Workload Identity.</a:t>
+              <a:t>Configurable timeouts for model and warehouse calls — no request hangs indefinitely.</a:t>
             </a:r>
           </a:p>
           <a:p>
@@ -10645,9 +12408,60 @@
                 </a:solidFill>
                 <a:latin typeface="Calibri"/>
               </a:rPr>
-              <a:t>Secrets in Secret Manager with versioning; rotation is a runbooked one-liner.</a:t>
-            </a:r>
-          </a:p>
+              <a:t>Negative-prediction clamp and input validation at the edge.</a:t>
+            </a:r>
+          </a:p>
+          <a:p>
+            <a:pPr>
+              <a:lnSpc>
+                <a:spcPct val="120000"/>
+              </a:lnSpc>
+              <a:spcAft>
+                <a:spcPts val="300"/>
+              </a:spcAft>
+            </a:pPr>
+            <a:r>
+              <a:rPr sz="1300" b="1" i="0">
+                <a:solidFill>
+                  <a:srgbClr val="D97306"/>
+                </a:solidFill>
+                <a:latin typeface="Calibri"/>
+              </a:rPr>
+              <a:t>•  </a:t>
+            </a:r>
+            <a:r>
+              <a:rPr sz="1300" b="0" i="0">
+                <a:solidFill>
+                  <a:srgbClr val="333F52"/>
+                </a:solidFill>
+                <a:latin typeface="Calibri"/>
+              </a:rPr>
+              <a:t>Anomaly window on null-rates flips the breaker before bad data reaches finance.</a:t>
+            </a:r>
+          </a:p>
+        </p:txBody>
+      </p:sp>
+      <p:sp>
+        <p:nvSpPr>
+          <p:cNvPr id="5" name="TextBox 4"/>
+          <p:cNvSpPr txBox="1"/>
+          <p:nvPr/>
+        </p:nvSpPr>
+        <p:spPr>
+          <a:xfrm>
+            <a:off x="6400800" y="1143000"/>
+            <a:ext cx="5486400" cy="5303520"/>
+          </a:xfrm>
+          <a:prstGeom prst="rect">
+            <a:avLst/>
+          </a:prstGeom>
+          <a:noFill/>
+        </p:spPr>
+        <p:txBody>
+          <a:bodyPr wrap="square">
+            <a:spAutoFit/>
+          </a:bodyPr>
+          <a:lstStyle/>
           <a:p>
             <a:pPr>
               <a:lnSpc>
@@ -10664,7 +12478,7 @@
                 </a:solidFill>
                 <a:latin typeface="Calibri"/>
               </a:rPr>
-              <a:t>Data protection</a:t>
+              <a:t>Operability</a:t>
             </a:r>
           </a:p>
           <a:p>
@@ -10692,7 +12506,7 @@
                 </a:solidFill>
                 <a:latin typeface="Calibri"/>
               </a:rPr>
-              <a:t>All data resident in europe-west2 (London). No US-region replicas.</a:t>
+              <a:t>Every change ships through GitHub Actions on tag push, gated by tests, type checks, and security scan.</a:t>
             </a:r>
           </a:p>
           <a:p>
@@ -10720,7 +12534,7 @@
                 </a:solidFill>
                 <a:latin typeface="Calibri"/>
               </a:rPr>
-              <a:t>Google-managed encryption keys by default; customer-managed keys (CMEK) available on request.</a:t>
+              <a:t>Workload Identity Federation — no service-account keys to manage or rotate.</a:t>
             </a:r>
           </a:p>
           <a:p>
@@ -10748,26 +12562,7 @@
                 </a:solidFill>
                 <a:latin typeface="Calibri"/>
               </a:rPr>
-              <a:t>Predictions are persisted to BigQuery with the same access controls as your existing analytics estate.</a:t>
-            </a:r>
-          </a:p>
-          <a:p>
-            <a:pPr>
-              <a:lnSpc>
-                <a:spcPct val="120000"/>
-              </a:lnSpc>
-              <a:spcAft>
-                <a:spcPts val="600"/>
-              </a:spcAft>
-            </a:pPr>
-            <a:r>
-              <a:rPr sz="1700" b="1" i="0">
-                <a:solidFill>
-                  <a:srgbClr val="0F6E7A"/>
-                </a:solidFill>
-                <a:latin typeface="Calibri"/>
-              </a:rPr>
-              <a:t>Supply chain</a:t>
+              <a:t>Cloud Monitoring alerts on latency, error rate, breaker trips, and anomaly state.</a:t>
             </a:r>
           </a:p>
           <a:p>
@@ -10795,14 +12590,14 @@
                 </a:solidFill>
                 <a:latin typeface="Calibri"/>
               </a:rPr>
-              <a:t>Container images pinned by digest; dependency scanning runs on every PR; no third-party model weights are downloaded at runtime.</a:t>
-            </a:r>
-          </a:p>
-        </p:txBody>
-      </p:sp>
-      <p:sp>
-        <p:nvSpPr>
-          <p:cNvPr id="5" name="Rectangle 4"/>
+              <a:t>Runbooks committed for breaker reset, model rollback, secret rotation, and cost scale-down.</a:t>
+            </a:r>
+          </a:p>
+        </p:txBody>
+      </p:sp>
+      <p:sp>
+        <p:nvSpPr>
+          <p:cNvPr id="6" name="Rectangle 5"/>
           <p:cNvSpPr/>
           <p:nvPr/>
         </p:nvSpPr>
@@ -10854,7 +12649,7 @@
       </p:sp>
       <p:sp>
         <p:nvSpPr>
-          <p:cNvPr id="6" name="TextBox 5"/>
+          <p:cNvPr id="7" name="TextBox 6"/>
           <p:cNvSpPr txBox="1"/>
           <p:nvPr/>
         </p:nvSpPr>
@@ -10882,7 +12677,7 @@
                 </a:solidFill>
                 <a:latin typeface="Calibri"/>
               </a:rPr>
-              <a:t>9 / 14</a:t>
+              <a:t>9 / 15</a:t>
             </a:r>
           </a:p>
         </p:txBody>

--- a/docs/client-demo-deck.pptx
+++ b/docs/client-demo-deck.pptx
@@ -9624,7 +9624,7 @@
                 </a:solidFill>
                 <a:latin typeface="Calibri"/>
               </a:rPr>
-              <a:t>6 / 15</a:t>
+              <a:t>5 / 15</a:t>
             </a:r>
           </a:p>
         </p:txBody>
@@ -9694,7 +9694,7 @@
                 </a:solidFill>
                 <a:latin typeface="Calibri"/>
               </a:rPr>
-              <a:t>ARCHITECTURE, IN ONE PICTURE</a:t>
+              <a:t>PREDICTIVE RPC ESTIMATOR</a:t>
             </a:r>
           </a:p>
           <a:p>
@@ -9705,7 +9705,7 @@
                 </a:solidFill>
                 <a:latin typeface="Calibri"/>
               </a:rPr>
-              <a:t>How it works</a:t>
+              <a:t>End-to-end architecture</a:t>
             </a:r>
           </a:p>
         </p:txBody>
@@ -9761,13 +9761,101 @@
         </p:nvSpPr>
         <p:spPr>
           <a:xfrm>
-            <a:off x="457200" y="1463040"/>
-            <a:ext cx="1554480" cy="822960"/>
+            <a:off x="1188720" y="1051560"/>
+            <a:ext cx="10424160" cy="5303520"/>
           </a:xfrm>
           <a:prstGeom prst="roundRect">
             <a:avLst>
-              <a:gd name="adj" fmla="val 15000"/>
+              <a:gd name="adj" fmla="val 2000"/>
             </a:avLst>
+          </a:prstGeom>
+          <a:solidFill>
+            <a:srgbClr val="ECEFF4"/>
+          </a:solidFill>
+          <a:ln w="12700">
+            <a:solidFill>
+              <a:srgbClr val="B8BFCC"/>
+            </a:solidFill>
+          </a:ln>
+        </p:spPr>
+        <p:style>
+          <a:lnRef idx="1">
+            <a:schemeClr val="accent1"/>
+          </a:lnRef>
+          <a:fillRef idx="3">
+            <a:schemeClr val="accent1"/>
+          </a:fillRef>
+          <a:effectRef idx="2">
+            <a:schemeClr val="accent1"/>
+          </a:effectRef>
+          <a:fontRef idx="minor">
+            <a:schemeClr val="lt1"/>
+          </a:fontRef>
+        </p:style>
+        <p:txBody>
+          <a:bodyPr rtlCol="0" anchor="ctr"/>
+          <a:lstStyle/>
+          <a:p>
+            <a:pPr algn="ctr"/>
+          </a:p>
+        </p:txBody>
+      </p:sp>
+      <p:sp>
+        <p:nvSpPr>
+          <p:cNvPr id="5" name="TextBox 4"/>
+          <p:cNvSpPr txBox="1"/>
+          <p:nvPr/>
+        </p:nvSpPr>
+        <p:spPr>
+          <a:xfrm>
+            <a:off x="1325880" y="1097280"/>
+            <a:ext cx="5486400" cy="320040"/>
+          </a:xfrm>
+          <a:prstGeom prst="rect">
+            <a:avLst/>
+          </a:prstGeom>
+          <a:noFill/>
+        </p:spPr>
+        <p:txBody>
+          <a:bodyPr wrap="none">
+            <a:spAutoFit/>
+          </a:bodyPr>
+          <a:lstStyle/>
+          <a:p>
+            <a:r>
+              <a:rPr sz="1200" b="1" i="0">
+                <a:solidFill>
+                  <a:srgbClr val="0B1F3A"/>
+                </a:solidFill>
+                <a:latin typeface="Calibri"/>
+              </a:rPr>
+              <a:t>Google Cloud Platform</a:t>
+            </a:r>
+            <a:r>
+              <a:rPr sz="1100" b="0" i="1">
+                <a:solidFill>
+                  <a:srgbClr val="6B7380"/>
+                </a:solidFill>
+                <a:latin typeface="Calibri"/>
+              </a:rPr>
+              <a:t>    europe-west2 (London)</a:t>
+            </a:r>
+          </a:p>
+        </p:txBody>
+      </p:sp>
+      <p:sp>
+        <p:nvSpPr>
+          <p:cNvPr id="6" name="Oval 5"/>
+          <p:cNvSpPr/>
+          <p:nvPr/>
+        </p:nvSpPr>
+        <p:spPr>
+          <a:xfrm>
+            <a:off x="137160" y="1828800"/>
+            <a:ext cx="292608" cy="292608"/>
+          </a:xfrm>
+          <a:prstGeom prst="ellipse">
+            <a:avLst/>
           </a:prstGeom>
           <a:solidFill>
             <a:srgbClr val="333F52"/>
@@ -9791,52 +9879,29 @@
           </a:fontRef>
         </p:style>
         <p:txBody>
-          <a:bodyPr rtlCol="0" anchor="ctr" wrap="square"/>
+          <a:bodyPr rtlCol="0" anchor="ctr"/>
           <a:lstStyle/>
           <a:p>
             <a:pPr algn="ctr"/>
-            <a:r>
-              <a:rPr sz="1300" b="1" i="0">
-                <a:solidFill>
-                  <a:srgbClr val="FFFFFF"/>
-                </a:solidFill>
-                <a:latin typeface="Calibri"/>
-              </a:rPr>
-              <a:t>Client app</a:t>
-            </a:r>
-          </a:p>
-          <a:p>
-            <a:pPr algn="ctr"/>
-            <a:r>
-              <a:rPr sz="900" b="0" i="0">
-                <a:solidFill>
-                  <a:srgbClr val="F4F6FA"/>
-                </a:solidFill>
-                <a:latin typeface="Calibri"/>
-              </a:rPr>
-              <a:t>browser / server</a:t>
-            </a:r>
-          </a:p>
-        </p:txBody>
-      </p:sp>
-      <p:sp>
-        <p:nvSpPr>
-          <p:cNvPr id="5" name="Rounded Rectangle 4"/>
+          </a:p>
+        </p:txBody>
+      </p:sp>
+      <p:sp>
+        <p:nvSpPr>
+          <p:cNvPr id="7" name="Isosceles Triangle 6"/>
           <p:cNvSpPr/>
           <p:nvPr/>
         </p:nvSpPr>
         <p:spPr>
           <a:xfrm>
-            <a:off x="2331720" y="1463040"/>
-            <a:ext cx="1554480" cy="822960"/>
-          </a:xfrm>
-          <a:prstGeom prst="roundRect">
-            <a:avLst>
-              <a:gd name="adj" fmla="val 15000"/>
-            </a:avLst>
+            <a:off x="91440" y="2084832"/>
+            <a:ext cx="384048" cy="411480"/>
+          </a:xfrm>
+          <a:prstGeom prst="triangle">
+            <a:avLst/>
           </a:prstGeom>
           <a:solidFill>
-            <a:srgbClr val="0F6E7A"/>
+            <a:srgbClr val="333F52"/>
           </a:solidFill>
           <a:ln>
             <a:noFill/>
@@ -9857,52 +9922,76 @@
           </a:fontRef>
         </p:style>
         <p:txBody>
-          <a:bodyPr rtlCol="0" anchor="ctr" wrap="square"/>
+          <a:bodyPr rtlCol="0" anchor="ctr"/>
           <a:lstStyle/>
           <a:p>
             <a:pPr algn="ctr"/>
-            <a:r>
-              <a:rPr sz="1300" b="1" i="0">
-                <a:solidFill>
-                  <a:srgbClr val="FFFFFF"/>
-                </a:solidFill>
-                <a:latin typeface="Calibri"/>
-              </a:rPr>
-              <a:t>Scoring API</a:t>
-            </a:r>
-          </a:p>
+          </a:p>
+        </p:txBody>
+      </p:sp>
+      <p:sp>
+        <p:nvSpPr>
+          <p:cNvPr id="8" name="TextBox 7"/>
+          <p:cNvSpPr txBox="1"/>
+          <p:nvPr/>
+        </p:nvSpPr>
+        <p:spPr>
+          <a:xfrm>
+            <a:off x="-228600" y="2514600"/>
+            <a:ext cx="1024128" cy="502920"/>
+          </a:xfrm>
+          <a:prstGeom prst="rect">
+            <a:avLst/>
+          </a:prstGeom>
+          <a:noFill/>
+        </p:spPr>
+        <p:txBody>
+          <a:bodyPr wrap="square">
+            <a:spAutoFit/>
+          </a:bodyPr>
+          <a:lstStyle/>
           <a:p>
             <a:pPr algn="ctr"/>
             <a:r>
-              <a:rPr sz="900" b="0" i="0">
-                <a:solidFill>
-                  <a:srgbClr val="F4F6FA"/>
-                </a:solidFill>
-                <a:latin typeface="Calibri"/>
-              </a:rPr>
-              <a:t>Cloud Run · Rust</a:t>
-            </a:r>
-          </a:p>
-        </p:txBody>
-      </p:sp>
-      <p:sp>
-        <p:nvSpPr>
-          <p:cNvPr id="6" name="Rounded Rectangle 5"/>
+              <a:rPr sz="900" b="1" i="0">
+                <a:solidFill>
+                  <a:srgbClr val="333F52"/>
+                </a:solidFill>
+                <a:latin typeface="Calibri"/>
+              </a:rPr>
+              <a:t>Client</a:t>
+            </a:r>
+          </a:p>
+          <a:p>
+            <a:pPr algn="ctr"/>
+            <a:r>
+              <a:rPr sz="800" b="0" i="0">
+                <a:solidFill>
+                  <a:srgbClr val="6B7380"/>
+                </a:solidFill>
+                <a:latin typeface="Calibri"/>
+              </a:rPr>
+              <a:t>Ad bidding systems</a:t>
+            </a:r>
+          </a:p>
+        </p:txBody>
+      </p:sp>
+      <p:sp>
+        <p:nvSpPr>
+          <p:cNvPr id="9" name="Oval 8"/>
           <p:cNvSpPr/>
           <p:nvPr/>
         </p:nvSpPr>
         <p:spPr>
           <a:xfrm>
-            <a:off x="4206240" y="1463040"/>
-            <a:ext cx="1554480" cy="822960"/>
-          </a:xfrm>
-          <a:prstGeom prst="roundRect">
-            <a:avLst>
-              <a:gd name="adj" fmla="val 15000"/>
-            </a:avLst>
+            <a:off x="11567160" y="1828800"/>
+            <a:ext cx="292608" cy="292608"/>
+          </a:xfrm>
+          <a:prstGeom prst="ellipse">
+            <a:avLst/>
           </a:prstGeom>
           <a:solidFill>
-            <a:srgbClr val="0B1F3A"/>
+            <a:srgbClr val="333F52"/>
           </a:solidFill>
           <a:ln>
             <a:noFill/>
@@ -9923,52 +10012,29 @@
           </a:fontRef>
         </p:style>
         <p:txBody>
-          <a:bodyPr rtlCol="0" anchor="ctr" wrap="square"/>
+          <a:bodyPr rtlCol="0" anchor="ctr"/>
           <a:lstStyle/>
           <a:p>
             <a:pPr algn="ctr"/>
-            <a:r>
-              <a:rPr sz="1300" b="1" i="0">
-                <a:solidFill>
-                  <a:srgbClr val="FFFFFF"/>
-                </a:solidFill>
-                <a:latin typeface="Calibri"/>
-              </a:rPr>
-              <a:t>Vertex AI</a:t>
-            </a:r>
-          </a:p>
-          <a:p>
-            <a:pPr algn="ctr"/>
-            <a:r>
-              <a:rPr sz="900" b="0" i="0">
-                <a:solidFill>
-                  <a:srgbClr val="F4F6FA"/>
-                </a:solidFill>
-                <a:latin typeface="Calibri"/>
-              </a:rPr>
-              <a:t>XGBoost regressor</a:t>
-            </a:r>
-          </a:p>
-        </p:txBody>
-      </p:sp>
-      <p:sp>
-        <p:nvSpPr>
-          <p:cNvPr id="7" name="Rounded Rectangle 6"/>
+          </a:p>
+        </p:txBody>
+      </p:sp>
+      <p:sp>
+        <p:nvSpPr>
+          <p:cNvPr id="10" name="Isosceles Triangle 9"/>
           <p:cNvSpPr/>
           <p:nvPr/>
         </p:nvSpPr>
         <p:spPr>
           <a:xfrm>
-            <a:off x="6080760" y="1463040"/>
-            <a:ext cx="1554480" cy="822960"/>
-          </a:xfrm>
-          <a:prstGeom prst="roundRect">
-            <a:avLst>
-              <a:gd name="adj" fmla="val 15000"/>
-            </a:avLst>
+            <a:off x="11521440" y="2084832"/>
+            <a:ext cx="384048" cy="411480"/>
+          </a:xfrm>
+          <a:prstGeom prst="triangle">
+            <a:avLst/>
           </a:prstGeom>
           <a:solidFill>
-            <a:srgbClr val="D97306"/>
+            <a:srgbClr val="333F52"/>
           </a:solidFill>
           <a:ln>
             <a:noFill/>
@@ -9989,52 +10055,76 @@
           </a:fontRef>
         </p:style>
         <p:txBody>
-          <a:bodyPr rtlCol="0" anchor="ctr" wrap="square"/>
+          <a:bodyPr rtlCol="0" anchor="ctr"/>
           <a:lstStyle/>
           <a:p>
             <a:pPr algn="ctr"/>
-            <a:r>
-              <a:rPr sz="1300" b="1" i="0">
-                <a:solidFill>
-                  <a:srgbClr val="FFFFFF"/>
-                </a:solidFill>
-                <a:latin typeface="Calibri"/>
-              </a:rPr>
-              <a:t>Pub/Sub</a:t>
-            </a:r>
-          </a:p>
+          </a:p>
+        </p:txBody>
+      </p:sp>
+      <p:sp>
+        <p:nvSpPr>
+          <p:cNvPr id="11" name="TextBox 10"/>
+          <p:cNvSpPr txBox="1"/>
+          <p:nvPr/>
+        </p:nvSpPr>
+        <p:spPr>
+          <a:xfrm>
+            <a:off x="11201400" y="2514600"/>
+            <a:ext cx="1024128" cy="502920"/>
+          </a:xfrm>
+          <a:prstGeom prst="rect">
+            <a:avLst/>
+          </a:prstGeom>
+          <a:noFill/>
+        </p:spPr>
+        <p:txBody>
+          <a:bodyPr wrap="square">
+            <a:spAutoFit/>
+          </a:bodyPr>
+          <a:lstStyle/>
           <a:p>
             <a:pPr algn="ctr"/>
             <a:r>
-              <a:rPr sz="900" b="0" i="0">
-                <a:solidFill>
-                  <a:srgbClr val="F4F6FA"/>
-                </a:solidFill>
-                <a:latin typeface="Calibri"/>
-              </a:rPr>
-              <a:t>predictions stream</a:t>
-            </a:r>
-          </a:p>
-        </p:txBody>
-      </p:sp>
-      <p:sp>
-        <p:nvSpPr>
-          <p:cNvPr id="8" name="Rounded Rectangle 7"/>
+              <a:rPr sz="900" b="1" i="0">
+                <a:solidFill>
+                  <a:srgbClr val="333F52"/>
+                </a:solidFill>
+                <a:latin typeface="Calibri"/>
+              </a:rPr>
+              <a:t>Executive</a:t>
+            </a:r>
+          </a:p>
+          <a:p>
+            <a:pPr algn="ctr"/>
+            <a:r>
+              <a:rPr sz="800" b="0" i="0">
+                <a:solidFill>
+                  <a:srgbClr val="6B7380"/>
+                </a:solidFill>
+                <a:latin typeface="Calibri"/>
+              </a:rPr>
+              <a:t>stakeholders</a:t>
+            </a:r>
+          </a:p>
+        </p:txBody>
+      </p:sp>
+      <p:sp>
+        <p:nvSpPr>
+          <p:cNvPr id="12" name="Can 11"/>
           <p:cNvSpPr/>
           <p:nvPr/>
         </p:nvSpPr>
         <p:spPr>
           <a:xfrm>
-            <a:off x="7955280" y="1463040"/>
-            <a:ext cx="1554480" cy="822960"/>
-          </a:xfrm>
-          <a:prstGeom prst="roundRect">
-            <a:avLst>
-              <a:gd name="adj" fmla="val 15000"/>
-            </a:avLst>
+            <a:off x="182880" y="5212080"/>
+            <a:ext cx="365760" cy="457200"/>
+          </a:xfrm>
+          <a:prstGeom prst="can">
+            <a:avLst/>
           </a:prstGeom>
           <a:solidFill>
-            <a:srgbClr val="0F6E7A"/>
+            <a:srgbClr val="6B7380"/>
           </a:solidFill>
           <a:ln>
             <a:noFill/>
@@ -10055,17 +10145,484 @@
           </a:fontRef>
         </p:style>
         <p:txBody>
-          <a:bodyPr rtlCol="0" anchor="ctr" wrap="square"/>
+          <a:bodyPr rtlCol="0" anchor="ctr"/>
           <a:lstStyle/>
           <a:p>
             <a:pPr algn="ctr"/>
-            <a:r>
-              <a:rPr sz="1300" b="1" i="0">
+          </a:p>
+        </p:txBody>
+      </p:sp>
+      <p:sp>
+        <p:nvSpPr>
+          <p:cNvPr id="13" name="TextBox 12"/>
+          <p:cNvSpPr txBox="1"/>
+          <p:nvPr/>
+        </p:nvSpPr>
+        <p:spPr>
+          <a:xfrm>
+            <a:off x="-137160" y="5715000"/>
+            <a:ext cx="1005840" cy="411480"/>
+          </a:xfrm>
+          <a:prstGeom prst="rect">
+            <a:avLst/>
+          </a:prstGeom>
+          <a:noFill/>
+        </p:spPr>
+        <p:txBody>
+          <a:bodyPr wrap="square">
+            <a:spAutoFit/>
+          </a:bodyPr>
+          <a:lstStyle/>
+          <a:p>
+            <a:pPr algn="ctr"/>
+            <a:r>
+              <a:rPr sz="900" b="1" i="0">
+                <a:solidFill>
+                  <a:srgbClr val="333F52"/>
+                </a:solidFill>
+                <a:latin typeface="Calibri"/>
+              </a:rPr>
+              <a:t>Sales ledger
+data source</a:t>
+            </a:r>
+          </a:p>
+        </p:txBody>
+      </p:sp>
+      <p:sp>
+        <p:nvSpPr>
+          <p:cNvPr id="14" name="Rounded Rectangle 13"/>
+          <p:cNvSpPr/>
+          <p:nvPr/>
+        </p:nvSpPr>
+        <p:spPr>
+          <a:xfrm>
+            <a:off x="1371600" y="1417320"/>
+            <a:ext cx="2743200" cy="1508760"/>
+          </a:xfrm>
+          <a:prstGeom prst="roundRect">
+            <a:avLst>
+              <a:gd name="adj" fmla="val 12000"/>
+            </a:avLst>
+          </a:prstGeom>
+          <a:solidFill>
+            <a:srgbClr val="4E88E6"/>
+          </a:solidFill>
+          <a:ln>
+            <a:noFill/>
+          </a:ln>
+        </p:spPr>
+        <p:style>
+          <a:lnRef idx="1">
+            <a:schemeClr val="accent1"/>
+          </a:lnRef>
+          <a:fillRef idx="3">
+            <a:schemeClr val="accent1"/>
+          </a:fillRef>
+          <a:effectRef idx="2">
+            <a:schemeClr val="accent1"/>
+          </a:effectRef>
+          <a:fontRef idx="minor">
+            <a:schemeClr val="lt1"/>
+          </a:fontRef>
+        </p:style>
+        <p:txBody>
+          <a:bodyPr rtlCol="0" anchor="ctr" tIns="54864" bIns="54864" wrap="square"/>
+          <a:lstStyle/>
+          <a:p>
+            <a:pPr algn="ctr"/>
+            <a:r>
+              <a:rPr sz="1200" b="1" i="0">
                 <a:solidFill>
                   <a:srgbClr val="FFFFFF"/>
                 </a:solidFill>
                 <a:latin typeface="Calibri"/>
               </a:rPr>
+              <a:t>Scoring Service  ·  scoring-api</a:t>
+            </a:r>
+          </a:p>
+          <a:p>
+            <a:pPr algn="ctr"/>
+            <a:r>
+              <a:rPr sz="900" b="0" i="0">
+                <a:solidFill>
+                  <a:srgbClr val="FFFFFF"/>
+                </a:solidFill>
+                <a:latin typeface="Calibri"/>
+              </a:rPr>
+              <a:t>Rust 1.89  ·  Cloud Run</a:t>
+            </a:r>
+          </a:p>
+        </p:txBody>
+      </p:sp>
+      <p:sp>
+        <p:nvSpPr>
+          <p:cNvPr id="15" name="Rounded Rectangle 14"/>
+          <p:cNvSpPr/>
+          <p:nvPr/>
+        </p:nvSpPr>
+        <p:spPr>
+          <a:xfrm>
+            <a:off x="1508760" y="2240280"/>
+            <a:ext cx="2468880" cy="640080"/>
+          </a:xfrm>
+          <a:prstGeom prst="roundRect">
+            <a:avLst>
+              <a:gd name="adj" fmla="val 15000"/>
+            </a:avLst>
+          </a:prstGeom>
+          <a:solidFill>
+            <a:srgbClr val="E8F0FE"/>
+          </a:solidFill>
+          <a:ln>
+            <a:noFill/>
+          </a:ln>
+        </p:spPr>
+        <p:style>
+          <a:lnRef idx="1">
+            <a:schemeClr val="accent1"/>
+          </a:lnRef>
+          <a:fillRef idx="3">
+            <a:schemeClr val="accent1"/>
+          </a:fillRef>
+          <a:effectRef idx="2">
+            <a:schemeClr val="accent1"/>
+          </a:effectRef>
+          <a:fontRef idx="minor">
+            <a:schemeClr val="lt1"/>
+          </a:fontRef>
+        </p:style>
+        <p:txBody>
+          <a:bodyPr rtlCol="0" anchor="ctr" lIns="73152" rIns="73152" tIns="36576" bIns="36576"/>
+          <a:lstStyle/>
+          <a:p>
+            <a:pPr algn="ctr"/>
+            <a:r>
+              <a:rPr sz="900" b="1" i="0">
+                <a:solidFill>
+                  <a:srgbClr val="2A5FC3"/>
+                </a:solidFill>
+                <a:latin typeface="Calibri"/>
+              </a:rPr>
+              <a:t>Safety guardrails</a:t>
+            </a:r>
+          </a:p>
+          <a:p>
+            <a:pPr algn="ctr"/>
+            <a:r>
+              <a:rPr sz="800" b="0" i="0">
+                <a:solidFill>
+                  <a:srgbClr val="2A5FC3"/>
+                </a:solidFill>
+                <a:latin typeface="Calibri"/>
+              </a:rPr>
+              <a:t>Bounds  ·  clamp  ·  timeouts  ·  anomaly  ·  breaker  ·  kill-switch</a:t>
+            </a:r>
+          </a:p>
+        </p:txBody>
+      </p:sp>
+      <p:sp>
+        <p:nvSpPr>
+          <p:cNvPr id="16" name="Rounded Rectangle 15"/>
+          <p:cNvSpPr/>
+          <p:nvPr/>
+        </p:nvSpPr>
+        <p:spPr>
+          <a:xfrm>
+            <a:off x="4572000" y="1417320"/>
+            <a:ext cx="2286000" cy="914400"/>
+          </a:xfrm>
+          <a:prstGeom prst="roundRect">
+            <a:avLst>
+              <a:gd name="adj" fmla="val 12000"/>
+            </a:avLst>
+          </a:prstGeom>
+          <a:solidFill>
+            <a:srgbClr val="34A853"/>
+          </a:solidFill>
+          <a:ln>
+            <a:noFill/>
+          </a:ln>
+        </p:spPr>
+        <p:style>
+          <a:lnRef idx="1">
+            <a:schemeClr val="accent1"/>
+          </a:lnRef>
+          <a:fillRef idx="3">
+            <a:schemeClr val="accent1"/>
+          </a:fillRef>
+          <a:effectRef idx="2">
+            <a:schemeClr val="accent1"/>
+          </a:effectRef>
+          <a:fontRef idx="minor">
+            <a:schemeClr val="lt1"/>
+          </a:fontRef>
+        </p:style>
+        <p:txBody>
+          <a:bodyPr rtlCol="0" anchor="ctr" tIns="54864" bIns="54864" wrap="square"/>
+          <a:lstStyle/>
+          <a:p>
+            <a:pPr algn="ctr"/>
+            <a:r>
+              <a:rPr sz="1200" b="1" i="0">
+                <a:solidFill>
+                  <a:srgbClr val="FFFFFF"/>
+                </a:solidFill>
+                <a:latin typeface="Calibri"/>
+              </a:rPr>
+              <a:t>Vertex AI Endpoint</a:t>
+            </a:r>
+          </a:p>
+          <a:p>
+            <a:pPr algn="ctr"/>
+            <a:r>
+              <a:rPr sz="900" b="0" i="0">
+                <a:solidFill>
+                  <a:srgbClr val="FFFFFF"/>
+                </a:solidFill>
+                <a:latin typeface="Calibri"/>
+              </a:rPr>
+              <a:t>XGBoost regressor  ·  rpc-estimator@1</a:t>
+            </a:r>
+          </a:p>
+        </p:txBody>
+      </p:sp>
+      <p:sp>
+        <p:nvSpPr>
+          <p:cNvPr id="17" name="Rounded Rectangle 16"/>
+          <p:cNvSpPr/>
+          <p:nvPr/>
+        </p:nvSpPr>
+        <p:spPr>
+          <a:xfrm>
+            <a:off x="8732520" y="1417320"/>
+            <a:ext cx="2468880" cy="914400"/>
+          </a:xfrm>
+          <a:prstGeom prst="roundRect">
+            <a:avLst>
+              <a:gd name="adj" fmla="val 12000"/>
+            </a:avLst>
+          </a:prstGeom>
+          <a:solidFill>
+            <a:srgbClr val="4E88E6"/>
+          </a:solidFill>
+          <a:ln>
+            <a:noFill/>
+          </a:ln>
+        </p:spPr>
+        <p:style>
+          <a:lnRef idx="1">
+            <a:schemeClr val="accent1"/>
+          </a:lnRef>
+          <a:fillRef idx="3">
+            <a:schemeClr val="accent1"/>
+          </a:fillRef>
+          <a:effectRef idx="2">
+            <a:schemeClr val="accent1"/>
+          </a:effectRef>
+          <a:fontRef idx="minor">
+            <a:schemeClr val="lt1"/>
+          </a:fontRef>
+        </p:style>
+        <p:txBody>
+          <a:bodyPr rtlCol="0" anchor="ctr" tIns="54864" bIns="54864" wrap="square"/>
+          <a:lstStyle/>
+          <a:p>
+            <a:pPr algn="ctr"/>
+            <a:r>
+              <a:rPr sz="1200" b="1" i="0">
+                <a:solidFill>
+                  <a:srgbClr val="FFFFFF"/>
+                </a:solidFill>
+                <a:latin typeface="Calibri"/>
+              </a:rPr>
+              <a:t>Dashboard UI</a:t>
+            </a:r>
+          </a:p>
+          <a:p>
+            <a:pPr algn="ctr"/>
+            <a:r>
+              <a:rPr sz="900" b="0" i="0">
+                <a:solidFill>
+                  <a:srgbClr val="FFFFFF"/>
+                </a:solidFill>
+                <a:latin typeface="Calibri"/>
+              </a:rPr>
+              <a:t>TypeScript / React / nginx  ·  Cloud Run</a:t>
+            </a:r>
+          </a:p>
+        </p:txBody>
+      </p:sp>
+      <p:sp>
+        <p:nvSpPr>
+          <p:cNvPr id="18" name="Rounded Rectangle 17"/>
+          <p:cNvSpPr/>
+          <p:nvPr/>
+        </p:nvSpPr>
+        <p:spPr>
+          <a:xfrm>
+            <a:off x="1371600" y="3200400"/>
+            <a:ext cx="2194560" cy="777240"/>
+          </a:xfrm>
+          <a:prstGeom prst="roundRect">
+            <a:avLst>
+              <a:gd name="adj" fmla="val 12000"/>
+            </a:avLst>
+          </a:prstGeom>
+          <a:solidFill>
+            <a:srgbClr val="4E88E6"/>
+          </a:solidFill>
+          <a:ln>
+            <a:noFill/>
+          </a:ln>
+        </p:spPr>
+        <p:style>
+          <a:lnRef idx="1">
+            <a:schemeClr val="accent1"/>
+          </a:lnRef>
+          <a:fillRef idx="3">
+            <a:schemeClr val="accent1"/>
+          </a:fillRef>
+          <a:effectRef idx="2">
+            <a:schemeClr val="accent1"/>
+          </a:effectRef>
+          <a:fontRef idx="minor">
+            <a:schemeClr val="lt1"/>
+          </a:fontRef>
+        </p:style>
+        <p:txBody>
+          <a:bodyPr rtlCol="0" anchor="ctr" tIns="54864" bIns="54864" wrap="square"/>
+          <a:lstStyle/>
+          <a:p>
+            <a:pPr algn="ctr"/>
+            <a:r>
+              <a:rPr sz="1200" b="1" i="0">
+                <a:solidFill>
+                  <a:srgbClr val="FFFFFF"/>
+                </a:solidFill>
+                <a:latin typeface="Calibri"/>
+              </a:rPr>
+              <a:t>Bounds Calibration</a:t>
+            </a:r>
+          </a:p>
+          <a:p>
+            <a:pPr algn="ctr"/>
+            <a:r>
+              <a:rPr sz="900" b="0" i="0">
+                <a:solidFill>
+                  <a:srgbClr val="FFFFFF"/>
+                </a:solidFill>
+                <a:latin typeface="Calibri"/>
+              </a:rPr>
+              <a:t>Rust  ·  Cloud Run job</a:t>
+            </a:r>
+          </a:p>
+        </p:txBody>
+      </p:sp>
+      <p:sp>
+        <p:nvSpPr>
+          <p:cNvPr id="19" name="Rounded Rectangle 18"/>
+          <p:cNvSpPr/>
+          <p:nvPr/>
+        </p:nvSpPr>
+        <p:spPr>
+          <a:xfrm>
+            <a:off x="3703320" y="2423160"/>
+            <a:ext cx="1463040" cy="502920"/>
+          </a:xfrm>
+          <a:prstGeom prst="roundRect">
+            <a:avLst>
+              <a:gd name="adj" fmla="val 18000"/>
+            </a:avLst>
+          </a:prstGeom>
+          <a:solidFill>
+            <a:srgbClr val="FFFFFF"/>
+          </a:solidFill>
+          <a:ln w="6350">
+            <a:solidFill>
+              <a:srgbClr val="6B7380"/>
+            </a:solidFill>
+          </a:ln>
+        </p:spPr>
+        <p:style>
+          <a:lnRef idx="1">
+            <a:schemeClr val="accent1"/>
+          </a:lnRef>
+          <a:fillRef idx="3">
+            <a:schemeClr val="accent1"/>
+          </a:fillRef>
+          <a:effectRef idx="2">
+            <a:schemeClr val="accent1"/>
+          </a:effectRef>
+          <a:fontRef idx="minor">
+            <a:schemeClr val="lt1"/>
+          </a:fontRef>
+        </p:style>
+        <p:txBody>
+          <a:bodyPr rtlCol="0" anchor="ctr" lIns="54864" rIns="54864"/>
+          <a:lstStyle/>
+          <a:p>
+            <a:pPr algn="ctr"/>
+            <a:r>
+              <a:rPr sz="900" b="1" i="0">
+                <a:solidFill>
+                  <a:srgbClr val="333F52"/>
+                </a:solidFill>
+                <a:latin typeface="Calibri"/>
+              </a:rPr>
+              <a:t>Secret Manager / Config</a:t>
+            </a:r>
+          </a:p>
+        </p:txBody>
+      </p:sp>
+      <p:sp>
+        <p:nvSpPr>
+          <p:cNvPr id="20" name="Rounded Rectangle 19"/>
+          <p:cNvSpPr/>
+          <p:nvPr/>
+        </p:nvSpPr>
+        <p:spPr>
+          <a:xfrm>
+            <a:off x="4572000" y="2971800"/>
+            <a:ext cx="2286000" cy="1371600"/>
+          </a:xfrm>
+          <a:prstGeom prst="roundRect">
+            <a:avLst>
+              <a:gd name="adj" fmla="val 8000"/>
+            </a:avLst>
+          </a:prstGeom>
+          <a:solidFill>
+            <a:srgbClr val="7E57C2"/>
+          </a:solidFill>
+          <a:ln>
+            <a:noFill/>
+          </a:ln>
+        </p:spPr>
+        <p:style>
+          <a:lnRef idx="1">
+            <a:schemeClr val="accent1"/>
+          </a:lnRef>
+          <a:fillRef idx="3">
+            <a:schemeClr val="accent1"/>
+          </a:fillRef>
+          <a:effectRef idx="2">
+            <a:schemeClr val="accent1"/>
+          </a:effectRef>
+          <a:fontRef idx="minor">
+            <a:schemeClr val="lt1"/>
+          </a:fontRef>
+        </p:style>
+        <p:txBody>
+          <a:bodyPr rtlCol="0" anchor="ctr" wrap="square" tIns="73152"/>
+          <a:lstStyle/>
+          <a:p>
+            <a:pPr algn="ctr"/>
+            <a:r>
+              <a:rPr sz="1200" b="1" i="0">
+                <a:solidFill>
+                  <a:srgbClr val="FFFFFF"/>
+                </a:solidFill>
+                <a:latin typeface="Calibri"/>
+              </a:rPr>
               <a:t>BigQuery</a:t>
             </a:r>
           </a:p>
@@ -10074,33 +10631,1450 @@
             <a:r>
               <a:rPr sz="900" b="0" i="0">
                 <a:solidFill>
-                  <a:srgbClr val="F4F6FA"/>
-                </a:solidFill>
-                <a:latin typeface="Calibri"/>
-              </a:rPr>
-              <a:t>analytics + drift</a:t>
+                  <a:srgbClr val="FFFFFF"/>
+                </a:solidFill>
+                <a:latin typeface="Calibri"/>
+              </a:rPr>
+              <a:t>Data warehouse</a:t>
+            </a:r>
+          </a:p>
+          <a:p>
+            <a:pPr algn="ctr">
+              <a:spcBef>
+                <a:spcPts val="600"/>
+              </a:spcBef>
+            </a:pPr>
+            <a:r>
+              <a:rPr sz="800" b="0" i="1">
+                <a:solidFill>
+                  <a:srgbClr val="FFFFFF"/>
+                </a:solidFill>
+                <a:latin typeface="Calibri"/>
+              </a:rPr>
+              <a:t>cm360_clicks  ·  sales_ledger</a:t>
+            </a:r>
+          </a:p>
+          <a:p>
+            <a:pPr algn="ctr"/>
+            <a:r>
+              <a:rPr sz="800" b="0" i="1">
+                <a:solidFill>
+                  <a:srgbClr val="FFFFFF"/>
+                </a:solidFill>
+                <a:latin typeface="Calibri"/>
+              </a:rPr>
+              <a:t>rpc_predictions</a:t>
+            </a:r>
+          </a:p>
+          <a:p>
+            <a:pPr algn="ctr"/>
+            <a:r>
+              <a:rPr sz="800" b="0" i="1">
+                <a:solidFill>
+                  <a:srgbClr val="FFFFFF"/>
+                </a:solidFill>
+                <a:latin typeface="Calibri"/>
+              </a:rPr>
+              <a:t>predictions_vs_revenue</a:t>
+            </a:r>
+          </a:p>
+        </p:txBody>
+      </p:sp>
+      <p:sp>
+        <p:nvSpPr>
+          <p:cNvPr id="21" name="Rounded Rectangle 20"/>
+          <p:cNvSpPr/>
+          <p:nvPr/>
+        </p:nvSpPr>
+        <p:spPr>
+          <a:xfrm>
+            <a:off x="8732520" y="2788920"/>
+            <a:ext cx="2468880" cy="777240"/>
+          </a:xfrm>
+          <a:prstGeom prst="roundRect">
+            <a:avLst>
+              <a:gd name="adj" fmla="val 12000"/>
+            </a:avLst>
+          </a:prstGeom>
+          <a:solidFill>
+            <a:srgbClr val="4E88E6"/>
+          </a:solidFill>
+          <a:ln>
+            <a:noFill/>
+          </a:ln>
+        </p:spPr>
+        <p:style>
+          <a:lnRef idx="1">
+            <a:schemeClr val="accent1"/>
+          </a:lnRef>
+          <a:fillRef idx="3">
+            <a:schemeClr val="accent1"/>
+          </a:fillRef>
+          <a:effectRef idx="2">
+            <a:schemeClr val="accent1"/>
+          </a:effectRef>
+          <a:fontRef idx="minor">
+            <a:schemeClr val="lt1"/>
+          </a:fontRef>
+        </p:style>
+        <p:txBody>
+          <a:bodyPr rtlCol="0" anchor="ctr" tIns="54864" bIns="54864" wrap="square"/>
+          <a:lstStyle/>
+          <a:p>
+            <a:pPr algn="ctr"/>
+            <a:r>
+              <a:rPr sz="1200" b="1" i="0">
+                <a:solidFill>
+                  <a:srgbClr val="FFFFFF"/>
+                </a:solidFill>
+                <a:latin typeface="Calibri"/>
+              </a:rPr>
+              <a:t>Reconciliation Service</a:t>
+            </a:r>
+          </a:p>
+          <a:p>
+            <a:pPr algn="ctr"/>
+            <a:r>
+              <a:rPr sz="900" b="0" i="0">
+                <a:solidFill>
+                  <a:srgbClr val="FFFFFF"/>
+                </a:solidFill>
+                <a:latin typeface="Calibri"/>
+              </a:rPr>
+              <a:t>Python FastAPI  ·  Cloud Run</a:t>
+            </a:r>
+          </a:p>
+        </p:txBody>
+      </p:sp>
+      <p:sp>
+        <p:nvSpPr>
+          <p:cNvPr id="22" name="Rounded Rectangle 21"/>
+          <p:cNvSpPr/>
+          <p:nvPr/>
+        </p:nvSpPr>
+        <p:spPr>
+          <a:xfrm>
+            <a:off x="7315200" y="4160520"/>
+            <a:ext cx="2377440" cy="822960"/>
+          </a:xfrm>
+          <a:prstGeom prst="roundRect">
+            <a:avLst>
+              <a:gd name="adj" fmla="val 12000"/>
+            </a:avLst>
+          </a:prstGeom>
+          <a:solidFill>
+            <a:srgbClr val="0097A7"/>
+          </a:solidFill>
+          <a:ln>
+            <a:noFill/>
+          </a:ln>
+        </p:spPr>
+        <p:style>
+          <a:lnRef idx="1">
+            <a:schemeClr val="accent1"/>
+          </a:lnRef>
+          <a:fillRef idx="3">
+            <a:schemeClr val="accent1"/>
+          </a:fillRef>
+          <a:effectRef idx="2">
+            <a:schemeClr val="accent1"/>
+          </a:effectRef>
+          <a:fontRef idx="minor">
+            <a:schemeClr val="lt1"/>
+          </a:fontRef>
+        </p:style>
+        <p:txBody>
+          <a:bodyPr rtlCol="0" anchor="ctr" tIns="54864" bIns="54864" wrap="square"/>
+          <a:lstStyle/>
+          <a:p>
+            <a:pPr algn="ctr"/>
+            <a:r>
+              <a:rPr sz="1200" b="1" i="0">
+                <a:solidFill>
+                  <a:srgbClr val="FFFFFF"/>
+                </a:solidFill>
+                <a:latin typeface="Calibri"/>
+              </a:rPr>
+              <a:t>ML Ops Pipeline  ·  ml-pipeline</a:t>
+            </a:r>
+          </a:p>
+          <a:p>
+            <a:pPr algn="ctr"/>
+            <a:r>
+              <a:rPr sz="900" b="0" i="0">
+                <a:solidFill>
+                  <a:srgbClr val="FFFFFF"/>
+                </a:solidFill>
+                <a:latin typeface="Calibri"/>
+              </a:rPr>
+              <a:t>Python 3.12  ·  Vertex AI Pipelines</a:t>
+            </a:r>
+          </a:p>
+        </p:txBody>
+      </p:sp>
+      <p:sp>
+        <p:nvSpPr>
+          <p:cNvPr id="23" name="Can 22"/>
+          <p:cNvSpPr/>
+          <p:nvPr/>
+        </p:nvSpPr>
+        <p:spPr>
+          <a:xfrm>
+            <a:off x="10058400" y="4160520"/>
+            <a:ext cx="502920" cy="822960"/>
+          </a:xfrm>
+          <a:prstGeom prst="can">
+            <a:avLst/>
+          </a:prstGeom>
+          <a:solidFill>
+            <a:srgbClr val="6B7380"/>
+          </a:solidFill>
+          <a:ln>
+            <a:noFill/>
+          </a:ln>
+        </p:spPr>
+        <p:style>
+          <a:lnRef idx="1">
+            <a:schemeClr val="accent1"/>
+          </a:lnRef>
+          <a:fillRef idx="3">
+            <a:schemeClr val="accent1"/>
+          </a:fillRef>
+          <a:effectRef idx="2">
+            <a:schemeClr val="accent1"/>
+          </a:effectRef>
+          <a:fontRef idx="minor">
+            <a:schemeClr val="lt1"/>
+          </a:fontRef>
+        </p:style>
+        <p:txBody>
+          <a:bodyPr rtlCol="0" anchor="ctr"/>
+          <a:lstStyle/>
+          <a:p>
+            <a:pPr algn="ctr"/>
+          </a:p>
+        </p:txBody>
+      </p:sp>
+      <p:sp>
+        <p:nvSpPr>
+          <p:cNvPr id="24" name="TextBox 23"/>
+          <p:cNvSpPr txBox="1"/>
+          <p:nvPr/>
+        </p:nvSpPr>
+        <p:spPr>
+          <a:xfrm>
+            <a:off x="9875520" y="5029200"/>
+            <a:ext cx="868680" cy="274320"/>
+          </a:xfrm>
+          <a:prstGeom prst="rect">
+            <a:avLst/>
+          </a:prstGeom>
+          <a:noFill/>
+        </p:spPr>
+        <p:txBody>
+          <a:bodyPr wrap="none">
+            <a:spAutoFit/>
+          </a:bodyPr>
+          <a:lstStyle/>
+          <a:p>
+            <a:pPr algn="ctr"/>
+            <a:r>
+              <a:rPr sz="800" b="1" i="0">
+                <a:solidFill>
+                  <a:srgbClr val="333F52"/>
+                </a:solidFill>
+                <a:latin typeface="Calibri"/>
+              </a:rPr>
+              <a:t>Cloud Storage</a:t>
+            </a:r>
+          </a:p>
+        </p:txBody>
+      </p:sp>
+      <p:sp>
+        <p:nvSpPr>
+          <p:cNvPr id="25" name="Hexagon 24"/>
+          <p:cNvSpPr/>
+          <p:nvPr/>
+        </p:nvSpPr>
+        <p:spPr>
+          <a:xfrm>
+            <a:off x="1371600" y="4160520"/>
+            <a:ext cx="1371600" cy="411480"/>
+          </a:xfrm>
+          <a:prstGeom prst="hexagon">
+            <a:avLst/>
+          </a:prstGeom>
+          <a:solidFill>
+            <a:srgbClr val="A96BDB"/>
+          </a:solidFill>
+          <a:ln>
+            <a:noFill/>
+          </a:ln>
+        </p:spPr>
+        <p:style>
+          <a:lnRef idx="1">
+            <a:schemeClr val="accent1"/>
+          </a:lnRef>
+          <a:fillRef idx="3">
+            <a:schemeClr val="accent1"/>
+          </a:fillRef>
+          <a:effectRef idx="2">
+            <a:schemeClr val="accent1"/>
+          </a:effectRef>
+          <a:fontRef idx="minor">
+            <a:schemeClr val="lt1"/>
+          </a:fontRef>
+        </p:style>
+        <p:txBody>
+          <a:bodyPr rtlCol="0" anchor="ctr" lIns="36576" rIns="36576"/>
+          <a:lstStyle/>
+          <a:p>
+            <a:pPr algn="ctr"/>
+            <a:r>
+              <a:rPr sz="800" b="1" i="0">
+                <a:solidFill>
+                  <a:srgbClr val="FFFFFF"/>
+                </a:solidFill>
+                <a:latin typeface="Calibri"/>
+              </a:rPr>
+              <a:t>Pub/Sub</a:t>
+            </a:r>
+          </a:p>
+        </p:txBody>
+      </p:sp>
+      <p:sp>
+        <p:nvSpPr>
+          <p:cNvPr id="26" name="TextBox 25"/>
+          <p:cNvSpPr txBox="1"/>
+          <p:nvPr/>
+        </p:nvSpPr>
+        <p:spPr>
+          <a:xfrm>
+            <a:off x="1371600" y="4581144"/>
+            <a:ext cx="1371600" cy="292608"/>
+          </a:xfrm>
+          <a:prstGeom prst="rect">
+            <a:avLst/>
+          </a:prstGeom>
+          <a:noFill/>
+        </p:spPr>
+        <p:txBody>
+          <a:bodyPr wrap="none">
+            <a:spAutoFit/>
+          </a:bodyPr>
+          <a:lstStyle/>
+          <a:p>
+            <a:pPr algn="ctr"/>
+            <a:r>
+              <a:rPr sz="800" b="0" i="0">
+                <a:solidFill>
+                  <a:srgbClr val="333F52"/>
+                </a:solidFill>
+                <a:latin typeface="Calibri"/>
+              </a:rPr>
+              <a:t>rpc-clicks-staging</a:t>
+            </a:r>
+          </a:p>
+        </p:txBody>
+      </p:sp>
+      <p:sp>
+        <p:nvSpPr>
+          <p:cNvPr id="27" name="Hexagon 26"/>
+          <p:cNvSpPr/>
+          <p:nvPr/>
+        </p:nvSpPr>
+        <p:spPr>
+          <a:xfrm>
+            <a:off x="3017520" y="4160520"/>
+            <a:ext cx="1371600" cy="411480"/>
+          </a:xfrm>
+          <a:prstGeom prst="hexagon">
+            <a:avLst/>
+          </a:prstGeom>
+          <a:solidFill>
+            <a:srgbClr val="A96BDB"/>
+          </a:solidFill>
+          <a:ln>
+            <a:noFill/>
+          </a:ln>
+        </p:spPr>
+        <p:style>
+          <a:lnRef idx="1">
+            <a:schemeClr val="accent1"/>
+          </a:lnRef>
+          <a:fillRef idx="3">
+            <a:schemeClr val="accent1"/>
+          </a:fillRef>
+          <a:effectRef idx="2">
+            <a:schemeClr val="accent1"/>
+          </a:effectRef>
+          <a:fontRef idx="minor">
+            <a:schemeClr val="lt1"/>
+          </a:fontRef>
+        </p:style>
+        <p:txBody>
+          <a:bodyPr rtlCol="0" anchor="ctr" lIns="36576" rIns="36576"/>
+          <a:lstStyle/>
+          <a:p>
+            <a:pPr algn="ctr"/>
+            <a:r>
+              <a:rPr sz="800" b="1" i="0">
+                <a:solidFill>
+                  <a:srgbClr val="FFFFFF"/>
+                </a:solidFill>
+                <a:latin typeface="Calibri"/>
+              </a:rPr>
+              <a:t>Pub/Sub</a:t>
+            </a:r>
+          </a:p>
+        </p:txBody>
+      </p:sp>
+      <p:sp>
+        <p:nvSpPr>
+          <p:cNvPr id="28" name="TextBox 27"/>
+          <p:cNvSpPr txBox="1"/>
+          <p:nvPr/>
+        </p:nvSpPr>
+        <p:spPr>
+          <a:xfrm>
+            <a:off x="3017520" y="4581144"/>
+            <a:ext cx="1371600" cy="292608"/>
+          </a:xfrm>
+          <a:prstGeom prst="rect">
+            <a:avLst/>
+          </a:prstGeom>
+          <a:noFill/>
+        </p:spPr>
+        <p:txBody>
+          <a:bodyPr wrap="none">
+            <a:spAutoFit/>
+          </a:bodyPr>
+          <a:lstStyle/>
+          <a:p>
+            <a:pPr algn="ctr"/>
+            <a:r>
+              <a:rPr sz="800" b="0" i="0">
+                <a:solidFill>
+                  <a:srgbClr val="333F52"/>
+                </a:solidFill>
+                <a:latin typeface="Calibri"/>
+              </a:rPr>
+              <a:t>rpc-predictions-staging</a:t>
+            </a:r>
+          </a:p>
+        </p:txBody>
+      </p:sp>
+      <p:sp>
+        <p:nvSpPr>
+          <p:cNvPr id="29" name="Hexagon 28"/>
+          <p:cNvSpPr/>
+          <p:nvPr/>
+        </p:nvSpPr>
+        <p:spPr>
+          <a:xfrm>
+            <a:off x="4937760" y="4572000"/>
+            <a:ext cx="1371600" cy="411480"/>
+          </a:xfrm>
+          <a:prstGeom prst="hexagon">
+            <a:avLst/>
+          </a:prstGeom>
+          <a:solidFill>
+            <a:srgbClr val="A96BDB"/>
+          </a:solidFill>
+          <a:ln>
+            <a:noFill/>
+          </a:ln>
+        </p:spPr>
+        <p:style>
+          <a:lnRef idx="1">
+            <a:schemeClr val="accent1"/>
+          </a:lnRef>
+          <a:fillRef idx="3">
+            <a:schemeClr val="accent1"/>
+          </a:fillRef>
+          <a:effectRef idx="2">
+            <a:schemeClr val="accent1"/>
+          </a:effectRef>
+          <a:fontRef idx="minor">
+            <a:schemeClr val="lt1"/>
+          </a:fontRef>
+        </p:style>
+        <p:txBody>
+          <a:bodyPr rtlCol="0" anchor="ctr" lIns="36576" rIns="36576"/>
+          <a:lstStyle/>
+          <a:p>
+            <a:pPr algn="ctr"/>
+            <a:r>
+              <a:rPr sz="800" b="1" i="0">
+                <a:solidFill>
+                  <a:srgbClr val="FFFFFF"/>
+                </a:solidFill>
+                <a:latin typeface="Calibri"/>
+              </a:rPr>
+              <a:t>Pub/Sub</a:t>
+            </a:r>
+          </a:p>
+        </p:txBody>
+      </p:sp>
+      <p:sp>
+        <p:nvSpPr>
+          <p:cNvPr id="30" name="TextBox 29"/>
+          <p:cNvSpPr txBox="1"/>
+          <p:nvPr/>
+        </p:nvSpPr>
+        <p:spPr>
+          <a:xfrm>
+            <a:off x="4937760" y="4992624"/>
+            <a:ext cx="1371600" cy="292608"/>
+          </a:xfrm>
+          <a:prstGeom prst="rect">
+            <a:avLst/>
+          </a:prstGeom>
+          <a:noFill/>
+        </p:spPr>
+        <p:txBody>
+          <a:bodyPr wrap="none">
+            <a:spAutoFit/>
+          </a:bodyPr>
+          <a:lstStyle/>
+          <a:p>
+            <a:pPr algn="ctr"/>
+            <a:r>
+              <a:rPr sz="800" b="0" i="0">
+                <a:solidFill>
+                  <a:srgbClr val="333F52"/>
+                </a:solidFill>
+                <a:latin typeface="Calibri"/>
+              </a:rPr>
+              <a:t>rpc-anomaly-staging</a:t>
+            </a:r>
+          </a:p>
+        </p:txBody>
+      </p:sp>
+      <p:sp>
+        <p:nvSpPr>
+          <p:cNvPr id="31" name="Rounded Rectangle 30"/>
+          <p:cNvSpPr/>
+          <p:nvPr/>
+        </p:nvSpPr>
+        <p:spPr>
+          <a:xfrm>
+            <a:off x="4572000" y="5074920"/>
+            <a:ext cx="2286000" cy="777240"/>
+          </a:xfrm>
+          <a:prstGeom prst="roundRect">
+            <a:avLst>
+              <a:gd name="adj" fmla="val 12000"/>
+            </a:avLst>
+          </a:prstGeom>
+          <a:solidFill>
+            <a:srgbClr val="4E88E6"/>
+          </a:solidFill>
+          <a:ln>
+            <a:noFill/>
+          </a:ln>
+        </p:spPr>
+        <p:style>
+          <a:lnRef idx="1">
+            <a:schemeClr val="accent1"/>
+          </a:lnRef>
+          <a:fillRef idx="3">
+            <a:schemeClr val="accent1"/>
+          </a:fillRef>
+          <a:effectRef idx="2">
+            <a:schemeClr val="accent1"/>
+          </a:effectRef>
+          <a:fontRef idx="minor">
+            <a:schemeClr val="lt1"/>
+          </a:fontRef>
+        </p:style>
+        <p:txBody>
+          <a:bodyPr rtlCol="0" anchor="ctr" tIns="54864" bIns="54864" wrap="square"/>
+          <a:lstStyle/>
+          <a:p>
+            <a:pPr algn="ctr"/>
+            <a:r>
+              <a:rPr sz="1200" b="1" i="0">
+                <a:solidFill>
+                  <a:srgbClr val="FFFFFF"/>
+                </a:solidFill>
+                <a:latin typeface="Calibri"/>
+              </a:rPr>
+              <a:t>Breaker Automation</a:t>
+            </a:r>
+          </a:p>
+          <a:p>
+            <a:pPr algn="ctr"/>
+            <a:r>
+              <a:rPr sz="900" b="0" i="0">
+                <a:solidFill>
+                  <a:srgbClr val="FFFFFF"/>
+                </a:solidFill>
+                <a:latin typeface="Calibri"/>
+              </a:rPr>
+              <a:t>Python  ·  Cloud Run / Functions</a:t>
+            </a:r>
+          </a:p>
+        </p:txBody>
+      </p:sp>
+      <p:sp>
+        <p:nvSpPr>
+          <p:cNvPr id="32" name="Rounded Rectangle 31"/>
+          <p:cNvSpPr/>
+          <p:nvPr/>
+        </p:nvSpPr>
+        <p:spPr>
+          <a:xfrm>
+            <a:off x="8732520" y="5074920"/>
+            <a:ext cx="2468880" cy="777240"/>
+          </a:xfrm>
+          <a:prstGeom prst="roundRect">
+            <a:avLst>
+              <a:gd name="adj" fmla="val 12000"/>
+            </a:avLst>
+          </a:prstGeom>
+          <a:solidFill>
+            <a:srgbClr val="4E88E6"/>
+          </a:solidFill>
+          <a:ln>
+            <a:noFill/>
+          </a:ln>
+        </p:spPr>
+        <p:style>
+          <a:lnRef idx="1">
+            <a:schemeClr val="accent1"/>
+          </a:lnRef>
+          <a:fillRef idx="3">
+            <a:schemeClr val="accent1"/>
+          </a:fillRef>
+          <a:effectRef idx="2">
+            <a:schemeClr val="accent1"/>
+          </a:effectRef>
+          <a:fontRef idx="minor">
+            <a:schemeClr val="lt1"/>
+          </a:fontRef>
+        </p:style>
+        <p:txBody>
+          <a:bodyPr rtlCol="0" anchor="ctr" tIns="54864" bIns="54864" wrap="square"/>
+          <a:lstStyle/>
+          <a:p>
+            <a:pPr algn="ctr"/>
+            <a:r>
+              <a:rPr sz="1200" b="1" i="0">
+                <a:solidFill>
+                  <a:srgbClr val="FFFFFF"/>
+                </a:solidFill>
+                <a:latin typeface="Calibri"/>
+              </a:rPr>
+              <a:t>Activation Service</a:t>
+            </a:r>
+          </a:p>
+          <a:p>
+            <a:pPr algn="ctr"/>
+            <a:r>
+              <a:rPr sz="900" b="0" i="0">
+                <a:solidFill>
+                  <a:srgbClr val="FFFFFF"/>
+                </a:solidFill>
+                <a:latin typeface="Calibri"/>
+              </a:rPr>
+              <a:t>Python 3.12  ·  Cloud Run</a:t>
+            </a:r>
+          </a:p>
+        </p:txBody>
+      </p:sp>
+      <p:sp>
+        <p:nvSpPr>
+          <p:cNvPr id="33" name="TextBox 32"/>
+          <p:cNvSpPr txBox="1"/>
+          <p:nvPr/>
+        </p:nvSpPr>
+        <p:spPr>
+          <a:xfrm>
+            <a:off x="11521440" y="5074920"/>
+            <a:ext cx="640080" cy="228600"/>
+          </a:xfrm>
+          <a:prstGeom prst="rect">
+            <a:avLst/>
+          </a:prstGeom>
+          <a:noFill/>
+        </p:spPr>
+        <p:txBody>
+          <a:bodyPr wrap="none">
+            <a:spAutoFit/>
+          </a:bodyPr>
+          <a:lstStyle/>
+          <a:p>
+            <a:r>
+              <a:rPr sz="900" b="1" i="0">
+                <a:solidFill>
+                  <a:srgbClr val="333F52"/>
+                </a:solidFill>
+                <a:latin typeface="Calibri"/>
+              </a:rPr>
+              <a:t>→ SA360</a:t>
+            </a:r>
+          </a:p>
+        </p:txBody>
+      </p:sp>
+      <p:sp>
+        <p:nvSpPr>
+          <p:cNvPr id="34" name="TextBox 33"/>
+          <p:cNvSpPr txBox="1"/>
+          <p:nvPr/>
+        </p:nvSpPr>
+        <p:spPr>
+          <a:xfrm>
+            <a:off x="11521440" y="5330952"/>
+            <a:ext cx="640080" cy="228600"/>
+          </a:xfrm>
+          <a:prstGeom prst="rect">
+            <a:avLst/>
+          </a:prstGeom>
+          <a:noFill/>
+        </p:spPr>
+        <p:txBody>
+          <a:bodyPr wrap="none">
+            <a:spAutoFit/>
+          </a:bodyPr>
+          <a:lstStyle/>
+          <a:p>
+            <a:r>
+              <a:rPr sz="900" b="1" i="0">
+                <a:solidFill>
+                  <a:srgbClr val="333F52"/>
+                </a:solidFill>
+                <a:latin typeface="Calibri"/>
+              </a:rPr>
+              <a:t>→ SSGTM</a:t>
+            </a:r>
+          </a:p>
+        </p:txBody>
+      </p:sp>
+      <p:sp>
+        <p:nvSpPr>
+          <p:cNvPr id="35" name="TextBox 34"/>
+          <p:cNvSpPr txBox="1"/>
+          <p:nvPr/>
+        </p:nvSpPr>
+        <p:spPr>
+          <a:xfrm>
+            <a:off x="11521440" y="5586984"/>
+            <a:ext cx="640080" cy="228600"/>
+          </a:xfrm>
+          <a:prstGeom prst="rect">
+            <a:avLst/>
+          </a:prstGeom>
+          <a:noFill/>
+        </p:spPr>
+        <p:txBody>
+          <a:bodyPr wrap="none">
+            <a:spAutoFit/>
+          </a:bodyPr>
+          <a:lstStyle/>
+          <a:p>
+            <a:r>
+              <a:rPr sz="900" b="1" i="0">
+                <a:solidFill>
+                  <a:srgbClr val="333F52"/>
+                </a:solidFill>
+                <a:latin typeface="Calibri"/>
+              </a:rPr>
+              <a:t>→ OCI</a:t>
+            </a:r>
+          </a:p>
+        </p:txBody>
+      </p:sp>
+      <p:sp>
+        <p:nvSpPr>
+          <p:cNvPr id="36" name="Rounded Rectangle 35"/>
+          <p:cNvSpPr/>
+          <p:nvPr/>
+        </p:nvSpPr>
+        <p:spPr>
+          <a:xfrm>
+            <a:off x="4892040" y="5989320"/>
+            <a:ext cx="1280160" cy="274320"/>
+          </a:xfrm>
+          <a:prstGeom prst="roundRect">
+            <a:avLst>
+              <a:gd name="adj" fmla="val 30000"/>
+            </a:avLst>
+          </a:prstGeom>
+          <a:solidFill>
+            <a:srgbClr val="FFFFFF"/>
+          </a:solidFill>
+          <a:ln w="6350">
+            <a:solidFill>
+              <a:srgbClr val="D7DBE3"/>
+            </a:solidFill>
+          </a:ln>
+        </p:spPr>
+        <p:style>
+          <a:lnRef idx="1">
+            <a:schemeClr val="accent1"/>
+          </a:lnRef>
+          <a:fillRef idx="3">
+            <a:schemeClr val="accent1"/>
+          </a:fillRef>
+          <a:effectRef idx="2">
+            <a:schemeClr val="accent1"/>
+          </a:effectRef>
+          <a:fontRef idx="minor">
+            <a:schemeClr val="lt1"/>
+          </a:fontRef>
+        </p:style>
+        <p:txBody>
+          <a:bodyPr rtlCol="0" anchor="ctr" lIns="36576" rIns="36576"/>
+          <a:lstStyle/>
+          <a:p>
+            <a:pPr algn="ctr"/>
+            <a:r>
+              <a:rPr sz="800" b="1" i="0">
+                <a:solidFill>
+                  <a:srgbClr val="333F52"/>
+                </a:solidFill>
+                <a:latin typeface="Calibri"/>
+              </a:rPr>
+              <a:t>GitHub</a:t>
             </a:r>
           </a:p>
         </p:txBody>
       </p:sp>
       <p:cxnSp>
         <p:nvCxnSpPr>
-          <p:cNvPr id="9" name="Connector 8"/>
+          <p:cNvPr id="37" name="Connector 36"/>
           <p:cNvCxnSpPr/>
           <p:nvPr/>
         </p:nvCxnSpPr>
         <p:spPr>
           <a:xfrm>
-            <a:off x="2011680" y="1874520"/>
-            <a:ext cx="320040" cy="0"/>
-          </a:xfrm>
-          <a:prstGeom prst="curvedConnector3">
+            <a:off x="6172200" y="6126480"/>
+            <a:ext cx="45720" cy="0"/>
+          </a:xfrm>
+          <a:prstGeom prst="line">
+            <a:avLst/>
+          </a:prstGeom>
+          <a:ln w="9525">
+            <a:solidFill>
+              <a:srgbClr val="6B7380"/>
+            </a:solidFill>
+            <a:tailEnd type="triangle" w="sm" h="sm"/>
+          </a:ln>
+        </p:spPr>
+        <p:style>
+          <a:lnRef idx="2">
+            <a:schemeClr val="accent1"/>
+          </a:lnRef>
+          <a:fillRef idx="0">
+            <a:schemeClr val="accent1"/>
+          </a:fillRef>
+          <a:effectRef idx="1">
+            <a:schemeClr val="accent1"/>
+          </a:effectRef>
+          <a:fontRef idx="minor">
+            <a:schemeClr val="tx1"/>
+          </a:fontRef>
+        </p:style>
+      </p:cxnSp>
+      <p:sp>
+        <p:nvSpPr>
+          <p:cNvPr id="38" name="Rounded Rectangle 37"/>
+          <p:cNvSpPr/>
+          <p:nvPr/>
+        </p:nvSpPr>
+        <p:spPr>
+          <a:xfrm>
+            <a:off x="6217920" y="5989320"/>
+            <a:ext cx="1280160" cy="274320"/>
+          </a:xfrm>
+          <a:prstGeom prst="roundRect">
+            <a:avLst>
+              <a:gd name="adj" fmla="val 30000"/>
+            </a:avLst>
+          </a:prstGeom>
+          <a:solidFill>
+            <a:srgbClr val="FFFFFF"/>
+          </a:solidFill>
+          <a:ln w="6350">
+            <a:solidFill>
+              <a:srgbClr val="D7DBE3"/>
+            </a:solidFill>
+          </a:ln>
+        </p:spPr>
+        <p:style>
+          <a:lnRef idx="1">
+            <a:schemeClr val="accent1"/>
+          </a:lnRef>
+          <a:fillRef idx="3">
+            <a:schemeClr val="accent1"/>
+          </a:fillRef>
+          <a:effectRef idx="2">
+            <a:schemeClr val="accent1"/>
+          </a:effectRef>
+          <a:fontRef idx="minor">
+            <a:schemeClr val="lt1"/>
+          </a:fontRef>
+        </p:style>
+        <p:txBody>
+          <a:bodyPr rtlCol="0" anchor="ctr" lIns="36576" rIns="36576"/>
+          <a:lstStyle/>
+          <a:p>
+            <a:pPr algn="ctr"/>
+            <a:r>
+              <a:rPr sz="800" b="1" i="0">
+                <a:solidFill>
+                  <a:srgbClr val="333F52"/>
+                </a:solidFill>
+                <a:latin typeface="Calibri"/>
+              </a:rPr>
+              <a:t>WIF</a:t>
+            </a:r>
+          </a:p>
+        </p:txBody>
+      </p:sp>
+      <p:cxnSp>
+        <p:nvCxnSpPr>
+          <p:cNvPr id="39" name="Connector 38"/>
+          <p:cNvCxnSpPr/>
+          <p:nvPr/>
+        </p:nvCxnSpPr>
+        <p:spPr>
+          <a:xfrm>
+            <a:off x="7498080" y="6126480"/>
+            <a:ext cx="45720" cy="0"/>
+          </a:xfrm>
+          <a:prstGeom prst="line">
+            <a:avLst/>
+          </a:prstGeom>
+          <a:ln w="9525">
+            <a:solidFill>
+              <a:srgbClr val="6B7380"/>
+            </a:solidFill>
+            <a:tailEnd type="triangle" w="sm" h="sm"/>
+          </a:ln>
+        </p:spPr>
+        <p:style>
+          <a:lnRef idx="2">
+            <a:schemeClr val="accent1"/>
+          </a:lnRef>
+          <a:fillRef idx="0">
+            <a:schemeClr val="accent1"/>
+          </a:fillRef>
+          <a:effectRef idx="1">
+            <a:schemeClr val="accent1"/>
+          </a:effectRef>
+          <a:fontRef idx="minor">
+            <a:schemeClr val="tx1"/>
+          </a:fontRef>
+        </p:style>
+      </p:cxnSp>
+      <p:sp>
+        <p:nvSpPr>
+          <p:cNvPr id="40" name="Rounded Rectangle 39"/>
+          <p:cNvSpPr/>
+          <p:nvPr/>
+        </p:nvSpPr>
+        <p:spPr>
+          <a:xfrm>
+            <a:off x="7543800" y="5989320"/>
+            <a:ext cx="1280160" cy="274320"/>
+          </a:xfrm>
+          <a:prstGeom prst="roundRect">
+            <a:avLst>
+              <a:gd name="adj" fmla="val 30000"/>
+            </a:avLst>
+          </a:prstGeom>
+          <a:solidFill>
+            <a:srgbClr val="FFFFFF"/>
+          </a:solidFill>
+          <a:ln w="6350">
+            <a:solidFill>
+              <a:srgbClr val="D7DBE3"/>
+            </a:solidFill>
+          </a:ln>
+        </p:spPr>
+        <p:style>
+          <a:lnRef idx="1">
+            <a:schemeClr val="accent1"/>
+          </a:lnRef>
+          <a:fillRef idx="3">
+            <a:schemeClr val="accent1"/>
+          </a:fillRef>
+          <a:effectRef idx="2">
+            <a:schemeClr val="accent1"/>
+          </a:effectRef>
+          <a:fontRef idx="minor">
+            <a:schemeClr val="lt1"/>
+          </a:fontRef>
+        </p:style>
+        <p:txBody>
+          <a:bodyPr rtlCol="0" anchor="ctr" lIns="36576" rIns="36576"/>
+          <a:lstStyle/>
+          <a:p>
+            <a:pPr algn="ctr"/>
+            <a:r>
+              <a:rPr sz="800" b="1" i="0">
+                <a:solidFill>
+                  <a:srgbClr val="333F52"/>
+                </a:solidFill>
+                <a:latin typeface="Calibri"/>
+              </a:rPr>
+              <a:t>Cloud Build</a:t>
+            </a:r>
+          </a:p>
+        </p:txBody>
+      </p:sp>
+      <p:cxnSp>
+        <p:nvCxnSpPr>
+          <p:cNvPr id="41" name="Connector 40"/>
+          <p:cNvCxnSpPr/>
+          <p:nvPr/>
+        </p:nvCxnSpPr>
+        <p:spPr>
+          <a:xfrm>
+            <a:off x="8823960" y="6126480"/>
+            <a:ext cx="45720" cy="0"/>
+          </a:xfrm>
+          <a:prstGeom prst="line">
+            <a:avLst/>
+          </a:prstGeom>
+          <a:ln w="9525">
+            <a:solidFill>
+              <a:srgbClr val="6B7380"/>
+            </a:solidFill>
+            <a:tailEnd type="triangle" w="sm" h="sm"/>
+          </a:ln>
+        </p:spPr>
+        <p:style>
+          <a:lnRef idx="2">
+            <a:schemeClr val="accent1"/>
+          </a:lnRef>
+          <a:fillRef idx="0">
+            <a:schemeClr val="accent1"/>
+          </a:fillRef>
+          <a:effectRef idx="1">
+            <a:schemeClr val="accent1"/>
+          </a:effectRef>
+          <a:fontRef idx="minor">
+            <a:schemeClr val="tx1"/>
+          </a:fontRef>
+        </p:style>
+      </p:cxnSp>
+      <p:sp>
+        <p:nvSpPr>
+          <p:cNvPr id="42" name="Rounded Rectangle 41"/>
+          <p:cNvSpPr/>
+          <p:nvPr/>
+        </p:nvSpPr>
+        <p:spPr>
+          <a:xfrm>
+            <a:off x="8869680" y="5989320"/>
+            <a:ext cx="1280160" cy="274320"/>
+          </a:xfrm>
+          <a:prstGeom prst="roundRect">
+            <a:avLst>
+              <a:gd name="adj" fmla="val 30000"/>
+            </a:avLst>
+          </a:prstGeom>
+          <a:solidFill>
+            <a:srgbClr val="FFFFFF"/>
+          </a:solidFill>
+          <a:ln w="6350">
+            <a:solidFill>
+              <a:srgbClr val="D7DBE3"/>
+            </a:solidFill>
+          </a:ln>
+        </p:spPr>
+        <p:style>
+          <a:lnRef idx="1">
+            <a:schemeClr val="accent1"/>
+          </a:lnRef>
+          <a:fillRef idx="3">
+            <a:schemeClr val="accent1"/>
+          </a:fillRef>
+          <a:effectRef idx="2">
+            <a:schemeClr val="accent1"/>
+          </a:effectRef>
+          <a:fontRef idx="minor">
+            <a:schemeClr val="lt1"/>
+          </a:fontRef>
+        </p:style>
+        <p:txBody>
+          <a:bodyPr rtlCol="0" anchor="ctr" lIns="36576" rIns="36576"/>
+          <a:lstStyle/>
+          <a:p>
+            <a:pPr algn="ctr"/>
+            <a:r>
+              <a:rPr sz="800" b="1" i="0">
+                <a:solidFill>
+                  <a:srgbClr val="333F52"/>
+                </a:solidFill>
+                <a:latin typeface="Calibri"/>
+              </a:rPr>
+              <a:t>Artifact Registry</a:t>
+            </a:r>
+          </a:p>
+        </p:txBody>
+      </p:sp>
+      <p:cxnSp>
+        <p:nvCxnSpPr>
+          <p:cNvPr id="43" name="Connector 42"/>
+          <p:cNvCxnSpPr/>
+          <p:nvPr/>
+        </p:nvCxnSpPr>
+        <p:spPr>
+          <a:xfrm>
+            <a:off x="10149840" y="6126480"/>
+            <a:ext cx="45720" cy="0"/>
+          </a:xfrm>
+          <a:prstGeom prst="line">
+            <a:avLst/>
+          </a:prstGeom>
+          <a:ln w="9525">
+            <a:solidFill>
+              <a:srgbClr val="6B7380"/>
+            </a:solidFill>
+            <a:tailEnd type="triangle" w="sm" h="sm"/>
+          </a:ln>
+        </p:spPr>
+        <p:style>
+          <a:lnRef idx="2">
+            <a:schemeClr val="accent1"/>
+          </a:lnRef>
+          <a:fillRef idx="0">
+            <a:schemeClr val="accent1"/>
+          </a:fillRef>
+          <a:effectRef idx="1">
+            <a:schemeClr val="accent1"/>
+          </a:effectRef>
+          <a:fontRef idx="minor">
+            <a:schemeClr val="tx1"/>
+          </a:fontRef>
+        </p:style>
+      </p:cxnSp>
+      <p:sp>
+        <p:nvSpPr>
+          <p:cNvPr id="44" name="Rounded Rectangle 43"/>
+          <p:cNvSpPr/>
+          <p:nvPr/>
+        </p:nvSpPr>
+        <p:spPr>
+          <a:xfrm>
+            <a:off x="10195560" y="5989320"/>
+            <a:ext cx="1280160" cy="274320"/>
+          </a:xfrm>
+          <a:prstGeom prst="roundRect">
+            <a:avLst>
+              <a:gd name="adj" fmla="val 30000"/>
+            </a:avLst>
+          </a:prstGeom>
+          <a:solidFill>
+            <a:srgbClr val="FFFFFF"/>
+          </a:solidFill>
+          <a:ln w="6350">
+            <a:solidFill>
+              <a:srgbClr val="D7DBE3"/>
+            </a:solidFill>
+          </a:ln>
+        </p:spPr>
+        <p:style>
+          <a:lnRef idx="1">
+            <a:schemeClr val="accent1"/>
+          </a:lnRef>
+          <a:fillRef idx="3">
+            <a:schemeClr val="accent1"/>
+          </a:fillRef>
+          <a:effectRef idx="2">
+            <a:schemeClr val="accent1"/>
+          </a:effectRef>
+          <a:fontRef idx="minor">
+            <a:schemeClr val="lt1"/>
+          </a:fontRef>
+        </p:style>
+        <p:txBody>
+          <a:bodyPr rtlCol="0" anchor="ctr" lIns="36576" rIns="36576"/>
+          <a:lstStyle/>
+          <a:p>
+            <a:pPr algn="ctr"/>
+            <a:r>
+              <a:rPr sz="800" b="1" i="0">
+                <a:solidFill>
+                  <a:srgbClr val="333F52"/>
+                </a:solidFill>
+                <a:latin typeface="Calibri"/>
+              </a:rPr>
+              <a:t>Cloud Run</a:t>
+            </a:r>
+          </a:p>
+        </p:txBody>
+      </p:sp>
+      <p:sp>
+        <p:nvSpPr>
+          <p:cNvPr id="45" name="TextBox 44"/>
+          <p:cNvSpPr txBox="1"/>
+          <p:nvPr/>
+        </p:nvSpPr>
+        <p:spPr>
+          <a:xfrm>
+            <a:off x="4892040" y="5760720"/>
+            <a:ext cx="1828800" cy="201168"/>
+          </a:xfrm>
+          <a:prstGeom prst="rect">
+            <a:avLst/>
+          </a:prstGeom>
+          <a:noFill/>
+        </p:spPr>
+        <p:txBody>
+          <a:bodyPr wrap="none">
+            <a:spAutoFit/>
+          </a:bodyPr>
+          <a:lstStyle/>
+          <a:p>
+            <a:r>
+              <a:rPr sz="800" b="1" i="1">
+                <a:solidFill>
+                  <a:srgbClr val="6B7380"/>
+                </a:solidFill>
+                <a:latin typeface="Calibri"/>
+              </a:rPr>
+              <a:t>Continuous delivery</a:t>
+            </a:r>
+          </a:p>
+        </p:txBody>
+      </p:sp>
+      <p:cxnSp>
+        <p:nvCxnSpPr>
+          <p:cNvPr id="46" name="Connector 45"/>
+          <p:cNvCxnSpPr/>
+          <p:nvPr/>
+        </p:nvCxnSpPr>
+        <p:spPr>
+          <a:xfrm>
+            <a:off x="685800" y="1993392"/>
+            <a:ext cx="685800" cy="0"/>
+          </a:xfrm>
+          <a:prstGeom prst="line">
             <a:avLst/>
           </a:prstGeom>
           <a:ln w="19050">
             <a:solidFill>
-              <a:srgbClr val="333F52"/>
+              <a:srgbClr val="5F6B7C"/>
             </a:solidFill>
+            <a:tailEnd type="triangle" w="sm" h="sm"/>
+          </a:ln>
+        </p:spPr>
+        <p:style>
+          <a:lnRef idx="2">
+            <a:schemeClr val="accent1"/>
+          </a:lnRef>
+          <a:fillRef idx="0">
+            <a:schemeClr val="accent1"/>
+          </a:fillRef>
+          <a:effectRef idx="1">
+            <a:schemeClr val="accent1"/>
+          </a:effectRef>
+          <a:fontRef idx="minor">
+            <a:schemeClr val="tx1"/>
+          </a:fontRef>
+        </p:style>
+      </p:cxnSp>
+      <p:sp>
+        <p:nvSpPr>
+          <p:cNvPr id="47" name="TextBox 46"/>
+          <p:cNvSpPr txBox="1"/>
+          <p:nvPr/>
+        </p:nvSpPr>
+        <p:spPr>
+          <a:xfrm>
+            <a:off x="502920" y="1691640"/>
+            <a:ext cx="960120" cy="274320"/>
+          </a:xfrm>
+          <a:prstGeom prst="rect">
+            <a:avLst/>
+          </a:prstGeom>
+          <a:noFill/>
+        </p:spPr>
+        <p:txBody>
+          <a:bodyPr wrap="square" lIns="18288" rIns="18288" tIns="0" bIns="0">
+            <a:spAutoFit/>
+          </a:bodyPr>
+          <a:lstStyle/>
+          <a:p>
+            <a:pPr algn="ctr"/>
+            <a:r>
+              <a:rPr sz="800" b="0" i="1">
+                <a:solidFill>
+                  <a:srgbClr val="6B7380"/>
+                </a:solidFill>
+                <a:latin typeface="Calibri"/>
+              </a:rPr>
+              <a:t>HTTPS click</a:t>
+            </a:r>
+          </a:p>
+        </p:txBody>
+      </p:sp>
+      <p:cxnSp>
+        <p:nvCxnSpPr>
+          <p:cNvPr id="48" name="Connector 47"/>
+          <p:cNvCxnSpPr/>
+          <p:nvPr/>
+        </p:nvCxnSpPr>
+        <p:spPr>
+          <a:xfrm>
+            <a:off x="4114800" y="1691640"/>
+            <a:ext cx="457200" cy="0"/>
+          </a:xfrm>
+          <a:prstGeom prst="line">
+            <a:avLst/>
+          </a:prstGeom>
+          <a:ln w="19050">
+            <a:solidFill>
+              <a:srgbClr val="5F6B7C"/>
+            </a:solidFill>
+            <a:tailEnd type="triangle" w="sm" h="sm"/>
+          </a:ln>
+        </p:spPr>
+        <p:style>
+          <a:lnRef idx="2">
+            <a:schemeClr val="accent1"/>
+          </a:lnRef>
+          <a:fillRef idx="0">
+            <a:schemeClr val="accent1"/>
+          </a:fillRef>
+          <a:effectRef idx="1">
+            <a:schemeClr val="accent1"/>
+          </a:effectRef>
+          <a:fontRef idx="minor">
+            <a:schemeClr val="tx1"/>
+          </a:fontRef>
+        </p:style>
+      </p:cxnSp>
+      <p:sp>
+        <p:nvSpPr>
+          <p:cNvPr id="49" name="TextBox 48"/>
+          <p:cNvSpPr txBox="1"/>
+          <p:nvPr/>
+        </p:nvSpPr>
+        <p:spPr>
+          <a:xfrm>
+            <a:off x="4114800" y="1481328"/>
+            <a:ext cx="457200" cy="201168"/>
+          </a:xfrm>
+          <a:prstGeom prst="rect">
+            <a:avLst/>
+          </a:prstGeom>
+          <a:noFill/>
+        </p:spPr>
+        <p:txBody>
+          <a:bodyPr wrap="square" lIns="18288" rIns="18288" tIns="0" bIns="0">
+            <a:spAutoFit/>
+          </a:bodyPr>
+          <a:lstStyle/>
+          <a:p>
+            <a:pPr algn="ctr"/>
+            <a:r>
+              <a:rPr sz="700" b="0" i="1">
+                <a:solidFill>
+                  <a:srgbClr val="6B7380"/>
+                </a:solidFill>
+                <a:latin typeface="Calibri"/>
+              </a:rPr>
+              <a:t>predict</a:t>
+            </a:r>
+          </a:p>
+        </p:txBody>
+      </p:sp>
+      <p:cxnSp>
+        <p:nvCxnSpPr>
+          <p:cNvPr id="50" name="Connector 49"/>
+          <p:cNvCxnSpPr/>
+          <p:nvPr/>
+        </p:nvCxnSpPr>
+        <p:spPr>
+          <a:xfrm flipH="1">
+            <a:off x="4114800" y="2057400"/>
+            <a:ext cx="457200" cy="0"/>
+          </a:xfrm>
+          <a:prstGeom prst="line">
+            <a:avLst/>
+          </a:prstGeom>
+          <a:ln w="19050">
+            <a:solidFill>
+              <a:srgbClr val="E87B1E"/>
+            </a:solidFill>
+            <a:tailEnd type="triangle" w="sm" h="sm"/>
+          </a:ln>
+        </p:spPr>
+        <p:style>
+          <a:lnRef idx="2">
+            <a:schemeClr val="accent1"/>
+          </a:lnRef>
+          <a:fillRef idx="0">
+            <a:schemeClr val="accent1"/>
+          </a:fillRef>
+          <a:effectRef idx="1">
+            <a:schemeClr val="accent1"/>
+          </a:effectRef>
+          <a:fontRef idx="minor">
+            <a:schemeClr val="tx1"/>
+          </a:fontRef>
+        </p:style>
+      </p:cxnSp>
+      <p:sp>
+        <p:nvSpPr>
+          <p:cNvPr id="51" name="TextBox 50"/>
+          <p:cNvSpPr txBox="1"/>
+          <p:nvPr/>
+        </p:nvSpPr>
+        <p:spPr>
+          <a:xfrm>
+            <a:off x="4114800" y="2084831"/>
+            <a:ext cx="457200" cy="201168"/>
+          </a:xfrm>
+          <a:prstGeom prst="rect">
+            <a:avLst/>
+          </a:prstGeom>
+          <a:noFill/>
+        </p:spPr>
+        <p:txBody>
+          <a:bodyPr wrap="square" lIns="18288" rIns="18288" tIns="0" bIns="0">
+            <a:spAutoFit/>
+          </a:bodyPr>
+          <a:lstStyle/>
+          <a:p>
+            <a:pPr algn="ctr"/>
+            <a:r>
+              <a:rPr sz="700" b="0" i="1">
+                <a:solidFill>
+                  <a:srgbClr val="E87B1E"/>
+                </a:solidFill>
+                <a:latin typeface="Calibri"/>
+              </a:rPr>
+              <a:t>rpc</a:t>
+            </a:r>
+          </a:p>
+        </p:txBody>
+      </p:sp>
+      <p:cxnSp>
+        <p:nvCxnSpPr>
+          <p:cNvPr id="52" name="Connector 51"/>
+          <p:cNvCxnSpPr/>
+          <p:nvPr/>
+        </p:nvCxnSpPr>
+        <p:spPr>
+          <a:xfrm>
+            <a:off x="3200400" y="2926080"/>
+            <a:ext cx="502920" cy="1234440"/>
+          </a:xfrm>
+          <a:prstGeom prst="line">
+            <a:avLst/>
+          </a:prstGeom>
+          <a:ln w="15875">
+            <a:solidFill>
+              <a:srgbClr val="E87B1E"/>
+            </a:solidFill>
+            <a:tailEnd type="triangle" w="sm" h="sm"/>
           </a:ln>
         </p:spPr>
         <p:style>
@@ -10120,22 +12094,23 @@
       </p:cxnSp>
       <p:cxnSp>
         <p:nvCxnSpPr>
-          <p:cNvPr id="10" name="Connector 9"/>
+          <p:cNvPr id="53" name="Connector 52"/>
           <p:cNvCxnSpPr/>
           <p:nvPr/>
         </p:nvCxnSpPr>
         <p:spPr>
-          <a:xfrm>
-            <a:off x="3886200" y="1874520"/>
-            <a:ext cx="320040" cy="0"/>
-          </a:xfrm>
-          <a:prstGeom prst="curvedConnector3">
-            <a:avLst/>
-          </a:prstGeom>
-          <a:ln w="19050">
+          <a:xfrm flipV="1">
+            <a:off x="4160520" y="4343400"/>
+            <a:ext cx="868680" cy="27432"/>
+          </a:xfrm>
+          <a:prstGeom prst="line">
+            <a:avLst/>
+          </a:prstGeom>
+          <a:ln w="15875">
             <a:solidFill>
-              <a:srgbClr val="333F52"/>
+              <a:srgbClr val="E87B1E"/>
             </a:solidFill>
+            <a:tailEnd type="triangle" w="sm" h="sm"/>
           </a:ln>
         </p:spPr>
         <p:style>
@@ -10155,22 +12130,23 @@
       </p:cxnSp>
       <p:cxnSp>
         <p:nvCxnSpPr>
-          <p:cNvPr id="11" name="Connector 10"/>
+          <p:cNvPr id="54" name="Connector 53"/>
           <p:cNvCxnSpPr/>
           <p:nvPr/>
         </p:nvCxnSpPr>
         <p:spPr>
           <a:xfrm>
-            <a:off x="5760720" y="1874520"/>
-            <a:ext cx="320040" cy="0"/>
-          </a:xfrm>
-          <a:prstGeom prst="curvedConnector3">
-            <a:avLst/>
-          </a:prstGeom>
-          <a:ln w="19050">
+            <a:off x="4114800" y="2697480"/>
+            <a:ext cx="1371600" cy="1874520"/>
+          </a:xfrm>
+          <a:prstGeom prst="line">
+            <a:avLst/>
+          </a:prstGeom>
+          <a:ln w="12700">
             <a:solidFill>
-              <a:srgbClr val="333F52"/>
+              <a:srgbClr val="E87B1E"/>
             </a:solidFill>
+            <a:tailEnd type="triangle" w="sm" h="sm"/>
           </a:ln>
         </p:spPr>
         <p:style>
@@ -10190,22 +12166,23 @@
       </p:cxnSp>
       <p:cxnSp>
         <p:nvCxnSpPr>
-          <p:cNvPr id="12" name="Connector 11"/>
+          <p:cNvPr id="55" name="Connector 54"/>
           <p:cNvCxnSpPr/>
           <p:nvPr/>
         </p:nvCxnSpPr>
         <p:spPr>
           <a:xfrm>
-            <a:off x="7635240" y="1874520"/>
-            <a:ext cx="320040" cy="0"/>
-          </a:xfrm>
-          <a:prstGeom prst="curvedConnector3">
-            <a:avLst/>
-          </a:prstGeom>
-          <a:ln w="19050">
+            <a:off x="685800" y="2148840"/>
+            <a:ext cx="1143000" cy="2011680"/>
+          </a:xfrm>
+          <a:prstGeom prst="line">
+            <a:avLst/>
+          </a:prstGeom>
+          <a:ln w="12700">
             <a:solidFill>
-              <a:srgbClr val="333F52"/>
+              <a:srgbClr val="A96BDB"/>
             </a:solidFill>
+            <a:tailEnd type="triangle" w="sm" h="sm"/>
           </a:ln>
         </p:spPr>
         <p:style>
@@ -10223,16 +12200,702 @@
           </a:fontRef>
         </p:style>
       </p:cxnSp>
-      <p:sp>
-        <p:nvSpPr>
-          <p:cNvPr id="13" name="TextBox 12"/>
+      <p:cxnSp>
+        <p:nvCxnSpPr>
+          <p:cNvPr id="56" name="Connector 55"/>
+          <p:cNvCxnSpPr/>
+          <p:nvPr/>
+        </p:nvCxnSpPr>
+        <p:spPr>
+          <a:xfrm flipV="1">
+            <a:off x="2057400" y="3657600"/>
+            <a:ext cx="2514600" cy="914400"/>
+          </a:xfrm>
+          <a:prstGeom prst="line">
+            <a:avLst/>
+          </a:prstGeom>
+          <a:ln w="12700">
+            <a:solidFill>
+              <a:srgbClr val="A96BDB"/>
+            </a:solidFill>
+            <a:tailEnd type="triangle" w="sm" h="sm"/>
+          </a:ln>
+        </p:spPr>
+        <p:style>
+          <a:lnRef idx="2">
+            <a:schemeClr val="accent1"/>
+          </a:lnRef>
+          <a:fillRef idx="0">
+            <a:schemeClr val="accent1"/>
+          </a:fillRef>
+          <a:effectRef idx="1">
+            <a:schemeClr val="accent1"/>
+          </a:effectRef>
+          <a:fontRef idx="minor">
+            <a:schemeClr val="tx1"/>
+          </a:fontRef>
+        </p:style>
+      </p:cxnSp>
+      <p:cxnSp>
+        <p:nvCxnSpPr>
+          <p:cNvPr id="57" name="Connector 56"/>
+          <p:cNvCxnSpPr/>
+          <p:nvPr/>
+        </p:nvCxnSpPr>
+        <p:spPr>
+          <a:xfrm flipV="1">
+            <a:off x="548640" y="4160520"/>
+            <a:ext cx="4023360" cy="1280160"/>
+          </a:xfrm>
+          <a:prstGeom prst="line">
+            <a:avLst/>
+          </a:prstGeom>
+          <a:ln w="12700">
+            <a:solidFill>
+              <a:srgbClr val="E87B1E"/>
+            </a:solidFill>
+            <a:tailEnd type="triangle" w="sm" h="sm"/>
+          </a:ln>
+        </p:spPr>
+        <p:style>
+          <a:lnRef idx="2">
+            <a:schemeClr val="accent1"/>
+          </a:lnRef>
+          <a:fillRef idx="0">
+            <a:schemeClr val="accent1"/>
+          </a:fillRef>
+          <a:effectRef idx="1">
+            <a:schemeClr val="accent1"/>
+          </a:effectRef>
+          <a:fontRef idx="minor">
+            <a:schemeClr val="tx1"/>
+          </a:fontRef>
+        </p:style>
+      </p:cxnSp>
+      <p:cxnSp>
+        <p:nvCxnSpPr>
+          <p:cNvPr id="58" name="Connector 57"/>
+          <p:cNvCxnSpPr/>
+          <p:nvPr/>
+        </p:nvCxnSpPr>
+        <p:spPr>
+          <a:xfrm>
+            <a:off x="6858000" y="4023360"/>
+            <a:ext cx="914400" cy="137160"/>
+          </a:xfrm>
+          <a:prstGeom prst="line">
+            <a:avLst/>
+          </a:prstGeom>
+          <a:ln w="15875">
+            <a:solidFill>
+              <a:srgbClr val="5F6B7C"/>
+            </a:solidFill>
+            <a:tailEnd type="triangle" w="sm" h="sm"/>
+          </a:ln>
+        </p:spPr>
+        <p:style>
+          <a:lnRef idx="2">
+            <a:schemeClr val="accent1"/>
+          </a:lnRef>
+          <a:fillRef idx="0">
+            <a:schemeClr val="accent1"/>
+          </a:fillRef>
+          <a:effectRef idx="1">
+            <a:schemeClr val="accent1"/>
+          </a:effectRef>
+          <a:fontRef idx="minor">
+            <a:schemeClr val="tx1"/>
+          </a:fontRef>
+        </p:style>
+      </p:cxnSp>
+      <p:sp>
+        <p:nvSpPr>
+          <p:cNvPr id="59" name="TextBox 58"/>
           <p:cNvSpPr txBox="1"/>
           <p:nvPr/>
         </p:nvSpPr>
         <p:spPr>
           <a:xfrm>
-            <a:off x="457200" y="2651760"/>
-            <a:ext cx="11277295" cy="411480"/>
+            <a:off x="6903720" y="3822191"/>
+            <a:ext cx="914400" cy="201168"/>
+          </a:xfrm>
+          <a:prstGeom prst="rect">
+            <a:avLst/>
+          </a:prstGeom>
+          <a:noFill/>
+        </p:spPr>
+        <p:txBody>
+          <a:bodyPr wrap="square" lIns="18288" rIns="18288" tIns="0" bIns="0">
+            <a:spAutoFit/>
+          </a:bodyPr>
+          <a:lstStyle/>
+          <a:p>
+            <a:pPr algn="ctr"/>
+            <a:r>
+              <a:rPr sz="700" b="0" i="1">
+                <a:solidFill>
+                  <a:srgbClr val="6B7380"/>
+                </a:solidFill>
+                <a:latin typeface="Calibri"/>
+              </a:rPr>
+              <a:t>training data</a:t>
+            </a:r>
+          </a:p>
+        </p:txBody>
+      </p:sp>
+      <p:cxnSp>
+        <p:nvCxnSpPr>
+          <p:cNvPr id="60" name="Connector 59"/>
+          <p:cNvCxnSpPr/>
+          <p:nvPr/>
+        </p:nvCxnSpPr>
+        <p:spPr>
+          <a:xfrm>
+            <a:off x="9692640" y="4572000"/>
+            <a:ext cx="365760" cy="0"/>
+          </a:xfrm>
+          <a:prstGeom prst="line">
+            <a:avLst/>
+          </a:prstGeom>
+          <a:ln w="12700">
+            <a:solidFill>
+              <a:srgbClr val="5F6B7C"/>
+            </a:solidFill>
+            <a:tailEnd type="triangle" w="sm" h="sm"/>
+          </a:ln>
+        </p:spPr>
+        <p:style>
+          <a:lnRef idx="2">
+            <a:schemeClr val="accent1"/>
+          </a:lnRef>
+          <a:fillRef idx="0">
+            <a:schemeClr val="accent1"/>
+          </a:fillRef>
+          <a:effectRef idx="1">
+            <a:schemeClr val="accent1"/>
+          </a:effectRef>
+          <a:fontRef idx="minor">
+            <a:schemeClr val="tx1"/>
+          </a:fontRef>
+        </p:style>
+      </p:cxnSp>
+      <p:cxnSp>
+        <p:nvCxnSpPr>
+          <p:cNvPr id="61" name="Connector 60"/>
+          <p:cNvCxnSpPr/>
+          <p:nvPr/>
+        </p:nvCxnSpPr>
+        <p:spPr>
+          <a:xfrm flipH="1" flipV="1">
+            <a:off x="5715000" y="2331720"/>
+            <a:ext cx="2514600" cy="1828800"/>
+          </a:xfrm>
+          <a:prstGeom prst="line">
+            <a:avLst/>
+          </a:prstGeom>
+          <a:ln w="12700">
+            <a:solidFill>
+              <a:srgbClr val="5F6B7C"/>
+            </a:solidFill>
+            <a:prstDash val="dash"/>
+            <a:tailEnd type="triangle" w="sm" h="sm"/>
+          </a:ln>
+        </p:spPr>
+        <p:style>
+          <a:lnRef idx="2">
+            <a:schemeClr val="accent1"/>
+          </a:lnRef>
+          <a:fillRef idx="0">
+            <a:schemeClr val="accent1"/>
+          </a:fillRef>
+          <a:effectRef idx="1">
+            <a:schemeClr val="accent1"/>
+          </a:effectRef>
+          <a:fontRef idx="minor">
+            <a:schemeClr val="tx1"/>
+          </a:fontRef>
+        </p:style>
+      </p:cxnSp>
+      <p:sp>
+        <p:nvSpPr>
+          <p:cNvPr id="62" name="TextBox 61"/>
+          <p:cNvSpPr txBox="1"/>
+          <p:nvPr/>
+        </p:nvSpPr>
+        <p:spPr>
+          <a:xfrm>
+            <a:off x="7498079" y="3200400"/>
+            <a:ext cx="1463040" cy="201168"/>
+          </a:xfrm>
+          <a:prstGeom prst="rect">
+            <a:avLst/>
+          </a:prstGeom>
+          <a:noFill/>
+        </p:spPr>
+        <p:txBody>
+          <a:bodyPr wrap="square" lIns="18288" rIns="18288" tIns="0" bIns="0">
+            <a:spAutoFit/>
+          </a:bodyPr>
+          <a:lstStyle/>
+          <a:p>
+            <a:pPr algn="ctr"/>
+            <a:r>
+              <a:rPr sz="700" b="0" i="1">
+                <a:solidFill>
+                  <a:srgbClr val="6B7380"/>
+                </a:solidFill>
+                <a:latin typeface="Calibri"/>
+              </a:rPr>
+              <a:t>deploy / retrain</a:t>
+            </a:r>
+          </a:p>
+        </p:txBody>
+      </p:sp>
+      <p:cxnSp>
+        <p:nvCxnSpPr>
+          <p:cNvPr id="63" name="Connector 62"/>
+          <p:cNvCxnSpPr/>
+          <p:nvPr/>
+        </p:nvCxnSpPr>
+        <p:spPr>
+          <a:xfrm>
+            <a:off x="6858000" y="3200400"/>
+            <a:ext cx="1874520" cy="0"/>
+          </a:xfrm>
+          <a:prstGeom prst="line">
+            <a:avLst/>
+          </a:prstGeom>
+          <a:ln w="15875">
+            <a:solidFill>
+              <a:srgbClr val="E87B1E"/>
+            </a:solidFill>
+            <a:tailEnd type="triangle" w="sm" h="sm"/>
+          </a:ln>
+        </p:spPr>
+        <p:style>
+          <a:lnRef idx="2">
+            <a:schemeClr val="accent1"/>
+          </a:lnRef>
+          <a:fillRef idx="0">
+            <a:schemeClr val="accent1"/>
+          </a:fillRef>
+          <a:effectRef idx="1">
+            <a:schemeClr val="accent1"/>
+          </a:effectRef>
+          <a:fontRef idx="minor">
+            <a:schemeClr val="tx1"/>
+          </a:fontRef>
+        </p:style>
+      </p:cxnSp>
+      <p:sp>
+        <p:nvSpPr>
+          <p:cNvPr id="64" name="TextBox 63"/>
+          <p:cNvSpPr txBox="1"/>
+          <p:nvPr/>
+        </p:nvSpPr>
+        <p:spPr>
+          <a:xfrm>
+            <a:off x="6949440" y="2944368"/>
+            <a:ext cx="1783080" cy="201168"/>
+          </a:xfrm>
+          <a:prstGeom prst="rect">
+            <a:avLst/>
+          </a:prstGeom>
+          <a:noFill/>
+        </p:spPr>
+        <p:txBody>
+          <a:bodyPr wrap="square" lIns="18288" rIns="18288" tIns="0" bIns="0">
+            <a:spAutoFit/>
+          </a:bodyPr>
+          <a:lstStyle/>
+          <a:p>
+            <a:pPr algn="ctr"/>
+            <a:r>
+              <a:rPr sz="700" b="0" i="1">
+                <a:solidFill>
+                  <a:srgbClr val="E87B1E"/>
+                </a:solidFill>
+                <a:latin typeface="Calibri"/>
+              </a:rPr>
+              <a:t>read predictions_vs_revenue</a:t>
+            </a:r>
+          </a:p>
+        </p:txBody>
+      </p:sp>
+      <p:cxnSp>
+        <p:nvCxnSpPr>
+          <p:cNvPr id="65" name="Connector 64"/>
+          <p:cNvCxnSpPr/>
+          <p:nvPr/>
+        </p:nvCxnSpPr>
+        <p:spPr>
+          <a:xfrm flipV="1">
+            <a:off x="9966960" y="2331720"/>
+            <a:ext cx="0" cy="457200"/>
+          </a:xfrm>
+          <a:prstGeom prst="line">
+            <a:avLst/>
+          </a:prstGeom>
+          <a:ln w="15875">
+            <a:solidFill>
+              <a:srgbClr val="5F6B7C"/>
+            </a:solidFill>
+            <a:tailEnd type="triangle" w="sm" h="sm"/>
+          </a:ln>
+        </p:spPr>
+        <p:style>
+          <a:lnRef idx="2">
+            <a:schemeClr val="accent1"/>
+          </a:lnRef>
+          <a:fillRef idx="0">
+            <a:schemeClr val="accent1"/>
+          </a:fillRef>
+          <a:effectRef idx="1">
+            <a:schemeClr val="accent1"/>
+          </a:effectRef>
+          <a:fontRef idx="minor">
+            <a:schemeClr val="tx1"/>
+          </a:fontRef>
+        </p:style>
+      </p:cxnSp>
+      <p:sp>
+        <p:nvSpPr>
+          <p:cNvPr id="66" name="TextBox 65"/>
+          <p:cNvSpPr txBox="1"/>
+          <p:nvPr/>
+        </p:nvSpPr>
+        <p:spPr>
+          <a:xfrm>
+            <a:off x="10104120" y="2423160"/>
+            <a:ext cx="1097280" cy="201168"/>
+          </a:xfrm>
+          <a:prstGeom prst="rect">
+            <a:avLst/>
+          </a:prstGeom>
+          <a:noFill/>
+        </p:spPr>
+        <p:txBody>
+          <a:bodyPr wrap="square" lIns="18288" rIns="18288" tIns="0" bIns="0">
+            <a:spAutoFit/>
+          </a:bodyPr>
+          <a:lstStyle/>
+          <a:p>
+            <a:pPr algn="ctr"/>
+            <a:r>
+              <a:rPr sz="700" b="0" i="1">
+                <a:solidFill>
+                  <a:srgbClr val="6B7380"/>
+                </a:solidFill>
+                <a:latin typeface="Calibri"/>
+              </a:rPr>
+              <a:t>HTTPS /api</a:t>
+            </a:r>
+          </a:p>
+        </p:txBody>
+      </p:sp>
+      <p:cxnSp>
+        <p:nvCxnSpPr>
+          <p:cNvPr id="67" name="Connector 66"/>
+          <p:cNvCxnSpPr/>
+          <p:nvPr/>
+        </p:nvCxnSpPr>
+        <p:spPr>
+          <a:xfrm flipH="1">
+            <a:off x="11201400" y="1874519"/>
+            <a:ext cx="365760" cy="0"/>
+          </a:xfrm>
+          <a:prstGeom prst="line">
+            <a:avLst/>
+          </a:prstGeom>
+          <a:ln w="15875">
+            <a:solidFill>
+              <a:srgbClr val="5F6B7C"/>
+            </a:solidFill>
+            <a:tailEnd type="triangle" w="sm" h="sm"/>
+          </a:ln>
+        </p:spPr>
+        <p:style>
+          <a:lnRef idx="2">
+            <a:schemeClr val="accent1"/>
+          </a:lnRef>
+          <a:fillRef idx="0">
+            <a:schemeClr val="accent1"/>
+          </a:fillRef>
+          <a:effectRef idx="1">
+            <a:schemeClr val="accent1"/>
+          </a:effectRef>
+          <a:fontRef idx="minor">
+            <a:schemeClr val="tx1"/>
+          </a:fontRef>
+        </p:style>
+      </p:cxnSp>
+      <p:cxnSp>
+        <p:nvCxnSpPr>
+          <p:cNvPr id="68" name="Connector 67"/>
+          <p:cNvCxnSpPr/>
+          <p:nvPr/>
+        </p:nvCxnSpPr>
+        <p:spPr>
+          <a:xfrm flipH="1" flipV="1">
+            <a:off x="4434840" y="2926080"/>
+            <a:ext cx="137160" cy="2423160"/>
+          </a:xfrm>
+          <a:prstGeom prst="line">
+            <a:avLst/>
+          </a:prstGeom>
+          <a:ln w="12700">
+            <a:solidFill>
+              <a:srgbClr val="5F6B7C"/>
+            </a:solidFill>
+            <a:tailEnd type="triangle" w="sm" h="sm"/>
+          </a:ln>
+        </p:spPr>
+        <p:style>
+          <a:lnRef idx="2">
+            <a:schemeClr val="accent1"/>
+          </a:lnRef>
+          <a:fillRef idx="0">
+            <a:schemeClr val="accent1"/>
+          </a:fillRef>
+          <a:effectRef idx="1">
+            <a:schemeClr val="accent1"/>
+          </a:effectRef>
+          <a:fontRef idx="minor">
+            <a:schemeClr val="tx1"/>
+          </a:fontRef>
+        </p:style>
+      </p:cxnSp>
+      <p:cxnSp>
+        <p:nvCxnSpPr>
+          <p:cNvPr id="69" name="Connector 68"/>
+          <p:cNvCxnSpPr/>
+          <p:nvPr/>
+        </p:nvCxnSpPr>
+        <p:spPr>
+          <a:xfrm flipH="1">
+            <a:off x="4114800" y="2423160"/>
+            <a:ext cx="320040" cy="0"/>
+          </a:xfrm>
+          <a:prstGeom prst="line">
+            <a:avLst/>
+          </a:prstGeom>
+          <a:ln w="12700">
+            <a:solidFill>
+              <a:srgbClr val="5F6B7C"/>
+            </a:solidFill>
+            <a:tailEnd type="triangle" w="sm" h="sm"/>
+          </a:ln>
+        </p:spPr>
+        <p:style>
+          <a:lnRef idx="2">
+            <a:schemeClr val="accent1"/>
+          </a:lnRef>
+          <a:fillRef idx="0">
+            <a:schemeClr val="accent1"/>
+          </a:fillRef>
+          <a:effectRef idx="1">
+            <a:schemeClr val="accent1"/>
+          </a:effectRef>
+          <a:fontRef idx="minor">
+            <a:schemeClr val="tx1"/>
+          </a:fontRef>
+        </p:style>
+      </p:cxnSp>
+      <p:sp>
+        <p:nvSpPr>
+          <p:cNvPr id="70" name="TextBox 69"/>
+          <p:cNvSpPr txBox="1"/>
+          <p:nvPr/>
+        </p:nvSpPr>
+        <p:spPr>
+          <a:xfrm>
+            <a:off x="3611880" y="4754880"/>
+            <a:ext cx="1828800" cy="201168"/>
+          </a:xfrm>
+          <a:prstGeom prst="rect">
+            <a:avLst/>
+          </a:prstGeom>
+          <a:noFill/>
+        </p:spPr>
+        <p:txBody>
+          <a:bodyPr wrap="square" lIns="18288" rIns="18288" tIns="0" bIns="0">
+            <a:spAutoFit/>
+          </a:bodyPr>
+          <a:lstStyle/>
+          <a:p>
+            <a:pPr algn="ctr"/>
+            <a:r>
+              <a:rPr sz="700" b="0" i="1">
+                <a:solidFill>
+                  <a:srgbClr val="6B7380"/>
+                </a:solidFill>
+                <a:latin typeface="Calibri"/>
+              </a:rPr>
+              <a:t>flip kill-switch</a:t>
+            </a:r>
+          </a:p>
+        </p:txBody>
+      </p:sp>
+      <p:cxnSp>
+        <p:nvCxnSpPr>
+          <p:cNvPr id="71" name="Connector 70"/>
+          <p:cNvCxnSpPr/>
+          <p:nvPr/>
+        </p:nvCxnSpPr>
+        <p:spPr>
+          <a:xfrm>
+            <a:off x="11201400" y="5458968"/>
+            <a:ext cx="320040" cy="0"/>
+          </a:xfrm>
+          <a:prstGeom prst="line">
+            <a:avLst/>
+          </a:prstGeom>
+          <a:ln w="12700">
+            <a:solidFill>
+              <a:srgbClr val="5F6B7C"/>
+            </a:solidFill>
+            <a:tailEnd type="triangle" w="sm" h="sm"/>
+          </a:ln>
+        </p:spPr>
+        <p:style>
+          <a:lnRef idx="2">
+            <a:schemeClr val="accent1"/>
+          </a:lnRef>
+          <a:fillRef idx="0">
+            <a:schemeClr val="accent1"/>
+          </a:fillRef>
+          <a:effectRef idx="1">
+            <a:schemeClr val="accent1"/>
+          </a:effectRef>
+          <a:fontRef idx="minor">
+            <a:schemeClr val="tx1"/>
+          </a:fontRef>
+        </p:style>
+      </p:cxnSp>
+      <p:cxnSp>
+        <p:nvCxnSpPr>
+          <p:cNvPr id="72" name="Connector 71"/>
+          <p:cNvCxnSpPr/>
+          <p:nvPr/>
+        </p:nvCxnSpPr>
+        <p:spPr>
+          <a:xfrm flipV="1">
+            <a:off x="2468880" y="2926080"/>
+            <a:ext cx="0" cy="274320"/>
+          </a:xfrm>
+          <a:prstGeom prst="line">
+            <a:avLst/>
+          </a:prstGeom>
+          <a:ln w="12700">
+            <a:solidFill>
+              <a:srgbClr val="5F6B7C"/>
+            </a:solidFill>
+            <a:tailEnd type="triangle" w="sm" h="sm"/>
+          </a:ln>
+        </p:spPr>
+        <p:style>
+          <a:lnRef idx="2">
+            <a:schemeClr val="accent1"/>
+          </a:lnRef>
+          <a:fillRef idx="0">
+            <a:schemeClr val="accent1"/>
+          </a:fillRef>
+          <a:effectRef idx="1">
+            <a:schemeClr val="accent1"/>
+          </a:effectRef>
+          <a:fontRef idx="minor">
+            <a:schemeClr val="tx1"/>
+          </a:fontRef>
+        </p:style>
+      </p:cxnSp>
+      <p:sp>
+        <p:nvSpPr>
+          <p:cNvPr id="73" name="TextBox 72"/>
+          <p:cNvSpPr txBox="1"/>
+          <p:nvPr/>
+        </p:nvSpPr>
+        <p:spPr>
+          <a:xfrm>
+            <a:off x="2514600" y="2971800"/>
+            <a:ext cx="1371600" cy="201168"/>
+          </a:xfrm>
+          <a:prstGeom prst="rect">
+            <a:avLst/>
+          </a:prstGeom>
+          <a:noFill/>
+        </p:spPr>
+        <p:txBody>
+          <a:bodyPr wrap="square" lIns="18288" rIns="18288" tIns="0" bIns="0">
+            <a:spAutoFit/>
+          </a:bodyPr>
+          <a:lstStyle/>
+          <a:p>
+            <a:pPr algn="ctr"/>
+            <a:r>
+              <a:rPr sz="700" b="0" i="1">
+                <a:solidFill>
+                  <a:srgbClr val="6B7380"/>
+                </a:solidFill>
+                <a:latin typeface="Calibri"/>
+              </a:rPr>
+              <a:t>segment bounds</a:t>
+            </a:r>
+          </a:p>
+        </p:txBody>
+      </p:sp>
+      <p:sp>
+        <p:nvSpPr>
+          <p:cNvPr id="74" name="Oval 73"/>
+          <p:cNvSpPr/>
+          <p:nvPr/>
+        </p:nvSpPr>
+        <p:spPr>
+          <a:xfrm>
+            <a:off x="457200" y="6373368"/>
+            <a:ext cx="109728" cy="109728"/>
+          </a:xfrm>
+          <a:prstGeom prst="ellipse">
+            <a:avLst/>
+          </a:prstGeom>
+          <a:solidFill>
+            <a:srgbClr val="4E88E6"/>
+          </a:solidFill>
+          <a:ln>
+            <a:noFill/>
+          </a:ln>
+        </p:spPr>
+        <p:style>
+          <a:lnRef idx="1">
+            <a:schemeClr val="accent1"/>
+          </a:lnRef>
+          <a:fillRef idx="3">
+            <a:schemeClr val="accent1"/>
+          </a:fillRef>
+          <a:effectRef idx="2">
+            <a:schemeClr val="accent1"/>
+          </a:effectRef>
+          <a:fontRef idx="minor">
+            <a:schemeClr val="lt1"/>
+          </a:fontRef>
+        </p:style>
+        <p:txBody>
+          <a:bodyPr rtlCol="0" anchor="ctr"/>
+          <a:lstStyle/>
+          <a:p>
+            <a:pPr algn="ctr"/>
+          </a:p>
+        </p:txBody>
+      </p:sp>
+      <p:sp>
+        <p:nvSpPr>
+          <p:cNvPr id="75" name="TextBox 74"/>
+          <p:cNvSpPr txBox="1"/>
+          <p:nvPr/>
+        </p:nvSpPr>
+        <p:spPr>
+          <a:xfrm>
+            <a:off x="621792" y="6336792"/>
+            <a:ext cx="1463040" cy="201168"/>
           </a:xfrm>
           <a:prstGeom prst="rect">
             <a:avLst/>
@@ -10245,34 +12908,416 @@
           </a:bodyPr>
           <a:lstStyle/>
           <a:p>
+            <a:r>
+              <a:rPr sz="800" b="0" i="0">
+                <a:solidFill>
+                  <a:srgbClr val="333F52"/>
+                </a:solidFill>
+                <a:latin typeface="Calibri"/>
+              </a:rPr>
+              <a:t>Service</a:t>
+            </a:r>
+          </a:p>
+        </p:txBody>
+      </p:sp>
+      <p:sp>
+        <p:nvSpPr>
+          <p:cNvPr id="76" name="Oval 75"/>
+          <p:cNvSpPr/>
+          <p:nvPr/>
+        </p:nvSpPr>
+        <p:spPr>
+          <a:xfrm>
+            <a:off x="1874520" y="6373368"/>
+            <a:ext cx="109728" cy="109728"/>
+          </a:xfrm>
+          <a:prstGeom prst="ellipse">
+            <a:avLst/>
+          </a:prstGeom>
+          <a:solidFill>
+            <a:srgbClr val="34A853"/>
+          </a:solidFill>
+          <a:ln>
+            <a:noFill/>
+          </a:ln>
+        </p:spPr>
+        <p:style>
+          <a:lnRef idx="1">
+            <a:schemeClr val="accent1"/>
+          </a:lnRef>
+          <a:fillRef idx="3">
+            <a:schemeClr val="accent1"/>
+          </a:fillRef>
+          <a:effectRef idx="2">
+            <a:schemeClr val="accent1"/>
+          </a:effectRef>
+          <a:fontRef idx="minor">
+            <a:schemeClr val="lt1"/>
+          </a:fontRef>
+        </p:style>
+        <p:txBody>
+          <a:bodyPr rtlCol="0" anchor="ctr"/>
+          <a:lstStyle/>
+          <a:p>
             <a:pPr algn="ctr"/>
-            <a:r>
-              <a:rPr sz="1100" b="0" i="1">
-                <a:solidFill>
-                  <a:srgbClr val="6B7380"/>
-                </a:solidFill>
-                <a:latin typeface="Calibri"/>
-              </a:rPr>
-              <a:t>Each request is wrapped in production safety controls</a:t>
-            </a:r>
-          </a:p>
-        </p:txBody>
-      </p:sp>
-      <p:sp>
-        <p:nvSpPr>
-          <p:cNvPr id="14" name="Rounded Rectangle 13"/>
+          </a:p>
+        </p:txBody>
+      </p:sp>
+      <p:sp>
+        <p:nvSpPr>
+          <p:cNvPr id="77" name="TextBox 76"/>
+          <p:cNvSpPr txBox="1"/>
+          <p:nvPr/>
+        </p:nvSpPr>
+        <p:spPr>
+          <a:xfrm>
+            <a:off x="2039112" y="6336792"/>
+            <a:ext cx="1463040" cy="201168"/>
+          </a:xfrm>
+          <a:prstGeom prst="rect">
+            <a:avLst/>
+          </a:prstGeom>
+          <a:noFill/>
+        </p:spPr>
+        <p:txBody>
+          <a:bodyPr wrap="none">
+            <a:spAutoFit/>
+          </a:bodyPr>
+          <a:lstStyle/>
+          <a:p>
+            <a:r>
+              <a:rPr sz="800" b="0" i="0">
+                <a:solidFill>
+                  <a:srgbClr val="333F52"/>
+                </a:solidFill>
+                <a:latin typeface="Calibri"/>
+              </a:rPr>
+              <a:t>ML/AI runtime</a:t>
+            </a:r>
+          </a:p>
+        </p:txBody>
+      </p:sp>
+      <p:sp>
+        <p:nvSpPr>
+          <p:cNvPr id="78" name="Oval 77"/>
           <p:cNvSpPr/>
           <p:nvPr/>
         </p:nvSpPr>
         <p:spPr>
           <a:xfrm>
-            <a:off x="457200" y="3154680"/>
-            <a:ext cx="1554480" cy="822960"/>
-          </a:xfrm>
-          <a:prstGeom prst="roundRect">
-            <a:avLst>
-              <a:gd name="adj" fmla="val 15000"/>
-            </a:avLst>
+            <a:off x="3291840" y="6373368"/>
+            <a:ext cx="109728" cy="109728"/>
+          </a:xfrm>
+          <a:prstGeom prst="ellipse">
+            <a:avLst/>
+          </a:prstGeom>
+          <a:solidFill>
+            <a:srgbClr val="0097A7"/>
+          </a:solidFill>
+          <a:ln>
+            <a:noFill/>
+          </a:ln>
+        </p:spPr>
+        <p:style>
+          <a:lnRef idx="1">
+            <a:schemeClr val="accent1"/>
+          </a:lnRef>
+          <a:fillRef idx="3">
+            <a:schemeClr val="accent1"/>
+          </a:fillRef>
+          <a:effectRef idx="2">
+            <a:schemeClr val="accent1"/>
+          </a:effectRef>
+          <a:fontRef idx="minor">
+            <a:schemeClr val="lt1"/>
+          </a:fontRef>
+        </p:style>
+        <p:txBody>
+          <a:bodyPr rtlCol="0" anchor="ctr"/>
+          <a:lstStyle/>
+          <a:p>
+            <a:pPr algn="ctr"/>
+          </a:p>
+        </p:txBody>
+      </p:sp>
+      <p:sp>
+        <p:nvSpPr>
+          <p:cNvPr id="79" name="TextBox 78"/>
+          <p:cNvSpPr txBox="1"/>
+          <p:nvPr/>
+        </p:nvSpPr>
+        <p:spPr>
+          <a:xfrm>
+            <a:off x="3456432" y="6336792"/>
+            <a:ext cx="1463040" cy="201168"/>
+          </a:xfrm>
+          <a:prstGeom prst="rect">
+            <a:avLst/>
+          </a:prstGeom>
+          <a:noFill/>
+        </p:spPr>
+        <p:txBody>
+          <a:bodyPr wrap="none">
+            <a:spAutoFit/>
+          </a:bodyPr>
+          <a:lstStyle/>
+          <a:p>
+            <a:r>
+              <a:rPr sz="800" b="0" i="0">
+                <a:solidFill>
+                  <a:srgbClr val="333F52"/>
+                </a:solidFill>
+                <a:latin typeface="Calibri"/>
+              </a:rPr>
+              <a:t>ML pipeline</a:t>
+            </a:r>
+          </a:p>
+        </p:txBody>
+      </p:sp>
+      <p:sp>
+        <p:nvSpPr>
+          <p:cNvPr id="80" name="Oval 79"/>
+          <p:cNvSpPr/>
+          <p:nvPr/>
+        </p:nvSpPr>
+        <p:spPr>
+          <a:xfrm>
+            <a:off x="4709160" y="6373368"/>
+            <a:ext cx="109728" cy="109728"/>
+          </a:xfrm>
+          <a:prstGeom prst="ellipse">
+            <a:avLst/>
+          </a:prstGeom>
+          <a:solidFill>
+            <a:srgbClr val="7E57C2"/>
+          </a:solidFill>
+          <a:ln>
+            <a:noFill/>
+          </a:ln>
+        </p:spPr>
+        <p:style>
+          <a:lnRef idx="1">
+            <a:schemeClr val="accent1"/>
+          </a:lnRef>
+          <a:fillRef idx="3">
+            <a:schemeClr val="accent1"/>
+          </a:fillRef>
+          <a:effectRef idx="2">
+            <a:schemeClr val="accent1"/>
+          </a:effectRef>
+          <a:fontRef idx="minor">
+            <a:schemeClr val="lt1"/>
+          </a:fontRef>
+        </p:style>
+        <p:txBody>
+          <a:bodyPr rtlCol="0" anchor="ctr"/>
+          <a:lstStyle/>
+          <a:p>
+            <a:pPr algn="ctr"/>
+          </a:p>
+        </p:txBody>
+      </p:sp>
+      <p:sp>
+        <p:nvSpPr>
+          <p:cNvPr id="81" name="TextBox 80"/>
+          <p:cNvSpPr txBox="1"/>
+          <p:nvPr/>
+        </p:nvSpPr>
+        <p:spPr>
+          <a:xfrm>
+            <a:off x="4873752" y="6336792"/>
+            <a:ext cx="1463040" cy="201168"/>
+          </a:xfrm>
+          <a:prstGeom prst="rect">
+            <a:avLst/>
+          </a:prstGeom>
+          <a:noFill/>
+        </p:spPr>
+        <p:txBody>
+          <a:bodyPr wrap="none">
+            <a:spAutoFit/>
+          </a:bodyPr>
+          <a:lstStyle/>
+          <a:p>
+            <a:r>
+              <a:rPr sz="800" b="0" i="0">
+                <a:solidFill>
+                  <a:srgbClr val="333F52"/>
+                </a:solidFill>
+                <a:latin typeface="Calibri"/>
+              </a:rPr>
+              <a:t>Data warehouse</a:t>
+            </a:r>
+          </a:p>
+        </p:txBody>
+      </p:sp>
+      <p:sp>
+        <p:nvSpPr>
+          <p:cNvPr id="82" name="Oval 81"/>
+          <p:cNvSpPr/>
+          <p:nvPr/>
+        </p:nvSpPr>
+        <p:spPr>
+          <a:xfrm>
+            <a:off x="6126480" y="6373368"/>
+            <a:ext cx="109728" cy="109728"/>
+          </a:xfrm>
+          <a:prstGeom prst="ellipse">
+            <a:avLst/>
+          </a:prstGeom>
+          <a:solidFill>
+            <a:srgbClr val="A96BDB"/>
+          </a:solidFill>
+          <a:ln>
+            <a:noFill/>
+          </a:ln>
+        </p:spPr>
+        <p:style>
+          <a:lnRef idx="1">
+            <a:schemeClr val="accent1"/>
+          </a:lnRef>
+          <a:fillRef idx="3">
+            <a:schemeClr val="accent1"/>
+          </a:fillRef>
+          <a:effectRef idx="2">
+            <a:schemeClr val="accent1"/>
+          </a:effectRef>
+          <a:fontRef idx="minor">
+            <a:schemeClr val="lt1"/>
+          </a:fontRef>
+        </p:style>
+        <p:txBody>
+          <a:bodyPr rtlCol="0" anchor="ctr"/>
+          <a:lstStyle/>
+          <a:p>
+            <a:pPr algn="ctr"/>
+          </a:p>
+        </p:txBody>
+      </p:sp>
+      <p:sp>
+        <p:nvSpPr>
+          <p:cNvPr id="83" name="TextBox 82"/>
+          <p:cNvSpPr txBox="1"/>
+          <p:nvPr/>
+        </p:nvSpPr>
+        <p:spPr>
+          <a:xfrm>
+            <a:off x="6291072" y="6336792"/>
+            <a:ext cx="1463040" cy="201168"/>
+          </a:xfrm>
+          <a:prstGeom prst="rect">
+            <a:avLst/>
+          </a:prstGeom>
+          <a:noFill/>
+        </p:spPr>
+        <p:txBody>
+          <a:bodyPr wrap="none">
+            <a:spAutoFit/>
+          </a:bodyPr>
+          <a:lstStyle/>
+          <a:p>
+            <a:r>
+              <a:rPr sz="800" b="0" i="0">
+                <a:solidFill>
+                  <a:srgbClr val="333F52"/>
+                </a:solidFill>
+                <a:latin typeface="Calibri"/>
+              </a:rPr>
+              <a:t>Pub/Sub</a:t>
+            </a:r>
+          </a:p>
+        </p:txBody>
+      </p:sp>
+      <p:sp>
+        <p:nvSpPr>
+          <p:cNvPr id="84" name="Oval 83"/>
+          <p:cNvSpPr/>
+          <p:nvPr/>
+        </p:nvSpPr>
+        <p:spPr>
+          <a:xfrm>
+            <a:off x="7543800" y="6373368"/>
+            <a:ext cx="109728" cy="109728"/>
+          </a:xfrm>
+          <a:prstGeom prst="ellipse">
+            <a:avLst/>
+          </a:prstGeom>
+          <a:solidFill>
+            <a:srgbClr val="E87B1E"/>
+          </a:solidFill>
+          <a:ln>
+            <a:noFill/>
+          </a:ln>
+        </p:spPr>
+        <p:style>
+          <a:lnRef idx="1">
+            <a:schemeClr val="accent1"/>
+          </a:lnRef>
+          <a:fillRef idx="3">
+            <a:schemeClr val="accent1"/>
+          </a:fillRef>
+          <a:effectRef idx="2">
+            <a:schemeClr val="accent1"/>
+          </a:effectRef>
+          <a:fontRef idx="minor">
+            <a:schemeClr val="lt1"/>
+          </a:fontRef>
+        </p:style>
+        <p:txBody>
+          <a:bodyPr rtlCol="0" anchor="ctr"/>
+          <a:lstStyle/>
+          <a:p>
+            <a:pPr algn="ctr"/>
+          </a:p>
+        </p:txBody>
+      </p:sp>
+      <p:sp>
+        <p:nvSpPr>
+          <p:cNvPr id="85" name="TextBox 84"/>
+          <p:cNvSpPr txBox="1"/>
+          <p:nvPr/>
+        </p:nvSpPr>
+        <p:spPr>
+          <a:xfrm>
+            <a:off x="7708392" y="6336792"/>
+            <a:ext cx="1463040" cy="201168"/>
+          </a:xfrm>
+          <a:prstGeom prst="rect">
+            <a:avLst/>
+          </a:prstGeom>
+          <a:noFill/>
+        </p:spPr>
+        <p:txBody>
+          <a:bodyPr wrap="none">
+            <a:spAutoFit/>
+          </a:bodyPr>
+          <a:lstStyle/>
+          <a:p>
+            <a:r>
+              <a:rPr sz="800" b="0" i="0">
+                <a:solidFill>
+                  <a:srgbClr val="333F52"/>
+                </a:solidFill>
+                <a:latin typeface="Calibri"/>
+              </a:rPr>
+              <a:t>Data flow</a:t>
+            </a:r>
+          </a:p>
+        </p:txBody>
+      </p:sp>
+      <p:sp>
+        <p:nvSpPr>
+          <p:cNvPr id="86" name="Rectangle 85"/>
+          <p:cNvSpPr/>
+          <p:nvPr/>
+        </p:nvSpPr>
+        <p:spPr>
+          <a:xfrm>
+            <a:off x="0" y="6537960"/>
+            <a:ext cx="12191695" cy="320040"/>
+          </a:xfrm>
+          <a:prstGeom prst="rect">
+            <a:avLst/>
           </a:prstGeom>
           <a:solidFill>
             <a:srgbClr val="F4F6FA"/>
@@ -10296,444 +13341,17 @@
           </a:fontRef>
         </p:style>
         <p:txBody>
-          <a:bodyPr rtlCol="0" anchor="ctr" wrap="square"/>
+          <a:bodyPr rtlCol="0" anchor="ctr" lIns="548640" tIns="54864"/>
           <a:lstStyle/>
           <a:p>
             <a:pPr algn="ctr"/>
             <a:r>
-              <a:rPr sz="1300" b="1" i="0">
-                <a:solidFill>
-                  <a:srgbClr val="0B1F3A"/>
-                </a:solidFill>
-                <a:latin typeface="Calibri"/>
-              </a:rPr>
-              <a:t>Timeouts</a:t>
-            </a:r>
-          </a:p>
-          <a:p>
-            <a:pPr algn="ctr"/>
-            <a:r>
               <a:rPr sz="900" b="0" i="0">
                 <a:solidFill>
                   <a:srgbClr val="6B7380"/>
                 </a:solidFill>
                 <a:latin typeface="Calibri"/>
               </a:rPr>
-              <a:t>model + BQ budgets</a:t>
-            </a:r>
-          </a:p>
-        </p:txBody>
-      </p:sp>
-      <p:sp>
-        <p:nvSpPr>
-          <p:cNvPr id="15" name="Rounded Rectangle 14"/>
-          <p:cNvSpPr/>
-          <p:nvPr/>
-        </p:nvSpPr>
-        <p:spPr>
-          <a:xfrm>
-            <a:off x="2148840" y="3154680"/>
-            <a:ext cx="1554480" cy="822960"/>
-          </a:xfrm>
-          <a:prstGeom prst="roundRect">
-            <a:avLst>
-              <a:gd name="adj" fmla="val 15000"/>
-            </a:avLst>
-          </a:prstGeom>
-          <a:solidFill>
-            <a:srgbClr val="F4F6FA"/>
-          </a:solidFill>
-          <a:ln>
-            <a:noFill/>
-          </a:ln>
-        </p:spPr>
-        <p:style>
-          <a:lnRef idx="1">
-            <a:schemeClr val="accent1"/>
-          </a:lnRef>
-          <a:fillRef idx="3">
-            <a:schemeClr val="accent1"/>
-          </a:fillRef>
-          <a:effectRef idx="2">
-            <a:schemeClr val="accent1"/>
-          </a:effectRef>
-          <a:fontRef idx="minor">
-            <a:schemeClr val="lt1"/>
-          </a:fontRef>
-        </p:style>
-        <p:txBody>
-          <a:bodyPr rtlCol="0" anchor="ctr" wrap="square"/>
-          <a:lstStyle/>
-          <a:p>
-            <a:pPr algn="ctr"/>
-            <a:r>
-              <a:rPr sz="1300" b="1" i="0">
-                <a:solidFill>
-                  <a:srgbClr val="0B1F3A"/>
-                </a:solidFill>
-                <a:latin typeface="Calibri"/>
-              </a:rPr>
-              <a:t>Circuit breaker</a:t>
-            </a:r>
-          </a:p>
-          <a:p>
-            <a:pPr algn="ctr"/>
-            <a:r>
-              <a:rPr sz="900" b="0" i="0">
-                <a:solidFill>
-                  <a:srgbClr val="6B7380"/>
-                </a:solidFill>
-                <a:latin typeface="Calibri"/>
-              </a:rPr>
-              <a:t>fail fast, recover</a:t>
-            </a:r>
-          </a:p>
-        </p:txBody>
-      </p:sp>
-      <p:sp>
-        <p:nvSpPr>
-          <p:cNvPr id="16" name="Rounded Rectangle 15"/>
-          <p:cNvSpPr/>
-          <p:nvPr/>
-        </p:nvSpPr>
-        <p:spPr>
-          <a:xfrm>
-            <a:off x="3840480" y="3154680"/>
-            <a:ext cx="1554480" cy="822960"/>
-          </a:xfrm>
-          <a:prstGeom prst="roundRect">
-            <a:avLst>
-              <a:gd name="adj" fmla="val 15000"/>
-            </a:avLst>
-          </a:prstGeom>
-          <a:solidFill>
-            <a:srgbClr val="F4F6FA"/>
-          </a:solidFill>
-          <a:ln>
-            <a:noFill/>
-          </a:ln>
-        </p:spPr>
-        <p:style>
-          <a:lnRef idx="1">
-            <a:schemeClr val="accent1"/>
-          </a:lnRef>
-          <a:fillRef idx="3">
-            <a:schemeClr val="accent1"/>
-          </a:fillRef>
-          <a:effectRef idx="2">
-            <a:schemeClr val="accent1"/>
-          </a:effectRef>
-          <a:fontRef idx="minor">
-            <a:schemeClr val="lt1"/>
-          </a:fontRef>
-        </p:style>
-        <p:txBody>
-          <a:bodyPr rtlCol="0" anchor="ctr" wrap="square"/>
-          <a:lstStyle/>
-          <a:p>
-            <a:pPr algn="ctr"/>
-            <a:r>
-              <a:rPr sz="1300" b="1" i="0">
-                <a:solidFill>
-                  <a:srgbClr val="0B1F3A"/>
-                </a:solidFill>
-                <a:latin typeface="Calibri"/>
-              </a:rPr>
-              <a:t>Anomaly detection</a:t>
-            </a:r>
-          </a:p>
-          <a:p>
-            <a:pPr algn="ctr"/>
-            <a:r>
-              <a:rPr sz="900" b="0" i="0">
-                <a:solidFill>
-                  <a:srgbClr val="6B7380"/>
-                </a:solidFill>
-                <a:latin typeface="Calibri"/>
-              </a:rPr>
-              <a:t>null-rate window</a:t>
-            </a:r>
-          </a:p>
-        </p:txBody>
-      </p:sp>
-      <p:sp>
-        <p:nvSpPr>
-          <p:cNvPr id="17" name="Rounded Rectangle 16"/>
-          <p:cNvSpPr/>
-          <p:nvPr/>
-        </p:nvSpPr>
-        <p:spPr>
-          <a:xfrm>
-            <a:off x="5532120" y="3154680"/>
-            <a:ext cx="1554480" cy="822960"/>
-          </a:xfrm>
-          <a:prstGeom prst="roundRect">
-            <a:avLst>
-              <a:gd name="adj" fmla="val 15000"/>
-            </a:avLst>
-          </a:prstGeom>
-          <a:solidFill>
-            <a:srgbClr val="F4F6FA"/>
-          </a:solidFill>
-          <a:ln>
-            <a:noFill/>
-          </a:ln>
-        </p:spPr>
-        <p:style>
-          <a:lnRef idx="1">
-            <a:schemeClr val="accent1"/>
-          </a:lnRef>
-          <a:fillRef idx="3">
-            <a:schemeClr val="accent1"/>
-          </a:fillRef>
-          <a:effectRef idx="2">
-            <a:schemeClr val="accent1"/>
-          </a:effectRef>
-          <a:fontRef idx="minor">
-            <a:schemeClr val="lt1"/>
-          </a:fontRef>
-        </p:style>
-        <p:txBody>
-          <a:bodyPr rtlCol="0" anchor="ctr" wrap="square"/>
-          <a:lstStyle/>
-          <a:p>
-            <a:pPr algn="ctr"/>
-            <a:r>
-              <a:rPr sz="1300" b="1" i="0">
-                <a:solidFill>
-                  <a:srgbClr val="0B1F3A"/>
-                </a:solidFill>
-                <a:latin typeface="Calibri"/>
-              </a:rPr>
-              <a:t>Range clamp</a:t>
-            </a:r>
-          </a:p>
-          <a:p>
-            <a:pPr algn="ctr"/>
-            <a:r>
-              <a:rPr sz="900" b="0" i="0">
-                <a:solidFill>
-                  <a:srgbClr val="6B7380"/>
-                </a:solidFill>
-                <a:latin typeface="Calibri"/>
-              </a:rPr>
-              <a:t>no negative RPC</a:t>
-            </a:r>
-          </a:p>
-        </p:txBody>
-      </p:sp>
-      <p:sp>
-        <p:nvSpPr>
-          <p:cNvPr id="18" name="Rounded Rectangle 17"/>
-          <p:cNvSpPr/>
-          <p:nvPr/>
-        </p:nvSpPr>
-        <p:spPr>
-          <a:xfrm>
-            <a:off x="7223760" y="3154680"/>
-            <a:ext cx="1554480" cy="822960"/>
-          </a:xfrm>
-          <a:prstGeom prst="roundRect">
-            <a:avLst>
-              <a:gd name="adj" fmla="val 15000"/>
-            </a:avLst>
-          </a:prstGeom>
-          <a:solidFill>
-            <a:srgbClr val="F4F6FA"/>
-          </a:solidFill>
-          <a:ln>
-            <a:noFill/>
-          </a:ln>
-        </p:spPr>
-        <p:style>
-          <a:lnRef idx="1">
-            <a:schemeClr val="accent1"/>
-          </a:lnRef>
-          <a:fillRef idx="3">
-            <a:schemeClr val="accent1"/>
-          </a:fillRef>
-          <a:effectRef idx="2">
-            <a:schemeClr val="accent1"/>
-          </a:effectRef>
-          <a:fontRef idx="minor">
-            <a:schemeClr val="lt1"/>
-          </a:fontRef>
-        </p:style>
-        <p:txBody>
-          <a:bodyPr rtlCol="0" anchor="ctr" wrap="square"/>
-          <a:lstStyle/>
-          <a:p>
-            <a:pPr algn="ctr"/>
-            <a:r>
-              <a:rPr sz="1300" b="1" i="0">
-                <a:solidFill>
-                  <a:srgbClr val="0B1F3A"/>
-                </a:solidFill>
-                <a:latin typeface="Calibri"/>
-              </a:rPr>
-              <a:t>Explanations</a:t>
-            </a:r>
-          </a:p>
-          <a:p>
-            <a:pPr algn="ctr"/>
-            <a:r>
-              <a:rPr sz="900" b="0" i="0">
-                <a:solidFill>
-                  <a:srgbClr val="6B7380"/>
-                </a:solidFill>
-                <a:latin typeface="Calibri"/>
-              </a:rPr>
-              <a:t>per-feature SHAP</a:t>
-            </a:r>
-          </a:p>
-        </p:txBody>
-      </p:sp>
-      <p:sp>
-        <p:nvSpPr>
-          <p:cNvPr id="19" name="TextBox 18"/>
-          <p:cNvSpPr txBox="1"/>
-          <p:nvPr/>
-        </p:nvSpPr>
-        <p:spPr>
-          <a:xfrm>
-            <a:off x="457200" y="4297680"/>
-            <a:ext cx="11277295" cy="1097280"/>
-          </a:xfrm>
-          <a:prstGeom prst="rect">
-            <a:avLst/>
-          </a:prstGeom>
-          <a:noFill/>
-        </p:spPr>
-        <p:txBody>
-          <a:bodyPr wrap="square">
-            <a:spAutoFit/>
-          </a:bodyPr>
-          <a:lstStyle/>
-          <a:p>
-            <a:pPr>
-              <a:spcAft>
-                <a:spcPts val="300"/>
-              </a:spcAft>
-            </a:pPr>
-            <a:r>
-              <a:rPr sz="1400" b="1" i="0">
-                <a:solidFill>
-                  <a:srgbClr val="0F6E7A"/>
-                </a:solidFill>
-                <a:latin typeface="Calibri"/>
-              </a:rPr>
-              <a:t>Why this shape</a:t>
-            </a:r>
-          </a:p>
-          <a:p>
-            <a:r>
-              <a:rPr sz="1200" b="1" i="0">
-                <a:solidFill>
-                  <a:srgbClr val="D97306"/>
-                </a:solidFill>
-                <a:latin typeface="Calibri"/>
-              </a:rPr>
-              <a:t>•  </a:t>
-            </a:r>
-            <a:r>
-              <a:rPr sz="1200" b="0" i="0">
-                <a:solidFill>
-                  <a:srgbClr val="333F52"/>
-                </a:solidFill>
-                <a:latin typeface="Calibri"/>
-              </a:rPr>
-              <a:t>Stateless API tier scales horizontally with traffic — pay only for what you use.</a:t>
-            </a:r>
-          </a:p>
-          <a:p>
-            <a:r>
-              <a:rPr sz="1200" b="1" i="0">
-                <a:solidFill>
-                  <a:srgbClr val="D97306"/>
-                </a:solidFill>
-                <a:latin typeface="Calibri"/>
-              </a:rPr>
-              <a:t>•  </a:t>
-            </a:r>
-            <a:r>
-              <a:rPr sz="1200" b="0" i="0">
-                <a:solidFill>
-                  <a:srgbClr val="333F52"/>
-                </a:solidFill>
-                <a:latin typeface="Calibri"/>
-              </a:rPr>
-              <a:t>Vertex AI hosts the model, so retraining and versioning never touch the API.</a:t>
-            </a:r>
-          </a:p>
-          <a:p>
-            <a:r>
-              <a:rPr sz="1200" b="1" i="0">
-                <a:solidFill>
-                  <a:srgbClr val="D97306"/>
-                </a:solidFill>
-                <a:latin typeface="Calibri"/>
-              </a:rPr>
-              <a:t>•  </a:t>
-            </a:r>
-            <a:r>
-              <a:rPr sz="1200" b="0" i="0">
-                <a:solidFill>
-                  <a:srgbClr val="333F52"/>
-                </a:solidFill>
-                <a:latin typeface="Calibri"/>
-              </a:rPr>
-              <a:t>Every prediction is captured in BigQuery — same dataset your analysts already use.</a:t>
-            </a:r>
-          </a:p>
-        </p:txBody>
-      </p:sp>
-      <p:sp>
-        <p:nvSpPr>
-          <p:cNvPr id="20" name="Rectangle 19"/>
-          <p:cNvSpPr/>
-          <p:nvPr/>
-        </p:nvSpPr>
-        <p:spPr>
-          <a:xfrm>
-            <a:off x="0" y="6537960"/>
-            <a:ext cx="12191695" cy="320040"/>
-          </a:xfrm>
-          <a:prstGeom prst="rect">
-            <a:avLst/>
-          </a:prstGeom>
-          <a:solidFill>
-            <a:srgbClr val="F4F6FA"/>
-          </a:solidFill>
-          <a:ln>
-            <a:noFill/>
-          </a:ln>
-        </p:spPr>
-        <p:style>
-          <a:lnRef idx="1">
-            <a:schemeClr val="accent1"/>
-          </a:lnRef>
-          <a:fillRef idx="3">
-            <a:schemeClr val="accent1"/>
-          </a:fillRef>
-          <a:effectRef idx="2">
-            <a:schemeClr val="accent1"/>
-          </a:effectRef>
-          <a:fontRef idx="minor">
-            <a:schemeClr val="lt1"/>
-          </a:fontRef>
-        </p:style>
-        <p:txBody>
-          <a:bodyPr rtlCol="0" anchor="ctr" lIns="548640" tIns="54864"/>
-          <a:lstStyle/>
-          <a:p>
-            <a:pPr algn="ctr"/>
-            <a:r>
-              <a:rPr sz="900" b="0" i="0">
-                <a:solidFill>
-                  <a:srgbClr val="6B7380"/>
-                </a:solidFill>
-                <a:latin typeface="Calibri"/>
-              </a:rPr>
               <a:t>Predictive RPC Estimator — Client Demo</a:t>
             </a:r>
           </a:p>
@@ -10741,7 +13359,7 @@
       </p:sp>
       <p:sp>
         <p:nvSpPr>
-          <p:cNvPr id="21" name="TextBox 20"/>
+          <p:cNvPr id="87" name="TextBox 86"/>
           <p:cNvSpPr txBox="1"/>
           <p:nvPr/>
         </p:nvSpPr>
@@ -10769,7 +13387,7 @@
                 </a:solidFill>
                 <a:latin typeface="Calibri"/>
               </a:rPr>
-              <a:t>5 / 15</a:t>
+              <a:t>6 / 15</a:t>
             </a:r>
           </a:p>
         </p:txBody>

--- a/docs/client-demo-deck.pptx
+++ b/docs/client-demo-deck.pptx
@@ -9761,20 +9761,20 @@
         </p:nvSpPr>
         <p:spPr>
           <a:xfrm>
-            <a:off x="1188720" y="1051560"/>
-            <a:ext cx="10424160" cy="5303520"/>
+            <a:off x="365760" y="1005840"/>
+            <a:ext cx="11460175" cy="5120640"/>
           </a:xfrm>
           <a:prstGeom prst="roundRect">
             <a:avLst>
-              <a:gd name="adj" fmla="val 2000"/>
+              <a:gd name="adj" fmla="val 1500"/>
             </a:avLst>
           </a:prstGeom>
           <a:solidFill>
-            <a:srgbClr val="ECEFF4"/>
+            <a:srgbClr val="F1F3F8"/>
           </a:solidFill>
           <a:ln w="12700">
             <a:solidFill>
-              <a:srgbClr val="B8BFCC"/>
+              <a:srgbClr val="C9CFDA"/>
             </a:solidFill>
           </a:ln>
         </p:spPr>
@@ -9808,8 +9808,8 @@
         </p:nvSpPr>
         <p:spPr>
           <a:xfrm>
-            <a:off x="1325880" y="1097280"/>
-            <a:ext cx="5486400" cy="320040"/>
+            <a:off x="530352" y="1060704"/>
+            <a:ext cx="7315200" cy="274320"/>
           </a:xfrm>
           <a:prstGeom prst="rect">
             <a:avLst/>
@@ -9823,7 +9823,7 @@
           <a:lstStyle/>
           <a:p>
             <a:r>
-              <a:rPr sz="1200" b="1" i="0">
+              <a:rPr sz="1100" b="1" i="0">
                 <a:solidFill>
                   <a:srgbClr val="0B1F3A"/>
                 </a:solidFill>
@@ -9832,7 +9832,7 @@
               <a:t>Google Cloud Platform</a:t>
             </a:r>
             <a:r>
-              <a:rPr sz="1100" b="0" i="1">
+              <a:rPr sz="1000" b="0" i="1">
                 <a:solidFill>
                   <a:srgbClr val="6B7380"/>
                 </a:solidFill>
@@ -9845,14 +9845,449 @@
       </p:sp>
       <p:sp>
         <p:nvSpPr>
-          <p:cNvPr id="6" name="Oval 5"/>
+          <p:cNvPr id="6" name="Rectangle 5"/>
           <p:cNvSpPr/>
           <p:nvPr/>
         </p:nvSpPr>
         <p:spPr>
           <a:xfrm>
-            <a:off x="137160" y="1828800"/>
-            <a:ext cx="292608" cy="292608"/>
+            <a:off x="594360" y="1463040"/>
+            <a:ext cx="11002975" cy="1325880"/>
+          </a:xfrm>
+          <a:prstGeom prst="rect">
+            <a:avLst/>
+          </a:prstGeom>
+          <a:solidFill>
+            <a:srgbClr val="E8EFF7"/>
+          </a:solidFill>
+          <a:ln w="6350">
+            <a:solidFill>
+              <a:srgbClr val="C9CFDA"/>
+            </a:solidFill>
+          </a:ln>
+        </p:spPr>
+        <p:style>
+          <a:lnRef idx="1">
+            <a:schemeClr val="accent1"/>
+          </a:lnRef>
+          <a:fillRef idx="3">
+            <a:schemeClr val="accent1"/>
+          </a:fillRef>
+          <a:effectRef idx="2">
+            <a:schemeClr val="accent1"/>
+          </a:effectRef>
+          <a:fontRef idx="minor">
+            <a:schemeClr val="lt1"/>
+          </a:fontRef>
+        </p:style>
+        <p:txBody>
+          <a:bodyPr rtlCol="0" anchor="ctr"/>
+          <a:lstStyle/>
+          <a:p>
+            <a:pPr algn="ctr"/>
+          </a:p>
+        </p:txBody>
+      </p:sp>
+      <p:sp>
+        <p:nvSpPr>
+          <p:cNvPr id="7" name="TextBox 6"/>
+          <p:cNvSpPr txBox="1"/>
+          <p:nvPr/>
+        </p:nvSpPr>
+        <p:spPr>
+          <a:xfrm>
+            <a:off x="685800" y="1508760"/>
+            <a:ext cx="2743200" cy="228600"/>
+          </a:xfrm>
+          <a:prstGeom prst="rect">
+            <a:avLst/>
+          </a:prstGeom>
+          <a:noFill/>
+        </p:spPr>
+        <p:txBody>
+          <a:bodyPr wrap="none">
+            <a:spAutoFit/>
+          </a:bodyPr>
+          <a:lstStyle/>
+          <a:p>
+            <a:r>
+              <a:rPr sz="800" b="1" i="0">
+                <a:solidFill>
+                  <a:srgbClr val="6B7380"/>
+                </a:solidFill>
+                <a:latin typeface="Calibri"/>
+              </a:rPr>
+              <a:t>HOT PATH · SERVING</a:t>
+            </a:r>
+          </a:p>
+        </p:txBody>
+      </p:sp>
+      <p:sp>
+        <p:nvSpPr>
+          <p:cNvPr id="8" name="Rectangle 7"/>
+          <p:cNvSpPr/>
+          <p:nvPr/>
+        </p:nvSpPr>
+        <p:spPr>
+          <a:xfrm>
+            <a:off x="594360" y="2926080"/>
+            <a:ext cx="11002975" cy="1325880"/>
+          </a:xfrm>
+          <a:prstGeom prst="rect">
+            <a:avLst/>
+          </a:prstGeom>
+          <a:solidFill>
+            <a:srgbClr val="F1ECF8"/>
+          </a:solidFill>
+          <a:ln w="6350">
+            <a:solidFill>
+              <a:srgbClr val="C9CFDA"/>
+            </a:solidFill>
+          </a:ln>
+        </p:spPr>
+        <p:style>
+          <a:lnRef idx="1">
+            <a:schemeClr val="accent1"/>
+          </a:lnRef>
+          <a:fillRef idx="3">
+            <a:schemeClr val="accent1"/>
+          </a:fillRef>
+          <a:effectRef idx="2">
+            <a:schemeClr val="accent1"/>
+          </a:effectRef>
+          <a:fontRef idx="minor">
+            <a:schemeClr val="lt1"/>
+          </a:fontRef>
+        </p:style>
+        <p:txBody>
+          <a:bodyPr rtlCol="0" anchor="ctr"/>
+          <a:lstStyle/>
+          <a:p>
+            <a:pPr algn="ctr"/>
+          </a:p>
+        </p:txBody>
+      </p:sp>
+      <p:sp>
+        <p:nvSpPr>
+          <p:cNvPr id="9" name="TextBox 8"/>
+          <p:cNvSpPr txBox="1"/>
+          <p:nvPr/>
+        </p:nvSpPr>
+        <p:spPr>
+          <a:xfrm>
+            <a:off x="685800" y="2971800"/>
+            <a:ext cx="2743200" cy="228600"/>
+          </a:xfrm>
+          <a:prstGeom prst="rect">
+            <a:avLst/>
+          </a:prstGeom>
+          <a:noFill/>
+        </p:spPr>
+        <p:txBody>
+          <a:bodyPr wrap="none">
+            <a:spAutoFit/>
+          </a:bodyPr>
+          <a:lstStyle/>
+          <a:p>
+            <a:r>
+              <a:rPr sz="800" b="1" i="0">
+                <a:solidFill>
+                  <a:srgbClr val="6B7380"/>
+                </a:solidFill>
+                <a:latin typeface="Calibri"/>
+              </a:rPr>
+              <a:t>DATA PLANE · WAREHOUSE AND TRAINING</a:t>
+            </a:r>
+          </a:p>
+        </p:txBody>
+      </p:sp>
+      <p:sp>
+        <p:nvSpPr>
+          <p:cNvPr id="10" name="Rectangle 9"/>
+          <p:cNvSpPr/>
+          <p:nvPr/>
+        </p:nvSpPr>
+        <p:spPr>
+          <a:xfrm>
+            <a:off x="594360" y="4389120"/>
+            <a:ext cx="11002975" cy="1325880"/>
+          </a:xfrm>
+          <a:prstGeom prst="rect">
+            <a:avLst/>
+          </a:prstGeom>
+          <a:solidFill>
+            <a:srgbClr val="ECF3EE"/>
+          </a:solidFill>
+          <a:ln w="6350">
+            <a:solidFill>
+              <a:srgbClr val="C9CFDA"/>
+            </a:solidFill>
+          </a:ln>
+        </p:spPr>
+        <p:style>
+          <a:lnRef idx="1">
+            <a:schemeClr val="accent1"/>
+          </a:lnRef>
+          <a:fillRef idx="3">
+            <a:schemeClr val="accent1"/>
+          </a:fillRef>
+          <a:effectRef idx="2">
+            <a:schemeClr val="accent1"/>
+          </a:effectRef>
+          <a:fontRef idx="minor">
+            <a:schemeClr val="lt1"/>
+          </a:fontRef>
+        </p:style>
+        <p:txBody>
+          <a:bodyPr rtlCol="0" anchor="ctr"/>
+          <a:lstStyle/>
+          <a:p>
+            <a:pPr algn="ctr"/>
+          </a:p>
+        </p:txBody>
+      </p:sp>
+      <p:sp>
+        <p:nvSpPr>
+          <p:cNvPr id="11" name="TextBox 10"/>
+          <p:cNvSpPr txBox="1"/>
+          <p:nvPr/>
+        </p:nvSpPr>
+        <p:spPr>
+          <a:xfrm>
+            <a:off x="685800" y="4434840"/>
+            <a:ext cx="2743200" cy="228600"/>
+          </a:xfrm>
+          <a:prstGeom prst="rect">
+            <a:avLst/>
+          </a:prstGeom>
+          <a:noFill/>
+        </p:spPr>
+        <p:txBody>
+          <a:bodyPr wrap="none">
+            <a:spAutoFit/>
+          </a:bodyPr>
+          <a:lstStyle/>
+          <a:p>
+            <a:r>
+              <a:rPr sz="800" b="1" i="0">
+                <a:solidFill>
+                  <a:srgbClr val="6B7380"/>
+                </a:solidFill>
+                <a:latin typeface="Calibri"/>
+              </a:rPr>
+              <a:t>CONSUMPTION · RESILIENCE AND ACTIVATION</a:t>
+            </a:r>
+          </a:p>
+        </p:txBody>
+      </p:sp>
+      <p:sp>
+        <p:nvSpPr>
+          <p:cNvPr id="12" name="Rounded Rectangle 11"/>
+          <p:cNvSpPr/>
+          <p:nvPr/>
+        </p:nvSpPr>
+        <p:spPr>
+          <a:xfrm>
+            <a:off x="1554480" y="1874520"/>
+            <a:ext cx="2560320" cy="777240"/>
+          </a:xfrm>
+          <a:prstGeom prst="roundRect">
+            <a:avLst>
+              <a:gd name="adj" fmla="val 10000"/>
+            </a:avLst>
+          </a:prstGeom>
+          <a:solidFill>
+            <a:srgbClr val="4E88E6"/>
+          </a:solidFill>
+          <a:ln>
+            <a:noFill/>
+          </a:ln>
+        </p:spPr>
+        <p:style>
+          <a:lnRef idx="1">
+            <a:schemeClr val="accent1"/>
+          </a:lnRef>
+          <a:fillRef idx="3">
+            <a:schemeClr val="accent1"/>
+          </a:fillRef>
+          <a:effectRef idx="2">
+            <a:schemeClr val="accent1"/>
+          </a:effectRef>
+          <a:fontRef idx="minor">
+            <a:schemeClr val="lt1"/>
+          </a:fontRef>
+        </p:style>
+        <p:txBody>
+          <a:bodyPr rtlCol="0" anchor="ctr" lIns="73152" rIns="73152" wrap="square"/>
+          <a:lstStyle/>
+          <a:p>
+            <a:pPr algn="ctr"/>
+            <a:r>
+              <a:rPr sz="1100" b="1" i="0">
+                <a:solidFill>
+                  <a:srgbClr val="FFFFFF"/>
+                </a:solidFill>
+                <a:latin typeface="Calibri"/>
+              </a:rPr>
+              <a:t>Scoring API</a:t>
+            </a:r>
+          </a:p>
+          <a:p>
+            <a:pPr algn="ctr"/>
+            <a:r>
+              <a:rPr sz="800" b="0" i="0">
+                <a:solidFill>
+                  <a:srgbClr val="FFFFFF"/>
+                </a:solidFill>
+                <a:latin typeface="Calibri"/>
+              </a:rPr>
+              <a:t>Rust 1.89  ·  Cloud Run</a:t>
+            </a:r>
+          </a:p>
+        </p:txBody>
+      </p:sp>
+      <p:sp>
+        <p:nvSpPr>
+          <p:cNvPr id="13" name="Rounded Rectangle 12"/>
+          <p:cNvSpPr/>
+          <p:nvPr/>
+        </p:nvSpPr>
+        <p:spPr>
+          <a:xfrm>
+            <a:off x="4937760" y="1874520"/>
+            <a:ext cx="2377440" cy="777240"/>
+          </a:xfrm>
+          <a:prstGeom prst="roundRect">
+            <a:avLst>
+              <a:gd name="adj" fmla="val 10000"/>
+            </a:avLst>
+          </a:prstGeom>
+          <a:solidFill>
+            <a:srgbClr val="34A853"/>
+          </a:solidFill>
+          <a:ln>
+            <a:noFill/>
+          </a:ln>
+        </p:spPr>
+        <p:style>
+          <a:lnRef idx="1">
+            <a:schemeClr val="accent1"/>
+          </a:lnRef>
+          <a:fillRef idx="3">
+            <a:schemeClr val="accent1"/>
+          </a:fillRef>
+          <a:effectRef idx="2">
+            <a:schemeClr val="accent1"/>
+          </a:effectRef>
+          <a:fontRef idx="minor">
+            <a:schemeClr val="lt1"/>
+          </a:fontRef>
+        </p:style>
+        <p:txBody>
+          <a:bodyPr rtlCol="0" anchor="ctr" lIns="73152" rIns="73152" wrap="square"/>
+          <a:lstStyle/>
+          <a:p>
+            <a:pPr algn="ctr"/>
+            <a:r>
+              <a:rPr sz="1100" b="1" i="0">
+                <a:solidFill>
+                  <a:srgbClr val="FFFFFF"/>
+                </a:solidFill>
+                <a:latin typeface="Calibri"/>
+              </a:rPr>
+              <a:t>Vertex AI Endpoint</a:t>
+            </a:r>
+          </a:p>
+          <a:p>
+            <a:pPr algn="ctr"/>
+            <a:r>
+              <a:rPr sz="800" b="0" i="0">
+                <a:solidFill>
+                  <a:srgbClr val="FFFFFF"/>
+                </a:solidFill>
+                <a:latin typeface="Calibri"/>
+              </a:rPr>
+              <a:t>XGBoost regressor</a:t>
+            </a:r>
+          </a:p>
+        </p:txBody>
+      </p:sp>
+      <p:sp>
+        <p:nvSpPr>
+          <p:cNvPr id="14" name="Rounded Rectangle 13"/>
+          <p:cNvSpPr/>
+          <p:nvPr/>
+        </p:nvSpPr>
+        <p:spPr>
+          <a:xfrm>
+            <a:off x="9052560" y="1874520"/>
+            <a:ext cx="2377440" cy="777240"/>
+          </a:xfrm>
+          <a:prstGeom prst="roundRect">
+            <a:avLst>
+              <a:gd name="adj" fmla="val 10000"/>
+            </a:avLst>
+          </a:prstGeom>
+          <a:solidFill>
+            <a:srgbClr val="4E88E6"/>
+          </a:solidFill>
+          <a:ln>
+            <a:noFill/>
+          </a:ln>
+        </p:spPr>
+        <p:style>
+          <a:lnRef idx="1">
+            <a:schemeClr val="accent1"/>
+          </a:lnRef>
+          <a:fillRef idx="3">
+            <a:schemeClr val="accent1"/>
+          </a:fillRef>
+          <a:effectRef idx="2">
+            <a:schemeClr val="accent1"/>
+          </a:effectRef>
+          <a:fontRef idx="minor">
+            <a:schemeClr val="lt1"/>
+          </a:fontRef>
+        </p:style>
+        <p:txBody>
+          <a:bodyPr rtlCol="0" anchor="ctr" lIns="73152" rIns="73152" wrap="square"/>
+          <a:lstStyle/>
+          <a:p>
+            <a:pPr algn="ctr"/>
+            <a:r>
+              <a:rPr sz="1100" b="1" i="0">
+                <a:solidFill>
+                  <a:srgbClr val="FFFFFF"/>
+                </a:solidFill>
+                <a:latin typeface="Calibri"/>
+              </a:rPr>
+              <a:t>Dashboard UI</a:t>
+            </a:r>
+          </a:p>
+          <a:p>
+            <a:pPr algn="ctr"/>
+            <a:r>
+              <a:rPr sz="800" b="0" i="0">
+                <a:solidFill>
+                  <a:srgbClr val="FFFFFF"/>
+                </a:solidFill>
+                <a:latin typeface="Calibri"/>
+              </a:rPr>
+              <a:t>TypeScript · React · nginx · Cloud Run</a:t>
+            </a:r>
+          </a:p>
+        </p:txBody>
+      </p:sp>
+      <p:sp>
+        <p:nvSpPr>
+          <p:cNvPr id="15" name="Oval 14"/>
+          <p:cNvSpPr/>
+          <p:nvPr/>
+        </p:nvSpPr>
+        <p:spPr>
+          <a:xfrm>
+            <a:off x="777240" y="1920240"/>
+            <a:ext cx="201168" cy="201168"/>
           </a:xfrm>
           <a:prstGeom prst="ellipse">
             <a:avLst/>
@@ -9888,14 +10323,14 @@
       </p:sp>
       <p:sp>
         <p:nvSpPr>
-          <p:cNvPr id="7" name="Isosceles Triangle 6"/>
+          <p:cNvPr id="16" name="Isosceles Triangle 15"/>
           <p:cNvSpPr/>
           <p:nvPr/>
         </p:nvSpPr>
         <p:spPr>
           <a:xfrm>
-            <a:off x="91440" y="2084832"/>
-            <a:ext cx="384048" cy="411480"/>
+            <a:off x="640080" y="2103120"/>
+            <a:ext cx="475488" cy="384048"/>
           </a:xfrm>
           <a:prstGeom prst="triangle">
             <a:avLst/>
@@ -9931,14 +10366,14 @@
       </p:sp>
       <p:sp>
         <p:nvSpPr>
-          <p:cNvPr id="8" name="TextBox 7"/>
+          <p:cNvPr id="17" name="TextBox 16"/>
           <p:cNvSpPr txBox="1"/>
           <p:nvPr/>
         </p:nvSpPr>
         <p:spPr>
           <a:xfrm>
-            <a:off x="-228600" y="2514600"/>
-            <a:ext cx="1024128" cy="502920"/>
+            <a:off x="457200" y="2514600"/>
+            <a:ext cx="841248" cy="274320"/>
           </a:xfrm>
           <a:prstGeom prst="rect">
             <a:avLst/>
@@ -9946,7 +10381,7 @@
           <a:noFill/>
         </p:spPr>
         <p:txBody>
-          <a:bodyPr wrap="square">
+          <a:bodyPr wrap="none">
             <a:spAutoFit/>
           </a:bodyPr>
           <a:lstStyle/>
@@ -9962,30 +10397,18 @@
               <a:t>Client</a:t>
             </a:r>
           </a:p>
-          <a:p>
-            <a:pPr algn="ctr"/>
-            <a:r>
-              <a:rPr sz="800" b="0" i="0">
-                <a:solidFill>
-                  <a:srgbClr val="6B7380"/>
-                </a:solidFill>
-                <a:latin typeface="Calibri"/>
-              </a:rPr>
-              <a:t>Ad bidding systems</a:t>
-            </a:r>
-          </a:p>
-        </p:txBody>
-      </p:sp>
-      <p:sp>
-        <p:nvSpPr>
-          <p:cNvPr id="9" name="Oval 8"/>
+        </p:txBody>
+      </p:sp>
+      <p:sp>
+        <p:nvSpPr>
+          <p:cNvPr id="18" name="Oval 17"/>
           <p:cNvSpPr/>
           <p:nvPr/>
         </p:nvSpPr>
         <p:spPr>
           <a:xfrm>
-            <a:off x="11567160" y="1828800"/>
-            <a:ext cx="292608" cy="292608"/>
+            <a:off x="11155680" y="1920240"/>
+            <a:ext cx="201168" cy="201168"/>
           </a:xfrm>
           <a:prstGeom prst="ellipse">
             <a:avLst/>
@@ -10021,14 +10444,14 @@
       </p:sp>
       <p:sp>
         <p:nvSpPr>
-          <p:cNvPr id="10" name="Isosceles Triangle 9"/>
+          <p:cNvPr id="19" name="Isosceles Triangle 18"/>
           <p:cNvSpPr/>
           <p:nvPr/>
         </p:nvSpPr>
         <p:spPr>
           <a:xfrm>
-            <a:off x="11521440" y="2084832"/>
-            <a:ext cx="384048" cy="411480"/>
+            <a:off x="11018520" y="2103120"/>
+            <a:ext cx="475488" cy="384048"/>
           </a:xfrm>
           <a:prstGeom prst="triangle">
             <a:avLst/>
@@ -10064,14 +10487,14 @@
       </p:sp>
       <p:sp>
         <p:nvSpPr>
-          <p:cNvPr id="11" name="TextBox 10"/>
+          <p:cNvPr id="20" name="TextBox 19"/>
           <p:cNvSpPr txBox="1"/>
           <p:nvPr/>
         </p:nvSpPr>
         <p:spPr>
           <a:xfrm>
-            <a:off x="11201400" y="2514600"/>
-            <a:ext cx="1024128" cy="502920"/>
+            <a:off x="10835640" y="2514600"/>
+            <a:ext cx="841248" cy="274320"/>
           </a:xfrm>
           <a:prstGeom prst="rect">
             <a:avLst/>
@@ -10079,7 +10502,7 @@
           <a:noFill/>
         </p:spPr>
         <p:txBody>
-          <a:bodyPr wrap="square">
+          <a:bodyPr wrap="none">
             <a:spAutoFit/>
           </a:bodyPr>
           <a:lstStyle/>
@@ -10095,30 +10518,514 @@
               <a:t>Executive</a:t>
             </a:r>
           </a:p>
+        </p:txBody>
+      </p:sp>
+      <p:cxnSp>
+        <p:nvCxnSpPr>
+          <p:cNvPr id="21" name="Connector 20"/>
+          <p:cNvCxnSpPr/>
+          <p:nvPr/>
+        </p:nvCxnSpPr>
+        <p:spPr>
+          <a:xfrm>
+            <a:off x="1143000" y="2226564.0"/>
+            <a:ext cx="411480" cy="0.0"/>
+          </a:xfrm>
+          <a:prstGeom prst="line">
+            <a:avLst/>
+          </a:prstGeom>
+          <a:ln w="15875">
+            <a:solidFill>
+              <a:srgbClr val="46556B"/>
+            </a:solidFill>
+            <a:tailEnd type="triangle" w="med" h="med"/>
+          </a:ln>
+        </p:spPr>
+        <p:style>
+          <a:lnRef idx="2">
+            <a:schemeClr val="accent1"/>
+          </a:lnRef>
+          <a:fillRef idx="0">
+            <a:schemeClr val="accent1"/>
+          </a:fillRef>
+          <a:effectRef idx="1">
+            <a:schemeClr val="accent1"/>
+          </a:effectRef>
+          <a:fontRef idx="minor">
+            <a:schemeClr val="tx1"/>
+          </a:fontRef>
+        </p:style>
+      </p:cxnSp>
+      <p:sp>
+        <p:nvSpPr>
+          <p:cNvPr id="22" name="TextBox 21"/>
+          <p:cNvSpPr txBox="1"/>
+          <p:nvPr/>
+        </p:nvSpPr>
+        <p:spPr>
+          <a:xfrm>
+            <a:off x="1143000" y="1970532"/>
+            <a:ext cx="502920" cy="182880"/>
+          </a:xfrm>
+          <a:prstGeom prst="rect">
+            <a:avLst/>
+          </a:prstGeom>
+          <a:noFill/>
+        </p:spPr>
+        <p:txBody>
+          <a:bodyPr wrap="square" lIns="18288" rIns="18288" tIns="0" bIns="0">
+            <a:spAutoFit/>
+          </a:bodyPr>
+          <a:lstStyle/>
           <a:p>
             <a:pPr algn="ctr"/>
             <a:r>
+              <a:rPr sz="700" b="0" i="1">
+                <a:solidFill>
+                  <a:srgbClr val="6B7380"/>
+                </a:solidFill>
+                <a:latin typeface="Calibri"/>
+              </a:rPr>
+              <a:t>HTTPS</a:t>
+            </a:r>
+          </a:p>
+        </p:txBody>
+      </p:sp>
+      <p:cxnSp>
+        <p:nvCxnSpPr>
+          <p:cNvPr id="23" name="Connector 22"/>
+          <p:cNvCxnSpPr/>
+          <p:nvPr/>
+        </p:nvCxnSpPr>
+        <p:spPr>
+          <a:xfrm>
+            <a:off x="4114800" y="2125980.0"/>
+            <a:ext cx="822960" cy="0.0"/>
+          </a:xfrm>
+          <a:prstGeom prst="line">
+            <a:avLst/>
+          </a:prstGeom>
+          <a:ln w="15875">
+            <a:solidFill>
+              <a:srgbClr val="46556B"/>
+            </a:solidFill>
+            <a:tailEnd type="triangle" w="med" h="med"/>
+          </a:ln>
+        </p:spPr>
+        <p:style>
+          <a:lnRef idx="2">
+            <a:schemeClr val="accent1"/>
+          </a:lnRef>
+          <a:fillRef idx="0">
+            <a:schemeClr val="accent1"/>
+          </a:fillRef>
+          <a:effectRef idx="1">
+            <a:schemeClr val="accent1"/>
+          </a:effectRef>
+          <a:fontRef idx="minor">
+            <a:schemeClr val="tx1"/>
+          </a:fontRef>
+        </p:style>
+      </p:cxnSp>
+      <p:sp>
+        <p:nvSpPr>
+          <p:cNvPr id="24" name="TextBox 23"/>
+          <p:cNvSpPr txBox="1"/>
+          <p:nvPr/>
+        </p:nvSpPr>
+        <p:spPr>
+          <a:xfrm>
+            <a:off x="4114800" y="1933956"/>
+            <a:ext cx="822960" cy="182880"/>
+          </a:xfrm>
+          <a:prstGeom prst="rect">
+            <a:avLst/>
+          </a:prstGeom>
+          <a:noFill/>
+        </p:spPr>
+        <p:txBody>
+          <a:bodyPr wrap="square" lIns="18288" rIns="18288" tIns="0" bIns="0">
+            <a:spAutoFit/>
+          </a:bodyPr>
+          <a:lstStyle/>
+          <a:p>
+            <a:pPr algn="ctr"/>
+            <a:r>
+              <a:rPr sz="700" b="0" i="1">
+                <a:solidFill>
+                  <a:srgbClr val="6B7380"/>
+                </a:solidFill>
+                <a:latin typeface="Calibri"/>
+              </a:rPr>
+              <a:t>predict</a:t>
+            </a:r>
+          </a:p>
+        </p:txBody>
+      </p:sp>
+      <p:cxnSp>
+        <p:nvCxnSpPr>
+          <p:cNvPr id="25" name="Connector 24"/>
+          <p:cNvCxnSpPr/>
+          <p:nvPr/>
+        </p:nvCxnSpPr>
+        <p:spPr>
+          <a:xfrm flipH="1">
+            <a:off x="4114800" y="2400300.0"/>
+            <a:ext cx="822960" cy="0.0"/>
+          </a:xfrm>
+          <a:prstGeom prst="line">
+            <a:avLst/>
+          </a:prstGeom>
+          <a:ln w="15875">
+            <a:solidFill>
+              <a:srgbClr val="46556B"/>
+            </a:solidFill>
+            <a:tailEnd type="triangle" w="med" h="med"/>
+          </a:ln>
+        </p:spPr>
+        <p:style>
+          <a:lnRef idx="2">
+            <a:schemeClr val="accent1"/>
+          </a:lnRef>
+          <a:fillRef idx="0">
+            <a:schemeClr val="accent1"/>
+          </a:fillRef>
+          <a:effectRef idx="1">
+            <a:schemeClr val="accent1"/>
+          </a:effectRef>
+          <a:fontRef idx="minor">
+            <a:schemeClr val="tx1"/>
+          </a:fontRef>
+        </p:style>
+      </p:cxnSp>
+      <p:sp>
+        <p:nvSpPr>
+          <p:cNvPr id="26" name="TextBox 25"/>
+          <p:cNvSpPr txBox="1"/>
+          <p:nvPr/>
+        </p:nvSpPr>
+        <p:spPr>
+          <a:xfrm>
+            <a:off x="4114800" y="2400300"/>
+            <a:ext cx="822960" cy="182880"/>
+          </a:xfrm>
+          <a:prstGeom prst="rect">
+            <a:avLst/>
+          </a:prstGeom>
+          <a:noFill/>
+        </p:spPr>
+        <p:txBody>
+          <a:bodyPr wrap="square" lIns="18288" rIns="18288" tIns="0" bIns="0">
+            <a:spAutoFit/>
+          </a:bodyPr>
+          <a:lstStyle/>
+          <a:p>
+            <a:pPr algn="ctr"/>
+            <a:r>
+              <a:rPr sz="700" b="0" i="1">
+                <a:solidFill>
+                  <a:srgbClr val="6B7380"/>
+                </a:solidFill>
+                <a:latin typeface="Calibri"/>
+              </a:rPr>
+              <a:t>predicted_rpc</a:t>
+            </a:r>
+          </a:p>
+        </p:txBody>
+      </p:sp>
+      <p:cxnSp>
+        <p:nvCxnSpPr>
+          <p:cNvPr id="27" name="Connector 26"/>
+          <p:cNvCxnSpPr/>
+          <p:nvPr/>
+        </p:nvCxnSpPr>
+        <p:spPr>
+          <a:xfrm flipH="1">
+            <a:off x="11430000" y="2263140.0"/>
+            <a:ext cx="45720" cy="0.0"/>
+          </a:xfrm>
+          <a:prstGeom prst="line">
+            <a:avLst/>
+          </a:prstGeom>
+          <a:ln w="15875">
+            <a:solidFill>
+              <a:srgbClr val="46556B"/>
+            </a:solidFill>
+            <a:tailEnd type="triangle" w="med" h="med"/>
+          </a:ln>
+        </p:spPr>
+        <p:style>
+          <a:lnRef idx="2">
+            <a:schemeClr val="accent1"/>
+          </a:lnRef>
+          <a:fillRef idx="0">
+            <a:schemeClr val="accent1"/>
+          </a:fillRef>
+          <a:effectRef idx="1">
+            <a:schemeClr val="accent1"/>
+          </a:effectRef>
+          <a:fontRef idx="minor">
+            <a:schemeClr val="tx1"/>
+          </a:fontRef>
+        </p:style>
+      </p:cxnSp>
+      <p:sp>
+        <p:nvSpPr>
+          <p:cNvPr id="28" name="Hexagon 27"/>
+          <p:cNvSpPr/>
+          <p:nvPr/>
+        </p:nvSpPr>
+        <p:spPr>
+          <a:xfrm>
+            <a:off x="2240280" y="3383280"/>
+            <a:ext cx="1188720" cy="502920"/>
+          </a:xfrm>
+          <a:prstGeom prst="hexagon">
+            <a:avLst/>
+          </a:prstGeom>
+          <a:solidFill>
+            <a:srgbClr val="A06CD6"/>
+          </a:solidFill>
+          <a:ln>
+            <a:noFill/>
+          </a:ln>
+        </p:spPr>
+        <p:style>
+          <a:lnRef idx="1">
+            <a:schemeClr val="accent1"/>
+          </a:lnRef>
+          <a:fillRef idx="3">
+            <a:schemeClr val="accent1"/>
+          </a:fillRef>
+          <a:effectRef idx="2">
+            <a:schemeClr val="accent1"/>
+          </a:effectRef>
+          <a:fontRef idx="minor">
+            <a:schemeClr val="lt1"/>
+          </a:fontRef>
+        </p:style>
+        <p:txBody>
+          <a:bodyPr rtlCol="0" anchor="ctr"/>
+          <a:lstStyle/>
+          <a:p>
+            <a:pPr algn="ctr"/>
+            <a:r>
+              <a:rPr sz="900" b="1" i="0">
+                <a:solidFill>
+                  <a:srgbClr val="FFFFFF"/>
+                </a:solidFill>
+                <a:latin typeface="Calibri"/>
+              </a:rPr>
+              <a:t>Pub/Sub</a:t>
+            </a:r>
+          </a:p>
+        </p:txBody>
+      </p:sp>
+      <p:sp>
+        <p:nvSpPr>
+          <p:cNvPr id="29" name="TextBox 28"/>
+          <p:cNvSpPr txBox="1"/>
+          <p:nvPr/>
+        </p:nvSpPr>
+        <p:spPr>
+          <a:xfrm>
+            <a:off x="2103120" y="3904488"/>
+            <a:ext cx="1463040" cy="201168"/>
+          </a:xfrm>
+          <a:prstGeom prst="rect">
+            <a:avLst/>
+          </a:prstGeom>
+          <a:noFill/>
+        </p:spPr>
+        <p:txBody>
+          <a:bodyPr wrap="none">
+            <a:spAutoFit/>
+          </a:bodyPr>
+          <a:lstStyle/>
+          <a:p>
+            <a:pPr algn="ctr"/>
+            <a:r>
               <a:rPr sz="800" b="0" i="0">
                 <a:solidFill>
-                  <a:srgbClr val="6B7380"/>
-                </a:solidFill>
-                <a:latin typeface="Calibri"/>
-              </a:rPr>
-              <a:t>stakeholders</a:t>
-            </a:r>
-          </a:p>
-        </p:txBody>
-      </p:sp>
-      <p:sp>
-        <p:nvSpPr>
-          <p:cNvPr id="12" name="Can 11"/>
+                  <a:srgbClr val="333F52"/>
+                </a:solidFill>
+                <a:latin typeface="Calibri"/>
+              </a:rPr>
+              <a:t>rpc-predictions-staging</a:t>
+            </a:r>
+          </a:p>
+        </p:txBody>
+      </p:sp>
+      <p:sp>
+        <p:nvSpPr>
+          <p:cNvPr id="30" name="Rounded Rectangle 29"/>
           <p:cNvSpPr/>
           <p:nvPr/>
         </p:nvSpPr>
         <p:spPr>
           <a:xfrm>
-            <a:off x="182880" y="5212080"/>
-            <a:ext cx="365760" cy="457200"/>
+            <a:off x="4937760" y="3264408"/>
+            <a:ext cx="2377440" cy="960120"/>
+          </a:xfrm>
+          <a:prstGeom prst="roundRect">
+            <a:avLst>
+              <a:gd name="adj" fmla="val 8000"/>
+            </a:avLst>
+          </a:prstGeom>
+          <a:solidFill>
+            <a:srgbClr val="7E57C2"/>
+          </a:solidFill>
+          <a:ln>
+            <a:noFill/>
+          </a:ln>
+        </p:spPr>
+        <p:style>
+          <a:lnRef idx="1">
+            <a:schemeClr val="accent1"/>
+          </a:lnRef>
+          <a:fillRef idx="3">
+            <a:schemeClr val="accent1"/>
+          </a:fillRef>
+          <a:effectRef idx="2">
+            <a:schemeClr val="accent1"/>
+          </a:effectRef>
+          <a:fontRef idx="minor">
+            <a:schemeClr val="lt1"/>
+          </a:fontRef>
+        </p:style>
+        <p:txBody>
+          <a:bodyPr rtlCol="0" anchor="ctr" wrap="square" lIns="73152" rIns="73152" tIns="54864"/>
+          <a:lstStyle/>
+          <a:p>
+            <a:pPr algn="ctr"/>
+            <a:r>
+              <a:rPr sz="1100" b="1" i="0">
+                <a:solidFill>
+                  <a:srgbClr val="FFFFFF"/>
+                </a:solidFill>
+                <a:latin typeface="Calibri"/>
+              </a:rPr>
+              <a:t>BigQuery</a:t>
+            </a:r>
+          </a:p>
+          <a:p>
+            <a:pPr algn="ctr"/>
+            <a:r>
+              <a:rPr sz="800" b="0" i="0">
+                <a:solidFill>
+                  <a:srgbClr val="FFFFFF"/>
+                </a:solidFill>
+                <a:latin typeface="Calibri"/>
+              </a:rPr>
+              <a:t>Data warehouse</a:t>
+            </a:r>
+          </a:p>
+          <a:p>
+            <a:pPr algn="ctr">
+              <a:spcBef>
+                <a:spcPts val="300"/>
+              </a:spcBef>
+            </a:pPr>
+            <a:r>
+              <a:rPr sz="700" b="0" i="1">
+                <a:solidFill>
+                  <a:srgbClr val="FFFFFF"/>
+                </a:solidFill>
+                <a:latin typeface="Calibri"/>
+              </a:rPr>
+              <a:t>rpc_predictions  ·  sales_ledger</a:t>
+            </a:r>
+          </a:p>
+          <a:p>
+            <a:pPr algn="ctr"/>
+            <a:r>
+              <a:rPr sz="700" b="0" i="1">
+                <a:solidFill>
+                  <a:srgbClr val="FFFFFF"/>
+                </a:solidFill>
+                <a:latin typeface="Calibri"/>
+              </a:rPr>
+              <a:t>predictions_vs_revenue</a:t>
+            </a:r>
+          </a:p>
+        </p:txBody>
+      </p:sp>
+      <p:sp>
+        <p:nvSpPr>
+          <p:cNvPr id="31" name="Rounded Rectangle 30"/>
+          <p:cNvSpPr/>
+          <p:nvPr/>
+        </p:nvSpPr>
+        <p:spPr>
+          <a:xfrm>
+            <a:off x="8229600" y="3337560"/>
+            <a:ext cx="2194560" cy="777240"/>
+          </a:xfrm>
+          <a:prstGeom prst="roundRect">
+            <a:avLst>
+              <a:gd name="adj" fmla="val 10000"/>
+            </a:avLst>
+          </a:prstGeom>
+          <a:solidFill>
+            <a:srgbClr val="0097A7"/>
+          </a:solidFill>
+          <a:ln>
+            <a:noFill/>
+          </a:ln>
+        </p:spPr>
+        <p:style>
+          <a:lnRef idx="1">
+            <a:schemeClr val="accent1"/>
+          </a:lnRef>
+          <a:fillRef idx="3">
+            <a:schemeClr val="accent1"/>
+          </a:fillRef>
+          <a:effectRef idx="2">
+            <a:schemeClr val="accent1"/>
+          </a:effectRef>
+          <a:fontRef idx="minor">
+            <a:schemeClr val="lt1"/>
+          </a:fontRef>
+        </p:style>
+        <p:txBody>
+          <a:bodyPr rtlCol="0" anchor="ctr" lIns="73152" rIns="73152" wrap="square"/>
+          <a:lstStyle/>
+          <a:p>
+            <a:pPr algn="ctr"/>
+            <a:r>
+              <a:rPr sz="1100" b="1" i="0">
+                <a:solidFill>
+                  <a:srgbClr val="FFFFFF"/>
+                </a:solidFill>
+                <a:latin typeface="Calibri"/>
+              </a:rPr>
+              <a:t>ML Ops Pipeline</a:t>
+            </a:r>
+          </a:p>
+          <a:p>
+            <a:pPr algn="ctr"/>
+            <a:r>
+              <a:rPr sz="800" b="0" i="0">
+                <a:solidFill>
+                  <a:srgbClr val="FFFFFF"/>
+                </a:solidFill>
+                <a:latin typeface="Calibri"/>
+              </a:rPr>
+              <a:t>Python 3.12  ·  Vertex AI Pipelines</a:t>
+            </a:r>
+          </a:p>
+        </p:txBody>
+      </p:sp>
+      <p:sp>
+        <p:nvSpPr>
+          <p:cNvPr id="32" name="Can 31"/>
+          <p:cNvSpPr/>
+          <p:nvPr/>
+        </p:nvSpPr>
+        <p:spPr>
+          <a:xfrm>
+            <a:off x="10698480" y="3337560"/>
+            <a:ext cx="640080" cy="777240"/>
           </a:xfrm>
           <a:prstGeom prst="can">
             <a:avLst/>
@@ -10154,717 +11061,14 @@
       </p:sp>
       <p:sp>
         <p:nvSpPr>
-          <p:cNvPr id="13" name="TextBox 12"/>
+          <p:cNvPr id="33" name="TextBox 32"/>
           <p:cNvSpPr txBox="1"/>
           <p:nvPr/>
         </p:nvSpPr>
         <p:spPr>
           <a:xfrm>
-            <a:off x="-137160" y="5715000"/>
-            <a:ext cx="1005840" cy="411480"/>
-          </a:xfrm>
-          <a:prstGeom prst="rect">
-            <a:avLst/>
-          </a:prstGeom>
-          <a:noFill/>
-        </p:spPr>
-        <p:txBody>
-          <a:bodyPr wrap="square">
-            <a:spAutoFit/>
-          </a:bodyPr>
-          <a:lstStyle/>
-          <a:p>
-            <a:pPr algn="ctr"/>
-            <a:r>
-              <a:rPr sz="900" b="1" i="0">
-                <a:solidFill>
-                  <a:srgbClr val="333F52"/>
-                </a:solidFill>
-                <a:latin typeface="Calibri"/>
-              </a:rPr>
-              <a:t>Sales ledger
-data source</a:t>
-            </a:r>
-          </a:p>
-        </p:txBody>
-      </p:sp>
-      <p:sp>
-        <p:nvSpPr>
-          <p:cNvPr id="14" name="Rounded Rectangle 13"/>
-          <p:cNvSpPr/>
-          <p:nvPr/>
-        </p:nvSpPr>
-        <p:spPr>
-          <a:xfrm>
-            <a:off x="1371600" y="1417320"/>
-            <a:ext cx="2743200" cy="1508760"/>
-          </a:xfrm>
-          <a:prstGeom prst="roundRect">
-            <a:avLst>
-              <a:gd name="adj" fmla="val 12000"/>
-            </a:avLst>
-          </a:prstGeom>
-          <a:solidFill>
-            <a:srgbClr val="4E88E6"/>
-          </a:solidFill>
-          <a:ln>
-            <a:noFill/>
-          </a:ln>
-        </p:spPr>
-        <p:style>
-          <a:lnRef idx="1">
-            <a:schemeClr val="accent1"/>
-          </a:lnRef>
-          <a:fillRef idx="3">
-            <a:schemeClr val="accent1"/>
-          </a:fillRef>
-          <a:effectRef idx="2">
-            <a:schemeClr val="accent1"/>
-          </a:effectRef>
-          <a:fontRef idx="minor">
-            <a:schemeClr val="lt1"/>
-          </a:fontRef>
-        </p:style>
-        <p:txBody>
-          <a:bodyPr rtlCol="0" anchor="ctr" tIns="54864" bIns="54864" wrap="square"/>
-          <a:lstStyle/>
-          <a:p>
-            <a:pPr algn="ctr"/>
-            <a:r>
-              <a:rPr sz="1200" b="1" i="0">
-                <a:solidFill>
-                  <a:srgbClr val="FFFFFF"/>
-                </a:solidFill>
-                <a:latin typeface="Calibri"/>
-              </a:rPr>
-              <a:t>Scoring Service  ·  scoring-api</a:t>
-            </a:r>
-          </a:p>
-          <a:p>
-            <a:pPr algn="ctr"/>
-            <a:r>
-              <a:rPr sz="900" b="0" i="0">
-                <a:solidFill>
-                  <a:srgbClr val="FFFFFF"/>
-                </a:solidFill>
-                <a:latin typeface="Calibri"/>
-              </a:rPr>
-              <a:t>Rust 1.89  ·  Cloud Run</a:t>
-            </a:r>
-          </a:p>
-        </p:txBody>
-      </p:sp>
-      <p:sp>
-        <p:nvSpPr>
-          <p:cNvPr id="15" name="Rounded Rectangle 14"/>
-          <p:cNvSpPr/>
-          <p:nvPr/>
-        </p:nvSpPr>
-        <p:spPr>
-          <a:xfrm>
-            <a:off x="1508760" y="2240280"/>
-            <a:ext cx="2468880" cy="640080"/>
-          </a:xfrm>
-          <a:prstGeom prst="roundRect">
-            <a:avLst>
-              <a:gd name="adj" fmla="val 15000"/>
-            </a:avLst>
-          </a:prstGeom>
-          <a:solidFill>
-            <a:srgbClr val="E8F0FE"/>
-          </a:solidFill>
-          <a:ln>
-            <a:noFill/>
-          </a:ln>
-        </p:spPr>
-        <p:style>
-          <a:lnRef idx="1">
-            <a:schemeClr val="accent1"/>
-          </a:lnRef>
-          <a:fillRef idx="3">
-            <a:schemeClr val="accent1"/>
-          </a:fillRef>
-          <a:effectRef idx="2">
-            <a:schemeClr val="accent1"/>
-          </a:effectRef>
-          <a:fontRef idx="minor">
-            <a:schemeClr val="lt1"/>
-          </a:fontRef>
-        </p:style>
-        <p:txBody>
-          <a:bodyPr rtlCol="0" anchor="ctr" lIns="73152" rIns="73152" tIns="36576" bIns="36576"/>
-          <a:lstStyle/>
-          <a:p>
-            <a:pPr algn="ctr"/>
-            <a:r>
-              <a:rPr sz="900" b="1" i="0">
-                <a:solidFill>
-                  <a:srgbClr val="2A5FC3"/>
-                </a:solidFill>
-                <a:latin typeface="Calibri"/>
-              </a:rPr>
-              <a:t>Safety guardrails</a:t>
-            </a:r>
-          </a:p>
-          <a:p>
-            <a:pPr algn="ctr"/>
-            <a:r>
-              <a:rPr sz="800" b="0" i="0">
-                <a:solidFill>
-                  <a:srgbClr val="2A5FC3"/>
-                </a:solidFill>
-                <a:latin typeface="Calibri"/>
-              </a:rPr>
-              <a:t>Bounds  ·  clamp  ·  timeouts  ·  anomaly  ·  breaker  ·  kill-switch</a:t>
-            </a:r>
-          </a:p>
-        </p:txBody>
-      </p:sp>
-      <p:sp>
-        <p:nvSpPr>
-          <p:cNvPr id="16" name="Rounded Rectangle 15"/>
-          <p:cNvSpPr/>
-          <p:nvPr/>
-        </p:nvSpPr>
-        <p:spPr>
-          <a:xfrm>
-            <a:off x="4572000" y="1417320"/>
-            <a:ext cx="2286000" cy="914400"/>
-          </a:xfrm>
-          <a:prstGeom prst="roundRect">
-            <a:avLst>
-              <a:gd name="adj" fmla="val 12000"/>
-            </a:avLst>
-          </a:prstGeom>
-          <a:solidFill>
-            <a:srgbClr val="34A853"/>
-          </a:solidFill>
-          <a:ln>
-            <a:noFill/>
-          </a:ln>
-        </p:spPr>
-        <p:style>
-          <a:lnRef idx="1">
-            <a:schemeClr val="accent1"/>
-          </a:lnRef>
-          <a:fillRef idx="3">
-            <a:schemeClr val="accent1"/>
-          </a:fillRef>
-          <a:effectRef idx="2">
-            <a:schemeClr val="accent1"/>
-          </a:effectRef>
-          <a:fontRef idx="minor">
-            <a:schemeClr val="lt1"/>
-          </a:fontRef>
-        </p:style>
-        <p:txBody>
-          <a:bodyPr rtlCol="0" anchor="ctr" tIns="54864" bIns="54864" wrap="square"/>
-          <a:lstStyle/>
-          <a:p>
-            <a:pPr algn="ctr"/>
-            <a:r>
-              <a:rPr sz="1200" b="1" i="0">
-                <a:solidFill>
-                  <a:srgbClr val="FFFFFF"/>
-                </a:solidFill>
-                <a:latin typeface="Calibri"/>
-              </a:rPr>
-              <a:t>Vertex AI Endpoint</a:t>
-            </a:r>
-          </a:p>
-          <a:p>
-            <a:pPr algn="ctr"/>
-            <a:r>
-              <a:rPr sz="900" b="0" i="0">
-                <a:solidFill>
-                  <a:srgbClr val="FFFFFF"/>
-                </a:solidFill>
-                <a:latin typeface="Calibri"/>
-              </a:rPr>
-              <a:t>XGBoost regressor  ·  rpc-estimator@1</a:t>
-            </a:r>
-          </a:p>
-        </p:txBody>
-      </p:sp>
-      <p:sp>
-        <p:nvSpPr>
-          <p:cNvPr id="17" name="Rounded Rectangle 16"/>
-          <p:cNvSpPr/>
-          <p:nvPr/>
-        </p:nvSpPr>
-        <p:spPr>
-          <a:xfrm>
-            <a:off x="8732520" y="1417320"/>
-            <a:ext cx="2468880" cy="914400"/>
-          </a:xfrm>
-          <a:prstGeom prst="roundRect">
-            <a:avLst>
-              <a:gd name="adj" fmla="val 12000"/>
-            </a:avLst>
-          </a:prstGeom>
-          <a:solidFill>
-            <a:srgbClr val="4E88E6"/>
-          </a:solidFill>
-          <a:ln>
-            <a:noFill/>
-          </a:ln>
-        </p:spPr>
-        <p:style>
-          <a:lnRef idx="1">
-            <a:schemeClr val="accent1"/>
-          </a:lnRef>
-          <a:fillRef idx="3">
-            <a:schemeClr val="accent1"/>
-          </a:fillRef>
-          <a:effectRef idx="2">
-            <a:schemeClr val="accent1"/>
-          </a:effectRef>
-          <a:fontRef idx="minor">
-            <a:schemeClr val="lt1"/>
-          </a:fontRef>
-        </p:style>
-        <p:txBody>
-          <a:bodyPr rtlCol="0" anchor="ctr" tIns="54864" bIns="54864" wrap="square"/>
-          <a:lstStyle/>
-          <a:p>
-            <a:pPr algn="ctr"/>
-            <a:r>
-              <a:rPr sz="1200" b="1" i="0">
-                <a:solidFill>
-                  <a:srgbClr val="FFFFFF"/>
-                </a:solidFill>
-                <a:latin typeface="Calibri"/>
-              </a:rPr>
-              <a:t>Dashboard UI</a:t>
-            </a:r>
-          </a:p>
-          <a:p>
-            <a:pPr algn="ctr"/>
-            <a:r>
-              <a:rPr sz="900" b="0" i="0">
-                <a:solidFill>
-                  <a:srgbClr val="FFFFFF"/>
-                </a:solidFill>
-                <a:latin typeface="Calibri"/>
-              </a:rPr>
-              <a:t>TypeScript / React / nginx  ·  Cloud Run</a:t>
-            </a:r>
-          </a:p>
-        </p:txBody>
-      </p:sp>
-      <p:sp>
-        <p:nvSpPr>
-          <p:cNvPr id="18" name="Rounded Rectangle 17"/>
-          <p:cNvSpPr/>
-          <p:nvPr/>
-        </p:nvSpPr>
-        <p:spPr>
-          <a:xfrm>
-            <a:off x="1371600" y="3200400"/>
-            <a:ext cx="2194560" cy="777240"/>
-          </a:xfrm>
-          <a:prstGeom prst="roundRect">
-            <a:avLst>
-              <a:gd name="adj" fmla="val 12000"/>
-            </a:avLst>
-          </a:prstGeom>
-          <a:solidFill>
-            <a:srgbClr val="4E88E6"/>
-          </a:solidFill>
-          <a:ln>
-            <a:noFill/>
-          </a:ln>
-        </p:spPr>
-        <p:style>
-          <a:lnRef idx="1">
-            <a:schemeClr val="accent1"/>
-          </a:lnRef>
-          <a:fillRef idx="3">
-            <a:schemeClr val="accent1"/>
-          </a:fillRef>
-          <a:effectRef idx="2">
-            <a:schemeClr val="accent1"/>
-          </a:effectRef>
-          <a:fontRef idx="minor">
-            <a:schemeClr val="lt1"/>
-          </a:fontRef>
-        </p:style>
-        <p:txBody>
-          <a:bodyPr rtlCol="0" anchor="ctr" tIns="54864" bIns="54864" wrap="square"/>
-          <a:lstStyle/>
-          <a:p>
-            <a:pPr algn="ctr"/>
-            <a:r>
-              <a:rPr sz="1200" b="1" i="0">
-                <a:solidFill>
-                  <a:srgbClr val="FFFFFF"/>
-                </a:solidFill>
-                <a:latin typeface="Calibri"/>
-              </a:rPr>
-              <a:t>Bounds Calibration</a:t>
-            </a:r>
-          </a:p>
-          <a:p>
-            <a:pPr algn="ctr"/>
-            <a:r>
-              <a:rPr sz="900" b="0" i="0">
-                <a:solidFill>
-                  <a:srgbClr val="FFFFFF"/>
-                </a:solidFill>
-                <a:latin typeface="Calibri"/>
-              </a:rPr>
-              <a:t>Rust  ·  Cloud Run job</a:t>
-            </a:r>
-          </a:p>
-        </p:txBody>
-      </p:sp>
-      <p:sp>
-        <p:nvSpPr>
-          <p:cNvPr id="19" name="Rounded Rectangle 18"/>
-          <p:cNvSpPr/>
-          <p:nvPr/>
-        </p:nvSpPr>
-        <p:spPr>
-          <a:xfrm>
-            <a:off x="3703320" y="2423160"/>
-            <a:ext cx="1463040" cy="502920"/>
-          </a:xfrm>
-          <a:prstGeom prst="roundRect">
-            <a:avLst>
-              <a:gd name="adj" fmla="val 18000"/>
-            </a:avLst>
-          </a:prstGeom>
-          <a:solidFill>
-            <a:srgbClr val="FFFFFF"/>
-          </a:solidFill>
-          <a:ln w="6350">
-            <a:solidFill>
-              <a:srgbClr val="6B7380"/>
-            </a:solidFill>
-          </a:ln>
-        </p:spPr>
-        <p:style>
-          <a:lnRef idx="1">
-            <a:schemeClr val="accent1"/>
-          </a:lnRef>
-          <a:fillRef idx="3">
-            <a:schemeClr val="accent1"/>
-          </a:fillRef>
-          <a:effectRef idx="2">
-            <a:schemeClr val="accent1"/>
-          </a:effectRef>
-          <a:fontRef idx="minor">
-            <a:schemeClr val="lt1"/>
-          </a:fontRef>
-        </p:style>
-        <p:txBody>
-          <a:bodyPr rtlCol="0" anchor="ctr" lIns="54864" rIns="54864"/>
-          <a:lstStyle/>
-          <a:p>
-            <a:pPr algn="ctr"/>
-            <a:r>
-              <a:rPr sz="900" b="1" i="0">
-                <a:solidFill>
-                  <a:srgbClr val="333F52"/>
-                </a:solidFill>
-                <a:latin typeface="Calibri"/>
-              </a:rPr>
-              <a:t>Secret Manager / Config</a:t>
-            </a:r>
-          </a:p>
-        </p:txBody>
-      </p:sp>
-      <p:sp>
-        <p:nvSpPr>
-          <p:cNvPr id="20" name="Rounded Rectangle 19"/>
-          <p:cNvSpPr/>
-          <p:nvPr/>
-        </p:nvSpPr>
-        <p:spPr>
-          <a:xfrm>
-            <a:off x="4572000" y="2971800"/>
-            <a:ext cx="2286000" cy="1371600"/>
-          </a:xfrm>
-          <a:prstGeom prst="roundRect">
-            <a:avLst>
-              <a:gd name="adj" fmla="val 8000"/>
-            </a:avLst>
-          </a:prstGeom>
-          <a:solidFill>
-            <a:srgbClr val="7E57C2"/>
-          </a:solidFill>
-          <a:ln>
-            <a:noFill/>
-          </a:ln>
-        </p:spPr>
-        <p:style>
-          <a:lnRef idx="1">
-            <a:schemeClr val="accent1"/>
-          </a:lnRef>
-          <a:fillRef idx="3">
-            <a:schemeClr val="accent1"/>
-          </a:fillRef>
-          <a:effectRef idx="2">
-            <a:schemeClr val="accent1"/>
-          </a:effectRef>
-          <a:fontRef idx="minor">
-            <a:schemeClr val="lt1"/>
-          </a:fontRef>
-        </p:style>
-        <p:txBody>
-          <a:bodyPr rtlCol="0" anchor="ctr" wrap="square" tIns="73152"/>
-          <a:lstStyle/>
-          <a:p>
-            <a:pPr algn="ctr"/>
-            <a:r>
-              <a:rPr sz="1200" b="1" i="0">
-                <a:solidFill>
-                  <a:srgbClr val="FFFFFF"/>
-                </a:solidFill>
-                <a:latin typeface="Calibri"/>
-              </a:rPr>
-              <a:t>BigQuery</a:t>
-            </a:r>
-          </a:p>
-          <a:p>
-            <a:pPr algn="ctr"/>
-            <a:r>
-              <a:rPr sz="900" b="0" i="0">
-                <a:solidFill>
-                  <a:srgbClr val="FFFFFF"/>
-                </a:solidFill>
-                <a:latin typeface="Calibri"/>
-              </a:rPr>
-              <a:t>Data warehouse</a:t>
-            </a:r>
-          </a:p>
-          <a:p>
-            <a:pPr algn="ctr">
-              <a:spcBef>
-                <a:spcPts val="600"/>
-              </a:spcBef>
-            </a:pPr>
-            <a:r>
-              <a:rPr sz="800" b="0" i="1">
-                <a:solidFill>
-                  <a:srgbClr val="FFFFFF"/>
-                </a:solidFill>
-                <a:latin typeface="Calibri"/>
-              </a:rPr>
-              <a:t>cm360_clicks  ·  sales_ledger</a:t>
-            </a:r>
-          </a:p>
-          <a:p>
-            <a:pPr algn="ctr"/>
-            <a:r>
-              <a:rPr sz="800" b="0" i="1">
-                <a:solidFill>
-                  <a:srgbClr val="FFFFFF"/>
-                </a:solidFill>
-                <a:latin typeface="Calibri"/>
-              </a:rPr>
-              <a:t>rpc_predictions</a:t>
-            </a:r>
-          </a:p>
-          <a:p>
-            <a:pPr algn="ctr"/>
-            <a:r>
-              <a:rPr sz="800" b="0" i="1">
-                <a:solidFill>
-                  <a:srgbClr val="FFFFFF"/>
-                </a:solidFill>
-                <a:latin typeface="Calibri"/>
-              </a:rPr>
-              <a:t>predictions_vs_revenue</a:t>
-            </a:r>
-          </a:p>
-        </p:txBody>
-      </p:sp>
-      <p:sp>
-        <p:nvSpPr>
-          <p:cNvPr id="21" name="Rounded Rectangle 20"/>
-          <p:cNvSpPr/>
-          <p:nvPr/>
-        </p:nvSpPr>
-        <p:spPr>
-          <a:xfrm>
-            <a:off x="8732520" y="2788920"/>
-            <a:ext cx="2468880" cy="777240"/>
-          </a:xfrm>
-          <a:prstGeom prst="roundRect">
-            <a:avLst>
-              <a:gd name="adj" fmla="val 12000"/>
-            </a:avLst>
-          </a:prstGeom>
-          <a:solidFill>
-            <a:srgbClr val="4E88E6"/>
-          </a:solidFill>
-          <a:ln>
-            <a:noFill/>
-          </a:ln>
-        </p:spPr>
-        <p:style>
-          <a:lnRef idx="1">
-            <a:schemeClr val="accent1"/>
-          </a:lnRef>
-          <a:fillRef idx="3">
-            <a:schemeClr val="accent1"/>
-          </a:fillRef>
-          <a:effectRef idx="2">
-            <a:schemeClr val="accent1"/>
-          </a:effectRef>
-          <a:fontRef idx="minor">
-            <a:schemeClr val="lt1"/>
-          </a:fontRef>
-        </p:style>
-        <p:txBody>
-          <a:bodyPr rtlCol="0" anchor="ctr" tIns="54864" bIns="54864" wrap="square"/>
-          <a:lstStyle/>
-          <a:p>
-            <a:pPr algn="ctr"/>
-            <a:r>
-              <a:rPr sz="1200" b="1" i="0">
-                <a:solidFill>
-                  <a:srgbClr val="FFFFFF"/>
-                </a:solidFill>
-                <a:latin typeface="Calibri"/>
-              </a:rPr>
-              <a:t>Reconciliation Service</a:t>
-            </a:r>
-          </a:p>
-          <a:p>
-            <a:pPr algn="ctr"/>
-            <a:r>
-              <a:rPr sz="900" b="0" i="0">
-                <a:solidFill>
-                  <a:srgbClr val="FFFFFF"/>
-                </a:solidFill>
-                <a:latin typeface="Calibri"/>
-              </a:rPr>
-              <a:t>Python FastAPI  ·  Cloud Run</a:t>
-            </a:r>
-          </a:p>
-        </p:txBody>
-      </p:sp>
-      <p:sp>
-        <p:nvSpPr>
-          <p:cNvPr id="22" name="Rounded Rectangle 21"/>
-          <p:cNvSpPr/>
-          <p:nvPr/>
-        </p:nvSpPr>
-        <p:spPr>
-          <a:xfrm>
-            <a:off x="7315200" y="4160520"/>
-            <a:ext cx="2377440" cy="822960"/>
-          </a:xfrm>
-          <a:prstGeom prst="roundRect">
-            <a:avLst>
-              <a:gd name="adj" fmla="val 12000"/>
-            </a:avLst>
-          </a:prstGeom>
-          <a:solidFill>
-            <a:srgbClr val="0097A7"/>
-          </a:solidFill>
-          <a:ln>
-            <a:noFill/>
-          </a:ln>
-        </p:spPr>
-        <p:style>
-          <a:lnRef idx="1">
-            <a:schemeClr val="accent1"/>
-          </a:lnRef>
-          <a:fillRef idx="3">
-            <a:schemeClr val="accent1"/>
-          </a:fillRef>
-          <a:effectRef idx="2">
-            <a:schemeClr val="accent1"/>
-          </a:effectRef>
-          <a:fontRef idx="minor">
-            <a:schemeClr val="lt1"/>
-          </a:fontRef>
-        </p:style>
-        <p:txBody>
-          <a:bodyPr rtlCol="0" anchor="ctr" tIns="54864" bIns="54864" wrap="square"/>
-          <a:lstStyle/>
-          <a:p>
-            <a:pPr algn="ctr"/>
-            <a:r>
-              <a:rPr sz="1200" b="1" i="0">
-                <a:solidFill>
-                  <a:srgbClr val="FFFFFF"/>
-                </a:solidFill>
-                <a:latin typeface="Calibri"/>
-              </a:rPr>
-              <a:t>ML Ops Pipeline  ·  ml-pipeline</a:t>
-            </a:r>
-          </a:p>
-          <a:p>
-            <a:pPr algn="ctr"/>
-            <a:r>
-              <a:rPr sz="900" b="0" i="0">
-                <a:solidFill>
-                  <a:srgbClr val="FFFFFF"/>
-                </a:solidFill>
-                <a:latin typeface="Calibri"/>
-              </a:rPr>
-              <a:t>Python 3.12  ·  Vertex AI Pipelines</a:t>
-            </a:r>
-          </a:p>
-        </p:txBody>
-      </p:sp>
-      <p:sp>
-        <p:nvSpPr>
-          <p:cNvPr id="23" name="Can 22"/>
-          <p:cNvSpPr/>
-          <p:nvPr/>
-        </p:nvSpPr>
-        <p:spPr>
-          <a:xfrm>
-            <a:off x="10058400" y="4160520"/>
-            <a:ext cx="502920" cy="822960"/>
-          </a:xfrm>
-          <a:prstGeom prst="can">
-            <a:avLst/>
-          </a:prstGeom>
-          <a:solidFill>
-            <a:srgbClr val="6B7380"/>
-          </a:solidFill>
-          <a:ln>
-            <a:noFill/>
-          </a:ln>
-        </p:spPr>
-        <p:style>
-          <a:lnRef idx="1">
-            <a:schemeClr val="accent1"/>
-          </a:lnRef>
-          <a:fillRef idx="3">
-            <a:schemeClr val="accent1"/>
-          </a:fillRef>
-          <a:effectRef idx="2">
-            <a:schemeClr val="accent1"/>
-          </a:effectRef>
-          <a:fontRef idx="minor">
-            <a:schemeClr val="lt1"/>
-          </a:fontRef>
-        </p:style>
-        <p:txBody>
-          <a:bodyPr rtlCol="0" anchor="ctr"/>
-          <a:lstStyle/>
-          <a:p>
-            <a:pPr algn="ctr"/>
-          </a:p>
-        </p:txBody>
-      </p:sp>
-      <p:sp>
-        <p:nvSpPr>
-          <p:cNvPr id="24" name="TextBox 23"/>
-          <p:cNvSpPr txBox="1"/>
-          <p:nvPr/>
-        </p:nvSpPr>
-        <p:spPr>
-          <a:xfrm>
-            <a:off x="9875520" y="5029200"/>
-            <a:ext cx="868680" cy="274320"/>
+            <a:off x="10561320" y="4096512"/>
+            <a:ext cx="914400" cy="228600"/>
           </a:xfrm>
           <a:prstGeom prst="rect">
             <a:avLst/>
@@ -10879,587 +11083,36 @@
           <a:p>
             <a:pPr algn="ctr"/>
             <a:r>
-              <a:rPr sz="800" b="1" i="0">
+              <a:rPr sz="700" b="1" i="0">
                 <a:solidFill>
                   <a:srgbClr val="333F52"/>
                 </a:solidFill>
                 <a:latin typeface="Calibri"/>
               </a:rPr>
               <a:t>Cloud Storage</a:t>
-            </a:r>
-          </a:p>
-        </p:txBody>
-      </p:sp>
-      <p:sp>
-        <p:nvSpPr>
-          <p:cNvPr id="25" name="Hexagon 24"/>
-          <p:cNvSpPr/>
-          <p:nvPr/>
-        </p:nvSpPr>
-        <p:spPr>
-          <a:xfrm>
-            <a:off x="1371600" y="4160520"/>
-            <a:ext cx="1371600" cy="411480"/>
-          </a:xfrm>
-          <a:prstGeom prst="hexagon">
-            <a:avLst/>
-          </a:prstGeom>
-          <a:solidFill>
-            <a:srgbClr val="A96BDB"/>
-          </a:solidFill>
-          <a:ln>
-            <a:noFill/>
-          </a:ln>
-        </p:spPr>
-        <p:style>
-          <a:lnRef idx="1">
-            <a:schemeClr val="accent1"/>
-          </a:lnRef>
-          <a:fillRef idx="3">
-            <a:schemeClr val="accent1"/>
-          </a:fillRef>
-          <a:effectRef idx="2">
-            <a:schemeClr val="accent1"/>
-          </a:effectRef>
-          <a:fontRef idx="minor">
-            <a:schemeClr val="lt1"/>
-          </a:fontRef>
-        </p:style>
-        <p:txBody>
-          <a:bodyPr rtlCol="0" anchor="ctr" lIns="36576" rIns="36576"/>
-          <a:lstStyle/>
-          <a:p>
-            <a:pPr algn="ctr"/>
-            <a:r>
-              <a:rPr sz="800" b="1" i="0">
-                <a:solidFill>
-                  <a:srgbClr val="FFFFFF"/>
-                </a:solidFill>
-                <a:latin typeface="Calibri"/>
-              </a:rPr>
-              <a:t>Pub/Sub</a:t>
-            </a:r>
-          </a:p>
-        </p:txBody>
-      </p:sp>
-      <p:sp>
-        <p:nvSpPr>
-          <p:cNvPr id="26" name="TextBox 25"/>
-          <p:cNvSpPr txBox="1"/>
-          <p:nvPr/>
-        </p:nvSpPr>
-        <p:spPr>
-          <a:xfrm>
-            <a:off x="1371600" y="4581144"/>
-            <a:ext cx="1371600" cy="292608"/>
-          </a:xfrm>
-          <a:prstGeom prst="rect">
-            <a:avLst/>
-          </a:prstGeom>
-          <a:noFill/>
-        </p:spPr>
-        <p:txBody>
-          <a:bodyPr wrap="none">
-            <a:spAutoFit/>
-          </a:bodyPr>
-          <a:lstStyle/>
-          <a:p>
-            <a:pPr algn="ctr"/>
-            <a:r>
-              <a:rPr sz="800" b="0" i="0">
-                <a:solidFill>
-                  <a:srgbClr val="333F52"/>
-                </a:solidFill>
-                <a:latin typeface="Calibri"/>
-              </a:rPr>
-              <a:t>rpc-clicks-staging</a:t>
-            </a:r>
-          </a:p>
-        </p:txBody>
-      </p:sp>
-      <p:sp>
-        <p:nvSpPr>
-          <p:cNvPr id="27" name="Hexagon 26"/>
-          <p:cNvSpPr/>
-          <p:nvPr/>
-        </p:nvSpPr>
-        <p:spPr>
-          <a:xfrm>
-            <a:off x="3017520" y="4160520"/>
-            <a:ext cx="1371600" cy="411480"/>
-          </a:xfrm>
-          <a:prstGeom prst="hexagon">
-            <a:avLst/>
-          </a:prstGeom>
-          <a:solidFill>
-            <a:srgbClr val="A96BDB"/>
-          </a:solidFill>
-          <a:ln>
-            <a:noFill/>
-          </a:ln>
-        </p:spPr>
-        <p:style>
-          <a:lnRef idx="1">
-            <a:schemeClr val="accent1"/>
-          </a:lnRef>
-          <a:fillRef idx="3">
-            <a:schemeClr val="accent1"/>
-          </a:fillRef>
-          <a:effectRef idx="2">
-            <a:schemeClr val="accent1"/>
-          </a:effectRef>
-          <a:fontRef idx="minor">
-            <a:schemeClr val="lt1"/>
-          </a:fontRef>
-        </p:style>
-        <p:txBody>
-          <a:bodyPr rtlCol="0" anchor="ctr" lIns="36576" rIns="36576"/>
-          <a:lstStyle/>
-          <a:p>
-            <a:pPr algn="ctr"/>
-            <a:r>
-              <a:rPr sz="800" b="1" i="0">
-                <a:solidFill>
-                  <a:srgbClr val="FFFFFF"/>
-                </a:solidFill>
-                <a:latin typeface="Calibri"/>
-              </a:rPr>
-              <a:t>Pub/Sub</a:t>
-            </a:r>
-          </a:p>
-        </p:txBody>
-      </p:sp>
-      <p:sp>
-        <p:nvSpPr>
-          <p:cNvPr id="28" name="TextBox 27"/>
-          <p:cNvSpPr txBox="1"/>
-          <p:nvPr/>
-        </p:nvSpPr>
-        <p:spPr>
-          <a:xfrm>
-            <a:off x="3017520" y="4581144"/>
-            <a:ext cx="1371600" cy="292608"/>
-          </a:xfrm>
-          <a:prstGeom prst="rect">
-            <a:avLst/>
-          </a:prstGeom>
-          <a:noFill/>
-        </p:spPr>
-        <p:txBody>
-          <a:bodyPr wrap="none">
-            <a:spAutoFit/>
-          </a:bodyPr>
-          <a:lstStyle/>
-          <a:p>
-            <a:pPr algn="ctr"/>
-            <a:r>
-              <a:rPr sz="800" b="0" i="0">
-                <a:solidFill>
-                  <a:srgbClr val="333F52"/>
-                </a:solidFill>
-                <a:latin typeface="Calibri"/>
-              </a:rPr>
-              <a:t>rpc-predictions-staging</a:t>
-            </a:r>
-          </a:p>
-        </p:txBody>
-      </p:sp>
-      <p:sp>
-        <p:nvSpPr>
-          <p:cNvPr id="29" name="Hexagon 28"/>
-          <p:cNvSpPr/>
-          <p:nvPr/>
-        </p:nvSpPr>
-        <p:spPr>
-          <a:xfrm>
-            <a:off x="4937760" y="4572000"/>
-            <a:ext cx="1371600" cy="411480"/>
-          </a:xfrm>
-          <a:prstGeom prst="hexagon">
-            <a:avLst/>
-          </a:prstGeom>
-          <a:solidFill>
-            <a:srgbClr val="A96BDB"/>
-          </a:solidFill>
-          <a:ln>
-            <a:noFill/>
-          </a:ln>
-        </p:spPr>
-        <p:style>
-          <a:lnRef idx="1">
-            <a:schemeClr val="accent1"/>
-          </a:lnRef>
-          <a:fillRef idx="3">
-            <a:schemeClr val="accent1"/>
-          </a:fillRef>
-          <a:effectRef idx="2">
-            <a:schemeClr val="accent1"/>
-          </a:effectRef>
-          <a:fontRef idx="minor">
-            <a:schemeClr val="lt1"/>
-          </a:fontRef>
-        </p:style>
-        <p:txBody>
-          <a:bodyPr rtlCol="0" anchor="ctr" lIns="36576" rIns="36576"/>
-          <a:lstStyle/>
-          <a:p>
-            <a:pPr algn="ctr"/>
-            <a:r>
-              <a:rPr sz="800" b="1" i="0">
-                <a:solidFill>
-                  <a:srgbClr val="FFFFFF"/>
-                </a:solidFill>
-                <a:latin typeface="Calibri"/>
-              </a:rPr>
-              <a:t>Pub/Sub</a:t>
-            </a:r>
-          </a:p>
-        </p:txBody>
-      </p:sp>
-      <p:sp>
-        <p:nvSpPr>
-          <p:cNvPr id="30" name="TextBox 29"/>
-          <p:cNvSpPr txBox="1"/>
-          <p:nvPr/>
-        </p:nvSpPr>
-        <p:spPr>
-          <a:xfrm>
-            <a:off x="4937760" y="4992624"/>
-            <a:ext cx="1371600" cy="292608"/>
-          </a:xfrm>
-          <a:prstGeom prst="rect">
-            <a:avLst/>
-          </a:prstGeom>
-          <a:noFill/>
-        </p:spPr>
-        <p:txBody>
-          <a:bodyPr wrap="none">
-            <a:spAutoFit/>
-          </a:bodyPr>
-          <a:lstStyle/>
-          <a:p>
-            <a:pPr algn="ctr"/>
-            <a:r>
-              <a:rPr sz="800" b="0" i="0">
-                <a:solidFill>
-                  <a:srgbClr val="333F52"/>
-                </a:solidFill>
-                <a:latin typeface="Calibri"/>
-              </a:rPr>
-              <a:t>rpc-anomaly-staging</a:t>
-            </a:r>
-          </a:p>
-        </p:txBody>
-      </p:sp>
-      <p:sp>
-        <p:nvSpPr>
-          <p:cNvPr id="31" name="Rounded Rectangle 30"/>
-          <p:cNvSpPr/>
-          <p:nvPr/>
-        </p:nvSpPr>
-        <p:spPr>
-          <a:xfrm>
-            <a:off x="4572000" y="5074920"/>
-            <a:ext cx="2286000" cy="777240"/>
-          </a:xfrm>
-          <a:prstGeom prst="roundRect">
-            <a:avLst>
-              <a:gd name="adj" fmla="val 12000"/>
-            </a:avLst>
-          </a:prstGeom>
-          <a:solidFill>
-            <a:srgbClr val="4E88E6"/>
-          </a:solidFill>
-          <a:ln>
-            <a:noFill/>
-          </a:ln>
-        </p:spPr>
-        <p:style>
-          <a:lnRef idx="1">
-            <a:schemeClr val="accent1"/>
-          </a:lnRef>
-          <a:fillRef idx="3">
-            <a:schemeClr val="accent1"/>
-          </a:fillRef>
-          <a:effectRef idx="2">
-            <a:schemeClr val="accent1"/>
-          </a:effectRef>
-          <a:fontRef idx="minor">
-            <a:schemeClr val="lt1"/>
-          </a:fontRef>
-        </p:style>
-        <p:txBody>
-          <a:bodyPr rtlCol="0" anchor="ctr" tIns="54864" bIns="54864" wrap="square"/>
-          <a:lstStyle/>
-          <a:p>
-            <a:pPr algn="ctr"/>
-            <a:r>
-              <a:rPr sz="1200" b="1" i="0">
-                <a:solidFill>
-                  <a:srgbClr val="FFFFFF"/>
-                </a:solidFill>
-                <a:latin typeface="Calibri"/>
-              </a:rPr>
-              <a:t>Breaker Automation</a:t>
-            </a:r>
-          </a:p>
-          <a:p>
-            <a:pPr algn="ctr"/>
-            <a:r>
-              <a:rPr sz="900" b="0" i="0">
-                <a:solidFill>
-                  <a:srgbClr val="FFFFFF"/>
-                </a:solidFill>
-                <a:latin typeface="Calibri"/>
-              </a:rPr>
-              <a:t>Python  ·  Cloud Run / Functions</a:t>
-            </a:r>
-          </a:p>
-        </p:txBody>
-      </p:sp>
-      <p:sp>
-        <p:nvSpPr>
-          <p:cNvPr id="32" name="Rounded Rectangle 31"/>
-          <p:cNvSpPr/>
-          <p:nvPr/>
-        </p:nvSpPr>
-        <p:spPr>
-          <a:xfrm>
-            <a:off x="8732520" y="5074920"/>
-            <a:ext cx="2468880" cy="777240"/>
-          </a:xfrm>
-          <a:prstGeom prst="roundRect">
-            <a:avLst>
-              <a:gd name="adj" fmla="val 12000"/>
-            </a:avLst>
-          </a:prstGeom>
-          <a:solidFill>
-            <a:srgbClr val="4E88E6"/>
-          </a:solidFill>
-          <a:ln>
-            <a:noFill/>
-          </a:ln>
-        </p:spPr>
-        <p:style>
-          <a:lnRef idx="1">
-            <a:schemeClr val="accent1"/>
-          </a:lnRef>
-          <a:fillRef idx="3">
-            <a:schemeClr val="accent1"/>
-          </a:fillRef>
-          <a:effectRef idx="2">
-            <a:schemeClr val="accent1"/>
-          </a:effectRef>
-          <a:fontRef idx="minor">
-            <a:schemeClr val="lt1"/>
-          </a:fontRef>
-        </p:style>
-        <p:txBody>
-          <a:bodyPr rtlCol="0" anchor="ctr" tIns="54864" bIns="54864" wrap="square"/>
-          <a:lstStyle/>
-          <a:p>
-            <a:pPr algn="ctr"/>
-            <a:r>
-              <a:rPr sz="1200" b="1" i="0">
-                <a:solidFill>
-                  <a:srgbClr val="FFFFFF"/>
-                </a:solidFill>
-                <a:latin typeface="Calibri"/>
-              </a:rPr>
-              <a:t>Activation Service</a:t>
-            </a:r>
-          </a:p>
-          <a:p>
-            <a:pPr algn="ctr"/>
-            <a:r>
-              <a:rPr sz="900" b="0" i="0">
-                <a:solidFill>
-                  <a:srgbClr val="FFFFFF"/>
-                </a:solidFill>
-                <a:latin typeface="Calibri"/>
-              </a:rPr>
-              <a:t>Python 3.12  ·  Cloud Run</a:t>
-            </a:r>
-          </a:p>
-        </p:txBody>
-      </p:sp>
-      <p:sp>
-        <p:nvSpPr>
-          <p:cNvPr id="33" name="TextBox 32"/>
-          <p:cNvSpPr txBox="1"/>
-          <p:nvPr/>
-        </p:nvSpPr>
-        <p:spPr>
-          <a:xfrm>
-            <a:off x="11521440" y="5074920"/>
-            <a:ext cx="640080" cy="228600"/>
-          </a:xfrm>
-          <a:prstGeom prst="rect">
-            <a:avLst/>
-          </a:prstGeom>
-          <a:noFill/>
-        </p:spPr>
-        <p:txBody>
-          <a:bodyPr wrap="none">
-            <a:spAutoFit/>
-          </a:bodyPr>
-          <a:lstStyle/>
-          <a:p>
-            <a:r>
-              <a:rPr sz="900" b="1" i="0">
-                <a:solidFill>
-                  <a:srgbClr val="333F52"/>
-                </a:solidFill>
-                <a:latin typeface="Calibri"/>
-              </a:rPr>
-              <a:t>→ SA360</a:t>
-            </a:r>
-          </a:p>
-        </p:txBody>
-      </p:sp>
-      <p:sp>
-        <p:nvSpPr>
-          <p:cNvPr id="34" name="TextBox 33"/>
-          <p:cNvSpPr txBox="1"/>
-          <p:nvPr/>
-        </p:nvSpPr>
-        <p:spPr>
-          <a:xfrm>
-            <a:off x="11521440" y="5330952"/>
-            <a:ext cx="640080" cy="228600"/>
-          </a:xfrm>
-          <a:prstGeom prst="rect">
-            <a:avLst/>
-          </a:prstGeom>
-          <a:noFill/>
-        </p:spPr>
-        <p:txBody>
-          <a:bodyPr wrap="none">
-            <a:spAutoFit/>
-          </a:bodyPr>
-          <a:lstStyle/>
-          <a:p>
-            <a:r>
-              <a:rPr sz="900" b="1" i="0">
-                <a:solidFill>
-                  <a:srgbClr val="333F52"/>
-                </a:solidFill>
-                <a:latin typeface="Calibri"/>
-              </a:rPr>
-              <a:t>→ SSGTM</a:t>
-            </a:r>
-          </a:p>
-        </p:txBody>
-      </p:sp>
-      <p:sp>
-        <p:nvSpPr>
-          <p:cNvPr id="35" name="TextBox 34"/>
-          <p:cNvSpPr txBox="1"/>
-          <p:nvPr/>
-        </p:nvSpPr>
-        <p:spPr>
-          <a:xfrm>
-            <a:off x="11521440" y="5586984"/>
-            <a:ext cx="640080" cy="228600"/>
-          </a:xfrm>
-          <a:prstGeom prst="rect">
-            <a:avLst/>
-          </a:prstGeom>
-          <a:noFill/>
-        </p:spPr>
-        <p:txBody>
-          <a:bodyPr wrap="none">
-            <a:spAutoFit/>
-          </a:bodyPr>
-          <a:lstStyle/>
-          <a:p>
-            <a:r>
-              <a:rPr sz="900" b="1" i="0">
-                <a:solidFill>
-                  <a:srgbClr val="333F52"/>
-                </a:solidFill>
-                <a:latin typeface="Calibri"/>
-              </a:rPr>
-              <a:t>→ OCI</a:t>
-            </a:r>
-          </a:p>
-        </p:txBody>
-      </p:sp>
-      <p:sp>
-        <p:nvSpPr>
-          <p:cNvPr id="36" name="Rounded Rectangle 35"/>
-          <p:cNvSpPr/>
-          <p:nvPr/>
-        </p:nvSpPr>
-        <p:spPr>
-          <a:xfrm>
-            <a:off x="4892040" y="5989320"/>
-            <a:ext cx="1280160" cy="274320"/>
-          </a:xfrm>
-          <a:prstGeom prst="roundRect">
-            <a:avLst>
-              <a:gd name="adj" fmla="val 30000"/>
-            </a:avLst>
-          </a:prstGeom>
-          <a:solidFill>
-            <a:srgbClr val="FFFFFF"/>
-          </a:solidFill>
-          <a:ln w="6350">
-            <a:solidFill>
-              <a:srgbClr val="D7DBE3"/>
-            </a:solidFill>
-          </a:ln>
-        </p:spPr>
-        <p:style>
-          <a:lnRef idx="1">
-            <a:schemeClr val="accent1"/>
-          </a:lnRef>
-          <a:fillRef idx="3">
-            <a:schemeClr val="accent1"/>
-          </a:fillRef>
-          <a:effectRef idx="2">
-            <a:schemeClr val="accent1"/>
-          </a:effectRef>
-          <a:fontRef idx="minor">
-            <a:schemeClr val="lt1"/>
-          </a:fontRef>
-        </p:style>
-        <p:txBody>
-          <a:bodyPr rtlCol="0" anchor="ctr" lIns="36576" rIns="36576"/>
-          <a:lstStyle/>
-          <a:p>
-            <a:pPr algn="ctr"/>
-            <a:r>
-              <a:rPr sz="800" b="1" i="0">
-                <a:solidFill>
-                  <a:srgbClr val="333F52"/>
-                </a:solidFill>
-                <a:latin typeface="Calibri"/>
-              </a:rPr>
-              <a:t>GitHub</a:t>
             </a:r>
           </a:p>
         </p:txBody>
       </p:sp>
       <p:cxnSp>
         <p:nvCxnSpPr>
-          <p:cNvPr id="37" name="Connector 36"/>
+          <p:cNvPr id="34" name="Connector 33"/>
           <p:cNvCxnSpPr/>
           <p:nvPr/>
         </p:nvCxnSpPr>
         <p:spPr>
           <a:xfrm>
-            <a:off x="6172200" y="6126480"/>
-            <a:ext cx="45720" cy="0"/>
+            <a:off x="3429000.0" y="3634740.0"/>
+            <a:ext cx="1508760.0" cy="0.0"/>
           </a:xfrm>
           <a:prstGeom prst="line">
             <a:avLst/>
           </a:prstGeom>
-          <a:ln w="9525">
+          <a:ln w="15875">
             <a:solidFill>
-              <a:srgbClr val="6B7380"/>
+              <a:srgbClr val="46556B"/>
             </a:solidFill>
-            <a:tailEnd type="triangle" w="sm" h="sm"/>
+            <a:tailEnd type="triangle" w="med" h="med"/>
           </a:ln>
         </p:spPr>
         <p:style>
@@ -11479,79 +11132,58 @@
       </p:cxnSp>
       <p:sp>
         <p:nvSpPr>
-          <p:cNvPr id="38" name="Rounded Rectangle 37"/>
-          <p:cNvSpPr/>
-          <p:nvPr/>
-        </p:nvSpPr>
-        <p:spPr>
-          <a:xfrm>
-            <a:off x="6217920" y="5989320"/>
-            <a:ext cx="1280160" cy="274320"/>
-          </a:xfrm>
-          <a:prstGeom prst="roundRect">
-            <a:avLst>
-              <a:gd name="adj" fmla="val 30000"/>
-            </a:avLst>
-          </a:prstGeom>
-          <a:solidFill>
-            <a:srgbClr val="FFFFFF"/>
-          </a:solidFill>
-          <a:ln w="6350">
-            <a:solidFill>
-              <a:srgbClr val="D7DBE3"/>
-            </a:solidFill>
-          </a:ln>
-        </p:spPr>
-        <p:style>
-          <a:lnRef idx="1">
-            <a:schemeClr val="accent1"/>
-          </a:lnRef>
-          <a:fillRef idx="3">
-            <a:schemeClr val="accent1"/>
-          </a:fillRef>
-          <a:effectRef idx="2">
-            <a:schemeClr val="accent1"/>
-          </a:effectRef>
-          <a:fontRef idx="minor">
-            <a:schemeClr val="lt1"/>
-          </a:fontRef>
-        </p:style>
-        <p:txBody>
-          <a:bodyPr rtlCol="0" anchor="ctr" lIns="36576" rIns="36576"/>
+          <p:cNvPr id="35" name="TextBox 34"/>
+          <p:cNvSpPr txBox="1"/>
+          <p:nvPr/>
+        </p:nvSpPr>
+        <p:spPr>
+          <a:xfrm>
+            <a:off x="3429000" y="3255264"/>
+            <a:ext cx="1508760" cy="164592"/>
+          </a:xfrm>
+          <a:prstGeom prst="rect">
+            <a:avLst/>
+          </a:prstGeom>
+          <a:noFill/>
+        </p:spPr>
+        <p:txBody>
+          <a:bodyPr wrap="square" lIns="18288" rIns="18288" tIns="0" bIns="0">
+            <a:spAutoFit/>
+          </a:bodyPr>
           <a:lstStyle/>
           <a:p>
             <a:pPr algn="ctr"/>
             <a:r>
-              <a:rPr sz="800" b="1" i="0">
-                <a:solidFill>
-                  <a:srgbClr val="333F52"/>
-                </a:solidFill>
-                <a:latin typeface="Calibri"/>
-              </a:rPr>
-              <a:t>WIF</a:t>
+              <a:rPr sz="700" b="0" i="1">
+                <a:solidFill>
+                  <a:srgbClr val="6B7380"/>
+                </a:solidFill>
+                <a:latin typeface="Calibri"/>
+              </a:rPr>
+              <a:t>BigQuery sub</a:t>
             </a:r>
           </a:p>
         </p:txBody>
       </p:sp>
       <p:cxnSp>
         <p:nvCxnSpPr>
-          <p:cNvPr id="39" name="Connector 38"/>
+          <p:cNvPr id="36" name="Connector 35"/>
           <p:cNvCxnSpPr/>
           <p:nvPr/>
         </p:nvCxnSpPr>
         <p:spPr>
           <a:xfrm>
-            <a:off x="7498080" y="6126480"/>
-            <a:ext cx="45720" cy="0"/>
+            <a:off x="7315200" y="3726180.0"/>
+            <a:ext cx="914400" cy="0.0"/>
           </a:xfrm>
           <a:prstGeom prst="line">
             <a:avLst/>
           </a:prstGeom>
-          <a:ln w="9525">
+          <a:ln w="15875">
             <a:solidFill>
-              <a:srgbClr val="6B7380"/>
+              <a:srgbClr val="46556B"/>
             </a:solidFill>
-            <a:tailEnd type="triangle" w="sm" h="sm"/>
+            <a:tailEnd type="triangle" w="med" h="med"/>
           </a:ln>
         </p:spPr>
         <p:style>
@@ -11571,79 +11203,58 @@
       </p:cxnSp>
       <p:sp>
         <p:nvSpPr>
-          <p:cNvPr id="40" name="Rounded Rectangle 39"/>
-          <p:cNvSpPr/>
-          <p:nvPr/>
-        </p:nvSpPr>
-        <p:spPr>
-          <a:xfrm>
-            <a:off x="7543800" y="5989320"/>
-            <a:ext cx="1280160" cy="274320"/>
-          </a:xfrm>
-          <a:prstGeom prst="roundRect">
-            <a:avLst>
-              <a:gd name="adj" fmla="val 30000"/>
-            </a:avLst>
-          </a:prstGeom>
-          <a:solidFill>
-            <a:srgbClr val="FFFFFF"/>
-          </a:solidFill>
-          <a:ln w="6350">
-            <a:solidFill>
-              <a:srgbClr val="D7DBE3"/>
-            </a:solidFill>
-          </a:ln>
-        </p:spPr>
-        <p:style>
-          <a:lnRef idx="1">
-            <a:schemeClr val="accent1"/>
-          </a:lnRef>
-          <a:fillRef idx="3">
-            <a:schemeClr val="accent1"/>
-          </a:fillRef>
-          <a:effectRef idx="2">
-            <a:schemeClr val="accent1"/>
-          </a:effectRef>
-          <a:fontRef idx="minor">
-            <a:schemeClr val="lt1"/>
-          </a:fontRef>
-        </p:style>
-        <p:txBody>
-          <a:bodyPr rtlCol="0" anchor="ctr" lIns="36576" rIns="36576"/>
+          <p:cNvPr id="37" name="TextBox 36"/>
+          <p:cNvSpPr txBox="1"/>
+          <p:nvPr/>
+        </p:nvSpPr>
+        <p:spPr>
+          <a:xfrm>
+            <a:off x="7315200" y="3525012"/>
+            <a:ext cx="914400" cy="182880"/>
+          </a:xfrm>
+          <a:prstGeom prst="rect">
+            <a:avLst/>
+          </a:prstGeom>
+          <a:noFill/>
+        </p:spPr>
+        <p:txBody>
+          <a:bodyPr wrap="square" lIns="18288" rIns="18288" tIns="0" bIns="0">
+            <a:spAutoFit/>
+          </a:bodyPr>
           <a:lstStyle/>
           <a:p>
             <a:pPr algn="ctr"/>
             <a:r>
-              <a:rPr sz="800" b="1" i="0">
-                <a:solidFill>
-                  <a:srgbClr val="333F52"/>
-                </a:solidFill>
-                <a:latin typeface="Calibri"/>
-              </a:rPr>
-              <a:t>Cloud Build</a:t>
+              <a:rPr sz="700" b="0" i="1">
+                <a:solidFill>
+                  <a:srgbClr val="6B7380"/>
+                </a:solidFill>
+                <a:latin typeface="Calibri"/>
+              </a:rPr>
+              <a:t>training data</a:t>
             </a:r>
           </a:p>
         </p:txBody>
       </p:sp>
       <p:cxnSp>
         <p:nvCxnSpPr>
-          <p:cNvPr id="41" name="Connector 40"/>
+          <p:cNvPr id="38" name="Connector 37"/>
           <p:cNvCxnSpPr/>
           <p:nvPr/>
         </p:nvCxnSpPr>
         <p:spPr>
           <a:xfrm>
-            <a:off x="8823960" y="6126480"/>
-            <a:ext cx="45720" cy="0"/>
+            <a:off x="10424160" y="3726180.0"/>
+            <a:ext cx="274320" cy="0.0"/>
           </a:xfrm>
           <a:prstGeom prst="line">
             <a:avLst/>
           </a:prstGeom>
-          <a:ln w="9525">
+          <a:ln w="15875">
             <a:solidFill>
-              <a:srgbClr val="6B7380"/>
+              <a:srgbClr val="46556B"/>
             </a:solidFill>
-            <a:tailEnd type="triangle" w="sm" h="sm"/>
+            <a:tailEnd type="triangle" w="med" h="med"/>
           </a:ln>
         </p:spPr>
         <p:style>
@@ -11663,79 +11274,58 @@
       </p:cxnSp>
       <p:sp>
         <p:nvSpPr>
-          <p:cNvPr id="42" name="Rounded Rectangle 41"/>
-          <p:cNvSpPr/>
-          <p:nvPr/>
-        </p:nvSpPr>
-        <p:spPr>
-          <a:xfrm>
-            <a:off x="8869680" y="5989320"/>
-            <a:ext cx="1280160" cy="274320"/>
-          </a:xfrm>
-          <a:prstGeom prst="roundRect">
-            <a:avLst>
-              <a:gd name="adj" fmla="val 30000"/>
-            </a:avLst>
-          </a:prstGeom>
-          <a:solidFill>
-            <a:srgbClr val="FFFFFF"/>
-          </a:solidFill>
-          <a:ln w="6350">
-            <a:solidFill>
-              <a:srgbClr val="D7DBE3"/>
-            </a:solidFill>
-          </a:ln>
-        </p:spPr>
-        <p:style>
-          <a:lnRef idx="1">
-            <a:schemeClr val="accent1"/>
-          </a:lnRef>
-          <a:fillRef idx="3">
-            <a:schemeClr val="accent1"/>
-          </a:fillRef>
-          <a:effectRef idx="2">
-            <a:schemeClr val="accent1"/>
-          </a:effectRef>
-          <a:fontRef idx="minor">
-            <a:schemeClr val="lt1"/>
-          </a:fontRef>
-        </p:style>
-        <p:txBody>
-          <a:bodyPr rtlCol="0" anchor="ctr" lIns="36576" rIns="36576"/>
+          <p:cNvPr id="39" name="TextBox 38"/>
+          <p:cNvSpPr txBox="1"/>
+          <p:nvPr/>
+        </p:nvSpPr>
+        <p:spPr>
+          <a:xfrm>
+            <a:off x="10424160" y="3525012"/>
+            <a:ext cx="274320" cy="164592"/>
+          </a:xfrm>
+          <a:prstGeom prst="rect">
+            <a:avLst/>
+          </a:prstGeom>
+          <a:noFill/>
+        </p:spPr>
+        <p:txBody>
+          <a:bodyPr wrap="square" lIns="18288" rIns="18288" tIns="0" bIns="0">
+            <a:spAutoFit/>
+          </a:bodyPr>
           <a:lstStyle/>
           <a:p>
             <a:pPr algn="ctr"/>
             <a:r>
-              <a:rPr sz="800" b="1" i="0">
-                <a:solidFill>
-                  <a:srgbClr val="333F52"/>
-                </a:solidFill>
-                <a:latin typeface="Calibri"/>
-              </a:rPr>
-              <a:t>Artifact Registry</a:t>
+              <a:rPr sz="700" b="0" i="1">
+                <a:solidFill>
+                  <a:srgbClr val="6B7380"/>
+                </a:solidFill>
+                <a:latin typeface="Calibri"/>
+              </a:rPr>
+              <a:t>artifacts</a:t>
             </a:r>
           </a:p>
         </p:txBody>
       </p:sp>
       <p:cxnSp>
         <p:nvCxnSpPr>
-          <p:cNvPr id="43" name="Connector 42"/>
+          <p:cNvPr id="40" name="Connector 39"/>
           <p:cNvCxnSpPr/>
           <p:nvPr/>
         </p:nvCxnSpPr>
         <p:spPr>
           <a:xfrm>
-            <a:off x="10149840" y="6126480"/>
-            <a:ext cx="45720" cy="0"/>
+            <a:off x="2834640.0" y="2651760"/>
+            <a:ext cx="0.0" cy="731520"/>
           </a:xfrm>
           <a:prstGeom prst="line">
             <a:avLst/>
           </a:prstGeom>
-          <a:ln w="9525">
+          <a:ln w="15875">
             <a:solidFill>
-              <a:srgbClr val="6B7380"/>
+              <a:srgbClr val="46556B"/>
             </a:solidFill>
-            <a:tailEnd type="triangle" w="sm" h="sm"/>
+            <a:tailEnd type="triangle" w="med" h="med"/>
           </a:ln>
         </p:spPr>
         <p:style>
@@ -11755,140 +11345,14 @@
       </p:cxnSp>
       <p:sp>
         <p:nvSpPr>
-          <p:cNvPr id="44" name="Rounded Rectangle 43"/>
-          <p:cNvSpPr/>
-          <p:nvPr/>
-        </p:nvSpPr>
-        <p:spPr>
-          <a:xfrm>
-            <a:off x="10195560" y="5989320"/>
-            <a:ext cx="1280160" cy="274320"/>
-          </a:xfrm>
-          <a:prstGeom prst="roundRect">
-            <a:avLst>
-              <a:gd name="adj" fmla="val 30000"/>
-            </a:avLst>
-          </a:prstGeom>
-          <a:solidFill>
-            <a:srgbClr val="FFFFFF"/>
-          </a:solidFill>
-          <a:ln w="6350">
-            <a:solidFill>
-              <a:srgbClr val="D7DBE3"/>
-            </a:solidFill>
-          </a:ln>
-        </p:spPr>
-        <p:style>
-          <a:lnRef idx="1">
-            <a:schemeClr val="accent1"/>
-          </a:lnRef>
-          <a:fillRef idx="3">
-            <a:schemeClr val="accent1"/>
-          </a:fillRef>
-          <a:effectRef idx="2">
-            <a:schemeClr val="accent1"/>
-          </a:effectRef>
-          <a:fontRef idx="minor">
-            <a:schemeClr val="lt1"/>
-          </a:fontRef>
-        </p:style>
-        <p:txBody>
-          <a:bodyPr rtlCol="0" anchor="ctr" lIns="36576" rIns="36576"/>
-          <a:lstStyle/>
-          <a:p>
-            <a:pPr algn="ctr"/>
-            <a:r>
-              <a:rPr sz="800" b="1" i="0">
-                <a:solidFill>
-                  <a:srgbClr val="333F52"/>
-                </a:solidFill>
-                <a:latin typeface="Calibri"/>
-              </a:rPr>
-              <a:t>Cloud Run</a:t>
-            </a:r>
-          </a:p>
-        </p:txBody>
-      </p:sp>
-      <p:sp>
-        <p:nvSpPr>
-          <p:cNvPr id="45" name="TextBox 44"/>
+          <p:cNvPr id="41" name="TextBox 40"/>
           <p:cNvSpPr txBox="1"/>
           <p:nvPr/>
         </p:nvSpPr>
         <p:spPr>
           <a:xfrm>
-            <a:off x="4892040" y="5760720"/>
-            <a:ext cx="1828800" cy="201168"/>
-          </a:xfrm>
-          <a:prstGeom prst="rect">
-            <a:avLst/>
-          </a:prstGeom>
-          <a:noFill/>
-        </p:spPr>
-        <p:txBody>
-          <a:bodyPr wrap="none">
-            <a:spAutoFit/>
-          </a:bodyPr>
-          <a:lstStyle/>
-          <a:p>
-            <a:r>
-              <a:rPr sz="800" b="1" i="1">
-                <a:solidFill>
-                  <a:srgbClr val="6B7380"/>
-                </a:solidFill>
-                <a:latin typeface="Calibri"/>
-              </a:rPr>
-              <a:t>Continuous delivery</a:t>
-            </a:r>
-          </a:p>
-        </p:txBody>
-      </p:sp>
-      <p:cxnSp>
-        <p:nvCxnSpPr>
-          <p:cNvPr id="46" name="Connector 45"/>
-          <p:cNvCxnSpPr/>
-          <p:nvPr/>
-        </p:nvCxnSpPr>
-        <p:spPr>
-          <a:xfrm>
-            <a:off x="685800" y="1993392"/>
-            <a:ext cx="685800" cy="0"/>
-          </a:xfrm>
-          <a:prstGeom prst="line">
-            <a:avLst/>
-          </a:prstGeom>
-          <a:ln w="19050">
-            <a:solidFill>
-              <a:srgbClr val="5F6B7C"/>
-            </a:solidFill>
-            <a:tailEnd type="triangle" w="sm" h="sm"/>
-          </a:ln>
-        </p:spPr>
-        <p:style>
-          <a:lnRef idx="2">
-            <a:schemeClr val="accent1"/>
-          </a:lnRef>
-          <a:fillRef idx="0">
-            <a:schemeClr val="accent1"/>
-          </a:fillRef>
-          <a:effectRef idx="1">
-            <a:schemeClr val="accent1"/>
-          </a:effectRef>
-          <a:fontRef idx="minor">
-            <a:schemeClr val="tx1"/>
-          </a:fontRef>
-        </p:style>
-      </p:cxnSp>
-      <p:sp>
-        <p:nvSpPr>
-          <p:cNvPr id="47" name="TextBox 46"/>
-          <p:cNvSpPr txBox="1"/>
-          <p:nvPr/>
-        </p:nvSpPr>
-        <p:spPr>
-          <a:xfrm>
-            <a:off x="502920" y="1691640"/>
-            <a:ext cx="960120" cy="274320"/>
+            <a:off x="2331720" y="2670048"/>
+            <a:ext cx="1005840" cy="164592"/>
           </a:xfrm>
           <a:prstGeom prst="rect">
             <a:avLst/>
@@ -11903,178 +11367,35 @@
           <a:p>
             <a:pPr algn="ctr"/>
             <a:r>
-              <a:rPr sz="800" b="0" i="1">
+              <a:rPr sz="700" b="0" i="1">
                 <a:solidFill>
                   <a:srgbClr val="6B7380"/>
                 </a:solidFill>
                 <a:latin typeface="Calibri"/>
               </a:rPr>
-              <a:t>HTTPS click</a:t>
+              <a:t>emit prediction</a:t>
             </a:r>
           </a:p>
         </p:txBody>
       </p:sp>
       <p:cxnSp>
         <p:nvCxnSpPr>
-          <p:cNvPr id="48" name="Connector 47"/>
+          <p:cNvPr id="42" name="Connector 41"/>
           <p:cNvCxnSpPr/>
           <p:nvPr/>
         </p:nvCxnSpPr>
         <p:spPr>
-          <a:xfrm>
-            <a:off x="4114800" y="1691640"/>
-            <a:ext cx="457200" cy="0"/>
+          <a:xfrm flipV="1">
+            <a:off x="9326880.0" y="2857500.0"/>
+            <a:ext cx="0.0" cy="480060.0"/>
           </a:xfrm>
           <a:prstGeom prst="line">
             <a:avLst/>
           </a:prstGeom>
-          <a:ln w="19050">
+          <a:ln w="12700">
             <a:solidFill>
-              <a:srgbClr val="5F6B7C"/>
+              <a:srgbClr val="34A853"/>
             </a:solidFill>
-            <a:tailEnd type="triangle" w="sm" h="sm"/>
-          </a:ln>
-        </p:spPr>
-        <p:style>
-          <a:lnRef idx="2">
-            <a:schemeClr val="accent1"/>
-          </a:lnRef>
-          <a:fillRef idx="0">
-            <a:schemeClr val="accent1"/>
-          </a:fillRef>
-          <a:effectRef idx="1">
-            <a:schemeClr val="accent1"/>
-          </a:effectRef>
-          <a:fontRef idx="minor">
-            <a:schemeClr val="tx1"/>
-          </a:fontRef>
-        </p:style>
-      </p:cxnSp>
-      <p:sp>
-        <p:nvSpPr>
-          <p:cNvPr id="49" name="TextBox 48"/>
-          <p:cNvSpPr txBox="1"/>
-          <p:nvPr/>
-        </p:nvSpPr>
-        <p:spPr>
-          <a:xfrm>
-            <a:off x="4114800" y="1481328"/>
-            <a:ext cx="457200" cy="201168"/>
-          </a:xfrm>
-          <a:prstGeom prst="rect">
-            <a:avLst/>
-          </a:prstGeom>
-          <a:noFill/>
-        </p:spPr>
-        <p:txBody>
-          <a:bodyPr wrap="square" lIns="18288" rIns="18288" tIns="0" bIns="0">
-            <a:spAutoFit/>
-          </a:bodyPr>
-          <a:lstStyle/>
-          <a:p>
-            <a:pPr algn="ctr"/>
-            <a:r>
-              <a:rPr sz="700" b="0" i="1">
-                <a:solidFill>
-                  <a:srgbClr val="6B7380"/>
-                </a:solidFill>
-                <a:latin typeface="Calibri"/>
-              </a:rPr>
-              <a:t>predict</a:t>
-            </a:r>
-          </a:p>
-        </p:txBody>
-      </p:sp>
-      <p:cxnSp>
-        <p:nvCxnSpPr>
-          <p:cNvPr id="50" name="Connector 49"/>
-          <p:cNvCxnSpPr/>
-          <p:nvPr/>
-        </p:nvCxnSpPr>
-        <p:spPr>
-          <a:xfrm flipH="1">
-            <a:off x="4114800" y="2057400"/>
-            <a:ext cx="457200" cy="0"/>
-          </a:xfrm>
-          <a:prstGeom prst="line">
-            <a:avLst/>
-          </a:prstGeom>
-          <a:ln w="19050">
-            <a:solidFill>
-              <a:srgbClr val="E87B1E"/>
-            </a:solidFill>
-            <a:tailEnd type="triangle" w="sm" h="sm"/>
-          </a:ln>
-        </p:spPr>
-        <p:style>
-          <a:lnRef idx="2">
-            <a:schemeClr val="accent1"/>
-          </a:lnRef>
-          <a:fillRef idx="0">
-            <a:schemeClr val="accent1"/>
-          </a:fillRef>
-          <a:effectRef idx="1">
-            <a:schemeClr val="accent1"/>
-          </a:effectRef>
-          <a:fontRef idx="minor">
-            <a:schemeClr val="tx1"/>
-          </a:fontRef>
-        </p:style>
-      </p:cxnSp>
-      <p:sp>
-        <p:nvSpPr>
-          <p:cNvPr id="51" name="TextBox 50"/>
-          <p:cNvSpPr txBox="1"/>
-          <p:nvPr/>
-        </p:nvSpPr>
-        <p:spPr>
-          <a:xfrm>
-            <a:off x="4114800" y="2084831"/>
-            <a:ext cx="457200" cy="201168"/>
-          </a:xfrm>
-          <a:prstGeom prst="rect">
-            <a:avLst/>
-          </a:prstGeom>
-          <a:noFill/>
-        </p:spPr>
-        <p:txBody>
-          <a:bodyPr wrap="square" lIns="18288" rIns="18288" tIns="0" bIns="0">
-            <a:spAutoFit/>
-          </a:bodyPr>
-          <a:lstStyle/>
-          <a:p>
-            <a:pPr algn="ctr"/>
-            <a:r>
-              <a:rPr sz="700" b="0" i="1">
-                <a:solidFill>
-                  <a:srgbClr val="E87B1E"/>
-                </a:solidFill>
-                <a:latin typeface="Calibri"/>
-              </a:rPr>
-              <a:t>rpc</a:t>
-            </a:r>
-          </a:p>
-        </p:txBody>
-      </p:sp>
-      <p:cxnSp>
-        <p:nvCxnSpPr>
-          <p:cNvPr id="52" name="Connector 51"/>
-          <p:cNvCxnSpPr/>
-          <p:nvPr/>
-        </p:nvCxnSpPr>
-        <p:spPr>
-          <a:xfrm>
-            <a:off x="3200400" y="2926080"/>
-            <a:ext cx="502920" cy="1234440"/>
-          </a:xfrm>
-          <a:prstGeom prst="line">
-            <a:avLst/>
-          </a:prstGeom>
-          <a:ln w="15875">
-            <a:solidFill>
-              <a:srgbClr val="E87B1E"/>
-            </a:solidFill>
-            <a:tailEnd type="triangle" w="sm" h="sm"/>
           </a:ln>
         </p:spPr>
         <p:style>
@@ -12094,23 +11415,485 @@
       </p:cxnSp>
       <p:cxnSp>
         <p:nvCxnSpPr>
+          <p:cNvPr id="43" name="Connector 42"/>
+          <p:cNvCxnSpPr/>
+          <p:nvPr/>
+        </p:nvCxnSpPr>
+        <p:spPr>
+          <a:xfrm flipH="1">
+            <a:off x="6126480.0" y="2857500.0"/>
+            <a:ext cx="3200400.0" cy="0.0"/>
+          </a:xfrm>
+          <a:prstGeom prst="line">
+            <a:avLst/>
+          </a:prstGeom>
+          <a:ln w="12700">
+            <a:solidFill>
+              <a:srgbClr val="34A853"/>
+            </a:solidFill>
+          </a:ln>
+        </p:spPr>
+        <p:style>
+          <a:lnRef idx="2">
+            <a:schemeClr val="accent1"/>
+          </a:lnRef>
+          <a:fillRef idx="0">
+            <a:schemeClr val="accent1"/>
+          </a:fillRef>
+          <a:effectRef idx="1">
+            <a:schemeClr val="accent1"/>
+          </a:effectRef>
+          <a:fontRef idx="minor">
+            <a:schemeClr val="tx1"/>
+          </a:fontRef>
+        </p:style>
+      </p:cxnSp>
+      <p:cxnSp>
+        <p:nvCxnSpPr>
+          <p:cNvPr id="44" name="Connector 43"/>
+          <p:cNvCxnSpPr/>
+          <p:nvPr/>
+        </p:nvCxnSpPr>
+        <p:spPr>
+          <a:xfrm flipV="1">
+            <a:off x="6126480.0" y="2651760"/>
+            <a:ext cx="0.0" cy="205740.0"/>
+          </a:xfrm>
+          <a:prstGeom prst="line">
+            <a:avLst/>
+          </a:prstGeom>
+          <a:ln w="12700">
+            <a:solidFill>
+              <a:srgbClr val="34A853"/>
+            </a:solidFill>
+            <a:tailEnd type="triangle" w="med" h="med"/>
+          </a:ln>
+        </p:spPr>
+        <p:style>
+          <a:lnRef idx="2">
+            <a:schemeClr val="accent1"/>
+          </a:lnRef>
+          <a:fillRef idx="0">
+            <a:schemeClr val="accent1"/>
+          </a:fillRef>
+          <a:effectRef idx="1">
+            <a:schemeClr val="accent1"/>
+          </a:effectRef>
+          <a:fontRef idx="minor">
+            <a:schemeClr val="tx1"/>
+          </a:fontRef>
+        </p:style>
+      </p:cxnSp>
+      <p:sp>
+        <p:nvSpPr>
+          <p:cNvPr id="45" name="TextBox 44"/>
+          <p:cNvSpPr txBox="1"/>
+          <p:nvPr/>
+        </p:nvSpPr>
+        <p:spPr>
+          <a:xfrm>
+            <a:off x="7955280" y="2692908"/>
+            <a:ext cx="1280160" cy="164592"/>
+          </a:xfrm>
+          <a:prstGeom prst="rect">
+            <a:avLst/>
+          </a:prstGeom>
+          <a:noFill/>
+        </p:spPr>
+        <p:txBody>
+          <a:bodyPr wrap="square" lIns="18288" rIns="18288" tIns="0" bIns="0">
+            <a:spAutoFit/>
+          </a:bodyPr>
+          <a:lstStyle/>
+          <a:p>
+            <a:pPr algn="ctr"/>
+            <a:r>
+              <a:rPr sz="700" b="0" i="1">
+                <a:solidFill>
+                  <a:srgbClr val="34A853"/>
+                </a:solidFill>
+                <a:latin typeface="Calibri"/>
+              </a:rPr>
+              <a:t>deploy / retrain</a:t>
+            </a:r>
+          </a:p>
+        </p:txBody>
+      </p:sp>
+      <p:sp>
+        <p:nvSpPr>
+          <p:cNvPr id="46" name="Rounded Rectangle 45"/>
+          <p:cNvSpPr/>
+          <p:nvPr/>
+        </p:nvSpPr>
+        <p:spPr>
+          <a:xfrm>
+            <a:off x="1554480" y="4800600"/>
+            <a:ext cx="2011680" cy="777240"/>
+          </a:xfrm>
+          <a:prstGeom prst="roundRect">
+            <a:avLst>
+              <a:gd name="adj" fmla="val 10000"/>
+            </a:avLst>
+          </a:prstGeom>
+          <a:solidFill>
+            <a:srgbClr val="4E88E6"/>
+          </a:solidFill>
+          <a:ln>
+            <a:noFill/>
+          </a:ln>
+        </p:spPr>
+        <p:style>
+          <a:lnRef idx="1">
+            <a:schemeClr val="accent1"/>
+          </a:lnRef>
+          <a:fillRef idx="3">
+            <a:schemeClr val="accent1"/>
+          </a:fillRef>
+          <a:effectRef idx="2">
+            <a:schemeClr val="accent1"/>
+          </a:effectRef>
+          <a:fontRef idx="minor">
+            <a:schemeClr val="lt1"/>
+          </a:fontRef>
+        </p:style>
+        <p:txBody>
+          <a:bodyPr rtlCol="0" anchor="ctr" lIns="73152" rIns="73152" wrap="square"/>
+          <a:lstStyle/>
+          <a:p>
+            <a:pPr algn="ctr"/>
+            <a:r>
+              <a:rPr sz="1100" b="1" i="0">
+                <a:solidFill>
+                  <a:srgbClr val="FFFFFF"/>
+                </a:solidFill>
+                <a:latin typeface="Calibri"/>
+              </a:rPr>
+              <a:t>Breaker Automation</a:t>
+            </a:r>
+          </a:p>
+          <a:p>
+            <a:pPr algn="ctr"/>
+            <a:r>
+              <a:rPr sz="800" b="0" i="0">
+                <a:solidFill>
+                  <a:srgbClr val="FFFFFF"/>
+                </a:solidFill>
+                <a:latin typeface="Calibri"/>
+              </a:rPr>
+              <a:t>Python  ·  flips kill-switch</a:t>
+            </a:r>
+          </a:p>
+        </p:txBody>
+      </p:sp>
+      <p:sp>
+        <p:nvSpPr>
+          <p:cNvPr id="47" name="Rounded Rectangle 46"/>
+          <p:cNvSpPr/>
+          <p:nvPr/>
+        </p:nvSpPr>
+        <p:spPr>
+          <a:xfrm>
+            <a:off x="3749040" y="4937760"/>
+            <a:ext cx="1371600" cy="502920"/>
+          </a:xfrm>
+          <a:prstGeom prst="roundRect">
+            <a:avLst>
+              <a:gd name="adj" fmla="val 20000"/>
+            </a:avLst>
+          </a:prstGeom>
+          <a:solidFill>
+            <a:srgbClr val="FFFFFF"/>
+          </a:solidFill>
+          <a:ln w="9525">
+            <a:solidFill>
+              <a:srgbClr val="C9CFDA"/>
+            </a:solidFill>
+          </a:ln>
+        </p:spPr>
+        <p:style>
+          <a:lnRef idx="1">
+            <a:schemeClr val="accent1"/>
+          </a:lnRef>
+          <a:fillRef idx="3">
+            <a:schemeClr val="accent1"/>
+          </a:fillRef>
+          <a:effectRef idx="2">
+            <a:schemeClr val="accent1"/>
+          </a:effectRef>
+          <a:fontRef idx="minor">
+            <a:schemeClr val="lt1"/>
+          </a:fontRef>
+        </p:style>
+        <p:txBody>
+          <a:bodyPr rtlCol="0" anchor="ctr"/>
+          <a:lstStyle/>
+          <a:p>
+            <a:pPr algn="ctr"/>
+            <a:r>
+              <a:rPr sz="900" b="1" i="0">
+                <a:solidFill>
+                  <a:srgbClr val="0B1F3A"/>
+                </a:solidFill>
+                <a:latin typeface="Calibri"/>
+              </a:rPr>
+              <a:t>Secret Manager</a:t>
+            </a:r>
+          </a:p>
+        </p:txBody>
+      </p:sp>
+      <p:sp>
+        <p:nvSpPr>
+          <p:cNvPr id="48" name="Rounded Rectangle 47"/>
+          <p:cNvSpPr/>
+          <p:nvPr/>
+        </p:nvSpPr>
+        <p:spPr>
+          <a:xfrm>
+            <a:off x="4937760" y="4800600"/>
+            <a:ext cx="2377440" cy="777240"/>
+          </a:xfrm>
+          <a:prstGeom prst="roundRect">
+            <a:avLst>
+              <a:gd name="adj" fmla="val 10000"/>
+            </a:avLst>
+          </a:prstGeom>
+          <a:solidFill>
+            <a:srgbClr val="4E88E6"/>
+          </a:solidFill>
+          <a:ln>
+            <a:noFill/>
+          </a:ln>
+        </p:spPr>
+        <p:style>
+          <a:lnRef idx="1">
+            <a:schemeClr val="accent1"/>
+          </a:lnRef>
+          <a:fillRef idx="3">
+            <a:schemeClr val="accent1"/>
+          </a:fillRef>
+          <a:effectRef idx="2">
+            <a:schemeClr val="accent1"/>
+          </a:effectRef>
+          <a:fontRef idx="minor">
+            <a:schemeClr val="lt1"/>
+          </a:fontRef>
+        </p:style>
+        <p:txBody>
+          <a:bodyPr rtlCol="0" anchor="ctr" lIns="73152" rIns="73152" wrap="square"/>
+          <a:lstStyle/>
+          <a:p>
+            <a:pPr algn="ctr"/>
+            <a:r>
+              <a:rPr sz="1100" b="1" i="0">
+                <a:solidFill>
+                  <a:srgbClr val="FFFFFF"/>
+                </a:solidFill>
+                <a:latin typeface="Calibri"/>
+              </a:rPr>
+              <a:t>Reconciliation Service</a:t>
+            </a:r>
+          </a:p>
+          <a:p>
+            <a:pPr algn="ctr"/>
+            <a:r>
+              <a:rPr sz="800" b="0" i="0">
+                <a:solidFill>
+                  <a:srgbClr val="FFFFFF"/>
+                </a:solidFill>
+                <a:latin typeface="Calibri"/>
+              </a:rPr>
+              <a:t>Python FastAPI  ·  Cloud Run</a:t>
+            </a:r>
+          </a:p>
+        </p:txBody>
+      </p:sp>
+      <p:sp>
+        <p:nvSpPr>
+          <p:cNvPr id="49" name="Rounded Rectangle 48"/>
+          <p:cNvSpPr/>
+          <p:nvPr/>
+        </p:nvSpPr>
+        <p:spPr>
+          <a:xfrm>
+            <a:off x="8229600" y="4800600"/>
+            <a:ext cx="2194560" cy="777240"/>
+          </a:xfrm>
+          <a:prstGeom prst="roundRect">
+            <a:avLst>
+              <a:gd name="adj" fmla="val 10000"/>
+            </a:avLst>
+          </a:prstGeom>
+          <a:solidFill>
+            <a:srgbClr val="4E88E6"/>
+          </a:solidFill>
+          <a:ln>
+            <a:noFill/>
+          </a:ln>
+        </p:spPr>
+        <p:style>
+          <a:lnRef idx="1">
+            <a:schemeClr val="accent1"/>
+          </a:lnRef>
+          <a:fillRef idx="3">
+            <a:schemeClr val="accent1"/>
+          </a:fillRef>
+          <a:effectRef idx="2">
+            <a:schemeClr val="accent1"/>
+          </a:effectRef>
+          <a:fontRef idx="minor">
+            <a:schemeClr val="lt1"/>
+          </a:fontRef>
+        </p:style>
+        <p:txBody>
+          <a:bodyPr rtlCol="0" anchor="ctr" lIns="73152" rIns="73152" wrap="square"/>
+          <a:lstStyle/>
+          <a:p>
+            <a:pPr algn="ctr"/>
+            <a:r>
+              <a:rPr sz="1100" b="1" i="0">
+                <a:solidFill>
+                  <a:srgbClr val="FFFFFF"/>
+                </a:solidFill>
+                <a:latin typeface="Calibri"/>
+              </a:rPr>
+              <a:t>Activation Service</a:t>
+            </a:r>
+          </a:p>
+          <a:p>
+            <a:pPr algn="ctr"/>
+            <a:r>
+              <a:rPr sz="800" b="0" i="0">
+                <a:solidFill>
+                  <a:srgbClr val="FFFFFF"/>
+                </a:solidFill>
+                <a:latin typeface="Calibri"/>
+              </a:rPr>
+              <a:t>Python 3.12  ·  Cloud Run</a:t>
+            </a:r>
+          </a:p>
+        </p:txBody>
+      </p:sp>
+      <p:sp>
+        <p:nvSpPr>
+          <p:cNvPr id="50" name="TextBox 49"/>
+          <p:cNvSpPr txBox="1"/>
+          <p:nvPr/>
+        </p:nvSpPr>
+        <p:spPr>
+          <a:xfrm>
+            <a:off x="10561320" y="4846320"/>
+            <a:ext cx="914400" cy="219456"/>
+          </a:xfrm>
+          <a:prstGeom prst="rect">
+            <a:avLst/>
+          </a:prstGeom>
+          <a:noFill/>
+        </p:spPr>
+        <p:txBody>
+          <a:bodyPr wrap="none">
+            <a:spAutoFit/>
+          </a:bodyPr>
+          <a:lstStyle/>
+          <a:p>
+            <a:r>
+              <a:rPr sz="900" b="1" i="0">
+                <a:solidFill>
+                  <a:srgbClr val="333F52"/>
+                </a:solidFill>
+                <a:latin typeface="Calibri"/>
+              </a:rPr>
+              <a:t>→  SA360</a:t>
+            </a:r>
+          </a:p>
+        </p:txBody>
+      </p:sp>
+      <p:sp>
+        <p:nvSpPr>
+          <p:cNvPr id="51" name="TextBox 50"/>
+          <p:cNvSpPr txBox="1"/>
+          <p:nvPr/>
+        </p:nvSpPr>
+        <p:spPr>
+          <a:xfrm>
+            <a:off x="10561320" y="5084064"/>
+            <a:ext cx="914400" cy="219456"/>
+          </a:xfrm>
+          <a:prstGeom prst="rect">
+            <a:avLst/>
+          </a:prstGeom>
+          <a:noFill/>
+        </p:spPr>
+        <p:txBody>
+          <a:bodyPr wrap="none">
+            <a:spAutoFit/>
+          </a:bodyPr>
+          <a:lstStyle/>
+          <a:p>
+            <a:r>
+              <a:rPr sz="900" b="1" i="0">
+                <a:solidFill>
+                  <a:srgbClr val="333F52"/>
+                </a:solidFill>
+                <a:latin typeface="Calibri"/>
+              </a:rPr>
+              <a:t>→  SSGTM</a:t>
+            </a:r>
+          </a:p>
+        </p:txBody>
+      </p:sp>
+      <p:sp>
+        <p:nvSpPr>
+          <p:cNvPr id="52" name="TextBox 51"/>
+          <p:cNvSpPr txBox="1"/>
+          <p:nvPr/>
+        </p:nvSpPr>
+        <p:spPr>
+          <a:xfrm>
+            <a:off x="10561320" y="5321808"/>
+            <a:ext cx="914400" cy="219456"/>
+          </a:xfrm>
+          <a:prstGeom prst="rect">
+            <a:avLst/>
+          </a:prstGeom>
+          <a:noFill/>
+        </p:spPr>
+        <p:txBody>
+          <a:bodyPr wrap="none">
+            <a:spAutoFit/>
+          </a:bodyPr>
+          <a:lstStyle/>
+          <a:p>
+            <a:r>
+              <a:rPr sz="900" b="1" i="0">
+                <a:solidFill>
+                  <a:srgbClr val="333F52"/>
+                </a:solidFill>
+                <a:latin typeface="Calibri"/>
+              </a:rPr>
+              <a:t>→  OCI</a:t>
+            </a:r>
+          </a:p>
+        </p:txBody>
+      </p:sp>
+      <p:cxnSp>
+        <p:nvCxnSpPr>
           <p:cNvPr id="53" name="Connector 52"/>
           <p:cNvCxnSpPr/>
           <p:nvPr/>
         </p:nvCxnSpPr>
         <p:spPr>
-          <a:xfrm flipV="1">
-            <a:off x="4160520" y="4343400"/>
-            <a:ext cx="868680" cy="27432"/>
+          <a:xfrm>
+            <a:off x="3566160" y="5189220.0"/>
+            <a:ext cx="182880" cy="0.0"/>
           </a:xfrm>
           <a:prstGeom prst="line">
             <a:avLst/>
           </a:prstGeom>
           <a:ln w="15875">
             <a:solidFill>
-              <a:srgbClr val="E87B1E"/>
+              <a:srgbClr val="46556B"/>
             </a:solidFill>
-            <a:tailEnd type="triangle" w="sm" h="sm"/>
+            <a:tailEnd type="triangle" w="med" h="med"/>
           </a:ln>
         </p:spPr>
         <p:style>
@@ -12136,17 +11919,17 @@
         </p:nvCxnSpPr>
         <p:spPr>
           <a:xfrm>
-            <a:off x="4114800" y="2697480"/>
-            <a:ext cx="1371600" cy="1874520"/>
+            <a:off x="10424160" y="5189220.0"/>
+            <a:ext cx="91440" cy="0.0"/>
           </a:xfrm>
           <a:prstGeom prst="line">
             <a:avLst/>
           </a:prstGeom>
-          <a:ln w="12700">
+          <a:ln w="15875">
             <a:solidFill>
-              <a:srgbClr val="E87B1E"/>
+              <a:srgbClr val="46556B"/>
             </a:solidFill>
-            <a:tailEnd type="triangle" w="sm" h="sm"/>
+            <a:tailEnd type="triangle" w="med" h="med"/>
           </a:ln>
         </p:spPr>
         <p:style>
@@ -12171,18 +11954,159 @@
           <p:nvPr/>
         </p:nvCxnSpPr>
         <p:spPr>
-          <a:xfrm>
-            <a:off x="685800" y="2148840"/>
-            <a:ext cx="1143000" cy="2011680"/>
+          <a:xfrm flipV="1">
+            <a:off x="4434840.0" y="2651760"/>
+            <a:ext cx="0.0" cy="2286000"/>
           </a:xfrm>
           <a:prstGeom prst="line">
             <a:avLst/>
           </a:prstGeom>
           <a:ln w="12700">
             <a:solidFill>
-              <a:srgbClr val="A96BDB"/>
+              <a:srgbClr val="46556B"/>
             </a:solidFill>
-            <a:tailEnd type="triangle" w="sm" h="sm"/>
+            <a:tailEnd type="triangle" w="med" h="med"/>
+          </a:ln>
+        </p:spPr>
+        <p:style>
+          <a:lnRef idx="2">
+            <a:schemeClr val="accent1"/>
+          </a:lnRef>
+          <a:fillRef idx="0">
+            <a:schemeClr val="accent1"/>
+          </a:fillRef>
+          <a:effectRef idx="1">
+            <a:schemeClr val="accent1"/>
+          </a:effectRef>
+          <a:fontRef idx="minor">
+            <a:schemeClr val="tx1"/>
+          </a:fontRef>
+        </p:style>
+      </p:cxnSp>
+      <p:sp>
+        <p:nvSpPr>
+          <p:cNvPr id="56" name="TextBox 55"/>
+          <p:cNvSpPr txBox="1"/>
+          <p:nvPr/>
+        </p:nvSpPr>
+        <p:spPr>
+          <a:xfrm>
+            <a:off x="4480560" y="3703320"/>
+            <a:ext cx="1463040" cy="164592"/>
+          </a:xfrm>
+          <a:prstGeom prst="rect">
+            <a:avLst/>
+          </a:prstGeom>
+          <a:noFill/>
+        </p:spPr>
+        <p:txBody>
+          <a:bodyPr wrap="square" lIns="18288" rIns="18288" tIns="0" bIns="0">
+            <a:spAutoFit/>
+          </a:bodyPr>
+          <a:lstStyle/>
+          <a:p>
+            <a:pPr algn="l"/>
+            <a:r>
+              <a:rPr sz="700" b="0" i="1">
+                <a:solidFill>
+                  <a:srgbClr val="6B7380"/>
+                </a:solidFill>
+                <a:latin typeface="Calibri"/>
+              </a:rPr>
+              <a:t>kill-switch flag</a:t>
+            </a:r>
+          </a:p>
+        </p:txBody>
+      </p:sp>
+      <p:cxnSp>
+        <p:nvCxnSpPr>
+          <p:cNvPr id="57" name="Connector 56"/>
+          <p:cNvCxnSpPr/>
+          <p:nvPr/>
+        </p:nvCxnSpPr>
+        <p:spPr>
+          <a:xfrm>
+            <a:off x="6126480.0" y="4224528"/>
+            <a:ext cx="0.0" cy="576072"/>
+          </a:xfrm>
+          <a:prstGeom prst="line">
+            <a:avLst/>
+          </a:prstGeom>
+          <a:ln w="15875">
+            <a:solidFill>
+              <a:srgbClr val="46556B"/>
+            </a:solidFill>
+            <a:tailEnd type="triangle" w="med" h="med"/>
+          </a:ln>
+        </p:spPr>
+        <p:style>
+          <a:lnRef idx="2">
+            <a:schemeClr val="accent1"/>
+          </a:lnRef>
+          <a:fillRef idx="0">
+            <a:schemeClr val="accent1"/>
+          </a:fillRef>
+          <a:effectRef idx="1">
+            <a:schemeClr val="accent1"/>
+          </a:effectRef>
+          <a:fontRef idx="minor">
+            <a:schemeClr val="tx1"/>
+          </a:fontRef>
+        </p:style>
+      </p:cxnSp>
+      <p:sp>
+        <p:nvSpPr>
+          <p:cNvPr id="58" name="TextBox 57"/>
+          <p:cNvSpPr txBox="1"/>
+          <p:nvPr/>
+        </p:nvSpPr>
+        <p:spPr>
+          <a:xfrm>
+            <a:off x="5029200" y="4421124"/>
+            <a:ext cx="1005840" cy="164592"/>
+          </a:xfrm>
+          <a:prstGeom prst="rect">
+            <a:avLst/>
+          </a:prstGeom>
+          <a:noFill/>
+        </p:spPr>
+        <p:txBody>
+          <a:bodyPr wrap="square" lIns="18288" rIns="18288" tIns="0" bIns="0">
+            <a:spAutoFit/>
+          </a:bodyPr>
+          <a:lstStyle/>
+          <a:p>
+            <a:pPr algn="ctr"/>
+            <a:r>
+              <a:rPr sz="700" b="0" i="1">
+                <a:solidFill>
+                  <a:srgbClr val="6B7380"/>
+                </a:solidFill>
+                <a:latin typeface="Calibri"/>
+              </a:rPr>
+              <a:t>predictions_vs_revenue</a:t>
+            </a:r>
+          </a:p>
+        </p:txBody>
+      </p:sp>
+      <p:cxnSp>
+        <p:nvCxnSpPr>
+          <p:cNvPr id="59" name="Connector 58"/>
+          <p:cNvCxnSpPr/>
+          <p:nvPr/>
+        </p:nvCxnSpPr>
+        <p:spPr>
+          <a:xfrm>
+            <a:off x="7315200" y="5189220.0"/>
+            <a:ext cx="365760" cy="0.0"/>
+          </a:xfrm>
+          <a:prstGeom prst="line">
+            <a:avLst/>
+          </a:prstGeom>
+          <a:ln w="12700">
+            <a:solidFill>
+              <a:srgbClr val="46556B"/>
+            </a:solidFill>
           </a:ln>
         </p:spPr>
         <p:style>
@@ -12202,166 +12126,22 @@
       </p:cxnSp>
       <p:cxnSp>
         <p:nvCxnSpPr>
-          <p:cNvPr id="56" name="Connector 55"/>
+          <p:cNvPr id="60" name="Connector 59"/>
           <p:cNvCxnSpPr/>
           <p:nvPr/>
         </p:nvCxnSpPr>
         <p:spPr>
           <a:xfrm flipV="1">
-            <a:off x="2057400" y="3657600"/>
-            <a:ext cx="2514600" cy="914400"/>
+            <a:off x="7680960" y="2263140.0"/>
+            <a:ext cx="0" cy="2926080.0"/>
           </a:xfrm>
           <a:prstGeom prst="line">
             <a:avLst/>
           </a:prstGeom>
           <a:ln w="12700">
             <a:solidFill>
-              <a:srgbClr val="A96BDB"/>
+              <a:srgbClr val="46556B"/>
             </a:solidFill>
-            <a:tailEnd type="triangle" w="sm" h="sm"/>
-          </a:ln>
-        </p:spPr>
-        <p:style>
-          <a:lnRef idx="2">
-            <a:schemeClr val="accent1"/>
-          </a:lnRef>
-          <a:fillRef idx="0">
-            <a:schemeClr val="accent1"/>
-          </a:fillRef>
-          <a:effectRef idx="1">
-            <a:schemeClr val="accent1"/>
-          </a:effectRef>
-          <a:fontRef idx="minor">
-            <a:schemeClr val="tx1"/>
-          </a:fontRef>
-        </p:style>
-      </p:cxnSp>
-      <p:cxnSp>
-        <p:nvCxnSpPr>
-          <p:cNvPr id="57" name="Connector 56"/>
-          <p:cNvCxnSpPr/>
-          <p:nvPr/>
-        </p:nvCxnSpPr>
-        <p:spPr>
-          <a:xfrm flipV="1">
-            <a:off x="548640" y="4160520"/>
-            <a:ext cx="4023360" cy="1280160"/>
-          </a:xfrm>
-          <a:prstGeom prst="line">
-            <a:avLst/>
-          </a:prstGeom>
-          <a:ln w="12700">
-            <a:solidFill>
-              <a:srgbClr val="E87B1E"/>
-            </a:solidFill>
-            <a:tailEnd type="triangle" w="sm" h="sm"/>
-          </a:ln>
-        </p:spPr>
-        <p:style>
-          <a:lnRef idx="2">
-            <a:schemeClr val="accent1"/>
-          </a:lnRef>
-          <a:fillRef idx="0">
-            <a:schemeClr val="accent1"/>
-          </a:fillRef>
-          <a:effectRef idx="1">
-            <a:schemeClr val="accent1"/>
-          </a:effectRef>
-          <a:fontRef idx="minor">
-            <a:schemeClr val="tx1"/>
-          </a:fontRef>
-        </p:style>
-      </p:cxnSp>
-      <p:cxnSp>
-        <p:nvCxnSpPr>
-          <p:cNvPr id="58" name="Connector 57"/>
-          <p:cNvCxnSpPr/>
-          <p:nvPr/>
-        </p:nvCxnSpPr>
-        <p:spPr>
-          <a:xfrm>
-            <a:off x="6858000" y="4023360"/>
-            <a:ext cx="914400" cy="137160"/>
-          </a:xfrm>
-          <a:prstGeom prst="line">
-            <a:avLst/>
-          </a:prstGeom>
-          <a:ln w="15875">
-            <a:solidFill>
-              <a:srgbClr val="5F6B7C"/>
-            </a:solidFill>
-            <a:tailEnd type="triangle" w="sm" h="sm"/>
-          </a:ln>
-        </p:spPr>
-        <p:style>
-          <a:lnRef idx="2">
-            <a:schemeClr val="accent1"/>
-          </a:lnRef>
-          <a:fillRef idx="0">
-            <a:schemeClr val="accent1"/>
-          </a:fillRef>
-          <a:effectRef idx="1">
-            <a:schemeClr val="accent1"/>
-          </a:effectRef>
-          <a:fontRef idx="minor">
-            <a:schemeClr val="tx1"/>
-          </a:fontRef>
-        </p:style>
-      </p:cxnSp>
-      <p:sp>
-        <p:nvSpPr>
-          <p:cNvPr id="59" name="TextBox 58"/>
-          <p:cNvSpPr txBox="1"/>
-          <p:nvPr/>
-        </p:nvSpPr>
-        <p:spPr>
-          <a:xfrm>
-            <a:off x="6903720" y="3822191"/>
-            <a:ext cx="914400" cy="201168"/>
-          </a:xfrm>
-          <a:prstGeom prst="rect">
-            <a:avLst/>
-          </a:prstGeom>
-          <a:noFill/>
-        </p:spPr>
-        <p:txBody>
-          <a:bodyPr wrap="square" lIns="18288" rIns="18288" tIns="0" bIns="0">
-            <a:spAutoFit/>
-          </a:bodyPr>
-          <a:lstStyle/>
-          <a:p>
-            <a:pPr algn="ctr"/>
-            <a:r>
-              <a:rPr sz="700" b="0" i="1">
-                <a:solidFill>
-                  <a:srgbClr val="6B7380"/>
-                </a:solidFill>
-                <a:latin typeface="Calibri"/>
-              </a:rPr>
-              <a:t>training data</a:t>
-            </a:r>
-          </a:p>
-        </p:txBody>
-      </p:sp>
-      <p:cxnSp>
-        <p:nvCxnSpPr>
-          <p:cNvPr id="60" name="Connector 59"/>
-          <p:cNvCxnSpPr/>
-          <p:nvPr/>
-        </p:nvCxnSpPr>
-        <p:spPr>
-          <a:xfrm>
-            <a:off x="9692640" y="4572000"/>
-            <a:ext cx="365760" cy="0"/>
-          </a:xfrm>
-          <a:prstGeom prst="line">
-            <a:avLst/>
-          </a:prstGeom>
-          <a:ln w="12700">
-            <a:solidFill>
-              <a:srgbClr val="5F6B7C"/>
-            </a:solidFill>
-            <a:tailEnd type="triangle" w="sm" h="sm"/>
           </a:ln>
         </p:spPr>
         <p:style>
@@ -12386,19 +12166,18 @@
           <p:nvPr/>
         </p:nvCxnSpPr>
         <p:spPr>
-          <a:xfrm flipH="1" flipV="1">
-            <a:off x="5715000" y="2331720"/>
-            <a:ext cx="2514600" cy="1828800"/>
+          <a:xfrm>
+            <a:off x="7680960" y="2263140.0"/>
+            <a:ext cx="1371600" cy="0.0"/>
           </a:xfrm>
           <a:prstGeom prst="line">
             <a:avLst/>
           </a:prstGeom>
           <a:ln w="12700">
             <a:solidFill>
-              <a:srgbClr val="5F6B7C"/>
+              <a:srgbClr val="46556B"/>
             </a:solidFill>
-            <a:prstDash val="dash"/>
-            <a:tailEnd type="triangle" w="sm" h="sm"/>
+            <a:tailEnd type="triangle" w="med" h="med"/>
           </a:ln>
         </p:spPr>
         <p:style>
@@ -12424,8 +12203,8 @@
         </p:nvSpPr>
         <p:spPr>
           <a:xfrm>
-            <a:off x="7498079" y="3200400"/>
-            <a:ext cx="1463040" cy="201168"/>
+            <a:off x="7726680" y="2061972"/>
+            <a:ext cx="1005840" cy="164592"/>
           </a:xfrm>
           <a:prstGeom prst="rect">
             <a:avLst/>
@@ -12438,7 +12217,7 @@
           </a:bodyPr>
           <a:lstStyle/>
           <a:p>
-            <a:pPr algn="ctr"/>
+            <a:pPr algn="l"/>
             <a:r>
               <a:rPr sz="700" b="0" i="1">
                 <a:solidFill>
@@ -12446,7 +12225,7 @@
                 </a:solidFill>
                 <a:latin typeface="Calibri"/>
               </a:rPr>
-              <a:t>deploy / retrain</a:t>
+              <a:t>HTTPS /api</a:t>
             </a:r>
           </a:p>
         </p:txBody>
@@ -12459,159 +12238,16 @@
         </p:nvCxnSpPr>
         <p:spPr>
           <a:xfrm>
-            <a:off x="6858000" y="3200400"/>
-            <a:ext cx="1874520" cy="0"/>
+            <a:off x="7315200" y="3995928"/>
+            <a:ext cx="1280160" cy="0"/>
           </a:xfrm>
           <a:prstGeom prst="line">
             <a:avLst/>
           </a:prstGeom>
-          <a:ln w="15875">
+          <a:ln w="12700">
             <a:solidFill>
-              <a:srgbClr val="E87B1E"/>
+              <a:srgbClr val="46556B"/>
             </a:solidFill>
-            <a:tailEnd type="triangle" w="sm" h="sm"/>
-          </a:ln>
-        </p:spPr>
-        <p:style>
-          <a:lnRef idx="2">
-            <a:schemeClr val="accent1"/>
-          </a:lnRef>
-          <a:fillRef idx="0">
-            <a:schemeClr val="accent1"/>
-          </a:fillRef>
-          <a:effectRef idx="1">
-            <a:schemeClr val="accent1"/>
-          </a:effectRef>
-          <a:fontRef idx="minor">
-            <a:schemeClr val="tx1"/>
-          </a:fontRef>
-        </p:style>
-      </p:cxnSp>
-      <p:sp>
-        <p:nvSpPr>
-          <p:cNvPr id="64" name="TextBox 63"/>
-          <p:cNvSpPr txBox="1"/>
-          <p:nvPr/>
-        </p:nvSpPr>
-        <p:spPr>
-          <a:xfrm>
-            <a:off x="6949440" y="2944368"/>
-            <a:ext cx="1783080" cy="201168"/>
-          </a:xfrm>
-          <a:prstGeom prst="rect">
-            <a:avLst/>
-          </a:prstGeom>
-          <a:noFill/>
-        </p:spPr>
-        <p:txBody>
-          <a:bodyPr wrap="square" lIns="18288" rIns="18288" tIns="0" bIns="0">
-            <a:spAutoFit/>
-          </a:bodyPr>
-          <a:lstStyle/>
-          <a:p>
-            <a:pPr algn="ctr"/>
-            <a:r>
-              <a:rPr sz="700" b="0" i="1">
-                <a:solidFill>
-                  <a:srgbClr val="E87B1E"/>
-                </a:solidFill>
-                <a:latin typeface="Calibri"/>
-              </a:rPr>
-              <a:t>read predictions_vs_revenue</a:t>
-            </a:r>
-          </a:p>
-        </p:txBody>
-      </p:sp>
-      <p:cxnSp>
-        <p:nvCxnSpPr>
-          <p:cNvPr id="65" name="Connector 64"/>
-          <p:cNvCxnSpPr/>
-          <p:nvPr/>
-        </p:nvCxnSpPr>
-        <p:spPr>
-          <a:xfrm flipV="1">
-            <a:off x="9966960" y="2331720"/>
-            <a:ext cx="0" cy="457200"/>
-          </a:xfrm>
-          <a:prstGeom prst="line">
-            <a:avLst/>
-          </a:prstGeom>
-          <a:ln w="15875">
-            <a:solidFill>
-              <a:srgbClr val="5F6B7C"/>
-            </a:solidFill>
-            <a:tailEnd type="triangle" w="sm" h="sm"/>
-          </a:ln>
-        </p:spPr>
-        <p:style>
-          <a:lnRef idx="2">
-            <a:schemeClr val="accent1"/>
-          </a:lnRef>
-          <a:fillRef idx="0">
-            <a:schemeClr val="accent1"/>
-          </a:fillRef>
-          <a:effectRef idx="1">
-            <a:schemeClr val="accent1"/>
-          </a:effectRef>
-          <a:fontRef idx="minor">
-            <a:schemeClr val="tx1"/>
-          </a:fontRef>
-        </p:style>
-      </p:cxnSp>
-      <p:sp>
-        <p:nvSpPr>
-          <p:cNvPr id="66" name="TextBox 65"/>
-          <p:cNvSpPr txBox="1"/>
-          <p:nvPr/>
-        </p:nvSpPr>
-        <p:spPr>
-          <a:xfrm>
-            <a:off x="10104120" y="2423160"/>
-            <a:ext cx="1097280" cy="201168"/>
-          </a:xfrm>
-          <a:prstGeom prst="rect">
-            <a:avLst/>
-          </a:prstGeom>
-          <a:noFill/>
-        </p:spPr>
-        <p:txBody>
-          <a:bodyPr wrap="square" lIns="18288" rIns="18288" tIns="0" bIns="0">
-            <a:spAutoFit/>
-          </a:bodyPr>
-          <a:lstStyle/>
-          <a:p>
-            <a:pPr algn="ctr"/>
-            <a:r>
-              <a:rPr sz="700" b="0" i="1">
-                <a:solidFill>
-                  <a:srgbClr val="6B7380"/>
-                </a:solidFill>
-                <a:latin typeface="Calibri"/>
-              </a:rPr>
-              <a:t>HTTPS /api</a:t>
-            </a:r>
-          </a:p>
-        </p:txBody>
-      </p:sp>
-      <p:cxnSp>
-        <p:nvCxnSpPr>
-          <p:cNvPr id="67" name="Connector 66"/>
-          <p:cNvCxnSpPr/>
-          <p:nvPr/>
-        </p:nvCxnSpPr>
-        <p:spPr>
-          <a:xfrm flipH="1">
-            <a:off x="11201400" y="1874519"/>
-            <a:ext cx="365760" cy="0"/>
-          </a:xfrm>
-          <a:prstGeom prst="line">
-            <a:avLst/>
-          </a:prstGeom>
-          <a:ln w="15875">
-            <a:solidFill>
-              <a:srgbClr val="5F6B7C"/>
-            </a:solidFill>
-            <a:tailEnd type="triangle" w="sm" h="sm"/>
           </a:ln>
         </p:spPr>
         <p:style>
@@ -12631,23 +12267,23 @@
       </p:cxnSp>
       <p:cxnSp>
         <p:nvCxnSpPr>
-          <p:cNvPr id="68" name="Connector 67"/>
+          <p:cNvPr id="64" name="Connector 63"/>
           <p:cNvCxnSpPr/>
           <p:nvPr/>
         </p:nvCxnSpPr>
         <p:spPr>
-          <a:xfrm flipH="1" flipV="1">
-            <a:off x="4434840" y="2926080"/>
-            <a:ext cx="137160" cy="2423160"/>
+          <a:xfrm>
+            <a:off x="8595360" y="3995928"/>
+            <a:ext cx="0" cy="804672"/>
           </a:xfrm>
           <a:prstGeom prst="line">
             <a:avLst/>
           </a:prstGeom>
           <a:ln w="12700">
             <a:solidFill>
-              <a:srgbClr val="5F6B7C"/>
+              <a:srgbClr val="46556B"/>
             </a:solidFill>
-            <a:tailEnd type="triangle" w="sm" h="sm"/>
+            <a:tailEnd type="triangle" w="med" h="med"/>
           </a:ln>
         </p:spPr>
         <p:style>
@@ -12665,52 +12301,16 @@
           </a:fontRef>
         </p:style>
       </p:cxnSp>
-      <p:cxnSp>
-        <p:nvCxnSpPr>
-          <p:cNvPr id="69" name="Connector 68"/>
-          <p:cNvCxnSpPr/>
-          <p:nvPr/>
-        </p:nvCxnSpPr>
-        <p:spPr>
-          <a:xfrm flipH="1">
-            <a:off x="4114800" y="2423160"/>
-            <a:ext cx="320040" cy="0"/>
-          </a:xfrm>
-          <a:prstGeom prst="line">
-            <a:avLst/>
-          </a:prstGeom>
-          <a:ln w="12700">
-            <a:solidFill>
-              <a:srgbClr val="5F6B7C"/>
-            </a:solidFill>
-            <a:tailEnd type="triangle" w="sm" h="sm"/>
-          </a:ln>
-        </p:spPr>
-        <p:style>
-          <a:lnRef idx="2">
-            <a:schemeClr val="accent1"/>
-          </a:lnRef>
-          <a:fillRef idx="0">
-            <a:schemeClr val="accent1"/>
-          </a:fillRef>
-          <a:effectRef idx="1">
-            <a:schemeClr val="accent1"/>
-          </a:effectRef>
-          <a:fontRef idx="minor">
-            <a:schemeClr val="tx1"/>
-          </a:fontRef>
-        </p:style>
-      </p:cxnSp>
-      <p:sp>
-        <p:nvSpPr>
-          <p:cNvPr id="70" name="TextBox 69"/>
+      <p:sp>
+        <p:nvSpPr>
+          <p:cNvPr id="65" name="TextBox 64"/>
           <p:cNvSpPr txBox="1"/>
           <p:nvPr/>
         </p:nvSpPr>
         <p:spPr>
           <a:xfrm>
-            <a:off x="3611880" y="4754880"/>
-            <a:ext cx="1828800" cy="201168"/>
+            <a:off x="7863840" y="3813048"/>
+            <a:ext cx="1463040" cy="164592"/>
           </a:xfrm>
           <a:prstGeom prst="rect">
             <a:avLst/>
@@ -12731,93 +12331,21 @@
                 </a:solidFill>
                 <a:latin typeface="Calibri"/>
               </a:rPr>
-              <a:t>flip kill-switch</a:t>
-            </a:r>
-          </a:p>
-        </p:txBody>
-      </p:sp>
-      <p:cxnSp>
-        <p:nvCxnSpPr>
-          <p:cNvPr id="71" name="Connector 70"/>
-          <p:cNvCxnSpPr/>
-          <p:nvPr/>
-        </p:nvCxnSpPr>
-        <p:spPr>
-          <a:xfrm>
-            <a:off x="11201400" y="5458968"/>
-            <a:ext cx="320040" cy="0"/>
-          </a:xfrm>
-          <a:prstGeom prst="line">
-            <a:avLst/>
-          </a:prstGeom>
-          <a:ln w="12700">
-            <a:solidFill>
-              <a:srgbClr val="5F6B7C"/>
-            </a:solidFill>
-            <a:tailEnd type="triangle" w="sm" h="sm"/>
-          </a:ln>
-        </p:spPr>
-        <p:style>
-          <a:lnRef idx="2">
-            <a:schemeClr val="accent1"/>
-          </a:lnRef>
-          <a:fillRef idx="0">
-            <a:schemeClr val="accent1"/>
-          </a:fillRef>
-          <a:effectRef idx="1">
-            <a:schemeClr val="accent1"/>
-          </a:effectRef>
-          <a:fontRef idx="minor">
-            <a:schemeClr val="tx1"/>
-          </a:fontRef>
-        </p:style>
-      </p:cxnSp>
-      <p:cxnSp>
-        <p:nvCxnSpPr>
-          <p:cNvPr id="72" name="Connector 71"/>
-          <p:cNvCxnSpPr/>
-          <p:nvPr/>
-        </p:nvCxnSpPr>
-        <p:spPr>
-          <a:xfrm flipV="1">
-            <a:off x="2468880" y="2926080"/>
-            <a:ext cx="0" cy="274320"/>
-          </a:xfrm>
-          <a:prstGeom prst="line">
-            <a:avLst/>
-          </a:prstGeom>
-          <a:ln w="12700">
-            <a:solidFill>
-              <a:srgbClr val="5F6B7C"/>
-            </a:solidFill>
-            <a:tailEnd type="triangle" w="sm" h="sm"/>
-          </a:ln>
-        </p:spPr>
-        <p:style>
-          <a:lnRef idx="2">
-            <a:schemeClr val="accent1"/>
-          </a:lnRef>
-          <a:fillRef idx="0">
-            <a:schemeClr val="accent1"/>
-          </a:fillRef>
-          <a:effectRef idx="1">
-            <a:schemeClr val="accent1"/>
-          </a:effectRef>
-          <a:fontRef idx="minor">
-            <a:schemeClr val="tx1"/>
-          </a:fontRef>
-        </p:style>
-      </p:cxnSp>
-      <p:sp>
-        <p:nvSpPr>
-          <p:cNvPr id="73" name="TextBox 72"/>
+              <a:t>predictions</a:t>
+            </a:r>
+          </a:p>
+        </p:txBody>
+      </p:sp>
+      <p:sp>
+        <p:nvSpPr>
+          <p:cNvPr id="66" name="TextBox 65"/>
           <p:cNvSpPr txBox="1"/>
           <p:nvPr/>
         </p:nvSpPr>
         <p:spPr>
           <a:xfrm>
-            <a:off x="2514600" y="2971800"/>
-            <a:ext cx="1371600" cy="201168"/>
+            <a:off x="594360" y="5623560"/>
+            <a:ext cx="11002975" cy="457200"/>
           </a:xfrm>
           <a:prstGeom prst="rect">
             <a:avLst/>
@@ -12825,489 +12353,55 @@
           <a:noFill/>
         </p:spPr>
         <p:txBody>
-          <a:bodyPr wrap="square" lIns="18288" rIns="18288" tIns="0" bIns="0">
+          <a:bodyPr wrap="square">
             <a:spAutoFit/>
           </a:bodyPr>
           <a:lstStyle/>
           <a:p>
-            <a:pPr algn="ctr"/>
-            <a:r>
-              <a:rPr sz="700" b="0" i="1">
-                <a:solidFill>
-                  <a:srgbClr val="6B7380"/>
-                </a:solidFill>
-                <a:latin typeface="Calibri"/>
-              </a:rPr>
-              <a:t>segment bounds</a:t>
-            </a:r>
-          </a:p>
-        </p:txBody>
-      </p:sp>
-      <p:sp>
-        <p:nvSpPr>
-          <p:cNvPr id="74" name="Oval 73"/>
-          <p:cNvSpPr/>
-          <p:nvPr/>
-        </p:nvSpPr>
-        <p:spPr>
-          <a:xfrm>
-            <a:off x="457200" y="6373368"/>
-            <a:ext cx="109728" cy="109728"/>
-          </a:xfrm>
-          <a:prstGeom prst="ellipse">
-            <a:avLst/>
-          </a:prstGeom>
-          <a:solidFill>
-            <a:srgbClr val="4E88E6"/>
-          </a:solidFill>
-          <a:ln>
-            <a:noFill/>
-          </a:ln>
-        </p:spPr>
-        <p:style>
-          <a:lnRef idx="1">
-            <a:schemeClr val="accent1"/>
-          </a:lnRef>
-          <a:fillRef idx="3">
-            <a:schemeClr val="accent1"/>
-          </a:fillRef>
-          <a:effectRef idx="2">
-            <a:schemeClr val="accent1"/>
-          </a:effectRef>
-          <a:fontRef idx="minor">
-            <a:schemeClr val="lt1"/>
-          </a:fontRef>
-        </p:style>
-        <p:txBody>
-          <a:bodyPr rtlCol="0" anchor="ctr"/>
-          <a:lstStyle/>
-          <a:p>
-            <a:pPr algn="ctr"/>
-          </a:p>
-        </p:txBody>
-      </p:sp>
-      <p:sp>
-        <p:nvSpPr>
-          <p:cNvPr id="75" name="TextBox 74"/>
-          <p:cNvSpPr txBox="1"/>
-          <p:nvPr/>
-        </p:nvSpPr>
-        <p:spPr>
-          <a:xfrm>
-            <a:off x="621792" y="6336792"/>
-            <a:ext cx="1463040" cy="201168"/>
-          </a:xfrm>
-          <a:prstGeom prst="rect">
-            <a:avLst/>
-          </a:prstGeom>
-          <a:noFill/>
-        </p:spPr>
-        <p:txBody>
-          <a:bodyPr wrap="none">
-            <a:spAutoFit/>
-          </a:bodyPr>
-          <a:lstStyle/>
-          <a:p>
-            <a:r>
-              <a:rPr sz="800" b="0" i="0">
+            <a:r>
+              <a:rPr sz="900" b="1" i="0">
+                <a:solidFill>
+                  <a:srgbClr val="1F4CA6"/>
+                </a:solidFill>
+                <a:latin typeface="Calibri"/>
+              </a:rPr>
+              <a:t>Scoring API guardrails:  </a:t>
+            </a:r>
+            <a:r>
+              <a:rPr sz="900" b="0" i="0">
                 <a:solidFill>
                   <a:srgbClr val="333F52"/>
                 </a:solidFill>
                 <a:latin typeface="Calibri"/>
               </a:rPr>
-              <a:t>Service</a:t>
-            </a:r>
-          </a:p>
-        </p:txBody>
-      </p:sp>
-      <p:sp>
-        <p:nvSpPr>
-          <p:cNvPr id="76" name="Oval 75"/>
-          <p:cNvSpPr/>
-          <p:nvPr/>
-        </p:nvSpPr>
-        <p:spPr>
-          <a:xfrm>
-            <a:off x="1874520" y="6373368"/>
-            <a:ext cx="109728" cy="109728"/>
-          </a:xfrm>
-          <a:prstGeom prst="ellipse">
-            <a:avLst/>
-          </a:prstGeom>
-          <a:solidFill>
-            <a:srgbClr val="34A853"/>
-          </a:solidFill>
-          <a:ln>
-            <a:noFill/>
-          </a:ln>
-        </p:spPr>
-        <p:style>
-          <a:lnRef idx="1">
-            <a:schemeClr val="accent1"/>
-          </a:lnRef>
-          <a:fillRef idx="3">
-            <a:schemeClr val="accent1"/>
-          </a:fillRef>
-          <a:effectRef idx="2">
-            <a:schemeClr val="accent1"/>
-          </a:effectRef>
-          <a:fontRef idx="minor">
-            <a:schemeClr val="lt1"/>
-          </a:fontRef>
-        </p:style>
-        <p:txBody>
-          <a:bodyPr rtlCol="0" anchor="ctr"/>
-          <a:lstStyle/>
-          <a:p>
-            <a:pPr algn="ctr"/>
-          </a:p>
-        </p:txBody>
-      </p:sp>
-      <p:sp>
-        <p:nvSpPr>
-          <p:cNvPr id="77" name="TextBox 76"/>
-          <p:cNvSpPr txBox="1"/>
-          <p:nvPr/>
-        </p:nvSpPr>
-        <p:spPr>
-          <a:xfrm>
-            <a:off x="2039112" y="6336792"/>
-            <a:ext cx="1463040" cy="201168"/>
-          </a:xfrm>
-          <a:prstGeom prst="rect">
-            <a:avLst/>
-          </a:prstGeom>
-          <a:noFill/>
-        </p:spPr>
-        <p:txBody>
-          <a:bodyPr wrap="none">
-            <a:spAutoFit/>
-          </a:bodyPr>
-          <a:lstStyle/>
-          <a:p>
-            <a:r>
-              <a:rPr sz="800" b="0" i="0">
+              <a:t>prediction bounds  ·  negative clamp  ·  model &amp; BigQuery timeouts  ·  anomaly window  ·  circuit-breaker  ·  kill-switch.</a:t>
+            </a:r>
+          </a:p>
+          <a:p>
+            <a:r>
+              <a:rPr sz="900" b="1" i="0">
+                <a:solidFill>
+                  <a:srgbClr val="1F4CA6"/>
+                </a:solidFill>
+                <a:latin typeface="Calibri"/>
+              </a:rPr>
+              <a:t>Delivery:  </a:t>
+            </a:r>
+            <a:r>
+              <a:rPr sz="900" b="0" i="0">
                 <a:solidFill>
                   <a:srgbClr val="333F52"/>
                 </a:solidFill>
                 <a:latin typeface="Calibri"/>
               </a:rPr>
-              <a:t>ML/AI runtime</a:t>
-            </a:r>
-          </a:p>
-        </p:txBody>
-      </p:sp>
-      <p:sp>
-        <p:nvSpPr>
-          <p:cNvPr id="78" name="Oval 77"/>
-          <p:cNvSpPr/>
-          <p:nvPr/>
-        </p:nvSpPr>
-        <p:spPr>
-          <a:xfrm>
-            <a:off x="3291840" y="6373368"/>
-            <a:ext cx="109728" cy="109728"/>
-          </a:xfrm>
-          <a:prstGeom prst="ellipse">
-            <a:avLst/>
-          </a:prstGeom>
-          <a:solidFill>
-            <a:srgbClr val="0097A7"/>
-          </a:solidFill>
-          <a:ln>
-            <a:noFill/>
-          </a:ln>
-        </p:spPr>
-        <p:style>
-          <a:lnRef idx="1">
-            <a:schemeClr val="accent1"/>
-          </a:lnRef>
-          <a:fillRef idx="3">
-            <a:schemeClr val="accent1"/>
-          </a:fillRef>
-          <a:effectRef idx="2">
-            <a:schemeClr val="accent1"/>
-          </a:effectRef>
-          <a:fontRef idx="minor">
-            <a:schemeClr val="lt1"/>
-          </a:fontRef>
-        </p:style>
-        <p:txBody>
-          <a:bodyPr rtlCol="0" anchor="ctr"/>
-          <a:lstStyle/>
-          <a:p>
-            <a:pPr algn="ctr"/>
-          </a:p>
-        </p:txBody>
-      </p:sp>
-      <p:sp>
-        <p:nvSpPr>
-          <p:cNvPr id="79" name="TextBox 78"/>
-          <p:cNvSpPr txBox="1"/>
-          <p:nvPr/>
-        </p:nvSpPr>
-        <p:spPr>
-          <a:xfrm>
-            <a:off x="3456432" y="6336792"/>
-            <a:ext cx="1463040" cy="201168"/>
-          </a:xfrm>
-          <a:prstGeom prst="rect">
-            <a:avLst/>
-          </a:prstGeom>
-          <a:noFill/>
-        </p:spPr>
-        <p:txBody>
-          <a:bodyPr wrap="none">
-            <a:spAutoFit/>
-          </a:bodyPr>
-          <a:lstStyle/>
-          <a:p>
-            <a:r>
-              <a:rPr sz="800" b="0" i="0">
-                <a:solidFill>
-                  <a:srgbClr val="333F52"/>
-                </a:solidFill>
-                <a:latin typeface="Calibri"/>
-              </a:rPr>
-              <a:t>ML pipeline</a:t>
-            </a:r>
-          </a:p>
-        </p:txBody>
-      </p:sp>
-      <p:sp>
-        <p:nvSpPr>
-          <p:cNvPr id="80" name="Oval 79"/>
-          <p:cNvSpPr/>
-          <p:nvPr/>
-        </p:nvSpPr>
-        <p:spPr>
-          <a:xfrm>
-            <a:off x="4709160" y="6373368"/>
-            <a:ext cx="109728" cy="109728"/>
-          </a:xfrm>
-          <a:prstGeom prst="ellipse">
-            <a:avLst/>
-          </a:prstGeom>
-          <a:solidFill>
-            <a:srgbClr val="7E57C2"/>
-          </a:solidFill>
-          <a:ln>
-            <a:noFill/>
-          </a:ln>
-        </p:spPr>
-        <p:style>
-          <a:lnRef idx="1">
-            <a:schemeClr val="accent1"/>
-          </a:lnRef>
-          <a:fillRef idx="3">
-            <a:schemeClr val="accent1"/>
-          </a:fillRef>
-          <a:effectRef idx="2">
-            <a:schemeClr val="accent1"/>
-          </a:effectRef>
-          <a:fontRef idx="minor">
-            <a:schemeClr val="lt1"/>
-          </a:fontRef>
-        </p:style>
-        <p:txBody>
-          <a:bodyPr rtlCol="0" anchor="ctr"/>
-          <a:lstStyle/>
-          <a:p>
-            <a:pPr algn="ctr"/>
-          </a:p>
-        </p:txBody>
-      </p:sp>
-      <p:sp>
-        <p:nvSpPr>
-          <p:cNvPr id="81" name="TextBox 80"/>
-          <p:cNvSpPr txBox="1"/>
-          <p:nvPr/>
-        </p:nvSpPr>
-        <p:spPr>
-          <a:xfrm>
-            <a:off x="4873752" y="6336792"/>
-            <a:ext cx="1463040" cy="201168"/>
-          </a:xfrm>
-          <a:prstGeom prst="rect">
-            <a:avLst/>
-          </a:prstGeom>
-          <a:noFill/>
-        </p:spPr>
-        <p:txBody>
-          <a:bodyPr wrap="none">
-            <a:spAutoFit/>
-          </a:bodyPr>
-          <a:lstStyle/>
-          <a:p>
-            <a:r>
-              <a:rPr sz="800" b="0" i="0">
-                <a:solidFill>
-                  <a:srgbClr val="333F52"/>
-                </a:solidFill>
-                <a:latin typeface="Calibri"/>
-              </a:rPr>
-              <a:t>Data warehouse</a:t>
-            </a:r>
-          </a:p>
-        </p:txBody>
-      </p:sp>
-      <p:sp>
-        <p:nvSpPr>
-          <p:cNvPr id="82" name="Oval 81"/>
-          <p:cNvSpPr/>
-          <p:nvPr/>
-        </p:nvSpPr>
-        <p:spPr>
-          <a:xfrm>
-            <a:off x="6126480" y="6373368"/>
-            <a:ext cx="109728" cy="109728"/>
-          </a:xfrm>
-          <a:prstGeom prst="ellipse">
-            <a:avLst/>
-          </a:prstGeom>
-          <a:solidFill>
-            <a:srgbClr val="A96BDB"/>
-          </a:solidFill>
-          <a:ln>
-            <a:noFill/>
-          </a:ln>
-        </p:spPr>
-        <p:style>
-          <a:lnRef idx="1">
-            <a:schemeClr val="accent1"/>
-          </a:lnRef>
-          <a:fillRef idx="3">
-            <a:schemeClr val="accent1"/>
-          </a:fillRef>
-          <a:effectRef idx="2">
-            <a:schemeClr val="accent1"/>
-          </a:effectRef>
-          <a:fontRef idx="minor">
-            <a:schemeClr val="lt1"/>
-          </a:fontRef>
-        </p:style>
-        <p:txBody>
-          <a:bodyPr rtlCol="0" anchor="ctr"/>
-          <a:lstStyle/>
-          <a:p>
-            <a:pPr algn="ctr"/>
-          </a:p>
-        </p:txBody>
-      </p:sp>
-      <p:sp>
-        <p:nvSpPr>
-          <p:cNvPr id="83" name="TextBox 82"/>
-          <p:cNvSpPr txBox="1"/>
-          <p:nvPr/>
-        </p:nvSpPr>
-        <p:spPr>
-          <a:xfrm>
-            <a:off x="6291072" y="6336792"/>
-            <a:ext cx="1463040" cy="201168"/>
-          </a:xfrm>
-          <a:prstGeom prst="rect">
-            <a:avLst/>
-          </a:prstGeom>
-          <a:noFill/>
-        </p:spPr>
-        <p:txBody>
-          <a:bodyPr wrap="none">
-            <a:spAutoFit/>
-          </a:bodyPr>
-          <a:lstStyle/>
-          <a:p>
-            <a:r>
-              <a:rPr sz="800" b="0" i="0">
-                <a:solidFill>
-                  <a:srgbClr val="333F52"/>
-                </a:solidFill>
-                <a:latin typeface="Calibri"/>
-              </a:rPr>
-              <a:t>Pub/Sub</a:t>
-            </a:r>
-          </a:p>
-        </p:txBody>
-      </p:sp>
-      <p:sp>
-        <p:nvSpPr>
-          <p:cNvPr id="84" name="Oval 83"/>
-          <p:cNvSpPr/>
-          <p:nvPr/>
-        </p:nvSpPr>
-        <p:spPr>
-          <a:xfrm>
-            <a:off x="7543800" y="6373368"/>
-            <a:ext cx="109728" cy="109728"/>
-          </a:xfrm>
-          <a:prstGeom prst="ellipse">
-            <a:avLst/>
-          </a:prstGeom>
-          <a:solidFill>
-            <a:srgbClr val="E87B1E"/>
-          </a:solidFill>
-          <a:ln>
-            <a:noFill/>
-          </a:ln>
-        </p:spPr>
-        <p:style>
-          <a:lnRef idx="1">
-            <a:schemeClr val="accent1"/>
-          </a:lnRef>
-          <a:fillRef idx="3">
-            <a:schemeClr val="accent1"/>
-          </a:fillRef>
-          <a:effectRef idx="2">
-            <a:schemeClr val="accent1"/>
-          </a:effectRef>
-          <a:fontRef idx="minor">
-            <a:schemeClr val="lt1"/>
-          </a:fontRef>
-        </p:style>
-        <p:txBody>
-          <a:bodyPr rtlCol="0" anchor="ctr"/>
-          <a:lstStyle/>
-          <a:p>
-            <a:pPr algn="ctr"/>
-          </a:p>
-        </p:txBody>
-      </p:sp>
-      <p:sp>
-        <p:nvSpPr>
-          <p:cNvPr id="85" name="TextBox 84"/>
-          <p:cNvSpPr txBox="1"/>
-          <p:nvPr/>
-        </p:nvSpPr>
-        <p:spPr>
-          <a:xfrm>
-            <a:off x="7708392" y="6336792"/>
-            <a:ext cx="1463040" cy="201168"/>
-          </a:xfrm>
-          <a:prstGeom prst="rect">
-            <a:avLst/>
-          </a:prstGeom>
-          <a:noFill/>
-        </p:spPr>
-        <p:txBody>
-          <a:bodyPr wrap="none">
-            <a:spAutoFit/>
-          </a:bodyPr>
-          <a:lstStyle/>
-          <a:p>
-            <a:r>
-              <a:rPr sz="800" b="0" i="0">
-                <a:solidFill>
-                  <a:srgbClr val="333F52"/>
-                </a:solidFill>
-                <a:latin typeface="Calibri"/>
-              </a:rPr>
-              <a:t>Data flow</a:t>
-            </a:r>
-          </a:p>
-        </p:txBody>
-      </p:sp>
-      <p:sp>
-        <p:nvSpPr>
-          <p:cNvPr id="86" name="Rectangle 85"/>
+              <a:t>GitHub  →  Workload Identity Federation  →  Cloud Build  →  Artifact Registry  →  Cloud Run, gated on test, coverage and supply-chain scans.</a:t>
+            </a:r>
+          </a:p>
+        </p:txBody>
+      </p:sp>
+      <p:sp>
+        <p:nvSpPr>
+          <p:cNvPr id="67" name="Rectangle 66"/>
           <p:cNvSpPr/>
           <p:nvPr/>
         </p:nvSpPr>
@@ -13359,7 +12453,7 @@
       </p:sp>
       <p:sp>
         <p:nvSpPr>
-          <p:cNvPr id="87" name="TextBox 86"/>
+          <p:cNvPr id="68" name="TextBox 67"/>
           <p:cNvSpPr txBox="1"/>
           <p:nvPr/>
         </p:nvSpPr>

--- a/docs/client-demo-deck.pptx
+++ b/docs/client-demo-deck.pptx
@@ -9753,2655 +9753,33 @@
           </a:p>
         </p:txBody>
       </p:sp>
-      <p:sp>
-        <p:nvSpPr>
-          <p:cNvPr id="4" name="Rounded Rectangle 3"/>
-          <p:cNvSpPr/>
-          <p:nvPr/>
-        </p:nvSpPr>
-        <p:spPr>
-          <a:xfrm>
-            <a:off x="365760" y="1005840"/>
-            <a:ext cx="11460175" cy="5120640"/>
-          </a:xfrm>
-          <a:prstGeom prst="roundRect">
-            <a:avLst>
-              <a:gd name="adj" fmla="val 1500"/>
-            </a:avLst>
-          </a:prstGeom>
-          <a:solidFill>
-            <a:srgbClr val="F1F3F8"/>
-          </a:solidFill>
-          <a:ln w="12700">
-            <a:solidFill>
-              <a:srgbClr val="C9CFDA"/>
-            </a:solidFill>
-          </a:ln>
-        </p:spPr>
-        <p:style>
-          <a:lnRef idx="1">
-            <a:schemeClr val="accent1"/>
-          </a:lnRef>
-          <a:fillRef idx="3">
-            <a:schemeClr val="accent1"/>
-          </a:fillRef>
-          <a:effectRef idx="2">
-            <a:schemeClr val="accent1"/>
-          </a:effectRef>
-          <a:fontRef idx="minor">
-            <a:schemeClr val="lt1"/>
-          </a:fontRef>
-        </p:style>
-        <p:txBody>
-          <a:bodyPr rtlCol="0" anchor="ctr"/>
-          <a:lstStyle/>
-          <a:p>
-            <a:pPr algn="ctr"/>
-          </a:p>
-        </p:txBody>
-      </p:sp>
-      <p:sp>
-        <p:nvSpPr>
-          <p:cNvPr id="5" name="TextBox 4"/>
-          <p:cNvSpPr txBox="1"/>
-          <p:nvPr/>
-        </p:nvSpPr>
-        <p:spPr>
-          <a:xfrm>
-            <a:off x="530352" y="1060704"/>
-            <a:ext cx="7315200" cy="274320"/>
-          </a:xfrm>
-          <a:prstGeom prst="rect">
-            <a:avLst/>
-          </a:prstGeom>
-          <a:noFill/>
-        </p:spPr>
-        <p:txBody>
-          <a:bodyPr wrap="none">
-            <a:spAutoFit/>
-          </a:bodyPr>
-          <a:lstStyle/>
-          <a:p>
-            <a:r>
-              <a:rPr sz="1100" b="1" i="0">
-                <a:solidFill>
-                  <a:srgbClr val="0B1F3A"/>
-                </a:solidFill>
-                <a:latin typeface="Calibri"/>
-              </a:rPr>
-              <a:t>Google Cloud Platform</a:t>
-            </a:r>
-            <a:r>
-              <a:rPr sz="1000" b="0" i="1">
-                <a:solidFill>
-                  <a:srgbClr val="6B7380"/>
-                </a:solidFill>
-                <a:latin typeface="Calibri"/>
-              </a:rPr>
-              <a:t>    europe-west2 (London)</a:t>
-            </a:r>
-          </a:p>
-        </p:txBody>
-      </p:sp>
-      <p:sp>
-        <p:nvSpPr>
-          <p:cNvPr id="6" name="Rectangle 5"/>
-          <p:cNvSpPr/>
-          <p:nvPr/>
-        </p:nvSpPr>
-        <p:spPr>
-          <a:xfrm>
-            <a:off x="594360" y="1463040"/>
-            <a:ext cx="11002975" cy="1325880"/>
-          </a:xfrm>
-          <a:prstGeom prst="rect">
-            <a:avLst/>
-          </a:prstGeom>
-          <a:solidFill>
-            <a:srgbClr val="E8EFF7"/>
-          </a:solidFill>
-          <a:ln w="6350">
-            <a:solidFill>
-              <a:srgbClr val="C9CFDA"/>
-            </a:solidFill>
-          </a:ln>
-        </p:spPr>
-        <p:style>
-          <a:lnRef idx="1">
-            <a:schemeClr val="accent1"/>
-          </a:lnRef>
-          <a:fillRef idx="3">
-            <a:schemeClr val="accent1"/>
-          </a:fillRef>
-          <a:effectRef idx="2">
-            <a:schemeClr val="accent1"/>
-          </a:effectRef>
-          <a:fontRef idx="minor">
-            <a:schemeClr val="lt1"/>
-          </a:fontRef>
-        </p:style>
-        <p:txBody>
-          <a:bodyPr rtlCol="0" anchor="ctr"/>
-          <a:lstStyle/>
-          <a:p>
-            <a:pPr algn="ctr"/>
-          </a:p>
-        </p:txBody>
-      </p:sp>
-      <p:sp>
-        <p:nvSpPr>
-          <p:cNvPr id="7" name="TextBox 6"/>
-          <p:cNvSpPr txBox="1"/>
-          <p:nvPr/>
-        </p:nvSpPr>
-        <p:spPr>
-          <a:xfrm>
-            <a:off x="685800" y="1508760"/>
-            <a:ext cx="2743200" cy="228600"/>
-          </a:xfrm>
-          <a:prstGeom prst="rect">
-            <a:avLst/>
-          </a:prstGeom>
-          <a:noFill/>
-        </p:spPr>
-        <p:txBody>
-          <a:bodyPr wrap="none">
-            <a:spAutoFit/>
-          </a:bodyPr>
-          <a:lstStyle/>
-          <a:p>
-            <a:r>
-              <a:rPr sz="800" b="1" i="0">
-                <a:solidFill>
-                  <a:srgbClr val="6B7380"/>
-                </a:solidFill>
-                <a:latin typeface="Calibri"/>
-              </a:rPr>
-              <a:t>HOT PATH · SERVING</a:t>
-            </a:r>
-          </a:p>
-        </p:txBody>
-      </p:sp>
-      <p:sp>
-        <p:nvSpPr>
-          <p:cNvPr id="8" name="Rectangle 7"/>
-          <p:cNvSpPr/>
-          <p:nvPr/>
-        </p:nvSpPr>
-        <p:spPr>
-          <a:xfrm>
-            <a:off x="594360" y="2926080"/>
-            <a:ext cx="11002975" cy="1325880"/>
-          </a:xfrm>
-          <a:prstGeom prst="rect">
-            <a:avLst/>
-          </a:prstGeom>
-          <a:solidFill>
-            <a:srgbClr val="F1ECF8"/>
-          </a:solidFill>
-          <a:ln w="6350">
-            <a:solidFill>
-              <a:srgbClr val="C9CFDA"/>
-            </a:solidFill>
-          </a:ln>
-        </p:spPr>
-        <p:style>
-          <a:lnRef idx="1">
-            <a:schemeClr val="accent1"/>
-          </a:lnRef>
-          <a:fillRef idx="3">
-            <a:schemeClr val="accent1"/>
-          </a:fillRef>
-          <a:effectRef idx="2">
-            <a:schemeClr val="accent1"/>
-          </a:effectRef>
-          <a:fontRef idx="minor">
-            <a:schemeClr val="lt1"/>
-          </a:fontRef>
-        </p:style>
-        <p:txBody>
-          <a:bodyPr rtlCol="0" anchor="ctr"/>
-          <a:lstStyle/>
-          <a:p>
-            <a:pPr algn="ctr"/>
-          </a:p>
-        </p:txBody>
-      </p:sp>
-      <p:sp>
-        <p:nvSpPr>
-          <p:cNvPr id="9" name="TextBox 8"/>
-          <p:cNvSpPr txBox="1"/>
-          <p:nvPr/>
-        </p:nvSpPr>
-        <p:spPr>
-          <a:xfrm>
-            <a:off x="685800" y="2971800"/>
-            <a:ext cx="2743200" cy="228600"/>
-          </a:xfrm>
-          <a:prstGeom prst="rect">
-            <a:avLst/>
-          </a:prstGeom>
-          <a:noFill/>
-        </p:spPr>
-        <p:txBody>
-          <a:bodyPr wrap="none">
-            <a:spAutoFit/>
-          </a:bodyPr>
-          <a:lstStyle/>
-          <a:p>
-            <a:r>
-              <a:rPr sz="800" b="1" i="0">
-                <a:solidFill>
-                  <a:srgbClr val="6B7380"/>
-                </a:solidFill>
-                <a:latin typeface="Calibri"/>
-              </a:rPr>
-              <a:t>DATA PLANE · WAREHOUSE AND TRAINING</a:t>
-            </a:r>
-          </a:p>
-        </p:txBody>
-      </p:sp>
-      <p:sp>
-        <p:nvSpPr>
-          <p:cNvPr id="10" name="Rectangle 9"/>
-          <p:cNvSpPr/>
-          <p:nvPr/>
-        </p:nvSpPr>
-        <p:spPr>
-          <a:xfrm>
-            <a:off x="594360" y="4389120"/>
-            <a:ext cx="11002975" cy="1325880"/>
-          </a:xfrm>
-          <a:prstGeom prst="rect">
-            <a:avLst/>
-          </a:prstGeom>
-          <a:solidFill>
-            <a:srgbClr val="ECF3EE"/>
-          </a:solidFill>
-          <a:ln w="6350">
-            <a:solidFill>
-              <a:srgbClr val="C9CFDA"/>
-            </a:solidFill>
-          </a:ln>
-        </p:spPr>
-        <p:style>
-          <a:lnRef idx="1">
-            <a:schemeClr val="accent1"/>
-          </a:lnRef>
-          <a:fillRef idx="3">
-            <a:schemeClr val="accent1"/>
-          </a:fillRef>
-          <a:effectRef idx="2">
-            <a:schemeClr val="accent1"/>
-          </a:effectRef>
-          <a:fontRef idx="minor">
-            <a:schemeClr val="lt1"/>
-          </a:fontRef>
-        </p:style>
-        <p:txBody>
-          <a:bodyPr rtlCol="0" anchor="ctr"/>
-          <a:lstStyle/>
-          <a:p>
-            <a:pPr algn="ctr"/>
-          </a:p>
-        </p:txBody>
-      </p:sp>
-      <p:sp>
-        <p:nvSpPr>
-          <p:cNvPr id="11" name="TextBox 10"/>
-          <p:cNvSpPr txBox="1"/>
-          <p:nvPr/>
-        </p:nvSpPr>
-        <p:spPr>
-          <a:xfrm>
-            <a:off x="685800" y="4434840"/>
-            <a:ext cx="2743200" cy="228600"/>
-          </a:xfrm>
-          <a:prstGeom prst="rect">
-            <a:avLst/>
-          </a:prstGeom>
-          <a:noFill/>
-        </p:spPr>
-        <p:txBody>
-          <a:bodyPr wrap="none">
-            <a:spAutoFit/>
-          </a:bodyPr>
-          <a:lstStyle/>
-          <a:p>
-            <a:r>
-              <a:rPr sz="800" b="1" i="0">
-                <a:solidFill>
-                  <a:srgbClr val="6B7380"/>
-                </a:solidFill>
-                <a:latin typeface="Calibri"/>
-              </a:rPr>
-              <a:t>CONSUMPTION · RESILIENCE AND ACTIVATION</a:t>
-            </a:r>
-          </a:p>
-        </p:txBody>
-      </p:sp>
-      <p:sp>
-        <p:nvSpPr>
-          <p:cNvPr id="12" name="Rounded Rectangle 11"/>
-          <p:cNvSpPr/>
-          <p:nvPr/>
-        </p:nvSpPr>
-        <p:spPr>
-          <a:xfrm>
-            <a:off x="1554480" y="1874520"/>
-            <a:ext cx="2560320" cy="777240"/>
-          </a:xfrm>
-          <a:prstGeom prst="roundRect">
-            <a:avLst>
-              <a:gd name="adj" fmla="val 10000"/>
-            </a:avLst>
-          </a:prstGeom>
-          <a:solidFill>
-            <a:srgbClr val="4E88E6"/>
-          </a:solidFill>
-          <a:ln>
-            <a:noFill/>
-          </a:ln>
-        </p:spPr>
-        <p:style>
-          <a:lnRef idx="1">
-            <a:schemeClr val="accent1"/>
-          </a:lnRef>
-          <a:fillRef idx="3">
-            <a:schemeClr val="accent1"/>
-          </a:fillRef>
-          <a:effectRef idx="2">
-            <a:schemeClr val="accent1"/>
-          </a:effectRef>
-          <a:fontRef idx="minor">
-            <a:schemeClr val="lt1"/>
-          </a:fontRef>
-        </p:style>
-        <p:txBody>
-          <a:bodyPr rtlCol="0" anchor="ctr" lIns="73152" rIns="73152" wrap="square"/>
-          <a:lstStyle/>
-          <a:p>
-            <a:pPr algn="ctr"/>
-            <a:r>
-              <a:rPr sz="1100" b="1" i="0">
-                <a:solidFill>
-                  <a:srgbClr val="FFFFFF"/>
-                </a:solidFill>
-                <a:latin typeface="Calibri"/>
-              </a:rPr>
-              <a:t>Scoring API</a:t>
-            </a:r>
-          </a:p>
-          <a:p>
-            <a:pPr algn="ctr"/>
-            <a:r>
-              <a:rPr sz="800" b="0" i="0">
-                <a:solidFill>
-                  <a:srgbClr val="FFFFFF"/>
-                </a:solidFill>
-                <a:latin typeface="Calibri"/>
-              </a:rPr>
-              <a:t>Rust 1.89  ·  Cloud Run</a:t>
-            </a:r>
-          </a:p>
-        </p:txBody>
-      </p:sp>
-      <p:sp>
-        <p:nvSpPr>
-          <p:cNvPr id="13" name="Rounded Rectangle 12"/>
-          <p:cNvSpPr/>
-          <p:nvPr/>
-        </p:nvSpPr>
-        <p:spPr>
-          <a:xfrm>
-            <a:off x="4937760" y="1874520"/>
-            <a:ext cx="2377440" cy="777240"/>
-          </a:xfrm>
-          <a:prstGeom prst="roundRect">
-            <a:avLst>
-              <a:gd name="adj" fmla="val 10000"/>
-            </a:avLst>
-          </a:prstGeom>
-          <a:solidFill>
-            <a:srgbClr val="34A853"/>
-          </a:solidFill>
-          <a:ln>
-            <a:noFill/>
-          </a:ln>
-        </p:spPr>
-        <p:style>
-          <a:lnRef idx="1">
-            <a:schemeClr val="accent1"/>
-          </a:lnRef>
-          <a:fillRef idx="3">
-            <a:schemeClr val="accent1"/>
-          </a:fillRef>
-          <a:effectRef idx="2">
-            <a:schemeClr val="accent1"/>
-          </a:effectRef>
-          <a:fontRef idx="minor">
-            <a:schemeClr val="lt1"/>
-          </a:fontRef>
-        </p:style>
-        <p:txBody>
-          <a:bodyPr rtlCol="0" anchor="ctr" lIns="73152" rIns="73152" wrap="square"/>
-          <a:lstStyle/>
-          <a:p>
-            <a:pPr algn="ctr"/>
-            <a:r>
-              <a:rPr sz="1100" b="1" i="0">
-                <a:solidFill>
-                  <a:srgbClr val="FFFFFF"/>
-                </a:solidFill>
-                <a:latin typeface="Calibri"/>
-              </a:rPr>
-              <a:t>Vertex AI Endpoint</a:t>
-            </a:r>
-          </a:p>
-          <a:p>
-            <a:pPr algn="ctr"/>
-            <a:r>
-              <a:rPr sz="800" b="0" i="0">
-                <a:solidFill>
-                  <a:srgbClr val="FFFFFF"/>
-                </a:solidFill>
-                <a:latin typeface="Calibri"/>
-              </a:rPr>
-              <a:t>XGBoost regressor</a:t>
-            </a:r>
-          </a:p>
-        </p:txBody>
-      </p:sp>
-      <p:sp>
-        <p:nvSpPr>
-          <p:cNvPr id="14" name="Rounded Rectangle 13"/>
-          <p:cNvSpPr/>
-          <p:nvPr/>
-        </p:nvSpPr>
-        <p:spPr>
-          <a:xfrm>
-            <a:off x="9052560" y="1874520"/>
-            <a:ext cx="2377440" cy="777240"/>
-          </a:xfrm>
-          <a:prstGeom prst="roundRect">
-            <a:avLst>
-              <a:gd name="adj" fmla="val 10000"/>
-            </a:avLst>
-          </a:prstGeom>
-          <a:solidFill>
-            <a:srgbClr val="4E88E6"/>
-          </a:solidFill>
-          <a:ln>
-            <a:noFill/>
-          </a:ln>
-        </p:spPr>
-        <p:style>
-          <a:lnRef idx="1">
-            <a:schemeClr val="accent1"/>
-          </a:lnRef>
-          <a:fillRef idx="3">
-            <a:schemeClr val="accent1"/>
-          </a:fillRef>
-          <a:effectRef idx="2">
-            <a:schemeClr val="accent1"/>
-          </a:effectRef>
-          <a:fontRef idx="minor">
-            <a:schemeClr val="lt1"/>
-          </a:fontRef>
-        </p:style>
-        <p:txBody>
-          <a:bodyPr rtlCol="0" anchor="ctr" lIns="73152" rIns="73152" wrap="square"/>
-          <a:lstStyle/>
-          <a:p>
-            <a:pPr algn="ctr"/>
-            <a:r>
-              <a:rPr sz="1100" b="1" i="0">
-                <a:solidFill>
-                  <a:srgbClr val="FFFFFF"/>
-                </a:solidFill>
-                <a:latin typeface="Calibri"/>
-              </a:rPr>
-              <a:t>Dashboard UI</a:t>
-            </a:r>
-          </a:p>
-          <a:p>
-            <a:pPr algn="ctr"/>
-            <a:r>
-              <a:rPr sz="800" b="0" i="0">
-                <a:solidFill>
-                  <a:srgbClr val="FFFFFF"/>
-                </a:solidFill>
-                <a:latin typeface="Calibri"/>
-              </a:rPr>
-              <a:t>TypeScript · React · nginx · Cloud Run</a:t>
-            </a:r>
-          </a:p>
-        </p:txBody>
-      </p:sp>
-      <p:sp>
-        <p:nvSpPr>
-          <p:cNvPr id="15" name="Oval 14"/>
-          <p:cNvSpPr/>
-          <p:nvPr/>
-        </p:nvSpPr>
-        <p:spPr>
-          <a:xfrm>
-            <a:off x="777240" y="1920240"/>
-            <a:ext cx="201168" cy="201168"/>
-          </a:xfrm>
-          <a:prstGeom prst="ellipse">
-            <a:avLst/>
-          </a:prstGeom>
-          <a:solidFill>
-            <a:srgbClr val="333F52"/>
-          </a:solidFill>
-          <a:ln>
-            <a:noFill/>
-          </a:ln>
-        </p:spPr>
-        <p:style>
-          <a:lnRef idx="1">
-            <a:schemeClr val="accent1"/>
-          </a:lnRef>
-          <a:fillRef idx="3">
-            <a:schemeClr val="accent1"/>
-          </a:fillRef>
-          <a:effectRef idx="2">
-            <a:schemeClr val="accent1"/>
-          </a:effectRef>
-          <a:fontRef idx="minor">
-            <a:schemeClr val="lt1"/>
-          </a:fontRef>
-        </p:style>
-        <p:txBody>
-          <a:bodyPr rtlCol="0" anchor="ctr"/>
-          <a:lstStyle/>
-          <a:p>
-            <a:pPr algn="ctr"/>
-          </a:p>
-        </p:txBody>
-      </p:sp>
-      <p:sp>
-        <p:nvSpPr>
-          <p:cNvPr id="16" name="Isosceles Triangle 15"/>
-          <p:cNvSpPr/>
-          <p:nvPr/>
-        </p:nvSpPr>
-        <p:spPr>
-          <a:xfrm>
-            <a:off x="640080" y="2103120"/>
-            <a:ext cx="475488" cy="384048"/>
-          </a:xfrm>
-          <a:prstGeom prst="triangle">
-            <a:avLst/>
-          </a:prstGeom>
-          <a:solidFill>
-            <a:srgbClr val="333F52"/>
-          </a:solidFill>
-          <a:ln>
-            <a:noFill/>
-          </a:ln>
-        </p:spPr>
-        <p:style>
-          <a:lnRef idx="1">
-            <a:schemeClr val="accent1"/>
-          </a:lnRef>
-          <a:fillRef idx="3">
-            <a:schemeClr val="accent1"/>
-          </a:fillRef>
-          <a:effectRef idx="2">
-            <a:schemeClr val="accent1"/>
-          </a:effectRef>
-          <a:fontRef idx="minor">
-            <a:schemeClr val="lt1"/>
-          </a:fontRef>
-        </p:style>
-        <p:txBody>
-          <a:bodyPr rtlCol="0" anchor="ctr"/>
-          <a:lstStyle/>
-          <a:p>
-            <a:pPr algn="ctr"/>
-          </a:p>
-        </p:txBody>
-      </p:sp>
-      <p:sp>
-        <p:nvSpPr>
-          <p:cNvPr id="17" name="TextBox 16"/>
-          <p:cNvSpPr txBox="1"/>
-          <p:nvPr/>
-        </p:nvSpPr>
-        <p:spPr>
-          <a:xfrm>
-            <a:off x="457200" y="2514600"/>
-            <a:ext cx="841248" cy="274320"/>
-          </a:xfrm>
-          <a:prstGeom prst="rect">
-            <a:avLst/>
-          </a:prstGeom>
-          <a:noFill/>
-        </p:spPr>
-        <p:txBody>
-          <a:bodyPr wrap="none">
-            <a:spAutoFit/>
-          </a:bodyPr>
-          <a:lstStyle/>
-          <a:p>
-            <a:pPr algn="ctr"/>
-            <a:r>
-              <a:rPr sz="900" b="1" i="0">
-                <a:solidFill>
-                  <a:srgbClr val="333F52"/>
-                </a:solidFill>
-                <a:latin typeface="Calibri"/>
-              </a:rPr>
-              <a:t>Client</a:t>
-            </a:r>
-          </a:p>
-        </p:txBody>
-      </p:sp>
-      <p:sp>
-        <p:nvSpPr>
-          <p:cNvPr id="18" name="Oval 17"/>
-          <p:cNvSpPr/>
-          <p:nvPr/>
-        </p:nvSpPr>
-        <p:spPr>
-          <a:xfrm>
-            <a:off x="11155680" y="1920240"/>
-            <a:ext cx="201168" cy="201168"/>
-          </a:xfrm>
-          <a:prstGeom prst="ellipse">
-            <a:avLst/>
-          </a:prstGeom>
-          <a:solidFill>
-            <a:srgbClr val="333F52"/>
-          </a:solidFill>
-          <a:ln>
-            <a:noFill/>
-          </a:ln>
-        </p:spPr>
-        <p:style>
-          <a:lnRef idx="1">
-            <a:schemeClr val="accent1"/>
-          </a:lnRef>
-          <a:fillRef idx="3">
-            <a:schemeClr val="accent1"/>
-          </a:fillRef>
-          <a:effectRef idx="2">
-            <a:schemeClr val="accent1"/>
-          </a:effectRef>
-          <a:fontRef idx="minor">
-            <a:schemeClr val="lt1"/>
-          </a:fontRef>
-        </p:style>
-        <p:txBody>
-          <a:bodyPr rtlCol="0" anchor="ctr"/>
-          <a:lstStyle/>
-          <a:p>
-            <a:pPr algn="ctr"/>
-          </a:p>
-        </p:txBody>
-      </p:sp>
-      <p:sp>
-        <p:nvSpPr>
-          <p:cNvPr id="19" name="Isosceles Triangle 18"/>
-          <p:cNvSpPr/>
-          <p:nvPr/>
-        </p:nvSpPr>
-        <p:spPr>
-          <a:xfrm>
-            <a:off x="11018520" y="2103120"/>
-            <a:ext cx="475488" cy="384048"/>
-          </a:xfrm>
-          <a:prstGeom prst="triangle">
-            <a:avLst/>
-          </a:prstGeom>
-          <a:solidFill>
-            <a:srgbClr val="333F52"/>
-          </a:solidFill>
-          <a:ln>
-            <a:noFill/>
-          </a:ln>
-        </p:spPr>
-        <p:style>
-          <a:lnRef idx="1">
-            <a:schemeClr val="accent1"/>
-          </a:lnRef>
-          <a:fillRef idx="3">
-            <a:schemeClr val="accent1"/>
-          </a:fillRef>
-          <a:effectRef idx="2">
-            <a:schemeClr val="accent1"/>
-          </a:effectRef>
-          <a:fontRef idx="minor">
-            <a:schemeClr val="lt1"/>
-          </a:fontRef>
-        </p:style>
-        <p:txBody>
-          <a:bodyPr rtlCol="0" anchor="ctr"/>
-          <a:lstStyle/>
-          <a:p>
-            <a:pPr algn="ctr"/>
-          </a:p>
-        </p:txBody>
-      </p:sp>
-      <p:sp>
-        <p:nvSpPr>
-          <p:cNvPr id="20" name="TextBox 19"/>
-          <p:cNvSpPr txBox="1"/>
-          <p:nvPr/>
-        </p:nvSpPr>
-        <p:spPr>
-          <a:xfrm>
-            <a:off x="10835640" y="2514600"/>
-            <a:ext cx="841248" cy="274320"/>
-          </a:xfrm>
-          <a:prstGeom prst="rect">
-            <a:avLst/>
-          </a:prstGeom>
-          <a:noFill/>
-        </p:spPr>
-        <p:txBody>
-          <a:bodyPr wrap="none">
-            <a:spAutoFit/>
-          </a:bodyPr>
-          <a:lstStyle/>
-          <a:p>
-            <a:pPr algn="ctr"/>
-            <a:r>
-              <a:rPr sz="900" b="1" i="0">
-                <a:solidFill>
-                  <a:srgbClr val="333F52"/>
-                </a:solidFill>
-                <a:latin typeface="Calibri"/>
-              </a:rPr>
-              <a:t>Executive</a:t>
-            </a:r>
-          </a:p>
-        </p:txBody>
-      </p:sp>
-      <p:cxnSp>
-        <p:nvCxnSpPr>
-          <p:cNvPr id="21" name="Connector 20"/>
-          <p:cNvCxnSpPr/>
-          <p:nvPr/>
-        </p:nvCxnSpPr>
-        <p:spPr>
-          <a:xfrm>
-            <a:off x="1143000" y="2226564.0"/>
-            <a:ext cx="411480" cy="0.0"/>
-          </a:xfrm>
-          <a:prstGeom prst="line">
-            <a:avLst/>
-          </a:prstGeom>
-          <a:ln w="15875">
-            <a:solidFill>
-              <a:srgbClr val="46556B"/>
-            </a:solidFill>
-            <a:tailEnd type="triangle" w="med" h="med"/>
-          </a:ln>
-        </p:spPr>
-        <p:style>
-          <a:lnRef idx="2">
-            <a:schemeClr val="accent1"/>
-          </a:lnRef>
-          <a:fillRef idx="0">
-            <a:schemeClr val="accent1"/>
-          </a:fillRef>
-          <a:effectRef idx="1">
-            <a:schemeClr val="accent1"/>
-          </a:effectRef>
-          <a:fontRef idx="minor">
-            <a:schemeClr val="tx1"/>
-          </a:fontRef>
-        </p:style>
-      </p:cxnSp>
-      <p:sp>
-        <p:nvSpPr>
-          <p:cNvPr id="22" name="TextBox 21"/>
-          <p:cNvSpPr txBox="1"/>
-          <p:nvPr/>
-        </p:nvSpPr>
-        <p:spPr>
-          <a:xfrm>
-            <a:off x="1143000" y="1970532"/>
-            <a:ext cx="502920" cy="182880"/>
-          </a:xfrm>
-          <a:prstGeom prst="rect">
-            <a:avLst/>
-          </a:prstGeom>
-          <a:noFill/>
-        </p:spPr>
-        <p:txBody>
-          <a:bodyPr wrap="square" lIns="18288" rIns="18288" tIns="0" bIns="0">
-            <a:spAutoFit/>
-          </a:bodyPr>
-          <a:lstStyle/>
-          <a:p>
-            <a:pPr algn="ctr"/>
-            <a:r>
-              <a:rPr sz="700" b="0" i="1">
-                <a:solidFill>
-                  <a:srgbClr val="6B7380"/>
-                </a:solidFill>
-                <a:latin typeface="Calibri"/>
-              </a:rPr>
-              <a:t>HTTPS</a:t>
-            </a:r>
-          </a:p>
-        </p:txBody>
-      </p:sp>
-      <p:cxnSp>
-        <p:nvCxnSpPr>
-          <p:cNvPr id="23" name="Connector 22"/>
-          <p:cNvCxnSpPr/>
-          <p:nvPr/>
-        </p:nvCxnSpPr>
-        <p:spPr>
-          <a:xfrm>
-            <a:off x="4114800" y="2125980.0"/>
-            <a:ext cx="822960" cy="0.0"/>
-          </a:xfrm>
-          <a:prstGeom prst="line">
-            <a:avLst/>
-          </a:prstGeom>
-          <a:ln w="15875">
-            <a:solidFill>
-              <a:srgbClr val="46556B"/>
-            </a:solidFill>
-            <a:tailEnd type="triangle" w="med" h="med"/>
-          </a:ln>
-        </p:spPr>
-        <p:style>
-          <a:lnRef idx="2">
-            <a:schemeClr val="accent1"/>
-          </a:lnRef>
-          <a:fillRef idx="0">
-            <a:schemeClr val="accent1"/>
-          </a:fillRef>
-          <a:effectRef idx="1">
-            <a:schemeClr val="accent1"/>
-          </a:effectRef>
-          <a:fontRef idx="minor">
-            <a:schemeClr val="tx1"/>
-          </a:fontRef>
-        </p:style>
-      </p:cxnSp>
-      <p:sp>
-        <p:nvSpPr>
-          <p:cNvPr id="24" name="TextBox 23"/>
-          <p:cNvSpPr txBox="1"/>
-          <p:nvPr/>
-        </p:nvSpPr>
-        <p:spPr>
-          <a:xfrm>
-            <a:off x="4114800" y="1933956"/>
-            <a:ext cx="822960" cy="182880"/>
-          </a:xfrm>
-          <a:prstGeom prst="rect">
-            <a:avLst/>
-          </a:prstGeom>
-          <a:noFill/>
-        </p:spPr>
-        <p:txBody>
-          <a:bodyPr wrap="square" lIns="18288" rIns="18288" tIns="0" bIns="0">
-            <a:spAutoFit/>
-          </a:bodyPr>
-          <a:lstStyle/>
-          <a:p>
-            <a:pPr algn="ctr"/>
-            <a:r>
-              <a:rPr sz="700" b="0" i="1">
-                <a:solidFill>
-                  <a:srgbClr val="6B7380"/>
-                </a:solidFill>
-                <a:latin typeface="Calibri"/>
-              </a:rPr>
-              <a:t>predict</a:t>
-            </a:r>
-          </a:p>
-        </p:txBody>
-      </p:sp>
-      <p:cxnSp>
-        <p:nvCxnSpPr>
-          <p:cNvPr id="25" name="Connector 24"/>
-          <p:cNvCxnSpPr/>
-          <p:nvPr/>
-        </p:nvCxnSpPr>
-        <p:spPr>
-          <a:xfrm flipH="1">
-            <a:off x="4114800" y="2400300.0"/>
-            <a:ext cx="822960" cy="0.0"/>
-          </a:xfrm>
-          <a:prstGeom prst="line">
-            <a:avLst/>
-          </a:prstGeom>
-          <a:ln w="15875">
-            <a:solidFill>
-              <a:srgbClr val="46556B"/>
-            </a:solidFill>
-            <a:tailEnd type="triangle" w="med" h="med"/>
-          </a:ln>
-        </p:spPr>
-        <p:style>
-          <a:lnRef idx="2">
-            <a:schemeClr val="accent1"/>
-          </a:lnRef>
-          <a:fillRef idx="0">
-            <a:schemeClr val="accent1"/>
-          </a:fillRef>
-          <a:effectRef idx="1">
-            <a:schemeClr val="accent1"/>
-          </a:effectRef>
-          <a:fontRef idx="minor">
-            <a:schemeClr val="tx1"/>
-          </a:fontRef>
-        </p:style>
-      </p:cxnSp>
-      <p:sp>
-        <p:nvSpPr>
-          <p:cNvPr id="26" name="TextBox 25"/>
-          <p:cNvSpPr txBox="1"/>
-          <p:nvPr/>
-        </p:nvSpPr>
-        <p:spPr>
-          <a:xfrm>
-            <a:off x="4114800" y="2400300"/>
-            <a:ext cx="822960" cy="182880"/>
-          </a:xfrm>
-          <a:prstGeom prst="rect">
-            <a:avLst/>
-          </a:prstGeom>
-          <a:noFill/>
-        </p:spPr>
-        <p:txBody>
-          <a:bodyPr wrap="square" lIns="18288" rIns="18288" tIns="0" bIns="0">
-            <a:spAutoFit/>
-          </a:bodyPr>
-          <a:lstStyle/>
-          <a:p>
-            <a:pPr algn="ctr"/>
-            <a:r>
-              <a:rPr sz="700" b="0" i="1">
-                <a:solidFill>
-                  <a:srgbClr val="6B7380"/>
-                </a:solidFill>
-                <a:latin typeface="Calibri"/>
-              </a:rPr>
-              <a:t>predicted_rpc</a:t>
-            </a:r>
-          </a:p>
-        </p:txBody>
-      </p:sp>
-      <p:cxnSp>
-        <p:nvCxnSpPr>
-          <p:cNvPr id="27" name="Connector 26"/>
-          <p:cNvCxnSpPr/>
-          <p:nvPr/>
-        </p:nvCxnSpPr>
-        <p:spPr>
-          <a:xfrm flipH="1">
-            <a:off x="11430000" y="2263140.0"/>
-            <a:ext cx="45720" cy="0.0"/>
-          </a:xfrm>
-          <a:prstGeom prst="line">
-            <a:avLst/>
-          </a:prstGeom>
-          <a:ln w="15875">
-            <a:solidFill>
-              <a:srgbClr val="46556B"/>
-            </a:solidFill>
-            <a:tailEnd type="triangle" w="med" h="med"/>
-          </a:ln>
-        </p:spPr>
-        <p:style>
-          <a:lnRef idx="2">
-            <a:schemeClr val="accent1"/>
-          </a:lnRef>
-          <a:fillRef idx="0">
-            <a:schemeClr val="accent1"/>
-          </a:fillRef>
-          <a:effectRef idx="1">
-            <a:schemeClr val="accent1"/>
-          </a:effectRef>
-          <a:fontRef idx="minor">
-            <a:schemeClr val="tx1"/>
-          </a:fontRef>
-        </p:style>
-      </p:cxnSp>
-      <p:sp>
-        <p:nvSpPr>
-          <p:cNvPr id="28" name="Hexagon 27"/>
-          <p:cNvSpPr/>
-          <p:nvPr/>
-        </p:nvSpPr>
-        <p:spPr>
-          <a:xfrm>
-            <a:off x="2240280" y="3383280"/>
-            <a:ext cx="1188720" cy="502920"/>
-          </a:xfrm>
-          <a:prstGeom prst="hexagon">
-            <a:avLst/>
-          </a:prstGeom>
-          <a:solidFill>
-            <a:srgbClr val="A06CD6"/>
-          </a:solidFill>
-          <a:ln>
-            <a:noFill/>
-          </a:ln>
-        </p:spPr>
-        <p:style>
-          <a:lnRef idx="1">
-            <a:schemeClr val="accent1"/>
-          </a:lnRef>
-          <a:fillRef idx="3">
-            <a:schemeClr val="accent1"/>
-          </a:fillRef>
-          <a:effectRef idx="2">
-            <a:schemeClr val="accent1"/>
-          </a:effectRef>
-          <a:fontRef idx="minor">
-            <a:schemeClr val="lt1"/>
-          </a:fontRef>
-        </p:style>
-        <p:txBody>
-          <a:bodyPr rtlCol="0" anchor="ctr"/>
-          <a:lstStyle/>
-          <a:p>
-            <a:pPr algn="ctr"/>
-            <a:r>
-              <a:rPr sz="900" b="1" i="0">
-                <a:solidFill>
-                  <a:srgbClr val="FFFFFF"/>
-                </a:solidFill>
-                <a:latin typeface="Calibri"/>
-              </a:rPr>
-              <a:t>Pub/Sub</a:t>
-            </a:r>
-          </a:p>
-        </p:txBody>
-      </p:sp>
-      <p:sp>
-        <p:nvSpPr>
-          <p:cNvPr id="29" name="TextBox 28"/>
-          <p:cNvSpPr txBox="1"/>
-          <p:nvPr/>
-        </p:nvSpPr>
-        <p:spPr>
-          <a:xfrm>
-            <a:off x="2103120" y="3904488"/>
-            <a:ext cx="1463040" cy="201168"/>
-          </a:xfrm>
-          <a:prstGeom prst="rect">
-            <a:avLst/>
-          </a:prstGeom>
-          <a:noFill/>
-        </p:spPr>
-        <p:txBody>
-          <a:bodyPr wrap="none">
-            <a:spAutoFit/>
-          </a:bodyPr>
-          <a:lstStyle/>
-          <a:p>
-            <a:pPr algn="ctr"/>
-            <a:r>
-              <a:rPr sz="800" b="0" i="0">
-                <a:solidFill>
-                  <a:srgbClr val="333F52"/>
-                </a:solidFill>
-                <a:latin typeface="Calibri"/>
-              </a:rPr>
-              <a:t>rpc-predictions-staging</a:t>
-            </a:r>
-          </a:p>
-        </p:txBody>
-      </p:sp>
-      <p:sp>
-        <p:nvSpPr>
-          <p:cNvPr id="30" name="Rounded Rectangle 29"/>
-          <p:cNvSpPr/>
-          <p:nvPr/>
-        </p:nvSpPr>
-        <p:spPr>
-          <a:xfrm>
-            <a:off x="4937760" y="3264408"/>
-            <a:ext cx="2377440" cy="960120"/>
-          </a:xfrm>
-          <a:prstGeom prst="roundRect">
-            <a:avLst>
-              <a:gd name="adj" fmla="val 8000"/>
-            </a:avLst>
-          </a:prstGeom>
-          <a:solidFill>
-            <a:srgbClr val="7E57C2"/>
-          </a:solidFill>
-          <a:ln>
-            <a:noFill/>
-          </a:ln>
-        </p:spPr>
-        <p:style>
-          <a:lnRef idx="1">
-            <a:schemeClr val="accent1"/>
-          </a:lnRef>
-          <a:fillRef idx="3">
-            <a:schemeClr val="accent1"/>
-          </a:fillRef>
-          <a:effectRef idx="2">
-            <a:schemeClr val="accent1"/>
-          </a:effectRef>
-          <a:fontRef idx="minor">
-            <a:schemeClr val="lt1"/>
-          </a:fontRef>
-        </p:style>
-        <p:txBody>
-          <a:bodyPr rtlCol="0" anchor="ctr" wrap="square" lIns="73152" rIns="73152" tIns="54864"/>
-          <a:lstStyle/>
-          <a:p>
-            <a:pPr algn="ctr"/>
-            <a:r>
-              <a:rPr sz="1100" b="1" i="0">
-                <a:solidFill>
-                  <a:srgbClr val="FFFFFF"/>
-                </a:solidFill>
-                <a:latin typeface="Calibri"/>
-              </a:rPr>
-              <a:t>BigQuery</a:t>
-            </a:r>
-          </a:p>
-          <a:p>
-            <a:pPr algn="ctr"/>
-            <a:r>
-              <a:rPr sz="800" b="0" i="0">
-                <a:solidFill>
-                  <a:srgbClr val="FFFFFF"/>
-                </a:solidFill>
-                <a:latin typeface="Calibri"/>
-              </a:rPr>
-              <a:t>Data warehouse</a:t>
-            </a:r>
-          </a:p>
-          <a:p>
-            <a:pPr algn="ctr">
-              <a:spcBef>
-                <a:spcPts val="300"/>
-              </a:spcBef>
-            </a:pPr>
-            <a:r>
-              <a:rPr sz="700" b="0" i="1">
-                <a:solidFill>
-                  <a:srgbClr val="FFFFFF"/>
-                </a:solidFill>
-                <a:latin typeface="Calibri"/>
-              </a:rPr>
-              <a:t>rpc_predictions  ·  sales_ledger</a:t>
-            </a:r>
-          </a:p>
-          <a:p>
-            <a:pPr algn="ctr"/>
-            <a:r>
-              <a:rPr sz="700" b="0" i="1">
-                <a:solidFill>
-                  <a:srgbClr val="FFFFFF"/>
-                </a:solidFill>
-                <a:latin typeface="Calibri"/>
-              </a:rPr>
-              <a:t>predictions_vs_revenue</a:t>
-            </a:r>
-          </a:p>
-        </p:txBody>
-      </p:sp>
-      <p:sp>
-        <p:nvSpPr>
-          <p:cNvPr id="31" name="Rounded Rectangle 30"/>
-          <p:cNvSpPr/>
-          <p:nvPr/>
-        </p:nvSpPr>
-        <p:spPr>
-          <a:xfrm>
-            <a:off x="8229600" y="3337560"/>
-            <a:ext cx="2194560" cy="777240"/>
-          </a:xfrm>
-          <a:prstGeom prst="roundRect">
-            <a:avLst>
-              <a:gd name="adj" fmla="val 10000"/>
-            </a:avLst>
-          </a:prstGeom>
-          <a:solidFill>
-            <a:srgbClr val="0097A7"/>
-          </a:solidFill>
-          <a:ln>
-            <a:noFill/>
-          </a:ln>
-        </p:spPr>
-        <p:style>
-          <a:lnRef idx="1">
-            <a:schemeClr val="accent1"/>
-          </a:lnRef>
-          <a:fillRef idx="3">
-            <a:schemeClr val="accent1"/>
-          </a:fillRef>
-          <a:effectRef idx="2">
-            <a:schemeClr val="accent1"/>
-          </a:effectRef>
-          <a:fontRef idx="minor">
-            <a:schemeClr val="lt1"/>
-          </a:fontRef>
-        </p:style>
-        <p:txBody>
-          <a:bodyPr rtlCol="0" anchor="ctr" lIns="73152" rIns="73152" wrap="square"/>
-          <a:lstStyle/>
-          <a:p>
-            <a:pPr algn="ctr"/>
-            <a:r>
-              <a:rPr sz="1100" b="1" i="0">
-                <a:solidFill>
-                  <a:srgbClr val="FFFFFF"/>
-                </a:solidFill>
-                <a:latin typeface="Calibri"/>
-              </a:rPr>
-              <a:t>ML Ops Pipeline</a:t>
-            </a:r>
-          </a:p>
-          <a:p>
-            <a:pPr algn="ctr"/>
-            <a:r>
-              <a:rPr sz="800" b="0" i="0">
-                <a:solidFill>
-                  <a:srgbClr val="FFFFFF"/>
-                </a:solidFill>
-                <a:latin typeface="Calibri"/>
-              </a:rPr>
-              <a:t>Python 3.12  ·  Vertex AI Pipelines</a:t>
-            </a:r>
-          </a:p>
-        </p:txBody>
-      </p:sp>
-      <p:sp>
-        <p:nvSpPr>
-          <p:cNvPr id="32" name="Can 31"/>
-          <p:cNvSpPr/>
-          <p:nvPr/>
-        </p:nvSpPr>
-        <p:spPr>
-          <a:xfrm>
-            <a:off x="10698480" y="3337560"/>
-            <a:ext cx="640080" cy="777240"/>
-          </a:xfrm>
-          <a:prstGeom prst="can">
-            <a:avLst/>
-          </a:prstGeom>
-          <a:solidFill>
-            <a:srgbClr val="6B7380"/>
-          </a:solidFill>
-          <a:ln>
-            <a:noFill/>
-          </a:ln>
-        </p:spPr>
-        <p:style>
-          <a:lnRef idx="1">
-            <a:schemeClr val="accent1"/>
-          </a:lnRef>
-          <a:fillRef idx="3">
-            <a:schemeClr val="accent1"/>
-          </a:fillRef>
-          <a:effectRef idx="2">
-            <a:schemeClr val="accent1"/>
-          </a:effectRef>
-          <a:fontRef idx="minor">
-            <a:schemeClr val="lt1"/>
-          </a:fontRef>
-        </p:style>
-        <p:txBody>
-          <a:bodyPr rtlCol="0" anchor="ctr"/>
-          <a:lstStyle/>
-          <a:p>
-            <a:pPr algn="ctr"/>
-          </a:p>
-        </p:txBody>
-      </p:sp>
-      <p:sp>
-        <p:nvSpPr>
-          <p:cNvPr id="33" name="TextBox 32"/>
-          <p:cNvSpPr txBox="1"/>
-          <p:nvPr/>
-        </p:nvSpPr>
-        <p:spPr>
-          <a:xfrm>
-            <a:off x="10561320" y="4096512"/>
-            <a:ext cx="914400" cy="228600"/>
-          </a:xfrm>
-          <a:prstGeom prst="rect">
-            <a:avLst/>
-          </a:prstGeom>
-          <a:noFill/>
-        </p:spPr>
-        <p:txBody>
-          <a:bodyPr wrap="none">
-            <a:spAutoFit/>
-          </a:bodyPr>
-          <a:lstStyle/>
-          <a:p>
-            <a:pPr algn="ctr"/>
-            <a:r>
-              <a:rPr sz="700" b="1" i="0">
-                <a:solidFill>
-                  <a:srgbClr val="333F52"/>
-                </a:solidFill>
-                <a:latin typeface="Calibri"/>
-              </a:rPr>
-              <a:t>Cloud Storage</a:t>
-            </a:r>
-          </a:p>
-        </p:txBody>
-      </p:sp>
-      <p:cxnSp>
-        <p:nvCxnSpPr>
-          <p:cNvPr id="34" name="Connector 33"/>
-          <p:cNvCxnSpPr/>
-          <p:nvPr/>
-        </p:nvCxnSpPr>
-        <p:spPr>
-          <a:xfrm>
-            <a:off x="3429000.0" y="3634740.0"/>
-            <a:ext cx="1508760.0" cy="0.0"/>
-          </a:xfrm>
-          <a:prstGeom prst="line">
-            <a:avLst/>
-          </a:prstGeom>
-          <a:ln w="15875">
-            <a:solidFill>
-              <a:srgbClr val="46556B"/>
-            </a:solidFill>
-            <a:tailEnd type="triangle" w="med" h="med"/>
-          </a:ln>
-        </p:spPr>
-        <p:style>
-          <a:lnRef idx="2">
-            <a:schemeClr val="accent1"/>
-          </a:lnRef>
-          <a:fillRef idx="0">
-            <a:schemeClr val="accent1"/>
-          </a:fillRef>
-          <a:effectRef idx="1">
-            <a:schemeClr val="accent1"/>
-          </a:effectRef>
-          <a:fontRef idx="minor">
-            <a:schemeClr val="tx1"/>
-          </a:fontRef>
-        </p:style>
-      </p:cxnSp>
-      <p:sp>
-        <p:nvSpPr>
-          <p:cNvPr id="35" name="TextBox 34"/>
-          <p:cNvSpPr txBox="1"/>
-          <p:nvPr/>
-        </p:nvSpPr>
-        <p:spPr>
-          <a:xfrm>
-            <a:off x="3429000" y="3255264"/>
-            <a:ext cx="1508760" cy="164592"/>
-          </a:xfrm>
-          <a:prstGeom prst="rect">
-            <a:avLst/>
-          </a:prstGeom>
-          <a:noFill/>
-        </p:spPr>
-        <p:txBody>
-          <a:bodyPr wrap="square" lIns="18288" rIns="18288" tIns="0" bIns="0">
-            <a:spAutoFit/>
-          </a:bodyPr>
-          <a:lstStyle/>
-          <a:p>
-            <a:pPr algn="ctr"/>
-            <a:r>
-              <a:rPr sz="700" b="0" i="1">
-                <a:solidFill>
-                  <a:srgbClr val="6B7380"/>
-                </a:solidFill>
-                <a:latin typeface="Calibri"/>
-              </a:rPr>
-              <a:t>BigQuery sub</a:t>
-            </a:r>
-          </a:p>
-        </p:txBody>
-      </p:sp>
-      <p:cxnSp>
-        <p:nvCxnSpPr>
-          <p:cNvPr id="36" name="Connector 35"/>
-          <p:cNvCxnSpPr/>
-          <p:nvPr/>
-        </p:nvCxnSpPr>
-        <p:spPr>
-          <a:xfrm>
-            <a:off x="7315200" y="3726180.0"/>
-            <a:ext cx="914400" cy="0.0"/>
-          </a:xfrm>
-          <a:prstGeom prst="line">
-            <a:avLst/>
-          </a:prstGeom>
-          <a:ln w="15875">
-            <a:solidFill>
-              <a:srgbClr val="46556B"/>
-            </a:solidFill>
-            <a:tailEnd type="triangle" w="med" h="med"/>
-          </a:ln>
-        </p:spPr>
-        <p:style>
-          <a:lnRef idx="2">
-            <a:schemeClr val="accent1"/>
-          </a:lnRef>
-          <a:fillRef idx="0">
-            <a:schemeClr val="accent1"/>
-          </a:fillRef>
-          <a:effectRef idx="1">
-            <a:schemeClr val="accent1"/>
-          </a:effectRef>
-          <a:fontRef idx="minor">
-            <a:schemeClr val="tx1"/>
-          </a:fontRef>
-        </p:style>
-      </p:cxnSp>
-      <p:sp>
-        <p:nvSpPr>
-          <p:cNvPr id="37" name="TextBox 36"/>
-          <p:cNvSpPr txBox="1"/>
-          <p:nvPr/>
-        </p:nvSpPr>
-        <p:spPr>
-          <a:xfrm>
-            <a:off x="7315200" y="3525012"/>
-            <a:ext cx="914400" cy="182880"/>
-          </a:xfrm>
-          <a:prstGeom prst="rect">
-            <a:avLst/>
-          </a:prstGeom>
-          <a:noFill/>
-        </p:spPr>
-        <p:txBody>
-          <a:bodyPr wrap="square" lIns="18288" rIns="18288" tIns="0" bIns="0">
-            <a:spAutoFit/>
-          </a:bodyPr>
-          <a:lstStyle/>
-          <a:p>
-            <a:pPr algn="ctr"/>
-            <a:r>
-              <a:rPr sz="700" b="0" i="1">
-                <a:solidFill>
-                  <a:srgbClr val="6B7380"/>
-                </a:solidFill>
-                <a:latin typeface="Calibri"/>
-              </a:rPr>
-              <a:t>training data</a:t>
-            </a:r>
-          </a:p>
-        </p:txBody>
-      </p:sp>
-      <p:cxnSp>
-        <p:nvCxnSpPr>
-          <p:cNvPr id="38" name="Connector 37"/>
-          <p:cNvCxnSpPr/>
-          <p:nvPr/>
-        </p:nvCxnSpPr>
-        <p:spPr>
-          <a:xfrm>
-            <a:off x="10424160" y="3726180.0"/>
-            <a:ext cx="274320" cy="0.0"/>
-          </a:xfrm>
-          <a:prstGeom prst="line">
-            <a:avLst/>
-          </a:prstGeom>
-          <a:ln w="15875">
-            <a:solidFill>
-              <a:srgbClr val="46556B"/>
-            </a:solidFill>
-            <a:tailEnd type="triangle" w="med" h="med"/>
-          </a:ln>
-        </p:spPr>
-        <p:style>
-          <a:lnRef idx="2">
-            <a:schemeClr val="accent1"/>
-          </a:lnRef>
-          <a:fillRef idx="0">
-            <a:schemeClr val="accent1"/>
-          </a:fillRef>
-          <a:effectRef idx="1">
-            <a:schemeClr val="accent1"/>
-          </a:effectRef>
-          <a:fontRef idx="minor">
-            <a:schemeClr val="tx1"/>
-          </a:fontRef>
-        </p:style>
-      </p:cxnSp>
-      <p:sp>
-        <p:nvSpPr>
-          <p:cNvPr id="39" name="TextBox 38"/>
-          <p:cNvSpPr txBox="1"/>
-          <p:nvPr/>
-        </p:nvSpPr>
-        <p:spPr>
-          <a:xfrm>
-            <a:off x="10424160" y="3525012"/>
-            <a:ext cx="274320" cy="164592"/>
-          </a:xfrm>
-          <a:prstGeom prst="rect">
-            <a:avLst/>
-          </a:prstGeom>
-          <a:noFill/>
-        </p:spPr>
-        <p:txBody>
-          <a:bodyPr wrap="square" lIns="18288" rIns="18288" tIns="0" bIns="0">
-            <a:spAutoFit/>
-          </a:bodyPr>
-          <a:lstStyle/>
-          <a:p>
-            <a:pPr algn="ctr"/>
-            <a:r>
-              <a:rPr sz="700" b="0" i="1">
-                <a:solidFill>
-                  <a:srgbClr val="6B7380"/>
-                </a:solidFill>
-                <a:latin typeface="Calibri"/>
-              </a:rPr>
-              <a:t>artifacts</a:t>
-            </a:r>
-          </a:p>
-        </p:txBody>
-      </p:sp>
-      <p:cxnSp>
-        <p:nvCxnSpPr>
-          <p:cNvPr id="40" name="Connector 39"/>
-          <p:cNvCxnSpPr/>
-          <p:nvPr/>
-        </p:nvCxnSpPr>
-        <p:spPr>
-          <a:xfrm>
-            <a:off x="2834640.0" y="2651760"/>
-            <a:ext cx="0.0" cy="731520"/>
-          </a:xfrm>
-          <a:prstGeom prst="line">
-            <a:avLst/>
-          </a:prstGeom>
-          <a:ln w="15875">
-            <a:solidFill>
-              <a:srgbClr val="46556B"/>
-            </a:solidFill>
-            <a:tailEnd type="triangle" w="med" h="med"/>
-          </a:ln>
-        </p:spPr>
-        <p:style>
-          <a:lnRef idx="2">
-            <a:schemeClr val="accent1"/>
-          </a:lnRef>
-          <a:fillRef idx="0">
-            <a:schemeClr val="accent1"/>
-          </a:fillRef>
-          <a:effectRef idx="1">
-            <a:schemeClr val="accent1"/>
-          </a:effectRef>
-          <a:fontRef idx="minor">
-            <a:schemeClr val="tx1"/>
-          </a:fontRef>
-        </p:style>
-      </p:cxnSp>
-      <p:sp>
-        <p:nvSpPr>
-          <p:cNvPr id="41" name="TextBox 40"/>
-          <p:cNvSpPr txBox="1"/>
-          <p:nvPr/>
-        </p:nvSpPr>
-        <p:spPr>
-          <a:xfrm>
-            <a:off x="2331720" y="2670048"/>
-            <a:ext cx="1005840" cy="164592"/>
-          </a:xfrm>
-          <a:prstGeom prst="rect">
-            <a:avLst/>
-          </a:prstGeom>
-          <a:noFill/>
-        </p:spPr>
-        <p:txBody>
-          <a:bodyPr wrap="square" lIns="18288" rIns="18288" tIns="0" bIns="0">
-            <a:spAutoFit/>
-          </a:bodyPr>
-          <a:lstStyle/>
-          <a:p>
-            <a:pPr algn="ctr"/>
-            <a:r>
-              <a:rPr sz="700" b="0" i="1">
-                <a:solidFill>
-                  <a:srgbClr val="6B7380"/>
-                </a:solidFill>
-                <a:latin typeface="Calibri"/>
-              </a:rPr>
-              <a:t>emit prediction</a:t>
-            </a:r>
-          </a:p>
-        </p:txBody>
-      </p:sp>
-      <p:cxnSp>
-        <p:nvCxnSpPr>
-          <p:cNvPr id="42" name="Connector 41"/>
-          <p:cNvCxnSpPr/>
-          <p:nvPr/>
-        </p:nvCxnSpPr>
-        <p:spPr>
-          <a:xfrm flipV="1">
-            <a:off x="9326880.0" y="2857500.0"/>
-            <a:ext cx="0.0" cy="480060.0"/>
-          </a:xfrm>
-          <a:prstGeom prst="line">
-            <a:avLst/>
-          </a:prstGeom>
-          <a:ln w="12700">
-            <a:solidFill>
-              <a:srgbClr val="34A853"/>
-            </a:solidFill>
-          </a:ln>
-        </p:spPr>
-        <p:style>
-          <a:lnRef idx="2">
-            <a:schemeClr val="accent1"/>
-          </a:lnRef>
-          <a:fillRef idx="0">
-            <a:schemeClr val="accent1"/>
-          </a:fillRef>
-          <a:effectRef idx="1">
-            <a:schemeClr val="accent1"/>
-          </a:effectRef>
-          <a:fontRef idx="minor">
-            <a:schemeClr val="tx1"/>
-          </a:fontRef>
-        </p:style>
-      </p:cxnSp>
-      <p:cxnSp>
-        <p:nvCxnSpPr>
-          <p:cNvPr id="43" name="Connector 42"/>
-          <p:cNvCxnSpPr/>
-          <p:nvPr/>
-        </p:nvCxnSpPr>
-        <p:spPr>
-          <a:xfrm flipH="1">
-            <a:off x="6126480.0" y="2857500.0"/>
-            <a:ext cx="3200400.0" cy="0.0"/>
-          </a:xfrm>
-          <a:prstGeom prst="line">
-            <a:avLst/>
-          </a:prstGeom>
-          <a:ln w="12700">
-            <a:solidFill>
-              <a:srgbClr val="34A853"/>
-            </a:solidFill>
-          </a:ln>
-        </p:spPr>
-        <p:style>
-          <a:lnRef idx="2">
-            <a:schemeClr val="accent1"/>
-          </a:lnRef>
-          <a:fillRef idx="0">
-            <a:schemeClr val="accent1"/>
-          </a:fillRef>
-          <a:effectRef idx="1">
-            <a:schemeClr val="accent1"/>
-          </a:effectRef>
-          <a:fontRef idx="minor">
-            <a:schemeClr val="tx1"/>
-          </a:fontRef>
-        </p:style>
-      </p:cxnSp>
-      <p:cxnSp>
-        <p:nvCxnSpPr>
-          <p:cNvPr id="44" name="Connector 43"/>
-          <p:cNvCxnSpPr/>
-          <p:nvPr/>
-        </p:nvCxnSpPr>
-        <p:spPr>
-          <a:xfrm flipV="1">
-            <a:off x="6126480.0" y="2651760"/>
-            <a:ext cx="0.0" cy="205740.0"/>
-          </a:xfrm>
-          <a:prstGeom prst="line">
-            <a:avLst/>
-          </a:prstGeom>
-          <a:ln w="12700">
-            <a:solidFill>
-              <a:srgbClr val="34A853"/>
-            </a:solidFill>
-            <a:tailEnd type="triangle" w="med" h="med"/>
-          </a:ln>
-        </p:spPr>
-        <p:style>
-          <a:lnRef idx="2">
-            <a:schemeClr val="accent1"/>
-          </a:lnRef>
-          <a:fillRef idx="0">
-            <a:schemeClr val="accent1"/>
-          </a:fillRef>
-          <a:effectRef idx="1">
-            <a:schemeClr val="accent1"/>
-          </a:effectRef>
-          <a:fontRef idx="minor">
-            <a:schemeClr val="tx1"/>
-          </a:fontRef>
-        </p:style>
-      </p:cxnSp>
-      <p:sp>
-        <p:nvSpPr>
-          <p:cNvPr id="45" name="TextBox 44"/>
-          <p:cNvSpPr txBox="1"/>
-          <p:nvPr/>
-        </p:nvSpPr>
-        <p:spPr>
-          <a:xfrm>
-            <a:off x="7955280" y="2692908"/>
-            <a:ext cx="1280160" cy="164592"/>
-          </a:xfrm>
-          <a:prstGeom prst="rect">
-            <a:avLst/>
-          </a:prstGeom>
-          <a:noFill/>
-        </p:spPr>
-        <p:txBody>
-          <a:bodyPr wrap="square" lIns="18288" rIns="18288" tIns="0" bIns="0">
-            <a:spAutoFit/>
-          </a:bodyPr>
-          <a:lstStyle/>
-          <a:p>
-            <a:pPr algn="ctr"/>
-            <a:r>
-              <a:rPr sz="700" b="0" i="1">
-                <a:solidFill>
-                  <a:srgbClr val="34A853"/>
-                </a:solidFill>
-                <a:latin typeface="Calibri"/>
-              </a:rPr>
-              <a:t>deploy / retrain</a:t>
-            </a:r>
-          </a:p>
-        </p:txBody>
-      </p:sp>
-      <p:sp>
-        <p:nvSpPr>
-          <p:cNvPr id="46" name="Rounded Rectangle 45"/>
-          <p:cNvSpPr/>
-          <p:nvPr/>
-        </p:nvSpPr>
-        <p:spPr>
-          <a:xfrm>
-            <a:off x="1554480" y="4800600"/>
-            <a:ext cx="2011680" cy="777240"/>
-          </a:xfrm>
-          <a:prstGeom prst="roundRect">
-            <a:avLst>
-              <a:gd name="adj" fmla="val 10000"/>
-            </a:avLst>
-          </a:prstGeom>
-          <a:solidFill>
-            <a:srgbClr val="4E88E6"/>
-          </a:solidFill>
-          <a:ln>
-            <a:noFill/>
-          </a:ln>
-        </p:spPr>
-        <p:style>
-          <a:lnRef idx="1">
-            <a:schemeClr val="accent1"/>
-          </a:lnRef>
-          <a:fillRef idx="3">
-            <a:schemeClr val="accent1"/>
-          </a:fillRef>
-          <a:effectRef idx="2">
-            <a:schemeClr val="accent1"/>
-          </a:effectRef>
-          <a:fontRef idx="minor">
-            <a:schemeClr val="lt1"/>
-          </a:fontRef>
-        </p:style>
-        <p:txBody>
-          <a:bodyPr rtlCol="0" anchor="ctr" lIns="73152" rIns="73152" wrap="square"/>
-          <a:lstStyle/>
-          <a:p>
-            <a:pPr algn="ctr"/>
-            <a:r>
-              <a:rPr sz="1100" b="1" i="0">
-                <a:solidFill>
-                  <a:srgbClr val="FFFFFF"/>
-                </a:solidFill>
-                <a:latin typeface="Calibri"/>
-              </a:rPr>
-              <a:t>Breaker Automation</a:t>
-            </a:r>
-          </a:p>
-          <a:p>
-            <a:pPr algn="ctr"/>
-            <a:r>
-              <a:rPr sz="800" b="0" i="0">
-                <a:solidFill>
-                  <a:srgbClr val="FFFFFF"/>
-                </a:solidFill>
-                <a:latin typeface="Calibri"/>
-              </a:rPr>
-              <a:t>Python  ·  flips kill-switch</a:t>
-            </a:r>
-          </a:p>
-        </p:txBody>
-      </p:sp>
-      <p:sp>
-        <p:nvSpPr>
-          <p:cNvPr id="47" name="Rounded Rectangle 46"/>
-          <p:cNvSpPr/>
-          <p:nvPr/>
-        </p:nvSpPr>
-        <p:spPr>
-          <a:xfrm>
-            <a:off x="3749040" y="4937760"/>
-            <a:ext cx="1371600" cy="502920"/>
-          </a:xfrm>
-          <a:prstGeom prst="roundRect">
-            <a:avLst>
-              <a:gd name="adj" fmla="val 20000"/>
-            </a:avLst>
-          </a:prstGeom>
-          <a:solidFill>
-            <a:srgbClr val="FFFFFF"/>
-          </a:solidFill>
-          <a:ln w="9525">
-            <a:solidFill>
-              <a:srgbClr val="C9CFDA"/>
-            </a:solidFill>
-          </a:ln>
-        </p:spPr>
-        <p:style>
-          <a:lnRef idx="1">
-            <a:schemeClr val="accent1"/>
-          </a:lnRef>
-          <a:fillRef idx="3">
-            <a:schemeClr val="accent1"/>
-          </a:fillRef>
-          <a:effectRef idx="2">
-            <a:schemeClr val="accent1"/>
-          </a:effectRef>
-          <a:fontRef idx="minor">
-            <a:schemeClr val="lt1"/>
-          </a:fontRef>
-        </p:style>
-        <p:txBody>
-          <a:bodyPr rtlCol="0" anchor="ctr"/>
-          <a:lstStyle/>
-          <a:p>
-            <a:pPr algn="ctr"/>
-            <a:r>
-              <a:rPr sz="900" b="1" i="0">
-                <a:solidFill>
-                  <a:srgbClr val="0B1F3A"/>
-                </a:solidFill>
-                <a:latin typeface="Calibri"/>
-              </a:rPr>
-              <a:t>Secret Manager</a:t>
-            </a:r>
-          </a:p>
-        </p:txBody>
-      </p:sp>
-      <p:sp>
-        <p:nvSpPr>
-          <p:cNvPr id="48" name="Rounded Rectangle 47"/>
-          <p:cNvSpPr/>
-          <p:nvPr/>
-        </p:nvSpPr>
-        <p:spPr>
-          <a:xfrm>
-            <a:off x="4937760" y="4800600"/>
-            <a:ext cx="2377440" cy="777240"/>
-          </a:xfrm>
-          <a:prstGeom prst="roundRect">
-            <a:avLst>
-              <a:gd name="adj" fmla="val 10000"/>
-            </a:avLst>
-          </a:prstGeom>
-          <a:solidFill>
-            <a:srgbClr val="4E88E6"/>
-          </a:solidFill>
-          <a:ln>
-            <a:noFill/>
-          </a:ln>
-        </p:spPr>
-        <p:style>
-          <a:lnRef idx="1">
-            <a:schemeClr val="accent1"/>
-          </a:lnRef>
-          <a:fillRef idx="3">
-            <a:schemeClr val="accent1"/>
-          </a:fillRef>
-          <a:effectRef idx="2">
-            <a:schemeClr val="accent1"/>
-          </a:effectRef>
-          <a:fontRef idx="minor">
-            <a:schemeClr val="lt1"/>
-          </a:fontRef>
-        </p:style>
-        <p:txBody>
-          <a:bodyPr rtlCol="0" anchor="ctr" lIns="73152" rIns="73152" wrap="square"/>
-          <a:lstStyle/>
-          <a:p>
-            <a:pPr algn="ctr"/>
-            <a:r>
-              <a:rPr sz="1100" b="1" i="0">
-                <a:solidFill>
-                  <a:srgbClr val="FFFFFF"/>
-                </a:solidFill>
-                <a:latin typeface="Calibri"/>
-              </a:rPr>
-              <a:t>Reconciliation Service</a:t>
-            </a:r>
-          </a:p>
-          <a:p>
-            <a:pPr algn="ctr"/>
-            <a:r>
-              <a:rPr sz="800" b="0" i="0">
-                <a:solidFill>
-                  <a:srgbClr val="FFFFFF"/>
-                </a:solidFill>
-                <a:latin typeface="Calibri"/>
-              </a:rPr>
-              <a:t>Python FastAPI  ·  Cloud Run</a:t>
-            </a:r>
-          </a:p>
-        </p:txBody>
-      </p:sp>
-      <p:sp>
-        <p:nvSpPr>
-          <p:cNvPr id="49" name="Rounded Rectangle 48"/>
-          <p:cNvSpPr/>
-          <p:nvPr/>
-        </p:nvSpPr>
-        <p:spPr>
-          <a:xfrm>
-            <a:off x="8229600" y="4800600"/>
-            <a:ext cx="2194560" cy="777240"/>
-          </a:xfrm>
-          <a:prstGeom prst="roundRect">
-            <a:avLst>
-              <a:gd name="adj" fmla="val 10000"/>
-            </a:avLst>
-          </a:prstGeom>
-          <a:solidFill>
-            <a:srgbClr val="4E88E6"/>
-          </a:solidFill>
-          <a:ln>
-            <a:noFill/>
-          </a:ln>
-        </p:spPr>
-        <p:style>
-          <a:lnRef idx="1">
-            <a:schemeClr val="accent1"/>
-          </a:lnRef>
-          <a:fillRef idx="3">
-            <a:schemeClr val="accent1"/>
-          </a:fillRef>
-          <a:effectRef idx="2">
-            <a:schemeClr val="accent1"/>
-          </a:effectRef>
-          <a:fontRef idx="minor">
-            <a:schemeClr val="lt1"/>
-          </a:fontRef>
-        </p:style>
-        <p:txBody>
-          <a:bodyPr rtlCol="0" anchor="ctr" lIns="73152" rIns="73152" wrap="square"/>
-          <a:lstStyle/>
-          <a:p>
-            <a:pPr algn="ctr"/>
-            <a:r>
-              <a:rPr sz="1100" b="1" i="0">
-                <a:solidFill>
-                  <a:srgbClr val="FFFFFF"/>
-                </a:solidFill>
-                <a:latin typeface="Calibri"/>
-              </a:rPr>
-              <a:t>Activation Service</a:t>
-            </a:r>
-          </a:p>
-          <a:p>
-            <a:pPr algn="ctr"/>
-            <a:r>
-              <a:rPr sz="800" b="0" i="0">
-                <a:solidFill>
-                  <a:srgbClr val="FFFFFF"/>
-                </a:solidFill>
-                <a:latin typeface="Calibri"/>
-              </a:rPr>
-              <a:t>Python 3.12  ·  Cloud Run</a:t>
-            </a:r>
-          </a:p>
-        </p:txBody>
-      </p:sp>
-      <p:sp>
-        <p:nvSpPr>
-          <p:cNvPr id="50" name="TextBox 49"/>
-          <p:cNvSpPr txBox="1"/>
-          <p:nvPr/>
-        </p:nvSpPr>
-        <p:spPr>
-          <a:xfrm>
-            <a:off x="10561320" y="4846320"/>
-            <a:ext cx="914400" cy="219456"/>
-          </a:xfrm>
-          <a:prstGeom prst="rect">
-            <a:avLst/>
-          </a:prstGeom>
-          <a:noFill/>
-        </p:spPr>
-        <p:txBody>
-          <a:bodyPr wrap="none">
-            <a:spAutoFit/>
-          </a:bodyPr>
-          <a:lstStyle/>
-          <a:p>
-            <a:r>
-              <a:rPr sz="900" b="1" i="0">
-                <a:solidFill>
-                  <a:srgbClr val="333F52"/>
-                </a:solidFill>
-                <a:latin typeface="Calibri"/>
-              </a:rPr>
-              <a:t>→  SA360</a:t>
-            </a:r>
-          </a:p>
-        </p:txBody>
-      </p:sp>
-      <p:sp>
-        <p:nvSpPr>
-          <p:cNvPr id="51" name="TextBox 50"/>
-          <p:cNvSpPr txBox="1"/>
-          <p:nvPr/>
-        </p:nvSpPr>
-        <p:spPr>
-          <a:xfrm>
-            <a:off x="10561320" y="5084064"/>
-            <a:ext cx="914400" cy="219456"/>
-          </a:xfrm>
-          <a:prstGeom prst="rect">
-            <a:avLst/>
-          </a:prstGeom>
-          <a:noFill/>
-        </p:spPr>
-        <p:txBody>
-          <a:bodyPr wrap="none">
-            <a:spAutoFit/>
-          </a:bodyPr>
-          <a:lstStyle/>
-          <a:p>
-            <a:r>
-              <a:rPr sz="900" b="1" i="0">
-                <a:solidFill>
-                  <a:srgbClr val="333F52"/>
-                </a:solidFill>
-                <a:latin typeface="Calibri"/>
-              </a:rPr>
-              <a:t>→  SSGTM</a:t>
-            </a:r>
-          </a:p>
-        </p:txBody>
-      </p:sp>
-      <p:sp>
-        <p:nvSpPr>
-          <p:cNvPr id="52" name="TextBox 51"/>
-          <p:cNvSpPr txBox="1"/>
-          <p:nvPr/>
-        </p:nvSpPr>
-        <p:spPr>
-          <a:xfrm>
-            <a:off x="10561320" y="5321808"/>
-            <a:ext cx="914400" cy="219456"/>
-          </a:xfrm>
-          <a:prstGeom prst="rect">
-            <a:avLst/>
-          </a:prstGeom>
-          <a:noFill/>
-        </p:spPr>
-        <p:txBody>
-          <a:bodyPr wrap="none">
-            <a:spAutoFit/>
-          </a:bodyPr>
-          <a:lstStyle/>
-          <a:p>
-            <a:r>
-              <a:rPr sz="900" b="1" i="0">
-                <a:solidFill>
-                  <a:srgbClr val="333F52"/>
-                </a:solidFill>
-                <a:latin typeface="Calibri"/>
-              </a:rPr>
-              <a:t>→  OCI</a:t>
-            </a:r>
-          </a:p>
-        </p:txBody>
-      </p:sp>
-      <p:cxnSp>
-        <p:nvCxnSpPr>
-          <p:cNvPr id="53" name="Connector 52"/>
-          <p:cNvCxnSpPr/>
-          <p:nvPr/>
-        </p:nvCxnSpPr>
-        <p:spPr>
-          <a:xfrm>
-            <a:off x="3566160" y="5189220.0"/>
-            <a:ext cx="182880" cy="0.0"/>
-          </a:xfrm>
-          <a:prstGeom prst="line">
-            <a:avLst/>
-          </a:prstGeom>
-          <a:ln w="15875">
-            <a:solidFill>
-              <a:srgbClr val="46556B"/>
-            </a:solidFill>
-            <a:tailEnd type="triangle" w="med" h="med"/>
-          </a:ln>
-        </p:spPr>
-        <p:style>
-          <a:lnRef idx="2">
-            <a:schemeClr val="accent1"/>
-          </a:lnRef>
-          <a:fillRef idx="0">
-            <a:schemeClr val="accent1"/>
-          </a:fillRef>
-          <a:effectRef idx="1">
-            <a:schemeClr val="accent1"/>
-          </a:effectRef>
-          <a:fontRef idx="minor">
-            <a:schemeClr val="tx1"/>
-          </a:fontRef>
-        </p:style>
-      </p:cxnSp>
-      <p:cxnSp>
-        <p:nvCxnSpPr>
-          <p:cNvPr id="54" name="Connector 53"/>
-          <p:cNvCxnSpPr/>
-          <p:nvPr/>
-        </p:nvCxnSpPr>
-        <p:spPr>
-          <a:xfrm>
-            <a:off x="10424160" y="5189220.0"/>
-            <a:ext cx="91440" cy="0.0"/>
-          </a:xfrm>
-          <a:prstGeom prst="line">
-            <a:avLst/>
-          </a:prstGeom>
-          <a:ln w="15875">
-            <a:solidFill>
-              <a:srgbClr val="46556B"/>
-            </a:solidFill>
-            <a:tailEnd type="triangle" w="med" h="med"/>
-          </a:ln>
-        </p:spPr>
-        <p:style>
-          <a:lnRef idx="2">
-            <a:schemeClr val="accent1"/>
-          </a:lnRef>
-          <a:fillRef idx="0">
-            <a:schemeClr val="accent1"/>
-          </a:fillRef>
-          <a:effectRef idx="1">
-            <a:schemeClr val="accent1"/>
-          </a:effectRef>
-          <a:fontRef idx="minor">
-            <a:schemeClr val="tx1"/>
-          </a:fontRef>
-        </p:style>
-      </p:cxnSp>
-      <p:cxnSp>
-        <p:nvCxnSpPr>
-          <p:cNvPr id="55" name="Connector 54"/>
-          <p:cNvCxnSpPr/>
-          <p:nvPr/>
-        </p:nvCxnSpPr>
-        <p:spPr>
-          <a:xfrm flipV="1">
-            <a:off x="4434840.0" y="2651760"/>
-            <a:ext cx="0.0" cy="2286000"/>
-          </a:xfrm>
-          <a:prstGeom prst="line">
-            <a:avLst/>
-          </a:prstGeom>
-          <a:ln w="12700">
-            <a:solidFill>
-              <a:srgbClr val="46556B"/>
-            </a:solidFill>
-            <a:tailEnd type="triangle" w="med" h="med"/>
-          </a:ln>
-        </p:spPr>
-        <p:style>
-          <a:lnRef idx="2">
-            <a:schemeClr val="accent1"/>
-          </a:lnRef>
-          <a:fillRef idx="0">
-            <a:schemeClr val="accent1"/>
-          </a:fillRef>
-          <a:effectRef idx="1">
-            <a:schemeClr val="accent1"/>
-          </a:effectRef>
-          <a:fontRef idx="minor">
-            <a:schemeClr val="tx1"/>
-          </a:fontRef>
-        </p:style>
-      </p:cxnSp>
-      <p:sp>
-        <p:nvSpPr>
-          <p:cNvPr id="56" name="TextBox 55"/>
-          <p:cNvSpPr txBox="1"/>
-          <p:nvPr/>
-        </p:nvSpPr>
-        <p:spPr>
-          <a:xfrm>
-            <a:off x="4480560" y="3703320"/>
-            <a:ext cx="1463040" cy="164592"/>
-          </a:xfrm>
-          <a:prstGeom prst="rect">
-            <a:avLst/>
-          </a:prstGeom>
-          <a:noFill/>
-        </p:spPr>
-        <p:txBody>
-          <a:bodyPr wrap="square" lIns="18288" rIns="18288" tIns="0" bIns="0">
-            <a:spAutoFit/>
-          </a:bodyPr>
-          <a:lstStyle/>
-          <a:p>
-            <a:pPr algn="l"/>
-            <a:r>
-              <a:rPr sz="700" b="0" i="1">
-                <a:solidFill>
-                  <a:srgbClr val="6B7380"/>
-                </a:solidFill>
-                <a:latin typeface="Calibri"/>
-              </a:rPr>
-              <a:t>kill-switch flag</a:t>
-            </a:r>
-          </a:p>
-        </p:txBody>
-      </p:sp>
-      <p:cxnSp>
-        <p:nvCxnSpPr>
-          <p:cNvPr id="57" name="Connector 56"/>
-          <p:cNvCxnSpPr/>
-          <p:nvPr/>
-        </p:nvCxnSpPr>
-        <p:spPr>
-          <a:xfrm>
-            <a:off x="6126480.0" y="4224528"/>
-            <a:ext cx="0.0" cy="576072"/>
-          </a:xfrm>
-          <a:prstGeom prst="line">
-            <a:avLst/>
-          </a:prstGeom>
-          <a:ln w="15875">
-            <a:solidFill>
-              <a:srgbClr val="46556B"/>
-            </a:solidFill>
-            <a:tailEnd type="triangle" w="med" h="med"/>
-          </a:ln>
-        </p:spPr>
-        <p:style>
-          <a:lnRef idx="2">
-            <a:schemeClr val="accent1"/>
-          </a:lnRef>
-          <a:fillRef idx="0">
-            <a:schemeClr val="accent1"/>
-          </a:fillRef>
-          <a:effectRef idx="1">
-            <a:schemeClr val="accent1"/>
-          </a:effectRef>
-          <a:fontRef idx="minor">
-            <a:schemeClr val="tx1"/>
-          </a:fontRef>
-        </p:style>
-      </p:cxnSp>
-      <p:sp>
-        <p:nvSpPr>
-          <p:cNvPr id="58" name="TextBox 57"/>
-          <p:cNvSpPr txBox="1"/>
-          <p:nvPr/>
-        </p:nvSpPr>
-        <p:spPr>
-          <a:xfrm>
-            <a:off x="5029200" y="4421124"/>
-            <a:ext cx="1005840" cy="164592"/>
-          </a:xfrm>
-          <a:prstGeom prst="rect">
-            <a:avLst/>
-          </a:prstGeom>
-          <a:noFill/>
-        </p:spPr>
-        <p:txBody>
-          <a:bodyPr wrap="square" lIns="18288" rIns="18288" tIns="0" bIns="0">
-            <a:spAutoFit/>
-          </a:bodyPr>
-          <a:lstStyle/>
-          <a:p>
-            <a:pPr algn="ctr"/>
-            <a:r>
-              <a:rPr sz="700" b="0" i="1">
-                <a:solidFill>
-                  <a:srgbClr val="6B7380"/>
-                </a:solidFill>
-                <a:latin typeface="Calibri"/>
-              </a:rPr>
-              <a:t>predictions_vs_revenue</a:t>
-            </a:r>
-          </a:p>
-        </p:txBody>
-      </p:sp>
-      <p:cxnSp>
-        <p:nvCxnSpPr>
-          <p:cNvPr id="59" name="Connector 58"/>
-          <p:cNvCxnSpPr/>
-          <p:nvPr/>
-        </p:nvCxnSpPr>
-        <p:spPr>
-          <a:xfrm>
-            <a:off x="7315200" y="5189220.0"/>
-            <a:ext cx="365760" cy="0.0"/>
-          </a:xfrm>
-          <a:prstGeom prst="line">
-            <a:avLst/>
-          </a:prstGeom>
-          <a:ln w="12700">
-            <a:solidFill>
-              <a:srgbClr val="46556B"/>
-            </a:solidFill>
-          </a:ln>
-        </p:spPr>
-        <p:style>
-          <a:lnRef idx="2">
-            <a:schemeClr val="accent1"/>
-          </a:lnRef>
-          <a:fillRef idx="0">
-            <a:schemeClr val="accent1"/>
-          </a:fillRef>
-          <a:effectRef idx="1">
-            <a:schemeClr val="accent1"/>
-          </a:effectRef>
-          <a:fontRef idx="minor">
-            <a:schemeClr val="tx1"/>
-          </a:fontRef>
-        </p:style>
-      </p:cxnSp>
-      <p:cxnSp>
-        <p:nvCxnSpPr>
-          <p:cNvPr id="60" name="Connector 59"/>
-          <p:cNvCxnSpPr/>
-          <p:nvPr/>
-        </p:nvCxnSpPr>
-        <p:spPr>
-          <a:xfrm flipV="1">
-            <a:off x="7680960" y="2263140.0"/>
-            <a:ext cx="0" cy="2926080.0"/>
-          </a:xfrm>
-          <a:prstGeom prst="line">
-            <a:avLst/>
-          </a:prstGeom>
-          <a:ln w="12700">
-            <a:solidFill>
-              <a:srgbClr val="46556B"/>
-            </a:solidFill>
-          </a:ln>
-        </p:spPr>
-        <p:style>
-          <a:lnRef idx="2">
-            <a:schemeClr val="accent1"/>
-          </a:lnRef>
-          <a:fillRef idx="0">
-            <a:schemeClr val="accent1"/>
-          </a:fillRef>
-          <a:effectRef idx="1">
-            <a:schemeClr val="accent1"/>
-          </a:effectRef>
-          <a:fontRef idx="minor">
-            <a:schemeClr val="tx1"/>
-          </a:fontRef>
-        </p:style>
-      </p:cxnSp>
-      <p:cxnSp>
-        <p:nvCxnSpPr>
-          <p:cNvPr id="61" name="Connector 60"/>
-          <p:cNvCxnSpPr/>
-          <p:nvPr/>
-        </p:nvCxnSpPr>
-        <p:spPr>
-          <a:xfrm>
-            <a:off x="7680960" y="2263140.0"/>
-            <a:ext cx="1371600" cy="0.0"/>
-          </a:xfrm>
-          <a:prstGeom prst="line">
-            <a:avLst/>
-          </a:prstGeom>
-          <a:ln w="12700">
-            <a:solidFill>
-              <a:srgbClr val="46556B"/>
-            </a:solidFill>
-            <a:tailEnd type="triangle" w="med" h="med"/>
-          </a:ln>
-        </p:spPr>
-        <p:style>
-          <a:lnRef idx="2">
-            <a:schemeClr val="accent1"/>
-          </a:lnRef>
-          <a:fillRef idx="0">
-            <a:schemeClr val="accent1"/>
-          </a:fillRef>
-          <a:effectRef idx="1">
-            <a:schemeClr val="accent1"/>
-          </a:effectRef>
-          <a:fontRef idx="minor">
-            <a:schemeClr val="tx1"/>
-          </a:fontRef>
-        </p:style>
-      </p:cxnSp>
-      <p:sp>
-        <p:nvSpPr>
-          <p:cNvPr id="62" name="TextBox 61"/>
-          <p:cNvSpPr txBox="1"/>
-          <p:nvPr/>
-        </p:nvSpPr>
-        <p:spPr>
-          <a:xfrm>
-            <a:off x="7726680" y="2061972"/>
-            <a:ext cx="1005840" cy="164592"/>
-          </a:xfrm>
-          <a:prstGeom prst="rect">
-            <a:avLst/>
-          </a:prstGeom>
-          <a:noFill/>
-        </p:spPr>
-        <p:txBody>
-          <a:bodyPr wrap="square" lIns="18288" rIns="18288" tIns="0" bIns="0">
-            <a:spAutoFit/>
-          </a:bodyPr>
-          <a:lstStyle/>
-          <a:p>
-            <a:pPr algn="l"/>
-            <a:r>
-              <a:rPr sz="700" b="0" i="1">
-                <a:solidFill>
-                  <a:srgbClr val="6B7380"/>
-                </a:solidFill>
-                <a:latin typeface="Calibri"/>
-              </a:rPr>
-              <a:t>HTTPS /api</a:t>
-            </a:r>
-          </a:p>
-        </p:txBody>
-      </p:sp>
-      <p:cxnSp>
-        <p:nvCxnSpPr>
-          <p:cNvPr id="63" name="Connector 62"/>
-          <p:cNvCxnSpPr/>
-          <p:nvPr/>
-        </p:nvCxnSpPr>
-        <p:spPr>
-          <a:xfrm>
-            <a:off x="7315200" y="3995928"/>
-            <a:ext cx="1280160" cy="0"/>
-          </a:xfrm>
-          <a:prstGeom prst="line">
-            <a:avLst/>
-          </a:prstGeom>
-          <a:ln w="12700">
-            <a:solidFill>
-              <a:srgbClr val="46556B"/>
-            </a:solidFill>
-          </a:ln>
-        </p:spPr>
-        <p:style>
-          <a:lnRef idx="2">
-            <a:schemeClr val="accent1"/>
-          </a:lnRef>
-          <a:fillRef idx="0">
-            <a:schemeClr val="accent1"/>
-          </a:fillRef>
-          <a:effectRef idx="1">
-            <a:schemeClr val="accent1"/>
-          </a:effectRef>
-          <a:fontRef idx="minor">
-            <a:schemeClr val="tx1"/>
-          </a:fontRef>
-        </p:style>
-      </p:cxnSp>
-      <p:cxnSp>
-        <p:nvCxnSpPr>
-          <p:cNvPr id="64" name="Connector 63"/>
-          <p:cNvCxnSpPr/>
-          <p:nvPr/>
-        </p:nvCxnSpPr>
-        <p:spPr>
-          <a:xfrm>
-            <a:off x="8595360" y="3995928"/>
-            <a:ext cx="0" cy="804672"/>
-          </a:xfrm>
-          <a:prstGeom prst="line">
-            <a:avLst/>
-          </a:prstGeom>
-          <a:ln w="12700">
-            <a:solidFill>
-              <a:srgbClr val="46556B"/>
-            </a:solidFill>
-            <a:tailEnd type="triangle" w="med" h="med"/>
-          </a:ln>
-        </p:spPr>
-        <p:style>
-          <a:lnRef idx="2">
-            <a:schemeClr val="accent1"/>
-          </a:lnRef>
-          <a:fillRef idx="0">
-            <a:schemeClr val="accent1"/>
-          </a:fillRef>
-          <a:effectRef idx="1">
-            <a:schemeClr val="accent1"/>
-          </a:effectRef>
-          <a:fontRef idx="minor">
-            <a:schemeClr val="tx1"/>
-          </a:fontRef>
-        </p:style>
-      </p:cxnSp>
-      <p:sp>
-        <p:nvSpPr>
-          <p:cNvPr id="65" name="TextBox 64"/>
-          <p:cNvSpPr txBox="1"/>
-          <p:nvPr/>
-        </p:nvSpPr>
-        <p:spPr>
-          <a:xfrm>
-            <a:off x="7863840" y="3813048"/>
-            <a:ext cx="1463040" cy="164592"/>
-          </a:xfrm>
-          <a:prstGeom prst="rect">
-            <a:avLst/>
-          </a:prstGeom>
-          <a:noFill/>
-        </p:spPr>
-        <p:txBody>
-          <a:bodyPr wrap="square" lIns="18288" rIns="18288" tIns="0" bIns="0">
-            <a:spAutoFit/>
-          </a:bodyPr>
-          <a:lstStyle/>
-          <a:p>
-            <a:pPr algn="ctr"/>
-            <a:r>
-              <a:rPr sz="700" b="0" i="1">
-                <a:solidFill>
-                  <a:srgbClr val="6B7380"/>
-                </a:solidFill>
-                <a:latin typeface="Calibri"/>
-              </a:rPr>
-              <a:t>predictions</a:t>
-            </a:r>
-          </a:p>
-        </p:txBody>
-      </p:sp>
-      <p:sp>
-        <p:nvSpPr>
-          <p:cNvPr id="66" name="TextBox 65"/>
-          <p:cNvSpPr txBox="1"/>
-          <p:nvPr/>
-        </p:nvSpPr>
-        <p:spPr>
-          <a:xfrm>
-            <a:off x="594360" y="5623560"/>
-            <a:ext cx="11002975" cy="457200"/>
-          </a:xfrm>
-          <a:prstGeom prst="rect">
-            <a:avLst/>
-          </a:prstGeom>
-          <a:noFill/>
-        </p:spPr>
-        <p:txBody>
-          <a:bodyPr wrap="square">
-            <a:spAutoFit/>
-          </a:bodyPr>
-          <a:lstStyle/>
-          <a:p>
-            <a:r>
-              <a:rPr sz="900" b="1" i="0">
-                <a:solidFill>
-                  <a:srgbClr val="1F4CA6"/>
-                </a:solidFill>
-                <a:latin typeface="Calibri"/>
-              </a:rPr>
-              <a:t>Scoring API guardrails:  </a:t>
-            </a:r>
-            <a:r>
-              <a:rPr sz="900" b="0" i="0">
-                <a:solidFill>
-                  <a:srgbClr val="333F52"/>
-                </a:solidFill>
-                <a:latin typeface="Calibri"/>
-              </a:rPr>
-              <a:t>prediction bounds  ·  negative clamp  ·  model &amp; BigQuery timeouts  ·  anomaly window  ·  circuit-breaker  ·  kill-switch.</a:t>
-            </a:r>
-          </a:p>
-          <a:p>
-            <a:r>
-              <a:rPr sz="900" b="1" i="0">
-                <a:solidFill>
-                  <a:srgbClr val="1F4CA6"/>
-                </a:solidFill>
-                <a:latin typeface="Calibri"/>
-              </a:rPr>
-              <a:t>Delivery:  </a:t>
-            </a:r>
-            <a:r>
-              <a:rPr sz="900" b="0" i="0">
-                <a:solidFill>
-                  <a:srgbClr val="333F52"/>
-                </a:solidFill>
-                <a:latin typeface="Calibri"/>
-              </a:rPr>
-              <a:t>GitHub  →  Workload Identity Federation  →  Cloud Build  →  Artifact Registry  →  Cloud Run, gated on test, coverage and supply-chain scans.</a:t>
-            </a:r>
-          </a:p>
-        </p:txBody>
-      </p:sp>
-      <p:sp>
-        <p:nvSpPr>
-          <p:cNvPr id="67" name="Rectangle 66"/>
+      <p:pic>
+        <p:nvPicPr>
+          <p:cNvPr id="4" name="Picture 3" descr="architecture.png"/>
+          <p:cNvPicPr>
+            <a:picLocks noChangeAspect="1"/>
+          </p:cNvPicPr>
+          <p:nvPr/>
+        </p:nvPicPr>
+        <p:blipFill>
+          <a:blip r:embed="rId2"/>
+          <a:stretch>
+            <a:fillRect/>
+          </a:stretch>
+        </p:blipFill>
+        <p:spPr>
+          <a:xfrm>
+            <a:off x="1360017" y="1051560"/>
+            <a:ext cx="9471660" cy="5166360"/>
+          </a:xfrm>
+          <a:prstGeom prst="rect">
+            <a:avLst/>
+          </a:prstGeom>
+        </p:spPr>
+      </p:pic>
+      <p:sp>
+        <p:nvSpPr>
+          <p:cNvPr id="5" name="Rectangle 4"/>
           <p:cNvSpPr/>
           <p:nvPr/>
         </p:nvSpPr>
@@ -12453,7 +9831,7 @@
       </p:sp>
       <p:sp>
         <p:nvSpPr>
-          <p:cNvPr id="68" name="TextBox 67"/>
+          <p:cNvPr id="6" name="TextBox 5"/>
           <p:cNvSpPr txBox="1"/>
           <p:nvPr/>
         </p:nvSpPr>

--- a/docs/client-demo-deck.pptx
+++ b/docs/client-demo-deck.pptx
@@ -9785,6 +9785,58 @@
         </p:nvSpPr>
         <p:spPr>
           <a:xfrm>
+            <a:off x="2570882" y="3358931"/>
+            <a:ext cx="1177230" cy="174902"/>
+          </a:xfrm>
+          <a:prstGeom prst="rect">
+            <a:avLst/>
+          </a:prstGeom>
+          <a:solidFill>
+            <a:srgbClr val="4E82D5"/>
+          </a:solidFill>
+          <a:ln>
+            <a:noFill/>
+          </a:ln>
+        </p:spPr>
+        <p:style>
+          <a:lnRef idx="1">
+            <a:schemeClr val="accent1"/>
+          </a:lnRef>
+          <a:fillRef idx="3">
+            <a:schemeClr val="accent1"/>
+          </a:fillRef>
+          <a:effectRef idx="2">
+            <a:schemeClr val="accent1"/>
+          </a:effectRef>
+          <a:fontRef idx="minor">
+            <a:schemeClr val="lt1"/>
+          </a:fontRef>
+        </p:style>
+        <p:txBody>
+          <a:bodyPr rtlCol="0" anchor="ctr" lIns="0" rIns="0" tIns="0" bIns="0"/>
+          <a:lstStyle/>
+          <a:p>
+            <a:pPr algn="ctr"/>
+            <a:r>
+              <a:rPr sz="1000" b="1">
+                <a:solidFill>
+                  <a:srgbClr val="FFFFFF"/>
+                </a:solidFill>
+                <a:latin typeface="Calibri"/>
+              </a:rPr>
+              <a:t>Bounds Calibration Job</a:t>
+            </a:r>
+          </a:p>
+        </p:txBody>
+      </p:sp>
+      <p:sp>
+        <p:nvSpPr>
+          <p:cNvPr id="6" name="Rectangle 5"/>
+          <p:cNvSpPr/>
+          <p:nvPr/>
+        </p:nvSpPr>
+        <p:spPr>
+          <a:xfrm>
             <a:off x="0" y="6537960"/>
             <a:ext cx="12191695" cy="320040"/>
           </a:xfrm>
@@ -9831,7 +9883,7 @@
       </p:sp>
       <p:sp>
         <p:nvSpPr>
-          <p:cNvPr id="6" name="TextBox 5"/>
+          <p:cNvPr id="7" name="TextBox 6"/>
           <p:cNvSpPr txBox="1"/>
           <p:nvPr/>
         </p:nvSpPr>

--- a/docs/client-demo-deck.pptx
+++ b/docs/client-demo-deck.pptx
@@ -6809,7 +6809,7 @@
                 </a:solidFill>
                 <a:latin typeface="Calibri"/>
               </a:rPr>
-              <a:t>We have built and deployed an end-to-end machine-learning service that predicts revenue-per-click in real time, with the engineering controls required to run it safely in production.</a:t>
+              <a:t>We have built and deployed an end-to-end machine-learning service that predicts revenue-per-click in real time, with the engineering controls required to run it safely in production. You can run the live model yourself in today's demo.</a:t>
             </a:r>
           </a:p>
           <a:p>
@@ -6856,7 +6856,7 @@
                 </a:solidFill>
                 <a:latin typeface="Calibri"/>
               </a:rPr>
-              <a:t>Working software — a live API on Google Cloud is serving predictions right now, with measured p95 latency under one second.</a:t>
+              <a:t>Working software you can touch — a browser-based dashboard fronts the live model on Google Cloud, with measured p95 latency under one second.</a:t>
             </a:r>
           </a:p>
           <a:p>
@@ -6884,7 +6884,7 @@
                 </a:solidFill>
                 <a:latin typeface="Calibri"/>
               </a:rPr>
-              <a:t>Production engineering — circuit breakers, drift monitoring, explainability, alerting, runbooks, and a tested rollback path are all in place.</a:t>
+              <a:t>Explainable by default — every prediction returns per-feature attributions, rendered alongside the price so finance and compliance can audit any decision.</a:t>
             </a:r>
           </a:p>
           <a:p>
@@ -6912,7 +6912,7 @@
                 </a:solidFill>
                 <a:latin typeface="Calibri"/>
               </a:rPr>
-              <a:t>A clear path to your data — the platform is ready to ingest real click and sales-ledger feeds; the model retrains and canary-deploys without downtime.</a:t>
+              <a:t>Production engineering — circuit breakers, drift monitoring, alerting, runbooks, and a tested rollback path are all in place; a clear path to your real data follows in eight weeks.</a:t>
             </a:r>
           </a:p>
         </p:txBody>
@@ -7562,13 +7562,13 @@
               </a:spcAft>
             </a:pPr>
             <a:r>
-              <a:rPr sz="1800" b="1" i="0">
+              <a:rPr sz="1700" b="1" i="0">
                 <a:solidFill>
                   <a:srgbClr val="0F6E7A"/>
                 </a:solidFill>
                 <a:latin typeface="Calibri"/>
               </a:rPr>
-              <a:t>A managed prediction service on Google Cloud.</a:t>
+              <a:t>A managed prediction service on Google Cloud, with a browser UI for non-technical users.</a:t>
             </a:r>
           </a:p>
           <a:p>
@@ -7581,7 +7581,7 @@
               </a:spcAft>
             </a:pPr>
             <a:r>
-              <a:rPr sz="1400" b="1" i="0">
+              <a:rPr sz="1300" b="1" i="0">
                 <a:solidFill>
                   <a:srgbClr val="D97306"/>
                 </a:solidFill>
@@ -7590,13 +7590,13 @@
               <a:t>•  </a:t>
             </a:r>
             <a:r>
-              <a:rPr sz="1400" b="0" i="0">
+              <a:rPr sz="1300" b="0" i="0">
                 <a:solidFill>
                   <a:srgbClr val="333F52"/>
                 </a:solidFill>
                 <a:latin typeface="Calibri"/>
               </a:rPr>
-              <a:t>REST API — POST a click context, receive an RPC estimate in under a second.</a:t>
+              <a:t>Executive dashboard — KPIs, daily forecast-vs-reality charts, residual distribution, and a live model-health panel, all in business language.</a:t>
             </a:r>
           </a:p>
           <a:p>
@@ -7609,7 +7609,7 @@
               </a:spcAft>
             </a:pPr>
             <a:r>
-              <a:rPr sz="1400" b="1" i="0">
+              <a:rPr sz="1300" b="1" i="0">
                 <a:solidFill>
                   <a:srgbClr val="D97306"/>
                 </a:solidFill>
@@ -7618,13 +7618,13 @@
               <a:t>•  </a:t>
             </a:r>
             <a:r>
-              <a:rPr sz="1400" b="0" i="0">
+              <a:rPr sz="1300" b="0" i="0">
                 <a:solidFill>
                   <a:srgbClr val="333F52"/>
                 </a:solidFill>
                 <a:latin typeface="Calibri"/>
               </a:rPr>
-              <a:t>Explainability — every prediction can return per-feature attributions so analysts can see why the model said what it said.</a:t>
+              <a:t>Interactive prediction — describe a click in eight plain-English fields, press Predict, watch the pipeline execute step-by-step in real time.</a:t>
             </a:r>
           </a:p>
           <a:p>
@@ -7637,7 +7637,7 @@
               </a:spcAft>
             </a:pPr>
             <a:r>
-              <a:rPr sz="1400" b="1" i="0">
+              <a:rPr sz="1300" b="1" i="0">
                 <a:solidFill>
                   <a:srgbClr val="D97306"/>
                 </a:solidFill>
@@ -7646,13 +7646,13 @@
               <a:t>•  </a:t>
             </a:r>
             <a:r>
-              <a:rPr sz="1400" b="0" i="0">
+              <a:rPr sz="1300" b="0" i="0">
                 <a:solidFill>
                   <a:srgbClr val="333F52"/>
                 </a:solidFill>
                 <a:latin typeface="Calibri"/>
               </a:rPr>
-              <a:t>Streaming ingestion — predictions land in BigQuery for analytics, reconciliation, and downstream activation.</a:t>
+              <a:t>Explainable AI — every prediction returns per-feature attributions, rendered as horizontal bars so anyone can see why the model said what it said.</a:t>
             </a:r>
           </a:p>
           <a:p>
@@ -7665,7 +7665,7 @@
               </a:spcAft>
             </a:pPr>
             <a:r>
-              <a:rPr sz="1400" b="1" i="0">
+              <a:rPr sz="1300" b="1" i="0">
                 <a:solidFill>
                   <a:srgbClr val="D97306"/>
                 </a:solidFill>
@@ -7674,13 +7674,13 @@
               <a:t>•  </a:t>
             </a:r>
             <a:r>
-              <a:rPr sz="1400" b="0" i="0">
+              <a:rPr sz="1300" b="0" i="0">
                 <a:solidFill>
                   <a:srgbClr val="333F52"/>
                 </a:solidFill>
                 <a:latin typeface="Calibri"/>
               </a:rPr>
-              <a:t>Safety net — anomaly detection, automatic circuit-breaker, negative-prediction guards, configurable timeouts.</a:t>
+              <a:t>REST API — the same predictions are available programmatically for SA360, SSGTM and downstream activation.</a:t>
             </a:r>
           </a:p>
           <a:p>
@@ -7693,7 +7693,7 @@
               </a:spcAft>
             </a:pPr>
             <a:r>
-              <a:rPr sz="1400" b="1" i="0">
+              <a:rPr sz="1300" b="1" i="0">
                 <a:solidFill>
                   <a:srgbClr val="D97306"/>
                 </a:solidFill>
@@ -7702,7 +7702,35 @@
               <a:t>•  </a:t>
             </a:r>
             <a:r>
-              <a:rPr sz="1400" b="0" i="0">
+              <a:rPr sz="1300" b="0" i="0">
+                <a:solidFill>
+                  <a:srgbClr val="333F52"/>
+                </a:solidFill>
+                <a:latin typeface="Calibri"/>
+              </a:rPr>
+              <a:t>Safety net — anomaly detection, automatic circuit-breaker, negative-prediction guards, configurable timeouts, kill-switch flag.</a:t>
+            </a:r>
+          </a:p>
+          <a:p>
+            <a:pPr>
+              <a:lnSpc>
+                <a:spcPct val="120000"/>
+              </a:lnSpc>
+              <a:spcAft>
+                <a:spcPts val="300"/>
+              </a:spcAft>
+            </a:pPr>
+            <a:r>
+              <a:rPr sz="1300" b="1" i="0">
+                <a:solidFill>
+                  <a:srgbClr val="D97306"/>
+                </a:solidFill>
+                <a:latin typeface="Calibri"/>
+              </a:rPr>
+              <a:t>•  </a:t>
+            </a:r>
+            <a:r>
+              <a:rPr sz="1300" b="0" i="0">
                 <a:solidFill>
                   <a:srgbClr val="333F52"/>
                 </a:solidFill>
@@ -7721,7 +7749,7 @@
               </a:spcAft>
             </a:pPr>
             <a:r>
-              <a:rPr sz="1800" b="1" i="0">
+              <a:rPr sz="1700" b="1" i="0">
                 <a:solidFill>
                   <a:srgbClr val="0F6E7A"/>
                 </a:solidFill>
@@ -7737,7 +7765,7 @@
               </a:lnSpc>
             </a:pPr>
             <a:r>
-              <a:rPr sz="1200" b="0" i="1">
+              <a:rPr sz="1100" b="0" i="1">
                 <a:solidFill>
                   <a:srgbClr val="6B7380"/>
                 </a:solidFill>
@@ -10071,13 +10099,13 @@
               </a:spcAft>
             </a:pPr>
             <a:r>
-              <a:rPr sz="1800" b="1" i="0">
+              <a:rPr sz="1600" b="1" i="0">
                 <a:solidFill>
                   <a:srgbClr val="0F6E7A"/>
                 </a:solidFill>
                 <a:latin typeface="Calibri"/>
               </a:rPr>
-              <a:t>1.  The reconciliation dashboard</a:t>
+              <a:t>1.  The dashboard, in business language</a:t>
             </a:r>
           </a:p>
           <a:p>
@@ -10090,13 +10118,13 @@
               </a:spcAft>
             </a:pPr>
             <a:r>
-              <a:rPr sz="1400" b="0" i="0">
+              <a:rPr sz="1200" b="0" i="0">
                 <a:solidFill>
                   <a:srgbClr val="333F52"/>
                 </a:solidFill>
                 <a:latin typeface="Calibri"/>
               </a:rPr>
-              <a:t>We open the live dashboard. It shows the last seven days of predictions paired with realized revenue from the sales ledger — predicted RPC, realized RPC, residual, and which model branch served each click.</a:t>
+              <a:t>We open the live dashboard. KPIs in pounds and percentages explain how much we earned, how accurate the model was, and how many clicks ended up converting. Daily and residual charts answer 'is the model right, and which direction does it err?' in one glance.</a:t>
             </a:r>
           </a:p>
           <a:p>
@@ -10109,13 +10137,13 @@
               </a:spcAft>
             </a:pPr>
             <a:r>
-              <a:rPr sz="1800" b="1" i="0">
+              <a:rPr sz="1600" b="1" i="0">
                 <a:solidFill>
                   <a:srgbClr val="0F6E7A"/>
                 </a:solidFill>
                 <a:latin typeface="Calibri"/>
               </a:rPr>
-              <a:t>2.  A prediction in flight</a:t>
+              <a:t>2.  You drive the model — yourself</a:t>
             </a:r>
           </a:p>
           <a:p>
@@ -10128,13 +10156,13 @@
               </a:spcAft>
             </a:pPr>
             <a:r>
-              <a:rPr sz="1400" b="0" i="0">
+              <a:rPr sz="1200" b="0" i="0">
                 <a:solidFill>
                   <a:srgbClr val="333F52"/>
                 </a:solidFill>
                 <a:latin typeface="Calibri"/>
               </a:rPr>
-              <a:t>We send a sample click context to the live scoring API and receive an RPC estimate, end-to-end, in under a second. The same input is then sent to the explain path to show per-feature attributions.</a:t>
+              <a:t>We hand you the keyboard. Describe a click in plain English — device, country, hour of day, search intent, user trust score, auction pressure, recent earnings, repeat visits — and press Predict. In under a second you see the predicted revenue, the model version that priced it, and the latency. Below it, a live pipeline trace lights up the five backend steps as they happen: validate, guardrails, AI model on Vertex, BigQuery stream, SHAP explanation.</a:t>
             </a:r>
           </a:p>
           <a:p>
@@ -10147,13 +10175,13 @@
               </a:spcAft>
             </a:pPr>
             <a:r>
-              <a:rPr sz="1800" b="1" i="0">
+              <a:rPr sz="1600" b="1" i="0">
                 <a:solidFill>
                   <a:srgbClr val="0F6E7A"/>
                 </a:solidFill>
                 <a:latin typeface="Calibri"/>
               </a:rPr>
-              <a:t>3.  The safety net in action</a:t>
+              <a:t>3.  Why the model said that</a:t>
             </a:r>
           </a:p>
           <a:p>
@@ -10166,13 +10194,51 @@
               </a:spcAft>
             </a:pPr>
             <a:r>
-              <a:rPr sz="1400" b="0" i="0">
+              <a:rPr sz="1200" b="0" i="0">
                 <a:solidFill>
                   <a:srgbClr val="333F52"/>
                 </a:solidFill>
                 <a:latin typeface="Calibri"/>
               </a:rPr>
-              <a:t>We send a deliberately malformed payload. The service rejects it cleanly, the circuit-breaker counters tick, and the request never reaches the model. No degradation visible to clean traffic.</a:t>
+              <a:t>The same prediction renders a horizontal-bar attribution chart: green bars pushed the price up, red pushed it down, starting from the model's baseline. Every prediction is auditable, and the names on the chart are plain English ('User trust score', 'Recent 7-day earnings'), not engineering jargon.</a:t>
+            </a:r>
+          </a:p>
+          <a:p>
+            <a:pPr>
+              <a:lnSpc>
+                <a:spcPct val="120000"/>
+              </a:lnSpc>
+              <a:spcAft>
+                <a:spcPts val="600"/>
+              </a:spcAft>
+            </a:pPr>
+            <a:r>
+              <a:rPr sz="1600" b="1" i="0">
+                <a:solidFill>
+                  <a:srgbClr val="0F6E7A"/>
+                </a:solidFill>
+                <a:latin typeface="Calibri"/>
+              </a:rPr>
+              <a:t>4.  The safety net, on cue</a:t>
+            </a:r>
+          </a:p>
+          <a:p>
+            <a:pPr>
+              <a:lnSpc>
+                <a:spcPct val="120000"/>
+              </a:lnSpc>
+              <a:spcAft>
+                <a:spcPts val="600"/>
+              </a:spcAft>
+            </a:pPr>
+            <a:r>
+              <a:rPr sz="1200" b="0" i="0">
+                <a:solidFill>
+                  <a:srgbClr val="333F52"/>
+                </a:solidFill>
+                <a:latin typeface="Calibri"/>
+              </a:rPr>
+              <a:t>We send a deliberately malformed click. The service rejects it cleanly, the circuit-breaker counters tick on the model-health panel, and the request never reaches the model. No degradation visible to clean traffic.</a:t>
             </a:r>
           </a:p>
           <a:p>
@@ -10182,29 +10248,13 @@
               </a:lnSpc>
             </a:pPr>
             <a:r>
-              <a:rPr sz="1200" b="0" i="1">
+              <a:rPr sz="1000" b="0" i="1">
                 <a:solidFill>
                   <a:srgbClr val="6B7380"/>
                 </a:solidFill>
                 <a:latin typeface="Calibri"/>
               </a:rPr>
-              <a:t>Dashboard  ·  https://dashboard-staging-794974391956.europe-west2.run.app</a:t>
-            </a:r>
-          </a:p>
-          <a:p>
-            <a:pPr>
-              <a:lnSpc>
-                <a:spcPct val="120000"/>
-              </a:lnSpc>
-            </a:pPr>
-            <a:r>
-              <a:rPr sz="1200" b="0" i="1">
-                <a:solidFill>
-                  <a:srgbClr val="6B7380"/>
-                </a:solidFill>
-                <a:latin typeface="Calibri"/>
-              </a:rPr>
-              <a:t>Scoring API  ·  https://scoring-api-staging-794974391956.europe-west2.run.app</a:t>
+              <a:t>Live dashboard  ·  https://dashboard-staging-794974391956.europe-west2.run.app</a:t>
             </a:r>
           </a:p>
         </p:txBody>

--- a/docs/client-demo-deck.pptx
+++ b/docs/client-demo-deck.pptx
@@ -20,6 +20,7 @@
     <p:sldId id="268" r:id="rId19"/>
     <p:sldId id="269" r:id="rId20"/>
     <p:sldId id="270" r:id="rId21"/>
+    <p:sldId id="271" r:id="rId22"/>
   </p:sldIdLst>
   <p:sldSz cx="12191695" cy="6858000" type="screen4x3"/>
   <p:notesSz cx="6858000" cy="9144000"/>
@@ -3217,7 +3218,7 @@
                 </a:solidFill>
                 <a:latin typeface="Calibri"/>
               </a:rPr>
-              <a:t>PREDICTIVE REVENUE INTELLIGENCE</a:t>
+              <a:t>PREDICTIVE REVENUE INTELLIGENCE — CREDIT CARDS MVP</a:t>
             </a:r>
           </a:p>
         </p:txBody>
@@ -3262,7 +3263,7 @@
                 </a:solidFill>
                 <a:latin typeface="Calibri"/>
               </a:rPr>
-              <a:t>Real-time revenue-per-click forecasting on Google Cloud</a:t>
+              <a:t>Real-time revenue-per-click forecasting for Credit Cards</a:t>
             </a:r>
           </a:p>
         </p:txBody>
@@ -3336,7 +3337,7 @@
                 </a:solidFill>
                 <a:latin typeface="Calibri"/>
               </a:rPr>
-              <a:t>Client executive and technical stakeholders</a:t>
+              <a:t>Credit Cards leadership + technical stakeholders</a:t>
             </a:r>
           </a:p>
           <a:p>
@@ -3361,7 +3362,7 @@
                 </a:solidFill>
                 <a:latin typeface="Calibri"/>
               </a:rPr>
-              <a:t>2026-05-11</a:t>
+              <a:t>2026-05-18</a:t>
             </a:r>
           </a:p>
           <a:p>
@@ -3467,7 +3468,7 @@
                 </a:solidFill>
                 <a:latin typeface="Calibri"/>
               </a:rPr>
-              <a:t>BUILT TO PASS REVIEW</a:t>
+              <a:t>WHAT WE EVALUATED, AND WHAT WE CHOSE</a:t>
             </a:r>
           </a:p>
           <a:p>
@@ -3478,7 +3479,7 @@
                 </a:solidFill>
                 <a:latin typeface="Calibri"/>
               </a:rPr>
-              <a:t>Security and compliance posture</a:t>
+              <a:t>Why these technology choices</a:t>
             </a:r>
           </a:p>
         </p:txBody>
@@ -3534,8 +3535,8 @@
         </p:nvSpPr>
         <p:spPr>
           <a:xfrm>
-            <a:off x="548640" y="1143000"/>
-            <a:ext cx="11094415" cy="5303520"/>
+            <a:off x="457200" y="1097280"/>
+            <a:ext cx="5669280" cy="5303520"/>
           </a:xfrm>
           <a:prstGeom prst="rect">
             <a:avLst/>
@@ -3550,33 +3551,33 @@
           <a:p>
             <a:pPr>
               <a:lnSpc>
-                <a:spcPct val="120000"/>
+                <a:spcPct val="115000"/>
               </a:lnSpc>
               <a:spcAft>
                 <a:spcPts val="600"/>
               </a:spcAft>
             </a:pPr>
             <a:r>
-              <a:rPr sz="1700" b="1" i="0">
+              <a:rPr sz="1400" b="1" i="0">
                 <a:solidFill>
                   <a:srgbClr val="0F6E7A"/>
                 </a:solidFill>
                 <a:latin typeface="Calibri"/>
               </a:rPr>
-              <a:t>Identity and access</a:t>
-            </a:r>
-          </a:p>
-          <a:p>
-            <a:pPr>
-              <a:lnSpc>
-                <a:spcPct val="120000"/>
+              <a:t>Hot path — Rust on Cloud Run</a:t>
+            </a:r>
+          </a:p>
+          <a:p>
+            <a:pPr>
+              <a:lnSpc>
+                <a:spcPct val="115000"/>
               </a:lnSpc>
               <a:spcAft>
                 <a:spcPts val="300"/>
               </a:spcAft>
             </a:pPr>
             <a:r>
-              <a:rPr sz="1300" b="1" i="0">
+              <a:rPr sz="1000" b="1" i="0">
                 <a:solidFill>
                   <a:srgbClr val="D97306"/>
                 </a:solidFill>
@@ -3585,26 +3586,26 @@
               <a:t>•  </a:t>
             </a:r>
             <a:r>
-              <a:rPr sz="1300" b="0" i="0">
+              <a:rPr sz="1000" b="0" i="0">
                 <a:solidFill>
                   <a:srgbClr val="333F52"/>
                 </a:solidFill>
                 <a:latin typeface="Calibri"/>
               </a:rPr>
-              <a:t>Per-service service accounts; least-privilege IAM encoded in Terraform — every grant is reviewable in git.</a:t>
-            </a:r>
-          </a:p>
-          <a:p>
-            <a:pPr>
-              <a:lnSpc>
-                <a:spcPct val="120000"/>
+              <a:t>Latency budget: /v1/score p99 ≤ 2.5 s end-to-end; Vertex AI predict round-trip dominates ~700 ms. Rust gives us the rest of the budget for safety-net composition (bounds → fallback, circuit breaker, anomaly window) with zero GC jitter.</a:t>
+            </a:r>
+          </a:p>
+          <a:p>
+            <a:pPr>
+              <a:lnSpc>
+                <a:spcPct val="115000"/>
               </a:lnSpc>
               <a:spcAft>
                 <a:spcPts val="300"/>
               </a:spcAft>
             </a:pPr>
             <a:r>
-              <a:rPr sz="1300" b="1" i="0">
+              <a:rPr sz="1000" b="1" i="0">
                 <a:solidFill>
                   <a:srgbClr val="D97306"/>
                 </a:solidFill>
@@ -3613,26 +3614,45 @@
               <a:t>•  </a:t>
             </a:r>
             <a:r>
-              <a:rPr sz="1300" b="0" i="0">
+              <a:rPr sz="1000" b="0" i="0">
                 <a:solidFill>
                   <a:srgbClr val="333F52"/>
                 </a:solidFill>
                 <a:latin typeface="Calibri"/>
               </a:rPr>
-              <a:t>No long-lived secrets in CI: GitHub OIDC federates into Google Cloud via Workload Identity.</a:t>
-            </a:r>
-          </a:p>
-          <a:p>
-            <a:pPr>
-              <a:lnSpc>
-                <a:spcPct val="120000"/>
+              <a:t>Considered Go and Python; both leave less headroom and complicate the breaker's idempotency guarantees.</a:t>
+            </a:r>
+          </a:p>
+          <a:p>
+            <a:pPr>
+              <a:lnSpc>
+                <a:spcPct val="115000"/>
+              </a:lnSpc>
+              <a:spcAft>
+                <a:spcPts val="600"/>
+              </a:spcAft>
+            </a:pPr>
+            <a:r>
+              <a:rPr sz="1400" b="1" i="0">
+                <a:solidFill>
+                  <a:srgbClr val="0F6E7A"/>
+                </a:solidFill>
+                <a:latin typeface="Calibri"/>
+              </a:rPr>
+              <a:t>Model — XGBoost on Vertex AI</a:t>
+            </a:r>
+          </a:p>
+          <a:p>
+            <a:pPr>
+              <a:lnSpc>
+                <a:spcPct val="115000"/>
               </a:lnSpc>
               <a:spcAft>
                 <a:spcPts val="300"/>
               </a:spcAft>
             </a:pPr>
             <a:r>
-              <a:rPr sz="1300" b="1" i="0">
+              <a:rPr sz="1000" b="1" i="0">
                 <a:solidFill>
                   <a:srgbClr val="D97306"/>
                 </a:solidFill>
@@ -3641,45 +3661,101 @@
               <a:t>•  </a:t>
             </a:r>
             <a:r>
-              <a:rPr sz="1300" b="0" i="0">
+              <a:rPr sz="1000" b="0" i="0">
                 <a:solidFill>
                   <a:srgbClr val="333F52"/>
                 </a:solidFill>
                 <a:latin typeface="Calibri"/>
               </a:rPr>
-              <a:t>Secrets in Secret Manager with versioning; rotation is a runbooked one-liner.</a:t>
-            </a:r>
-          </a:p>
-          <a:p>
-            <a:pPr>
-              <a:lnSpc>
-                <a:spcPct val="120000"/>
+              <a:t>Feature space is tabular and ~11 columns wide. GBDT is the empirically dominant family for tabular regression at this scale.</a:t>
+            </a:r>
+          </a:p>
+          <a:p>
+            <a:pPr>
+              <a:lnSpc>
+                <a:spcPct val="115000"/>
+              </a:lnSpc>
+              <a:spcAft>
+                <a:spcPts val="300"/>
+              </a:spcAft>
+            </a:pPr>
+            <a:r>
+              <a:rPr sz="1000" b="1" i="0">
+                <a:solidFill>
+                  <a:srgbClr val="D97306"/>
+                </a:solidFill>
+                <a:latin typeface="Calibri"/>
+              </a:rPr>
+              <a:t>•  </a:t>
+            </a:r>
+            <a:r>
+              <a:rPr sz="1000" b="0" i="0">
+                <a:solidFill>
+                  <a:srgbClr val="333F52"/>
+                </a:solidFill>
+                <a:latin typeface="Calibri"/>
+              </a:rPr>
+              <a:t>Vertex's prebuilt xgboost-cpu container ships native explanationSpec (Sampled-Shapley) — /v1/explain comes free; deep models need a separate KernelSHAP that's slower, noisier, harder to audit under ADR 0004.</a:t>
+            </a:r>
+          </a:p>
+          <a:p>
+            <a:pPr>
+              <a:lnSpc>
+                <a:spcPct val="115000"/>
+              </a:lnSpc>
+              <a:spcAft>
+                <a:spcPts val="300"/>
+              </a:spcAft>
+            </a:pPr>
+            <a:r>
+              <a:rPr sz="1000" b="1" i="0">
+                <a:solidFill>
+                  <a:srgbClr val="D97306"/>
+                </a:solidFill>
+                <a:latin typeface="Calibri"/>
+              </a:rPr>
+              <a:t>•  </a:t>
+            </a:r>
+            <a:r>
+              <a:rPr sz="1000" b="0" i="0">
+                <a:solidFill>
+                  <a:srgbClr val="333F52"/>
+                </a:solidFill>
+                <a:latin typeface="Calibri"/>
+              </a:rPr>
+              <a:t>Deterministic predict call composes cleanly with the circuit breaker; transformers' stateful decoding would not.</a:t>
+            </a:r>
+          </a:p>
+          <a:p>
+            <a:pPr>
+              <a:lnSpc>
+                <a:spcPct val="115000"/>
               </a:lnSpc>
               <a:spcAft>
                 <a:spcPts val="600"/>
               </a:spcAft>
             </a:pPr>
             <a:r>
-              <a:rPr sz="1700" b="1" i="0">
+              <a:rPr sz="1400" b="1" i="0">
                 <a:solidFill>
                   <a:srgbClr val="0F6E7A"/>
                 </a:solidFill>
                 <a:latin typeface="Calibri"/>
               </a:rPr>
-              <a:t>Data protection</a:t>
-            </a:r>
-          </a:p>
-          <a:p>
-            <a:pPr>
-              <a:lnSpc>
-                <a:spcPct val="120000"/>
+              <a:t>Frontend — TypeScript + React + Vite</a:t>
+            </a:r>
+          </a:p>
+          <a:p>
+            <a:pPr>
+              <a:lnSpc>
+                <a:spcPct val="115000"/>
               </a:lnSpc>
               <a:spcAft>
                 <a:spcPts val="300"/>
               </a:spcAft>
             </a:pPr>
             <a:r>
-              <a:rPr sz="1300" b="1" i="0">
+              <a:rPr sz="1000" b="1" i="0">
                 <a:solidFill>
                   <a:srgbClr val="D97306"/>
                 </a:solidFill>
@@ -3688,26 +3764,26 @@
               <a:t>•  </a:t>
             </a:r>
             <a:r>
-              <a:rPr sz="1300" b="0" i="0">
+              <a:rPr sz="1000" b="0" i="0">
                 <a:solidFill>
                   <a:srgbClr val="333F52"/>
                 </a:solidFill>
                 <a:latin typeface="Calibri"/>
               </a:rPr>
-              <a:t>All data resident in europe-west2 (London). No US-region replicas.</a:t>
-            </a:r>
-          </a:p>
-          <a:p>
-            <a:pPr>
-              <a:lnSpc>
-                <a:spcPct val="120000"/>
+              <a:t>Single demo URL; realtime interactivity (live prediction, animated Phoebe journey). Zod validates the JSON at the boundary.</a:t>
+            </a:r>
+          </a:p>
+          <a:p>
+            <a:pPr>
+              <a:lnSpc>
+                <a:spcPct val="115000"/>
               </a:lnSpc>
               <a:spcAft>
                 <a:spcPts val="300"/>
               </a:spcAft>
             </a:pPr>
             <a:r>
-              <a:rPr sz="1300" b="1" i="0">
+              <a:rPr sz="1000" b="1" i="0">
                 <a:solidFill>
                   <a:srgbClr val="D97306"/>
                 </a:solidFill>
@@ -3716,26 +3792,68 @@
               <a:t>•  </a:t>
             </a:r>
             <a:r>
-              <a:rPr sz="1300" b="0" i="0">
+              <a:rPr sz="1000" b="0" i="0">
                 <a:solidFill>
                   <a:srgbClr val="333F52"/>
                 </a:solidFill>
                 <a:latin typeface="Calibri"/>
               </a:rPr>
-              <a:t>Google-managed encryption keys by default; customer-managed keys (CMEK) available on request.</a:t>
-            </a:r>
-          </a:p>
-          <a:p>
-            <a:pPr>
-              <a:lnSpc>
-                <a:spcPct val="120000"/>
+              <a:t>No server-side rendering — keeps the dashboard a static-asset deploy behind a single Cloud Run service.</a:t>
+            </a:r>
+          </a:p>
+        </p:txBody>
+      </p:sp>
+      <p:sp>
+        <p:nvSpPr>
+          <p:cNvPr id="5" name="TextBox 4"/>
+          <p:cNvSpPr txBox="1"/>
+          <p:nvPr/>
+        </p:nvSpPr>
+        <p:spPr>
+          <a:xfrm>
+            <a:off x="6263640" y="1097280"/>
+            <a:ext cx="5669280" cy="5303520"/>
+          </a:xfrm>
+          <a:prstGeom prst="rect">
+            <a:avLst/>
+          </a:prstGeom>
+          <a:noFill/>
+        </p:spPr>
+        <p:txBody>
+          <a:bodyPr wrap="square">
+            <a:spAutoFit/>
+          </a:bodyPr>
+          <a:lstStyle/>
+          <a:p>
+            <a:pPr>
+              <a:lnSpc>
+                <a:spcPct val="115000"/>
+              </a:lnSpc>
+              <a:spcAft>
+                <a:spcPts val="600"/>
+              </a:spcAft>
+            </a:pPr>
+            <a:r>
+              <a:rPr sz="1400" b="1" i="0">
+                <a:solidFill>
+                  <a:srgbClr val="0F6E7A"/>
+                </a:solidFill>
+                <a:latin typeface="Calibri"/>
+              </a:rPr>
+              <a:t>Cross-service contracts — Protobuf</a:t>
+            </a:r>
+          </a:p>
+          <a:p>
+            <a:pPr>
+              <a:lnSpc>
+                <a:spcPct val="115000"/>
               </a:lnSpc>
               <a:spcAft>
                 <a:spcPts val="300"/>
               </a:spcAft>
             </a:pPr>
             <a:r>
-              <a:rPr sz="1300" b="1" i="0">
+              <a:rPr sz="1000" b="1" i="0">
                 <a:solidFill>
                   <a:srgbClr val="D97306"/>
                 </a:solidFill>
@@ -3744,45 +3862,73 @@
               <a:t>•  </a:t>
             </a:r>
             <a:r>
-              <a:rPr sz="1300" b="0" i="0">
+              <a:rPr sz="1000" b="0" i="0">
                 <a:solidFill>
                   <a:srgbClr val="333F52"/>
                 </a:solidFill>
                 <a:latin typeface="Calibri"/>
               </a:rPr>
-              <a:t>Predictions are persisted to BigQuery with the same access controls as your existing analytics estate.</a:t>
-            </a:r>
-          </a:p>
-          <a:p>
-            <a:pPr>
-              <a:lnSpc>
-                <a:spcPct val="120000"/>
+              <a:t>Wire stability across Rust ↔ Python; codegen per language; cross-language parity test in CI guards drift.</a:t>
+            </a:r>
+          </a:p>
+          <a:p>
+            <a:pPr>
+              <a:lnSpc>
+                <a:spcPct val="115000"/>
+              </a:lnSpc>
+              <a:spcAft>
+                <a:spcPts val="300"/>
+              </a:spcAft>
+            </a:pPr>
+            <a:r>
+              <a:rPr sz="1000" b="1" i="0">
+                <a:solidFill>
+                  <a:srgbClr val="D97306"/>
+                </a:solidFill>
+                <a:latin typeface="Calibri"/>
+              </a:rPr>
+              <a:t>•  </a:t>
+            </a:r>
+            <a:r>
+              <a:rPr sz="1000" b="0" i="0">
+                <a:solidFill>
+                  <a:srgbClr val="333F52"/>
+                </a:solidFill>
+                <a:latin typeface="Calibri"/>
+              </a:rPr>
+              <a:t>Considered JSON Schema — adequate, but loses the on-wire byte-stability we rely on for the audit trail.</a:t>
+            </a:r>
+          </a:p>
+          <a:p>
+            <a:pPr>
+              <a:lnSpc>
+                <a:spcPct val="115000"/>
               </a:lnSpc>
               <a:spcAft>
                 <a:spcPts val="600"/>
               </a:spcAft>
             </a:pPr>
             <a:r>
-              <a:rPr sz="1700" b="1" i="0">
+              <a:rPr sz="1400" b="1" i="0">
                 <a:solidFill>
                   <a:srgbClr val="0F6E7A"/>
                 </a:solidFill>
                 <a:latin typeface="Calibri"/>
               </a:rPr>
-              <a:t>Supply chain</a:t>
-            </a:r>
-          </a:p>
-          <a:p>
-            <a:pPr>
-              <a:lnSpc>
-                <a:spcPct val="120000"/>
+              <a:t>Data layer — Dataform on BigQuery</a:t>
+            </a:r>
+          </a:p>
+          <a:p>
+            <a:pPr>
+              <a:lnSpc>
+                <a:spcPct val="115000"/>
               </a:lnSpc>
               <a:spcAft>
                 <a:spcPts val="300"/>
               </a:spcAft>
             </a:pPr>
             <a:r>
-              <a:rPr sz="1300" b="1" i="0">
+              <a:rPr sz="1000" b="1" i="0">
                 <a:solidFill>
                   <a:srgbClr val="D97306"/>
                 </a:solidFill>
@@ -3791,20 +3937,198 @@
               <a:t>•  </a:t>
             </a:r>
             <a:r>
-              <a:rPr sz="1300" b="0" i="0">
+              <a:rPr sz="1000" b="0" i="0">
                 <a:solidFill>
                   <a:srgbClr val="333F52"/>
                 </a:solidFill>
                 <a:latin typeface="Calibri"/>
               </a:rPr>
-              <a:t>Container images pinned by digest; dependency scanning runs on every PR; no third-party model weights are downloaded at runtime.</a:t>
-            </a:r>
-          </a:p>
-        </p:txBody>
-      </p:sp>
-      <p:sp>
-        <p:nvSpPr>
-          <p:cNvPr id="5" name="Rectangle 4"/>
+              <a:t>Same SQL primitives as dbt; one less tool the client team has to install and learn.</a:t>
+            </a:r>
+          </a:p>
+          <a:p>
+            <a:pPr>
+              <a:lnSpc>
+                <a:spcPct val="115000"/>
+              </a:lnSpc>
+              <a:spcAft>
+                <a:spcPts val="300"/>
+              </a:spcAft>
+            </a:pPr>
+            <a:r>
+              <a:rPr sz="1000" b="1" i="0">
+                <a:solidFill>
+                  <a:srgbClr val="D97306"/>
+                </a:solidFill>
+                <a:latin typeface="Calibri"/>
+              </a:rPr>
+              <a:t>•  </a:t>
+            </a:r>
+            <a:r>
+              <a:rPr sz="1000" b="0" i="0">
+                <a:solidFill>
+                  <a:srgbClr val="333F52"/>
+                </a:solidFill>
+                <a:latin typeface="Calibri"/>
+              </a:rPr>
+              <a:t>Type-safe ref()s give us the dependency graph automatically: coverage_audit, residuals_by_segment, drift_breaches_weekly all light up in the right order.</a:t>
+            </a:r>
+          </a:p>
+          <a:p>
+            <a:pPr>
+              <a:lnSpc>
+                <a:spcPct val="115000"/>
+              </a:lnSpc>
+              <a:spcAft>
+                <a:spcPts val="600"/>
+              </a:spcAft>
+            </a:pPr>
+            <a:r>
+              <a:rPr sz="1400" b="1" i="0">
+                <a:solidFill>
+                  <a:srgbClr val="0F6E7A"/>
+                </a:solidFill>
+                <a:latin typeface="Calibri"/>
+              </a:rPr>
+              <a:t>Identity — Workload Identity Federation</a:t>
+            </a:r>
+          </a:p>
+          <a:p>
+            <a:pPr>
+              <a:lnSpc>
+                <a:spcPct val="115000"/>
+              </a:lnSpc>
+              <a:spcAft>
+                <a:spcPts val="300"/>
+              </a:spcAft>
+            </a:pPr>
+            <a:r>
+              <a:rPr sz="1000" b="1" i="0">
+                <a:solidFill>
+                  <a:srgbClr val="D97306"/>
+                </a:solidFill>
+                <a:latin typeface="Calibri"/>
+              </a:rPr>
+              <a:t>•  </a:t>
+            </a:r>
+            <a:r>
+              <a:rPr sz="1000" b="0" i="0">
+                <a:solidFill>
+                  <a:srgbClr val="333F52"/>
+                </a:solidFill>
+                <a:latin typeface="Calibri"/>
+              </a:rPr>
+              <a:t>GitHub OIDC federates into GCP. No long-lived service-account keys to rotate, leak, or audit.</a:t>
+            </a:r>
+          </a:p>
+          <a:p>
+            <a:pPr>
+              <a:lnSpc>
+                <a:spcPct val="115000"/>
+              </a:lnSpc>
+              <a:spcAft>
+                <a:spcPts val="300"/>
+              </a:spcAft>
+            </a:pPr>
+            <a:r>
+              <a:rPr sz="1000" b="1" i="0">
+                <a:solidFill>
+                  <a:srgbClr val="D97306"/>
+                </a:solidFill>
+                <a:latin typeface="Calibri"/>
+              </a:rPr>
+              <a:t>•  </a:t>
+            </a:r>
+            <a:r>
+              <a:rPr sz="1000" b="0" i="0">
+                <a:solidFill>
+                  <a:srgbClr val="333F52"/>
+                </a:solidFill>
+                <a:latin typeface="Calibri"/>
+              </a:rPr>
+              <a:t>Per-service service accounts; every IAM grant is in Terraform — reviewable in git, not in the console.</a:t>
+            </a:r>
+          </a:p>
+          <a:p>
+            <a:pPr>
+              <a:lnSpc>
+                <a:spcPct val="115000"/>
+              </a:lnSpc>
+              <a:spcAft>
+                <a:spcPts val="600"/>
+              </a:spcAft>
+            </a:pPr>
+            <a:r>
+              <a:rPr sz="1400" b="1" i="0">
+                <a:solidFill>
+                  <a:srgbClr val="0F6E7A"/>
+                </a:solidFill>
+                <a:latin typeface="Calibri"/>
+              </a:rPr>
+              <a:t>Runtime — Cloud Run</a:t>
+            </a:r>
+          </a:p>
+          <a:p>
+            <a:pPr>
+              <a:lnSpc>
+                <a:spcPct val="115000"/>
+              </a:lnSpc>
+              <a:spcAft>
+                <a:spcPts val="300"/>
+              </a:spcAft>
+            </a:pPr>
+            <a:r>
+              <a:rPr sz="1000" b="1" i="0">
+                <a:solidFill>
+                  <a:srgbClr val="D97306"/>
+                </a:solidFill>
+                <a:latin typeface="Calibri"/>
+              </a:rPr>
+              <a:t>•  </a:t>
+            </a:r>
+            <a:r>
+              <a:rPr sz="1000" b="0" i="0">
+                <a:solidFill>
+                  <a:srgbClr val="333F52"/>
+                </a:solidFill>
+                <a:latin typeface="Calibri"/>
+              </a:rPr>
+              <a:t>Request-driven autoscaling; min=1 keeps the demo warm at ~£3-5/day; max ramps under load tests without paging us.</a:t>
+            </a:r>
+          </a:p>
+          <a:p>
+            <a:pPr>
+              <a:lnSpc>
+                <a:spcPct val="115000"/>
+              </a:lnSpc>
+              <a:spcAft>
+                <a:spcPts val="300"/>
+              </a:spcAft>
+            </a:pPr>
+            <a:r>
+              <a:rPr sz="1000" b="1" i="0">
+                <a:solidFill>
+                  <a:srgbClr val="D97306"/>
+                </a:solidFill>
+                <a:latin typeface="Calibri"/>
+              </a:rPr>
+              <a:t>•  </a:t>
+            </a:r>
+            <a:r>
+              <a:rPr sz="1000" b="0" i="0">
+                <a:solidFill>
+                  <a:srgbClr val="333F52"/>
+                </a:solidFill>
+                <a:latin typeface="Calibri"/>
+              </a:rPr>
+              <a:t>Considered GKE — overkill for a service that's CPU-bound and stateless; we'd pay for cluster overhead we don't use.</a:t>
+            </a:r>
+          </a:p>
+        </p:txBody>
+      </p:sp>
+      <p:sp>
+        <p:nvSpPr>
+          <p:cNvPr id="6" name="Rectangle 5"/>
           <p:cNvSpPr/>
           <p:nvPr/>
         </p:nvSpPr>
@@ -3856,7 +4180,7 @@
       </p:sp>
       <p:sp>
         <p:nvSpPr>
-          <p:cNvPr id="6" name="TextBox 5"/>
+          <p:cNvPr id="7" name="TextBox 6"/>
           <p:cNvSpPr txBox="1"/>
           <p:nvPr/>
         </p:nvSpPr>
@@ -3884,7 +4208,7 @@
                 </a:solidFill>
                 <a:latin typeface="Calibri"/>
               </a:rPr>
-              <a:t>10 / 15</a:t>
+              <a:t>10 / 16</a:t>
             </a:r>
           </a:p>
         </p:txBody>
@@ -3954,7 +4278,7 @@
                 </a:solidFill>
                 <a:latin typeface="Calibri"/>
               </a:rPr>
-              <a:t>FROM YOUR LEDGER TO A LIVE PREDICTION</a:t>
+              <a:t>BUILT TO PASS REVIEW</a:t>
             </a:r>
           </a:p>
           <a:p>
@@ -3965,7 +4289,7 @@
                 </a:solidFill>
                 <a:latin typeface="Calibri"/>
               </a:rPr>
-              <a:t>Data and model lifecycle</a:t>
+              <a:t>Security and compliance posture</a:t>
             </a:r>
           </a:p>
         </p:txBody>
@@ -4044,13 +4368,13 @@
               </a:spcAft>
             </a:pPr>
             <a:r>
-              <a:rPr sz="1700" b="1" i="0">
+              <a:rPr sz="1600" b="1" i="0">
                 <a:solidFill>
                   <a:srgbClr val="0F6E7A"/>
                 </a:solidFill>
                 <a:latin typeface="Calibri"/>
               </a:rPr>
-              <a:t>Ingestion</a:t>
+              <a:t>Identity and access</a:t>
             </a:r>
           </a:p>
           <a:p>
@@ -4063,7 +4387,7 @@
               </a:spcAft>
             </a:pPr>
             <a:r>
-              <a:rPr sz="1300" b="1" i="0">
+              <a:rPr sz="1200" b="1" i="0">
                 <a:solidFill>
                   <a:srgbClr val="D97306"/>
                 </a:solidFill>
@@ -4072,13 +4396,13 @@
               <a:t>•  </a:t>
             </a:r>
             <a:r>
-              <a:rPr sz="1300" b="0" i="0">
+              <a:rPr sz="1200" b="0" i="0">
                 <a:solidFill>
                   <a:srgbClr val="333F52"/>
                 </a:solidFill>
                 <a:latin typeface="Calibri"/>
               </a:rPr>
-              <a:t>Real click events arrive via Pub/Sub or push-down query into BigQuery — schema and freshness are agreed in the data contract.</a:t>
+              <a:t>Per-service service accounts; least-privilege IAM encoded in Terraform — every grant is reviewable in git.</a:t>
             </a:r>
           </a:p>
           <a:p>
@@ -4091,7 +4415,7 @@
               </a:spcAft>
             </a:pPr>
             <a:r>
-              <a:rPr sz="1300" b="1" i="0">
+              <a:rPr sz="1200" b="1" i="0">
                 <a:solidFill>
                   <a:srgbClr val="D97306"/>
                 </a:solidFill>
@@ -4100,13 +4424,41 @@
               <a:t>•  </a:t>
             </a:r>
             <a:r>
-              <a:rPr sz="1300" b="0" i="0">
+              <a:rPr sz="1200" b="0" i="0">
                 <a:solidFill>
                   <a:srgbClr val="333F52"/>
                 </a:solidFill>
                 <a:latin typeface="Calibri"/>
               </a:rPr>
-              <a:t>Sales-ledger data is loaded via scheduled query or transfer service from the client source of truth.</a:t>
+              <a:t>No long-lived secrets in CI: GitHub OIDC federates into Google Cloud via Workload Identity.</a:t>
+            </a:r>
+          </a:p>
+          <a:p>
+            <a:pPr>
+              <a:lnSpc>
+                <a:spcPct val="120000"/>
+              </a:lnSpc>
+              <a:spcAft>
+                <a:spcPts val="300"/>
+              </a:spcAft>
+            </a:pPr>
+            <a:r>
+              <a:rPr sz="1200" b="1" i="0">
+                <a:solidFill>
+                  <a:srgbClr val="D97306"/>
+                </a:solidFill>
+                <a:latin typeface="Calibri"/>
+              </a:rPr>
+              <a:t>•  </a:t>
+            </a:r>
+            <a:r>
+              <a:rPr sz="1200" b="0" i="0">
+                <a:solidFill>
+                  <a:srgbClr val="333F52"/>
+                </a:solidFill>
+                <a:latin typeface="Calibri"/>
+              </a:rPr>
+              <a:t>Secrets in Secret Manager with versioning; rotation is a runbooked one-liner.</a:t>
             </a:r>
           </a:p>
           <a:p>
@@ -4119,13 +4471,13 @@
               </a:spcAft>
             </a:pPr>
             <a:r>
-              <a:rPr sz="1700" b="1" i="0">
+              <a:rPr sz="1600" b="1" i="0">
                 <a:solidFill>
                   <a:srgbClr val="0F6E7A"/>
                 </a:solidFill>
                 <a:latin typeface="Calibri"/>
               </a:rPr>
-              <a:t>Training</a:t>
+              <a:t>Data protection</a:t>
             </a:r>
           </a:p>
           <a:p>
@@ -4138,7 +4490,7 @@
               </a:spcAft>
             </a:pPr>
             <a:r>
-              <a:rPr sz="1300" b="1" i="0">
+              <a:rPr sz="1200" b="1" i="0">
                 <a:solidFill>
                   <a:srgbClr val="D97306"/>
                 </a:solidFill>
@@ -4147,13 +4499,13 @@
               <a:t>•  </a:t>
             </a:r>
             <a:r>
-              <a:rPr sz="1300" b="0" i="0">
+              <a:rPr sz="1200" b="0" i="0">
                 <a:solidFill>
                   <a:srgbClr val="333F52"/>
                 </a:solidFill>
                 <a:latin typeface="Calibri"/>
               </a:rPr>
-              <a:t>Model is trained in a Vertex AI pipeline run from the same monorepo — fully reproducible from a commit.</a:t>
+              <a:t>All data resident in europe-west2 (London). No US-region replicas.</a:t>
             </a:r>
           </a:p>
           <a:p>
@@ -4166,7 +4518,7 @@
               </a:spcAft>
             </a:pPr>
             <a:r>
-              <a:rPr sz="1300" b="1" i="0">
+              <a:rPr sz="1200" b="1" i="0">
                 <a:solidFill>
                   <a:srgbClr val="D97306"/>
                 </a:solidFill>
@@ -4175,13 +4527,41 @@
               <a:t>•  </a:t>
             </a:r>
             <a:r>
-              <a:rPr sz="1300" b="0" i="0">
+              <a:rPr sz="1200" b="0" i="0">
                 <a:solidFill>
                   <a:srgbClr val="333F52"/>
                 </a:solidFill>
                 <a:latin typeface="Calibri"/>
               </a:rPr>
-              <a:t>Each model version is registered in the Vertex Model Registry; we never deploy an unversioned artifact.</a:t>
+              <a:t>Google-managed encryption keys by default; customer-managed keys (CMEK) available on request.</a:t>
+            </a:r>
+          </a:p>
+          <a:p>
+            <a:pPr>
+              <a:lnSpc>
+                <a:spcPct val="120000"/>
+              </a:lnSpc>
+              <a:spcAft>
+                <a:spcPts val="300"/>
+              </a:spcAft>
+            </a:pPr>
+            <a:r>
+              <a:rPr sz="1200" b="1" i="0">
+                <a:solidFill>
+                  <a:srgbClr val="D97306"/>
+                </a:solidFill>
+                <a:latin typeface="Calibri"/>
+              </a:rPr>
+              <a:t>•  </a:t>
+            </a:r>
+            <a:r>
+              <a:rPr sz="1200" b="0" i="0">
+                <a:solidFill>
+                  <a:srgbClr val="333F52"/>
+                </a:solidFill>
+                <a:latin typeface="Calibri"/>
+              </a:rPr>
+              <a:t>Predictions are persisted to BigQuery with the same access controls as your existing analytics estate.</a:t>
             </a:r>
           </a:p>
           <a:p>
@@ -4194,13 +4574,13 @@
               </a:spcAft>
             </a:pPr>
             <a:r>
-              <a:rPr sz="1700" b="1" i="0">
+              <a:rPr sz="1600" b="1" i="0">
                 <a:solidFill>
                   <a:srgbClr val="0F6E7A"/>
                 </a:solidFill>
                 <a:latin typeface="Calibri"/>
               </a:rPr>
-              <a:t>Release</a:t>
+              <a:t>Compliance boundary</a:t>
             </a:r>
           </a:p>
           <a:p>
@@ -4213,7 +4593,7 @@
               </a:spcAft>
             </a:pPr>
             <a:r>
-              <a:rPr sz="1300" b="1" i="0">
+              <a:rPr sz="1200" b="1" i="0">
                 <a:solidFill>
                   <a:srgbClr val="D97306"/>
                 </a:solidFill>
@@ -4222,13 +4602,13 @@
               <a:t>•  </a:t>
             </a:r>
             <a:r>
-              <a:rPr sz="1300" b="0" i="0">
+              <a:rPr sz="1200" b="0" i="0">
                 <a:solidFill>
                   <a:srgbClr val="333F52"/>
                 </a:solidFill>
                 <a:latin typeface="Calibri"/>
               </a:rPr>
-              <a:t>New versions deploy behind a traffic split — 10% canary, then ramp — with automatic rollback if breaker trip rates spike.</a:t>
+              <a:t>ADR 0004: bid-optimisation only. No customer identifiers ingested; no model output reaches any system that affects customer terms or eligibility.</a:t>
             </a:r>
           </a:p>
           <a:p>
@@ -4241,7 +4621,7 @@
               </a:spcAft>
             </a:pPr>
             <a:r>
-              <a:rPr sz="1300" b="1" i="0">
+              <a:rPr sz="1200" b="1" i="0">
                 <a:solidFill>
                   <a:srgbClr val="D97306"/>
                 </a:solidFill>
@@ -4250,13 +4630,13 @@
               <a:t>•  </a:t>
             </a:r>
             <a:r>
-              <a:rPr sz="1300" b="0" i="0">
+              <a:rPr sz="1200" b="0" i="0">
                 <a:solidFill>
                   <a:srgbClr val="333F52"/>
                 </a:solidFill>
                 <a:latin typeface="Calibri"/>
               </a:rPr>
-              <a:t>Drift monitoring on inputs (PSI) and on outputs vs the reconciled ledger keeps the model honest in production.</a:t>
+              <a:t>ADR 0005 (in flight): GA4 / Phoebe PII boundary — hashed user_pseudo_id only; raw user_id and PII event params stripped at the staging view.</a:t>
             </a:r>
           </a:p>
           <a:p>
@@ -4264,15 +4644,46 @@
               <a:lnSpc>
                 <a:spcPct val="120000"/>
               </a:lnSpc>
-            </a:pPr>
-            <a:r>
-              <a:rPr sz="1100" b="0" i="1">
-                <a:solidFill>
-                  <a:srgbClr val="6B7380"/>
-                </a:solidFill>
-                <a:latin typeface="Calibri"/>
-              </a:rPr>
-              <a:t>Today's demo runs against a model trained on a synthetic dataset that mirrors the agreed schema. Retraining on real data is the first work item once the data contract is signed.</a:t>
+              <a:spcAft>
+                <a:spcPts val="600"/>
+              </a:spcAft>
+            </a:pPr>
+            <a:r>
+              <a:rPr sz="1600" b="1" i="0">
+                <a:solidFill>
+                  <a:srgbClr val="0F6E7A"/>
+                </a:solidFill>
+                <a:latin typeface="Calibri"/>
+              </a:rPr>
+              <a:t>Supply chain</a:t>
+            </a:r>
+          </a:p>
+          <a:p>
+            <a:pPr>
+              <a:lnSpc>
+                <a:spcPct val="120000"/>
+              </a:lnSpc>
+              <a:spcAft>
+                <a:spcPts val="300"/>
+              </a:spcAft>
+            </a:pPr>
+            <a:r>
+              <a:rPr sz="1200" b="1" i="0">
+                <a:solidFill>
+                  <a:srgbClr val="D97306"/>
+                </a:solidFill>
+                <a:latin typeface="Calibri"/>
+              </a:rPr>
+              <a:t>•  </a:t>
+            </a:r>
+            <a:r>
+              <a:rPr sz="1200" b="0" i="0">
+                <a:solidFill>
+                  <a:srgbClr val="333F52"/>
+                </a:solidFill>
+                <a:latin typeface="Calibri"/>
+              </a:rPr>
+              <a:t>Container images pinned by digest; dependency scanning runs on every PR; no third-party model weights are downloaded at runtime.</a:t>
             </a:r>
           </a:p>
         </p:txBody>
@@ -4359,7 +4770,7 @@
                 </a:solidFill>
                 <a:latin typeface="Calibri"/>
               </a:rPr>
-              <a:t>11 / 15</a:t>
+              <a:t>11 / 16</a:t>
             </a:r>
           </a:p>
         </p:txBody>
@@ -4429,7 +4840,7 @@
                 </a:solidFill>
                 <a:latin typeface="Calibri"/>
               </a:rPr>
-              <a:t>RUN-BOOK READY, ON DAY ONE</a:t>
+              <a:t>FROM YOUR LEDGER TO A LIVE PREDICTION</a:t>
             </a:r>
           </a:p>
           <a:p>
@@ -4440,7 +4851,7 @@
                 </a:solidFill>
                 <a:latin typeface="Calibri"/>
               </a:rPr>
-              <a:t>Operational readiness</a:t>
+              <a:t>Data and model lifecycle</a:t>
             </a:r>
           </a:p>
         </p:txBody>
@@ -4519,13 +4930,13 @@
               </a:spcAft>
             </a:pPr>
             <a:r>
-              <a:rPr sz="1700" b="1" i="0">
+              <a:rPr sz="1600" b="1" i="0">
                 <a:solidFill>
                   <a:srgbClr val="0F6E7A"/>
                 </a:solidFill>
                 <a:latin typeface="Calibri"/>
               </a:rPr>
-              <a:t>Service-level objectives</a:t>
+              <a:t>Three feeds, one model</a:t>
             </a:r>
           </a:p>
           <a:p>
@@ -4538,7 +4949,7 @@
               </a:spcAft>
             </a:pPr>
             <a:r>
-              <a:rPr sz="1300" b="1" i="0">
+              <a:rPr sz="1200" b="1" i="0">
                 <a:solidFill>
                   <a:srgbClr val="D97306"/>
                 </a:solidFill>
@@ -4547,13 +4958,13 @@
               <a:t>•  </a:t>
             </a:r>
             <a:r>
-              <a:rPr sz="1300" b="0" i="0">
+              <a:rPr sz="1200" b="0" i="0">
                 <a:solidFill>
                   <a:srgbClr val="333F52"/>
                 </a:solidFill>
                 <a:latin typeface="Calibri"/>
               </a:rPr>
-              <a:t>Availability target 99.5% on /v1/score; latency SLO sized from the live load profile.</a:t>
+              <a:t>Click stream (CM360) — Credit Cards schema: product_type, card_product_id, query_intent (CC enum), affinity_score, prior_applicant, income_band_bucket, rpc_14d/60d, landing_path, visits_prev_30d.</a:t>
             </a:r>
           </a:p>
           <a:p>
@@ -4566,7 +4977,7 @@
               </a:spcAft>
             </a:pPr>
             <a:r>
-              <a:rPr sz="1300" b="1" i="0">
+              <a:rPr sz="1200" b="1" i="0">
                 <a:solidFill>
                   <a:srgbClr val="D97306"/>
                 </a:solidFill>
@@ -4575,13 +4986,41 @@
               <a:t>•  </a:t>
             </a:r>
             <a:r>
-              <a:rPr sz="1300" b="0" i="0">
+              <a:rPr sz="1200" b="0" i="0">
                 <a:solidFill>
                   <a:srgbClr val="333F52"/>
                 </a:solidFill>
                 <a:latin typeface="Calibri"/>
               </a:rPr>
-              <a:t>Error-budget policy: breaches automatically open an incident channel.</a:t>
+              <a:t>Sales ledger — multi-stage events (application_started → submitted → approved → activated → first_spend → chargeback) with revenue, margin_rate (Soteria-ready), card_product_id, currency.</a:t>
+            </a:r>
+          </a:p>
+          <a:p>
+            <a:pPr>
+              <a:lnSpc>
+                <a:spcPct val="120000"/>
+              </a:lnSpc>
+              <a:spcAft>
+                <a:spcPts val="300"/>
+              </a:spcAft>
+            </a:pPr>
+            <a:r>
+              <a:rPr sz="1200" b="1" i="0">
+                <a:solidFill>
+                  <a:srgbClr val="D97306"/>
+                </a:solidFill>
+                <a:latin typeface="Calibri"/>
+              </a:rPr>
+              <a:t>•  </a:t>
+            </a:r>
+            <a:r>
+              <a:rPr sz="1200" b="0" i="0">
+                <a:solidFill>
+                  <a:srgbClr val="333F52"/>
+                </a:solidFill>
+                <a:latin typeface="Calibri"/>
+              </a:rPr>
+              <a:t>GA4 / Phoebe — behavioural rollup (calculator_used, guides_read, cards_compared, session_engagement_s), per cookie, nightly. Joined at training; looked up at serving.</a:t>
             </a:r>
           </a:p>
           <a:p>
@@ -4594,13 +5033,13 @@
               </a:spcAft>
             </a:pPr>
             <a:r>
-              <a:rPr sz="1700" b="1" i="0">
+              <a:rPr sz="1600" b="1" i="0">
                 <a:solidFill>
                   <a:srgbClr val="0F6E7A"/>
                 </a:solidFill>
                 <a:latin typeface="Calibri"/>
               </a:rPr>
-              <a:t>Observability</a:t>
+              <a:t>Label and reconciliation window</a:t>
             </a:r>
           </a:p>
           <a:p>
@@ -4613,7 +5052,7 @@
               </a:spcAft>
             </a:pPr>
             <a:r>
-              <a:rPr sz="1300" b="1" i="0">
+              <a:rPr sz="1200" b="1" i="0">
                 <a:solidFill>
                   <a:srgbClr val="D97306"/>
                 </a:solidFill>
@@ -4622,13 +5061,32 @@
               <a:t>•  </a:t>
             </a:r>
             <a:r>
-              <a:rPr sz="1300" b="0" i="0">
+              <a:rPr sz="1200" b="0" i="0">
                 <a:solidFill>
                   <a:srgbClr val="333F52"/>
                 </a:solidFill>
                 <a:latin typeface="Calibri"/>
               </a:rPr>
-              <a:t>Cloud Logging, Cloud Trace, and Cloud Monitoring out of the box — one pane of glass for the on-call engineer.</a:t>
+              <a:t>Sum-of-rewards over a 90-day window (ADR 0003 — fits the CC consideration tail). Profit-ready: realised label is SUM(revenue × COALESCE(margin_rate, 1.0)); commission table swaps in as a data-only change.</a:t>
+            </a:r>
+          </a:p>
+          <a:p>
+            <a:pPr>
+              <a:lnSpc>
+                <a:spcPct val="120000"/>
+              </a:lnSpc>
+              <a:spcAft>
+                <a:spcPts val="600"/>
+              </a:spcAft>
+            </a:pPr>
+            <a:r>
+              <a:rPr sz="1600" b="1" i="0">
+                <a:solidFill>
+                  <a:srgbClr val="0F6E7A"/>
+                </a:solidFill>
+                <a:latin typeface="Calibri"/>
+              </a:rPr>
+              <a:t>Training and release</a:t>
             </a:r>
           </a:p>
           <a:p>
@@ -4641,7 +5099,7 @@
               </a:spcAft>
             </a:pPr>
             <a:r>
-              <a:rPr sz="1300" b="1" i="0">
+              <a:rPr sz="1200" b="1" i="0">
                 <a:solidFill>
                   <a:srgbClr val="D97306"/>
                 </a:solidFill>
@@ -4650,32 +5108,13 @@
               <a:t>•  </a:t>
             </a:r>
             <a:r>
-              <a:rPr sz="1300" b="0" i="0">
+              <a:rPr sz="1200" b="0" i="0">
                 <a:solidFill>
                   <a:srgbClr val="333F52"/>
                 </a:solidFill>
                 <a:latin typeface="Calibri"/>
               </a:rPr>
-              <a:t>Four alert policies pre-wired: latency, error rate, breaker trips, anomaly state.</a:t>
-            </a:r>
-          </a:p>
-          <a:p>
-            <a:pPr>
-              <a:lnSpc>
-                <a:spcPct val="120000"/>
-              </a:lnSpc>
-              <a:spcAft>
-                <a:spcPts val="600"/>
-              </a:spcAft>
-            </a:pPr>
-            <a:r>
-              <a:rPr sz="1700" b="1" i="0">
-                <a:solidFill>
-                  <a:srgbClr val="0F6E7A"/>
-                </a:solidFill>
-                <a:latin typeface="Calibri"/>
-              </a:rPr>
-              <a:t>Runbooks committed to the repository</a:t>
+              <a:t>Vertex AI Pipelines run from the same monorepo — reproducible from a commit. Every version registered in Vertex Model Registry.</a:t>
             </a:r>
           </a:p>
           <a:p>
@@ -4688,7 +5127,7 @@
               </a:spcAft>
             </a:pPr>
             <a:r>
-              <a:rPr sz="1300" b="1" i="0">
+              <a:rPr sz="1200" b="1" i="0">
                 <a:solidFill>
                   <a:srgbClr val="D97306"/>
                 </a:solidFill>
@@ -4697,32 +5136,13 @@
               <a:t>•  </a:t>
             </a:r>
             <a:r>
-              <a:rPr sz="1300" b="0" i="0">
+              <a:rPr sz="1200" b="0" i="0">
                 <a:solidFill>
                   <a:srgbClr val="333F52"/>
                 </a:solidFill>
                 <a:latin typeface="Calibri"/>
               </a:rPr>
-              <a:t>Reset the breaker · Roll back a model version · Scale Vertex to zero for cost · Rotate a secret · Migrate the BigQuery schema.</a:t>
-            </a:r>
-          </a:p>
-          <a:p>
-            <a:pPr>
-              <a:lnSpc>
-                <a:spcPct val="120000"/>
-              </a:lnSpc>
-              <a:spcAft>
-                <a:spcPts val="600"/>
-              </a:spcAft>
-            </a:pPr>
-            <a:r>
-              <a:rPr sz="1700" b="1" i="0">
-                <a:solidFill>
-                  <a:srgbClr val="0F6E7A"/>
-                </a:solidFill>
-                <a:latin typeface="Calibri"/>
-              </a:rPr>
-              <a:t>Rollback</a:t>
+              <a:t>Canary path: 10% traffic split → 50% over 48h → 100%. Active-versions panel on the dashboard shows the share and rolling MAE side-by-side.</a:t>
             </a:r>
           </a:p>
           <a:p>
@@ -4735,7 +5155,7 @@
               </a:spcAft>
             </a:pPr>
             <a:r>
-              <a:rPr sz="1300" b="1" i="0">
+              <a:rPr sz="1200" b="1" i="0">
                 <a:solidFill>
                   <a:srgbClr val="D97306"/>
                 </a:solidFill>
@@ -4744,13 +5164,29 @@
               <a:t>•  </a:t>
             </a:r>
             <a:r>
-              <a:rPr sz="1300" b="0" i="0">
+              <a:rPr sz="1200" b="0" i="0">
                 <a:solidFill>
                   <a:srgbClr val="333F52"/>
                 </a:solidFill>
                 <a:latin typeface="Calibri"/>
               </a:rPr>
-              <a:t>Vertex traffic-split rollback to the previous model version is a single command; Cloud Run revisions are pinned and revertible.</a:t>
+              <a:t>Drift on inputs (PSI per numeric feature), outputs (residuals_daily), per-segment (product × device × geo), and coverage (slice drop W-o-W).</a:t>
+            </a:r>
+          </a:p>
+          <a:p>
+            <a:pPr>
+              <a:lnSpc>
+                <a:spcPct val="120000"/>
+              </a:lnSpc>
+            </a:pPr>
+            <a:r>
+              <a:rPr sz="1000" b="0" i="1">
+                <a:solidFill>
+                  <a:srgbClr val="6B7380"/>
+                </a:solidFill>
+                <a:latin typeface="Calibri"/>
+              </a:rPr>
+              <a:t>Today's demo runs against a model trained on a synthetic dataset that mirrors the agreed schema. Retraining on real Credit Cards data is the first work item once OQ-11 (GA4 access) and the data contract are signed.</a:t>
             </a:r>
           </a:p>
         </p:txBody>
@@ -4837,7 +5273,7 @@
                 </a:solidFill>
                 <a:latin typeface="Calibri"/>
               </a:rPr>
-              <a:t>12 / 15</a:t>
+              <a:t>12 / 16</a:t>
             </a:r>
           </a:p>
         </p:txBody>
@@ -4907,7 +5343,7 @@
                 </a:solidFill>
                 <a:latin typeface="Calibri"/>
               </a:rPr>
-              <a:t>FROM HERE TO PRODUCTION</a:t>
+              <a:t>RUN-BOOK READY, ON DAY ONE</a:t>
             </a:r>
           </a:p>
           <a:p>
@@ -4918,7 +5354,7 @@
                 </a:solidFill>
                 <a:latin typeface="Calibri"/>
               </a:rPr>
-              <a:t>Delivery roadmap</a:t>
+              <a:t>Operational readiness</a:t>
             </a:r>
           </a:p>
         </p:txBody>
@@ -4968,183 +5404,14 @@
       </p:sp>
       <p:sp>
         <p:nvSpPr>
-          <p:cNvPr id="4" name="Rounded Rectangle 3"/>
-          <p:cNvSpPr/>
-          <p:nvPr/>
-        </p:nvSpPr>
-        <p:spPr>
-          <a:xfrm>
-            <a:off x="502920" y="1188720"/>
-            <a:ext cx="3840480" cy="3657600"/>
-          </a:xfrm>
-          <a:prstGeom prst="roundRect">
-            <a:avLst>
-              <a:gd name="adj" fmla="val 5000"/>
-            </a:avLst>
-          </a:prstGeom>
-          <a:solidFill>
-            <a:srgbClr val="FFFFFF"/>
-          </a:solidFill>
-          <a:ln w="9525">
-            <a:solidFill>
-              <a:srgbClr val="D7DBE3"/>
-            </a:solidFill>
-          </a:ln>
-        </p:spPr>
-        <p:style>
-          <a:lnRef idx="1">
-            <a:schemeClr val="accent1"/>
-          </a:lnRef>
-          <a:fillRef idx="3">
-            <a:schemeClr val="accent1"/>
-          </a:fillRef>
-          <a:effectRef idx="2">
-            <a:schemeClr val="accent1"/>
-          </a:effectRef>
-          <a:fontRef idx="minor">
-            <a:schemeClr val="lt1"/>
-          </a:fontRef>
-        </p:style>
-        <p:txBody>
-          <a:bodyPr rtlCol="0" anchor="ctr"/>
-          <a:lstStyle/>
-          <a:p>
-            <a:pPr algn="ctr"/>
-          </a:p>
-        </p:txBody>
-      </p:sp>
-      <p:sp>
-        <p:nvSpPr>
-          <p:cNvPr id="5" name="Rectangle 4"/>
-          <p:cNvSpPr/>
-          <p:nvPr/>
-        </p:nvSpPr>
-        <p:spPr>
-          <a:xfrm>
-            <a:off x="502920" y="1188720"/>
-            <a:ext cx="3840480" cy="502920"/>
-          </a:xfrm>
-          <a:prstGeom prst="rect">
-            <a:avLst/>
-          </a:prstGeom>
-          <a:solidFill>
-            <a:srgbClr val="1F8A4F"/>
-          </a:solidFill>
-          <a:ln>
-            <a:noFill/>
-          </a:ln>
-        </p:spPr>
-        <p:style>
-          <a:lnRef idx="1">
-            <a:schemeClr val="accent1"/>
-          </a:lnRef>
-          <a:fillRef idx="3">
-            <a:schemeClr val="accent1"/>
-          </a:fillRef>
-          <a:effectRef idx="2">
-            <a:schemeClr val="accent1"/>
-          </a:effectRef>
-          <a:fontRef idx="minor">
-            <a:schemeClr val="lt1"/>
-          </a:fontRef>
-        </p:style>
-        <p:txBody>
-          <a:bodyPr rtlCol="0" anchor="ctr"/>
-          <a:lstStyle/>
-          <a:p>
-            <a:pPr algn="ctr"/>
-          </a:p>
-        </p:txBody>
-      </p:sp>
-      <p:sp>
-        <p:nvSpPr>
-          <p:cNvPr id="6" name="TextBox 5"/>
+          <p:cNvPr id="4" name="TextBox 3"/>
           <p:cNvSpPr txBox="1"/>
           <p:nvPr/>
         </p:nvSpPr>
         <p:spPr>
           <a:xfrm>
-            <a:off x="685800" y="1252728"/>
-            <a:ext cx="3474720" cy="457200"/>
-          </a:xfrm>
-          <a:prstGeom prst="rect">
-            <a:avLst/>
-          </a:prstGeom>
-          <a:noFill/>
-        </p:spPr>
-        <p:txBody>
-          <a:bodyPr wrap="none">
-            <a:spAutoFit/>
-          </a:bodyPr>
-          <a:lstStyle/>
-          <a:p>
-            <a:r>
-              <a:rPr sz="1100" b="1" i="0">
-                <a:solidFill>
-                  <a:srgbClr val="FFFFFF"/>
-                </a:solidFill>
-                <a:latin typeface="Calibri"/>
-              </a:rPr>
-              <a:t>Phase 1</a:t>
-            </a:r>
-          </a:p>
-          <a:p>
-            <a:r>
-              <a:rPr sz="1500" b="1" i="0">
-                <a:solidFill>
-                  <a:srgbClr val="FFFFFF"/>
-                </a:solidFill>
-                <a:latin typeface="Calibri"/>
-              </a:rPr>
-              <a:t>Staging hardened</a:t>
-            </a:r>
-          </a:p>
-        </p:txBody>
-      </p:sp>
-      <p:sp>
-        <p:nvSpPr>
-          <p:cNvPr id="7" name="TextBox 6"/>
-          <p:cNvSpPr txBox="1"/>
-          <p:nvPr/>
-        </p:nvSpPr>
-        <p:spPr>
-          <a:xfrm>
-            <a:off x="685800" y="1874520"/>
-            <a:ext cx="3474720" cy="274320"/>
-          </a:xfrm>
-          <a:prstGeom prst="rect">
-            <a:avLst/>
-          </a:prstGeom>
-          <a:noFill/>
-        </p:spPr>
-        <p:txBody>
-          <a:bodyPr wrap="none">
-            <a:spAutoFit/>
-          </a:bodyPr>
-          <a:lstStyle/>
-          <a:p>
-            <a:r>
-              <a:rPr sz="1000" b="1" i="0">
-                <a:solidFill>
-                  <a:srgbClr val="1F8A4F"/>
-                </a:solidFill>
-                <a:latin typeface="Calibri"/>
-              </a:rPr>
-              <a:t>COMPLETE</a:t>
-            </a:r>
-          </a:p>
-        </p:txBody>
-      </p:sp>
-      <p:sp>
-        <p:nvSpPr>
-          <p:cNvPr id="8" name="TextBox 7"/>
-          <p:cNvSpPr txBox="1"/>
-          <p:nvPr/>
-        </p:nvSpPr>
-        <p:spPr>
-          <a:xfrm>
-            <a:off x="731520" y="2240280"/>
-            <a:ext cx="3383280" cy="2468880"/>
+            <a:off x="548640" y="1143000"/>
+            <a:ext cx="11094415" cy="5303520"/>
           </a:xfrm>
           <a:prstGeom prst="rect">
             <a:avLst/>
@@ -5159,17 +5426,39 @@
           <a:p>
             <a:pPr>
               <a:lnSpc>
-                <a:spcPct val="125000"/>
-              </a:lnSpc>
+                <a:spcPct val="120000"/>
+              </a:lnSpc>
+              <a:spcAft>
+                <a:spcPts val="600"/>
+              </a:spcAft>
+            </a:pPr>
+            <a:r>
+              <a:rPr sz="1600" b="1" i="0">
+                <a:solidFill>
+                  <a:srgbClr val="0F6E7A"/>
+                </a:solidFill>
+                <a:latin typeface="Calibri"/>
+              </a:rPr>
+              <a:t>Service-level objectives</a:t>
+            </a:r>
+          </a:p>
+          <a:p>
+            <a:pPr>
+              <a:lnSpc>
+                <a:spcPct val="120000"/>
+              </a:lnSpc>
+              <a:spcAft>
+                <a:spcPts val="300"/>
+              </a:spcAft>
             </a:pPr>
             <a:r>
               <a:rPr sz="1200" b="1" i="0">
                 <a:solidFill>
-                  <a:srgbClr val="1F8A4F"/>
-                </a:solidFill>
-                <a:latin typeface="Calibri"/>
-              </a:rPr>
-              <a:t>✓  </a:t>
+                  <a:srgbClr val="D97306"/>
+                </a:solidFill>
+                <a:latin typeface="Calibri"/>
+              </a:rPr>
+              <a:t>•  </a:t>
             </a:r>
             <a:r>
               <a:rPr sz="1200" b="0" i="0">
@@ -5178,23 +5467,26 @@
                 </a:solidFill>
                 <a:latin typeface="Calibri"/>
               </a:rPr>
-              <a:t>Real explain path live</a:t>
-            </a:r>
-          </a:p>
-          <a:p>
-            <a:pPr>
-              <a:lnSpc>
-                <a:spcPct val="125000"/>
-              </a:lnSpc>
+              <a:t>Availability target 99.5% on /v1/score; latency SLO sized from the live load profile (p95 ~920 ms vs 1500 ms threshold).</a:t>
+            </a:r>
+          </a:p>
+          <a:p>
+            <a:pPr>
+              <a:lnSpc>
+                <a:spcPct val="120000"/>
+              </a:lnSpc>
+              <a:spcAft>
+                <a:spcPts val="300"/>
+              </a:spcAft>
             </a:pPr>
             <a:r>
               <a:rPr sz="1200" b="1" i="0">
                 <a:solidFill>
-                  <a:srgbClr val="1F8A4F"/>
-                </a:solidFill>
-                <a:latin typeface="Calibri"/>
-              </a:rPr>
-              <a:t>✓  </a:t>
+                  <a:srgbClr val="D97306"/>
+                </a:solidFill>
+                <a:latin typeface="Calibri"/>
+              </a:rPr>
+              <a:t>•  </a:t>
             </a:r>
             <a:r>
               <a:rPr sz="1200" b="0" i="0">
@@ -5203,23 +5495,45 @@
                 </a:solidFill>
                 <a:latin typeface="Calibri"/>
               </a:rPr>
-              <a:t>Sliding anomaly window</a:t>
-            </a:r>
-          </a:p>
-          <a:p>
-            <a:pPr>
-              <a:lnSpc>
-                <a:spcPct val="125000"/>
-              </a:lnSpc>
+              <a:t>Error-budget policy: breaches automatically open an incident channel (notification channel pending OQ-2).</a:t>
+            </a:r>
+          </a:p>
+          <a:p>
+            <a:pPr>
+              <a:lnSpc>
+                <a:spcPct val="120000"/>
+              </a:lnSpc>
+              <a:spcAft>
+                <a:spcPts val="600"/>
+              </a:spcAft>
+            </a:pPr>
+            <a:r>
+              <a:rPr sz="1600" b="1" i="0">
+                <a:solidFill>
+                  <a:srgbClr val="0F6E7A"/>
+                </a:solidFill>
+                <a:latin typeface="Calibri"/>
+              </a:rPr>
+              <a:t>Observability</a:t>
+            </a:r>
+          </a:p>
+          <a:p>
+            <a:pPr>
+              <a:lnSpc>
+                <a:spcPct val="120000"/>
+              </a:lnSpc>
+              <a:spcAft>
+                <a:spcPts val="300"/>
+              </a:spcAft>
             </a:pPr>
             <a:r>
               <a:rPr sz="1200" b="1" i="0">
                 <a:solidFill>
-                  <a:srgbClr val="1F8A4F"/>
-                </a:solidFill>
-                <a:latin typeface="Calibri"/>
-              </a:rPr>
-              <a:t>✓  </a:t>
+                  <a:srgbClr val="D97306"/>
+                </a:solidFill>
+                <a:latin typeface="Calibri"/>
+              </a:rPr>
+              <a:t>•  </a:t>
             </a:r>
             <a:r>
               <a:rPr sz="1200" b="0" i="0">
@@ -5228,23 +5542,26 @@
                 </a:solidFill>
                 <a:latin typeface="Calibri"/>
               </a:rPr>
-              <a:t>IaC for IAM</a:t>
-            </a:r>
-          </a:p>
-          <a:p>
-            <a:pPr>
-              <a:lnSpc>
-                <a:spcPct val="125000"/>
-              </a:lnSpc>
+              <a:t>Cloud Logging, Cloud Trace, and Cloud Monitoring out of the box — one pane of glass for the on-call engineer.</a:t>
+            </a:r>
+          </a:p>
+          <a:p>
+            <a:pPr>
+              <a:lnSpc>
+                <a:spcPct val="120000"/>
+              </a:lnSpc>
+              <a:spcAft>
+                <a:spcPts val="300"/>
+              </a:spcAft>
             </a:pPr>
             <a:r>
               <a:rPr sz="1200" b="1" i="0">
                 <a:solidFill>
-                  <a:srgbClr val="1F8A4F"/>
-                </a:solidFill>
-                <a:latin typeface="Calibri"/>
-              </a:rPr>
-              <a:t>✓  </a:t>
+                  <a:srgbClr val="D97306"/>
+                </a:solidFill>
+                <a:latin typeface="Calibri"/>
+              </a:rPr>
+              <a:t>•  </a:t>
             </a:r>
             <a:r>
               <a:rPr sz="1200" b="0" i="0">
@@ -5253,206 +5570,83 @@
                 </a:solidFill>
                 <a:latin typeface="Calibri"/>
               </a:rPr>
-              <a:t>Load profile captured</a:t>
-            </a:r>
-          </a:p>
-        </p:txBody>
-      </p:sp>
-      <p:sp>
-        <p:nvSpPr>
-          <p:cNvPr id="9" name="Rounded Rectangle 8"/>
-          <p:cNvSpPr/>
-          <p:nvPr/>
-        </p:nvSpPr>
-        <p:spPr>
-          <a:xfrm>
-            <a:off x="4572000" y="1188720"/>
-            <a:ext cx="3840480" cy="3657600"/>
-          </a:xfrm>
-          <a:prstGeom prst="roundRect">
-            <a:avLst>
-              <a:gd name="adj" fmla="val 5000"/>
-            </a:avLst>
-          </a:prstGeom>
-          <a:solidFill>
-            <a:srgbClr val="FFFFFF"/>
-          </a:solidFill>
-          <a:ln w="9525">
-            <a:solidFill>
-              <a:srgbClr val="D7DBE3"/>
-            </a:solidFill>
-          </a:ln>
-        </p:spPr>
-        <p:style>
-          <a:lnRef idx="1">
-            <a:schemeClr val="accent1"/>
-          </a:lnRef>
-          <a:fillRef idx="3">
-            <a:schemeClr val="accent1"/>
-          </a:fillRef>
-          <a:effectRef idx="2">
-            <a:schemeClr val="accent1"/>
-          </a:effectRef>
-          <a:fontRef idx="minor">
-            <a:schemeClr val="lt1"/>
-          </a:fontRef>
-        </p:style>
-        <p:txBody>
-          <a:bodyPr rtlCol="0" anchor="ctr"/>
-          <a:lstStyle/>
-          <a:p>
-            <a:pPr algn="ctr"/>
-          </a:p>
-        </p:txBody>
-      </p:sp>
-      <p:sp>
-        <p:nvSpPr>
-          <p:cNvPr id="10" name="Rectangle 9"/>
-          <p:cNvSpPr/>
-          <p:nvPr/>
-        </p:nvSpPr>
-        <p:spPr>
-          <a:xfrm>
-            <a:off x="4572000" y="1188720"/>
-            <a:ext cx="3840480" cy="502920"/>
-          </a:xfrm>
-          <a:prstGeom prst="rect">
-            <a:avLst/>
-          </a:prstGeom>
-          <a:solidFill>
-            <a:srgbClr val="D97306"/>
-          </a:solidFill>
-          <a:ln>
-            <a:noFill/>
-          </a:ln>
-        </p:spPr>
-        <p:style>
-          <a:lnRef idx="1">
-            <a:schemeClr val="accent1"/>
-          </a:lnRef>
-          <a:fillRef idx="3">
-            <a:schemeClr val="accent1"/>
-          </a:fillRef>
-          <a:effectRef idx="2">
-            <a:schemeClr val="accent1"/>
-          </a:effectRef>
-          <a:fontRef idx="minor">
-            <a:schemeClr val="lt1"/>
-          </a:fontRef>
-        </p:style>
-        <p:txBody>
-          <a:bodyPr rtlCol="0" anchor="ctr"/>
-          <a:lstStyle/>
-          <a:p>
-            <a:pPr algn="ctr"/>
-          </a:p>
-        </p:txBody>
-      </p:sp>
-      <p:sp>
-        <p:nvSpPr>
-          <p:cNvPr id="11" name="TextBox 10"/>
-          <p:cNvSpPr txBox="1"/>
-          <p:nvPr/>
-        </p:nvSpPr>
-        <p:spPr>
-          <a:xfrm>
-            <a:off x="4754880" y="1252728"/>
-            <a:ext cx="3474720" cy="457200"/>
-          </a:xfrm>
-          <a:prstGeom prst="rect">
-            <a:avLst/>
-          </a:prstGeom>
-          <a:noFill/>
-        </p:spPr>
-        <p:txBody>
-          <a:bodyPr wrap="none">
-            <a:spAutoFit/>
-          </a:bodyPr>
-          <a:lstStyle/>
-          <a:p>
-            <a:r>
-              <a:rPr sz="1100" b="1" i="0">
-                <a:solidFill>
-                  <a:srgbClr val="FFFFFF"/>
-                </a:solidFill>
-                <a:latin typeface="Calibri"/>
-              </a:rPr>
-              <a:t>Phase 2</a:t>
-            </a:r>
-          </a:p>
-          <a:p>
-            <a:r>
-              <a:rPr sz="1500" b="1" i="0">
-                <a:solidFill>
-                  <a:srgbClr val="FFFFFF"/>
-                </a:solidFill>
-                <a:latin typeface="Calibri"/>
-              </a:rPr>
-              <a:t>Real data</a:t>
-            </a:r>
-          </a:p>
-        </p:txBody>
-      </p:sp>
-      <p:sp>
-        <p:nvSpPr>
-          <p:cNvPr id="12" name="TextBox 11"/>
-          <p:cNvSpPr txBox="1"/>
-          <p:nvPr/>
-        </p:nvSpPr>
-        <p:spPr>
-          <a:xfrm>
-            <a:off x="4754880" y="1874520"/>
-            <a:ext cx="3474720" cy="274320"/>
-          </a:xfrm>
-          <a:prstGeom prst="rect">
-            <a:avLst/>
-          </a:prstGeom>
-          <a:noFill/>
-        </p:spPr>
-        <p:txBody>
-          <a:bodyPr wrap="none">
-            <a:spAutoFit/>
-          </a:bodyPr>
-          <a:lstStyle/>
-          <a:p>
-            <a:r>
-              <a:rPr sz="1000" b="1" i="0">
+              <a:t>Six alert policies pre-wired: latency p95, error rate, breaker trips, anomaly state, per-segment MAE drift &gt; 25% W-o-W, per-slice coverage drop &gt; 10pp W-o-W.</a:t>
+            </a:r>
+          </a:p>
+          <a:p>
+            <a:pPr>
+              <a:lnSpc>
+                <a:spcPct val="120000"/>
+              </a:lnSpc>
+              <a:spcAft>
+                <a:spcPts val="600"/>
+              </a:spcAft>
+            </a:pPr>
+            <a:r>
+              <a:rPr sz="1600" b="1" i="0">
+                <a:solidFill>
+                  <a:srgbClr val="0F6E7A"/>
+                </a:solidFill>
+                <a:latin typeface="Calibri"/>
+              </a:rPr>
+              <a:t>Runbooks committed to the repository</a:t>
+            </a:r>
+          </a:p>
+          <a:p>
+            <a:pPr>
+              <a:lnSpc>
+                <a:spcPct val="120000"/>
+              </a:lnSpc>
+              <a:spcAft>
+                <a:spcPts val="300"/>
+              </a:spcAft>
+            </a:pPr>
+            <a:r>
+              <a:rPr sz="1200" b="1" i="0">
                 <a:solidFill>
                   <a:srgbClr val="D97306"/>
                 </a:solidFill>
                 <a:latin typeface="Calibri"/>
               </a:rPr>
-              <a:t>IN FLIGHT</a:t>
-            </a:r>
-          </a:p>
-        </p:txBody>
-      </p:sp>
-      <p:sp>
-        <p:nvSpPr>
-          <p:cNvPr id="13" name="TextBox 12"/>
-          <p:cNvSpPr txBox="1"/>
-          <p:nvPr/>
-        </p:nvSpPr>
-        <p:spPr>
-          <a:xfrm>
-            <a:off x="4800600" y="2240280"/>
-            <a:ext cx="3383280" cy="2468880"/>
-          </a:xfrm>
-          <a:prstGeom prst="rect">
-            <a:avLst/>
-          </a:prstGeom>
-          <a:noFill/>
-        </p:spPr>
-        <p:txBody>
-          <a:bodyPr wrap="square">
-            <a:spAutoFit/>
-          </a:bodyPr>
-          <a:lstStyle/>
-          <a:p>
-            <a:pPr>
-              <a:lnSpc>
-                <a:spcPct val="125000"/>
-              </a:lnSpc>
+              <a:t>•  </a:t>
+            </a:r>
+            <a:r>
+              <a:rPr sz="1200" b="0" i="0">
+                <a:solidFill>
+                  <a:srgbClr val="333F52"/>
+                </a:solidFill>
+                <a:latin typeface="Calibri"/>
+              </a:rPr>
+              <a:t>Reset the breaker · Roll back a model version · Scale Vertex to zero for cost · Rotate a secret · Migrate the BigQuery schema · Coverage audit (random-vs-systematic decision).</a:t>
+            </a:r>
+          </a:p>
+          <a:p>
+            <a:pPr>
+              <a:lnSpc>
+                <a:spcPct val="120000"/>
+              </a:lnSpc>
+              <a:spcAft>
+                <a:spcPts val="600"/>
+              </a:spcAft>
+            </a:pPr>
+            <a:r>
+              <a:rPr sz="1600" b="1" i="0">
+                <a:solidFill>
+                  <a:srgbClr val="0F6E7A"/>
+                </a:solidFill>
+                <a:latin typeface="Calibri"/>
+              </a:rPr>
+              <a:t>Rollback</a:t>
+            </a:r>
+          </a:p>
+          <a:p>
+            <a:pPr>
+              <a:lnSpc>
+                <a:spcPct val="120000"/>
+              </a:lnSpc>
+              <a:spcAft>
+                <a:spcPts val="300"/>
+              </a:spcAft>
             </a:pPr>
             <a:r>
               <a:rPr sz="1200" b="1" i="0">
@@ -5470,416 +5664,14 @@
                 </a:solidFill>
                 <a:latin typeface="Calibri"/>
               </a:rPr>
-              <a:t>Data contract sign-off</a:t>
-            </a:r>
-          </a:p>
-          <a:p>
-            <a:pPr>
-              <a:lnSpc>
-                <a:spcPct val="125000"/>
-              </a:lnSpc>
-            </a:pPr>
-            <a:r>
-              <a:rPr sz="1200" b="1" i="0">
-                <a:solidFill>
-                  <a:srgbClr val="D97306"/>
-                </a:solidFill>
-                <a:latin typeface="Calibri"/>
-              </a:rPr>
-              <a:t>•  </a:t>
-            </a:r>
-            <a:r>
-              <a:rPr sz="1200" b="0" i="0">
-                <a:solidFill>
-                  <a:srgbClr val="333F52"/>
-                </a:solidFill>
-                <a:latin typeface="Calibri"/>
-              </a:rPr>
-              <a:t>Ingestion of client feeds</a:t>
-            </a:r>
-          </a:p>
-          <a:p>
-            <a:pPr>
-              <a:lnSpc>
-                <a:spcPct val="125000"/>
-              </a:lnSpc>
-            </a:pPr>
-            <a:r>
-              <a:rPr sz="1200" b="1" i="0">
-                <a:solidFill>
-                  <a:srgbClr val="D97306"/>
-                </a:solidFill>
-                <a:latin typeface="Calibri"/>
-              </a:rPr>
-              <a:t>•  </a:t>
-            </a:r>
-            <a:r>
-              <a:rPr sz="1200" b="0" i="0">
-                <a:solidFill>
-                  <a:srgbClr val="333F52"/>
-                </a:solidFill>
-                <a:latin typeface="Calibri"/>
-              </a:rPr>
-              <a:t>Retrain on real data</a:t>
-            </a:r>
-          </a:p>
-          <a:p>
-            <a:pPr>
-              <a:lnSpc>
-                <a:spcPct val="125000"/>
-              </a:lnSpc>
-            </a:pPr>
-            <a:r>
-              <a:rPr sz="1200" b="1" i="0">
-                <a:solidFill>
-                  <a:srgbClr val="D97306"/>
-                </a:solidFill>
-                <a:latin typeface="Calibri"/>
-              </a:rPr>
-              <a:t>•  </a:t>
-            </a:r>
-            <a:r>
-              <a:rPr sz="1200" b="0" i="0">
-                <a:solidFill>
-                  <a:srgbClr val="333F52"/>
-                </a:solidFill>
-                <a:latin typeface="Calibri"/>
-              </a:rPr>
-              <a:t>Canary 10% → 100%</a:t>
-            </a:r>
-          </a:p>
-        </p:txBody>
-      </p:sp>
-      <p:sp>
-        <p:nvSpPr>
-          <p:cNvPr id="14" name="Rounded Rectangle 13"/>
-          <p:cNvSpPr/>
-          <p:nvPr/>
-        </p:nvSpPr>
-        <p:spPr>
-          <a:xfrm>
-            <a:off x="8641080" y="1188720"/>
-            <a:ext cx="3840480" cy="3657600"/>
-          </a:xfrm>
-          <a:prstGeom prst="roundRect">
-            <a:avLst>
-              <a:gd name="adj" fmla="val 5000"/>
-            </a:avLst>
-          </a:prstGeom>
-          <a:solidFill>
-            <a:srgbClr val="FFFFFF"/>
-          </a:solidFill>
-          <a:ln w="9525">
-            <a:solidFill>
-              <a:srgbClr val="D7DBE3"/>
-            </a:solidFill>
-          </a:ln>
-        </p:spPr>
-        <p:style>
-          <a:lnRef idx="1">
-            <a:schemeClr val="accent1"/>
-          </a:lnRef>
-          <a:fillRef idx="3">
-            <a:schemeClr val="accent1"/>
-          </a:fillRef>
-          <a:effectRef idx="2">
-            <a:schemeClr val="accent1"/>
-          </a:effectRef>
-          <a:fontRef idx="minor">
-            <a:schemeClr val="lt1"/>
-          </a:fontRef>
-        </p:style>
-        <p:txBody>
-          <a:bodyPr rtlCol="0" anchor="ctr"/>
-          <a:lstStyle/>
-          <a:p>
-            <a:pPr algn="ctr"/>
-          </a:p>
-        </p:txBody>
-      </p:sp>
-      <p:sp>
-        <p:nvSpPr>
-          <p:cNvPr id="15" name="Rectangle 14"/>
-          <p:cNvSpPr/>
-          <p:nvPr/>
-        </p:nvSpPr>
-        <p:spPr>
-          <a:xfrm>
-            <a:off x="8641080" y="1188720"/>
-            <a:ext cx="3840480" cy="502920"/>
-          </a:xfrm>
-          <a:prstGeom prst="rect">
-            <a:avLst/>
-          </a:prstGeom>
-          <a:solidFill>
-            <a:srgbClr val="0F6E7A"/>
-          </a:solidFill>
-          <a:ln>
-            <a:noFill/>
-          </a:ln>
-        </p:spPr>
-        <p:style>
-          <a:lnRef idx="1">
-            <a:schemeClr val="accent1"/>
-          </a:lnRef>
-          <a:fillRef idx="3">
-            <a:schemeClr val="accent1"/>
-          </a:fillRef>
-          <a:effectRef idx="2">
-            <a:schemeClr val="accent1"/>
-          </a:effectRef>
-          <a:fontRef idx="minor">
-            <a:schemeClr val="lt1"/>
-          </a:fontRef>
-        </p:style>
-        <p:txBody>
-          <a:bodyPr rtlCol="0" anchor="ctr"/>
-          <a:lstStyle/>
-          <a:p>
-            <a:pPr algn="ctr"/>
-          </a:p>
-        </p:txBody>
-      </p:sp>
-      <p:sp>
-        <p:nvSpPr>
-          <p:cNvPr id="16" name="TextBox 15"/>
-          <p:cNvSpPr txBox="1"/>
-          <p:nvPr/>
-        </p:nvSpPr>
-        <p:spPr>
-          <a:xfrm>
-            <a:off x="8823960" y="1252728"/>
-            <a:ext cx="3474720" cy="457200"/>
-          </a:xfrm>
-          <a:prstGeom prst="rect">
-            <a:avLst/>
-          </a:prstGeom>
-          <a:noFill/>
-        </p:spPr>
-        <p:txBody>
-          <a:bodyPr wrap="none">
-            <a:spAutoFit/>
-          </a:bodyPr>
-          <a:lstStyle/>
-          <a:p>
-            <a:r>
-              <a:rPr sz="1100" b="1" i="0">
-                <a:solidFill>
-                  <a:srgbClr val="FFFFFF"/>
-                </a:solidFill>
-                <a:latin typeface="Calibri"/>
-              </a:rPr>
-              <a:t>Phase 3</a:t>
-            </a:r>
-          </a:p>
-          <a:p>
-            <a:r>
-              <a:rPr sz="1500" b="1" i="0">
-                <a:solidFill>
-                  <a:srgbClr val="FFFFFF"/>
-                </a:solidFill>
-                <a:latin typeface="Calibri"/>
-              </a:rPr>
-              <a:t>Production</a:t>
-            </a:r>
-          </a:p>
-        </p:txBody>
-      </p:sp>
-      <p:sp>
-        <p:nvSpPr>
-          <p:cNvPr id="17" name="TextBox 16"/>
-          <p:cNvSpPr txBox="1"/>
-          <p:nvPr/>
-        </p:nvSpPr>
-        <p:spPr>
-          <a:xfrm>
-            <a:off x="8823960" y="1874520"/>
-            <a:ext cx="3474720" cy="274320"/>
-          </a:xfrm>
-          <a:prstGeom prst="rect">
-            <a:avLst/>
-          </a:prstGeom>
-          <a:noFill/>
-        </p:spPr>
-        <p:txBody>
-          <a:bodyPr wrap="none">
-            <a:spAutoFit/>
-          </a:bodyPr>
-          <a:lstStyle/>
-          <a:p>
-            <a:r>
-              <a:rPr sz="1000" b="1" i="0">
-                <a:solidFill>
-                  <a:srgbClr val="0F6E7A"/>
-                </a:solidFill>
-                <a:latin typeface="Calibri"/>
-              </a:rPr>
-              <a:t>READY TO START</a:t>
-            </a:r>
-          </a:p>
-        </p:txBody>
-      </p:sp>
-      <p:sp>
-        <p:nvSpPr>
-          <p:cNvPr id="18" name="TextBox 17"/>
-          <p:cNvSpPr txBox="1"/>
-          <p:nvPr/>
-        </p:nvSpPr>
-        <p:spPr>
-          <a:xfrm>
-            <a:off x="8869680" y="2240280"/>
-            <a:ext cx="3383280" cy="2468880"/>
-          </a:xfrm>
-          <a:prstGeom prst="rect">
-            <a:avLst/>
-          </a:prstGeom>
-          <a:noFill/>
-        </p:spPr>
-        <p:txBody>
-          <a:bodyPr wrap="square">
-            <a:spAutoFit/>
-          </a:bodyPr>
-          <a:lstStyle/>
-          <a:p>
-            <a:pPr>
-              <a:lnSpc>
-                <a:spcPct val="125000"/>
-              </a:lnSpc>
-            </a:pPr>
-            <a:r>
-              <a:rPr sz="1200" b="1" i="0">
-                <a:solidFill>
-                  <a:srgbClr val="0F6E7A"/>
-                </a:solidFill>
-                <a:latin typeface="Calibri"/>
-              </a:rPr>
-              <a:t>•  </a:t>
-            </a:r>
-            <a:r>
-              <a:rPr sz="1200" b="0" i="0">
-                <a:solidFill>
-                  <a:srgbClr val="333F52"/>
-                </a:solidFill>
-                <a:latin typeface="Calibri"/>
-              </a:rPr>
-              <a:t>Prod Terraform workspace</a:t>
-            </a:r>
-          </a:p>
-          <a:p>
-            <a:pPr>
-              <a:lnSpc>
-                <a:spcPct val="125000"/>
-              </a:lnSpc>
-            </a:pPr>
-            <a:r>
-              <a:rPr sz="1200" b="1" i="0">
-                <a:solidFill>
-                  <a:srgbClr val="0F6E7A"/>
-                </a:solidFill>
-                <a:latin typeface="Calibri"/>
-              </a:rPr>
-              <a:t>•  </a:t>
-            </a:r>
-            <a:r>
-              <a:rPr sz="1200" b="0" i="0">
-                <a:solidFill>
-                  <a:srgbClr val="333F52"/>
-                </a:solidFill>
-                <a:latin typeface="Calibri"/>
-              </a:rPr>
-              <a:t>Prod CD with approvals</a:t>
-            </a:r>
-          </a:p>
-          <a:p>
-            <a:pPr>
-              <a:lnSpc>
-                <a:spcPct val="125000"/>
-              </a:lnSpc>
-            </a:pPr>
-            <a:r>
-              <a:rPr sz="1200" b="1" i="0">
-                <a:solidFill>
-                  <a:srgbClr val="0F6E7A"/>
-                </a:solidFill>
-                <a:latin typeface="Calibri"/>
-              </a:rPr>
-              <a:t>•  </a:t>
-            </a:r>
-            <a:r>
-              <a:rPr sz="1200" b="0" i="0">
-                <a:solidFill>
-                  <a:srgbClr val="333F52"/>
-                </a:solidFill>
-                <a:latin typeface="Calibri"/>
-              </a:rPr>
-              <a:t>Right-sized Vertex</a:t>
-            </a:r>
-          </a:p>
-          <a:p>
-            <a:pPr>
-              <a:lnSpc>
-                <a:spcPct val="125000"/>
-              </a:lnSpc>
-            </a:pPr>
-            <a:r>
-              <a:rPr sz="1200" b="1" i="0">
-                <a:solidFill>
-                  <a:srgbClr val="0F6E7A"/>
-                </a:solidFill>
-                <a:latin typeface="Calibri"/>
-              </a:rPr>
-              <a:t>•  </a:t>
-            </a:r>
-            <a:r>
-              <a:rPr sz="1200" b="0" i="0">
-                <a:solidFill>
-                  <a:srgbClr val="333F52"/>
-                </a:solidFill>
-                <a:latin typeface="Calibri"/>
-              </a:rPr>
-              <a:t>Sign-off and handover</a:t>
-            </a:r>
-          </a:p>
-        </p:txBody>
-      </p:sp>
-      <p:sp>
-        <p:nvSpPr>
-          <p:cNvPr id="19" name="TextBox 18"/>
-          <p:cNvSpPr txBox="1"/>
-          <p:nvPr/>
-        </p:nvSpPr>
-        <p:spPr>
-          <a:xfrm>
-            <a:off x="502920" y="4983480"/>
-            <a:ext cx="11185855" cy="640080"/>
-          </a:xfrm>
-          <a:prstGeom prst="rect">
-            <a:avLst/>
-          </a:prstGeom>
-          <a:noFill/>
-        </p:spPr>
-        <p:txBody>
-          <a:bodyPr wrap="none">
-            <a:spAutoFit/>
-          </a:bodyPr>
-          <a:lstStyle/>
-          <a:p>
-            <a:pPr algn="ctr"/>
-            <a:r>
-              <a:rPr sz="1100" b="0" i="1">
-                <a:solidFill>
-                  <a:srgbClr val="6B7380"/>
-                </a:solidFill>
-                <a:latin typeface="Calibri"/>
-              </a:rPr>
-              <a:t>Indicative timeline: ~8 weeks from kickoff, gated on data access. Each phase ends in a working, demoable artefact.</a:t>
-            </a:r>
-          </a:p>
-        </p:txBody>
-      </p:sp>
-      <p:sp>
-        <p:nvSpPr>
-          <p:cNvPr id="20" name="Rectangle 19"/>
+              <a:t>Vertex traffic-split rollback to the previous model version is a single command; Cloud Run revisions are pinned and revertible.</a:t>
+            </a:r>
+          </a:p>
+        </p:txBody>
+      </p:sp>
+      <p:sp>
+        <p:nvSpPr>
+          <p:cNvPr id="5" name="Rectangle 4"/>
           <p:cNvSpPr/>
           <p:nvPr/>
         </p:nvSpPr>
@@ -5931,7 +5723,7 @@
       </p:sp>
       <p:sp>
         <p:nvSpPr>
-          <p:cNvPr id="21" name="TextBox 20"/>
+          <p:cNvPr id="6" name="TextBox 5"/>
           <p:cNvSpPr txBox="1"/>
           <p:nvPr/>
         </p:nvSpPr>
@@ -5959,7 +5751,7 @@
                 </a:solidFill>
                 <a:latin typeface="Calibri"/>
               </a:rPr>
-              <a:t>13 / 15</a:t>
+              <a:t>13 / 16</a:t>
             </a:r>
           </a:p>
         </p:txBody>
@@ -6029,7 +5821,7 @@
                 </a:solidFill>
                 <a:latin typeface="Calibri"/>
               </a:rPr>
-              <a:t>NEXT STEPS TO UNLOCK VALUE</a:t>
+              <a:t>FROM HERE TO PRODUCTION</a:t>
             </a:r>
           </a:p>
           <a:p>
@@ -6040,7 +5832,7 @@
                 </a:solidFill>
                 <a:latin typeface="Calibri"/>
               </a:rPr>
-              <a:t>What we need from you</a:t>
+              <a:t>Delivery roadmap</a:t>
             </a:r>
           </a:p>
         </p:txBody>
@@ -6090,14 +5882,183 @@
       </p:sp>
       <p:sp>
         <p:nvSpPr>
-          <p:cNvPr id="4" name="TextBox 3"/>
+          <p:cNvPr id="4" name="Rounded Rectangle 3"/>
+          <p:cNvSpPr/>
+          <p:nvPr/>
+        </p:nvSpPr>
+        <p:spPr>
+          <a:xfrm>
+            <a:off x="502920" y="1188720"/>
+            <a:ext cx="3840480" cy="3657600"/>
+          </a:xfrm>
+          <a:prstGeom prst="roundRect">
+            <a:avLst>
+              <a:gd name="adj" fmla="val 5000"/>
+            </a:avLst>
+          </a:prstGeom>
+          <a:solidFill>
+            <a:srgbClr val="FFFFFF"/>
+          </a:solidFill>
+          <a:ln w="9525">
+            <a:solidFill>
+              <a:srgbClr val="D7DBE3"/>
+            </a:solidFill>
+          </a:ln>
+        </p:spPr>
+        <p:style>
+          <a:lnRef idx="1">
+            <a:schemeClr val="accent1"/>
+          </a:lnRef>
+          <a:fillRef idx="3">
+            <a:schemeClr val="accent1"/>
+          </a:fillRef>
+          <a:effectRef idx="2">
+            <a:schemeClr val="accent1"/>
+          </a:effectRef>
+          <a:fontRef idx="minor">
+            <a:schemeClr val="lt1"/>
+          </a:fontRef>
+        </p:style>
+        <p:txBody>
+          <a:bodyPr rtlCol="0" anchor="ctr"/>
+          <a:lstStyle/>
+          <a:p>
+            <a:pPr algn="ctr"/>
+          </a:p>
+        </p:txBody>
+      </p:sp>
+      <p:sp>
+        <p:nvSpPr>
+          <p:cNvPr id="5" name="Rectangle 4"/>
+          <p:cNvSpPr/>
+          <p:nvPr/>
+        </p:nvSpPr>
+        <p:spPr>
+          <a:xfrm>
+            <a:off x="502920" y="1188720"/>
+            <a:ext cx="3840480" cy="502920"/>
+          </a:xfrm>
+          <a:prstGeom prst="rect">
+            <a:avLst/>
+          </a:prstGeom>
+          <a:solidFill>
+            <a:srgbClr val="1F8A4F"/>
+          </a:solidFill>
+          <a:ln>
+            <a:noFill/>
+          </a:ln>
+        </p:spPr>
+        <p:style>
+          <a:lnRef idx="1">
+            <a:schemeClr val="accent1"/>
+          </a:lnRef>
+          <a:fillRef idx="3">
+            <a:schemeClr val="accent1"/>
+          </a:fillRef>
+          <a:effectRef idx="2">
+            <a:schemeClr val="accent1"/>
+          </a:effectRef>
+          <a:fontRef idx="minor">
+            <a:schemeClr val="lt1"/>
+          </a:fontRef>
+        </p:style>
+        <p:txBody>
+          <a:bodyPr rtlCol="0" anchor="ctr"/>
+          <a:lstStyle/>
+          <a:p>
+            <a:pPr algn="ctr"/>
+          </a:p>
+        </p:txBody>
+      </p:sp>
+      <p:sp>
+        <p:nvSpPr>
+          <p:cNvPr id="6" name="TextBox 5"/>
           <p:cNvSpPr txBox="1"/>
           <p:nvPr/>
         </p:nvSpPr>
         <p:spPr>
           <a:xfrm>
-            <a:off x="548640" y="1143000"/>
-            <a:ext cx="11094415" cy="5303520"/>
+            <a:off x="685800" y="1252728"/>
+            <a:ext cx="3474720" cy="457200"/>
+          </a:xfrm>
+          <a:prstGeom prst="rect">
+            <a:avLst/>
+          </a:prstGeom>
+          <a:noFill/>
+        </p:spPr>
+        <p:txBody>
+          <a:bodyPr wrap="none">
+            <a:spAutoFit/>
+          </a:bodyPr>
+          <a:lstStyle/>
+          <a:p>
+            <a:r>
+              <a:rPr sz="1100" b="1" i="0">
+                <a:solidFill>
+                  <a:srgbClr val="FFFFFF"/>
+                </a:solidFill>
+                <a:latin typeface="Calibri"/>
+              </a:rPr>
+              <a:t>Phase 1</a:t>
+            </a:r>
+          </a:p>
+          <a:p>
+            <a:r>
+              <a:rPr sz="1500" b="1" i="0">
+                <a:solidFill>
+                  <a:srgbClr val="FFFFFF"/>
+                </a:solidFill>
+                <a:latin typeface="Calibri"/>
+              </a:rPr>
+              <a:t>Platform &amp; schema</a:t>
+            </a:r>
+          </a:p>
+        </p:txBody>
+      </p:sp>
+      <p:sp>
+        <p:nvSpPr>
+          <p:cNvPr id="7" name="TextBox 6"/>
+          <p:cNvSpPr txBox="1"/>
+          <p:nvPr/>
+        </p:nvSpPr>
+        <p:spPr>
+          <a:xfrm>
+            <a:off x="685800" y="1874520"/>
+            <a:ext cx="3474720" cy="274320"/>
+          </a:xfrm>
+          <a:prstGeom prst="rect">
+            <a:avLst/>
+          </a:prstGeom>
+          <a:noFill/>
+        </p:spPr>
+        <p:txBody>
+          <a:bodyPr wrap="none">
+            <a:spAutoFit/>
+          </a:bodyPr>
+          <a:lstStyle/>
+          <a:p>
+            <a:r>
+              <a:rPr sz="1000" b="1" i="0">
+                <a:solidFill>
+                  <a:srgbClr val="1F8A4F"/>
+                </a:solidFill>
+                <a:latin typeface="Calibri"/>
+              </a:rPr>
+              <a:t>COMPLETE</a:t>
+            </a:r>
+          </a:p>
+        </p:txBody>
+      </p:sp>
+      <p:sp>
+        <p:nvSpPr>
+          <p:cNvPr id="8" name="TextBox 7"/>
+          <p:cNvSpPr txBox="1"/>
+          <p:nvPr/>
+        </p:nvSpPr>
+        <p:spPr>
+          <a:xfrm>
+            <a:off x="731520" y="2240280"/>
+            <a:ext cx="3383280" cy="2468880"/>
           </a:xfrm>
           <a:prstGeom prst="rect">
             <a:avLst/>
@@ -6112,233 +6073,727 @@
           <a:p>
             <a:pPr>
               <a:lnSpc>
-                <a:spcPct val="120000"/>
-              </a:lnSpc>
-              <a:spcAft>
-                <a:spcPts val="600"/>
-              </a:spcAft>
-            </a:pPr>
-            <a:r>
-              <a:rPr sz="1800" b="1" i="0">
+                <a:spcPct val="125000"/>
+              </a:lnSpc>
+            </a:pPr>
+            <a:r>
+              <a:rPr sz="1200" b="1" i="0">
+                <a:solidFill>
+                  <a:srgbClr val="1F8A4F"/>
+                </a:solidFill>
+                <a:latin typeface="Calibri"/>
+              </a:rPr>
+              <a:t>✓  </a:t>
+            </a:r>
+            <a:r>
+              <a:rPr sz="1200" b="0" i="0">
+                <a:solidFill>
+                  <a:srgbClr val="333F52"/>
+                </a:solidFill>
+                <a:latin typeface="Calibri"/>
+              </a:rPr>
+              <a:t>Credit Cards schema end-to-end</a:t>
+            </a:r>
+          </a:p>
+          <a:p>
+            <a:pPr>
+              <a:lnSpc>
+                <a:spcPct val="125000"/>
+              </a:lnSpc>
+            </a:pPr>
+            <a:r>
+              <a:rPr sz="1200" b="1" i="0">
+                <a:solidFill>
+                  <a:srgbClr val="1F8A4F"/>
+                </a:solidFill>
+                <a:latin typeface="Calibri"/>
+              </a:rPr>
+              <a:t>✓  </a:t>
+            </a:r>
+            <a:r>
+              <a:rPr sz="1200" b="0" i="0">
+                <a:solidFill>
+                  <a:srgbClr val="333F52"/>
+                </a:solidFill>
+                <a:latin typeface="Calibri"/>
+              </a:rPr>
+              <a:t>Phoebe behavioural features wired</a:t>
+            </a:r>
+          </a:p>
+          <a:p>
+            <a:pPr>
+              <a:lnSpc>
+                <a:spcPct val="125000"/>
+              </a:lnSpc>
+            </a:pPr>
+            <a:r>
+              <a:rPr sz="1200" b="1" i="0">
+                <a:solidFill>
+                  <a:srgbClr val="1F8A4F"/>
+                </a:solidFill>
+                <a:latin typeface="Calibri"/>
+              </a:rPr>
+              <a:t>✓  </a:t>
+            </a:r>
+            <a:r>
+              <a:rPr sz="1200" b="0" i="0">
+                <a:solidFill>
+                  <a:srgbClr val="333F52"/>
+                </a:solidFill>
+                <a:latin typeface="Calibri"/>
+              </a:rPr>
+              <a:t>Demo dashboard live</a:t>
+            </a:r>
+          </a:p>
+          <a:p>
+            <a:pPr>
+              <a:lnSpc>
+                <a:spcPct val="125000"/>
+              </a:lnSpc>
+            </a:pPr>
+            <a:r>
+              <a:rPr sz="1200" b="1" i="0">
+                <a:solidFill>
+                  <a:srgbClr val="1F8A4F"/>
+                </a:solidFill>
+                <a:latin typeface="Calibri"/>
+              </a:rPr>
+              <a:t>✓  </a:t>
+            </a:r>
+            <a:r>
+              <a:rPr sz="1200" b="0" i="0">
+                <a:solidFill>
+                  <a:srgbClr val="333F52"/>
+                </a:solidFill>
+                <a:latin typeface="Calibri"/>
+              </a:rPr>
+              <a:t>Drift + coverage alerting in place</a:t>
+            </a:r>
+          </a:p>
+        </p:txBody>
+      </p:sp>
+      <p:sp>
+        <p:nvSpPr>
+          <p:cNvPr id="9" name="Rounded Rectangle 8"/>
+          <p:cNvSpPr/>
+          <p:nvPr/>
+        </p:nvSpPr>
+        <p:spPr>
+          <a:xfrm>
+            <a:off x="4572000" y="1188720"/>
+            <a:ext cx="3840480" cy="3657600"/>
+          </a:xfrm>
+          <a:prstGeom prst="roundRect">
+            <a:avLst>
+              <a:gd name="adj" fmla="val 5000"/>
+            </a:avLst>
+          </a:prstGeom>
+          <a:solidFill>
+            <a:srgbClr val="FFFFFF"/>
+          </a:solidFill>
+          <a:ln w="9525">
+            <a:solidFill>
+              <a:srgbClr val="D7DBE3"/>
+            </a:solidFill>
+          </a:ln>
+        </p:spPr>
+        <p:style>
+          <a:lnRef idx="1">
+            <a:schemeClr val="accent1"/>
+          </a:lnRef>
+          <a:fillRef idx="3">
+            <a:schemeClr val="accent1"/>
+          </a:fillRef>
+          <a:effectRef idx="2">
+            <a:schemeClr val="accent1"/>
+          </a:effectRef>
+          <a:fontRef idx="minor">
+            <a:schemeClr val="lt1"/>
+          </a:fontRef>
+        </p:style>
+        <p:txBody>
+          <a:bodyPr rtlCol="0" anchor="ctr"/>
+          <a:lstStyle/>
+          <a:p>
+            <a:pPr algn="ctr"/>
+          </a:p>
+        </p:txBody>
+      </p:sp>
+      <p:sp>
+        <p:nvSpPr>
+          <p:cNvPr id="10" name="Rectangle 9"/>
+          <p:cNvSpPr/>
+          <p:nvPr/>
+        </p:nvSpPr>
+        <p:spPr>
+          <a:xfrm>
+            <a:off x="4572000" y="1188720"/>
+            <a:ext cx="3840480" cy="502920"/>
+          </a:xfrm>
+          <a:prstGeom prst="rect">
+            <a:avLst/>
+          </a:prstGeom>
+          <a:solidFill>
+            <a:srgbClr val="D97306"/>
+          </a:solidFill>
+          <a:ln>
+            <a:noFill/>
+          </a:ln>
+        </p:spPr>
+        <p:style>
+          <a:lnRef idx="1">
+            <a:schemeClr val="accent1"/>
+          </a:lnRef>
+          <a:fillRef idx="3">
+            <a:schemeClr val="accent1"/>
+          </a:fillRef>
+          <a:effectRef idx="2">
+            <a:schemeClr val="accent1"/>
+          </a:effectRef>
+          <a:fontRef idx="minor">
+            <a:schemeClr val="lt1"/>
+          </a:fontRef>
+        </p:style>
+        <p:txBody>
+          <a:bodyPr rtlCol="0" anchor="ctr"/>
+          <a:lstStyle/>
+          <a:p>
+            <a:pPr algn="ctr"/>
+          </a:p>
+        </p:txBody>
+      </p:sp>
+      <p:sp>
+        <p:nvSpPr>
+          <p:cNvPr id="11" name="TextBox 10"/>
+          <p:cNvSpPr txBox="1"/>
+          <p:nvPr/>
+        </p:nvSpPr>
+        <p:spPr>
+          <a:xfrm>
+            <a:off x="4754880" y="1252728"/>
+            <a:ext cx="3474720" cy="457200"/>
+          </a:xfrm>
+          <a:prstGeom prst="rect">
+            <a:avLst/>
+          </a:prstGeom>
+          <a:noFill/>
+        </p:spPr>
+        <p:txBody>
+          <a:bodyPr wrap="none">
+            <a:spAutoFit/>
+          </a:bodyPr>
+          <a:lstStyle/>
+          <a:p>
+            <a:r>
+              <a:rPr sz="1100" b="1" i="0">
+                <a:solidFill>
+                  <a:srgbClr val="FFFFFF"/>
+                </a:solidFill>
+                <a:latin typeface="Calibri"/>
+              </a:rPr>
+              <a:t>Phase 2</a:t>
+            </a:r>
+          </a:p>
+          <a:p>
+            <a:r>
+              <a:rPr sz="1500" b="1" i="0">
+                <a:solidFill>
+                  <a:srgbClr val="FFFFFF"/>
+                </a:solidFill>
+                <a:latin typeface="Calibri"/>
+              </a:rPr>
+              <a:t>Real data (50% → 80%)</a:t>
+            </a:r>
+          </a:p>
+        </p:txBody>
+      </p:sp>
+      <p:sp>
+        <p:nvSpPr>
+          <p:cNvPr id="12" name="TextBox 11"/>
+          <p:cNvSpPr txBox="1"/>
+          <p:nvPr/>
+        </p:nvSpPr>
+        <p:spPr>
+          <a:xfrm>
+            <a:off x="4754880" y="1874520"/>
+            <a:ext cx="3474720" cy="274320"/>
+          </a:xfrm>
+          <a:prstGeom prst="rect">
+            <a:avLst/>
+          </a:prstGeom>
+          <a:noFill/>
+        </p:spPr>
+        <p:txBody>
+          <a:bodyPr wrap="none">
+            <a:spAutoFit/>
+          </a:bodyPr>
+          <a:lstStyle/>
+          <a:p>
+            <a:r>
+              <a:rPr sz="1000" b="1" i="0">
+                <a:solidFill>
+                  <a:srgbClr val="D97306"/>
+                </a:solidFill>
+                <a:latin typeface="Calibri"/>
+              </a:rPr>
+              <a:t>PENDING CLIENT</a:t>
+            </a:r>
+          </a:p>
+        </p:txBody>
+      </p:sp>
+      <p:sp>
+        <p:nvSpPr>
+          <p:cNvPr id="13" name="TextBox 12"/>
+          <p:cNvSpPr txBox="1"/>
+          <p:nvPr/>
+        </p:nvSpPr>
+        <p:spPr>
+          <a:xfrm>
+            <a:off x="4800600" y="2240280"/>
+            <a:ext cx="3383280" cy="2468880"/>
+          </a:xfrm>
+          <a:prstGeom prst="rect">
+            <a:avLst/>
+          </a:prstGeom>
+          <a:noFill/>
+        </p:spPr>
+        <p:txBody>
+          <a:bodyPr wrap="square">
+            <a:spAutoFit/>
+          </a:bodyPr>
+          <a:lstStyle/>
+          <a:p>
+            <a:pPr>
+              <a:lnSpc>
+                <a:spcPct val="125000"/>
+              </a:lnSpc>
+            </a:pPr>
+            <a:r>
+              <a:rPr sz="1200" b="1" i="0">
+                <a:solidFill>
+                  <a:srgbClr val="D97306"/>
+                </a:solidFill>
+                <a:latin typeface="Calibri"/>
+              </a:rPr>
+              <a:t>•  </a:t>
+            </a:r>
+            <a:r>
+              <a:rPr sz="1200" b="0" i="0">
+                <a:solidFill>
+                  <a:srgbClr val="333F52"/>
+                </a:solidFill>
+                <a:latin typeface="Calibri"/>
+              </a:rPr>
+              <a:t>GA4 access (OQ-11) granted</a:t>
+            </a:r>
+          </a:p>
+          <a:p>
+            <a:pPr>
+              <a:lnSpc>
+                <a:spcPct val="125000"/>
+              </a:lnSpc>
+            </a:pPr>
+            <a:r>
+              <a:rPr sz="1200" b="1" i="0">
+                <a:solidFill>
+                  <a:srgbClr val="D97306"/>
+                </a:solidFill>
+                <a:latin typeface="Calibri"/>
+              </a:rPr>
+              <a:t>•  </a:t>
+            </a:r>
+            <a:r>
+              <a:rPr sz="1200" b="0" i="0">
+                <a:solidFill>
+                  <a:srgbClr val="333F52"/>
+                </a:solidFill>
+                <a:latin typeface="Calibri"/>
+              </a:rPr>
+              <a:t>Click + ledger sample lands</a:t>
+            </a:r>
+          </a:p>
+          <a:p>
+            <a:pPr>
+              <a:lnSpc>
+                <a:spcPct val="125000"/>
+              </a:lnSpc>
+            </a:pPr>
+            <a:r>
+              <a:rPr sz="1200" b="1" i="0">
+                <a:solidFill>
+                  <a:srgbClr val="D97306"/>
+                </a:solidFill>
+                <a:latin typeface="Calibri"/>
+              </a:rPr>
+              <a:t>•  </a:t>
+            </a:r>
+            <a:r>
+              <a:rPr sz="1200" b="0" i="0">
+                <a:solidFill>
+                  <a:srgbClr val="333F52"/>
+                </a:solidFill>
+                <a:latin typeface="Calibri"/>
+              </a:rPr>
+              <a:t>v1 trained on 50% coverage</a:t>
+            </a:r>
+          </a:p>
+          <a:p>
+            <a:pPr>
+              <a:lnSpc>
+                <a:spcPct val="125000"/>
+              </a:lnSpc>
+            </a:pPr>
+            <a:r>
+              <a:rPr sz="1200" b="1" i="0">
+                <a:solidFill>
+                  <a:srgbClr val="D97306"/>
+                </a:solidFill>
+                <a:latin typeface="Calibri"/>
+              </a:rPr>
+              <a:t>•  </a:t>
+            </a:r>
+            <a:r>
+              <a:rPr sz="1200" b="0" i="0">
+                <a:solidFill>
+                  <a:srgbClr val="333F52"/>
+                </a:solidFill>
+                <a:latin typeface="Calibri"/>
+              </a:rPr>
+              <a:t>Canary 10% → 100% on client env</a:t>
+            </a:r>
+          </a:p>
+        </p:txBody>
+      </p:sp>
+      <p:sp>
+        <p:nvSpPr>
+          <p:cNvPr id="14" name="Rounded Rectangle 13"/>
+          <p:cNvSpPr/>
+          <p:nvPr/>
+        </p:nvSpPr>
+        <p:spPr>
+          <a:xfrm>
+            <a:off x="8641080" y="1188720"/>
+            <a:ext cx="3840480" cy="3657600"/>
+          </a:xfrm>
+          <a:prstGeom prst="roundRect">
+            <a:avLst>
+              <a:gd name="adj" fmla="val 5000"/>
+            </a:avLst>
+          </a:prstGeom>
+          <a:solidFill>
+            <a:srgbClr val="FFFFFF"/>
+          </a:solidFill>
+          <a:ln w="9525">
+            <a:solidFill>
+              <a:srgbClr val="D7DBE3"/>
+            </a:solidFill>
+          </a:ln>
+        </p:spPr>
+        <p:style>
+          <a:lnRef idx="1">
+            <a:schemeClr val="accent1"/>
+          </a:lnRef>
+          <a:fillRef idx="3">
+            <a:schemeClr val="accent1"/>
+          </a:fillRef>
+          <a:effectRef idx="2">
+            <a:schemeClr val="accent1"/>
+          </a:effectRef>
+          <a:fontRef idx="minor">
+            <a:schemeClr val="lt1"/>
+          </a:fontRef>
+        </p:style>
+        <p:txBody>
+          <a:bodyPr rtlCol="0" anchor="ctr"/>
+          <a:lstStyle/>
+          <a:p>
+            <a:pPr algn="ctr"/>
+          </a:p>
+        </p:txBody>
+      </p:sp>
+      <p:sp>
+        <p:nvSpPr>
+          <p:cNvPr id="15" name="Rectangle 14"/>
+          <p:cNvSpPr/>
+          <p:nvPr/>
+        </p:nvSpPr>
+        <p:spPr>
+          <a:xfrm>
+            <a:off x="8641080" y="1188720"/>
+            <a:ext cx="3840480" cy="502920"/>
+          </a:xfrm>
+          <a:prstGeom prst="rect">
+            <a:avLst/>
+          </a:prstGeom>
+          <a:solidFill>
+            <a:srgbClr val="0F6E7A"/>
+          </a:solidFill>
+          <a:ln>
+            <a:noFill/>
+          </a:ln>
+        </p:spPr>
+        <p:style>
+          <a:lnRef idx="1">
+            <a:schemeClr val="accent1"/>
+          </a:lnRef>
+          <a:fillRef idx="3">
+            <a:schemeClr val="accent1"/>
+          </a:fillRef>
+          <a:effectRef idx="2">
+            <a:schemeClr val="accent1"/>
+          </a:effectRef>
+          <a:fontRef idx="minor">
+            <a:schemeClr val="lt1"/>
+          </a:fontRef>
+        </p:style>
+        <p:txBody>
+          <a:bodyPr rtlCol="0" anchor="ctr"/>
+          <a:lstStyle/>
+          <a:p>
+            <a:pPr algn="ctr"/>
+          </a:p>
+        </p:txBody>
+      </p:sp>
+      <p:sp>
+        <p:nvSpPr>
+          <p:cNvPr id="16" name="TextBox 15"/>
+          <p:cNvSpPr txBox="1"/>
+          <p:nvPr/>
+        </p:nvSpPr>
+        <p:spPr>
+          <a:xfrm>
+            <a:off x="8823960" y="1252728"/>
+            <a:ext cx="3474720" cy="457200"/>
+          </a:xfrm>
+          <a:prstGeom prst="rect">
+            <a:avLst/>
+          </a:prstGeom>
+          <a:noFill/>
+        </p:spPr>
+        <p:txBody>
+          <a:bodyPr wrap="none">
+            <a:spAutoFit/>
+          </a:bodyPr>
+          <a:lstStyle/>
+          <a:p>
+            <a:r>
+              <a:rPr sz="1100" b="1" i="0">
+                <a:solidFill>
+                  <a:srgbClr val="FFFFFF"/>
+                </a:solidFill>
+                <a:latin typeface="Calibri"/>
+              </a:rPr>
+              <a:t>Phase 3</a:t>
+            </a:r>
+          </a:p>
+          <a:p>
+            <a:r>
+              <a:rPr sz="1500" b="1" i="0">
+                <a:solidFill>
+                  <a:srgbClr val="FFFFFF"/>
+                </a:solidFill>
+                <a:latin typeface="Calibri"/>
+              </a:rPr>
+              <a:t>Cutover &amp; handover</a:t>
+            </a:r>
+          </a:p>
+        </p:txBody>
+      </p:sp>
+      <p:sp>
+        <p:nvSpPr>
+          <p:cNvPr id="17" name="TextBox 16"/>
+          <p:cNvSpPr txBox="1"/>
+          <p:nvPr/>
+        </p:nvSpPr>
+        <p:spPr>
+          <a:xfrm>
+            <a:off x="8823960" y="1874520"/>
+            <a:ext cx="3474720" cy="274320"/>
+          </a:xfrm>
+          <a:prstGeom prst="rect">
+            <a:avLst/>
+          </a:prstGeom>
+          <a:noFill/>
+        </p:spPr>
+        <p:txBody>
+          <a:bodyPr wrap="none">
+            <a:spAutoFit/>
+          </a:bodyPr>
+          <a:lstStyle/>
+          <a:p>
+            <a:r>
+              <a:rPr sz="1000" b="1" i="0">
                 <a:solidFill>
                   <a:srgbClr val="0F6E7A"/>
                 </a:solidFill>
                 <a:latin typeface="Calibri"/>
               </a:rPr>
-              <a:t>Three decisions</a:t>
-            </a:r>
-          </a:p>
-          <a:p>
-            <a:pPr>
-              <a:lnSpc>
-                <a:spcPct val="120000"/>
-              </a:lnSpc>
-              <a:spcAft>
-                <a:spcPts val="300"/>
-              </a:spcAft>
-            </a:pPr>
-            <a:r>
-              <a:rPr sz="1400" b="1" i="0">
-                <a:solidFill>
-                  <a:srgbClr val="D97306"/>
+              <a:t>END-AUGUST 2026</a:t>
+            </a:r>
+          </a:p>
+        </p:txBody>
+      </p:sp>
+      <p:sp>
+        <p:nvSpPr>
+          <p:cNvPr id="18" name="TextBox 17"/>
+          <p:cNvSpPr txBox="1"/>
+          <p:nvPr/>
+        </p:nvSpPr>
+        <p:spPr>
+          <a:xfrm>
+            <a:off x="8869680" y="2240280"/>
+            <a:ext cx="3383280" cy="2468880"/>
+          </a:xfrm>
+          <a:prstGeom prst="rect">
+            <a:avLst/>
+          </a:prstGeom>
+          <a:noFill/>
+        </p:spPr>
+        <p:txBody>
+          <a:bodyPr wrap="square">
+            <a:spAutoFit/>
+          </a:bodyPr>
+          <a:lstStyle/>
+          <a:p>
+            <a:pPr>
+              <a:lnSpc>
+                <a:spcPct val="125000"/>
+              </a:lnSpc>
+            </a:pPr>
+            <a:r>
+              <a:rPr sz="1200" b="1" i="0">
+                <a:solidFill>
+                  <a:srgbClr val="0F6E7A"/>
                 </a:solidFill>
                 <a:latin typeface="Calibri"/>
               </a:rPr>
               <a:t>•  </a:t>
             </a:r>
             <a:r>
-              <a:rPr sz="1400" b="0" i="0">
+              <a:rPr sz="1200" b="0" i="0">
                 <a:solidFill>
                   <a:srgbClr val="333F52"/>
                 </a:solidFill>
                 <a:latin typeface="Calibri"/>
               </a:rPr>
-              <a:t>Sign off the data contract — schema, freshness, and PII handling for click and sales-ledger feeds.</a:t>
-            </a:r>
-          </a:p>
-          <a:p>
-            <a:pPr>
-              <a:lnSpc>
-                <a:spcPct val="120000"/>
-              </a:lnSpc>
-              <a:spcAft>
-                <a:spcPts val="300"/>
-              </a:spcAft>
-            </a:pPr>
-            <a:r>
-              <a:rPr sz="1400" b="1" i="0">
-                <a:solidFill>
-                  <a:srgbClr val="D97306"/>
+              <a:t>v2 retrained on 80% coverage</a:t>
+            </a:r>
+          </a:p>
+          <a:p>
+            <a:pPr>
+              <a:lnSpc>
+                <a:spcPct val="125000"/>
+              </a:lnSpc>
+            </a:pPr>
+            <a:r>
+              <a:rPr sz="1200" b="1" i="0">
+                <a:solidFill>
+                  <a:srgbClr val="0F6E7A"/>
                 </a:solidFill>
                 <a:latin typeface="Calibri"/>
               </a:rPr>
               <a:t>•  </a:t>
             </a:r>
             <a:r>
-              <a:rPr sz="1400" b="0" i="0">
+              <a:rPr sz="1200" b="0" i="0">
                 <a:solidFill>
                   <a:srgbClr val="333F52"/>
                 </a:solidFill>
                 <a:latin typeface="Calibri"/>
               </a:rPr>
-              <a:t>Nominate one data owner and one on-call engineer on your side for joint working sessions.</a:t>
-            </a:r>
-          </a:p>
-          <a:p>
-            <a:pPr>
-              <a:lnSpc>
-                <a:spcPct val="120000"/>
-              </a:lnSpc>
-              <a:spcAft>
-                <a:spcPts val="300"/>
-              </a:spcAft>
-            </a:pPr>
-            <a:r>
-              <a:rPr sz="1400" b="1" i="0">
-                <a:solidFill>
-                  <a:srgbClr val="D97306"/>
+              <a:t>Rollback rehearsed in low traffic</a:t>
+            </a:r>
+          </a:p>
+          <a:p>
+            <a:pPr>
+              <a:lnSpc>
+                <a:spcPct val="125000"/>
+              </a:lnSpc>
+            </a:pPr>
+            <a:r>
+              <a:rPr sz="1200" b="1" i="0">
+                <a:solidFill>
+                  <a:srgbClr val="0F6E7A"/>
                 </a:solidFill>
                 <a:latin typeface="Calibri"/>
               </a:rPr>
               <a:t>•  </a:t>
             </a:r>
             <a:r>
-              <a:rPr sz="1400" b="0" i="0">
+              <a:rPr sz="1200" b="0" i="0">
                 <a:solidFill>
                   <a:srgbClr val="333F52"/>
                 </a:solidFill>
                 <a:latin typeface="Calibri"/>
               </a:rPr>
-              <a:t>Confirm production GCP project (or authorise a prod-isolated namespace in the existing one).</a:t>
-            </a:r>
-          </a:p>
-          <a:p>
-            <a:pPr>
-              <a:lnSpc>
-                <a:spcPct val="120000"/>
-              </a:lnSpc>
-              <a:spcAft>
-                <a:spcPts val="600"/>
-              </a:spcAft>
-            </a:pPr>
-            <a:r>
-              <a:rPr sz="1800" b="1" i="0">
+              <a:t>Compliance sign-off on ADRs 0004/0005</a:t>
+            </a:r>
+          </a:p>
+          <a:p>
+            <a:pPr>
+              <a:lnSpc>
+                <a:spcPct val="125000"/>
+              </a:lnSpc>
+            </a:pPr>
+            <a:r>
+              <a:rPr sz="1200" b="1" i="0">
                 <a:solidFill>
                   <a:srgbClr val="0F6E7A"/>
                 </a:solidFill>
                 <a:latin typeface="Calibri"/>
               </a:rPr>
-              <a:t>Two artefacts we will share this week</a:t>
-            </a:r>
-          </a:p>
-          <a:p>
-            <a:pPr>
-              <a:lnSpc>
-                <a:spcPct val="120000"/>
-              </a:lnSpc>
-              <a:spcAft>
-                <a:spcPts val="300"/>
-              </a:spcAft>
-            </a:pPr>
-            <a:r>
-              <a:rPr sz="1400" b="1" i="0">
-                <a:solidFill>
-                  <a:srgbClr val="D97306"/>
-                </a:solidFill>
-                <a:latin typeface="Calibri"/>
-              </a:rPr>
               <a:t>•  </a:t>
             </a:r>
             <a:r>
-              <a:rPr sz="1400" b="0" i="0">
+              <a:rPr sz="1200" b="0" i="0">
                 <a:solidFill>
                   <a:srgbClr val="333F52"/>
                 </a:solidFill>
                 <a:latin typeface="Calibri"/>
               </a:rPr>
-              <a:t>A short data-contract template ready for legal and engineering review.</a:t>
-            </a:r>
-          </a:p>
-          <a:p>
-            <a:pPr>
-              <a:lnSpc>
-                <a:spcPct val="120000"/>
-              </a:lnSpc>
-              <a:spcAft>
-                <a:spcPts val="300"/>
-              </a:spcAft>
-            </a:pPr>
-            <a:r>
-              <a:rPr sz="1400" b="1" i="0">
-                <a:solidFill>
-                  <a:srgbClr val="D97306"/>
-                </a:solidFill>
-                <a:latin typeface="Calibri"/>
-              </a:rPr>
-              <a:t>•  </a:t>
-            </a:r>
-            <a:r>
-              <a:rPr sz="1400" b="0" i="0">
-                <a:solidFill>
-                  <a:srgbClr val="333F52"/>
-                </a:solidFill>
-                <a:latin typeface="Calibri"/>
-              </a:rPr>
-              <a:t>Read-only access to the live staging environment for your team to probe.</a:t>
-            </a:r>
-          </a:p>
-          <a:p>
-            <a:pPr>
-              <a:lnSpc>
-                <a:spcPct val="120000"/>
-              </a:lnSpc>
-              <a:spcAft>
-                <a:spcPts val="600"/>
-              </a:spcAft>
-            </a:pPr>
-            <a:r>
-              <a:rPr sz="1800" b="1" i="0">
-                <a:solidFill>
-                  <a:srgbClr val="0F6E7A"/>
-                </a:solidFill>
-                <a:latin typeface="Calibri"/>
-              </a:rPr>
-              <a:t>What you get in eight weeks</a:t>
-            </a:r>
-          </a:p>
-          <a:p>
-            <a:pPr>
-              <a:lnSpc>
-                <a:spcPct val="120000"/>
-              </a:lnSpc>
-              <a:spcAft>
-                <a:spcPts val="300"/>
-              </a:spcAft>
-            </a:pPr>
-            <a:r>
-              <a:rPr sz="1400" b="1" i="0">
-                <a:solidFill>
-                  <a:srgbClr val="D97306"/>
-                </a:solidFill>
-                <a:latin typeface="Calibri"/>
-              </a:rPr>
-              <a:t>•  </a:t>
-            </a:r>
-            <a:r>
-              <a:rPr sz="1400" b="0" i="0">
-                <a:solidFill>
-                  <a:srgbClr val="333F52"/>
-                </a:solidFill>
-                <a:latin typeface="Calibri"/>
-              </a:rPr>
-              <a:t>A production service, on your data, with your on-call team in the cockpit and a signed handover.</a:t>
-            </a:r>
-          </a:p>
-        </p:txBody>
-      </p:sp>
-      <p:sp>
-        <p:nvSpPr>
-          <p:cNvPr id="5" name="Rectangle 4"/>
+              <a:t>Handover to client on-call</a:t>
+            </a:r>
+          </a:p>
+        </p:txBody>
+      </p:sp>
+      <p:sp>
+        <p:nvSpPr>
+          <p:cNvPr id="19" name="TextBox 18"/>
+          <p:cNvSpPr txBox="1"/>
+          <p:nvPr/>
+        </p:nvSpPr>
+        <p:spPr>
+          <a:xfrm>
+            <a:off x="502920" y="4983480"/>
+            <a:ext cx="11185855" cy="640080"/>
+          </a:xfrm>
+          <a:prstGeom prst="rect">
+            <a:avLst/>
+          </a:prstGeom>
+          <a:noFill/>
+        </p:spPr>
+        <p:txBody>
+          <a:bodyPr wrap="none">
+            <a:spAutoFit/>
+          </a:bodyPr>
+          <a:lstStyle/>
+          <a:p>
+            <a:pPr algn="ctr"/>
+            <a:r>
+              <a:rPr sz="1100" b="0" i="1">
+                <a:solidFill>
+                  <a:srgbClr val="6B7380"/>
+                </a:solidFill>
+                <a:latin typeface="Calibri"/>
+              </a:rPr>
+              <a:t>Timeline measured from data-sample arrival, not kickoff. Phase 1 is on staging today; Phase 2 starts the day GA4 access + a sample data export land.</a:t>
+            </a:r>
+          </a:p>
+        </p:txBody>
+      </p:sp>
+      <p:sp>
+        <p:nvSpPr>
+          <p:cNvPr id="20" name="Rectangle 19"/>
           <p:cNvSpPr/>
           <p:nvPr/>
         </p:nvSpPr>
@@ -6390,7 +6845,7 @@
       </p:sp>
       <p:sp>
         <p:nvSpPr>
-          <p:cNvPr id="6" name="TextBox 5"/>
+          <p:cNvPr id="21" name="TextBox 20"/>
           <p:cNvSpPr txBox="1"/>
           <p:nvPr/>
         </p:nvSpPr>
@@ -6418,7 +6873,7 @@
                 </a:solidFill>
                 <a:latin typeface="Calibri"/>
               </a:rPr>
-              <a:t>14 / 15</a:t>
+              <a:t>14 / 16</a:t>
             </a:r>
           </a:p>
         </p:txBody>
@@ -6450,6 +6905,521 @@
         <p:spPr>
           <a:xfrm>
             <a:off x="0" y="0"/>
+            <a:ext cx="12191695" cy="914400"/>
+          </a:xfrm>
+          <a:prstGeom prst="rect">
+            <a:avLst/>
+          </a:prstGeom>
+          <a:solidFill>
+            <a:srgbClr val="0B1F3A"/>
+          </a:solidFill>
+          <a:ln>
+            <a:noFill/>
+          </a:ln>
+        </p:spPr>
+        <p:style>
+          <a:lnRef idx="1">
+            <a:schemeClr val="accent1"/>
+          </a:lnRef>
+          <a:fillRef idx="3">
+            <a:schemeClr val="accent1"/>
+          </a:fillRef>
+          <a:effectRef idx="2">
+            <a:schemeClr val="accent1"/>
+          </a:effectRef>
+          <a:fontRef idx="minor">
+            <a:schemeClr val="lt1"/>
+          </a:fontRef>
+        </p:style>
+        <p:txBody>
+          <a:bodyPr rtlCol="0" anchor="ctr" lIns="548640" tIns="164592" wrap="square"/>
+          <a:lstStyle/>
+          <a:p>
+            <a:pPr algn="ctr"/>
+            <a:r>
+              <a:rPr sz="1000" b="1" i="0">
+                <a:solidFill>
+                  <a:srgbClr val="D97306"/>
+                </a:solidFill>
+                <a:latin typeface="Calibri"/>
+              </a:rPr>
+              <a:t>NEXT STEPS TO UNLOCK VALUE</a:t>
+            </a:r>
+          </a:p>
+          <a:p>
+            <a:r>
+              <a:rPr sz="2400" b="1" i="0">
+                <a:solidFill>
+                  <a:srgbClr val="FFFFFF"/>
+                </a:solidFill>
+                <a:latin typeface="Calibri"/>
+              </a:rPr>
+              <a:t>What we need from you</a:t>
+            </a:r>
+          </a:p>
+        </p:txBody>
+      </p:sp>
+      <p:sp>
+        <p:nvSpPr>
+          <p:cNvPr id="3" name="Rectangle 2"/>
+          <p:cNvSpPr/>
+          <p:nvPr/>
+        </p:nvSpPr>
+        <p:spPr>
+          <a:xfrm>
+            <a:off x="548640" y="868680"/>
+            <a:ext cx="1097280" cy="38100"/>
+          </a:xfrm>
+          <a:prstGeom prst="rect">
+            <a:avLst/>
+          </a:prstGeom>
+          <a:solidFill>
+            <a:srgbClr val="D97306"/>
+          </a:solidFill>
+          <a:ln>
+            <a:noFill/>
+          </a:ln>
+        </p:spPr>
+        <p:style>
+          <a:lnRef idx="1">
+            <a:schemeClr val="accent1"/>
+          </a:lnRef>
+          <a:fillRef idx="3">
+            <a:schemeClr val="accent1"/>
+          </a:fillRef>
+          <a:effectRef idx="2">
+            <a:schemeClr val="accent1"/>
+          </a:effectRef>
+          <a:fontRef idx="minor">
+            <a:schemeClr val="lt1"/>
+          </a:fontRef>
+        </p:style>
+        <p:txBody>
+          <a:bodyPr rtlCol="0" anchor="ctr"/>
+          <a:lstStyle/>
+          <a:p>
+            <a:pPr algn="ctr"/>
+          </a:p>
+        </p:txBody>
+      </p:sp>
+      <p:sp>
+        <p:nvSpPr>
+          <p:cNvPr id="4" name="TextBox 3"/>
+          <p:cNvSpPr txBox="1"/>
+          <p:nvPr/>
+        </p:nvSpPr>
+        <p:spPr>
+          <a:xfrm>
+            <a:off x="548640" y="1143000"/>
+            <a:ext cx="11094415" cy="5303520"/>
+          </a:xfrm>
+          <a:prstGeom prst="rect">
+            <a:avLst/>
+          </a:prstGeom>
+          <a:noFill/>
+        </p:spPr>
+        <p:txBody>
+          <a:bodyPr wrap="square">
+            <a:spAutoFit/>
+          </a:bodyPr>
+          <a:lstStyle/>
+          <a:p>
+            <a:pPr>
+              <a:lnSpc>
+                <a:spcPct val="120000"/>
+              </a:lnSpc>
+              <a:spcAft>
+                <a:spcPts val="600"/>
+              </a:spcAft>
+            </a:pPr>
+            <a:r>
+              <a:rPr sz="1600" b="1" i="0">
+                <a:solidFill>
+                  <a:srgbClr val="0F6E7A"/>
+                </a:solidFill>
+                <a:latin typeface="Calibri"/>
+              </a:rPr>
+              <a:t>Five decisions, in priority order</a:t>
+            </a:r>
+          </a:p>
+          <a:p>
+            <a:pPr>
+              <a:lnSpc>
+                <a:spcPct val="120000"/>
+              </a:lnSpc>
+              <a:spcAft>
+                <a:spcPts val="300"/>
+              </a:spcAft>
+            </a:pPr>
+            <a:r>
+              <a:rPr sz="1200" b="1" i="0">
+                <a:solidFill>
+                  <a:srgbClr val="D97306"/>
+                </a:solidFill>
+                <a:latin typeface="Calibri"/>
+              </a:rPr>
+              <a:t>•  </a:t>
+            </a:r>
+            <a:r>
+              <a:rPr sz="1200" b="0" i="0">
+                <a:solidFill>
+                  <a:srgbClr val="333F52"/>
+                </a:solidFill>
+                <a:latin typeface="Calibri"/>
+              </a:rPr>
+              <a:t>GA4 access (OQ-11) — read on the Credit Cards analytics_&lt;property&gt; dataset. This is the critical path; everything downstream slips a week per week this slides.</a:t>
+            </a:r>
+          </a:p>
+          <a:p>
+            <a:pPr>
+              <a:lnSpc>
+                <a:spcPct val="120000"/>
+              </a:lnSpc>
+              <a:spcAft>
+                <a:spcPts val="300"/>
+              </a:spcAft>
+            </a:pPr>
+            <a:r>
+              <a:rPr sz="1200" b="1" i="0">
+                <a:solidFill>
+                  <a:srgbClr val="D97306"/>
+                </a:solidFill>
+                <a:latin typeface="Calibri"/>
+              </a:rPr>
+              <a:t>•  </a:t>
+            </a:r>
+            <a:r>
+              <a:rPr sz="1200" b="0" i="0">
+                <a:solidFill>
+                  <a:srgbClr val="333F52"/>
+                </a:solidFill>
+                <a:latin typeface="Calibri"/>
+              </a:rPr>
+              <a:t>Confirm GA4 event taxonomy (OQ-12) — which event_name values map to 'calculator used', 'guide read', 'card compare'. Best-current-guess in our staging schema; one working session to validate.</a:t>
+            </a:r>
+          </a:p>
+          <a:p>
+            <a:pPr>
+              <a:lnSpc>
+                <a:spcPct val="120000"/>
+              </a:lnSpc>
+              <a:spcAft>
+                <a:spcPts val="300"/>
+              </a:spcAft>
+            </a:pPr>
+            <a:r>
+              <a:rPr sz="1200" b="1" i="0">
+                <a:solidFill>
+                  <a:srgbClr val="D97306"/>
+                </a:solidFill>
+                <a:latin typeface="Calibri"/>
+              </a:rPr>
+              <a:t>•  </a:t>
+            </a:r>
+            <a:r>
+              <a:rPr sz="1200" b="0" i="0">
+                <a:solidFill>
+                  <a:srgbClr val="333F52"/>
+                </a:solidFill>
+                <a:latin typeface="Calibri"/>
+              </a:rPr>
+              <a:t>Click → cookie join key (OQ-13) — server-side CM360 + GA4 merge, first-party-cookie pass-through, or no-join. Decides whether Phoebe lifts the live model.</a:t>
+            </a:r>
+          </a:p>
+          <a:p>
+            <a:pPr>
+              <a:lnSpc>
+                <a:spcPct val="120000"/>
+              </a:lnSpc>
+              <a:spcAft>
+                <a:spcPts val="300"/>
+              </a:spcAft>
+            </a:pPr>
+            <a:r>
+              <a:rPr sz="1200" b="1" i="0">
+                <a:solidFill>
+                  <a:srgbClr val="D97306"/>
+                </a:solidFill>
+                <a:latin typeface="Calibri"/>
+              </a:rPr>
+              <a:t>•  </a:t>
+            </a:r>
+            <a:r>
+              <a:rPr sz="1200" b="0" i="0">
+                <a:solidFill>
+                  <a:srgbClr val="333F52"/>
+                </a:solidFill>
+                <a:latin typeface="Calibri"/>
+              </a:rPr>
+              <a:t>GCP project (OQ-1) — client's own or a namespaced env in our msm-rpc project. We can move either way; the deploy-client-cc CD job is already wired and gated on the decision.</a:t>
+            </a:r>
+          </a:p>
+          <a:p>
+            <a:pPr>
+              <a:lnSpc>
+                <a:spcPct val="120000"/>
+              </a:lnSpc>
+              <a:spcAft>
+                <a:spcPts val="300"/>
+              </a:spcAft>
+            </a:pPr>
+            <a:r>
+              <a:rPr sz="1200" b="1" i="0">
+                <a:solidFill>
+                  <a:srgbClr val="D97306"/>
+                </a:solidFill>
+                <a:latin typeface="Calibri"/>
+              </a:rPr>
+              <a:t>•  </a:t>
+            </a:r>
+            <a:r>
+              <a:rPr sz="1200" b="0" i="0">
+                <a:solidFill>
+                  <a:srgbClr val="333F52"/>
+                </a:solidFill>
+                <a:latin typeface="Calibri"/>
+              </a:rPr>
+              <a:t>Compliance contact + sign-off on ADRs 0004 (FCA boundary) and 0005 (GA4 PII boundary). Two named contacts: one data owner + one engineering lead.</a:t>
+            </a:r>
+          </a:p>
+          <a:p>
+            <a:pPr>
+              <a:lnSpc>
+                <a:spcPct val="120000"/>
+              </a:lnSpc>
+              <a:spcAft>
+                <a:spcPts val="600"/>
+              </a:spcAft>
+            </a:pPr>
+            <a:r>
+              <a:rPr sz="1600" b="1" i="0">
+                <a:solidFill>
+                  <a:srgbClr val="0F6E7A"/>
+                </a:solidFill>
+                <a:latin typeface="Calibri"/>
+              </a:rPr>
+              <a:t>What you also get</a:t>
+            </a:r>
+          </a:p>
+          <a:p>
+            <a:pPr>
+              <a:lnSpc>
+                <a:spcPct val="120000"/>
+              </a:lnSpc>
+              <a:spcAft>
+                <a:spcPts val="300"/>
+              </a:spcAft>
+            </a:pPr>
+            <a:r>
+              <a:rPr sz="1200" b="1" i="0">
+                <a:solidFill>
+                  <a:srgbClr val="D97306"/>
+                </a:solidFill>
+                <a:latin typeface="Calibri"/>
+              </a:rPr>
+              <a:t>•  </a:t>
+            </a:r>
+            <a:r>
+              <a:rPr sz="1200" b="0" i="0">
+                <a:solidFill>
+                  <a:srgbClr val="333F52"/>
+                </a:solidFill>
+                <a:latin typeface="Calibri"/>
+              </a:rPr>
+              <a:t>The Car Insurance failure summary from Ryan refines our 'designed against' tile from speculation to confirmed mitigations.</a:t>
+            </a:r>
+          </a:p>
+          <a:p>
+            <a:pPr>
+              <a:lnSpc>
+                <a:spcPct val="120000"/>
+              </a:lnSpc>
+              <a:spcAft>
+                <a:spcPts val="300"/>
+              </a:spcAft>
+            </a:pPr>
+            <a:r>
+              <a:rPr sz="1200" b="1" i="0">
+                <a:solidFill>
+                  <a:srgbClr val="D97306"/>
+                </a:solidFill>
+                <a:latin typeface="Calibri"/>
+              </a:rPr>
+              <a:t>•  </a:t>
+            </a:r>
+            <a:r>
+              <a:rPr sz="1200" b="0" i="0">
+                <a:solidFill>
+                  <a:srgbClr val="333F52"/>
+                </a:solidFill>
+                <a:latin typeface="Calibri"/>
+              </a:rPr>
+              <a:t>Read-only access to the live staging environment for your team to probe.</a:t>
+            </a:r>
+          </a:p>
+          <a:p>
+            <a:pPr>
+              <a:lnSpc>
+                <a:spcPct val="120000"/>
+              </a:lnSpc>
+              <a:spcAft>
+                <a:spcPts val="600"/>
+              </a:spcAft>
+            </a:pPr>
+            <a:r>
+              <a:rPr sz="1600" b="1" i="0">
+                <a:solidFill>
+                  <a:srgbClr val="0F6E7A"/>
+                </a:solidFill>
+                <a:latin typeface="Calibri"/>
+              </a:rPr>
+              <a:t>What you get at the end</a:t>
+            </a:r>
+          </a:p>
+          <a:p>
+            <a:pPr>
+              <a:lnSpc>
+                <a:spcPct val="120000"/>
+              </a:lnSpc>
+              <a:spcAft>
+                <a:spcPts val="300"/>
+              </a:spcAft>
+            </a:pPr>
+            <a:r>
+              <a:rPr sz="1200" b="1" i="0">
+                <a:solidFill>
+                  <a:srgbClr val="D97306"/>
+                </a:solidFill>
+                <a:latin typeface="Calibri"/>
+              </a:rPr>
+              <a:t>•  </a:t>
+            </a:r>
+            <a:r>
+              <a:rPr sz="1200" b="0" i="0">
+                <a:solidFill>
+                  <a:srgbClr val="333F52"/>
+                </a:solidFill>
+                <a:latin typeface="Calibri"/>
+              </a:rPr>
+              <a:t>A production service, on your data, with your on-call team in the cockpit and a signed handover by end-August.</a:t>
+            </a:r>
+          </a:p>
+        </p:txBody>
+      </p:sp>
+      <p:sp>
+        <p:nvSpPr>
+          <p:cNvPr id="5" name="Rectangle 4"/>
+          <p:cNvSpPr/>
+          <p:nvPr/>
+        </p:nvSpPr>
+        <p:spPr>
+          <a:xfrm>
+            <a:off x="0" y="6537960"/>
+            <a:ext cx="12191695" cy="320040"/>
+          </a:xfrm>
+          <a:prstGeom prst="rect">
+            <a:avLst/>
+          </a:prstGeom>
+          <a:solidFill>
+            <a:srgbClr val="F4F6FA"/>
+          </a:solidFill>
+          <a:ln>
+            <a:noFill/>
+          </a:ln>
+        </p:spPr>
+        <p:style>
+          <a:lnRef idx="1">
+            <a:schemeClr val="accent1"/>
+          </a:lnRef>
+          <a:fillRef idx="3">
+            <a:schemeClr val="accent1"/>
+          </a:fillRef>
+          <a:effectRef idx="2">
+            <a:schemeClr val="accent1"/>
+          </a:effectRef>
+          <a:fontRef idx="minor">
+            <a:schemeClr val="lt1"/>
+          </a:fontRef>
+        </p:style>
+        <p:txBody>
+          <a:bodyPr rtlCol="0" anchor="ctr" lIns="548640" tIns="54864"/>
+          <a:lstStyle/>
+          <a:p>
+            <a:pPr algn="ctr"/>
+            <a:r>
+              <a:rPr sz="900" b="0" i="0">
+                <a:solidFill>
+                  <a:srgbClr val="6B7380"/>
+                </a:solidFill>
+                <a:latin typeface="Calibri"/>
+              </a:rPr>
+              <a:t>Predictive RPC Estimator — Client Demo</a:t>
+            </a:r>
+          </a:p>
+        </p:txBody>
+      </p:sp>
+      <p:sp>
+        <p:nvSpPr>
+          <p:cNvPr id="6" name="TextBox 5"/>
+          <p:cNvSpPr txBox="1"/>
+          <p:nvPr/>
+        </p:nvSpPr>
+        <p:spPr>
+          <a:xfrm>
+            <a:off x="11094415" y="6547104"/>
+            <a:ext cx="914400" cy="274320"/>
+          </a:xfrm>
+          <a:prstGeom prst="rect">
+            <a:avLst/>
+          </a:prstGeom>
+          <a:noFill/>
+        </p:spPr>
+        <p:txBody>
+          <a:bodyPr wrap="none">
+            <a:spAutoFit/>
+          </a:bodyPr>
+          <a:lstStyle/>
+          <a:p>
+            <a:pPr algn="r"/>
+            <a:r>
+              <a:rPr sz="900" b="0" i="0">
+                <a:solidFill>
+                  <a:srgbClr val="6B7380"/>
+                </a:solidFill>
+                <a:latin typeface="Calibri"/>
+              </a:rPr>
+              <a:t>15 / 16</a:t>
+            </a:r>
+          </a:p>
+        </p:txBody>
+      </p:sp>
+    </p:spTree>
+  </p:cSld>
+  <p:clrMapOvr>
+    <a:masterClrMapping/>
+  </p:clrMapOvr>
+</p:sld>
+</file>
+
+<file path=ppt/slides/slide16.xml><?xml version="1.0" encoding="utf-8"?>
+<p:sld xmlns:a="http://schemas.openxmlformats.org/drawingml/2006/main" xmlns:p="http://schemas.openxmlformats.org/presentationml/2006/main" xmlns:r="http://schemas.openxmlformats.org/officeDocument/2006/relationships">
+  <p:cSld>
+    <p:spTree>
+      <p:nvGrpSpPr>
+        <p:cNvPr id="1" name=""/>
+        <p:cNvGrpSpPr/>
+        <p:nvPr/>
+      </p:nvGrpSpPr>
+      <p:grpSpPr/>
+      <p:sp>
+        <p:nvSpPr>
+          <p:cNvPr id="2" name="Rectangle 1"/>
+          <p:cNvSpPr/>
+          <p:nvPr/>
+        </p:nvSpPr>
+        <p:spPr>
+          <a:xfrm>
+            <a:off x="0" y="0"/>
             <a:ext cx="12191695" cy="6858000"/>
           </a:xfrm>
           <a:prstGeom prst="rect">
@@ -6790,7 +7760,7 @@
                 </a:solidFill>
                 <a:latin typeface="Calibri"/>
               </a:rPr>
-              <a:t>A production-grade revenue forecasting service is operational.</a:t>
+              <a:t>A production-grade revenue forecasting service, Credit-Cards-shaped, on staging.</a:t>
             </a:r>
           </a:p>
           <a:p>
@@ -6809,7 +7779,7 @@
                 </a:solidFill>
                 <a:latin typeface="Calibri"/>
               </a:rPr>
-              <a:t>We have built and deployed an end-to-end machine-learning service that predicts revenue-per-click in real time, with the engineering controls required to run it safely in production. You can run the live model yourself in today's demo.</a:t>
+              <a:t>End-to-end machine-learning service predicting revenue-per-click in real time — with the Credit Cards feature schema, the 90-day reconciliation window, the safety net, and four demo-grade visualisations purpose-built for this conversation.</a:t>
             </a:r>
           </a:p>
           <a:p>
@@ -6828,7 +7798,7 @@
                 </a:solidFill>
                 <a:latin typeface="Calibri"/>
               </a:rPr>
-              <a:t>Three things to take away today</a:t>
+              <a:t>Four things to take away today</a:t>
             </a:r>
           </a:p>
           <a:p>
@@ -6856,7 +7826,7 @@
                 </a:solidFill>
                 <a:latin typeface="Calibri"/>
               </a:rPr>
-              <a:t>Working software you can touch — a browser-based dashboard fronts the live model on Google Cloud, with measured p95 latency under one second.</a:t>
+              <a:t>A live model you can drive — describe a Credit Cards click in business language, press Predict, see the predicted bid, the value-based vs flat-tCPA comparison, and the explanation, all under a second.</a:t>
             </a:r>
           </a:p>
           <a:p>
@@ -6884,7 +7854,7 @@
                 </a:solidFill>
                 <a:latin typeface="Calibri"/>
               </a:rPr>
-              <a:t>Explainable by default — every prediction returns per-feature attributions, rendered alongside the price so finance and compliance can audit any decision.</a:t>
+              <a:t>The behavioural-signal layer (Phoebe / GA4) is wired into the schema and the dashboard, day one — see the user-journey animation drive the bid in real time.</a:t>
             </a:r>
           </a:p>
           <a:p>
@@ -6912,7 +7882,35 @@
                 </a:solidFill>
                 <a:latin typeface="Calibri"/>
               </a:rPr>
-              <a:t>Production engineering — circuit breakers, drift monitoring, alerting, runbooks, and a tested rollback path are all in place; a clear path to your real data follows in eight weeks.</a:t>
+              <a:t>Three failure modes commonly seen in prior value-based-bidding attempts are addressed in the platform, with the file references to prove it.</a:t>
+            </a:r>
+          </a:p>
+          <a:p>
+            <a:pPr>
+              <a:lnSpc>
+                <a:spcPct val="120000"/>
+              </a:lnSpc>
+              <a:spcAft>
+                <a:spcPts val="300"/>
+              </a:spcAft>
+            </a:pPr>
+            <a:r>
+              <a:rPr sz="1400" b="1" i="0">
+                <a:solidFill>
+                  <a:srgbClr val="D97306"/>
+                </a:solidFill>
+                <a:latin typeface="Calibri"/>
+              </a:rPr>
+              <a:t>•  </a:t>
+            </a:r>
+            <a:r>
+              <a:rPr sz="1400" b="0" i="0">
+                <a:solidFill>
+                  <a:srgbClr val="333F52"/>
+                </a:solidFill>
+                <a:latin typeface="Calibri"/>
+              </a:rPr>
+              <a:t>A clear path to your real data: 50% → 80% coverage trajectory fits the model lifecycle. End-August cutover is the target; the schema, dashboards, alerts, and CD path are already running on staging.</a:t>
             </a:r>
           </a:p>
         </p:txBody>
@@ -6999,7 +7997,7 @@
                 </a:solidFill>
                 <a:latin typeface="Calibri"/>
               </a:rPr>
-              <a:t>2 / 15</a:t>
+              <a:t>2 / 16</a:t>
             </a:r>
           </a:p>
         </p:txBody>
@@ -7069,7 +8067,7 @@
                 </a:solidFill>
                 <a:latin typeface="Calibri"/>
               </a:rPr>
-              <a:t>WHY THIS MATTERS</a:t>
+              <a:t>WHY THIS VERTICAL, WHY THIS QUARTER</a:t>
             </a:r>
           </a:p>
           <a:p>
@@ -7080,7 +8078,7 @@
                 </a:solidFill>
                 <a:latin typeface="Calibri"/>
               </a:rPr>
-              <a:t>The opportunity</a:t>
+              <a:t>The opportunity — Credit Cards, now</a:t>
             </a:r>
           </a:p>
         </p:txBody>
@@ -7159,13 +8157,13 @@
               </a:spcAft>
             </a:pPr>
             <a:r>
-              <a:rPr sz="1800" b="1" i="0">
+              <a:rPr sz="1700" b="1" i="0">
                 <a:solidFill>
                   <a:srgbClr val="0F6E7A"/>
                 </a:solidFill>
                 <a:latin typeface="Calibri"/>
               </a:rPr>
-              <a:t>Bidding and budget decisions today rely on lagging signals.</a:t>
+              <a:t>Credit Cards PPC is under-using the sales data you already have.</a:t>
             </a:r>
           </a:p>
           <a:p>
@@ -7178,13 +8176,13 @@
               </a:spcAft>
             </a:pPr>
             <a:r>
-              <a:rPr sz="1400" b="0" i="0">
+              <a:rPr sz="1300" b="0" i="0">
                 <a:solidFill>
                   <a:srgbClr val="333F52"/>
                 </a:solidFill>
                 <a:latin typeface="Calibri"/>
               </a:rPr>
-              <a:t>Revenue per click is reconciled days after the fact, from a sales ledger that lives apart from the ad platforms making spend decisions. By the time the numbers settle, the budget has already been committed.</a:t>
+              <a:t>Flat target-CPA bidding treats every Credit Cards click as the same tin of beans. The whales that actually pay back the customer-acquisition cost are over-paid for in one campaign and under-bid in another — and you only find out 90 days later when the ledger reconciles.</a:t>
             </a:r>
           </a:p>
           <a:p>
@@ -7197,13 +8195,13 @@
               </a:spcAft>
             </a:pPr>
             <a:r>
-              <a:rPr sz="1800" b="1" i="0">
+              <a:rPr sz="1700" b="1" i="0">
                 <a:solidFill>
                   <a:srgbClr val="0F6E7A"/>
                 </a:solidFill>
                 <a:latin typeface="Calibri"/>
               </a:rPr>
-              <a:t>What a predictive RPC unlocks</a:t>
+              <a:t>Why act on Credit Cards before the other verticals</a:t>
             </a:r>
           </a:p>
           <a:p>
@@ -7216,7 +8214,7 @@
               </a:spcAft>
             </a:pPr>
             <a:r>
-              <a:rPr sz="1400" b="1" i="0">
+              <a:rPr sz="1300" b="1" i="0">
                 <a:solidFill>
                   <a:srgbClr val="D97306"/>
                 </a:solidFill>
@@ -7225,13 +8223,13 @@
               <a:t>•  </a:t>
             </a:r>
             <a:r>
-              <a:rPr sz="1400" b="0" i="0">
+              <a:rPr sz="1300" b="0" i="0">
                 <a:solidFill>
                   <a:srgbClr val="333F52"/>
                 </a:solidFill>
                 <a:latin typeface="Calibri"/>
               </a:rPr>
-              <a:t>Bid the click that's likely to convert — not the click that already did.</a:t>
+              <a:t>Near-term commercial pressure on the channel — first vertical to pay back the platform investment.</a:t>
             </a:r>
           </a:p>
           <a:p>
@@ -7244,7 +8242,7 @@
               </a:spcAft>
             </a:pPr>
             <a:r>
-              <a:rPr sz="1400" b="1" i="0">
+              <a:rPr sz="1300" b="1" i="0">
                 <a:solidFill>
                   <a:srgbClr val="D97306"/>
                 </a:solidFill>
@@ -7253,13 +8251,13 @@
               <a:t>•  </a:t>
             </a:r>
             <a:r>
-              <a:rPr sz="1400" b="0" i="0">
+              <a:rPr sz="1300" b="0" i="0">
                 <a:solidFill>
                   <a:srgbClr val="333F52"/>
                 </a:solidFill>
                 <a:latin typeface="Calibri"/>
               </a:rPr>
-              <a:t>Reallocate spend within the hour, not the week.</a:t>
+              <a:t>Sales coverage is rising — 50% today to ~80% by end of June. The model lifecycle re-trains as coverage climbs.</a:t>
             </a:r>
           </a:p>
           <a:p>
@@ -7272,7 +8270,7 @@
               </a:spcAft>
             </a:pPr>
             <a:r>
-              <a:rPr sz="1400" b="1" i="0">
+              <a:rPr sz="1300" b="1" i="0">
                 <a:solidFill>
                   <a:srgbClr val="D97306"/>
                 </a:solidFill>
@@ -7281,13 +8279,32 @@
               <a:t>•  </a:t>
             </a:r>
             <a:r>
-              <a:rPr sz="1400" b="0" i="0">
+              <a:rPr sz="1300" b="0" i="0">
                 <a:solidFill>
                   <a:srgbClr val="333F52"/>
                 </a:solidFill>
                 <a:latin typeface="Calibri"/>
               </a:rPr>
-              <a:t>Detect campaign degradation before it shows up in revenue.</a:t>
+              <a:t>Lower risk than Car Insurance: bid-optimisation only, no customer-decisioning surface — keeps the FCA boundary clean.</a:t>
+            </a:r>
+          </a:p>
+          <a:p>
+            <a:pPr>
+              <a:lnSpc>
+                <a:spcPct val="120000"/>
+              </a:lnSpc>
+              <a:spcAft>
+                <a:spcPts val="600"/>
+              </a:spcAft>
+            </a:pPr>
+            <a:r>
+              <a:rPr sz="1700" b="1" i="0">
+                <a:solidFill>
+                  <a:srgbClr val="0F6E7A"/>
+                </a:solidFill>
+                <a:latin typeface="Calibri"/>
+              </a:rPr>
+              <a:t>What a predictive RPC unlocks</a:t>
             </a:r>
           </a:p>
           <a:p>
@@ -7300,7 +8317,7 @@
               </a:spcAft>
             </a:pPr>
             <a:r>
-              <a:rPr sz="1400" b="1" i="0">
+              <a:rPr sz="1300" b="1" i="0">
                 <a:solidFill>
                   <a:srgbClr val="D97306"/>
                 </a:solidFill>
@@ -7309,13 +8326,97 @@
               <a:t>•  </a:t>
             </a:r>
             <a:r>
-              <a:rPr sz="1400" b="0" i="0">
+              <a:rPr sz="1300" b="0" i="0">
                 <a:solidFill>
                   <a:srgbClr val="333F52"/>
                 </a:solidFill>
                 <a:latin typeface="Calibri"/>
               </a:rPr>
-              <a:t>Explain every prediction — auditability for finance and compliance.</a:t>
+              <a:t>Bid the click that's likely to convert — not the click that already did.</a:t>
+            </a:r>
+          </a:p>
+          <a:p>
+            <a:pPr>
+              <a:lnSpc>
+                <a:spcPct val="120000"/>
+              </a:lnSpc>
+              <a:spcAft>
+                <a:spcPts val="300"/>
+              </a:spcAft>
+            </a:pPr>
+            <a:r>
+              <a:rPr sz="1300" b="1" i="0">
+                <a:solidFill>
+                  <a:srgbClr val="D97306"/>
+                </a:solidFill>
+                <a:latin typeface="Calibri"/>
+              </a:rPr>
+              <a:t>•  </a:t>
+            </a:r>
+            <a:r>
+              <a:rPr sz="1300" b="0" i="0">
+                <a:solidFill>
+                  <a:srgbClr val="333F52"/>
+                </a:solidFill>
+                <a:latin typeface="Calibri"/>
+              </a:rPr>
+              <a:t>Reallocate spend within the hour, not the week, with the value-based bid replacing the flat tCPA target.</a:t>
+            </a:r>
+          </a:p>
+          <a:p>
+            <a:pPr>
+              <a:lnSpc>
+                <a:spcPct val="120000"/>
+              </a:lnSpc>
+              <a:spcAft>
+                <a:spcPts val="300"/>
+              </a:spcAft>
+            </a:pPr>
+            <a:r>
+              <a:rPr sz="1300" b="1" i="0">
+                <a:solidFill>
+                  <a:srgbClr val="D97306"/>
+                </a:solidFill>
+                <a:latin typeface="Calibri"/>
+              </a:rPr>
+              <a:t>•  </a:t>
+            </a:r>
+            <a:r>
+              <a:rPr sz="1300" b="0" i="0">
+                <a:solidFill>
+                  <a:srgbClr val="333F52"/>
+                </a:solidFill>
+                <a:latin typeface="Calibri"/>
+              </a:rPr>
+              <a:t>Detect campaign degradation before it shows up in revenue — per-segment drift alerts, week-over-week.</a:t>
+            </a:r>
+          </a:p>
+          <a:p>
+            <a:pPr>
+              <a:lnSpc>
+                <a:spcPct val="120000"/>
+              </a:lnSpc>
+              <a:spcAft>
+                <a:spcPts val="300"/>
+              </a:spcAft>
+            </a:pPr>
+            <a:r>
+              <a:rPr sz="1300" b="1" i="0">
+                <a:solidFill>
+                  <a:srgbClr val="D97306"/>
+                </a:solidFill>
+                <a:latin typeface="Calibri"/>
+              </a:rPr>
+              <a:t>•  </a:t>
+            </a:r>
+            <a:r>
+              <a:rPr sz="1300" b="0" i="0">
+                <a:solidFill>
+                  <a:srgbClr val="333F52"/>
+                </a:solidFill>
+                <a:latin typeface="Calibri"/>
+              </a:rPr>
+              <a:t>Explain every prediction in plain English — auditability for finance and compliance.</a:t>
             </a:r>
           </a:p>
         </p:txBody>
@@ -7402,7 +8503,7 @@
                 </a:solidFill>
                 <a:latin typeface="Calibri"/>
               </a:rPr>
-              <a:t>3 / 15</a:t>
+              <a:t>3 / 16</a:t>
             </a:r>
           </a:p>
         </p:txBody>
@@ -7562,13 +8663,13 @@
               </a:spcAft>
             </a:pPr>
             <a:r>
-              <a:rPr sz="1700" b="1" i="0">
+              <a:rPr sz="1600" b="1" i="0">
                 <a:solidFill>
                   <a:srgbClr val="0F6E7A"/>
                 </a:solidFill>
                 <a:latin typeface="Calibri"/>
               </a:rPr>
-              <a:t>A managed prediction service on Google Cloud, with a browser UI for non-technical users.</a:t>
+              <a:t>A managed prediction service on Google Cloud, sized for Credit Cards.</a:t>
             </a:r>
           </a:p>
           <a:p>
@@ -7581,7 +8682,7 @@
               </a:spcAft>
             </a:pPr>
             <a:r>
-              <a:rPr sz="1300" b="1" i="0">
+              <a:rPr sz="1200" b="1" i="0">
                 <a:solidFill>
                   <a:srgbClr val="D97306"/>
                 </a:solidFill>
@@ -7590,13 +8691,13 @@
               <a:t>•  </a:t>
             </a:r>
             <a:r>
-              <a:rPr sz="1300" b="0" i="0">
+              <a:rPr sz="1200" b="0" i="0">
                 <a:solidFill>
                   <a:srgbClr val="333F52"/>
                 </a:solidFill>
                 <a:latin typeface="Calibri"/>
               </a:rPr>
-              <a:t>Executive dashboard — KPIs, daily forecast-vs-reality charts, residual distribution, and a live model-health panel, all in business language.</a:t>
+              <a:t>Executive dashboard — KPIs in pounds, 90-day default window, product-type filter, coverage-audit panel, active-model-versions panel.</a:t>
             </a:r>
           </a:p>
           <a:p>
@@ -7609,7 +8710,7 @@
               </a:spcAft>
             </a:pPr>
             <a:r>
-              <a:rPr sz="1300" b="1" i="0">
+              <a:rPr sz="1200" b="1" i="0">
                 <a:solidFill>
                   <a:srgbClr val="D97306"/>
                 </a:solidFill>
@@ -7618,13 +8719,13 @@
               <a:t>•  </a:t>
             </a:r>
             <a:r>
-              <a:rPr sz="1300" b="0" i="0">
+              <a:rPr sz="1200" b="0" i="0">
                 <a:solidFill>
                   <a:srgbClr val="333F52"/>
                 </a:solidFill>
                 <a:latin typeface="Calibri"/>
               </a:rPr>
-              <a:t>Interactive prediction — describe a click in eight plain-English fields, press Predict, watch the pipeline execute step-by-step in real time.</a:t>
+              <a:t>Interactive prediction — Credit-Cards-shaped form (product type, card product, query intent, affinity, prior-applicant, income band, two RPC rollups, plus four Phoebe behavioural signals).</a:t>
             </a:r>
           </a:p>
           <a:p>
@@ -7637,7 +8738,7 @@
               </a:spcAft>
             </a:pPr>
             <a:r>
-              <a:rPr sz="1300" b="1" i="0">
+              <a:rPr sz="1200" b="1" i="0">
                 <a:solidFill>
                   <a:srgbClr val="D97306"/>
                 </a:solidFill>
@@ -7646,13 +8747,13 @@
               <a:t>•  </a:t>
             </a:r>
             <a:r>
-              <a:rPr sz="1300" b="0" i="0">
+              <a:rPr sz="1200" b="0" i="0">
                 <a:solidFill>
                   <a:srgbClr val="333F52"/>
                 </a:solidFill>
                 <a:latin typeface="Calibri"/>
               </a:rPr>
-              <a:t>Explainable AI — every prediction returns per-feature attributions, rendered as horizontal bars so anyone can see why the model said what it said.</a:t>
+              <a:t>Hero before/after — same click, side-by-side: flat-tCPA target vs value-based bid vs difference, with a session counter that runs total over time.</a:t>
             </a:r>
           </a:p>
           <a:p>
@@ -7665,7 +8766,7 @@
               </a:spcAft>
             </a:pPr>
             <a:r>
-              <a:rPr sz="1300" b="1" i="0">
+              <a:rPr sz="1200" b="1" i="0">
                 <a:solidFill>
                   <a:srgbClr val="D97306"/>
                 </a:solidFill>
@@ -7674,13 +8775,13 @@
               <a:t>•  </a:t>
             </a:r>
             <a:r>
-              <a:rPr sz="1300" b="0" i="0">
+              <a:rPr sz="1200" b="0" i="0">
                 <a:solidFill>
                   <a:srgbClr val="333F52"/>
                 </a:solidFill>
                 <a:latin typeface="Calibri"/>
               </a:rPr>
-              <a:t>REST API — the same predictions are available programmatically for SA360, SSGTM and downstream activation.</a:t>
+              <a:t>Phoebe journey — animated 6-step replay of a single user's behavioural signal building up and the predicted bid following it.</a:t>
             </a:r>
           </a:p>
           <a:p>
@@ -7693,7 +8794,7 @@
               </a:spcAft>
             </a:pPr>
             <a:r>
-              <a:rPr sz="1300" b="1" i="0">
+              <a:rPr sz="1200" b="1" i="0">
                 <a:solidFill>
                   <a:srgbClr val="D97306"/>
                 </a:solidFill>
@@ -7702,13 +8803,13 @@
               <a:t>•  </a:t>
             </a:r>
             <a:r>
-              <a:rPr sz="1300" b="0" i="0">
+              <a:rPr sz="1200" b="0" i="0">
                 <a:solidFill>
                   <a:srgbClr val="333F52"/>
                 </a:solidFill>
                 <a:latin typeface="Calibri"/>
               </a:rPr>
-              <a:t>Safety net — anomaly detection, automatic circuit-breaker, negative-prediction guards, configurable timeouts, kill-switch flag.</a:t>
+              <a:t>Explainable AI — every prediction returns per-feature attributions in plain English; 'Likely-to-apply score', 'Recent 14-day earnings', 'Time engaged'.</a:t>
             </a:r>
           </a:p>
           <a:p>
@@ -7721,7 +8822,7 @@
               </a:spcAft>
             </a:pPr>
             <a:r>
-              <a:rPr sz="1300" b="1" i="0">
+              <a:rPr sz="1200" b="1" i="0">
                 <a:solidFill>
                   <a:srgbClr val="D97306"/>
                 </a:solidFill>
@@ -7730,13 +8831,13 @@
               <a:t>•  </a:t>
             </a:r>
             <a:r>
-              <a:rPr sz="1300" b="0" i="0">
+              <a:rPr sz="1200" b="0" i="0">
                 <a:solidFill>
                   <a:srgbClr val="333F52"/>
                 </a:solidFill>
                 <a:latin typeface="Calibri"/>
               </a:rPr>
-              <a:t>One-command deploys — every change ships through CI with a tested rollback to the prior model version.</a:t>
+              <a:t>REST API — the same predictions available programmatically for SA360, SSGTM, OCI downstream activation.</a:t>
             </a:r>
           </a:p>
           <a:p>
@@ -7745,17 +8846,26 @@
                 <a:spcPct val="120000"/>
               </a:lnSpc>
               <a:spcAft>
-                <a:spcPts val="600"/>
+                <a:spcPts val="300"/>
               </a:spcAft>
             </a:pPr>
             <a:r>
-              <a:rPr sz="1700" b="1" i="0">
-                <a:solidFill>
-                  <a:srgbClr val="0F6E7A"/>
-                </a:solidFill>
-                <a:latin typeface="Calibri"/>
-              </a:rPr>
-              <a:t> </a:t>
+              <a:rPr sz="1200" b="1" i="0">
+                <a:solidFill>
+                  <a:srgbClr val="D97306"/>
+                </a:solidFill>
+                <a:latin typeface="Calibri"/>
+              </a:rPr>
+              <a:t>•  </a:t>
+            </a:r>
+            <a:r>
+              <a:rPr sz="1200" b="0" i="0">
+                <a:solidFill>
+                  <a:srgbClr val="333F52"/>
+                </a:solidFill>
+                <a:latin typeface="Calibri"/>
+              </a:rPr>
+              <a:t>Safety net — anomaly detection, automatic circuit-breaker, negative-prediction guards, per-call timeouts, kill-switch flag.</a:t>
             </a:r>
           </a:p>
           <a:p>
@@ -7763,15 +8873,71 @@
               <a:lnSpc>
                 <a:spcPct val="120000"/>
               </a:lnSpc>
-            </a:pPr>
-            <a:r>
-              <a:rPr sz="1100" b="0" i="1">
+              <a:spcAft>
+                <a:spcPts val="300"/>
+              </a:spcAft>
+            </a:pPr>
+            <a:r>
+              <a:rPr sz="1200" b="1" i="0">
+                <a:solidFill>
+                  <a:srgbClr val="D97306"/>
+                </a:solidFill>
+                <a:latin typeface="Calibri"/>
+              </a:rPr>
+              <a:t>•  </a:t>
+            </a:r>
+            <a:r>
+              <a:rPr sz="1200" b="0" i="0">
+                <a:solidFill>
+                  <a:srgbClr val="333F52"/>
+                </a:solidFill>
+                <a:latin typeface="Calibri"/>
+              </a:rPr>
+              <a:t>Per-segment drift + coverage-drop alerts — Cloud Monitoring policies fire on the dimensions that matter for CC (product_type × device × geo).</a:t>
+            </a:r>
+          </a:p>
+          <a:p>
+            <a:pPr>
+              <a:lnSpc>
+                <a:spcPct val="120000"/>
+              </a:lnSpc>
+              <a:spcAft>
+                <a:spcPts val="300"/>
+              </a:spcAft>
+            </a:pPr>
+            <a:r>
+              <a:rPr sz="1200" b="1" i="0">
+                <a:solidFill>
+                  <a:srgbClr val="D97306"/>
+                </a:solidFill>
+                <a:latin typeface="Calibri"/>
+              </a:rPr>
+              <a:t>•  </a:t>
+            </a:r>
+            <a:r>
+              <a:rPr sz="1200" b="0" i="0">
+                <a:solidFill>
+                  <a:srgbClr val="333F52"/>
+                </a:solidFill>
+                <a:latin typeface="Calibri"/>
+              </a:rPr>
+              <a:t>One-command deploys — tag push runs CI then CD; tested rollback to the prior model version is a single Vertex traffic-split.</a:t>
+            </a:r>
+          </a:p>
+          <a:p>
+            <a:pPr>
+              <a:lnSpc>
+                <a:spcPct val="120000"/>
+              </a:lnSpc>
+            </a:pPr>
+            <a:r>
+              <a:rPr sz="1000" b="0" i="1">
                 <a:solidFill>
                   <a:srgbClr val="6B7380"/>
                 </a:solidFill>
                 <a:latin typeface="Calibri"/>
               </a:rPr>
-              <a:t>All components run in Google Cloud (europe-west2, London) on managed services — Cloud Run, Vertex AI, BigQuery, Pub/Sub — so there is no infrastructure for the client team to operate.</a:t>
+              <a:t>All components run in Google Cloud (europe-west2, London) on managed services — Cloud Run, Vertex AI, BigQuery, Pub/Sub, Cloud Monitoring — no infrastructure for the client team to operate.</a:t>
             </a:r>
           </a:p>
         </p:txBody>
@@ -7858,7 +9024,7 @@
                 </a:solidFill>
                 <a:latin typeface="Calibri"/>
               </a:rPr>
-              <a:t>4 / 15</a:t>
+              <a:t>4 / 16</a:t>
             </a:r>
           </a:p>
         </p:txBody>
@@ -8459,7 +9625,7 @@
                 </a:solidFill>
                 <a:latin typeface="Consolas"/>
               </a:rPr>
-              <a:t>scoring-api  /v1/score, /v1/explain</a:t>
+              <a:t>scoring-api  /v1/score, /v1/explain  (Rust)</a:t>
             </a:r>
           </a:p>
         </p:txBody>
@@ -8493,7 +9659,7 @@
                 </a:solidFill>
                 <a:latin typeface="Calibri"/>
               </a:rPr>
-              <a:t>Their backend / SA360 integration</a:t>
+              <a:t>Bidder integration: SA360 / SSGTM / OCI</a:t>
             </a:r>
           </a:p>
         </p:txBody>
@@ -8536,7 +9702,7 @@
                 </a:solidFill>
                 <a:latin typeface="Calibri"/>
               </a:rPr>
-              <a:t>API only — show via curl / Postman on slide 7</a:t>
+              <a:t>API only — invoked live by the dashboard</a:t>
             </a:r>
           </a:p>
         </p:txBody>
@@ -8658,7 +9824,7 @@
                 </a:solidFill>
                 <a:latin typeface="Consolas"/>
               </a:rPr>
-              <a:t>reconciliation  /reconciliation</a:t>
+              <a:t>reconciliation  /reconciliation, /coverage</a:t>
             </a:r>
           </a:p>
         </p:txBody>
@@ -8857,7 +10023,7 @@
                 </a:solidFill>
                 <a:latin typeface="Consolas"/>
               </a:rPr>
-              <a:t>activation</a:t>
+              <a:t>activation  (Python)</a:t>
             </a:r>
           </a:p>
         </p:txBody>
@@ -8891,7 +10057,7 @@
                 </a:solidFill>
                 <a:latin typeface="Calibri"/>
               </a:rPr>
-              <a:t>SA360 / SSGTM push</a:t>
+              <a:t>SA360 / SSGTM / OCI push</a:t>
             </a:r>
           </a:p>
         </p:txBody>
@@ -9090,7 +10256,7 @@
                 </a:solidFill>
                 <a:latin typeface="Calibri"/>
               </a:rPr>
-              <a:t>Internal / scheduled</a:t>
+              <a:t>Internal / scheduled training and recovery</a:t>
             </a:r>
           </a:p>
         </p:txBody>
@@ -9198,7 +10364,7 @@
             <a:avLst/>
           </a:prstGeom>
           <a:solidFill>
-            <a:srgbClr val="6B7380"/>
+            <a:srgbClr val="D97306"/>
           </a:solidFill>
           <a:ln>
             <a:noFill/>
@@ -9255,7 +10421,7 @@
                 </a:solidFill>
                 <a:latin typeface="Consolas"/>
               </a:rPr>
-              <a:t>mcp-servers/scoring-mcp, mlops-mcp</a:t>
+              <a:t>Dataform: phoebe_features, coverage_audit, drift / coverage breach views</a:t>
             </a:r>
           </a:p>
         </p:txBody>
@@ -9289,7 +10455,7 @@
                 </a:solidFill>
                 <a:latin typeface="Calibri"/>
               </a:rPr>
-              <a:t>Agent tooling for engineers</a:t>
+              <a:t>Analyst + monitoring layer</a:t>
             </a:r>
           </a:p>
         </p:txBody>
@@ -9319,7 +10485,7 @@
             <a:r>
               <a:rPr sz="1100" b="1" i="0">
                 <a:solidFill>
-                  <a:srgbClr val="6B7380"/>
+                  <a:srgbClr val="D97306"/>
                 </a:solidFill>
                 <a:latin typeface="Calibri"/>
               </a:rPr>
@@ -9332,7 +10498,7 @@
                 </a:solidFill>
                 <a:latin typeface="Calibri"/>
               </a:rPr>
-              <a:t>Not client-facing</a:t>
+              <a:t>BigQuery direct or Looker Studio</a:t>
             </a:r>
           </a:p>
         </p:txBody>
@@ -9397,7 +10563,7 @@
             <a:avLst/>
           </a:prstGeom>
           <a:solidFill>
-            <a:srgbClr val="D97306"/>
+            <a:srgbClr val="6B7380"/>
           </a:solidFill>
           <a:ln>
             <a:noFill/>
@@ -9454,7 +10620,7 @@
                 </a:solidFill>
                 <a:latin typeface="Consolas"/>
               </a:rPr>
-              <a:t>Dataform models, BigQuery views</a:t>
+              <a:t>ops/breach_emitter.py</a:t>
             </a:r>
           </a:p>
         </p:txBody>
@@ -9488,7 +10654,7 @@
                 </a:solidFill>
                 <a:latin typeface="Calibri"/>
               </a:rPr>
-              <a:t>Analyst layer</a:t>
+              <a:t>Daily Cloud-Scheduler driven breach → alert emitter</a:t>
             </a:r>
           </a:p>
         </p:txBody>
@@ -9518,7 +10684,7 @@
             <a:r>
               <a:rPr sz="1100" b="1" i="0">
                 <a:solidFill>
-                  <a:srgbClr val="D97306"/>
+                  <a:srgbClr val="6B7380"/>
                 </a:solidFill>
                 <a:latin typeface="Calibri"/>
               </a:rPr>
@@ -9531,7 +10697,7 @@
                 </a:solidFill>
                 <a:latin typeface="Calibri"/>
               </a:rPr>
-              <a:t>Available in Looker Studio as a second visual artefact (optional)</a:t>
+              <a:t>Backend</a:t>
             </a:r>
           </a:p>
         </p:txBody>
@@ -9652,7 +10818,7 @@
                 </a:solidFill>
                 <a:latin typeface="Calibri"/>
               </a:rPr>
-              <a:t>5 / 15</a:t>
+              <a:t>5 / 16</a:t>
             </a:r>
           </a:p>
         </p:txBody>
@@ -9939,7 +11105,7 @@
                 </a:solidFill>
                 <a:latin typeface="Calibri"/>
               </a:rPr>
-              <a:t>6 / 15</a:t>
+              <a:t>6 / 16</a:t>
             </a:r>
           </a:p>
         </p:txBody>
@@ -10009,7 +11175,7 @@
                 </a:solidFill>
                 <a:latin typeface="Calibri"/>
               </a:rPr>
-              <a:t>FIVE MINUTES, THREE SCREENS</a:t>
+              <a:t>SEVEN MINUTES, ONE URL</a:t>
             </a:r>
           </a:p>
           <a:p>
@@ -10099,13 +11265,13 @@
               </a:spcAft>
             </a:pPr>
             <a:r>
-              <a:rPr sz="1600" b="1" i="0">
+              <a:rPr sz="1500" b="1" i="0">
                 <a:solidFill>
                   <a:srgbClr val="0F6E7A"/>
                 </a:solidFill>
                 <a:latin typeface="Calibri"/>
               </a:rPr>
-              <a:t>1.  The dashboard, in business language</a:t>
+              <a:t>1.  KPIs in pounds, 90-day default — and a product-type filter.</a:t>
             </a:r>
           </a:p>
           <a:p>
@@ -10118,13 +11284,13 @@
               </a:spcAft>
             </a:pPr>
             <a:r>
-              <a:rPr sz="1200" b="0" i="0">
+              <a:rPr sz="1100" b="0" i="0">
                 <a:solidFill>
                   <a:srgbClr val="333F52"/>
                 </a:solidFill>
                 <a:latin typeface="Calibri"/>
               </a:rPr>
-              <a:t>We open the live dashboard. KPIs in pounds and percentages explain how much we earned, how accurate the model was, and how many clicks ended up converting. Daily and residual charts answer 'is the model right, and which direction does it err?' in one glance.</a:t>
+              <a:t>We open the dashboard. Five KPIs — clicks scored, expected vs realised earning, typical error, and conversion coverage — explain accuracy in business language. The window defaults to 90 days for Credit Cards. The product-type filter re-segments the chart in one click.</a:t>
             </a:r>
           </a:p>
           <a:p>
@@ -10137,13 +11303,13 @@
               </a:spcAft>
             </a:pPr>
             <a:r>
-              <a:rPr sz="1600" b="1" i="0">
+              <a:rPr sz="1500" b="1" i="0">
                 <a:solidFill>
                   <a:srgbClr val="0F6E7A"/>
                 </a:solidFill>
                 <a:latin typeface="Calibri"/>
               </a:rPr>
-              <a:t>2.  You drive the model — yourself</a:t>
+              <a:t>2.  Where we have full visibility — coverage panel.</a:t>
             </a:r>
           </a:p>
           <a:p>
@@ -10156,13 +11322,13 @@
               </a:spcAft>
             </a:pPr>
             <a:r>
-              <a:rPr sz="1200" b="0" i="0">
+              <a:rPr sz="1100" b="0" i="0">
                 <a:solidFill>
                   <a:srgbClr val="333F52"/>
                 </a:solidFill>
                 <a:latin typeface="Calibri"/>
               </a:rPr>
-              <a:t>We hand you the keyboard. Describe a click in plain English — device, country, hour of day, search intent, user trust score, auction pressure, recent earnings, repeat visits — and press Predict. In under a second you see the predicted revenue, the model version that priced it, and the latency. Below it, a live pipeline trace lights up the five backend steps as they happen: validate, guardrails, AI model on Vertex, BigQuery stream, SHAP explanation.</a:t>
+              <a:t>A bar chart shows coverage % per product-type slice. Red bars are slices below 60% — the slices where we'd ask for ingestion backfill before retraining. This is how we answer the 50% question, slice by slice, not as an aggregate.</a:t>
             </a:r>
           </a:p>
           <a:p>
@@ -10175,13 +11341,13 @@
               </a:spcAft>
             </a:pPr>
             <a:r>
-              <a:rPr sz="1600" b="1" i="0">
+              <a:rPr sz="1500" b="1" i="0">
                 <a:solidFill>
                   <a:srgbClr val="0F6E7A"/>
                 </a:solidFill>
                 <a:latin typeface="Calibri"/>
               </a:rPr>
-              <a:t>3.  Why the model said that</a:t>
+              <a:t>3.  Hero before/after — flat tCPA vs value-based bid, on the same click.</a:t>
             </a:r>
           </a:p>
           <a:p>
@@ -10194,13 +11360,13 @@
               </a:spcAft>
             </a:pPr>
             <a:r>
-              <a:rPr sz="1200" b="0" i="0">
+              <a:rPr sz="1100" b="0" i="0">
                 <a:solidFill>
                   <a:srgbClr val="333F52"/>
                 </a:solidFill>
                 <a:latin typeface="Calibri"/>
               </a:rPr>
-              <a:t>The same prediction renders a horizontal-bar attribution chart: green bars pushed the price up, red pushed it down, starting from the model's baseline. Every prediction is auditable, and the names on the chart are plain English ('User trust score', 'Recent 7-day earnings'), not engineering jargon.</a:t>
+              <a:t>Three side-by-side cards: Old-world flat target-CPA, New-world value-based bid (70% of predicted RPC), and the difference — over-paid prevented or under-bid recovered. A session counter accumulates the total across every prediction the audience fires.</a:t>
             </a:r>
           </a:p>
           <a:p>
@@ -10213,13 +11379,13 @@
               </a:spcAft>
             </a:pPr>
             <a:r>
-              <a:rPr sz="1600" b="1" i="0">
+              <a:rPr sz="1500" b="1" i="0">
                 <a:solidFill>
                   <a:srgbClr val="0F6E7A"/>
                 </a:solidFill>
                 <a:latin typeface="Calibri"/>
               </a:rPr>
-              <a:t>4.  The safety net, on cue</a:t>
+              <a:t>4.  You drive the model — yourself.</a:t>
             </a:r>
           </a:p>
           <a:p>
@@ -10232,13 +11398,13 @@
               </a:spcAft>
             </a:pPr>
             <a:r>
-              <a:rPr sz="1200" b="0" i="0">
+              <a:rPr sz="1100" b="0" i="0">
                 <a:solidFill>
                   <a:srgbClr val="333F52"/>
                 </a:solidFill>
                 <a:latin typeface="Calibri"/>
               </a:rPr>
-              <a:t>We send a deliberately malformed click. The service rejects it cleanly, the circuit-breaker counters tick on the model-health panel, and the request never reaches the model. No degradation visible to clean traffic.</a:t>
+              <a:t>Form fields in Credit-Cards language: product type, card product, query intent (compare/shop/apply/research), 'how likely to apply', 'used a calculator', 'guides read', 'cards compared', 'time engaged'. Press Predict — the pipeline-trace lights up in real time: validate → guardrails → Vertex AI → BigQuery → SHAP.</a:t>
             </a:r>
           </a:p>
           <a:p>
@@ -10246,9 +11412,123 @@
               <a:lnSpc>
                 <a:spcPct val="120000"/>
               </a:lnSpc>
-            </a:pPr>
-            <a:r>
-              <a:rPr sz="1000" b="0" i="1">
+              <a:spcAft>
+                <a:spcPts val="600"/>
+              </a:spcAft>
+            </a:pPr>
+            <a:r>
+              <a:rPr sz="1500" b="1" i="0">
+                <a:solidFill>
+                  <a:srgbClr val="0F6E7A"/>
+                </a:solidFill>
+                <a:latin typeface="Calibri"/>
+              </a:rPr>
+              <a:t>5.  The Phoebe journey — bouncer with a crystal ball.</a:t>
+            </a:r>
+          </a:p>
+          <a:p>
+            <a:pPr>
+              <a:lnSpc>
+                <a:spcPct val="120000"/>
+              </a:lnSpc>
+              <a:spcAft>
+                <a:spcPts val="600"/>
+              </a:spcAft>
+            </a:pPr>
+            <a:r>
+              <a:rPr sz="1100" b="0" i="0">
+                <a:solidFill>
+                  <a:srgbClr val="333F52"/>
+                </a:solidFill>
+                <a:latin typeface="Calibri"/>
+              </a:rPr>
+              <a:t>Press Play. A single user moves through six steps — search → page view → calculator → guides → compare-5 → click. The predicted bid ticks up under each step card as their behavioural signal builds. A lift pill shows the £ gap from first to last step.</a:t>
+            </a:r>
+          </a:p>
+          <a:p>
+            <a:pPr>
+              <a:lnSpc>
+                <a:spcPct val="120000"/>
+              </a:lnSpc>
+              <a:spcAft>
+                <a:spcPts val="600"/>
+              </a:spcAft>
+            </a:pPr>
+            <a:r>
+              <a:rPr sz="1500" b="1" i="0">
+                <a:solidFill>
+                  <a:srgbClr val="0F6E7A"/>
+                </a:solidFill>
+                <a:latin typeface="Calibri"/>
+              </a:rPr>
+              <a:t>6.  Why the model said that.</a:t>
+            </a:r>
+          </a:p>
+          <a:p>
+            <a:pPr>
+              <a:lnSpc>
+                <a:spcPct val="120000"/>
+              </a:lnSpc>
+              <a:spcAft>
+                <a:spcPts val="600"/>
+              </a:spcAft>
+            </a:pPr>
+            <a:r>
+              <a:rPr sz="1100" b="0" i="0">
+                <a:solidFill>
+                  <a:srgbClr val="333F52"/>
+                </a:solidFill>
+                <a:latin typeface="Calibri"/>
+              </a:rPr>
+              <a:t>Horizontal-bar attribution chart on every prediction. Names are in business English ('Likely-to-apply score', 'Recent 14-day earnings', 'Time engaged'). Auditable for finance and compliance — ADR 0004 forbids these signals reaching customer terms.</a:t>
+            </a:r>
+          </a:p>
+          <a:p>
+            <a:pPr>
+              <a:lnSpc>
+                <a:spcPct val="120000"/>
+              </a:lnSpc>
+              <a:spcAft>
+                <a:spcPts val="600"/>
+              </a:spcAft>
+            </a:pPr>
+            <a:r>
+              <a:rPr sz="1500" b="1" i="0">
+                <a:solidFill>
+                  <a:srgbClr val="0F6E7A"/>
+                </a:solidFill>
+                <a:latin typeface="Calibri"/>
+              </a:rPr>
+              <a:t>7.  The platform context — what we've designed against; what's next.</a:t>
+            </a:r>
+          </a:p>
+          <a:p>
+            <a:pPr>
+              <a:lnSpc>
+                <a:spcPct val="120000"/>
+              </a:lnSpc>
+              <a:spcAft>
+                <a:spcPts val="600"/>
+              </a:spcAft>
+            </a:pPr>
+            <a:r>
+              <a:rPr sz="1100" b="0" i="0">
+                <a:solidFill>
+                  <a:srgbClr val="333F52"/>
+                </a:solidFill>
+                <a:latin typeface="Calibri"/>
+              </a:rPr>
+              <a:t>Three failure modes named at the bottom of the page — pricing leakage, uncontrolled bidding, invisible decay — each mapped to where the platform pushes back. And a five-vertical roadmap: Credit Cards live, Loans / Home / Life / Mortgages dated.</a:t>
+            </a:r>
+          </a:p>
+          <a:p>
+            <a:pPr>
+              <a:lnSpc>
+                <a:spcPct val="120000"/>
+              </a:lnSpc>
+            </a:pPr>
+            <a:r>
+              <a:rPr sz="900" b="0" i="1">
                 <a:solidFill>
                   <a:srgbClr val="6B7380"/>
                 </a:solidFill>
@@ -10341,7 +11621,7 @@
                 </a:solidFill>
                 <a:latin typeface="Calibri"/>
               </a:rPr>
-              <a:t>7 / 15</a:t>
+              <a:t>7 / 16</a:t>
             </a:r>
           </a:p>
         </p:txBody>
@@ -11350,7 +12630,7 @@
                 </a:solidFill>
                 <a:latin typeface="Calibri"/>
               </a:rPr>
-              <a:t>8 / 15</a:t>
+              <a:t>8 / 16</a:t>
             </a:r>
           </a:p>
         </p:txBody>
@@ -11869,7 +13149,7 @@
                 </a:solidFill>
                 <a:latin typeface="Calibri"/>
               </a:rPr>
-              <a:t>9 / 15</a:t>
+              <a:t>9 / 16</a:t>
             </a:r>
           </a:p>
         </p:txBody>

--- a/docs/client-demo-deck.pptx
+++ b/docs/client-demo-deck.pptx
@@ -3463,7 +3463,7 @@
                 </a:solidFill>
                 <a:latin typeface="Calibri"/>
               </a:rPr>
-              <a:t>NEXT STEPS TO UNLOCK VALUE</a:t>
+              <a:t>THREE ASKS, IN PRIORITY ORDER</a:t>
             </a:r>
           </a:p>
           <a:p>
@@ -3524,14 +3524,68 @@
       </p:sp>
       <p:sp>
         <p:nvSpPr>
-          <p:cNvPr id="4" name="TextBox 3"/>
+          <p:cNvPr id="4" name="Rounded Rectangle 3"/>
+          <p:cNvSpPr/>
+          <p:nvPr/>
+        </p:nvSpPr>
+        <p:spPr>
+          <a:xfrm>
+            <a:off x="502920" y="1143000"/>
+            <a:ext cx="1005840" cy="1188720"/>
+          </a:xfrm>
+          <a:prstGeom prst="roundRect">
+            <a:avLst>
+              <a:gd name="adj" fmla="val 10000"/>
+            </a:avLst>
+          </a:prstGeom>
+          <a:solidFill>
+            <a:srgbClr val="0F6E7A"/>
+          </a:solidFill>
+          <a:ln>
+            <a:noFill/>
+          </a:ln>
+        </p:spPr>
+        <p:style>
+          <a:lnRef idx="1">
+            <a:schemeClr val="accent1"/>
+          </a:lnRef>
+          <a:fillRef idx="3">
+            <a:schemeClr val="accent1"/>
+          </a:fillRef>
+          <a:effectRef idx="2">
+            <a:schemeClr val="accent1"/>
+          </a:effectRef>
+          <a:fontRef idx="minor">
+            <a:schemeClr val="lt1"/>
+          </a:fontRef>
+        </p:style>
+        <p:txBody>
+          <a:bodyPr rtlCol="0" anchor="ctr" lIns="0" rIns="0" tIns="0" bIns="0"/>
+          <a:lstStyle/>
+          <a:p>
+            <a:pPr algn="ctr"/>
+            <a:r>
+              <a:rPr sz="4400" b="1" i="0">
+                <a:solidFill>
+                  <a:srgbClr val="FFFFFF"/>
+                </a:solidFill>
+                <a:latin typeface="Calibri"/>
+              </a:rPr>
+              <a:t>1</a:t>
+            </a:r>
+          </a:p>
+        </p:txBody>
+      </p:sp>
+      <p:sp>
+        <p:nvSpPr>
+          <p:cNvPr id="5" name="TextBox 4"/>
           <p:cNvSpPr txBox="1"/>
           <p:nvPr/>
         </p:nvSpPr>
         <p:spPr>
           <a:xfrm>
-            <a:off x="548640" y="1143000"/>
-            <a:ext cx="11094415" cy="5303520"/>
+            <a:off x="1691640" y="1234440"/>
+            <a:ext cx="9951415" cy="1005840"/>
           </a:xfrm>
           <a:prstGeom prst="rect">
             <a:avLst/>
@@ -3546,289 +3600,355 @@
           <a:p>
             <a:pPr>
               <a:lnSpc>
-                <a:spcPct val="120000"/>
+                <a:spcPct val="110000"/>
               </a:lnSpc>
-              <a:spcAft>
-                <a:spcPts val="600"/>
-              </a:spcAft>
             </a:pPr>
             <a:r>
-              <a:rPr sz="1600" b="1" i="0">
+              <a:rPr sz="1000" b="1" i="0">
                 <a:solidFill>
                   <a:srgbClr val="0F6E7A"/>
                 </a:solidFill>
                 <a:latin typeface="Calibri"/>
               </a:rPr>
-              <a:t>Five decisions — in priority order</a:t>
+              <a:t>CRITICAL PATH    </a:t>
+            </a:r>
+            <a:r>
+              <a:rPr sz="1800" b="1" i="0">
+                <a:solidFill>
+                  <a:srgbClr val="0B1F3A"/>
+                </a:solidFill>
+                <a:latin typeface="Calibri"/>
+              </a:rPr>
+              <a:t>GA4 access to your Credit Cards property</a:t>
             </a:r>
           </a:p>
           <a:p>
             <a:pPr>
               <a:lnSpc>
-                <a:spcPct val="120000"/>
+                <a:spcPct val="130000"/>
               </a:lnSpc>
-              <a:spcAft>
-                <a:spcPts val="300"/>
-              </a:spcAft>
+              <a:spcBef>
+                <a:spcPts val="800"/>
+              </a:spcBef>
             </a:pPr>
             <a:r>
-              <a:rPr sz="1200" b="1" i="0">
-                <a:solidFill>
-                  <a:srgbClr val="D97306"/>
-                </a:solidFill>
-                <a:latin typeface="Calibri"/>
-              </a:rPr>
-              <a:t>•  </a:t>
-            </a:r>
-            <a:r>
-              <a:rPr sz="1200" b="0" i="0">
+              <a:rPr sz="1100" b="0" i="0">
                 <a:solidFill>
                   <a:srgbClr val="333F52"/>
                 </a:solidFill>
                 <a:latin typeface="Calibri"/>
               </a:rPr>
-              <a:t>OQ-11 · GA4 access. Read on the Credit Cards analytics_&lt;property&gt; BigQuery export. Critical-path: every week this slides is a week off the cutover.</a:t>
-            </a:r>
-          </a:p>
+              <a:t>OQ-11 — read on the analytics_&lt;property&gt; BigQuery export. Every week this slides is a week off cutover.</a:t>
+            </a:r>
+          </a:p>
+        </p:txBody>
+      </p:sp>
+      <p:sp>
+        <p:nvSpPr>
+          <p:cNvPr id="6" name="Rounded Rectangle 5"/>
+          <p:cNvSpPr/>
+          <p:nvPr/>
+        </p:nvSpPr>
+        <p:spPr>
+          <a:xfrm>
+            <a:off x="502920" y="2514600"/>
+            <a:ext cx="1005840" cy="1188720"/>
+          </a:xfrm>
+          <a:prstGeom prst="roundRect">
+            <a:avLst>
+              <a:gd name="adj" fmla="val 10000"/>
+            </a:avLst>
+          </a:prstGeom>
+          <a:solidFill>
+            <a:srgbClr val="D97306"/>
+          </a:solidFill>
+          <a:ln>
+            <a:noFill/>
+          </a:ln>
+        </p:spPr>
+        <p:style>
+          <a:lnRef idx="1">
+            <a:schemeClr val="accent1"/>
+          </a:lnRef>
+          <a:fillRef idx="3">
+            <a:schemeClr val="accent1"/>
+          </a:fillRef>
+          <a:effectRef idx="2">
+            <a:schemeClr val="accent1"/>
+          </a:effectRef>
+          <a:fontRef idx="minor">
+            <a:schemeClr val="lt1"/>
+          </a:fontRef>
+        </p:style>
+        <p:txBody>
+          <a:bodyPr rtlCol="0" anchor="ctr" lIns="0" rIns="0" tIns="0" bIns="0"/>
+          <a:lstStyle/>
+          <a:p>
+            <a:pPr algn="ctr"/>
+            <a:r>
+              <a:rPr sz="4400" b="1" i="0">
+                <a:solidFill>
+                  <a:srgbClr val="FFFFFF"/>
+                </a:solidFill>
+                <a:latin typeface="Calibri"/>
+              </a:rPr>
+              <a:t>2</a:t>
+            </a:r>
+          </a:p>
+        </p:txBody>
+      </p:sp>
+      <p:sp>
+        <p:nvSpPr>
+          <p:cNvPr id="7" name="TextBox 6"/>
+          <p:cNvSpPr txBox="1"/>
+          <p:nvPr/>
+        </p:nvSpPr>
+        <p:spPr>
+          <a:xfrm>
+            <a:off x="1691640" y="2606040"/>
+            <a:ext cx="9951415" cy="1005840"/>
+          </a:xfrm>
+          <a:prstGeom prst="rect">
+            <a:avLst/>
+          </a:prstGeom>
+          <a:noFill/>
+        </p:spPr>
+        <p:txBody>
+          <a:bodyPr wrap="square">
+            <a:spAutoFit/>
+          </a:bodyPr>
+          <a:lstStyle/>
           <a:p>
             <a:pPr>
               <a:lnSpc>
-                <a:spcPct val="120000"/>
+                <a:spcPct val="110000"/>
               </a:lnSpc>
-              <a:spcAft>
-                <a:spcPts val="300"/>
-              </a:spcAft>
             </a:pPr>
             <a:r>
-              <a:rPr sz="1200" b="1" i="0">
+              <a:rPr sz="1000" b="1" i="0">
                 <a:solidFill>
                   <a:srgbClr val="D97306"/>
                 </a:solidFill>
                 <a:latin typeface="Calibri"/>
               </a:rPr>
-              <a:t>•  </a:t>
-            </a:r>
-            <a:r>
-              <a:rPr sz="1200" b="0" i="0">
-                <a:solidFill>
-                  <a:srgbClr val="333F52"/>
-                </a:solidFill>
-                <a:latin typeface="Calibri"/>
-              </a:rPr>
-              <a:t>OQ-12 · GA4 event taxonomy. Confirm which event_name values map to 'calculator used', 'guide read', 'card compare'. One working session.</a:t>
+              <a:t>WORKING SESSION    </a:t>
+            </a:r>
+            <a:r>
+              <a:rPr sz="1800" b="1" i="0">
+                <a:solidFill>
+                  <a:srgbClr val="0B1F3A"/>
+                </a:solidFill>
+                <a:latin typeface="Calibri"/>
+              </a:rPr>
+              <a:t>Confirm the GA4 event taxonomy + click→cookie join key</a:t>
             </a:r>
           </a:p>
           <a:p>
             <a:pPr>
               <a:lnSpc>
-                <a:spcPct val="120000"/>
+                <a:spcPct val="130000"/>
               </a:lnSpc>
-              <a:spcAft>
-                <a:spcPts val="300"/>
-              </a:spcAft>
+              <a:spcBef>
+                <a:spcPts val="800"/>
+              </a:spcBef>
             </a:pPr>
             <a:r>
-              <a:rPr sz="1200" b="1" i="0">
-                <a:solidFill>
-                  <a:srgbClr val="D97306"/>
-                </a:solidFill>
-                <a:latin typeface="Calibri"/>
-              </a:rPr>
-              <a:t>•  </a:t>
-            </a:r>
-            <a:r>
-              <a:rPr sz="1200" b="0" i="0">
+              <a:rPr sz="1100" b="0" i="0">
                 <a:solidFill>
                   <a:srgbClr val="333F52"/>
                 </a:solidFill>
                 <a:latin typeface="Calibri"/>
               </a:rPr>
-              <a:t>OQ-13 · Click → cookie join key. Server-side CM360+GA4 merge, first-party cookie pass-through, or no-join. Decides whether Phoebe lifts the live model.</a:t>
-            </a:r>
-          </a:p>
+              <a:t>OQ-12 + OQ-13 — one 60-minute call validates our best-current-guess mappings against your real events.</a:t>
+            </a:r>
+          </a:p>
+        </p:txBody>
+      </p:sp>
+      <p:sp>
+        <p:nvSpPr>
+          <p:cNvPr id="8" name="Rounded Rectangle 7"/>
+          <p:cNvSpPr/>
+          <p:nvPr/>
+        </p:nvSpPr>
+        <p:spPr>
+          <a:xfrm>
+            <a:off x="502920" y="3886200"/>
+            <a:ext cx="1005840" cy="1188720"/>
+          </a:xfrm>
+          <a:prstGeom prst="roundRect">
+            <a:avLst>
+              <a:gd name="adj" fmla="val 10000"/>
+            </a:avLst>
+          </a:prstGeom>
+          <a:solidFill>
+            <a:srgbClr val="1F8A4F"/>
+          </a:solidFill>
+          <a:ln>
+            <a:noFill/>
+          </a:ln>
+        </p:spPr>
+        <p:style>
+          <a:lnRef idx="1">
+            <a:schemeClr val="accent1"/>
+          </a:lnRef>
+          <a:fillRef idx="3">
+            <a:schemeClr val="accent1"/>
+          </a:fillRef>
+          <a:effectRef idx="2">
+            <a:schemeClr val="accent1"/>
+          </a:effectRef>
+          <a:fontRef idx="minor">
+            <a:schemeClr val="lt1"/>
+          </a:fontRef>
+        </p:style>
+        <p:txBody>
+          <a:bodyPr rtlCol="0" anchor="ctr" lIns="0" rIns="0" tIns="0" bIns="0"/>
+          <a:lstStyle/>
+          <a:p>
+            <a:pPr algn="ctr"/>
+            <a:r>
+              <a:rPr sz="4400" b="1" i="0">
+                <a:solidFill>
+                  <a:srgbClr val="FFFFFF"/>
+                </a:solidFill>
+                <a:latin typeface="Calibri"/>
+              </a:rPr>
+              <a:t>3</a:t>
+            </a:r>
+          </a:p>
+        </p:txBody>
+      </p:sp>
+      <p:sp>
+        <p:nvSpPr>
+          <p:cNvPr id="9" name="TextBox 8"/>
+          <p:cNvSpPr txBox="1"/>
+          <p:nvPr/>
+        </p:nvSpPr>
+        <p:spPr>
+          <a:xfrm>
+            <a:off x="1691640" y="3977640"/>
+            <a:ext cx="9951415" cy="1005840"/>
+          </a:xfrm>
+          <a:prstGeom prst="rect">
+            <a:avLst/>
+          </a:prstGeom>
+          <a:noFill/>
+        </p:spPr>
+        <p:txBody>
+          <a:bodyPr wrap="square">
+            <a:spAutoFit/>
+          </a:bodyPr>
+          <a:lstStyle/>
           <a:p>
             <a:pPr>
               <a:lnSpc>
-                <a:spcPct val="120000"/>
+                <a:spcPct val="110000"/>
               </a:lnSpc>
-              <a:spcAft>
-                <a:spcPts val="300"/>
-              </a:spcAft>
             </a:pPr>
             <a:r>
-              <a:rPr sz="1200" b="1" i="0">
-                <a:solidFill>
-                  <a:srgbClr val="D97306"/>
-                </a:solidFill>
-                <a:latin typeface="Calibri"/>
-              </a:rPr>
-              <a:t>•  </a:t>
-            </a:r>
-            <a:r>
-              <a:rPr sz="1200" b="0" i="0">
-                <a:solidFill>
-                  <a:srgbClr val="333F52"/>
-                </a:solidFill>
-                <a:latin typeface="Calibri"/>
-              </a:rPr>
-              <a:t>OQ-1 · GCP project. Client's own, or a namespaced env in our msm-rpc project — the deploy-client-cc CD job is wired and gated on the decision.</a:t>
+              <a:rPr sz="1000" b="1" i="0">
+                <a:solidFill>
+                  <a:srgbClr val="1F8A4F"/>
+                </a:solidFill>
+                <a:latin typeface="Calibri"/>
+              </a:rPr>
+              <a:t>SIGN-OFFS    </a:t>
+            </a:r>
+            <a:r>
+              <a:rPr sz="1800" b="1" i="0">
+                <a:solidFill>
+                  <a:srgbClr val="0B1F3A"/>
+                </a:solidFill>
+                <a:latin typeface="Calibri"/>
+              </a:rPr>
+              <a:t>GCP project decision + compliance sign-off on ADRs 0004 and 0005</a:t>
             </a:r>
           </a:p>
           <a:p>
             <a:pPr>
               <a:lnSpc>
-                <a:spcPct val="120000"/>
+                <a:spcPct val="130000"/>
               </a:lnSpc>
-              <a:spcAft>
-                <a:spcPts val="300"/>
-              </a:spcAft>
+              <a:spcBef>
+                <a:spcPts val="800"/>
+              </a:spcBef>
             </a:pPr>
             <a:r>
-              <a:rPr sz="1200" b="1" i="0">
+              <a:rPr sz="1100" b="0" i="0">
+                <a:solidFill>
+                  <a:srgbClr val="333F52"/>
+                </a:solidFill>
+                <a:latin typeface="Calibri"/>
+              </a:rPr>
+              <a:t>OQ-1 — client project or namespaced env. The CD job is wired and gated. Two named contacts: one data owner + one engineering lead.</a:t>
+            </a:r>
+          </a:p>
+        </p:txBody>
+      </p:sp>
+      <p:sp>
+        <p:nvSpPr>
+          <p:cNvPr id="10" name="Rectangle 9"/>
+          <p:cNvSpPr/>
+          <p:nvPr/>
+        </p:nvSpPr>
+        <p:spPr>
+          <a:xfrm>
+            <a:off x="502920" y="5852160"/>
+            <a:ext cx="11185855" cy="502920"/>
+          </a:xfrm>
+          <a:prstGeom prst="rect">
+            <a:avLst/>
+          </a:prstGeom>
+          <a:solidFill>
+            <a:srgbClr val="0B1F3A"/>
+          </a:solidFill>
+          <a:ln>
+            <a:noFill/>
+          </a:ln>
+        </p:spPr>
+        <p:style>
+          <a:lnRef idx="1">
+            <a:schemeClr val="accent1"/>
+          </a:lnRef>
+          <a:fillRef idx="3">
+            <a:schemeClr val="accent1"/>
+          </a:fillRef>
+          <a:effectRef idx="2">
+            <a:schemeClr val="accent1"/>
+          </a:effectRef>
+          <a:fontRef idx="minor">
+            <a:schemeClr val="lt1"/>
+          </a:fontRef>
+        </p:style>
+        <p:txBody>
+          <a:bodyPr rtlCol="0" anchor="ctr" lIns="182880" tIns="109728" wrap="square"/>
+          <a:lstStyle/>
+          <a:p>
+            <a:pPr algn="ctr"/>
+            <a:r>
+              <a:rPr sz="1000" b="1" i="0">
                 <a:solidFill>
                   <a:srgbClr val="D97306"/>
                 </a:solidFill>
                 <a:latin typeface="Calibri"/>
               </a:rPr>
-              <a:t>•  </a:t>
-            </a:r>
-            <a:r>
-              <a:rPr sz="1200" b="0" i="0">
-                <a:solidFill>
-                  <a:srgbClr val="333F52"/>
-                </a:solidFill>
-                <a:latin typeface="Calibri"/>
-              </a:rPr>
-              <a:t>Compliance sign-off on ADRs 0004 (FCA boundary) and 0005 (GA4 PII). Two named contacts: one data owner + one engineering lead.</a:t>
-            </a:r>
-          </a:p>
-          <a:p>
-            <a:pPr>
-              <a:lnSpc>
-                <a:spcPct val="120000"/>
-              </a:lnSpc>
-              <a:spcAft>
-                <a:spcPts val="600"/>
-              </a:spcAft>
-            </a:pPr>
-            <a:r>
-              <a:rPr sz="1600" b="1" i="0">
-                <a:solidFill>
-                  <a:srgbClr val="0F6E7A"/>
-                </a:solidFill>
-                <a:latin typeface="Calibri"/>
-              </a:rPr>
-              <a:t>What you also get</a:t>
-            </a:r>
-          </a:p>
-          <a:p>
-            <a:pPr>
-              <a:lnSpc>
-                <a:spcPct val="120000"/>
-              </a:lnSpc>
-              <a:spcAft>
-                <a:spcPts val="300"/>
-              </a:spcAft>
-            </a:pPr>
-            <a:r>
-              <a:rPr sz="1200" b="1" i="0">
-                <a:solidFill>
-                  <a:srgbClr val="D97306"/>
-                </a:solidFill>
-                <a:latin typeface="Calibri"/>
-              </a:rPr>
-              <a:t>•  </a:t>
-            </a:r>
-            <a:r>
-              <a:rPr sz="1200" b="0" i="0">
-                <a:solidFill>
-                  <a:srgbClr val="333F52"/>
-                </a:solidFill>
-                <a:latin typeface="Calibri"/>
-              </a:rPr>
-              <a:t>The Car Insurance failure summary from Ryan refines the 'designed against' tile from speculation to confirmed mitigations.</a:t>
-            </a:r>
-          </a:p>
-          <a:p>
-            <a:pPr>
-              <a:lnSpc>
-                <a:spcPct val="120000"/>
-              </a:lnSpc>
-              <a:spcAft>
-                <a:spcPts val="300"/>
-              </a:spcAft>
-            </a:pPr>
-            <a:r>
-              <a:rPr sz="1200" b="1" i="0">
-                <a:solidFill>
-                  <a:srgbClr val="D97306"/>
-                </a:solidFill>
-                <a:latin typeface="Calibri"/>
-              </a:rPr>
-              <a:t>•  </a:t>
-            </a:r>
-            <a:r>
-              <a:rPr sz="1200" b="0" i="0">
-                <a:solidFill>
-                  <a:srgbClr val="333F52"/>
-                </a:solidFill>
-                <a:latin typeface="Calibri"/>
-              </a:rPr>
-              <a:t>Read-only access to the live staging environment for your team to probe.</a:t>
-            </a:r>
-          </a:p>
-          <a:p>
-            <a:pPr>
-              <a:lnSpc>
-                <a:spcPct val="120000"/>
-              </a:lnSpc>
-              <a:spcAft>
-                <a:spcPts val="600"/>
-              </a:spcAft>
-            </a:pPr>
-            <a:r>
-              <a:rPr sz="1600" b="1" i="0">
-                <a:solidFill>
-                  <a:srgbClr val="0F6E7A"/>
-                </a:solidFill>
-                <a:latin typeface="Calibri"/>
-              </a:rPr>
-              <a:t>What you get at the end</a:t>
-            </a:r>
-          </a:p>
-          <a:p>
-            <a:pPr>
-              <a:lnSpc>
-                <a:spcPct val="120000"/>
-              </a:lnSpc>
-              <a:spcAft>
-                <a:spcPts val="300"/>
-              </a:spcAft>
-            </a:pPr>
-            <a:r>
-              <a:rPr sz="1200" b="1" i="0">
-                <a:solidFill>
-                  <a:srgbClr val="D97306"/>
-                </a:solidFill>
-                <a:latin typeface="Calibri"/>
-              </a:rPr>
-              <a:t>•  </a:t>
-            </a:r>
-            <a:r>
-              <a:rPr sz="1200" b="0" i="0">
-                <a:solidFill>
-                  <a:srgbClr val="333F52"/>
-                </a:solidFill>
-                <a:latin typeface="Calibri"/>
-              </a:rPr>
-              <a:t>A production service on your data, with your on-call team in the cockpit and a signed handover by end-August 2026.</a:t>
-            </a:r>
-          </a:p>
-        </p:txBody>
-      </p:sp>
-      <p:sp>
-        <p:nvSpPr>
-          <p:cNvPr id="5" name="Rectangle 4"/>
+              <a:t>WHAT YOU GET    </a:t>
+            </a:r>
+            <a:r>
+              <a:rPr sz="1100" b="0" i="0">
+                <a:solidFill>
+                  <a:srgbClr val="F4F6FA"/>
+                </a:solidFill>
+                <a:latin typeface="Calibri"/>
+              </a:rPr>
+              <a:t>A production service on your data, your on-call team in the cockpit, signed handover by end-August 2026.</a:t>
+            </a:r>
+          </a:p>
+        </p:txBody>
+      </p:sp>
+      <p:sp>
+        <p:nvSpPr>
+          <p:cNvPr id="11" name="Rectangle 10"/>
           <p:cNvSpPr/>
           <p:nvPr/>
         </p:nvSpPr>
@@ -3880,7 +4000,7 @@
       </p:sp>
       <p:sp>
         <p:nvSpPr>
-          <p:cNvPr id="6" name="TextBox 5"/>
+          <p:cNvPr id="12" name="TextBox 11"/>
           <p:cNvSpPr txBox="1"/>
           <p:nvPr/>
         </p:nvSpPr>
@@ -3982,8 +4102,8 @@
         </p:nvSpPr>
         <p:spPr>
           <a:xfrm>
-            <a:off x="0" y="2743200"/>
-            <a:ext cx="12191695" cy="73152"/>
+            <a:off x="0" y="3291840"/>
+            <a:ext cx="12191695" cy="91440"/>
           </a:xfrm>
           <a:prstGeom prst="rect">
             <a:avLst/>
@@ -4025,8 +4145,8 @@
         </p:nvSpPr>
         <p:spPr>
           <a:xfrm>
-            <a:off x="640080" y="1828800"/>
-            <a:ext cx="10972800" cy="1097280"/>
+            <a:off x="640080" y="1463040"/>
+            <a:ext cx="10972800" cy="365760"/>
           </a:xfrm>
           <a:prstGeom prst="rect">
             <a:avLst/>
@@ -4040,13 +4160,13 @@
           <a:lstStyle/>
           <a:p>
             <a:r>
-              <a:rPr sz="5400" b="1" i="0">
-                <a:solidFill>
-                  <a:srgbClr val="FFFFFF"/>
-                </a:solidFill>
-                <a:latin typeface="Calibri"/>
-              </a:rPr>
-              <a:t>Questions?</a:t>
+              <a:rPr sz="1300" b="1" i="0">
+                <a:solidFill>
+                  <a:srgbClr val="D97306"/>
+                </a:solidFill>
+                <a:latin typeface="Calibri"/>
+              </a:rPr>
+              <a:t>OVER TO YOU</a:t>
             </a:r>
           </a:p>
         </p:txBody>
@@ -4059,8 +4179,8 @@
         </p:nvSpPr>
         <p:spPr>
           <a:xfrm>
-            <a:off x="640080" y="3108960"/>
-            <a:ext cx="10972800" cy="914400"/>
+            <a:off x="640080" y="1920240"/>
+            <a:ext cx="10972800" cy="1280160"/>
           </a:xfrm>
           <a:prstGeom prst="rect">
             <a:avLst/>
@@ -4074,20 +4194,68 @@
           <a:lstStyle/>
           <a:p>
             <a:r>
-              <a:rPr sz="1800" b="0" i="0">
+              <a:rPr sz="6000" b="1" i="0">
+                <a:solidFill>
+                  <a:srgbClr val="FFFFFF"/>
+                </a:solidFill>
+                <a:latin typeface="Calibri"/>
+              </a:rPr>
+              <a:t>Let's get the data flowing.</a:t>
+            </a:r>
+          </a:p>
+        </p:txBody>
+      </p:sp>
+      <p:sp>
+        <p:nvSpPr>
+          <p:cNvPr id="6" name="TextBox 5"/>
+          <p:cNvSpPr txBox="1"/>
+          <p:nvPr/>
+        </p:nvSpPr>
+        <p:spPr>
+          <a:xfrm>
+            <a:off x="640080" y="3657600"/>
+            <a:ext cx="10972800" cy="1371600"/>
+          </a:xfrm>
+          <a:prstGeom prst="rect">
+            <a:avLst/>
+          </a:prstGeom>
+          <a:noFill/>
+        </p:spPr>
+        <p:txBody>
+          <a:bodyPr wrap="square">
+            <a:spAutoFit/>
+          </a:bodyPr>
+          <a:lstStyle/>
+          <a:p>
+            <a:pPr>
+              <a:lnSpc>
+                <a:spcPct val="130000"/>
+              </a:lnSpc>
+            </a:pPr>
+            <a:r>
+              <a:rPr sz="2000" b="0" i="0">
                 <a:solidFill>
                   <a:srgbClr val="F4F6FA"/>
                 </a:solidFill>
                 <a:latin typeface="Calibri"/>
               </a:rPr>
-              <a:t>Predictive RPC Estimator — Credit Cards MVP  ·  Live demo  ·  Q&amp;A</a:t>
-            </a:r>
-          </a:p>
-        </p:txBody>
-      </p:sp>
-      <p:sp>
-        <p:nvSpPr>
-          <p:cNvPr id="6" name="TextBox 5"/>
+              <a:t>GA4 access this week. Event taxonomy next. </a:t>
+            </a:r>
+            <a:r>
+              <a:rPr sz="2000" b="1" i="0">
+                <a:solidFill>
+                  <a:srgbClr val="D97306"/>
+                </a:solidFill>
+                <a:latin typeface="Calibri"/>
+              </a:rPr>
+              <a:t>Cutover end-August.</a:t>
+            </a:r>
+          </a:p>
+        </p:txBody>
+      </p:sp>
+      <p:sp>
+        <p:nvSpPr>
+          <p:cNvPr id="7" name="TextBox 6"/>
           <p:cNvSpPr txBox="1"/>
           <p:nvPr/>
         </p:nvSpPr>
@@ -4110,7 +4278,7 @@
             <a:r>
               <a:rPr sz="1100" b="0" i="0">
                 <a:solidFill>
-                  <a:srgbClr val="D97306"/>
+                  <a:srgbClr val="F4F6FA"/>
                 </a:solidFill>
                 <a:latin typeface="Calibri"/>
               </a:rPr>
@@ -4146,7 +4314,7 @@
         <p:spPr>
           <a:xfrm>
             <a:off x="0" y="0"/>
-            <a:ext cx="12191695" cy="914400"/>
+            <a:ext cx="12191695" cy="6858000"/>
           </a:xfrm>
           <a:prstGeom prst="rect">
             <a:avLst/>
@@ -4173,30 +4341,10 @@
           </a:fontRef>
         </p:style>
         <p:txBody>
-          <a:bodyPr rtlCol="0" anchor="ctr" lIns="548640" tIns="164592" wrap="square"/>
+          <a:bodyPr rtlCol="0" anchor="ctr"/>
           <a:lstStyle/>
           <a:p>
             <a:pPr algn="ctr"/>
-            <a:r>
-              <a:rPr sz="1000" b="1" i="0">
-                <a:solidFill>
-                  <a:srgbClr val="D97306"/>
-                </a:solidFill>
-                <a:latin typeface="Calibri"/>
-              </a:rPr>
-              <a:t>WHY THIS VERTICAL, WHY THIS QUARTER</a:t>
-            </a:r>
-          </a:p>
-          <a:p>
-            <a:r>
-              <a:rPr sz="2400" b="1" i="0">
-                <a:solidFill>
-                  <a:srgbClr val="FFFFFF"/>
-                </a:solidFill>
-                <a:latin typeface="Calibri"/>
-              </a:rPr>
-              <a:t>The opportunity — Credit Cards, now</a:t>
-            </a:r>
           </a:p>
         </p:txBody>
       </p:sp>
@@ -4208,8 +4356,8 @@
         </p:nvSpPr>
         <p:spPr>
           <a:xfrm>
-            <a:off x="548640" y="868680"/>
-            <a:ext cx="1097280" cy="38100"/>
+            <a:off x="0" y="3840480"/>
+            <a:ext cx="12191695" cy="54864"/>
           </a:xfrm>
           <a:prstGeom prst="rect">
             <a:avLst/>
@@ -4251,8 +4399,42 @@
         </p:nvSpPr>
         <p:spPr>
           <a:xfrm>
-            <a:off x="548640" y="1143000"/>
-            <a:ext cx="11094415" cy="5303520"/>
+            <a:off x="640080" y="1280160"/>
+            <a:ext cx="10911535" cy="365760"/>
+          </a:xfrm>
+          <a:prstGeom prst="rect">
+            <a:avLst/>
+          </a:prstGeom>
+          <a:noFill/>
+        </p:spPr>
+        <p:txBody>
+          <a:bodyPr wrap="none">
+            <a:spAutoFit/>
+          </a:bodyPr>
+          <a:lstStyle/>
+          <a:p>
+            <a:r>
+              <a:rPr sz="1300" b="1" i="0">
+                <a:solidFill>
+                  <a:srgbClr val="D97306"/>
+                </a:solidFill>
+                <a:latin typeface="Calibri"/>
+              </a:rPr>
+              <a:t>THE OPPORTUNITY</a:t>
+            </a:r>
+          </a:p>
+        </p:txBody>
+      </p:sp>
+      <p:sp>
+        <p:nvSpPr>
+          <p:cNvPr id="5" name="TextBox 4"/>
+          <p:cNvSpPr txBox="1"/>
+          <p:nvPr/>
+        </p:nvSpPr>
+        <p:spPr>
+          <a:xfrm>
+            <a:off x="640080" y="1920240"/>
+            <a:ext cx="10911535" cy="2011680"/>
           </a:xfrm>
           <a:prstGeom prst="rect">
             <a:avLst/>
@@ -4267,252 +4449,165 @@
           <a:p>
             <a:pPr>
               <a:lnSpc>
-                <a:spcPct val="120000"/>
+                <a:spcPct val="105000"/>
               </a:lnSpc>
-              <a:spcAft>
-                <a:spcPts val="600"/>
-              </a:spcAft>
             </a:pPr>
             <a:r>
-              <a:rPr sz="1700" b="1" i="0">
-                <a:solidFill>
-                  <a:srgbClr val="0F6E7A"/>
-                </a:solidFill>
-                <a:latin typeface="Calibri"/>
-              </a:rPr>
-              <a:t>Flat target-CPA wastes spend on the clicks that matter most.</a:t>
-            </a:r>
-          </a:p>
+              <a:rPr sz="5400" b="1" i="0">
+                <a:solidFill>
+                  <a:srgbClr val="FFFFFF"/>
+                </a:solidFill>
+                <a:latin typeface="Calibri"/>
+              </a:rPr>
+              <a:t>Today every Credit Cards click is priced the same.</a:t>
+            </a:r>
+          </a:p>
+        </p:txBody>
+      </p:sp>
+      <p:sp>
+        <p:nvSpPr>
+          <p:cNvPr id="6" name="TextBox 5"/>
+          <p:cNvSpPr txBox="1"/>
+          <p:nvPr/>
+        </p:nvSpPr>
+        <p:spPr>
+          <a:xfrm>
+            <a:off x="640080" y="4297680"/>
+            <a:ext cx="10911535" cy="1645920"/>
+          </a:xfrm>
+          <a:prstGeom prst="rect">
+            <a:avLst/>
+          </a:prstGeom>
+          <a:noFill/>
+        </p:spPr>
+        <p:txBody>
+          <a:bodyPr wrap="square">
+            <a:spAutoFit/>
+          </a:bodyPr>
+          <a:lstStyle/>
           <a:p>
             <a:pPr>
               <a:lnSpc>
-                <a:spcPct val="120000"/>
+                <a:spcPct val="135000"/>
               </a:lnSpc>
-              <a:spcAft>
-                <a:spcPts val="600"/>
-              </a:spcAft>
             </a:pPr>
             <a:r>
-              <a:rPr sz="1300" b="0" i="0">
-                <a:solidFill>
-                  <a:srgbClr val="333F52"/>
-                </a:solidFill>
-                <a:latin typeface="Calibri"/>
-              </a:rPr>
-              <a:t>Every Credit Cards click is priced the same. The whales — high-value applicants who'd convert at 3× the bid — are under-paid for and lost to rivals. The minnows are over-paid for. You only see the cost 90 days later when the ledger reconciles.</a:t>
-            </a:r>
-          </a:p>
+              <a:rPr sz="2200" b="0" i="0">
+                <a:solidFill>
+                  <a:srgbClr val="F4F6FA"/>
+                </a:solidFill>
+                <a:latin typeface="Calibri"/>
+              </a:rPr>
+              <a:t>You overpay for the minnow. You underbid the whale and a rival takes them. You see the bill 90 days later — when the ledger reconciles, and the budget is gone.</a:t>
+            </a:r>
+          </a:p>
+        </p:txBody>
+      </p:sp>
+      <p:sp>
+        <p:nvSpPr>
+          <p:cNvPr id="7" name="TextBox 6"/>
+          <p:cNvSpPr txBox="1"/>
+          <p:nvPr/>
+        </p:nvSpPr>
+        <p:spPr>
+          <a:xfrm>
+            <a:off x="640080" y="5577840"/>
+            <a:ext cx="10911535" cy="640080"/>
+          </a:xfrm>
+          <a:prstGeom prst="rect">
+            <a:avLst/>
+          </a:prstGeom>
+          <a:noFill/>
+        </p:spPr>
+        <p:txBody>
+          <a:bodyPr wrap="square">
+            <a:spAutoFit/>
+          </a:bodyPr>
+          <a:lstStyle/>
           <a:p>
             <a:pPr>
               <a:lnSpc>
-                <a:spcPct val="120000"/>
+                <a:spcPct val="130000"/>
               </a:lnSpc>
-              <a:spcAft>
-                <a:spcPts val="600"/>
-              </a:spcAft>
             </a:pPr>
             <a:r>
-              <a:rPr sz="1700" b="1" i="0">
-                <a:solidFill>
-                  <a:srgbClr val="0F6E7A"/>
-                </a:solidFill>
-                <a:latin typeface="Calibri"/>
-              </a:rPr>
-              <a:t>Why Credit Cards, why now</a:t>
-            </a:r>
-          </a:p>
-          <a:p>
-            <a:pPr>
-              <a:lnSpc>
-                <a:spcPct val="120000"/>
-              </a:lnSpc>
-              <a:spcAft>
-                <a:spcPts val="300"/>
-              </a:spcAft>
-            </a:pPr>
-            <a:r>
-              <a:rPr sz="1300" b="1" i="0">
+              <a:rPr sz="1000" b="1" i="0">
                 <a:solidFill>
                   <a:srgbClr val="D97306"/>
                 </a:solidFill>
                 <a:latin typeface="Calibri"/>
               </a:rPr>
-              <a:t>•  </a:t>
-            </a:r>
-            <a:r>
-              <a:rPr sz="1300" b="0" i="0">
-                <a:solidFill>
-                  <a:srgbClr val="333F52"/>
-                </a:solidFill>
-                <a:latin typeface="Calibri"/>
-              </a:rPr>
-              <a:t>Near-term commercial pressure on the channel — first vertical to repay the platform investment.</a:t>
-            </a:r>
-          </a:p>
-          <a:p>
-            <a:pPr>
-              <a:lnSpc>
-                <a:spcPct val="120000"/>
-              </a:lnSpc>
-              <a:spcAft>
-                <a:spcPts val="300"/>
-              </a:spcAft>
-            </a:pPr>
-            <a:r>
-              <a:rPr sz="1300" b="1" i="0">
+              <a:t>WHY CC  </a:t>
+            </a:r>
+            <a:r>
+              <a:rPr sz="1100" b="0" i="0">
+                <a:solidFill>
+                  <a:srgbClr val="F4F6FA"/>
+                </a:solidFill>
+                <a:latin typeface="Calibri"/>
+              </a:rPr>
+              <a:t>Near-term commercial pressure on the channel.</a:t>
+            </a:r>
+            <a:r>
+              <a:rPr sz="1100" b="0" i="0">
+                <a:solidFill>
+                  <a:srgbClr val="FFFFFF"/>
+                </a:solidFill>
+                <a:latin typeface="Calibri"/>
+              </a:rPr>
+              <a:t>      </a:t>
+            </a:r>
+            <a:r>
+              <a:rPr sz="1000" b="1" i="0">
                 <a:solidFill>
                   <a:srgbClr val="D97306"/>
                 </a:solidFill>
                 <a:latin typeface="Calibri"/>
               </a:rPr>
-              <a:t>•  </a:t>
-            </a:r>
-            <a:r>
-              <a:rPr sz="1300" b="0" i="0">
-                <a:solidFill>
-                  <a:srgbClr val="333F52"/>
-                </a:solidFill>
-                <a:latin typeface="Calibri"/>
-              </a:rPr>
-              <a:t>Sales coverage rising 50% → 80% by end-June; the model retrains and canary-deploys as coverage climbs.</a:t>
-            </a:r>
-          </a:p>
-          <a:p>
-            <a:pPr>
-              <a:lnSpc>
-                <a:spcPct val="120000"/>
-              </a:lnSpc>
-              <a:spcAft>
-                <a:spcPts val="300"/>
-              </a:spcAft>
-            </a:pPr>
-            <a:r>
-              <a:rPr sz="1300" b="1" i="0">
+              <a:t>WHY NOW  </a:t>
+            </a:r>
+            <a:r>
+              <a:rPr sz="1100" b="0" i="0">
+                <a:solidFill>
+                  <a:srgbClr val="F4F6FA"/>
+                </a:solidFill>
+                <a:latin typeface="Calibri"/>
+              </a:rPr>
+              <a:t>Sales coverage rising 50% → 80% by end-June.</a:t>
+            </a:r>
+            <a:r>
+              <a:rPr sz="1100" b="0" i="0">
+                <a:solidFill>
+                  <a:srgbClr val="FFFFFF"/>
+                </a:solidFill>
+                <a:latin typeface="Calibri"/>
+              </a:rPr>
+              <a:t>      </a:t>
+            </a:r>
+            <a:r>
+              <a:rPr sz="1000" b="1" i="0">
                 <a:solidFill>
                   <a:srgbClr val="D97306"/>
                 </a:solidFill>
                 <a:latin typeface="Calibri"/>
               </a:rPr>
-              <a:t>•  </a:t>
-            </a:r>
-            <a:r>
-              <a:rPr sz="1300" b="0" i="0">
-                <a:solidFill>
-                  <a:srgbClr val="333F52"/>
-                </a:solidFill>
-                <a:latin typeface="Calibri"/>
-              </a:rPr>
-              <a:t>Lower regulatory risk than Car Insurance: bid-optimisation only, no customer-decisioning surface — the FCA boundary is enforced in the platform (ADR 0004).</a:t>
-            </a:r>
-          </a:p>
-          <a:p>
-            <a:pPr>
-              <a:lnSpc>
-                <a:spcPct val="120000"/>
-              </a:lnSpc>
-              <a:spcAft>
-                <a:spcPts val="600"/>
-              </a:spcAft>
-            </a:pPr>
-            <a:r>
-              <a:rPr sz="1700" b="1" i="0">
-                <a:solidFill>
-                  <a:srgbClr val="0F6E7A"/>
-                </a:solidFill>
-                <a:latin typeface="Calibri"/>
-              </a:rPr>
-              <a:t>What a predictive bid layer changes</a:t>
-            </a:r>
-          </a:p>
-          <a:p>
-            <a:pPr>
-              <a:lnSpc>
-                <a:spcPct val="120000"/>
-              </a:lnSpc>
-              <a:spcAft>
-                <a:spcPts val="300"/>
-              </a:spcAft>
-            </a:pPr>
-            <a:r>
-              <a:rPr sz="1300" b="1" i="0">
-                <a:solidFill>
-                  <a:srgbClr val="D97306"/>
-                </a:solidFill>
-                <a:latin typeface="Calibri"/>
-              </a:rPr>
-              <a:t>•  </a:t>
-            </a:r>
-            <a:r>
-              <a:rPr sz="1300" b="0" i="0">
-                <a:solidFill>
-                  <a:srgbClr val="333F52"/>
-                </a:solidFill>
-                <a:latin typeface="Calibri"/>
-              </a:rPr>
-              <a:t>Bid the click likely to convert, not the click that already did.</a:t>
-            </a:r>
-          </a:p>
-          <a:p>
-            <a:pPr>
-              <a:lnSpc>
-                <a:spcPct val="120000"/>
-              </a:lnSpc>
-              <a:spcAft>
-                <a:spcPts val="300"/>
-              </a:spcAft>
-            </a:pPr>
-            <a:r>
-              <a:rPr sz="1300" b="1" i="0">
-                <a:solidFill>
-                  <a:srgbClr val="D97306"/>
-                </a:solidFill>
-                <a:latin typeface="Calibri"/>
-              </a:rPr>
-              <a:t>•  </a:t>
-            </a:r>
-            <a:r>
-              <a:rPr sz="1300" b="0" i="0">
-                <a:solidFill>
-                  <a:srgbClr val="333F52"/>
-                </a:solidFill>
-                <a:latin typeface="Calibri"/>
-              </a:rPr>
-              <a:t>Detect campaign degradation before it shows up in revenue — per-segment drift alerts week-over-week.</a:t>
-            </a:r>
-          </a:p>
-          <a:p>
-            <a:pPr>
-              <a:lnSpc>
-                <a:spcPct val="120000"/>
-              </a:lnSpc>
-              <a:spcAft>
-                <a:spcPts val="300"/>
-              </a:spcAft>
-            </a:pPr>
-            <a:r>
-              <a:rPr sz="1300" b="1" i="0">
-                <a:solidFill>
-                  <a:srgbClr val="D97306"/>
-                </a:solidFill>
-                <a:latin typeface="Calibri"/>
-              </a:rPr>
-              <a:t>•  </a:t>
-            </a:r>
-            <a:r>
-              <a:rPr sz="1300" b="0" i="0">
-                <a:solidFill>
-                  <a:srgbClr val="333F52"/>
-                </a:solidFill>
-                <a:latin typeface="Calibri"/>
-              </a:rPr>
-              <a:t>Explain every prediction in plain English — auditable for finance and compliance.</a:t>
-            </a:r>
-          </a:p>
-        </p:txBody>
-      </p:sp>
-      <p:sp>
-        <p:nvSpPr>
-          <p:cNvPr id="5" name="Rectangle 4"/>
+              <a:t>WHY SAFE  </a:t>
+            </a:r>
+            <a:r>
+              <a:rPr sz="1100" b="0" i="0">
+                <a:solidFill>
+                  <a:srgbClr val="F4F6FA"/>
+                </a:solidFill>
+                <a:latin typeface="Calibri"/>
+              </a:rPr>
+              <a:t>Bid-optimisation only; ADR 0004 keeps the FCA boundary.</a:t>
+            </a:r>
+          </a:p>
+        </p:txBody>
+      </p:sp>
+      <p:sp>
+        <p:nvSpPr>
+          <p:cNvPr id="8" name="Rectangle 7"/>
           <p:cNvSpPr/>
           <p:nvPr/>
         </p:nvSpPr>
@@ -4564,7 +4659,7 @@
       </p:sp>
       <p:sp>
         <p:nvSpPr>
-          <p:cNvPr id="6" name="TextBox 5"/>
+          <p:cNvPr id="9" name="TextBox 8"/>
           <p:cNvSpPr txBox="1"/>
           <p:nvPr/>
         </p:nvSpPr>
@@ -4662,7 +4757,7 @@
                 </a:solidFill>
                 <a:latin typeface="Calibri"/>
               </a:rPr>
-              <a:t>LIVE ON GOOGLE CLOUD STAGING TODAY</a:t>
+              <a:t>WHAT YOU CAN SEE — AND WHAT'S RUNNING UNDERNEATH</a:t>
             </a:r>
           </a:p>
           <a:p>
@@ -4673,7 +4768,7 @@
                 </a:solidFill>
                 <a:latin typeface="Calibri"/>
               </a:rPr>
-              <a:t>What we've built</a:t>
+              <a:t>We've built it. It's live.</a:t>
             </a:r>
           </a:p>
         </p:txBody>
@@ -4723,14 +4818,156 @@
       </p:sp>
       <p:sp>
         <p:nvSpPr>
-          <p:cNvPr id="4" name="TextBox 3"/>
+          <p:cNvPr id="4" name="Rounded Rectangle 3"/>
+          <p:cNvSpPr/>
+          <p:nvPr/>
+        </p:nvSpPr>
+        <p:spPr>
+          <a:xfrm>
+            <a:off x="502920" y="1097280"/>
+            <a:ext cx="5432907" cy="2331720"/>
+          </a:xfrm>
+          <a:prstGeom prst="roundRect">
+            <a:avLst>
+              <a:gd name="adj" fmla="val 4000"/>
+            </a:avLst>
+          </a:prstGeom>
+          <a:solidFill>
+            <a:srgbClr val="FFFFFF"/>
+          </a:solidFill>
+          <a:ln w="9525">
+            <a:solidFill>
+              <a:srgbClr val="D7DBE3"/>
+            </a:solidFill>
+          </a:ln>
+        </p:spPr>
+        <p:style>
+          <a:lnRef idx="1">
+            <a:schemeClr val="accent1"/>
+          </a:lnRef>
+          <a:fillRef idx="3">
+            <a:schemeClr val="accent1"/>
+          </a:fillRef>
+          <a:effectRef idx="2">
+            <a:schemeClr val="accent1"/>
+          </a:effectRef>
+          <a:fontRef idx="minor">
+            <a:schemeClr val="lt1"/>
+          </a:fontRef>
+        </p:style>
+        <p:txBody>
+          <a:bodyPr rtlCol="0" anchor="ctr"/>
+          <a:lstStyle/>
+          <a:p>
+            <a:pPr algn="ctr"/>
+          </a:p>
+        </p:txBody>
+      </p:sp>
+      <p:sp>
+        <p:nvSpPr>
+          <p:cNvPr id="5" name="Rectangle 4"/>
+          <p:cNvSpPr/>
+          <p:nvPr/>
+        </p:nvSpPr>
+        <p:spPr>
+          <a:xfrm>
+            <a:off x="502920" y="1097280"/>
+            <a:ext cx="73152" cy="2331720"/>
+          </a:xfrm>
+          <a:prstGeom prst="rect">
+            <a:avLst/>
+          </a:prstGeom>
+          <a:solidFill>
+            <a:srgbClr val="0F6E7A"/>
+          </a:solidFill>
+          <a:ln>
+            <a:noFill/>
+          </a:ln>
+        </p:spPr>
+        <p:style>
+          <a:lnRef idx="1">
+            <a:schemeClr val="accent1"/>
+          </a:lnRef>
+          <a:fillRef idx="3">
+            <a:schemeClr val="accent1"/>
+          </a:fillRef>
+          <a:effectRef idx="2">
+            <a:schemeClr val="accent1"/>
+          </a:effectRef>
+          <a:fontRef idx="minor">
+            <a:schemeClr val="lt1"/>
+          </a:fontRef>
+        </p:style>
+        <p:txBody>
+          <a:bodyPr rtlCol="0" anchor="ctr"/>
+          <a:lstStyle/>
+          <a:p>
+            <a:pPr algn="ctr"/>
+          </a:p>
+        </p:txBody>
+      </p:sp>
+      <p:sp>
+        <p:nvSpPr>
+          <p:cNvPr id="6" name="Oval 5"/>
+          <p:cNvSpPr/>
+          <p:nvPr/>
+        </p:nvSpPr>
+        <p:spPr>
+          <a:xfrm>
+            <a:off x="5432907" y="1280160"/>
+            <a:ext cx="320040" cy="320040"/>
+          </a:xfrm>
+          <a:prstGeom prst="ellipse">
+            <a:avLst/>
+          </a:prstGeom>
+          <a:solidFill>
+            <a:srgbClr val="0F6E7A"/>
+          </a:solidFill>
+          <a:ln>
+            <a:noFill/>
+          </a:ln>
+        </p:spPr>
+        <p:style>
+          <a:lnRef idx="1">
+            <a:schemeClr val="accent1"/>
+          </a:lnRef>
+          <a:fillRef idx="3">
+            <a:schemeClr val="accent1"/>
+          </a:fillRef>
+          <a:effectRef idx="2">
+            <a:schemeClr val="accent1"/>
+          </a:effectRef>
+          <a:fontRef idx="minor">
+            <a:schemeClr val="lt1"/>
+          </a:fontRef>
+        </p:style>
+        <p:txBody>
+          <a:bodyPr rtlCol="0" anchor="ctr" lIns="0" rIns="0" tIns="0" bIns="0"/>
+          <a:lstStyle/>
+          <a:p>
+            <a:pPr algn="ctr"/>
+            <a:r>
+              <a:rPr sz="1400" b="1" i="0">
+                <a:solidFill>
+                  <a:srgbClr val="FFFFFF"/>
+                </a:solidFill>
+                <a:latin typeface="Calibri"/>
+              </a:rPr>
+              <a:t>1</a:t>
+            </a:r>
+          </a:p>
+        </p:txBody>
+      </p:sp>
+      <p:sp>
+        <p:nvSpPr>
+          <p:cNvPr id="7" name="TextBox 6"/>
           <p:cNvSpPr txBox="1"/>
           <p:nvPr/>
         </p:nvSpPr>
         <p:spPr>
           <a:xfrm>
-            <a:off x="502920" y="1143000"/>
-            <a:ext cx="5669280" cy="5303520"/>
+            <a:off x="777240" y="1261872"/>
+            <a:ext cx="4655667" cy="2002536"/>
           </a:xfrm>
           <a:prstGeom prst="rect">
             <a:avLst/>
@@ -4745,202 +4982,220 @@
           <a:p>
             <a:pPr>
               <a:lnSpc>
-                <a:spcPct val="120000"/>
+                <a:spcPct val="110000"/>
               </a:lnSpc>
-              <a:spcAft>
-                <a:spcPts val="600"/>
-              </a:spcAft>
             </a:pPr>
             <a:r>
-              <a:rPr sz="1500" b="1" i="0">
-                <a:solidFill>
-                  <a:srgbClr val="0F6E7A"/>
-                </a:solidFill>
-                <a:latin typeface="Calibri"/>
-              </a:rPr>
-              <a:t>Surfaces (what you see)</a:t>
+              <a:rPr sz="2000" b="1" i="0">
+                <a:solidFill>
+                  <a:srgbClr val="0B1F3A"/>
+                </a:solidFill>
+                <a:latin typeface="Calibri"/>
+              </a:rPr>
+              <a:t>A bidder with a crystal ball</a:t>
             </a:r>
           </a:p>
           <a:p>
             <a:pPr>
               <a:lnSpc>
-                <a:spcPct val="120000"/>
+                <a:spcPct val="130000"/>
               </a:lnSpc>
-              <a:spcAft>
-                <a:spcPts val="300"/>
-              </a:spcAft>
+              <a:spcBef>
+                <a:spcPts val="600"/>
+              </a:spcBef>
             </a:pPr>
             <a:r>
-              <a:rPr sz="1100" b="1" i="0">
-                <a:solidFill>
-                  <a:srgbClr val="D97306"/>
-                </a:solidFill>
-                <a:latin typeface="Calibri"/>
-              </a:rPr>
-              <a:t>•  </a:t>
-            </a:r>
-            <a:r>
-              <a:rPr sz="1100" b="0" i="0">
+              <a:rPr sz="1200" b="0" i="0">
                 <a:solidFill>
                   <a:srgbClr val="333F52"/>
                 </a:solidFill>
                 <a:latin typeface="Calibri"/>
               </a:rPr>
-              <a:t>Executive dashboard — KPIs in £, 90-day default, product-type filter, coverage-audit panel, active-versions panel.</a:t>
+              <a:t>Every Credit Cards click is priced in under a second, on its actual likely revenue.</a:t>
             </a:r>
           </a:p>
           <a:p>
             <a:pPr>
               <a:lnSpc>
-                <a:spcPct val="120000"/>
+                <a:spcPct val="130000"/>
               </a:lnSpc>
-              <a:spcAft>
-                <a:spcPts val="300"/>
-              </a:spcAft>
+              <a:spcBef>
+                <a:spcPts val="600"/>
+              </a:spcBef>
             </a:pPr>
             <a:r>
-              <a:rPr sz="1100" b="1" i="0">
-                <a:solidFill>
-                  <a:srgbClr val="D97306"/>
-                </a:solidFill>
-                <a:latin typeface="Calibri"/>
-              </a:rPr>
-              <a:t>•  </a:t>
-            </a:r>
-            <a:r>
-              <a:rPr sz="1100" b="0" i="0">
-                <a:solidFill>
-                  <a:srgbClr val="333F52"/>
-                </a:solidFill>
-                <a:latin typeface="Calibri"/>
-              </a:rPr>
-              <a:t>Hero before/after — same click, flat-tCPA vs value-based bid vs the £ difference, with a running session counter.</a:t>
-            </a:r>
-          </a:p>
-          <a:p>
-            <a:pPr>
-              <a:lnSpc>
-                <a:spcPct val="120000"/>
-              </a:lnSpc>
-              <a:spcAft>
-                <a:spcPts val="300"/>
-              </a:spcAft>
-            </a:pPr>
-            <a:r>
-              <a:rPr sz="1100" b="1" i="0">
-                <a:solidFill>
-                  <a:srgbClr val="D97306"/>
-                </a:solidFill>
-                <a:latin typeface="Calibri"/>
-              </a:rPr>
-              <a:t>•  </a:t>
-            </a:r>
-            <a:r>
-              <a:rPr sz="1100" b="0" i="0">
-                <a:solidFill>
-                  <a:srgbClr val="333F52"/>
-                </a:solidFill>
-                <a:latin typeface="Calibri"/>
-              </a:rPr>
-              <a:t>Phoebe journey — animated 6-step replay of a user's intent building up, with the bid following it.</a:t>
-            </a:r>
-          </a:p>
-          <a:p>
-            <a:pPr>
-              <a:lnSpc>
-                <a:spcPct val="120000"/>
-              </a:lnSpc>
-              <a:spcAft>
-                <a:spcPts val="300"/>
-              </a:spcAft>
-            </a:pPr>
-            <a:r>
-              <a:rPr sz="1100" b="1" i="0">
-                <a:solidFill>
-                  <a:srgbClr val="D97306"/>
-                </a:solidFill>
-                <a:latin typeface="Calibri"/>
-              </a:rPr>
-              <a:t>•  </a:t>
-            </a:r>
-            <a:r>
-              <a:rPr sz="1100" b="0" i="0">
-                <a:solidFill>
-                  <a:srgbClr val="333F52"/>
-                </a:solidFill>
-                <a:latin typeface="Calibri"/>
-              </a:rPr>
-              <a:t>Live prediction card — CC-shaped form; plain-English SHAP explanation under every prediction.</a:t>
-            </a:r>
-          </a:p>
-          <a:p>
-            <a:pPr>
-              <a:lnSpc>
-                <a:spcPct val="120000"/>
-              </a:lnSpc>
-              <a:spcAft>
-                <a:spcPts val="300"/>
-              </a:spcAft>
-            </a:pPr>
-            <a:r>
-              <a:rPr sz="1100" b="1" i="0">
-                <a:solidFill>
-                  <a:srgbClr val="D97306"/>
-                </a:solidFill>
-                <a:latin typeface="Calibri"/>
-              </a:rPr>
-              <a:t>•  </a:t>
-            </a:r>
-            <a:r>
-              <a:rPr sz="1100" b="0" i="0">
-                <a:solidFill>
-                  <a:srgbClr val="333F52"/>
-                </a:solidFill>
-                <a:latin typeface="Calibri"/>
-              </a:rPr>
-              <a:t>Designed-against tile — three common failure modes, mapped to the platform mitigation.</a:t>
-            </a:r>
-          </a:p>
-          <a:p>
-            <a:pPr>
-              <a:lnSpc>
-                <a:spcPct val="120000"/>
-              </a:lnSpc>
-              <a:spcAft>
-                <a:spcPts val="300"/>
-              </a:spcAft>
-            </a:pPr>
-            <a:r>
-              <a:rPr sz="1100" b="1" i="0">
-                <a:solidFill>
-                  <a:srgbClr val="D97306"/>
-                </a:solidFill>
-                <a:latin typeface="Calibri"/>
-              </a:rPr>
-              <a:t>•  </a:t>
-            </a:r>
-            <a:r>
-              <a:rPr sz="1100" b="0" i="0">
-                <a:solidFill>
-                  <a:srgbClr val="333F52"/>
-                </a:solidFill>
-                <a:latin typeface="Calibri"/>
-              </a:rPr>
-              <a:t>REST API — same predictions for SA360 / SSGTM / OCI.</a:t>
-            </a:r>
-          </a:p>
-        </p:txBody>
-      </p:sp>
-      <p:sp>
-        <p:nvSpPr>
-          <p:cNvPr id="5" name="TextBox 4"/>
+              <a:rPr sz="900" b="1" i="0">
+                <a:solidFill>
+                  <a:srgbClr val="0F6E7A"/>
+                </a:solidFill>
+                <a:latin typeface="Calibri"/>
+              </a:rPr>
+              <a:t>Underneath:  </a:t>
+            </a:r>
+            <a:r>
+              <a:rPr sz="900" b="0" i="0">
+                <a:solidFill>
+                  <a:srgbClr val="6B7380"/>
+                </a:solidFill>
+                <a:latin typeface="Calibri"/>
+              </a:rPr>
+              <a:t>scoring-api (Rust on Cloud Run)  ·  Vertex AI XGBoost endpoint  ·  p95 &lt; 1 s on staging.</a:t>
+            </a:r>
+          </a:p>
+        </p:txBody>
+      </p:sp>
+      <p:sp>
+        <p:nvSpPr>
+          <p:cNvPr id="8" name="Rounded Rectangle 7"/>
+          <p:cNvSpPr/>
+          <p:nvPr/>
+        </p:nvSpPr>
+        <p:spPr>
+          <a:xfrm>
+            <a:off x="6118707" y="1097280"/>
+            <a:ext cx="5432907" cy="2331720"/>
+          </a:xfrm>
+          <a:prstGeom prst="roundRect">
+            <a:avLst>
+              <a:gd name="adj" fmla="val 4000"/>
+            </a:avLst>
+          </a:prstGeom>
+          <a:solidFill>
+            <a:srgbClr val="FFFFFF"/>
+          </a:solidFill>
+          <a:ln w="9525">
+            <a:solidFill>
+              <a:srgbClr val="D7DBE3"/>
+            </a:solidFill>
+          </a:ln>
+        </p:spPr>
+        <p:style>
+          <a:lnRef idx="1">
+            <a:schemeClr val="accent1"/>
+          </a:lnRef>
+          <a:fillRef idx="3">
+            <a:schemeClr val="accent1"/>
+          </a:fillRef>
+          <a:effectRef idx="2">
+            <a:schemeClr val="accent1"/>
+          </a:effectRef>
+          <a:fontRef idx="minor">
+            <a:schemeClr val="lt1"/>
+          </a:fontRef>
+        </p:style>
+        <p:txBody>
+          <a:bodyPr rtlCol="0" anchor="ctr"/>
+          <a:lstStyle/>
+          <a:p>
+            <a:pPr algn="ctr"/>
+          </a:p>
+        </p:txBody>
+      </p:sp>
+      <p:sp>
+        <p:nvSpPr>
+          <p:cNvPr id="9" name="Rectangle 8"/>
+          <p:cNvSpPr/>
+          <p:nvPr/>
+        </p:nvSpPr>
+        <p:spPr>
+          <a:xfrm>
+            <a:off x="6118707" y="1097280"/>
+            <a:ext cx="73152" cy="2331720"/>
+          </a:xfrm>
+          <a:prstGeom prst="rect">
+            <a:avLst/>
+          </a:prstGeom>
+          <a:solidFill>
+            <a:srgbClr val="D97306"/>
+          </a:solidFill>
+          <a:ln>
+            <a:noFill/>
+          </a:ln>
+        </p:spPr>
+        <p:style>
+          <a:lnRef idx="1">
+            <a:schemeClr val="accent1"/>
+          </a:lnRef>
+          <a:fillRef idx="3">
+            <a:schemeClr val="accent1"/>
+          </a:fillRef>
+          <a:effectRef idx="2">
+            <a:schemeClr val="accent1"/>
+          </a:effectRef>
+          <a:fontRef idx="minor">
+            <a:schemeClr val="lt1"/>
+          </a:fontRef>
+        </p:style>
+        <p:txBody>
+          <a:bodyPr rtlCol="0" anchor="ctr"/>
+          <a:lstStyle/>
+          <a:p>
+            <a:pPr algn="ctr"/>
+          </a:p>
+        </p:txBody>
+      </p:sp>
+      <p:sp>
+        <p:nvSpPr>
+          <p:cNvPr id="10" name="Oval 9"/>
+          <p:cNvSpPr/>
+          <p:nvPr/>
+        </p:nvSpPr>
+        <p:spPr>
+          <a:xfrm>
+            <a:off x="11048695" y="1280160"/>
+            <a:ext cx="320040" cy="320040"/>
+          </a:xfrm>
+          <a:prstGeom prst="ellipse">
+            <a:avLst/>
+          </a:prstGeom>
+          <a:solidFill>
+            <a:srgbClr val="D97306"/>
+          </a:solidFill>
+          <a:ln>
+            <a:noFill/>
+          </a:ln>
+        </p:spPr>
+        <p:style>
+          <a:lnRef idx="1">
+            <a:schemeClr val="accent1"/>
+          </a:lnRef>
+          <a:fillRef idx="3">
+            <a:schemeClr val="accent1"/>
+          </a:fillRef>
+          <a:effectRef idx="2">
+            <a:schemeClr val="accent1"/>
+          </a:effectRef>
+          <a:fontRef idx="minor">
+            <a:schemeClr val="lt1"/>
+          </a:fontRef>
+        </p:style>
+        <p:txBody>
+          <a:bodyPr rtlCol="0" anchor="ctr" lIns="0" rIns="0" tIns="0" bIns="0"/>
+          <a:lstStyle/>
+          <a:p>
+            <a:pPr algn="ctr"/>
+            <a:r>
+              <a:rPr sz="1400" b="1" i="0">
+                <a:solidFill>
+                  <a:srgbClr val="FFFFFF"/>
+                </a:solidFill>
+                <a:latin typeface="Calibri"/>
+              </a:rPr>
+              <a:t>2</a:t>
+            </a:r>
+          </a:p>
+        </p:txBody>
+      </p:sp>
+      <p:sp>
+        <p:nvSpPr>
+          <p:cNvPr id="11" name="TextBox 10"/>
           <p:cNvSpPr txBox="1"/>
           <p:nvPr/>
         </p:nvSpPr>
         <p:spPr>
           <a:xfrm>
-            <a:off x="6355080" y="1143000"/>
-            <a:ext cx="5669280" cy="5303520"/>
+            <a:off x="6393027" y="1261872"/>
+            <a:ext cx="4655667" cy="2002536"/>
           </a:xfrm>
           <a:prstGeom prst="rect">
             <a:avLst/>
@@ -4955,202 +5210,353 @@
           <a:p>
             <a:pPr>
               <a:lnSpc>
-                <a:spcPct val="120000"/>
+                <a:spcPct val="110000"/>
               </a:lnSpc>
-              <a:spcAft>
-                <a:spcPts val="600"/>
-              </a:spcAft>
             </a:pPr>
             <a:r>
-              <a:rPr sz="1500" b="1" i="0">
-                <a:solidFill>
-                  <a:srgbClr val="0F6E7A"/>
-                </a:solidFill>
-                <a:latin typeface="Calibri"/>
-              </a:rPr>
-              <a:t>Underneath (what's running)</a:t>
+              <a:rPr sz="2000" b="1" i="0">
+                <a:solidFill>
+                  <a:srgbClr val="0B1F3A"/>
+                </a:solidFill>
+                <a:latin typeface="Calibri"/>
+              </a:rPr>
+              <a:t>Every prediction explainable</a:t>
             </a:r>
           </a:p>
           <a:p>
             <a:pPr>
               <a:lnSpc>
-                <a:spcPct val="120000"/>
+                <a:spcPct val="130000"/>
               </a:lnSpc>
-              <a:spcAft>
-                <a:spcPts val="300"/>
-              </a:spcAft>
+              <a:spcBef>
+                <a:spcPts val="600"/>
+              </a:spcBef>
             </a:pPr>
             <a:r>
-              <a:rPr sz="1100" b="1" i="0">
-                <a:solidFill>
-                  <a:srgbClr val="D97306"/>
-                </a:solidFill>
-                <a:latin typeface="Calibri"/>
-              </a:rPr>
-              <a:t>•  </a:t>
-            </a:r>
-            <a:r>
-              <a:rPr sz="1100" b="0" i="0">
+              <a:rPr sz="1200" b="0" i="0">
                 <a:solidFill>
                   <a:srgbClr val="333F52"/>
                 </a:solidFill>
                 <a:latin typeface="Calibri"/>
               </a:rPr>
-              <a:t>scoring-api (Rust on Cloud Run) — p95 &lt; 1 second, kill-switch flag, circuit breaker, bounds → fallback.</a:t>
+              <a:t>Plain-English attribution chart on every score — auditable for finance and compliance.</a:t>
             </a:r>
           </a:p>
           <a:p>
             <a:pPr>
               <a:lnSpc>
-                <a:spcPct val="120000"/>
+                <a:spcPct val="130000"/>
               </a:lnSpc>
-              <a:spcAft>
-                <a:spcPts val="300"/>
-              </a:spcAft>
+              <a:spcBef>
+                <a:spcPts val="600"/>
+              </a:spcBef>
             </a:pPr>
             <a:r>
-              <a:rPr sz="1100" b="1" i="0">
+              <a:rPr sz="900" b="1" i="0">
                 <a:solidFill>
                   <a:srgbClr val="D97306"/>
                 </a:solidFill>
                 <a:latin typeface="Calibri"/>
               </a:rPr>
-              <a:t>•  </a:t>
-            </a:r>
-            <a:r>
-              <a:rPr sz="1100" b="0" i="0">
-                <a:solidFill>
-                  <a:srgbClr val="333F52"/>
-                </a:solidFill>
-                <a:latin typeface="Calibri"/>
-              </a:rPr>
-              <a:t>Vertex AI online endpoint — XGBoost regressor, native SHAP explainability, canary traffic-split for rollout.</a:t>
-            </a:r>
-          </a:p>
+              <a:t>Underneath:  </a:t>
+            </a:r>
+            <a:r>
+              <a:rPr sz="900" b="0" i="0">
+                <a:solidFill>
+                  <a:srgbClr val="6B7380"/>
+                </a:solidFill>
+                <a:latin typeface="Calibri"/>
+              </a:rPr>
+              <a:t>Native SHAP via Vertex explanationSpec  ·  ADR 0004 blocks output from reaching customer terms.</a:t>
+            </a:r>
+          </a:p>
+        </p:txBody>
+      </p:sp>
+      <p:sp>
+        <p:nvSpPr>
+          <p:cNvPr id="12" name="Rounded Rectangle 11"/>
+          <p:cNvSpPr/>
+          <p:nvPr/>
+        </p:nvSpPr>
+        <p:spPr>
+          <a:xfrm>
+            <a:off x="502920" y="3611880"/>
+            <a:ext cx="5432907" cy="2331720"/>
+          </a:xfrm>
+          <a:prstGeom prst="roundRect">
+            <a:avLst>
+              <a:gd name="adj" fmla="val 4000"/>
+            </a:avLst>
+          </a:prstGeom>
+          <a:solidFill>
+            <a:srgbClr val="FFFFFF"/>
+          </a:solidFill>
+          <a:ln w="9525">
+            <a:solidFill>
+              <a:srgbClr val="D7DBE3"/>
+            </a:solidFill>
+          </a:ln>
+        </p:spPr>
+        <p:style>
+          <a:lnRef idx="1">
+            <a:schemeClr val="accent1"/>
+          </a:lnRef>
+          <a:fillRef idx="3">
+            <a:schemeClr val="accent1"/>
+          </a:fillRef>
+          <a:effectRef idx="2">
+            <a:schemeClr val="accent1"/>
+          </a:effectRef>
+          <a:fontRef idx="minor">
+            <a:schemeClr val="lt1"/>
+          </a:fontRef>
+        </p:style>
+        <p:txBody>
+          <a:bodyPr rtlCol="0" anchor="ctr"/>
+          <a:lstStyle/>
+          <a:p>
+            <a:pPr algn="ctr"/>
+          </a:p>
+        </p:txBody>
+      </p:sp>
+      <p:sp>
+        <p:nvSpPr>
+          <p:cNvPr id="13" name="Rectangle 12"/>
+          <p:cNvSpPr/>
+          <p:nvPr/>
+        </p:nvSpPr>
+        <p:spPr>
+          <a:xfrm>
+            <a:off x="502920" y="3611880"/>
+            <a:ext cx="73152" cy="2331720"/>
+          </a:xfrm>
+          <a:prstGeom prst="rect">
+            <a:avLst/>
+          </a:prstGeom>
+          <a:solidFill>
+            <a:srgbClr val="1F8A4F"/>
+          </a:solidFill>
+          <a:ln>
+            <a:noFill/>
+          </a:ln>
+        </p:spPr>
+        <p:style>
+          <a:lnRef idx="1">
+            <a:schemeClr val="accent1"/>
+          </a:lnRef>
+          <a:fillRef idx="3">
+            <a:schemeClr val="accent1"/>
+          </a:fillRef>
+          <a:effectRef idx="2">
+            <a:schemeClr val="accent1"/>
+          </a:effectRef>
+          <a:fontRef idx="minor">
+            <a:schemeClr val="lt1"/>
+          </a:fontRef>
+        </p:style>
+        <p:txBody>
+          <a:bodyPr rtlCol="0" anchor="ctr"/>
+          <a:lstStyle/>
+          <a:p>
+            <a:pPr algn="ctr"/>
+          </a:p>
+        </p:txBody>
+      </p:sp>
+      <p:sp>
+        <p:nvSpPr>
+          <p:cNvPr id="14" name="Oval 13"/>
+          <p:cNvSpPr/>
+          <p:nvPr/>
+        </p:nvSpPr>
+        <p:spPr>
+          <a:xfrm>
+            <a:off x="5432907" y="3794760"/>
+            <a:ext cx="320040" cy="320040"/>
+          </a:xfrm>
+          <a:prstGeom prst="ellipse">
+            <a:avLst/>
+          </a:prstGeom>
+          <a:solidFill>
+            <a:srgbClr val="1F8A4F"/>
+          </a:solidFill>
+          <a:ln>
+            <a:noFill/>
+          </a:ln>
+        </p:spPr>
+        <p:style>
+          <a:lnRef idx="1">
+            <a:schemeClr val="accent1"/>
+          </a:lnRef>
+          <a:fillRef idx="3">
+            <a:schemeClr val="accent1"/>
+          </a:fillRef>
+          <a:effectRef idx="2">
+            <a:schemeClr val="accent1"/>
+          </a:effectRef>
+          <a:fontRef idx="minor">
+            <a:schemeClr val="lt1"/>
+          </a:fontRef>
+        </p:style>
+        <p:txBody>
+          <a:bodyPr rtlCol="0" anchor="ctr" lIns="0" rIns="0" tIns="0" bIns="0"/>
+          <a:lstStyle/>
+          <a:p>
+            <a:pPr algn="ctr"/>
+            <a:r>
+              <a:rPr sz="1400" b="1" i="0">
+                <a:solidFill>
+                  <a:srgbClr val="FFFFFF"/>
+                </a:solidFill>
+                <a:latin typeface="Calibri"/>
+              </a:rPr>
+              <a:t>3</a:t>
+            </a:r>
+          </a:p>
+        </p:txBody>
+      </p:sp>
+      <p:sp>
+        <p:nvSpPr>
+          <p:cNvPr id="15" name="TextBox 14"/>
+          <p:cNvSpPr txBox="1"/>
+          <p:nvPr/>
+        </p:nvSpPr>
+        <p:spPr>
+          <a:xfrm>
+            <a:off x="777240" y="3776472"/>
+            <a:ext cx="4655667" cy="2002536"/>
+          </a:xfrm>
+          <a:prstGeom prst="rect">
+            <a:avLst/>
+          </a:prstGeom>
+          <a:noFill/>
+        </p:spPr>
+        <p:txBody>
+          <a:bodyPr wrap="square">
+            <a:spAutoFit/>
+          </a:bodyPr>
+          <a:lstStyle/>
           <a:p>
             <a:pPr>
               <a:lnSpc>
-                <a:spcPct val="120000"/>
+                <a:spcPct val="110000"/>
               </a:lnSpc>
-              <a:spcAft>
-                <a:spcPts val="300"/>
-              </a:spcAft>
             </a:pPr>
             <a:r>
-              <a:rPr sz="1100" b="1" i="0">
-                <a:solidFill>
-                  <a:srgbClr val="D97306"/>
-                </a:solidFill>
-                <a:latin typeface="Calibri"/>
-              </a:rPr>
-              <a:t>•  </a:t>
-            </a:r>
-            <a:r>
-              <a:rPr sz="1100" b="0" i="0">
-                <a:solidFill>
-                  <a:srgbClr val="333F52"/>
-                </a:solidFill>
-                <a:latin typeface="Calibri"/>
-              </a:rPr>
-              <a:t>Reconciliation — BigQuery view joins predictions to the 90-day sales ledger; coverage_audit slices the gaps.</a:t>
+              <a:rPr sz="2000" b="1" i="0">
+                <a:solidFill>
+                  <a:srgbClr val="0B1F3A"/>
+                </a:solidFill>
+                <a:latin typeface="Calibri"/>
+              </a:rPr>
+              <a:t>Behavioural intent, day one</a:t>
             </a:r>
           </a:p>
           <a:p>
             <a:pPr>
               <a:lnSpc>
-                <a:spcPct val="120000"/>
+                <a:spcPct val="130000"/>
               </a:lnSpc>
-              <a:spcAft>
-                <a:spcPts val="300"/>
-              </a:spcAft>
+              <a:spcBef>
+                <a:spcPts val="600"/>
+              </a:spcBef>
             </a:pPr>
             <a:r>
-              <a:rPr sz="1100" b="1" i="0">
-                <a:solidFill>
-                  <a:srgbClr val="D97306"/>
-                </a:solidFill>
-                <a:latin typeface="Calibri"/>
-              </a:rPr>
-              <a:t>•  </a:t>
-            </a:r>
-            <a:r>
-              <a:rPr sz="1100" b="0" i="0">
+              <a:rPr sz="1200" b="0" i="0">
                 <a:solidFill>
                   <a:srgbClr val="333F52"/>
                 </a:solidFill>
                 <a:latin typeface="Calibri"/>
               </a:rPr>
-              <a:t>Dataform: phoebe_features, residuals_by_segment, drift_breaches_weekly, coverage_drops_weekly.</a:t>
+              <a:t>The user's session — calculator, guides, compare-N — drives the bid in real time.</a:t>
             </a:r>
           </a:p>
           <a:p>
             <a:pPr>
               <a:lnSpc>
-                <a:spcPct val="120000"/>
+                <a:spcPct val="130000"/>
               </a:lnSpc>
-              <a:spcAft>
-                <a:spcPts val="300"/>
-              </a:spcAft>
+              <a:spcBef>
+                <a:spcPts val="600"/>
+              </a:spcBef>
             </a:pPr>
             <a:r>
-              <a:rPr sz="1100" b="1" i="0">
-                <a:solidFill>
-                  <a:srgbClr val="D97306"/>
-                </a:solidFill>
-                <a:latin typeface="Calibri"/>
-              </a:rPr>
-              <a:t>•  </a:t>
-            </a:r>
-            <a:r>
-              <a:rPr sz="1100" b="0" i="0">
-                <a:solidFill>
-                  <a:srgbClr val="333F52"/>
-                </a:solidFill>
-                <a:latin typeface="Calibri"/>
-              </a:rPr>
-              <a:t>Drift + coverage-drop alerts — Cloud Monitoring policies fire on the dimensions that matter for CC.</a:t>
-            </a:r>
-          </a:p>
-          <a:p>
-            <a:pPr>
-              <a:lnSpc>
-                <a:spcPct val="120000"/>
-              </a:lnSpc>
-              <a:spcAft>
-                <a:spcPts val="300"/>
-              </a:spcAft>
-            </a:pPr>
-            <a:r>
-              <a:rPr sz="1100" b="1" i="0">
-                <a:solidFill>
-                  <a:srgbClr val="D97306"/>
-                </a:solidFill>
-                <a:latin typeface="Calibri"/>
-              </a:rPr>
-              <a:t>•  </a:t>
-            </a:r>
-            <a:r>
-              <a:rPr sz="1100" b="0" i="0">
-                <a:solidFill>
-                  <a:srgbClr val="333F52"/>
-                </a:solidFill>
-                <a:latin typeface="Calibri"/>
-              </a:rPr>
-              <a:t>CD: tag push → build → push → terraform apply → smoke. Rollback is a single Vertex traffic-split.</a:t>
-            </a:r>
-          </a:p>
-        </p:txBody>
-      </p:sp>
-      <p:sp>
-        <p:nvSpPr>
-          <p:cNvPr id="6" name="Rectangle 5"/>
+              <a:rPr sz="900" b="1" i="0">
+                <a:solidFill>
+                  <a:srgbClr val="1F8A4F"/>
+                </a:solidFill>
+                <a:latin typeface="Calibri"/>
+              </a:rPr>
+              <a:t>Underneath:  </a:t>
+            </a:r>
+            <a:r>
+              <a:rPr sz="900" b="0" i="0">
+                <a:solidFill>
+                  <a:srgbClr val="6B7380"/>
+                </a:solidFill>
+                <a:latin typeface="Calibri"/>
+              </a:rPr>
+              <a:t>Phoebe / GA4 nightly rollup  ·  Vertex Feature Store at serving time.</a:t>
+            </a:r>
+          </a:p>
+        </p:txBody>
+      </p:sp>
+      <p:sp>
+        <p:nvSpPr>
+          <p:cNvPr id="16" name="Rounded Rectangle 15"/>
           <p:cNvSpPr/>
           <p:nvPr/>
         </p:nvSpPr>
         <p:spPr>
           <a:xfrm>
-            <a:off x="502920" y="5989320"/>
-            <a:ext cx="11185855" cy="411480"/>
+            <a:off x="6118707" y="3611880"/>
+            <a:ext cx="5432907" cy="2331720"/>
+          </a:xfrm>
+          <a:prstGeom prst="roundRect">
+            <a:avLst>
+              <a:gd name="adj" fmla="val 4000"/>
+            </a:avLst>
+          </a:prstGeom>
+          <a:solidFill>
+            <a:srgbClr val="FFFFFF"/>
+          </a:solidFill>
+          <a:ln w="9525">
+            <a:solidFill>
+              <a:srgbClr val="D7DBE3"/>
+            </a:solidFill>
+          </a:ln>
+        </p:spPr>
+        <p:style>
+          <a:lnRef idx="1">
+            <a:schemeClr val="accent1"/>
+          </a:lnRef>
+          <a:fillRef idx="3">
+            <a:schemeClr val="accent1"/>
+          </a:fillRef>
+          <a:effectRef idx="2">
+            <a:schemeClr val="accent1"/>
+          </a:effectRef>
+          <a:fontRef idx="minor">
+            <a:schemeClr val="lt1"/>
+          </a:fontRef>
+        </p:style>
+        <p:txBody>
+          <a:bodyPr rtlCol="0" anchor="ctr"/>
+          <a:lstStyle/>
+          <a:p>
+            <a:pPr algn="ctr"/>
+          </a:p>
+        </p:txBody>
+      </p:sp>
+      <p:sp>
+        <p:nvSpPr>
+          <p:cNvPr id="17" name="Rectangle 16"/>
+          <p:cNvSpPr/>
+          <p:nvPr/>
+        </p:nvSpPr>
+        <p:spPr>
+          <a:xfrm>
+            <a:off x="6118707" y="3611880"/>
+            <a:ext cx="73152" cy="2331720"/>
           </a:xfrm>
           <a:prstGeom prst="rect">
             <a:avLst/>
@@ -5177,6 +5583,187 @@
           </a:fontRef>
         </p:style>
         <p:txBody>
+          <a:bodyPr rtlCol="0" anchor="ctr"/>
+          <a:lstStyle/>
+          <a:p>
+            <a:pPr algn="ctr"/>
+          </a:p>
+        </p:txBody>
+      </p:sp>
+      <p:sp>
+        <p:nvSpPr>
+          <p:cNvPr id="18" name="Oval 17"/>
+          <p:cNvSpPr/>
+          <p:nvPr/>
+        </p:nvSpPr>
+        <p:spPr>
+          <a:xfrm>
+            <a:off x="11048695" y="3794760"/>
+            <a:ext cx="320040" cy="320040"/>
+          </a:xfrm>
+          <a:prstGeom prst="ellipse">
+            <a:avLst/>
+          </a:prstGeom>
+          <a:solidFill>
+            <a:srgbClr val="0B1F3A"/>
+          </a:solidFill>
+          <a:ln>
+            <a:noFill/>
+          </a:ln>
+        </p:spPr>
+        <p:style>
+          <a:lnRef idx="1">
+            <a:schemeClr val="accent1"/>
+          </a:lnRef>
+          <a:fillRef idx="3">
+            <a:schemeClr val="accent1"/>
+          </a:fillRef>
+          <a:effectRef idx="2">
+            <a:schemeClr val="accent1"/>
+          </a:effectRef>
+          <a:fontRef idx="minor">
+            <a:schemeClr val="lt1"/>
+          </a:fontRef>
+        </p:style>
+        <p:txBody>
+          <a:bodyPr rtlCol="0" anchor="ctr" lIns="0" rIns="0" tIns="0" bIns="0"/>
+          <a:lstStyle/>
+          <a:p>
+            <a:pPr algn="ctr"/>
+            <a:r>
+              <a:rPr sz="1400" b="1" i="0">
+                <a:solidFill>
+                  <a:srgbClr val="FFFFFF"/>
+                </a:solidFill>
+                <a:latin typeface="Calibri"/>
+              </a:rPr>
+              <a:t>4</a:t>
+            </a:r>
+          </a:p>
+        </p:txBody>
+      </p:sp>
+      <p:sp>
+        <p:nvSpPr>
+          <p:cNvPr id="19" name="TextBox 18"/>
+          <p:cNvSpPr txBox="1"/>
+          <p:nvPr/>
+        </p:nvSpPr>
+        <p:spPr>
+          <a:xfrm>
+            <a:off x="6393027" y="3776472"/>
+            <a:ext cx="4655667" cy="2002536"/>
+          </a:xfrm>
+          <a:prstGeom prst="rect">
+            <a:avLst/>
+          </a:prstGeom>
+          <a:noFill/>
+        </p:spPr>
+        <p:txBody>
+          <a:bodyPr wrap="square">
+            <a:spAutoFit/>
+          </a:bodyPr>
+          <a:lstStyle/>
+          <a:p>
+            <a:pPr>
+              <a:lnSpc>
+                <a:spcPct val="110000"/>
+              </a:lnSpc>
+            </a:pPr>
+            <a:r>
+              <a:rPr sz="2000" b="1" i="0">
+                <a:solidFill>
+                  <a:srgbClr val="0B1F3A"/>
+                </a:solidFill>
+                <a:latin typeface="Calibri"/>
+              </a:rPr>
+              <a:t>A safety net you can demo</a:t>
+            </a:r>
+          </a:p>
+          <a:p>
+            <a:pPr>
+              <a:lnSpc>
+                <a:spcPct val="130000"/>
+              </a:lnSpc>
+              <a:spcBef>
+                <a:spcPts val="600"/>
+              </a:spcBef>
+            </a:pPr>
+            <a:r>
+              <a:rPr sz="1200" b="0" i="0">
+                <a:solidFill>
+                  <a:srgbClr val="333F52"/>
+                </a:solidFill>
+                <a:latin typeface="Calibri"/>
+              </a:rPr>
+              <a:t>Bounds, circuit breaker, kill switch, anomaly window — the failure modes have already been thought through.</a:t>
+            </a:r>
+          </a:p>
+          <a:p>
+            <a:pPr>
+              <a:lnSpc>
+                <a:spcPct val="130000"/>
+              </a:lnSpc>
+              <a:spcBef>
+                <a:spcPts val="600"/>
+              </a:spcBef>
+            </a:pPr>
+            <a:r>
+              <a:rPr sz="900" b="1" i="0">
+                <a:solidFill>
+                  <a:srgbClr val="0B1F3A"/>
+                </a:solidFill>
+                <a:latin typeface="Calibri"/>
+              </a:rPr>
+              <a:t>Underneath:  </a:t>
+            </a:r>
+            <a:r>
+              <a:rPr sz="900" b="0" i="0">
+                <a:solidFill>
+                  <a:srgbClr val="6B7380"/>
+                </a:solidFill>
+                <a:latin typeface="Calibri"/>
+              </a:rPr>
+              <a:t>Six Cloud Monitoring alerts  ·  six runbooks  ·  rollback is a Vertex traffic-split.</a:t>
+            </a:r>
+          </a:p>
+        </p:txBody>
+      </p:sp>
+      <p:sp>
+        <p:nvSpPr>
+          <p:cNvPr id="20" name="Rectangle 19"/>
+          <p:cNvSpPr/>
+          <p:nvPr/>
+        </p:nvSpPr>
+        <p:spPr>
+          <a:xfrm>
+            <a:off x="502920" y="5989320"/>
+            <a:ext cx="11185855" cy="411480"/>
+          </a:xfrm>
+          <a:prstGeom prst="rect">
+            <a:avLst/>
+          </a:prstGeom>
+          <a:solidFill>
+            <a:srgbClr val="0B1F3A"/>
+          </a:solidFill>
+          <a:ln>
+            <a:noFill/>
+          </a:ln>
+        </p:spPr>
+        <p:style>
+          <a:lnRef idx="1">
+            <a:schemeClr val="accent1"/>
+          </a:lnRef>
+          <a:fillRef idx="3">
+            <a:schemeClr val="accent1"/>
+          </a:fillRef>
+          <a:effectRef idx="2">
+            <a:schemeClr val="accent1"/>
+          </a:effectRef>
+          <a:fontRef idx="minor">
+            <a:schemeClr val="lt1"/>
+          </a:fontRef>
+        </p:style>
+        <p:txBody>
           <a:bodyPr rtlCol="0" anchor="ctr" lIns="164592" tIns="91440"/>
           <a:lstStyle/>
           <a:p>
@@ -5188,7 +5775,7 @@
                 </a:solidFill>
                 <a:latin typeface="Calibri"/>
               </a:rPr>
-              <a:t>europe-west2 (London)  ·  managed services only  ·  no client infrastructure to operate  ·  </a:t>
+              <a:t>Live on staging  ·  europe-west2  ·  </a:t>
             </a:r>
             <a:r>
               <a:rPr sz="1000" b="1" i="0">
@@ -5204,7 +5791,7 @@
       </p:sp>
       <p:sp>
         <p:nvSpPr>
-          <p:cNvPr id="7" name="Rectangle 6"/>
+          <p:cNvPr id="21" name="Rectangle 20"/>
           <p:cNvSpPr/>
           <p:nvPr/>
         </p:nvSpPr>
@@ -5256,7 +5843,7 @@
       </p:sp>
       <p:sp>
         <p:nvSpPr>
-          <p:cNvPr id="8" name="TextBox 7"/>
+          <p:cNvPr id="22" name="TextBox 21"/>
           <p:cNvSpPr txBox="1"/>
           <p:nvPr/>
         </p:nvSpPr>
@@ -7174,7 +7761,7 @@
                 </a:solidFill>
                 <a:latin typeface="Calibri"/>
               </a:rPr>
-              <a:t>SEVEN BEATS, ONE URL</a:t>
+              <a:t>SEVEN MINUTES, ONE URL</a:t>
             </a:r>
           </a:p>
           <a:p>
@@ -7185,7 +7772,7 @@
                 </a:solidFill>
                 <a:latin typeface="Calibri"/>
               </a:rPr>
-              <a:t>Live demo — what you will see</a:t>
+              <a:t>What you'll see, in seven beats</a:t>
             </a:r>
           </a:p>
         </p:txBody>
@@ -7235,14 +7822,95 @@
       </p:sp>
       <p:sp>
         <p:nvSpPr>
-          <p:cNvPr id="4" name="TextBox 3"/>
+          <p:cNvPr id="4" name="Rounded Rectangle 3"/>
+          <p:cNvSpPr/>
+          <p:nvPr/>
+        </p:nvSpPr>
+        <p:spPr>
+          <a:xfrm>
+            <a:off x="502920" y="1234440"/>
+            <a:ext cx="2693593" cy="1965960"/>
+          </a:xfrm>
+          <a:prstGeom prst="roundRect">
+            <a:avLst>
+              <a:gd name="adj" fmla="val 6000"/>
+            </a:avLst>
+          </a:prstGeom>
+          <a:solidFill>
+            <a:srgbClr val="FFFFFF"/>
+          </a:solidFill>
+          <a:ln w="9525">
+            <a:solidFill>
+              <a:srgbClr val="D7DBE3"/>
+            </a:solidFill>
+          </a:ln>
+        </p:spPr>
+        <p:style>
+          <a:lnRef idx="1">
+            <a:schemeClr val="accent1"/>
+          </a:lnRef>
+          <a:fillRef idx="3">
+            <a:schemeClr val="accent1"/>
+          </a:fillRef>
+          <a:effectRef idx="2">
+            <a:schemeClr val="accent1"/>
+          </a:effectRef>
+          <a:fontRef idx="minor">
+            <a:schemeClr val="lt1"/>
+          </a:fontRef>
+        </p:style>
+        <p:txBody>
+          <a:bodyPr rtlCol="0" anchor="ctr"/>
+          <a:lstStyle/>
+          <a:p>
+            <a:pPr algn="ctr"/>
+          </a:p>
+        </p:txBody>
+      </p:sp>
+      <p:sp>
+        <p:nvSpPr>
+          <p:cNvPr id="5" name="TextBox 4"/>
           <p:cNvSpPr txBox="1"/>
           <p:nvPr/>
         </p:nvSpPr>
         <p:spPr>
           <a:xfrm>
-            <a:off x="502920" y="1143000"/>
-            <a:ext cx="5669280" cy="5303520"/>
+            <a:off x="667512" y="1325880"/>
+            <a:ext cx="914400" cy="640080"/>
+          </a:xfrm>
+          <a:prstGeom prst="rect">
+            <a:avLst/>
+          </a:prstGeom>
+          <a:noFill/>
+        </p:spPr>
+        <p:txBody>
+          <a:bodyPr wrap="none">
+            <a:spAutoFit/>
+          </a:bodyPr>
+          <a:lstStyle/>
+          <a:p>
+            <a:r>
+              <a:rPr sz="2800" b="1" i="0">
+                <a:solidFill>
+                  <a:srgbClr val="D97306"/>
+                </a:solidFill>
+                <a:latin typeface="Calibri"/>
+              </a:rPr>
+              <a:t>01</a:t>
+            </a:r>
+          </a:p>
+        </p:txBody>
+      </p:sp>
+      <p:sp>
+        <p:nvSpPr>
+          <p:cNvPr id="6" name="TextBox 5"/>
+          <p:cNvSpPr txBox="1"/>
+          <p:nvPr/>
+        </p:nvSpPr>
+        <p:spPr>
+          <a:xfrm>
+            <a:off x="667512" y="2103120"/>
+            <a:ext cx="2364409" cy="640080"/>
           </a:xfrm>
           <a:prstGeom prst="rect">
             <a:avLst/>
@@ -7257,167 +7925,31 @@
           <a:p>
             <a:pPr>
               <a:lnSpc>
-                <a:spcPct val="115000"/>
+                <a:spcPct val="110000"/>
               </a:lnSpc>
-              <a:spcAft>
-                <a:spcPts val="600"/>
-              </a:spcAft>
             </a:pPr>
             <a:r>
               <a:rPr sz="1500" b="1" i="0">
                 <a:solidFill>
-                  <a:srgbClr val="0F6E7A"/>
-                </a:solidFill>
-                <a:latin typeface="Calibri"/>
-              </a:rPr>
-              <a:t>1. KPIs + product-type filter</a:t>
-            </a:r>
-          </a:p>
-          <a:p>
-            <a:pPr>
-              <a:lnSpc>
-                <a:spcPct val="115000"/>
-              </a:lnSpc>
-              <a:spcAft>
-                <a:spcPts val="600"/>
-              </a:spcAft>
-            </a:pPr>
-            <a:r>
-              <a:rPr sz="1100" b="0" i="0">
-                <a:solidFill>
-                  <a:srgbClr val="333F52"/>
-                </a:solidFill>
-                <a:latin typeface="Calibri"/>
-              </a:rPr>
-              <a:t>Five KPIs in £; 90-day default window; product-type filter re-segments the chart instantly.</a:t>
-            </a:r>
-          </a:p>
-          <a:p>
-            <a:pPr>
-              <a:lnSpc>
-                <a:spcPct val="115000"/>
-              </a:lnSpc>
-              <a:spcAft>
-                <a:spcPts val="600"/>
-              </a:spcAft>
-            </a:pPr>
-            <a:r>
-              <a:rPr sz="1500" b="1" i="0">
-                <a:solidFill>
-                  <a:srgbClr val="0F6E7A"/>
-                </a:solidFill>
-                <a:latin typeface="Calibri"/>
-              </a:rPr>
-              <a:t>2. Coverage panel</a:t>
-            </a:r>
-          </a:p>
-          <a:p>
-            <a:pPr>
-              <a:lnSpc>
-                <a:spcPct val="115000"/>
-              </a:lnSpc>
-              <a:spcAft>
-                <a:spcPts val="600"/>
-              </a:spcAft>
-            </a:pPr>
-            <a:r>
-              <a:rPr sz="1100" b="0" i="0">
-                <a:solidFill>
-                  <a:srgbClr val="333F52"/>
-                </a:solidFill>
-                <a:latin typeface="Calibri"/>
-              </a:rPr>
-              <a:t>Bar chart per product slice; red bars are slices below 60% — the slices that need ingestion backfill before retraining. This is how we answer the 50% question, slice by slice.</a:t>
-            </a:r>
-          </a:p>
-          <a:p>
-            <a:pPr>
-              <a:lnSpc>
-                <a:spcPct val="115000"/>
-              </a:lnSpc>
-              <a:spcAft>
-                <a:spcPts val="600"/>
-              </a:spcAft>
-            </a:pPr>
-            <a:r>
-              <a:rPr sz="1500" b="1" i="0">
-                <a:solidFill>
-                  <a:srgbClr val="0F6E7A"/>
-                </a:solidFill>
-                <a:latin typeface="Calibri"/>
-              </a:rPr>
-              <a:t>3. Hero before/after</a:t>
-            </a:r>
-          </a:p>
-          <a:p>
-            <a:pPr>
-              <a:lnSpc>
-                <a:spcPct val="115000"/>
-              </a:lnSpc>
-              <a:spcAft>
-                <a:spcPts val="600"/>
-              </a:spcAft>
-            </a:pPr>
-            <a:r>
-              <a:rPr sz="1100" b="0" i="0">
-                <a:solidFill>
-                  <a:srgbClr val="333F52"/>
-                </a:solidFill>
-                <a:latin typeface="Calibri"/>
-              </a:rPr>
-              <a:t>Same click, three cards: flat tCPA target, value-based bid (predicted RPC × bid efficiency), the £ difference. Session counter accumulates across every prediction the audience fires.</a:t>
-            </a:r>
-          </a:p>
-          <a:p>
-            <a:pPr>
-              <a:lnSpc>
-                <a:spcPct val="115000"/>
-              </a:lnSpc>
-              <a:spcAft>
-                <a:spcPts val="600"/>
-              </a:spcAft>
-            </a:pPr>
-            <a:r>
-              <a:rPr sz="1500" b="1" i="0">
-                <a:solidFill>
-                  <a:srgbClr val="0F6E7A"/>
-                </a:solidFill>
-                <a:latin typeface="Calibri"/>
-              </a:rPr>
-              <a:t>4. Live prediction card</a:t>
-            </a:r>
-          </a:p>
-          <a:p>
-            <a:pPr>
-              <a:lnSpc>
-                <a:spcPct val="115000"/>
-              </a:lnSpc>
-              <a:spcAft>
-                <a:spcPts val="600"/>
-              </a:spcAft>
-            </a:pPr>
-            <a:r>
-              <a:rPr sz="1100" b="0" i="0">
-                <a:solidFill>
-                  <a:srgbClr val="333F52"/>
-                </a:solidFill>
-                <a:latin typeface="Calibri"/>
-              </a:rPr>
-              <a:t>Form in CC language — product type, calculator used, guides read, cards compared, time engaged. Press Predict — pipeline trace lights up live: validate → guardrails → Vertex → BigQuery → SHAP.</a:t>
-            </a:r>
-          </a:p>
-        </p:txBody>
-      </p:sp>
-      <p:sp>
-        <p:nvSpPr>
-          <p:cNvPr id="5" name="TextBox 4"/>
+                  <a:srgbClr val="0B1F3A"/>
+                </a:solidFill>
+                <a:latin typeface="Calibri"/>
+              </a:rPr>
+              <a:t>KPIs in pounds</a:t>
+            </a:r>
+          </a:p>
+        </p:txBody>
+      </p:sp>
+      <p:sp>
+        <p:nvSpPr>
+          <p:cNvPr id="7" name="TextBox 6"/>
           <p:cNvSpPr txBox="1"/>
           <p:nvPr/>
         </p:nvSpPr>
         <p:spPr>
           <a:xfrm>
-            <a:off x="6355080" y="1143000"/>
-            <a:ext cx="5669280" cy="5303520"/>
+            <a:off x="667512" y="2651760"/>
+            <a:ext cx="2364409" cy="411480"/>
           </a:xfrm>
           <a:prstGeom prst="rect">
             <a:avLst/>
@@ -7432,138 +7964,1070 @@
           <a:p>
             <a:pPr>
               <a:lnSpc>
-                <a:spcPct val="115000"/>
+                <a:spcPct val="130000"/>
               </a:lnSpc>
-              <a:spcAft>
-                <a:spcPts val="600"/>
-              </a:spcAft>
             </a:pPr>
             <a:r>
-              <a:rPr sz="1500" b="1" i="0">
-                <a:solidFill>
-                  <a:srgbClr val="0F6E7A"/>
-                </a:solidFill>
-                <a:latin typeface="Calibri"/>
-              </a:rPr>
-              <a:t>5. Phoebe journey — bouncer with a crystal ball</a:t>
-            </a:r>
-          </a:p>
+              <a:rPr sz="1100" b="0" i="0">
+                <a:solidFill>
+                  <a:srgbClr val="333F52"/>
+                </a:solidFill>
+                <a:latin typeface="Calibri"/>
+              </a:rPr>
+              <a:t>Five tiles. 90-day window. Product-type filter.</a:t>
+            </a:r>
+          </a:p>
+        </p:txBody>
+      </p:sp>
+      <p:sp>
+        <p:nvSpPr>
+          <p:cNvPr id="8" name="Rounded Rectangle 7"/>
+          <p:cNvSpPr/>
+          <p:nvPr/>
+        </p:nvSpPr>
+        <p:spPr>
+          <a:xfrm>
+            <a:off x="3333673" y="1234440"/>
+            <a:ext cx="2693593" cy="1965960"/>
+          </a:xfrm>
+          <a:prstGeom prst="roundRect">
+            <a:avLst>
+              <a:gd name="adj" fmla="val 6000"/>
+            </a:avLst>
+          </a:prstGeom>
+          <a:solidFill>
+            <a:srgbClr val="FFFFFF"/>
+          </a:solidFill>
+          <a:ln w="9525">
+            <a:solidFill>
+              <a:srgbClr val="D7DBE3"/>
+            </a:solidFill>
+          </a:ln>
+        </p:spPr>
+        <p:style>
+          <a:lnRef idx="1">
+            <a:schemeClr val="accent1"/>
+          </a:lnRef>
+          <a:fillRef idx="3">
+            <a:schemeClr val="accent1"/>
+          </a:fillRef>
+          <a:effectRef idx="2">
+            <a:schemeClr val="accent1"/>
+          </a:effectRef>
+          <a:fontRef idx="minor">
+            <a:schemeClr val="lt1"/>
+          </a:fontRef>
+        </p:style>
+        <p:txBody>
+          <a:bodyPr rtlCol="0" anchor="ctr"/>
+          <a:lstStyle/>
+          <a:p>
+            <a:pPr algn="ctr"/>
+          </a:p>
+        </p:txBody>
+      </p:sp>
+      <p:sp>
+        <p:nvSpPr>
+          <p:cNvPr id="9" name="TextBox 8"/>
+          <p:cNvSpPr txBox="1"/>
+          <p:nvPr/>
+        </p:nvSpPr>
+        <p:spPr>
+          <a:xfrm>
+            <a:off x="3498265" y="1325880"/>
+            <a:ext cx="914400" cy="640080"/>
+          </a:xfrm>
+          <a:prstGeom prst="rect">
+            <a:avLst/>
+          </a:prstGeom>
+          <a:noFill/>
+        </p:spPr>
+        <p:txBody>
+          <a:bodyPr wrap="none">
+            <a:spAutoFit/>
+          </a:bodyPr>
+          <a:lstStyle/>
+          <a:p>
+            <a:r>
+              <a:rPr sz="2800" b="1" i="0">
+                <a:solidFill>
+                  <a:srgbClr val="D97306"/>
+                </a:solidFill>
+                <a:latin typeface="Calibri"/>
+              </a:rPr>
+              <a:t>02</a:t>
+            </a:r>
+          </a:p>
+        </p:txBody>
+      </p:sp>
+      <p:sp>
+        <p:nvSpPr>
+          <p:cNvPr id="10" name="TextBox 9"/>
+          <p:cNvSpPr txBox="1"/>
+          <p:nvPr/>
+        </p:nvSpPr>
+        <p:spPr>
+          <a:xfrm>
+            <a:off x="3498265" y="2103120"/>
+            <a:ext cx="2364409" cy="640080"/>
+          </a:xfrm>
+          <a:prstGeom prst="rect">
+            <a:avLst/>
+          </a:prstGeom>
+          <a:noFill/>
+        </p:spPr>
+        <p:txBody>
+          <a:bodyPr wrap="square">
+            <a:spAutoFit/>
+          </a:bodyPr>
+          <a:lstStyle/>
           <a:p>
             <a:pPr>
               <a:lnSpc>
-                <a:spcPct val="115000"/>
+                <a:spcPct val="110000"/>
               </a:lnSpc>
-              <a:spcAft>
-                <a:spcPts val="600"/>
-              </a:spcAft>
             </a:pPr>
             <a:r>
-              <a:rPr sz="1100" b="0" i="0">
-                <a:solidFill>
-                  <a:srgbClr val="333F52"/>
-                </a:solidFill>
-                <a:latin typeface="Calibri"/>
-              </a:rPr>
-              <a:t>Press Play. A user moves through six steps (search → page → calculator → guides → compare-5 → click). The bid ticks up under each step. A lift pill shows the £ delta from first to last.</a:t>
-            </a:r>
-          </a:p>
+              <a:rPr sz="1500" b="1" i="0">
+                <a:solidFill>
+                  <a:srgbClr val="0B1F3A"/>
+                </a:solidFill>
+                <a:latin typeface="Calibri"/>
+              </a:rPr>
+              <a:t>Coverage, slice by slice</a:t>
+            </a:r>
+          </a:p>
+        </p:txBody>
+      </p:sp>
+      <p:sp>
+        <p:nvSpPr>
+          <p:cNvPr id="11" name="TextBox 10"/>
+          <p:cNvSpPr txBox="1"/>
+          <p:nvPr/>
+        </p:nvSpPr>
+        <p:spPr>
+          <a:xfrm>
+            <a:off x="3498265" y="2651760"/>
+            <a:ext cx="2364409" cy="411480"/>
+          </a:xfrm>
+          <a:prstGeom prst="rect">
+            <a:avLst/>
+          </a:prstGeom>
+          <a:noFill/>
+        </p:spPr>
+        <p:txBody>
+          <a:bodyPr wrap="square">
+            <a:spAutoFit/>
+          </a:bodyPr>
+          <a:lstStyle/>
           <a:p>
             <a:pPr>
               <a:lnSpc>
-                <a:spcPct val="115000"/>
+                <a:spcPct val="130000"/>
               </a:lnSpc>
-              <a:spcAft>
-                <a:spcPts val="600"/>
-              </a:spcAft>
             </a:pPr>
             <a:r>
-              <a:rPr sz="1500" b="1" i="0">
-                <a:solidFill>
-                  <a:srgbClr val="0F6E7A"/>
-                </a:solidFill>
-                <a:latin typeface="Calibri"/>
-              </a:rPr>
-              <a:t>6. Why the model said that</a:t>
-            </a:r>
-          </a:p>
+              <a:rPr sz="1100" b="0" i="0">
+                <a:solidFill>
+                  <a:srgbClr val="333F52"/>
+                </a:solidFill>
+                <a:latin typeface="Calibri"/>
+              </a:rPr>
+              <a:t>Red bars are the slices that need backfill before retraining.</a:t>
+            </a:r>
+          </a:p>
+        </p:txBody>
+      </p:sp>
+      <p:sp>
+        <p:nvSpPr>
+          <p:cNvPr id="12" name="Rounded Rectangle 11"/>
+          <p:cNvSpPr/>
+          <p:nvPr/>
+        </p:nvSpPr>
+        <p:spPr>
+          <a:xfrm>
+            <a:off x="6164427" y="1234440"/>
+            <a:ext cx="2693593" cy="1965960"/>
+          </a:xfrm>
+          <a:prstGeom prst="roundRect">
+            <a:avLst>
+              <a:gd name="adj" fmla="val 6000"/>
+            </a:avLst>
+          </a:prstGeom>
+          <a:solidFill>
+            <a:srgbClr val="FFFFFF"/>
+          </a:solidFill>
+          <a:ln w="9525">
+            <a:solidFill>
+              <a:srgbClr val="D7DBE3"/>
+            </a:solidFill>
+          </a:ln>
+        </p:spPr>
+        <p:style>
+          <a:lnRef idx="1">
+            <a:schemeClr val="accent1"/>
+          </a:lnRef>
+          <a:fillRef idx="3">
+            <a:schemeClr val="accent1"/>
+          </a:fillRef>
+          <a:effectRef idx="2">
+            <a:schemeClr val="accent1"/>
+          </a:effectRef>
+          <a:fontRef idx="minor">
+            <a:schemeClr val="lt1"/>
+          </a:fontRef>
+        </p:style>
+        <p:txBody>
+          <a:bodyPr rtlCol="0" anchor="ctr"/>
+          <a:lstStyle/>
+          <a:p>
+            <a:pPr algn="ctr"/>
+          </a:p>
+        </p:txBody>
+      </p:sp>
+      <p:sp>
+        <p:nvSpPr>
+          <p:cNvPr id="13" name="TextBox 12"/>
+          <p:cNvSpPr txBox="1"/>
+          <p:nvPr/>
+        </p:nvSpPr>
+        <p:spPr>
+          <a:xfrm>
+            <a:off x="6329019" y="1325880"/>
+            <a:ext cx="914400" cy="640080"/>
+          </a:xfrm>
+          <a:prstGeom prst="rect">
+            <a:avLst/>
+          </a:prstGeom>
+          <a:noFill/>
+        </p:spPr>
+        <p:txBody>
+          <a:bodyPr wrap="none">
+            <a:spAutoFit/>
+          </a:bodyPr>
+          <a:lstStyle/>
+          <a:p>
+            <a:r>
+              <a:rPr sz="2800" b="1" i="0">
+                <a:solidFill>
+                  <a:srgbClr val="D97306"/>
+                </a:solidFill>
+                <a:latin typeface="Calibri"/>
+              </a:rPr>
+              <a:t>03</a:t>
+            </a:r>
+          </a:p>
+        </p:txBody>
+      </p:sp>
+      <p:sp>
+        <p:nvSpPr>
+          <p:cNvPr id="14" name="TextBox 13"/>
+          <p:cNvSpPr txBox="1"/>
+          <p:nvPr/>
+        </p:nvSpPr>
+        <p:spPr>
+          <a:xfrm>
+            <a:off x="6329019" y="2103120"/>
+            <a:ext cx="2364409" cy="640080"/>
+          </a:xfrm>
+          <a:prstGeom prst="rect">
+            <a:avLst/>
+          </a:prstGeom>
+          <a:noFill/>
+        </p:spPr>
+        <p:txBody>
+          <a:bodyPr wrap="square">
+            <a:spAutoFit/>
+          </a:bodyPr>
+          <a:lstStyle/>
           <a:p>
             <a:pPr>
               <a:lnSpc>
-                <a:spcPct val="115000"/>
+                <a:spcPct val="110000"/>
               </a:lnSpc>
-              <a:spcAft>
-                <a:spcPts val="600"/>
-              </a:spcAft>
             </a:pPr>
             <a:r>
-              <a:rPr sz="1100" b="0" i="0">
-                <a:solidFill>
-                  <a:srgbClr val="333F52"/>
-                </a:solidFill>
-                <a:latin typeface="Calibri"/>
-              </a:rPr>
-              <a:t>Horizontal-bar SHAP attribution under every prediction. Plain-English names. Auditable for finance and compliance — ADR 0004 blocks these signals from reaching customer terms.</a:t>
-            </a:r>
-          </a:p>
+              <a:rPr sz="1500" b="1" i="0">
+                <a:solidFill>
+                  <a:srgbClr val="0B1F3A"/>
+                </a:solidFill>
+                <a:latin typeface="Calibri"/>
+              </a:rPr>
+              <a:t>Same click, two worlds</a:t>
+            </a:r>
+          </a:p>
+        </p:txBody>
+      </p:sp>
+      <p:sp>
+        <p:nvSpPr>
+          <p:cNvPr id="15" name="TextBox 14"/>
+          <p:cNvSpPr txBox="1"/>
+          <p:nvPr/>
+        </p:nvSpPr>
+        <p:spPr>
+          <a:xfrm>
+            <a:off x="6329019" y="2651760"/>
+            <a:ext cx="2364409" cy="411480"/>
+          </a:xfrm>
+          <a:prstGeom prst="rect">
+            <a:avLst/>
+          </a:prstGeom>
+          <a:noFill/>
+        </p:spPr>
+        <p:txBody>
+          <a:bodyPr wrap="square">
+            <a:spAutoFit/>
+          </a:bodyPr>
+          <a:lstStyle/>
           <a:p>
             <a:pPr>
               <a:lnSpc>
-                <a:spcPct val="115000"/>
+                <a:spcPct val="130000"/>
               </a:lnSpc>
-              <a:spcAft>
-                <a:spcPts val="600"/>
-              </a:spcAft>
             </a:pPr>
             <a:r>
-              <a:rPr sz="1500" b="1" i="0">
-                <a:solidFill>
-                  <a:srgbClr val="0F6E7A"/>
-                </a:solidFill>
-                <a:latin typeface="Calibri"/>
-              </a:rPr>
-              <a:t>7. Designed-against + verticals roadmap</a:t>
-            </a:r>
-          </a:p>
+              <a:rPr sz="1100" b="0" i="0">
+                <a:solidFill>
+                  <a:srgbClr val="333F52"/>
+                </a:solidFill>
+                <a:latin typeface="Calibri"/>
+              </a:rPr>
+              <a:t>Flat target-CPA vs value-based bid vs the £ difference, with a running counter.</a:t>
+            </a:r>
+          </a:p>
+        </p:txBody>
+      </p:sp>
+      <p:sp>
+        <p:nvSpPr>
+          <p:cNvPr id="16" name="Rounded Rectangle 15"/>
+          <p:cNvSpPr/>
+          <p:nvPr/>
+        </p:nvSpPr>
+        <p:spPr>
+          <a:xfrm>
+            <a:off x="8995181" y="1234440"/>
+            <a:ext cx="2693593" cy="1965960"/>
+          </a:xfrm>
+          <a:prstGeom prst="roundRect">
+            <a:avLst>
+              <a:gd name="adj" fmla="val 6000"/>
+            </a:avLst>
+          </a:prstGeom>
+          <a:solidFill>
+            <a:srgbClr val="FFFFFF"/>
+          </a:solidFill>
+          <a:ln w="9525">
+            <a:solidFill>
+              <a:srgbClr val="D7DBE3"/>
+            </a:solidFill>
+          </a:ln>
+        </p:spPr>
+        <p:style>
+          <a:lnRef idx="1">
+            <a:schemeClr val="accent1"/>
+          </a:lnRef>
+          <a:fillRef idx="3">
+            <a:schemeClr val="accent1"/>
+          </a:fillRef>
+          <a:effectRef idx="2">
+            <a:schemeClr val="accent1"/>
+          </a:effectRef>
+          <a:fontRef idx="minor">
+            <a:schemeClr val="lt1"/>
+          </a:fontRef>
+        </p:style>
+        <p:txBody>
+          <a:bodyPr rtlCol="0" anchor="ctr"/>
+          <a:lstStyle/>
+          <a:p>
+            <a:pPr algn="ctr"/>
+          </a:p>
+        </p:txBody>
+      </p:sp>
+      <p:sp>
+        <p:nvSpPr>
+          <p:cNvPr id="17" name="TextBox 16"/>
+          <p:cNvSpPr txBox="1"/>
+          <p:nvPr/>
+        </p:nvSpPr>
+        <p:spPr>
+          <a:xfrm>
+            <a:off x="9159773" y="1325880"/>
+            <a:ext cx="914400" cy="640080"/>
+          </a:xfrm>
+          <a:prstGeom prst="rect">
+            <a:avLst/>
+          </a:prstGeom>
+          <a:noFill/>
+        </p:spPr>
+        <p:txBody>
+          <a:bodyPr wrap="none">
+            <a:spAutoFit/>
+          </a:bodyPr>
+          <a:lstStyle/>
+          <a:p>
+            <a:r>
+              <a:rPr sz="2800" b="1" i="0">
+                <a:solidFill>
+                  <a:srgbClr val="D97306"/>
+                </a:solidFill>
+                <a:latin typeface="Calibri"/>
+              </a:rPr>
+              <a:t>04</a:t>
+            </a:r>
+          </a:p>
+        </p:txBody>
+      </p:sp>
+      <p:sp>
+        <p:nvSpPr>
+          <p:cNvPr id="18" name="TextBox 17"/>
+          <p:cNvSpPr txBox="1"/>
+          <p:nvPr/>
+        </p:nvSpPr>
+        <p:spPr>
+          <a:xfrm>
+            <a:off x="9159773" y="2103120"/>
+            <a:ext cx="2364409" cy="640080"/>
+          </a:xfrm>
+          <a:prstGeom prst="rect">
+            <a:avLst/>
+          </a:prstGeom>
+          <a:noFill/>
+        </p:spPr>
+        <p:txBody>
+          <a:bodyPr wrap="square">
+            <a:spAutoFit/>
+          </a:bodyPr>
+          <a:lstStyle/>
           <a:p>
             <a:pPr>
               <a:lnSpc>
-                <a:spcPct val="115000"/>
+                <a:spcPct val="110000"/>
               </a:lnSpc>
-              <a:spcAft>
-                <a:spcPts val="600"/>
-              </a:spcAft>
             </a:pPr>
             <a:r>
-              <a:rPr sz="1100" b="0" i="0">
-                <a:solidFill>
-                  <a:srgbClr val="333F52"/>
-                </a:solidFill>
-                <a:latin typeface="Calibri"/>
-              </a:rPr>
-              <a:t>Three failure modes named on screen, each mapped to where the platform pushes back. Five-vertical roadmap: CC live, Loans next, then Home / Life / Mortgages.</a:t>
-            </a:r>
-          </a:p>
+              <a:rPr sz="1500" b="1" i="0">
+                <a:solidFill>
+                  <a:srgbClr val="0B1F3A"/>
+                </a:solidFill>
+                <a:latin typeface="Calibri"/>
+              </a:rPr>
+              <a:t>You drive the model</a:t>
+            </a:r>
+          </a:p>
+        </p:txBody>
+      </p:sp>
+      <p:sp>
+        <p:nvSpPr>
+          <p:cNvPr id="19" name="TextBox 18"/>
+          <p:cNvSpPr txBox="1"/>
+          <p:nvPr/>
+        </p:nvSpPr>
+        <p:spPr>
+          <a:xfrm>
+            <a:off x="9159773" y="2651760"/>
+            <a:ext cx="2364409" cy="411480"/>
+          </a:xfrm>
+          <a:prstGeom prst="rect">
+            <a:avLst/>
+          </a:prstGeom>
+          <a:noFill/>
+        </p:spPr>
+        <p:txBody>
+          <a:bodyPr wrap="square">
+            <a:spAutoFit/>
+          </a:bodyPr>
+          <a:lstStyle/>
           <a:p>
             <a:pPr>
               <a:lnSpc>
-                <a:spcPct val="115000"/>
+                <a:spcPct val="130000"/>
               </a:lnSpc>
             </a:pPr>
             <a:r>
-              <a:rPr sz="900" b="0" i="1">
-                <a:solidFill>
-                  <a:srgbClr val="6B7380"/>
-                </a:solidFill>
-                <a:latin typeface="Calibri"/>
-              </a:rPr>
-              <a:t>Live dashboard  ·  https://dashboard-staging-794974391956.europe-west2.run.app</a:t>
-            </a:r>
-          </a:p>
-        </p:txBody>
-      </p:sp>
-      <p:sp>
-        <p:nvSpPr>
-          <p:cNvPr id="6" name="Rectangle 5"/>
+              <a:rPr sz="1100" b="0" i="0">
+                <a:solidFill>
+                  <a:srgbClr val="333F52"/>
+                </a:solidFill>
+                <a:latin typeface="Calibri"/>
+              </a:rPr>
+              <a:t>Predict in CC language; the pipeline trace lights up live.</a:t>
+            </a:r>
+          </a:p>
+        </p:txBody>
+      </p:sp>
+      <p:sp>
+        <p:nvSpPr>
+          <p:cNvPr id="20" name="Rounded Rectangle 19"/>
+          <p:cNvSpPr/>
+          <p:nvPr/>
+        </p:nvSpPr>
+        <p:spPr>
+          <a:xfrm>
+            <a:off x="502920" y="3383280"/>
+            <a:ext cx="2693593" cy="1965960"/>
+          </a:xfrm>
+          <a:prstGeom prst="roundRect">
+            <a:avLst>
+              <a:gd name="adj" fmla="val 6000"/>
+            </a:avLst>
+          </a:prstGeom>
+          <a:solidFill>
+            <a:srgbClr val="FFFFFF"/>
+          </a:solidFill>
+          <a:ln w="9525">
+            <a:solidFill>
+              <a:srgbClr val="D7DBE3"/>
+            </a:solidFill>
+          </a:ln>
+        </p:spPr>
+        <p:style>
+          <a:lnRef idx="1">
+            <a:schemeClr val="accent1"/>
+          </a:lnRef>
+          <a:fillRef idx="3">
+            <a:schemeClr val="accent1"/>
+          </a:fillRef>
+          <a:effectRef idx="2">
+            <a:schemeClr val="accent1"/>
+          </a:effectRef>
+          <a:fontRef idx="minor">
+            <a:schemeClr val="lt1"/>
+          </a:fontRef>
+        </p:style>
+        <p:txBody>
+          <a:bodyPr rtlCol="0" anchor="ctr"/>
+          <a:lstStyle/>
+          <a:p>
+            <a:pPr algn="ctr"/>
+          </a:p>
+        </p:txBody>
+      </p:sp>
+      <p:sp>
+        <p:nvSpPr>
+          <p:cNvPr id="21" name="TextBox 20"/>
+          <p:cNvSpPr txBox="1"/>
+          <p:nvPr/>
+        </p:nvSpPr>
+        <p:spPr>
+          <a:xfrm>
+            <a:off x="667512" y="3474720"/>
+            <a:ext cx="914400" cy="640080"/>
+          </a:xfrm>
+          <a:prstGeom prst="rect">
+            <a:avLst/>
+          </a:prstGeom>
+          <a:noFill/>
+        </p:spPr>
+        <p:txBody>
+          <a:bodyPr wrap="none">
+            <a:spAutoFit/>
+          </a:bodyPr>
+          <a:lstStyle/>
+          <a:p>
+            <a:r>
+              <a:rPr sz="2800" b="1" i="0">
+                <a:solidFill>
+                  <a:srgbClr val="D97306"/>
+                </a:solidFill>
+                <a:latin typeface="Calibri"/>
+              </a:rPr>
+              <a:t>05</a:t>
+            </a:r>
+          </a:p>
+        </p:txBody>
+      </p:sp>
+      <p:sp>
+        <p:nvSpPr>
+          <p:cNvPr id="22" name="TextBox 21"/>
+          <p:cNvSpPr txBox="1"/>
+          <p:nvPr/>
+        </p:nvSpPr>
+        <p:spPr>
+          <a:xfrm>
+            <a:off x="667512" y="4251960"/>
+            <a:ext cx="2364409" cy="640080"/>
+          </a:xfrm>
+          <a:prstGeom prst="rect">
+            <a:avLst/>
+          </a:prstGeom>
+          <a:noFill/>
+        </p:spPr>
+        <p:txBody>
+          <a:bodyPr wrap="square">
+            <a:spAutoFit/>
+          </a:bodyPr>
+          <a:lstStyle/>
+          <a:p>
+            <a:pPr>
+              <a:lnSpc>
+                <a:spcPct val="110000"/>
+              </a:lnSpc>
+            </a:pPr>
+            <a:r>
+              <a:rPr sz="1500" b="1" i="0">
+                <a:solidFill>
+                  <a:srgbClr val="0B1F3A"/>
+                </a:solidFill>
+                <a:latin typeface="Calibri"/>
+              </a:rPr>
+              <a:t>The bouncer with a crystal ball</a:t>
+            </a:r>
+          </a:p>
+        </p:txBody>
+      </p:sp>
+      <p:sp>
+        <p:nvSpPr>
+          <p:cNvPr id="23" name="TextBox 22"/>
+          <p:cNvSpPr txBox="1"/>
+          <p:nvPr/>
+        </p:nvSpPr>
+        <p:spPr>
+          <a:xfrm>
+            <a:off x="667512" y="4800600"/>
+            <a:ext cx="2364409" cy="411480"/>
+          </a:xfrm>
+          <a:prstGeom prst="rect">
+            <a:avLst/>
+          </a:prstGeom>
+          <a:noFill/>
+        </p:spPr>
+        <p:txBody>
+          <a:bodyPr wrap="square">
+            <a:spAutoFit/>
+          </a:bodyPr>
+          <a:lstStyle/>
+          <a:p>
+            <a:pPr>
+              <a:lnSpc>
+                <a:spcPct val="130000"/>
+              </a:lnSpc>
+            </a:pPr>
+            <a:r>
+              <a:rPr sz="1100" b="0" i="0">
+                <a:solidFill>
+                  <a:srgbClr val="333F52"/>
+                </a:solidFill>
+                <a:latin typeface="Calibri"/>
+              </a:rPr>
+              <a:t>Press Play — a user's intent builds up, the bid follows.</a:t>
+            </a:r>
+          </a:p>
+        </p:txBody>
+      </p:sp>
+      <p:sp>
+        <p:nvSpPr>
+          <p:cNvPr id="24" name="Rounded Rectangle 23"/>
+          <p:cNvSpPr/>
+          <p:nvPr/>
+        </p:nvSpPr>
+        <p:spPr>
+          <a:xfrm>
+            <a:off x="3333673" y="3383280"/>
+            <a:ext cx="2693593" cy="1965960"/>
+          </a:xfrm>
+          <a:prstGeom prst="roundRect">
+            <a:avLst>
+              <a:gd name="adj" fmla="val 6000"/>
+            </a:avLst>
+          </a:prstGeom>
+          <a:solidFill>
+            <a:srgbClr val="FFFFFF"/>
+          </a:solidFill>
+          <a:ln w="9525">
+            <a:solidFill>
+              <a:srgbClr val="D7DBE3"/>
+            </a:solidFill>
+          </a:ln>
+        </p:spPr>
+        <p:style>
+          <a:lnRef idx="1">
+            <a:schemeClr val="accent1"/>
+          </a:lnRef>
+          <a:fillRef idx="3">
+            <a:schemeClr val="accent1"/>
+          </a:fillRef>
+          <a:effectRef idx="2">
+            <a:schemeClr val="accent1"/>
+          </a:effectRef>
+          <a:fontRef idx="minor">
+            <a:schemeClr val="lt1"/>
+          </a:fontRef>
+        </p:style>
+        <p:txBody>
+          <a:bodyPr rtlCol="0" anchor="ctr"/>
+          <a:lstStyle/>
+          <a:p>
+            <a:pPr algn="ctr"/>
+          </a:p>
+        </p:txBody>
+      </p:sp>
+      <p:sp>
+        <p:nvSpPr>
+          <p:cNvPr id="25" name="TextBox 24"/>
+          <p:cNvSpPr txBox="1"/>
+          <p:nvPr/>
+        </p:nvSpPr>
+        <p:spPr>
+          <a:xfrm>
+            <a:off x="3498265" y="3474720"/>
+            <a:ext cx="914400" cy="640080"/>
+          </a:xfrm>
+          <a:prstGeom prst="rect">
+            <a:avLst/>
+          </a:prstGeom>
+          <a:noFill/>
+        </p:spPr>
+        <p:txBody>
+          <a:bodyPr wrap="none">
+            <a:spAutoFit/>
+          </a:bodyPr>
+          <a:lstStyle/>
+          <a:p>
+            <a:r>
+              <a:rPr sz="2800" b="1" i="0">
+                <a:solidFill>
+                  <a:srgbClr val="D97306"/>
+                </a:solidFill>
+                <a:latin typeface="Calibri"/>
+              </a:rPr>
+              <a:t>06</a:t>
+            </a:r>
+          </a:p>
+        </p:txBody>
+      </p:sp>
+      <p:sp>
+        <p:nvSpPr>
+          <p:cNvPr id="26" name="TextBox 25"/>
+          <p:cNvSpPr txBox="1"/>
+          <p:nvPr/>
+        </p:nvSpPr>
+        <p:spPr>
+          <a:xfrm>
+            <a:off x="3498265" y="4251960"/>
+            <a:ext cx="2364409" cy="640080"/>
+          </a:xfrm>
+          <a:prstGeom prst="rect">
+            <a:avLst/>
+          </a:prstGeom>
+          <a:noFill/>
+        </p:spPr>
+        <p:txBody>
+          <a:bodyPr wrap="square">
+            <a:spAutoFit/>
+          </a:bodyPr>
+          <a:lstStyle/>
+          <a:p>
+            <a:pPr>
+              <a:lnSpc>
+                <a:spcPct val="110000"/>
+              </a:lnSpc>
+            </a:pPr>
+            <a:r>
+              <a:rPr sz="1500" b="1" i="0">
+                <a:solidFill>
+                  <a:srgbClr val="0B1F3A"/>
+                </a:solidFill>
+                <a:latin typeface="Calibri"/>
+              </a:rPr>
+              <a:t>Why the model said that</a:t>
+            </a:r>
+          </a:p>
+        </p:txBody>
+      </p:sp>
+      <p:sp>
+        <p:nvSpPr>
+          <p:cNvPr id="27" name="TextBox 26"/>
+          <p:cNvSpPr txBox="1"/>
+          <p:nvPr/>
+        </p:nvSpPr>
+        <p:spPr>
+          <a:xfrm>
+            <a:off x="3498265" y="4800600"/>
+            <a:ext cx="2364409" cy="411480"/>
+          </a:xfrm>
+          <a:prstGeom prst="rect">
+            <a:avLst/>
+          </a:prstGeom>
+          <a:noFill/>
+        </p:spPr>
+        <p:txBody>
+          <a:bodyPr wrap="square">
+            <a:spAutoFit/>
+          </a:bodyPr>
+          <a:lstStyle/>
+          <a:p>
+            <a:pPr>
+              <a:lnSpc>
+                <a:spcPct val="130000"/>
+              </a:lnSpc>
+            </a:pPr>
+            <a:r>
+              <a:rPr sz="1100" b="0" i="0">
+                <a:solidFill>
+                  <a:srgbClr val="333F52"/>
+                </a:solidFill>
+                <a:latin typeface="Calibri"/>
+              </a:rPr>
+              <a:t>Plain-English SHAP under every prediction.</a:t>
+            </a:r>
+          </a:p>
+        </p:txBody>
+      </p:sp>
+      <p:sp>
+        <p:nvSpPr>
+          <p:cNvPr id="28" name="Rounded Rectangle 27"/>
+          <p:cNvSpPr/>
+          <p:nvPr/>
+        </p:nvSpPr>
+        <p:spPr>
+          <a:xfrm>
+            <a:off x="6164427" y="3383280"/>
+            <a:ext cx="2693593" cy="1965960"/>
+          </a:xfrm>
+          <a:prstGeom prst="roundRect">
+            <a:avLst>
+              <a:gd name="adj" fmla="val 6000"/>
+            </a:avLst>
+          </a:prstGeom>
+          <a:solidFill>
+            <a:srgbClr val="FFFFFF"/>
+          </a:solidFill>
+          <a:ln w="9525">
+            <a:solidFill>
+              <a:srgbClr val="D7DBE3"/>
+            </a:solidFill>
+          </a:ln>
+        </p:spPr>
+        <p:style>
+          <a:lnRef idx="1">
+            <a:schemeClr val="accent1"/>
+          </a:lnRef>
+          <a:fillRef idx="3">
+            <a:schemeClr val="accent1"/>
+          </a:fillRef>
+          <a:effectRef idx="2">
+            <a:schemeClr val="accent1"/>
+          </a:effectRef>
+          <a:fontRef idx="minor">
+            <a:schemeClr val="lt1"/>
+          </a:fontRef>
+        </p:style>
+        <p:txBody>
+          <a:bodyPr rtlCol="0" anchor="ctr"/>
+          <a:lstStyle/>
+          <a:p>
+            <a:pPr algn="ctr"/>
+          </a:p>
+        </p:txBody>
+      </p:sp>
+      <p:sp>
+        <p:nvSpPr>
+          <p:cNvPr id="29" name="TextBox 28"/>
+          <p:cNvSpPr txBox="1"/>
+          <p:nvPr/>
+        </p:nvSpPr>
+        <p:spPr>
+          <a:xfrm>
+            <a:off x="6329019" y="3474720"/>
+            <a:ext cx="914400" cy="640080"/>
+          </a:xfrm>
+          <a:prstGeom prst="rect">
+            <a:avLst/>
+          </a:prstGeom>
+          <a:noFill/>
+        </p:spPr>
+        <p:txBody>
+          <a:bodyPr wrap="none">
+            <a:spAutoFit/>
+          </a:bodyPr>
+          <a:lstStyle/>
+          <a:p>
+            <a:r>
+              <a:rPr sz="2800" b="1" i="0">
+                <a:solidFill>
+                  <a:srgbClr val="D97306"/>
+                </a:solidFill>
+                <a:latin typeface="Calibri"/>
+              </a:rPr>
+              <a:t>07</a:t>
+            </a:r>
+          </a:p>
+        </p:txBody>
+      </p:sp>
+      <p:sp>
+        <p:nvSpPr>
+          <p:cNvPr id="30" name="TextBox 29"/>
+          <p:cNvSpPr txBox="1"/>
+          <p:nvPr/>
+        </p:nvSpPr>
+        <p:spPr>
+          <a:xfrm>
+            <a:off x="6329019" y="4251960"/>
+            <a:ext cx="2364409" cy="640080"/>
+          </a:xfrm>
+          <a:prstGeom prst="rect">
+            <a:avLst/>
+          </a:prstGeom>
+          <a:noFill/>
+        </p:spPr>
+        <p:txBody>
+          <a:bodyPr wrap="square">
+            <a:spAutoFit/>
+          </a:bodyPr>
+          <a:lstStyle/>
+          <a:p>
+            <a:pPr>
+              <a:lnSpc>
+                <a:spcPct val="110000"/>
+              </a:lnSpc>
+            </a:pPr>
+            <a:r>
+              <a:rPr sz="1500" b="1" i="0">
+                <a:solidFill>
+                  <a:srgbClr val="0B1F3A"/>
+                </a:solidFill>
+                <a:latin typeface="Calibri"/>
+              </a:rPr>
+              <a:t>What we've designed against</a:t>
+            </a:r>
+          </a:p>
+        </p:txBody>
+      </p:sp>
+      <p:sp>
+        <p:nvSpPr>
+          <p:cNvPr id="31" name="TextBox 30"/>
+          <p:cNvSpPr txBox="1"/>
+          <p:nvPr/>
+        </p:nvSpPr>
+        <p:spPr>
+          <a:xfrm>
+            <a:off x="6329019" y="4800600"/>
+            <a:ext cx="2364409" cy="411480"/>
+          </a:xfrm>
+          <a:prstGeom prst="rect">
+            <a:avLst/>
+          </a:prstGeom>
+          <a:noFill/>
+        </p:spPr>
+        <p:txBody>
+          <a:bodyPr wrap="square">
+            <a:spAutoFit/>
+          </a:bodyPr>
+          <a:lstStyle/>
+          <a:p>
+            <a:pPr>
+              <a:lnSpc>
+                <a:spcPct val="130000"/>
+              </a:lnSpc>
+            </a:pPr>
+            <a:r>
+              <a:rPr sz="1100" b="0" i="0">
+                <a:solidFill>
+                  <a:srgbClr val="333F52"/>
+                </a:solidFill>
+                <a:latin typeface="Calibri"/>
+              </a:rPr>
+              <a:t>Three failure modes named; the verticals after CC named.</a:t>
+            </a:r>
+          </a:p>
+        </p:txBody>
+      </p:sp>
+      <p:sp>
+        <p:nvSpPr>
+          <p:cNvPr id="32" name="Rounded Rectangle 31"/>
+          <p:cNvSpPr/>
+          <p:nvPr/>
+        </p:nvSpPr>
+        <p:spPr>
+          <a:xfrm>
+            <a:off x="8995181" y="3383280"/>
+            <a:ext cx="2693593" cy="1965960"/>
+          </a:xfrm>
+          <a:prstGeom prst="roundRect">
+            <a:avLst>
+              <a:gd name="adj" fmla="val 6000"/>
+            </a:avLst>
+          </a:prstGeom>
+          <a:solidFill>
+            <a:srgbClr val="0B1F3A"/>
+          </a:solidFill>
+          <a:ln>
+            <a:noFill/>
+          </a:ln>
+        </p:spPr>
+        <p:style>
+          <a:lnRef idx="1">
+            <a:schemeClr val="accent1"/>
+          </a:lnRef>
+          <a:fillRef idx="3">
+            <a:schemeClr val="accent1"/>
+          </a:fillRef>
+          <a:effectRef idx="2">
+            <a:schemeClr val="accent1"/>
+          </a:effectRef>
+          <a:fontRef idx="minor">
+            <a:schemeClr val="lt1"/>
+          </a:fontRef>
+        </p:style>
+        <p:txBody>
+          <a:bodyPr rtlCol="0" anchor="ctr" lIns="182880" rIns="182880" tIns="228600" wrap="square"/>
+          <a:lstStyle/>
+          <a:p>
+            <a:pPr algn="ctr"/>
+            <a:r>
+              <a:rPr sz="1100" b="1" i="0">
+                <a:solidFill>
+                  <a:srgbClr val="D97306"/>
+                </a:solidFill>
+                <a:latin typeface="Calibri"/>
+              </a:rPr>
+              <a:t>Live dashboard</a:t>
+            </a:r>
+          </a:p>
+          <a:p>
+            <a:pPr>
+              <a:lnSpc>
+                <a:spcPct val="130000"/>
+              </a:lnSpc>
+              <a:spcBef>
+                <a:spcPts val="800"/>
+              </a:spcBef>
+            </a:pPr>
+            <a:r>
+              <a:rPr sz="1000" b="0" i="0">
+                <a:solidFill>
+                  <a:srgbClr val="FFFFFF"/>
+                </a:solidFill>
+                <a:latin typeface="Consolas"/>
+              </a:rPr>
+              <a:t>https://dashboard-staging-794974391956.europe-west2.run.app</a:t>
+            </a:r>
+          </a:p>
+          <a:p>
+            <a:pPr>
+              <a:lnSpc>
+                <a:spcPct val="130000"/>
+              </a:lnSpc>
+              <a:spcBef>
+                <a:spcPts val="1000"/>
+              </a:spcBef>
+            </a:pPr>
+            <a:r>
+              <a:rPr sz="1000" b="0" i="0">
+                <a:solidFill>
+                  <a:srgbClr val="F4F6FA"/>
+                </a:solidFill>
+                <a:latin typeface="Calibri"/>
+              </a:rPr>
+              <a:t>One URL. The dashboard auto-calls /v1/score, /v1/explain and /coverage via nginx — nothing else to open.</a:t>
+            </a:r>
+          </a:p>
+        </p:txBody>
+      </p:sp>
+      <p:sp>
+        <p:nvSpPr>
+          <p:cNvPr id="33" name="Rectangle 32"/>
           <p:cNvSpPr/>
           <p:nvPr/>
         </p:nvSpPr>
@@ -7615,7 +9079,7 @@
       </p:sp>
       <p:sp>
         <p:nvSpPr>
-          <p:cNvPr id="7" name="TextBox 6"/>
+          <p:cNvPr id="34" name="TextBox 33"/>
           <p:cNvSpPr txBox="1"/>
           <p:nvPr/>
         </p:nvSpPr>
@@ -7713,7 +9177,7 @@
                 </a:solidFill>
                 <a:latin typeface="Calibri"/>
               </a:rPr>
-              <a:t>WHAT WE EVALUATED, AND WHAT WE CHOSE</a:t>
+              <a:t>THE HEADLINE ANSWER TO EVERY CTO QUESTION</a:t>
             </a:r>
           </a:p>
           <a:p>
@@ -7724,7 +9188,7 @@
                 </a:solidFill>
                 <a:latin typeface="Calibri"/>
               </a:rPr>
-              <a:t>Why these technology choices</a:t>
+              <a:t>Why this stack</a:t>
             </a:r>
           </a:p>
         </p:txBody>
@@ -7774,14 +9238,104 @@
       </p:sp>
       <p:sp>
         <p:nvSpPr>
-          <p:cNvPr id="4" name="TextBox 3"/>
+          <p:cNvPr id="4" name="Rounded Rectangle 3"/>
+          <p:cNvSpPr/>
+          <p:nvPr/>
+        </p:nvSpPr>
+        <p:spPr>
+          <a:xfrm>
+            <a:off x="502920" y="1143000"/>
+            <a:ext cx="3606698" cy="2377440"/>
+          </a:xfrm>
+          <a:prstGeom prst="roundRect">
+            <a:avLst>
+              <a:gd name="adj" fmla="val 6000"/>
+            </a:avLst>
+          </a:prstGeom>
+          <a:solidFill>
+            <a:srgbClr val="FFFFFF"/>
+          </a:solidFill>
+          <a:ln w="9525">
+            <a:solidFill>
+              <a:srgbClr val="D7DBE3"/>
+            </a:solidFill>
+          </a:ln>
+        </p:spPr>
+        <p:style>
+          <a:lnRef idx="1">
+            <a:schemeClr val="accent1"/>
+          </a:lnRef>
+          <a:fillRef idx="3">
+            <a:schemeClr val="accent1"/>
+          </a:fillRef>
+          <a:effectRef idx="2">
+            <a:schemeClr val="accent1"/>
+          </a:effectRef>
+          <a:fontRef idx="minor">
+            <a:schemeClr val="lt1"/>
+          </a:fontRef>
+        </p:style>
+        <p:txBody>
+          <a:bodyPr rtlCol="0" anchor="ctr"/>
+          <a:lstStyle/>
+          <a:p>
+            <a:pPr algn="ctr"/>
+          </a:p>
+        </p:txBody>
+      </p:sp>
+      <p:sp>
+        <p:nvSpPr>
+          <p:cNvPr id="5" name="Rectangle 4"/>
+          <p:cNvSpPr/>
+          <p:nvPr/>
+        </p:nvSpPr>
+        <p:spPr>
+          <a:xfrm>
+            <a:off x="502920" y="1143000"/>
+            <a:ext cx="3606698" cy="73152"/>
+          </a:xfrm>
+          <a:prstGeom prst="rect">
+            <a:avLst/>
+          </a:prstGeom>
+          <a:solidFill>
+            <a:srgbClr val="0F6E7A"/>
+          </a:solidFill>
+          <a:ln>
+            <a:noFill/>
+          </a:ln>
+        </p:spPr>
+        <p:style>
+          <a:lnRef idx="1">
+            <a:schemeClr val="accent1"/>
+          </a:lnRef>
+          <a:fillRef idx="3">
+            <a:schemeClr val="accent1"/>
+          </a:fillRef>
+          <a:effectRef idx="2">
+            <a:schemeClr val="accent1"/>
+          </a:effectRef>
+          <a:fontRef idx="minor">
+            <a:schemeClr val="lt1"/>
+          </a:fontRef>
+        </p:style>
+        <p:txBody>
+          <a:bodyPr rtlCol="0" anchor="ctr"/>
+          <a:lstStyle/>
+          <a:p>
+            <a:pPr algn="ctr"/>
+          </a:p>
+        </p:txBody>
+      </p:sp>
+      <p:sp>
+        <p:nvSpPr>
+          <p:cNvPr id="6" name="TextBox 5"/>
           <p:cNvSpPr txBox="1"/>
           <p:nvPr/>
         </p:nvSpPr>
         <p:spPr>
           <a:xfrm>
-            <a:off x="457200" y="1097280"/>
-            <a:ext cx="5669280" cy="5303520"/>
+            <a:off x="685800" y="1371600"/>
+            <a:ext cx="3240938" cy="2011680"/>
           </a:xfrm>
           <a:prstGeom prst="rect">
             <a:avLst/>
@@ -7796,240 +9350,159 @@
           <a:p>
             <a:pPr>
               <a:lnSpc>
-                <a:spcPct val="115000"/>
+                <a:spcPct val="110000"/>
               </a:lnSpc>
-              <a:spcAft>
-                <a:spcPts val="600"/>
-              </a:spcAft>
             </a:pPr>
             <a:r>
-              <a:rPr sz="1400" b="1" i="0">
-                <a:solidFill>
-                  <a:srgbClr val="0F6E7A"/>
-                </a:solidFill>
-                <a:latin typeface="Calibri"/>
-              </a:rPr>
-              <a:t>Hot path — Rust on Cloud Run</a:t>
+              <a:rPr sz="1600" b="1" i="0">
+                <a:solidFill>
+                  <a:srgbClr val="0B1F3A"/>
+                </a:solidFill>
+                <a:latin typeface="Calibri"/>
+              </a:rPr>
+              <a:t>Rust on Cloud Run</a:t>
             </a:r>
           </a:p>
           <a:p>
             <a:pPr>
               <a:lnSpc>
-                <a:spcPct val="115000"/>
+                <a:spcPct val="130000"/>
               </a:lnSpc>
-              <a:spcAft>
-                <a:spcPts val="300"/>
-              </a:spcAft>
+              <a:spcBef>
+                <a:spcPts val="800"/>
+              </a:spcBef>
             </a:pPr>
             <a:r>
-              <a:rPr sz="1000" b="1" i="0">
-                <a:solidFill>
-                  <a:srgbClr val="D97306"/>
-                </a:solidFill>
-                <a:latin typeface="Calibri"/>
-              </a:rPr>
-              <a:t>•  </a:t>
-            </a:r>
-            <a:r>
-              <a:rPr sz="1000" b="0" i="0">
+              <a:rPr sz="1200" b="1" i="0">
                 <a:solidFill>
                   <a:srgbClr val="333F52"/>
                 </a:solidFill>
                 <a:latin typeface="Calibri"/>
               </a:rPr>
-              <a:t>Latency budget: p95 ≤ 1.5 s end-to-end; Vertex AI predict dominates ~700 ms. Rust leaves the rest for the safety-net with zero GC jitter.</a:t>
+              <a:t>We need every millisecond Vertex doesn't take.</a:t>
             </a:r>
           </a:p>
           <a:p>
             <a:pPr>
               <a:lnSpc>
-                <a:spcPct val="115000"/>
+                <a:spcPct val="130000"/>
               </a:lnSpc>
-              <a:spcAft>
-                <a:spcPts val="300"/>
-              </a:spcAft>
+              <a:spcBef>
+                <a:spcPts val="800"/>
+              </a:spcBef>
             </a:pPr>
             <a:r>
-              <a:rPr sz="1000" b="1" i="0">
-                <a:solidFill>
-                  <a:srgbClr val="D97306"/>
-                </a:solidFill>
-                <a:latin typeface="Calibri"/>
-              </a:rPr>
-              <a:t>•  </a:t>
-            </a:r>
-            <a:r>
               <a:rPr sz="1000" b="0" i="0">
                 <a:solidFill>
-                  <a:srgbClr val="333F52"/>
-                </a:solidFill>
-                <a:latin typeface="Calibri"/>
-              </a:rPr>
-              <a:t>Considered Go and Python; both leave less headroom and complicate the breaker's idempotency.</a:t>
-            </a:r>
-          </a:p>
-          <a:p>
-            <a:pPr>
-              <a:lnSpc>
-                <a:spcPct val="115000"/>
-              </a:lnSpc>
-              <a:spcAft>
-                <a:spcPts val="600"/>
-              </a:spcAft>
-            </a:pPr>
-            <a:r>
-              <a:rPr sz="1400" b="1" i="0">
-                <a:solidFill>
-                  <a:srgbClr val="0F6E7A"/>
-                </a:solidFill>
-                <a:latin typeface="Calibri"/>
-              </a:rPr>
-              <a:t>Model — XGBoost on Vertex AI</a:t>
-            </a:r>
-          </a:p>
-          <a:p>
-            <a:pPr>
-              <a:lnSpc>
-                <a:spcPct val="115000"/>
-              </a:lnSpc>
-              <a:spcAft>
-                <a:spcPts val="300"/>
-              </a:spcAft>
-            </a:pPr>
-            <a:r>
-              <a:rPr sz="1000" b="1" i="0">
-                <a:solidFill>
-                  <a:srgbClr val="D97306"/>
-                </a:solidFill>
-                <a:latin typeface="Calibri"/>
-              </a:rPr>
-              <a:t>•  </a:t>
-            </a:r>
-            <a:r>
-              <a:rPr sz="1000" b="0" i="0">
-                <a:solidFill>
-                  <a:srgbClr val="333F52"/>
-                </a:solidFill>
-                <a:latin typeface="Calibri"/>
-              </a:rPr>
-              <a:t>Feature space is tabular, ~11 columns. GBDT is the empirical leader for tabular regression at this scale.</a:t>
-            </a:r>
-          </a:p>
-          <a:p>
-            <a:pPr>
-              <a:lnSpc>
-                <a:spcPct val="115000"/>
-              </a:lnSpc>
-              <a:spcAft>
-                <a:spcPts val="300"/>
-              </a:spcAft>
-            </a:pPr>
-            <a:r>
-              <a:rPr sz="1000" b="1" i="0">
-                <a:solidFill>
-                  <a:srgbClr val="D97306"/>
-                </a:solidFill>
-                <a:latin typeface="Calibri"/>
-              </a:rPr>
-              <a:t>•  </a:t>
-            </a:r>
-            <a:r>
-              <a:rPr sz="1000" b="0" i="0">
-                <a:solidFill>
-                  <a:srgbClr val="333F52"/>
-                </a:solidFill>
-                <a:latin typeface="Calibri"/>
-              </a:rPr>
-              <a:t>Native SHAP via Vertex explanationSpec — /v1/explain is free; deep models need a separate KernelSHAP that's harder to audit under ADR 0004.</a:t>
-            </a:r>
-          </a:p>
-          <a:p>
-            <a:pPr>
-              <a:lnSpc>
-                <a:spcPct val="115000"/>
-              </a:lnSpc>
-              <a:spcAft>
-                <a:spcPts val="300"/>
-              </a:spcAft>
-            </a:pPr>
-            <a:r>
-              <a:rPr sz="1000" b="1" i="0">
-                <a:solidFill>
-                  <a:srgbClr val="D97306"/>
-                </a:solidFill>
-                <a:latin typeface="Calibri"/>
-              </a:rPr>
-              <a:t>•  </a:t>
-            </a:r>
-            <a:r>
-              <a:rPr sz="1000" b="0" i="0">
-                <a:solidFill>
-                  <a:srgbClr val="333F52"/>
-                </a:solidFill>
-                <a:latin typeface="Calibri"/>
-              </a:rPr>
-              <a:t>Deterministic predict composes with the circuit breaker; transformers' stateful decoding would not.</a:t>
-            </a:r>
-          </a:p>
-          <a:p>
-            <a:pPr>
-              <a:lnSpc>
-                <a:spcPct val="115000"/>
-              </a:lnSpc>
-              <a:spcAft>
-                <a:spcPts val="600"/>
-              </a:spcAft>
-            </a:pPr>
-            <a:r>
-              <a:rPr sz="1400" b="1" i="0">
-                <a:solidFill>
-                  <a:srgbClr val="0F6E7A"/>
-                </a:solidFill>
-                <a:latin typeface="Calibri"/>
-              </a:rPr>
-              <a:t>Frontend — TypeScript + React + Vite</a:t>
-            </a:r>
-          </a:p>
-          <a:p>
-            <a:pPr>
-              <a:lnSpc>
-                <a:spcPct val="115000"/>
-              </a:lnSpc>
-              <a:spcAft>
-                <a:spcPts val="300"/>
-              </a:spcAft>
-            </a:pPr>
-            <a:r>
-              <a:rPr sz="1000" b="1" i="0">
-                <a:solidFill>
-                  <a:srgbClr val="D97306"/>
-                </a:solidFill>
-                <a:latin typeface="Calibri"/>
-              </a:rPr>
-              <a:t>•  </a:t>
-            </a:r>
-            <a:r>
-              <a:rPr sz="1000" b="0" i="0">
-                <a:solidFill>
-                  <a:srgbClr val="333F52"/>
-                </a:solidFill>
-                <a:latin typeface="Calibri"/>
-              </a:rPr>
-              <a:t>Single URL with realtime interactivity (live prediction, Phoebe journey). Zod validates JSON at the boundary.</a:t>
-            </a:r>
-          </a:p>
-        </p:txBody>
-      </p:sp>
-      <p:sp>
-        <p:nvSpPr>
-          <p:cNvPr id="5" name="TextBox 4"/>
+                  <a:srgbClr val="6B7380"/>
+                </a:solidFill>
+                <a:latin typeface="Calibri"/>
+              </a:rPr>
+              <a:t>GC jitter would eat the safety-net budget. Considered Go and Python and rejected both.</a:t>
+            </a:r>
+          </a:p>
+        </p:txBody>
+      </p:sp>
+      <p:sp>
+        <p:nvSpPr>
+          <p:cNvPr id="7" name="Rounded Rectangle 6"/>
+          <p:cNvSpPr/>
+          <p:nvPr/>
+        </p:nvSpPr>
+        <p:spPr>
+          <a:xfrm>
+            <a:off x="4292498" y="1143000"/>
+            <a:ext cx="3606698" cy="2377440"/>
+          </a:xfrm>
+          <a:prstGeom prst="roundRect">
+            <a:avLst>
+              <a:gd name="adj" fmla="val 6000"/>
+            </a:avLst>
+          </a:prstGeom>
+          <a:solidFill>
+            <a:srgbClr val="FFFFFF"/>
+          </a:solidFill>
+          <a:ln w="9525">
+            <a:solidFill>
+              <a:srgbClr val="D7DBE3"/>
+            </a:solidFill>
+          </a:ln>
+        </p:spPr>
+        <p:style>
+          <a:lnRef idx="1">
+            <a:schemeClr val="accent1"/>
+          </a:lnRef>
+          <a:fillRef idx="3">
+            <a:schemeClr val="accent1"/>
+          </a:fillRef>
+          <a:effectRef idx="2">
+            <a:schemeClr val="accent1"/>
+          </a:effectRef>
+          <a:fontRef idx="minor">
+            <a:schemeClr val="lt1"/>
+          </a:fontRef>
+        </p:style>
+        <p:txBody>
+          <a:bodyPr rtlCol="0" anchor="ctr"/>
+          <a:lstStyle/>
+          <a:p>
+            <a:pPr algn="ctr"/>
+          </a:p>
+        </p:txBody>
+      </p:sp>
+      <p:sp>
+        <p:nvSpPr>
+          <p:cNvPr id="8" name="Rectangle 7"/>
+          <p:cNvSpPr/>
+          <p:nvPr/>
+        </p:nvSpPr>
+        <p:spPr>
+          <a:xfrm>
+            <a:off x="4292498" y="1143000"/>
+            <a:ext cx="3606698" cy="73152"/>
+          </a:xfrm>
+          <a:prstGeom prst="rect">
+            <a:avLst/>
+          </a:prstGeom>
+          <a:solidFill>
+            <a:srgbClr val="D97306"/>
+          </a:solidFill>
+          <a:ln>
+            <a:noFill/>
+          </a:ln>
+        </p:spPr>
+        <p:style>
+          <a:lnRef idx="1">
+            <a:schemeClr val="accent1"/>
+          </a:lnRef>
+          <a:fillRef idx="3">
+            <a:schemeClr val="accent1"/>
+          </a:fillRef>
+          <a:effectRef idx="2">
+            <a:schemeClr val="accent1"/>
+          </a:effectRef>
+          <a:fontRef idx="minor">
+            <a:schemeClr val="lt1"/>
+          </a:fontRef>
+        </p:style>
+        <p:txBody>
+          <a:bodyPr rtlCol="0" anchor="ctr"/>
+          <a:lstStyle/>
+          <a:p>
+            <a:pPr algn="ctr"/>
+          </a:p>
+        </p:txBody>
+      </p:sp>
+      <p:sp>
+        <p:nvSpPr>
+          <p:cNvPr id="9" name="TextBox 8"/>
           <p:cNvSpPr txBox="1"/>
           <p:nvPr/>
         </p:nvSpPr>
         <p:spPr>
           <a:xfrm>
-            <a:off x="6263640" y="1097280"/>
-            <a:ext cx="5669280" cy="5303520"/>
+            <a:off x="4475378" y="1371600"/>
+            <a:ext cx="3240938" cy="2011680"/>
           </a:xfrm>
           <a:prstGeom prst="rect">
             <a:avLst/>
@@ -8044,252 +9517,730 @@
           <a:p>
             <a:pPr>
               <a:lnSpc>
-                <a:spcPct val="115000"/>
+                <a:spcPct val="110000"/>
               </a:lnSpc>
-              <a:spcAft>
-                <a:spcPts val="600"/>
-              </a:spcAft>
             </a:pPr>
             <a:r>
-              <a:rPr sz="1400" b="1" i="0">
-                <a:solidFill>
-                  <a:srgbClr val="0F6E7A"/>
-                </a:solidFill>
-                <a:latin typeface="Calibri"/>
-              </a:rPr>
-              <a:t>Contracts — Protobuf</a:t>
+              <a:rPr sz="1600" b="1" i="0">
+                <a:solidFill>
+                  <a:srgbClr val="0B1F3A"/>
+                </a:solidFill>
+                <a:latin typeface="Calibri"/>
+              </a:rPr>
+              <a:t>XGBoost on Vertex AI</a:t>
             </a:r>
           </a:p>
           <a:p>
             <a:pPr>
               <a:lnSpc>
-                <a:spcPct val="115000"/>
+                <a:spcPct val="130000"/>
               </a:lnSpc>
-              <a:spcAft>
-                <a:spcPts val="300"/>
-              </a:spcAft>
+              <a:spcBef>
+                <a:spcPts val="800"/>
+              </a:spcBef>
             </a:pPr>
             <a:r>
-              <a:rPr sz="1000" b="1" i="0">
-                <a:solidFill>
-                  <a:srgbClr val="D97306"/>
-                </a:solidFill>
-                <a:latin typeface="Calibri"/>
-              </a:rPr>
-              <a:t>•  </a:t>
-            </a:r>
-            <a:r>
-              <a:rPr sz="1000" b="0" i="0">
+              <a:rPr sz="1200" b="1" i="0">
                 <a:solidFill>
                   <a:srgbClr val="333F52"/>
                 </a:solidFill>
                 <a:latin typeface="Calibri"/>
               </a:rPr>
-              <a:t>Wire stability across Rust ↔ Python; codegen per language; CI parity test guards drift.</a:t>
+              <a:t>Tabular data + auditable predictions + a circuit breaker that has to compose.</a:t>
             </a:r>
           </a:p>
           <a:p>
             <a:pPr>
               <a:lnSpc>
-                <a:spcPct val="115000"/>
+                <a:spcPct val="130000"/>
               </a:lnSpc>
-              <a:spcAft>
-                <a:spcPts val="600"/>
-              </a:spcAft>
+              <a:spcBef>
+                <a:spcPts val="800"/>
+              </a:spcBef>
             </a:pPr>
             <a:r>
-              <a:rPr sz="1400" b="1" i="0">
-                <a:solidFill>
-                  <a:srgbClr val="0F6E7A"/>
-                </a:solidFill>
-                <a:latin typeface="Calibri"/>
-              </a:rPr>
-              <a:t>Data layer — Dataform on BigQuery</a:t>
-            </a:r>
-          </a:p>
+              <a:rPr sz="1000" b="0" i="0">
+                <a:solidFill>
+                  <a:srgbClr val="6B7380"/>
+                </a:solidFill>
+                <a:latin typeface="Calibri"/>
+              </a:rPr>
+              <a:t>GBDT wins tabular. Native SHAP comes free. Transformers' stateful decoding breaks the breaker.</a:t>
+            </a:r>
+          </a:p>
+        </p:txBody>
+      </p:sp>
+      <p:sp>
+        <p:nvSpPr>
+          <p:cNvPr id="10" name="Rounded Rectangle 9"/>
+          <p:cNvSpPr/>
+          <p:nvPr/>
+        </p:nvSpPr>
+        <p:spPr>
+          <a:xfrm>
+            <a:off x="8082076" y="1143000"/>
+            <a:ext cx="3606698" cy="2377440"/>
+          </a:xfrm>
+          <a:prstGeom prst="roundRect">
+            <a:avLst>
+              <a:gd name="adj" fmla="val 6000"/>
+            </a:avLst>
+          </a:prstGeom>
+          <a:solidFill>
+            <a:srgbClr val="FFFFFF"/>
+          </a:solidFill>
+          <a:ln w="9525">
+            <a:solidFill>
+              <a:srgbClr val="D7DBE3"/>
+            </a:solidFill>
+          </a:ln>
+        </p:spPr>
+        <p:style>
+          <a:lnRef idx="1">
+            <a:schemeClr val="accent1"/>
+          </a:lnRef>
+          <a:fillRef idx="3">
+            <a:schemeClr val="accent1"/>
+          </a:fillRef>
+          <a:effectRef idx="2">
+            <a:schemeClr val="accent1"/>
+          </a:effectRef>
+          <a:fontRef idx="minor">
+            <a:schemeClr val="lt1"/>
+          </a:fontRef>
+        </p:style>
+        <p:txBody>
+          <a:bodyPr rtlCol="0" anchor="ctr"/>
+          <a:lstStyle/>
+          <a:p>
+            <a:pPr algn="ctr"/>
+          </a:p>
+        </p:txBody>
+      </p:sp>
+      <p:sp>
+        <p:nvSpPr>
+          <p:cNvPr id="11" name="Rectangle 10"/>
+          <p:cNvSpPr/>
+          <p:nvPr/>
+        </p:nvSpPr>
+        <p:spPr>
+          <a:xfrm>
+            <a:off x="8082076" y="1143000"/>
+            <a:ext cx="3606698" cy="73152"/>
+          </a:xfrm>
+          <a:prstGeom prst="rect">
+            <a:avLst/>
+          </a:prstGeom>
+          <a:solidFill>
+            <a:srgbClr val="0F6E7A"/>
+          </a:solidFill>
+          <a:ln>
+            <a:noFill/>
+          </a:ln>
+        </p:spPr>
+        <p:style>
+          <a:lnRef idx="1">
+            <a:schemeClr val="accent1"/>
+          </a:lnRef>
+          <a:fillRef idx="3">
+            <a:schemeClr val="accent1"/>
+          </a:fillRef>
+          <a:effectRef idx="2">
+            <a:schemeClr val="accent1"/>
+          </a:effectRef>
+          <a:fontRef idx="minor">
+            <a:schemeClr val="lt1"/>
+          </a:fontRef>
+        </p:style>
+        <p:txBody>
+          <a:bodyPr rtlCol="0" anchor="ctr"/>
+          <a:lstStyle/>
+          <a:p>
+            <a:pPr algn="ctr"/>
+          </a:p>
+        </p:txBody>
+      </p:sp>
+      <p:sp>
+        <p:nvSpPr>
+          <p:cNvPr id="12" name="TextBox 11"/>
+          <p:cNvSpPr txBox="1"/>
+          <p:nvPr/>
+        </p:nvSpPr>
+        <p:spPr>
+          <a:xfrm>
+            <a:off x="8264956" y="1371600"/>
+            <a:ext cx="3240938" cy="2011680"/>
+          </a:xfrm>
+          <a:prstGeom prst="rect">
+            <a:avLst/>
+          </a:prstGeom>
+          <a:noFill/>
+        </p:spPr>
+        <p:txBody>
+          <a:bodyPr wrap="square">
+            <a:spAutoFit/>
+          </a:bodyPr>
+          <a:lstStyle/>
           <a:p>
             <a:pPr>
               <a:lnSpc>
-                <a:spcPct val="115000"/>
+                <a:spcPct val="110000"/>
               </a:lnSpc>
-              <a:spcAft>
-                <a:spcPts val="300"/>
-              </a:spcAft>
             </a:pPr>
             <a:r>
-              <a:rPr sz="1000" b="1" i="0">
-                <a:solidFill>
-                  <a:srgbClr val="D97306"/>
-                </a:solidFill>
-                <a:latin typeface="Calibri"/>
-              </a:rPr>
-              <a:t>•  </a:t>
-            </a:r>
-            <a:r>
-              <a:rPr sz="1000" b="0" i="0">
-                <a:solidFill>
-                  <a:srgbClr val="333F52"/>
-                </a:solidFill>
-                <a:latin typeface="Calibri"/>
-              </a:rPr>
-              <a:t>Same primitives as dbt; one less tool the client must install. Type-safe ref()s give us the dependency graph automatically.</a:t>
+              <a:rPr sz="1600" b="1" i="0">
+                <a:solidFill>
+                  <a:srgbClr val="0B1F3A"/>
+                </a:solidFill>
+                <a:latin typeface="Calibri"/>
+              </a:rPr>
+              <a:t>TypeScript + React + Vite</a:t>
             </a:r>
           </a:p>
           <a:p>
             <a:pPr>
               <a:lnSpc>
-                <a:spcPct val="115000"/>
+                <a:spcPct val="130000"/>
               </a:lnSpc>
-              <a:spcAft>
-                <a:spcPts val="600"/>
-              </a:spcAft>
+              <a:spcBef>
+                <a:spcPts val="800"/>
+              </a:spcBef>
             </a:pPr>
             <a:r>
-              <a:rPr sz="1400" b="1" i="0">
-                <a:solidFill>
-                  <a:srgbClr val="0F6E7A"/>
-                </a:solidFill>
-                <a:latin typeface="Calibri"/>
-              </a:rPr>
-              <a:t>Identity — Workload Identity Federation</a:t>
+              <a:rPr sz="1200" b="1" i="0">
+                <a:solidFill>
+                  <a:srgbClr val="333F52"/>
+                </a:solidFill>
+                <a:latin typeface="Calibri"/>
+              </a:rPr>
+              <a:t>One URL with realtime interactivity, no server-side rendering.</a:t>
             </a:r>
           </a:p>
           <a:p>
             <a:pPr>
               <a:lnSpc>
-                <a:spcPct val="115000"/>
+                <a:spcPct val="130000"/>
               </a:lnSpc>
-              <a:spcAft>
-                <a:spcPts val="300"/>
-              </a:spcAft>
+              <a:spcBef>
+                <a:spcPts val="800"/>
+              </a:spcBef>
             </a:pPr>
             <a:r>
-              <a:rPr sz="1000" b="1" i="0">
-                <a:solidFill>
-                  <a:srgbClr val="D97306"/>
-                </a:solidFill>
-                <a:latin typeface="Calibri"/>
-              </a:rPr>
-              <a:t>•  </a:t>
-            </a:r>
-            <a:r>
               <a:rPr sz="1000" b="0" i="0">
                 <a:solidFill>
-                  <a:srgbClr val="333F52"/>
-                </a:solidFill>
-                <a:latin typeface="Calibri"/>
-              </a:rPr>
-              <a:t>GitHub OIDC federates into GCP. No long-lived service-account keys to rotate or leak.</a:t>
-            </a:r>
-          </a:p>
+                  <a:srgbClr val="6B7380"/>
+                </a:solidFill>
+                <a:latin typeface="Calibri"/>
+              </a:rPr>
+              <a:t>Zod validates JSON at the boundary. The dashboard is a static-asset deploy.</a:t>
+            </a:r>
+          </a:p>
+        </p:txBody>
+      </p:sp>
+      <p:sp>
+        <p:nvSpPr>
+          <p:cNvPr id="13" name="Rounded Rectangle 12"/>
+          <p:cNvSpPr/>
+          <p:nvPr/>
+        </p:nvSpPr>
+        <p:spPr>
+          <a:xfrm>
+            <a:off x="502920" y="3703320"/>
+            <a:ext cx="3606698" cy="2377440"/>
+          </a:xfrm>
+          <a:prstGeom prst="roundRect">
+            <a:avLst>
+              <a:gd name="adj" fmla="val 6000"/>
+            </a:avLst>
+          </a:prstGeom>
+          <a:solidFill>
+            <a:srgbClr val="FFFFFF"/>
+          </a:solidFill>
+          <a:ln w="9525">
+            <a:solidFill>
+              <a:srgbClr val="D7DBE3"/>
+            </a:solidFill>
+          </a:ln>
+        </p:spPr>
+        <p:style>
+          <a:lnRef idx="1">
+            <a:schemeClr val="accent1"/>
+          </a:lnRef>
+          <a:fillRef idx="3">
+            <a:schemeClr val="accent1"/>
+          </a:fillRef>
+          <a:effectRef idx="2">
+            <a:schemeClr val="accent1"/>
+          </a:effectRef>
+          <a:fontRef idx="minor">
+            <a:schemeClr val="lt1"/>
+          </a:fontRef>
+        </p:style>
+        <p:txBody>
+          <a:bodyPr rtlCol="0" anchor="ctr"/>
+          <a:lstStyle/>
+          <a:p>
+            <a:pPr algn="ctr"/>
+          </a:p>
+        </p:txBody>
+      </p:sp>
+      <p:sp>
+        <p:nvSpPr>
+          <p:cNvPr id="14" name="Rectangle 13"/>
+          <p:cNvSpPr/>
+          <p:nvPr/>
+        </p:nvSpPr>
+        <p:spPr>
+          <a:xfrm>
+            <a:off x="502920" y="3703320"/>
+            <a:ext cx="3606698" cy="73152"/>
+          </a:xfrm>
+          <a:prstGeom prst="rect">
+            <a:avLst/>
+          </a:prstGeom>
+          <a:solidFill>
+            <a:srgbClr val="D97306"/>
+          </a:solidFill>
+          <a:ln>
+            <a:noFill/>
+          </a:ln>
+        </p:spPr>
+        <p:style>
+          <a:lnRef idx="1">
+            <a:schemeClr val="accent1"/>
+          </a:lnRef>
+          <a:fillRef idx="3">
+            <a:schemeClr val="accent1"/>
+          </a:fillRef>
+          <a:effectRef idx="2">
+            <a:schemeClr val="accent1"/>
+          </a:effectRef>
+          <a:fontRef idx="minor">
+            <a:schemeClr val="lt1"/>
+          </a:fontRef>
+        </p:style>
+        <p:txBody>
+          <a:bodyPr rtlCol="0" anchor="ctr"/>
+          <a:lstStyle/>
+          <a:p>
+            <a:pPr algn="ctr"/>
+          </a:p>
+        </p:txBody>
+      </p:sp>
+      <p:sp>
+        <p:nvSpPr>
+          <p:cNvPr id="15" name="TextBox 14"/>
+          <p:cNvSpPr txBox="1"/>
+          <p:nvPr/>
+        </p:nvSpPr>
+        <p:spPr>
+          <a:xfrm>
+            <a:off x="685800" y="3931920"/>
+            <a:ext cx="3240938" cy="2011680"/>
+          </a:xfrm>
+          <a:prstGeom prst="rect">
+            <a:avLst/>
+          </a:prstGeom>
+          <a:noFill/>
+        </p:spPr>
+        <p:txBody>
+          <a:bodyPr wrap="square">
+            <a:spAutoFit/>
+          </a:bodyPr>
+          <a:lstStyle/>
           <a:p>
             <a:pPr>
               <a:lnSpc>
-                <a:spcPct val="115000"/>
+                <a:spcPct val="110000"/>
               </a:lnSpc>
-              <a:spcAft>
-                <a:spcPts val="300"/>
-              </a:spcAft>
             </a:pPr>
             <a:r>
-              <a:rPr sz="1000" b="1" i="0">
-                <a:solidFill>
-                  <a:srgbClr val="D97306"/>
-                </a:solidFill>
-                <a:latin typeface="Calibri"/>
-              </a:rPr>
-              <a:t>•  </a:t>
-            </a:r>
-            <a:r>
-              <a:rPr sz="1000" b="0" i="0">
-                <a:solidFill>
-                  <a:srgbClr val="333F52"/>
-                </a:solidFill>
-                <a:latin typeface="Calibri"/>
-              </a:rPr>
-              <a:t>Per-service service accounts; every IAM grant in Terraform — reviewable in git, not in the console.</a:t>
+              <a:rPr sz="1600" b="1" i="0">
+                <a:solidFill>
+                  <a:srgbClr val="0B1F3A"/>
+                </a:solidFill>
+                <a:latin typeface="Calibri"/>
+              </a:rPr>
+              <a:t>Protobuf</a:t>
             </a:r>
           </a:p>
           <a:p>
             <a:pPr>
               <a:lnSpc>
-                <a:spcPct val="115000"/>
+                <a:spcPct val="130000"/>
               </a:lnSpc>
-              <a:spcAft>
-                <a:spcPts val="600"/>
-              </a:spcAft>
+              <a:spcBef>
+                <a:spcPts val="800"/>
+              </a:spcBef>
             </a:pPr>
             <a:r>
-              <a:rPr sz="1400" b="1" i="0">
-                <a:solidFill>
-                  <a:srgbClr val="0F6E7A"/>
-                </a:solidFill>
-                <a:latin typeface="Calibri"/>
-              </a:rPr>
-              <a:t>Runtime — Cloud Run</a:t>
+              <a:rPr sz="1200" b="1" i="0">
+                <a:solidFill>
+                  <a:srgbClr val="333F52"/>
+                </a:solidFill>
+                <a:latin typeface="Calibri"/>
+              </a:rPr>
+              <a:t>Wire stability across Rust ↔ Python; CI parity test guards drift.</a:t>
             </a:r>
           </a:p>
           <a:p>
             <a:pPr>
               <a:lnSpc>
-                <a:spcPct val="115000"/>
+                <a:spcPct val="130000"/>
               </a:lnSpc>
-              <a:spcAft>
-                <a:spcPts val="300"/>
-              </a:spcAft>
+              <a:spcBef>
+                <a:spcPts val="800"/>
+              </a:spcBef>
             </a:pPr>
             <a:r>
-              <a:rPr sz="1000" b="1" i="0">
-                <a:solidFill>
-                  <a:srgbClr val="D97306"/>
-                </a:solidFill>
-                <a:latin typeface="Calibri"/>
-              </a:rPr>
-              <a:t>•  </a:t>
-            </a:r>
-            <a:r>
               <a:rPr sz="1000" b="0" i="0">
                 <a:solidFill>
-                  <a:srgbClr val="333F52"/>
-                </a:solidFill>
-                <a:latin typeface="Calibri"/>
-              </a:rPr>
-              <a:t>Request-driven autoscaling; min=1 keeps demo warm at ~£3–5/day; ramps under load without paging us.</a:t>
-            </a:r>
-          </a:p>
+                  <a:srgbClr val="6B7380"/>
+                </a:solidFill>
+                <a:latin typeface="Calibri"/>
+              </a:rPr>
+              <a:t>Considered JSON Schema and rejected — loses on-wire byte-stability.</a:t>
+            </a:r>
+          </a:p>
+        </p:txBody>
+      </p:sp>
+      <p:sp>
+        <p:nvSpPr>
+          <p:cNvPr id="16" name="Rounded Rectangle 15"/>
+          <p:cNvSpPr/>
+          <p:nvPr/>
+        </p:nvSpPr>
+        <p:spPr>
+          <a:xfrm>
+            <a:off x="4292498" y="3703320"/>
+            <a:ext cx="3606698" cy="2377440"/>
+          </a:xfrm>
+          <a:prstGeom prst="roundRect">
+            <a:avLst>
+              <a:gd name="adj" fmla="val 6000"/>
+            </a:avLst>
+          </a:prstGeom>
+          <a:solidFill>
+            <a:srgbClr val="FFFFFF"/>
+          </a:solidFill>
+          <a:ln w="9525">
+            <a:solidFill>
+              <a:srgbClr val="D7DBE3"/>
+            </a:solidFill>
+          </a:ln>
+        </p:spPr>
+        <p:style>
+          <a:lnRef idx="1">
+            <a:schemeClr val="accent1"/>
+          </a:lnRef>
+          <a:fillRef idx="3">
+            <a:schemeClr val="accent1"/>
+          </a:fillRef>
+          <a:effectRef idx="2">
+            <a:schemeClr val="accent1"/>
+          </a:effectRef>
+          <a:fontRef idx="minor">
+            <a:schemeClr val="lt1"/>
+          </a:fontRef>
+        </p:style>
+        <p:txBody>
+          <a:bodyPr rtlCol="0" anchor="ctr"/>
+          <a:lstStyle/>
+          <a:p>
+            <a:pPr algn="ctr"/>
+          </a:p>
+        </p:txBody>
+      </p:sp>
+      <p:sp>
+        <p:nvSpPr>
+          <p:cNvPr id="17" name="Rectangle 16"/>
+          <p:cNvSpPr/>
+          <p:nvPr/>
+        </p:nvSpPr>
+        <p:spPr>
+          <a:xfrm>
+            <a:off x="4292498" y="3703320"/>
+            <a:ext cx="3606698" cy="73152"/>
+          </a:xfrm>
+          <a:prstGeom prst="rect">
+            <a:avLst/>
+          </a:prstGeom>
+          <a:solidFill>
+            <a:srgbClr val="0F6E7A"/>
+          </a:solidFill>
+          <a:ln>
+            <a:noFill/>
+          </a:ln>
+        </p:spPr>
+        <p:style>
+          <a:lnRef idx="1">
+            <a:schemeClr val="accent1"/>
+          </a:lnRef>
+          <a:fillRef idx="3">
+            <a:schemeClr val="accent1"/>
+          </a:fillRef>
+          <a:effectRef idx="2">
+            <a:schemeClr val="accent1"/>
+          </a:effectRef>
+          <a:fontRef idx="minor">
+            <a:schemeClr val="lt1"/>
+          </a:fontRef>
+        </p:style>
+        <p:txBody>
+          <a:bodyPr rtlCol="0" anchor="ctr"/>
+          <a:lstStyle/>
+          <a:p>
+            <a:pPr algn="ctr"/>
+          </a:p>
+        </p:txBody>
+      </p:sp>
+      <p:sp>
+        <p:nvSpPr>
+          <p:cNvPr id="18" name="TextBox 17"/>
+          <p:cNvSpPr txBox="1"/>
+          <p:nvPr/>
+        </p:nvSpPr>
+        <p:spPr>
+          <a:xfrm>
+            <a:off x="4475378" y="3931920"/>
+            <a:ext cx="3240938" cy="2011680"/>
+          </a:xfrm>
+          <a:prstGeom prst="rect">
+            <a:avLst/>
+          </a:prstGeom>
+          <a:noFill/>
+        </p:spPr>
+        <p:txBody>
+          <a:bodyPr wrap="square">
+            <a:spAutoFit/>
+          </a:bodyPr>
+          <a:lstStyle/>
           <a:p>
             <a:pPr>
               <a:lnSpc>
-                <a:spcPct val="115000"/>
+                <a:spcPct val="110000"/>
               </a:lnSpc>
-              <a:spcAft>
-                <a:spcPts val="300"/>
-              </a:spcAft>
             </a:pPr>
             <a:r>
-              <a:rPr sz="1000" b="1" i="0">
-                <a:solidFill>
-                  <a:srgbClr val="D97306"/>
-                </a:solidFill>
-                <a:latin typeface="Calibri"/>
-              </a:rPr>
-              <a:t>•  </a:t>
-            </a:r>
+              <a:rPr sz="1600" b="1" i="0">
+                <a:solidFill>
+                  <a:srgbClr val="0B1F3A"/>
+                </a:solidFill>
+                <a:latin typeface="Calibri"/>
+              </a:rPr>
+              <a:t>Dataform on BigQuery</a:t>
+            </a:r>
+          </a:p>
+          <a:p>
+            <a:pPr>
+              <a:lnSpc>
+                <a:spcPct val="130000"/>
+              </a:lnSpc>
+              <a:spcBef>
+                <a:spcPts val="800"/>
+              </a:spcBef>
+            </a:pPr>
+            <a:r>
+              <a:rPr sz="1200" b="1" i="0">
+                <a:solidFill>
+                  <a:srgbClr val="333F52"/>
+                </a:solidFill>
+                <a:latin typeface="Calibri"/>
+              </a:rPr>
+              <a:t>Same primitives as dbt; one fewer tool for the client to install.</a:t>
+            </a:r>
+          </a:p>
+          <a:p>
+            <a:pPr>
+              <a:lnSpc>
+                <a:spcPct val="130000"/>
+              </a:lnSpc>
+              <a:spcBef>
+                <a:spcPts val="800"/>
+              </a:spcBef>
+            </a:pPr>
             <a:r>
               <a:rPr sz="1000" b="0" i="0">
                 <a:solidFill>
+                  <a:srgbClr val="6B7380"/>
+                </a:solidFill>
+                <a:latin typeface="Calibri"/>
+              </a:rPr>
+              <a:t>Type-safe ref()s give us the DAG automatically. coverage_audit, drift_breaches, residuals all light up in order.</a:t>
+            </a:r>
+          </a:p>
+        </p:txBody>
+      </p:sp>
+      <p:sp>
+        <p:nvSpPr>
+          <p:cNvPr id="19" name="Rounded Rectangle 18"/>
+          <p:cNvSpPr/>
+          <p:nvPr/>
+        </p:nvSpPr>
+        <p:spPr>
+          <a:xfrm>
+            <a:off x="8082076" y="3703320"/>
+            <a:ext cx="3606698" cy="2377440"/>
+          </a:xfrm>
+          <a:prstGeom prst="roundRect">
+            <a:avLst>
+              <a:gd name="adj" fmla="val 6000"/>
+            </a:avLst>
+          </a:prstGeom>
+          <a:solidFill>
+            <a:srgbClr val="FFFFFF"/>
+          </a:solidFill>
+          <a:ln w="9525">
+            <a:solidFill>
+              <a:srgbClr val="D7DBE3"/>
+            </a:solidFill>
+          </a:ln>
+        </p:spPr>
+        <p:style>
+          <a:lnRef idx="1">
+            <a:schemeClr val="accent1"/>
+          </a:lnRef>
+          <a:fillRef idx="3">
+            <a:schemeClr val="accent1"/>
+          </a:fillRef>
+          <a:effectRef idx="2">
+            <a:schemeClr val="accent1"/>
+          </a:effectRef>
+          <a:fontRef idx="minor">
+            <a:schemeClr val="lt1"/>
+          </a:fontRef>
+        </p:style>
+        <p:txBody>
+          <a:bodyPr rtlCol="0" anchor="ctr"/>
+          <a:lstStyle/>
+          <a:p>
+            <a:pPr algn="ctr"/>
+          </a:p>
+        </p:txBody>
+      </p:sp>
+      <p:sp>
+        <p:nvSpPr>
+          <p:cNvPr id="20" name="Rectangle 19"/>
+          <p:cNvSpPr/>
+          <p:nvPr/>
+        </p:nvSpPr>
+        <p:spPr>
+          <a:xfrm>
+            <a:off x="8082076" y="3703320"/>
+            <a:ext cx="3606698" cy="73152"/>
+          </a:xfrm>
+          <a:prstGeom prst="rect">
+            <a:avLst/>
+          </a:prstGeom>
+          <a:solidFill>
+            <a:srgbClr val="D97306"/>
+          </a:solidFill>
+          <a:ln>
+            <a:noFill/>
+          </a:ln>
+        </p:spPr>
+        <p:style>
+          <a:lnRef idx="1">
+            <a:schemeClr val="accent1"/>
+          </a:lnRef>
+          <a:fillRef idx="3">
+            <a:schemeClr val="accent1"/>
+          </a:fillRef>
+          <a:effectRef idx="2">
+            <a:schemeClr val="accent1"/>
+          </a:effectRef>
+          <a:fontRef idx="minor">
+            <a:schemeClr val="lt1"/>
+          </a:fontRef>
+        </p:style>
+        <p:txBody>
+          <a:bodyPr rtlCol="0" anchor="ctr"/>
+          <a:lstStyle/>
+          <a:p>
+            <a:pPr algn="ctr"/>
+          </a:p>
+        </p:txBody>
+      </p:sp>
+      <p:sp>
+        <p:nvSpPr>
+          <p:cNvPr id="21" name="TextBox 20"/>
+          <p:cNvSpPr txBox="1"/>
+          <p:nvPr/>
+        </p:nvSpPr>
+        <p:spPr>
+          <a:xfrm>
+            <a:off x="8264956" y="3931920"/>
+            <a:ext cx="3240938" cy="2011680"/>
+          </a:xfrm>
+          <a:prstGeom prst="rect">
+            <a:avLst/>
+          </a:prstGeom>
+          <a:noFill/>
+        </p:spPr>
+        <p:txBody>
+          <a:bodyPr wrap="square">
+            <a:spAutoFit/>
+          </a:bodyPr>
+          <a:lstStyle/>
+          <a:p>
+            <a:pPr>
+              <a:lnSpc>
+                <a:spcPct val="110000"/>
+              </a:lnSpc>
+            </a:pPr>
+            <a:r>
+              <a:rPr sz="1600" b="1" i="0">
+                <a:solidFill>
+                  <a:srgbClr val="0B1F3A"/>
+                </a:solidFill>
+                <a:latin typeface="Calibri"/>
+              </a:rPr>
+              <a:t>Workload Identity Federation</a:t>
+            </a:r>
+          </a:p>
+          <a:p>
+            <a:pPr>
+              <a:lnSpc>
+                <a:spcPct val="130000"/>
+              </a:lnSpc>
+              <a:spcBef>
+                <a:spcPts val="800"/>
+              </a:spcBef>
+            </a:pPr>
+            <a:r>
+              <a:rPr sz="1200" b="1" i="0">
+                <a:solidFill>
                   <a:srgbClr val="333F52"/>
                 </a:solidFill>
                 <a:latin typeface="Calibri"/>
               </a:rPr>
-              <a:t>Considered GKE — overkill for a stateless CPU-bound service; we'd pay cluster overhead we don't use.</a:t>
-            </a:r>
-          </a:p>
-        </p:txBody>
-      </p:sp>
-      <p:sp>
-        <p:nvSpPr>
-          <p:cNvPr id="6" name="Rectangle 5"/>
+              <a:t>No long-lived secrets in CI. No keys to rotate, leak, or audit.</a:t>
+            </a:r>
+          </a:p>
+          <a:p>
+            <a:pPr>
+              <a:lnSpc>
+                <a:spcPct val="130000"/>
+              </a:lnSpc>
+              <a:spcBef>
+                <a:spcPts val="800"/>
+              </a:spcBef>
+            </a:pPr>
+            <a:r>
+              <a:rPr sz="1000" b="0" i="0">
+                <a:solidFill>
+                  <a:srgbClr val="6B7380"/>
+                </a:solidFill>
+                <a:latin typeface="Calibri"/>
+              </a:rPr>
+              <a:t>GitHub OIDC federates into GCP. Every IAM grant is in Terraform.</a:t>
+            </a:r>
+          </a:p>
+        </p:txBody>
+      </p:sp>
+      <p:sp>
+        <p:nvSpPr>
+          <p:cNvPr id="22" name="Rectangle 21"/>
           <p:cNvSpPr/>
           <p:nvPr/>
         </p:nvSpPr>
@@ -8341,7 +10292,7 @@
       </p:sp>
       <p:sp>
         <p:nvSpPr>
-          <p:cNvPr id="7" name="TextBox 6"/>
+          <p:cNvPr id="23" name="TextBox 22"/>
           <p:cNvSpPr txBox="1"/>
           <p:nvPr/>
         </p:nvSpPr>
@@ -8439,7 +10390,7 @@
                 </a:solidFill>
                 <a:latin typeface="Calibri"/>
               </a:rPr>
-              <a:t>WHAT RUNS UNDERNEATH THE DEMO</a:t>
+              <a:t>THE BORING SLIDE THAT MAKES THE SYSTEM BULLETPROOF</a:t>
             </a:r>
           </a:p>
           <a:p>
@@ -8500,14 +10451,147 @@
       </p:sp>
       <p:sp>
         <p:nvSpPr>
-          <p:cNvPr id="4" name="TextBox 3"/>
+          <p:cNvPr id="4" name="Rounded Rectangle 3"/>
+          <p:cNvSpPr/>
+          <p:nvPr/>
+        </p:nvSpPr>
+        <p:spPr>
+          <a:xfrm>
+            <a:off x="502920" y="1097280"/>
+            <a:ext cx="5478627" cy="2423160"/>
+          </a:xfrm>
+          <a:prstGeom prst="roundRect">
+            <a:avLst>
+              <a:gd name="adj" fmla="val 5000"/>
+            </a:avLst>
+          </a:prstGeom>
+          <a:solidFill>
+            <a:srgbClr val="FFFFFF"/>
+          </a:solidFill>
+          <a:ln w="9525">
+            <a:solidFill>
+              <a:srgbClr val="D7DBE3"/>
+            </a:solidFill>
+          </a:ln>
+        </p:spPr>
+        <p:style>
+          <a:lnRef idx="1">
+            <a:schemeClr val="accent1"/>
+          </a:lnRef>
+          <a:fillRef idx="3">
+            <a:schemeClr val="accent1"/>
+          </a:fillRef>
+          <a:effectRef idx="2">
+            <a:schemeClr val="accent1"/>
+          </a:effectRef>
+          <a:fontRef idx="minor">
+            <a:schemeClr val="lt1"/>
+          </a:fontRef>
+        </p:style>
+        <p:txBody>
+          <a:bodyPr rtlCol="0" anchor="ctr"/>
+          <a:lstStyle/>
+          <a:p>
+            <a:pPr algn="ctr"/>
+          </a:p>
+        </p:txBody>
+      </p:sp>
+      <p:sp>
+        <p:nvSpPr>
+          <p:cNvPr id="5" name="Oval 4"/>
+          <p:cNvSpPr/>
+          <p:nvPr/>
+        </p:nvSpPr>
+        <p:spPr>
+          <a:xfrm>
+            <a:off x="731520" y="1325880"/>
+            <a:ext cx="548640" cy="548640"/>
+          </a:xfrm>
+          <a:prstGeom prst="ellipse">
+            <a:avLst/>
+          </a:prstGeom>
+          <a:solidFill>
+            <a:srgbClr val="0F6E7A"/>
+          </a:solidFill>
+          <a:ln>
+            <a:noFill/>
+          </a:ln>
+        </p:spPr>
+        <p:style>
+          <a:lnRef idx="1">
+            <a:schemeClr val="accent1"/>
+          </a:lnRef>
+          <a:fillRef idx="3">
+            <a:schemeClr val="accent1"/>
+          </a:fillRef>
+          <a:effectRef idx="2">
+            <a:schemeClr val="accent1"/>
+          </a:effectRef>
+          <a:fontRef idx="minor">
+            <a:schemeClr val="lt1"/>
+          </a:fontRef>
+        </p:style>
+        <p:txBody>
+          <a:bodyPr rtlCol="0" anchor="ctr" lIns="0" rIns="0" tIns="0" bIns="0"/>
+          <a:lstStyle/>
+          <a:p>
+            <a:pPr algn="ctr"/>
+            <a:r>
+              <a:rPr sz="2200" b="1" i="0">
+                <a:solidFill>
+                  <a:srgbClr val="FFFFFF"/>
+                </a:solidFill>
+                <a:latin typeface="Calibri"/>
+              </a:rPr>
+              <a:t>✓</a:t>
+            </a:r>
+          </a:p>
+        </p:txBody>
+      </p:sp>
+      <p:sp>
+        <p:nvSpPr>
+          <p:cNvPr id="6" name="TextBox 5"/>
           <p:cNvSpPr txBox="1"/>
           <p:nvPr/>
         </p:nvSpPr>
         <p:spPr>
           <a:xfrm>
-            <a:off x="502920" y="1097280"/>
-            <a:ext cx="5669280" cy="5303520"/>
+            <a:off x="1417320" y="1371600"/>
+            <a:ext cx="4381347" cy="457200"/>
+          </a:xfrm>
+          <a:prstGeom prst="rect">
+            <a:avLst/>
+          </a:prstGeom>
+          <a:noFill/>
+        </p:spPr>
+        <p:txBody>
+          <a:bodyPr wrap="none">
+            <a:spAutoFit/>
+          </a:bodyPr>
+          <a:lstStyle/>
+          <a:p>
+            <a:r>
+              <a:rPr sz="1800" b="1" i="0">
+                <a:solidFill>
+                  <a:srgbClr val="0B1F3A"/>
+                </a:solidFill>
+                <a:latin typeface="Calibri"/>
+              </a:rPr>
+              <a:t>Reliability</a:t>
+            </a:r>
+          </a:p>
+        </p:txBody>
+      </p:sp>
+      <p:sp>
+        <p:nvSpPr>
+          <p:cNvPr id="7" name="TextBox 6"/>
+          <p:cNvSpPr txBox="1"/>
+          <p:nvPr/>
+        </p:nvSpPr>
+        <p:spPr>
+          <a:xfrm>
+            <a:off x="731520" y="2011680"/>
+            <a:ext cx="5021427" cy="1417320"/>
           </a:xfrm>
           <a:prstGeom prst="rect">
             <a:avLst/>
@@ -8522,26 +10606,7 @@
           <a:p>
             <a:pPr>
               <a:lnSpc>
-                <a:spcPct val="115000"/>
-              </a:lnSpc>
-              <a:spcAft>
-                <a:spcPts val="600"/>
-              </a:spcAft>
-            </a:pPr>
-            <a:r>
-              <a:rPr sz="1500" b="1" i="0">
-                <a:solidFill>
-                  <a:srgbClr val="0F6E7A"/>
-                </a:solidFill>
-                <a:latin typeface="Calibri"/>
-              </a:rPr>
-              <a:t>Reliability</a:t>
-            </a:r>
-          </a:p>
-          <a:p>
-            <a:pPr>
-              <a:lnSpc>
-                <a:spcPct val="115000"/>
+                <a:spcPct val="125000"/>
               </a:lnSpc>
               <a:spcAft>
                 <a:spcPts val="300"/>
@@ -8550,26 +10615,26 @@
             <a:r>
               <a:rPr sz="1100" b="1" i="0">
                 <a:solidFill>
-                  <a:srgbClr val="D97306"/>
+                  <a:srgbClr val="0F6E7A"/>
                 </a:solidFill>
                 <a:latin typeface="Calibri"/>
               </a:rPr>
               <a:t>•  </a:t>
             </a:r>
             <a:r>
-              <a:rPr sz="1100" b="0" i="0">
+              <a:rPr sz="1000" b="0" i="0">
                 <a:solidFill>
                   <a:srgbClr val="333F52"/>
                 </a:solidFill>
                 <a:latin typeface="Calibri"/>
               </a:rPr>
-              <a:t>Bounds → flat-tCPA fallback on every prediction.</a:t>
+              <a:t>Bounds → flat-tCPA fallback on every prediction</a:t>
             </a:r>
           </a:p>
           <a:p>
             <a:pPr>
               <a:lnSpc>
-                <a:spcPct val="115000"/>
+                <a:spcPct val="125000"/>
               </a:lnSpc>
               <a:spcAft>
                 <a:spcPts val="300"/>
@@ -8578,26 +10643,26 @@
             <a:r>
               <a:rPr sz="1100" b="1" i="0">
                 <a:solidFill>
-                  <a:srgbClr val="D97306"/>
+                  <a:srgbClr val="0F6E7A"/>
                 </a:solidFill>
                 <a:latin typeface="Calibri"/>
               </a:rPr>
               <a:t>•  </a:t>
             </a:r>
             <a:r>
-              <a:rPr sz="1100" b="0" i="0">
+              <a:rPr sz="1000" b="0" i="0">
                 <a:solidFill>
                   <a:srgbClr val="333F52"/>
                 </a:solidFill>
                 <a:latin typeface="Calibri"/>
               </a:rPr>
-              <a:t>Circuit breaker on the model endpoint; auto-recover when healthy.</a:t>
+              <a:t>Circuit breaker auto-recovers; kill switch is a single flag, no redeploy</a:t>
             </a:r>
           </a:p>
           <a:p>
             <a:pPr>
               <a:lnSpc>
-                <a:spcPct val="115000"/>
+                <a:spcPct val="125000"/>
               </a:lnSpc>
               <a:spcAft>
                 <a:spcPts val="300"/>
@@ -8606,26 +10671,182 @@
             <a:r>
               <a:rPr sz="1100" b="1" i="0">
                 <a:solidFill>
-                  <a:srgbClr val="D97306"/>
+                  <a:srgbClr val="0F6E7A"/>
                 </a:solidFill>
                 <a:latin typeface="Calibri"/>
               </a:rPr>
               <a:t>•  </a:t>
             </a:r>
             <a:r>
-              <a:rPr sz="1100" b="0" i="0">
+              <a:rPr sz="1000" b="0" i="0">
                 <a:solidFill>
                   <a:srgbClr val="333F52"/>
                 </a:solidFill>
                 <a:latin typeface="Calibri"/>
               </a:rPr>
-              <a:t>Anomaly window on null-rates flips a single kill-switch flag — no redeploy.</a:t>
-            </a:r>
-          </a:p>
+              <a:t>Per-call timeouts on model + warehouse — no request hangs</a:t>
+            </a:r>
+          </a:p>
+        </p:txBody>
+      </p:sp>
+      <p:sp>
+        <p:nvSpPr>
+          <p:cNvPr id="8" name="Rounded Rectangle 7"/>
+          <p:cNvSpPr/>
+          <p:nvPr/>
+        </p:nvSpPr>
+        <p:spPr>
+          <a:xfrm>
+            <a:off x="6210147" y="1097280"/>
+            <a:ext cx="5478627" cy="2423160"/>
+          </a:xfrm>
+          <a:prstGeom prst="roundRect">
+            <a:avLst>
+              <a:gd name="adj" fmla="val 5000"/>
+            </a:avLst>
+          </a:prstGeom>
+          <a:solidFill>
+            <a:srgbClr val="FFFFFF"/>
+          </a:solidFill>
+          <a:ln w="9525">
+            <a:solidFill>
+              <a:srgbClr val="D7DBE3"/>
+            </a:solidFill>
+          </a:ln>
+        </p:spPr>
+        <p:style>
+          <a:lnRef idx="1">
+            <a:schemeClr val="accent1"/>
+          </a:lnRef>
+          <a:fillRef idx="3">
+            <a:schemeClr val="accent1"/>
+          </a:fillRef>
+          <a:effectRef idx="2">
+            <a:schemeClr val="accent1"/>
+          </a:effectRef>
+          <a:fontRef idx="minor">
+            <a:schemeClr val="lt1"/>
+          </a:fontRef>
+        </p:style>
+        <p:txBody>
+          <a:bodyPr rtlCol="0" anchor="ctr"/>
+          <a:lstStyle/>
+          <a:p>
+            <a:pPr algn="ctr"/>
+          </a:p>
+        </p:txBody>
+      </p:sp>
+      <p:sp>
+        <p:nvSpPr>
+          <p:cNvPr id="9" name="Oval 8"/>
+          <p:cNvSpPr/>
+          <p:nvPr/>
+        </p:nvSpPr>
+        <p:spPr>
+          <a:xfrm>
+            <a:off x="6438747" y="1325880"/>
+            <a:ext cx="548640" cy="548640"/>
+          </a:xfrm>
+          <a:prstGeom prst="ellipse">
+            <a:avLst/>
+          </a:prstGeom>
+          <a:solidFill>
+            <a:srgbClr val="D97306"/>
+          </a:solidFill>
+          <a:ln>
+            <a:noFill/>
+          </a:ln>
+        </p:spPr>
+        <p:style>
+          <a:lnRef idx="1">
+            <a:schemeClr val="accent1"/>
+          </a:lnRef>
+          <a:fillRef idx="3">
+            <a:schemeClr val="accent1"/>
+          </a:fillRef>
+          <a:effectRef idx="2">
+            <a:schemeClr val="accent1"/>
+          </a:effectRef>
+          <a:fontRef idx="minor">
+            <a:schemeClr val="lt1"/>
+          </a:fontRef>
+        </p:style>
+        <p:txBody>
+          <a:bodyPr rtlCol="0" anchor="ctr" lIns="0" rIns="0" tIns="0" bIns="0"/>
+          <a:lstStyle/>
+          <a:p>
+            <a:pPr algn="ctr"/>
+            <a:r>
+              <a:rPr sz="2200" b="1" i="0">
+                <a:solidFill>
+                  <a:srgbClr val="FFFFFF"/>
+                </a:solidFill>
+                <a:latin typeface="Calibri"/>
+              </a:rPr>
+              <a:t>✓</a:t>
+            </a:r>
+          </a:p>
+        </p:txBody>
+      </p:sp>
+      <p:sp>
+        <p:nvSpPr>
+          <p:cNvPr id="10" name="TextBox 9"/>
+          <p:cNvSpPr txBox="1"/>
+          <p:nvPr/>
+        </p:nvSpPr>
+        <p:spPr>
+          <a:xfrm>
+            <a:off x="7124547" y="1371600"/>
+            <a:ext cx="4381347" cy="457200"/>
+          </a:xfrm>
+          <a:prstGeom prst="rect">
+            <a:avLst/>
+          </a:prstGeom>
+          <a:noFill/>
+        </p:spPr>
+        <p:txBody>
+          <a:bodyPr wrap="none">
+            <a:spAutoFit/>
+          </a:bodyPr>
+          <a:lstStyle/>
+          <a:p>
+            <a:r>
+              <a:rPr sz="1800" b="1" i="0">
+                <a:solidFill>
+                  <a:srgbClr val="0B1F3A"/>
+                </a:solidFill>
+                <a:latin typeface="Calibri"/>
+              </a:rPr>
+              <a:t>Observability</a:t>
+            </a:r>
+          </a:p>
+        </p:txBody>
+      </p:sp>
+      <p:sp>
+        <p:nvSpPr>
+          <p:cNvPr id="11" name="TextBox 10"/>
+          <p:cNvSpPr txBox="1"/>
+          <p:nvPr/>
+        </p:nvSpPr>
+        <p:spPr>
+          <a:xfrm>
+            <a:off x="6438747" y="2011680"/>
+            <a:ext cx="5021427" cy="1417320"/>
+          </a:xfrm>
+          <a:prstGeom prst="rect">
+            <a:avLst/>
+          </a:prstGeom>
+          <a:noFill/>
+        </p:spPr>
+        <p:txBody>
+          <a:bodyPr wrap="square">
+            <a:spAutoFit/>
+          </a:bodyPr>
+          <a:lstStyle/>
           <a:p>
             <a:pPr>
               <a:lnSpc>
-                <a:spcPct val="115000"/>
+                <a:spcPct val="125000"/>
               </a:lnSpc>
               <a:spcAft>
                 <a:spcPts val="300"/>
@@ -8641,38 +10862,19 @@
               <a:t>•  </a:t>
             </a:r>
             <a:r>
-              <a:rPr sz="1100" b="0" i="0">
+              <a:rPr sz="1000" b="0" i="0">
                 <a:solidFill>
                   <a:srgbClr val="333F52"/>
                 </a:solidFill>
                 <a:latin typeface="Calibri"/>
               </a:rPr>
-              <a:t>Per-call timeouts on model + warehouse — no request hangs.</a:t>
+              <a:t>Six Cloud Monitoring alerts: latency, 5xx, breaker, anomaly, per-segment drift, coverage drop</a:t>
             </a:r>
           </a:p>
           <a:p>
             <a:pPr>
               <a:lnSpc>
-                <a:spcPct val="115000"/>
-              </a:lnSpc>
-              <a:spcAft>
-                <a:spcPts val="600"/>
-              </a:spcAft>
-            </a:pPr>
-            <a:r>
-              <a:rPr sz="1500" b="1" i="0">
-                <a:solidFill>
-                  <a:srgbClr val="0F6E7A"/>
-                </a:solidFill>
-                <a:latin typeface="Calibri"/>
-              </a:rPr>
-              <a:t>Observability</a:t>
-            </a:r>
-          </a:p>
-          <a:p>
-            <a:pPr>
-              <a:lnSpc>
-                <a:spcPct val="115000"/>
+                <a:spcPct val="125000"/>
               </a:lnSpc>
               <a:spcAft>
                 <a:spcPts val="300"/>
@@ -8688,19 +10890,19 @@
               <a:t>•  </a:t>
             </a:r>
             <a:r>
-              <a:rPr sz="1100" b="0" i="0">
+              <a:rPr sz="1000" b="0" i="0">
                 <a:solidFill>
                   <a:srgbClr val="333F52"/>
                 </a:solidFill>
                 <a:latin typeface="Calibri"/>
               </a:rPr>
-              <a:t>Cloud Logging + Trace + Monitoring out of the box.</a:t>
+              <a:t>Cloud Logging + Trace baked in</a:t>
             </a:r>
           </a:p>
           <a:p>
             <a:pPr>
               <a:lnSpc>
-                <a:spcPct val="115000"/>
+                <a:spcPct val="125000"/>
               </a:lnSpc>
               <a:spcAft>
                 <a:spcPts val="300"/>
@@ -8716,19 +10918,175 @@
               <a:t>•  </a:t>
             </a:r>
             <a:r>
-              <a:rPr sz="1100" b="0" i="0">
+              <a:rPr sz="1000" b="0" i="0">
                 <a:solidFill>
                   <a:srgbClr val="333F52"/>
                 </a:solidFill>
                 <a:latin typeface="Calibri"/>
               </a:rPr>
-              <a:t>Six alert policies: latency p95, 5xx rate, breaker trips, anomaly state, per-segment MAE drift &gt; 25% W-o-W, coverage drop &gt; 10pp W-o-W.</a:t>
-            </a:r>
-          </a:p>
+              <a:t>SLO: 99.5% availability on /v1/score, 30-day rolling</a:t>
+            </a:r>
+          </a:p>
+        </p:txBody>
+      </p:sp>
+      <p:sp>
+        <p:nvSpPr>
+          <p:cNvPr id="12" name="Rounded Rectangle 11"/>
+          <p:cNvSpPr/>
+          <p:nvPr/>
+        </p:nvSpPr>
+        <p:spPr>
+          <a:xfrm>
+            <a:off x="502920" y="3749040"/>
+            <a:ext cx="5478627" cy="2423160"/>
+          </a:xfrm>
+          <a:prstGeom prst="roundRect">
+            <a:avLst>
+              <a:gd name="adj" fmla="val 5000"/>
+            </a:avLst>
+          </a:prstGeom>
+          <a:solidFill>
+            <a:srgbClr val="FFFFFF"/>
+          </a:solidFill>
+          <a:ln w="9525">
+            <a:solidFill>
+              <a:srgbClr val="D7DBE3"/>
+            </a:solidFill>
+          </a:ln>
+        </p:spPr>
+        <p:style>
+          <a:lnRef idx="1">
+            <a:schemeClr val="accent1"/>
+          </a:lnRef>
+          <a:fillRef idx="3">
+            <a:schemeClr val="accent1"/>
+          </a:fillRef>
+          <a:effectRef idx="2">
+            <a:schemeClr val="accent1"/>
+          </a:effectRef>
+          <a:fontRef idx="minor">
+            <a:schemeClr val="lt1"/>
+          </a:fontRef>
+        </p:style>
+        <p:txBody>
+          <a:bodyPr rtlCol="0" anchor="ctr"/>
+          <a:lstStyle/>
+          <a:p>
+            <a:pPr algn="ctr"/>
+          </a:p>
+        </p:txBody>
+      </p:sp>
+      <p:sp>
+        <p:nvSpPr>
+          <p:cNvPr id="13" name="Oval 12"/>
+          <p:cNvSpPr/>
+          <p:nvPr/>
+        </p:nvSpPr>
+        <p:spPr>
+          <a:xfrm>
+            <a:off x="731520" y="3977640"/>
+            <a:ext cx="548640" cy="548640"/>
+          </a:xfrm>
+          <a:prstGeom prst="ellipse">
+            <a:avLst/>
+          </a:prstGeom>
+          <a:solidFill>
+            <a:srgbClr val="1F8A4F"/>
+          </a:solidFill>
+          <a:ln>
+            <a:noFill/>
+          </a:ln>
+        </p:spPr>
+        <p:style>
+          <a:lnRef idx="1">
+            <a:schemeClr val="accent1"/>
+          </a:lnRef>
+          <a:fillRef idx="3">
+            <a:schemeClr val="accent1"/>
+          </a:fillRef>
+          <a:effectRef idx="2">
+            <a:schemeClr val="accent1"/>
+          </a:effectRef>
+          <a:fontRef idx="minor">
+            <a:schemeClr val="lt1"/>
+          </a:fontRef>
+        </p:style>
+        <p:txBody>
+          <a:bodyPr rtlCol="0" anchor="ctr" lIns="0" rIns="0" tIns="0" bIns="0"/>
+          <a:lstStyle/>
+          <a:p>
+            <a:pPr algn="ctr"/>
+            <a:r>
+              <a:rPr sz="2200" b="1" i="0">
+                <a:solidFill>
+                  <a:srgbClr val="FFFFFF"/>
+                </a:solidFill>
+                <a:latin typeface="Calibri"/>
+              </a:rPr>
+              <a:t>✓</a:t>
+            </a:r>
+          </a:p>
+        </p:txBody>
+      </p:sp>
+      <p:sp>
+        <p:nvSpPr>
+          <p:cNvPr id="14" name="TextBox 13"/>
+          <p:cNvSpPr txBox="1"/>
+          <p:nvPr/>
+        </p:nvSpPr>
+        <p:spPr>
+          <a:xfrm>
+            <a:off x="1417320" y="4023360"/>
+            <a:ext cx="4381347" cy="457200"/>
+          </a:xfrm>
+          <a:prstGeom prst="rect">
+            <a:avLst/>
+          </a:prstGeom>
+          <a:noFill/>
+        </p:spPr>
+        <p:txBody>
+          <a:bodyPr wrap="none">
+            <a:spAutoFit/>
+          </a:bodyPr>
+          <a:lstStyle/>
+          <a:p>
+            <a:r>
+              <a:rPr sz="1800" b="1" i="0">
+                <a:solidFill>
+                  <a:srgbClr val="0B1F3A"/>
+                </a:solidFill>
+                <a:latin typeface="Calibri"/>
+              </a:rPr>
+              <a:t>Security + compliance</a:t>
+            </a:r>
+          </a:p>
+        </p:txBody>
+      </p:sp>
+      <p:sp>
+        <p:nvSpPr>
+          <p:cNvPr id="15" name="TextBox 14"/>
+          <p:cNvSpPr txBox="1"/>
+          <p:nvPr/>
+        </p:nvSpPr>
+        <p:spPr>
+          <a:xfrm>
+            <a:off x="731520" y="4663440"/>
+            <a:ext cx="5021427" cy="1417320"/>
+          </a:xfrm>
+          <a:prstGeom prst="rect">
+            <a:avLst/>
+          </a:prstGeom>
+          <a:noFill/>
+        </p:spPr>
+        <p:txBody>
+          <a:bodyPr wrap="square">
+            <a:spAutoFit/>
+          </a:bodyPr>
+          <a:lstStyle/>
           <a:p>
             <a:pPr>
               <a:lnSpc>
-                <a:spcPct val="115000"/>
+                <a:spcPct val="125000"/>
               </a:lnSpc>
               <a:spcAft>
                 <a:spcPts val="300"/>
@@ -8737,68 +11095,26 @@
             <a:r>
               <a:rPr sz="1100" b="1" i="0">
                 <a:solidFill>
-                  <a:srgbClr val="D97306"/>
+                  <a:srgbClr val="1F8A4F"/>
                 </a:solidFill>
                 <a:latin typeface="Calibri"/>
               </a:rPr>
               <a:t>•  </a:t>
             </a:r>
             <a:r>
-              <a:rPr sz="1100" b="0" i="0">
+              <a:rPr sz="1000" b="0" i="0">
                 <a:solidFill>
                   <a:srgbClr val="333F52"/>
                 </a:solidFill>
                 <a:latin typeface="Calibri"/>
               </a:rPr>
-              <a:t>Service-level objective: 99.5% availability on /v1/score, 30-day rolling.</a:t>
-            </a:r>
-          </a:p>
-        </p:txBody>
-      </p:sp>
-      <p:sp>
-        <p:nvSpPr>
-          <p:cNvPr id="5" name="TextBox 4"/>
-          <p:cNvSpPr txBox="1"/>
-          <p:nvPr/>
-        </p:nvSpPr>
-        <p:spPr>
-          <a:xfrm>
-            <a:off x="6355080" y="1097280"/>
-            <a:ext cx="5669280" cy="5303520"/>
-          </a:xfrm>
-          <a:prstGeom prst="rect">
-            <a:avLst/>
-          </a:prstGeom>
-          <a:noFill/>
-        </p:spPr>
-        <p:txBody>
-          <a:bodyPr wrap="square">
-            <a:spAutoFit/>
-          </a:bodyPr>
-          <a:lstStyle/>
+              <a:t>Per-service service accounts; least-privilege IAM in Terraform</a:t>
+            </a:r>
+          </a:p>
           <a:p>
             <a:pPr>
               <a:lnSpc>
-                <a:spcPct val="115000"/>
-              </a:lnSpc>
-              <a:spcAft>
-                <a:spcPts val="600"/>
-              </a:spcAft>
-            </a:pPr>
-            <a:r>
-              <a:rPr sz="1500" b="1" i="0">
-                <a:solidFill>
-                  <a:srgbClr val="0F6E7A"/>
-                </a:solidFill>
-                <a:latin typeface="Calibri"/>
-              </a:rPr>
-              <a:t>Security + compliance</a:t>
-            </a:r>
-          </a:p>
-          <a:p>
-            <a:pPr>
-              <a:lnSpc>
-                <a:spcPct val="115000"/>
+                <a:spcPct val="125000"/>
               </a:lnSpc>
               <a:spcAft>
                 <a:spcPts val="300"/>
@@ -8807,26 +11123,26 @@
             <a:r>
               <a:rPr sz="1100" b="1" i="0">
                 <a:solidFill>
-                  <a:srgbClr val="D97306"/>
+                  <a:srgbClr val="1F8A4F"/>
                 </a:solidFill>
                 <a:latin typeface="Calibri"/>
               </a:rPr>
               <a:t>•  </a:t>
             </a:r>
             <a:r>
-              <a:rPr sz="1100" b="0" i="0">
+              <a:rPr sz="1000" b="0" i="0">
                 <a:solidFill>
                   <a:srgbClr val="333F52"/>
                 </a:solidFill>
                 <a:latin typeface="Calibri"/>
               </a:rPr>
-              <a:t>Per-service service accounts; least-privilege IAM in Terraform — every grant is reviewable in git.</a:t>
+              <a:t>Workload Identity Federation — no long-lived keys in CI</a:t>
             </a:r>
           </a:p>
           <a:p>
             <a:pPr>
               <a:lnSpc>
-                <a:spcPct val="115000"/>
+                <a:spcPct val="125000"/>
               </a:lnSpc>
               <a:spcAft>
                 <a:spcPts val="300"/>
@@ -8835,26 +11151,26 @@
             <a:r>
               <a:rPr sz="1100" b="1" i="0">
                 <a:solidFill>
-                  <a:srgbClr val="D97306"/>
+                  <a:srgbClr val="1F8A4F"/>
                 </a:solidFill>
                 <a:latin typeface="Calibri"/>
               </a:rPr>
               <a:t>•  </a:t>
             </a:r>
             <a:r>
-              <a:rPr sz="1100" b="0" i="0">
+              <a:rPr sz="1000" b="0" i="0">
                 <a:solidFill>
                   <a:srgbClr val="333F52"/>
                 </a:solidFill>
                 <a:latin typeface="Calibri"/>
               </a:rPr>
-              <a:t>Workload Identity Federation — no long-lived secrets in CI.</a:t>
+              <a:t>ADR 0004 — bid-optimisation only, no customer-decisioning surface</a:t>
             </a:r>
           </a:p>
           <a:p>
             <a:pPr>
               <a:lnSpc>
-                <a:spcPct val="115000"/>
+                <a:spcPct val="125000"/>
               </a:lnSpc>
               <a:spcAft>
                 <a:spcPts val="300"/>
@@ -8863,26 +11179,182 @@
             <a:r>
               <a:rPr sz="1100" b="1" i="0">
                 <a:solidFill>
-                  <a:srgbClr val="D97306"/>
+                  <a:srgbClr val="1F8A4F"/>
                 </a:solidFill>
                 <a:latin typeface="Calibri"/>
               </a:rPr>
               <a:t>•  </a:t>
             </a:r>
             <a:r>
-              <a:rPr sz="1100" b="0" i="0">
+              <a:rPr sz="1000" b="0" i="0">
                 <a:solidFill>
                   <a:srgbClr val="333F52"/>
                 </a:solidFill>
                 <a:latin typeface="Calibri"/>
               </a:rPr>
-              <a:t>Secret Manager with versioning; rotation is a runbooked one-liner.</a:t>
-            </a:r>
-          </a:p>
+              <a:t>ADR 0005 — GA4 PII boundary: hashed user_pseudo_id only</a:t>
+            </a:r>
+          </a:p>
+        </p:txBody>
+      </p:sp>
+      <p:sp>
+        <p:nvSpPr>
+          <p:cNvPr id="16" name="Rounded Rectangle 15"/>
+          <p:cNvSpPr/>
+          <p:nvPr/>
+        </p:nvSpPr>
+        <p:spPr>
+          <a:xfrm>
+            <a:off x="6210147" y="3749040"/>
+            <a:ext cx="5478627" cy="2423160"/>
+          </a:xfrm>
+          <a:prstGeom prst="roundRect">
+            <a:avLst>
+              <a:gd name="adj" fmla="val 5000"/>
+            </a:avLst>
+          </a:prstGeom>
+          <a:solidFill>
+            <a:srgbClr val="FFFFFF"/>
+          </a:solidFill>
+          <a:ln w="9525">
+            <a:solidFill>
+              <a:srgbClr val="D7DBE3"/>
+            </a:solidFill>
+          </a:ln>
+        </p:spPr>
+        <p:style>
+          <a:lnRef idx="1">
+            <a:schemeClr val="accent1"/>
+          </a:lnRef>
+          <a:fillRef idx="3">
+            <a:schemeClr val="accent1"/>
+          </a:fillRef>
+          <a:effectRef idx="2">
+            <a:schemeClr val="accent1"/>
+          </a:effectRef>
+          <a:fontRef idx="minor">
+            <a:schemeClr val="lt1"/>
+          </a:fontRef>
+        </p:style>
+        <p:txBody>
+          <a:bodyPr rtlCol="0" anchor="ctr"/>
+          <a:lstStyle/>
+          <a:p>
+            <a:pPr algn="ctr"/>
+          </a:p>
+        </p:txBody>
+      </p:sp>
+      <p:sp>
+        <p:nvSpPr>
+          <p:cNvPr id="17" name="Oval 16"/>
+          <p:cNvSpPr/>
+          <p:nvPr/>
+        </p:nvSpPr>
+        <p:spPr>
+          <a:xfrm>
+            <a:off x="6438747" y="3977640"/>
+            <a:ext cx="548640" cy="548640"/>
+          </a:xfrm>
+          <a:prstGeom prst="ellipse">
+            <a:avLst/>
+          </a:prstGeom>
+          <a:solidFill>
+            <a:srgbClr val="0B1F3A"/>
+          </a:solidFill>
+          <a:ln>
+            <a:noFill/>
+          </a:ln>
+        </p:spPr>
+        <p:style>
+          <a:lnRef idx="1">
+            <a:schemeClr val="accent1"/>
+          </a:lnRef>
+          <a:fillRef idx="3">
+            <a:schemeClr val="accent1"/>
+          </a:fillRef>
+          <a:effectRef idx="2">
+            <a:schemeClr val="accent1"/>
+          </a:effectRef>
+          <a:fontRef idx="minor">
+            <a:schemeClr val="lt1"/>
+          </a:fontRef>
+        </p:style>
+        <p:txBody>
+          <a:bodyPr rtlCol="0" anchor="ctr" lIns="0" rIns="0" tIns="0" bIns="0"/>
+          <a:lstStyle/>
+          <a:p>
+            <a:pPr algn="ctr"/>
+            <a:r>
+              <a:rPr sz="2200" b="1" i="0">
+                <a:solidFill>
+                  <a:srgbClr val="FFFFFF"/>
+                </a:solidFill>
+                <a:latin typeface="Calibri"/>
+              </a:rPr>
+              <a:t>✓</a:t>
+            </a:r>
+          </a:p>
+        </p:txBody>
+      </p:sp>
+      <p:sp>
+        <p:nvSpPr>
+          <p:cNvPr id="18" name="TextBox 17"/>
+          <p:cNvSpPr txBox="1"/>
+          <p:nvPr/>
+        </p:nvSpPr>
+        <p:spPr>
+          <a:xfrm>
+            <a:off x="7124547" y="4023360"/>
+            <a:ext cx="4381347" cy="457200"/>
+          </a:xfrm>
+          <a:prstGeom prst="rect">
+            <a:avLst/>
+          </a:prstGeom>
+          <a:noFill/>
+        </p:spPr>
+        <p:txBody>
+          <a:bodyPr wrap="none">
+            <a:spAutoFit/>
+          </a:bodyPr>
+          <a:lstStyle/>
+          <a:p>
+            <a:r>
+              <a:rPr sz="1800" b="1" i="0">
+                <a:solidFill>
+                  <a:srgbClr val="0B1F3A"/>
+                </a:solidFill>
+                <a:latin typeface="Calibri"/>
+              </a:rPr>
+              <a:t>Operability</a:t>
+            </a:r>
+          </a:p>
+        </p:txBody>
+      </p:sp>
+      <p:sp>
+        <p:nvSpPr>
+          <p:cNvPr id="19" name="TextBox 18"/>
+          <p:cNvSpPr txBox="1"/>
+          <p:nvPr/>
+        </p:nvSpPr>
+        <p:spPr>
+          <a:xfrm>
+            <a:off x="6438747" y="4663440"/>
+            <a:ext cx="5021427" cy="1417320"/>
+          </a:xfrm>
+          <a:prstGeom prst="rect">
+            <a:avLst/>
+          </a:prstGeom>
+          <a:noFill/>
+        </p:spPr>
+        <p:txBody>
+          <a:bodyPr wrap="square">
+            <a:spAutoFit/>
+          </a:bodyPr>
+          <a:lstStyle/>
           <a:p>
             <a:pPr>
               <a:lnSpc>
-                <a:spcPct val="115000"/>
+                <a:spcPct val="125000"/>
               </a:lnSpc>
               <a:spcAft>
                 <a:spcPts val="300"/>
@@ -8891,26 +11363,26 @@
             <a:r>
               <a:rPr sz="1100" b="1" i="0">
                 <a:solidFill>
-                  <a:srgbClr val="D97306"/>
+                  <a:srgbClr val="0B1F3A"/>
                 </a:solidFill>
                 <a:latin typeface="Calibri"/>
               </a:rPr>
               <a:t>•  </a:t>
             </a:r>
             <a:r>
-              <a:rPr sz="1100" b="0" i="0">
+              <a:rPr sz="1000" b="0" i="0">
                 <a:solidFill>
                   <a:srgbClr val="333F52"/>
                 </a:solidFill>
                 <a:latin typeface="Calibri"/>
               </a:rPr>
-              <a:t>ADR 0004 — bid-optimisation boundary: no customer identifiers in; no output reaches anything that affects customer terms.</a:t>
+              <a:t>Tag-push CI → CD → smoke; rollback is a single Vertex traffic-split</a:t>
             </a:r>
           </a:p>
           <a:p>
             <a:pPr>
               <a:lnSpc>
-                <a:spcPct val="115000"/>
+                <a:spcPct val="125000"/>
               </a:lnSpc>
               <a:spcAft>
                 <a:spcPts val="300"/>
@@ -8919,102 +11391,27 @@
             <a:r>
               <a:rPr sz="1100" b="1" i="0">
                 <a:solidFill>
-                  <a:srgbClr val="D97306"/>
+                  <a:srgbClr val="0B1F3A"/>
                 </a:solidFill>
                 <a:latin typeface="Calibri"/>
               </a:rPr>
               <a:t>•  </a:t>
             </a:r>
             <a:r>
-              <a:rPr sz="1100" b="0" i="0">
+              <a:rPr sz="1000" b="0" i="0">
                 <a:solidFill>
                   <a:srgbClr val="333F52"/>
                 </a:solidFill>
                 <a:latin typeface="Calibri"/>
               </a:rPr>
-              <a:t>ADR 0005 — GA4 / Phoebe PII boundary: hashed user_pseudo_id only; raw user_id and PII params stripped at the staging view.</a:t>
-            </a:r>
-          </a:p>
-          <a:p>
-            <a:pPr>
-              <a:lnSpc>
-                <a:spcPct val="115000"/>
-              </a:lnSpc>
-              <a:spcAft>
-                <a:spcPts val="600"/>
-              </a:spcAft>
-            </a:pPr>
-            <a:r>
-              <a:rPr sz="1500" b="1" i="0">
-                <a:solidFill>
-                  <a:srgbClr val="0F6E7A"/>
-                </a:solidFill>
-                <a:latin typeface="Calibri"/>
-              </a:rPr>
-              <a:t>Operability</a:t>
-            </a:r>
-          </a:p>
-          <a:p>
-            <a:pPr>
-              <a:lnSpc>
-                <a:spcPct val="115000"/>
-              </a:lnSpc>
-              <a:spcAft>
-                <a:spcPts val="300"/>
-              </a:spcAft>
-            </a:pPr>
-            <a:r>
-              <a:rPr sz="1100" b="1" i="0">
-                <a:solidFill>
-                  <a:srgbClr val="D97306"/>
-                </a:solidFill>
-                <a:latin typeface="Calibri"/>
-              </a:rPr>
-              <a:t>•  </a:t>
-            </a:r>
-            <a:r>
-              <a:rPr sz="1100" b="0" i="0">
-                <a:solidFill>
-                  <a:srgbClr val="333F52"/>
-                </a:solidFill>
-                <a:latin typeface="Calibri"/>
-              </a:rPr>
-              <a:t>Tag-push CI → CD → smoke; rollback is a Vertex traffic-split.</a:t>
-            </a:r>
-          </a:p>
-          <a:p>
-            <a:pPr>
-              <a:lnSpc>
-                <a:spcPct val="115000"/>
-              </a:lnSpc>
-              <a:spcAft>
-                <a:spcPts val="300"/>
-              </a:spcAft>
-            </a:pPr>
-            <a:r>
-              <a:rPr sz="1100" b="1" i="0">
-                <a:solidFill>
-                  <a:srgbClr val="D97306"/>
-                </a:solidFill>
-                <a:latin typeface="Calibri"/>
-              </a:rPr>
-              <a:t>•  </a:t>
-            </a:r>
-            <a:r>
-              <a:rPr sz="1100" b="0" i="0">
-                <a:solidFill>
-                  <a:srgbClr val="333F52"/>
-                </a:solidFill>
-                <a:latin typeface="Calibri"/>
-              </a:rPr>
-              <a:t>Runbooks committed: breaker reset, model rollback, secret rotation, coverage audit, BQ schema migration, endpoint scale-down.</a:t>
-            </a:r>
-          </a:p>
-        </p:txBody>
-      </p:sp>
-      <p:sp>
-        <p:nvSpPr>
-          <p:cNvPr id="6" name="Rectangle 5"/>
+              <a:t>Six runbooks committed: breaker reset, model rollback, secret rotation, coverage audit, BQ schema migration, endpoint scale-down</a:t>
+            </a:r>
+          </a:p>
+        </p:txBody>
+      </p:sp>
+      <p:sp>
+        <p:nvSpPr>
+          <p:cNvPr id="20" name="Rectangle 19"/>
           <p:cNvSpPr/>
           <p:nvPr/>
         </p:nvSpPr>
@@ -9066,7 +11463,7 @@
       </p:sp>
       <p:sp>
         <p:nvSpPr>
-          <p:cNvPr id="7" name="TextBox 6"/>
+          <p:cNvPr id="21" name="TextBox 20"/>
           <p:cNvSpPr txBox="1"/>
           <p:nvPr/>
         </p:nvSpPr>

--- a/docs/client-demo-deck.pptx
+++ b/docs/client-demo-deck.pptx
@@ -3106,14 +3106,14 @@
         </p:nvSpPr>
         <p:spPr>
           <a:xfrm>
-            <a:off x="0" y="0"/>
-            <a:ext cx="12191695" cy="6858000"/>
+            <a:off x="0" y="4114800"/>
+            <a:ext cx="12191695" cy="36576"/>
           </a:xfrm>
           <a:prstGeom prst="rect">
             <a:avLst/>
           </a:prstGeom>
           <a:solidFill>
-            <a:srgbClr val="0B1F3A"/>
+            <a:srgbClr val="0064FF"/>
           </a:solidFill>
           <a:ln>
             <a:noFill/>
@@ -3143,50 +3143,7 @@
       </p:sp>
       <p:sp>
         <p:nvSpPr>
-          <p:cNvPr id="3" name="Rectangle 2"/>
-          <p:cNvSpPr/>
-          <p:nvPr/>
-        </p:nvSpPr>
-        <p:spPr>
-          <a:xfrm>
-            <a:off x="0" y="4114800"/>
-            <a:ext cx="12191695" cy="73152"/>
-          </a:xfrm>
-          <a:prstGeom prst="rect">
-            <a:avLst/>
-          </a:prstGeom>
-          <a:solidFill>
-            <a:srgbClr val="D97306"/>
-          </a:solidFill>
-          <a:ln>
-            <a:noFill/>
-          </a:ln>
-        </p:spPr>
-        <p:style>
-          <a:lnRef idx="1">
-            <a:schemeClr val="accent1"/>
-          </a:lnRef>
-          <a:fillRef idx="3">
-            <a:schemeClr val="accent1"/>
-          </a:fillRef>
-          <a:effectRef idx="2">
-            <a:schemeClr val="accent1"/>
-          </a:effectRef>
-          <a:fontRef idx="minor">
-            <a:schemeClr val="lt1"/>
-          </a:fontRef>
-        </p:style>
-        <p:txBody>
-          <a:bodyPr rtlCol="0" anchor="ctr"/>
-          <a:lstStyle/>
-          <a:p>
-            <a:pPr algn="ctr"/>
-          </a:p>
-        </p:txBody>
-      </p:sp>
-      <p:sp>
-        <p:nvSpPr>
-          <p:cNvPr id="4" name="TextBox 3"/>
+          <p:cNvPr id="3" name="TextBox 2"/>
           <p:cNvSpPr txBox="1"/>
           <p:nvPr/>
         </p:nvSpPr>
@@ -3209,9 +3166,9 @@
             <a:r>
               <a:rPr sz="1200" b="1" i="0">
                 <a:solidFill>
-                  <a:srgbClr val="D97306"/>
-                </a:solidFill>
-                <a:latin typeface="Calibri"/>
+                  <a:srgbClr val="0064FF"/>
+                </a:solidFill>
+                <a:latin typeface="Poppins"/>
               </a:rPr>
               <a:t>PREDICTIVE REVENUE INTELLIGENCE — CREDIT CARDS MVP</a:t>
             </a:r>
@@ -3220,7 +3177,7 @@
       </p:sp>
       <p:sp>
         <p:nvSpPr>
-          <p:cNvPr id="5" name="TextBox 4"/>
+          <p:cNvPr id="4" name="TextBox 3"/>
           <p:cNvSpPr txBox="1"/>
           <p:nvPr/>
         </p:nvSpPr>
@@ -3243,9 +3200,9 @@
             <a:r>
               <a:rPr sz="4400" b="1" i="0">
                 <a:solidFill>
-                  <a:srgbClr val="FFFFFF"/>
-                </a:solidFill>
-                <a:latin typeface="Calibri"/>
+                  <a:srgbClr val="002659"/>
+                </a:solidFill>
+                <a:latin typeface="Poppins"/>
               </a:rPr>
               <a:t>Predictive RPC Estimator</a:t>
             </a:r>
@@ -3254,9 +3211,9 @@
             <a:r>
               <a:rPr sz="2000" b="0" i="0">
                 <a:solidFill>
-                  <a:srgbClr val="F4F6FA"/>
-                </a:solidFill>
-                <a:latin typeface="Calibri"/>
+                  <a:srgbClr val="212121"/>
+                </a:solidFill>
+                <a:latin typeface="Poppins"/>
               </a:rPr>
               <a:t>Real-time revenue-per-click forecasting for Credit Cards</a:t>
             </a:r>
@@ -3265,7 +3222,7 @@
       </p:sp>
       <p:sp>
         <p:nvSpPr>
-          <p:cNvPr id="6" name="TextBox 5"/>
+          <p:cNvPr id="5" name="TextBox 4"/>
           <p:cNvSpPr txBox="1"/>
           <p:nvPr/>
         </p:nvSpPr>
@@ -3294,18 +3251,18 @@
             <a:r>
               <a:rPr sz="1200" b="1" i="0">
                 <a:solidFill>
-                  <a:srgbClr val="D97306"/>
-                </a:solidFill>
-                <a:latin typeface="Calibri"/>
+                  <a:srgbClr val="0064FF"/>
+                </a:solidFill>
+                <a:latin typeface="Poppins"/>
               </a:rPr>
               <a:t>Solution demo    </a:t>
             </a:r>
             <a:r>
               <a:rPr sz="1400" b="0" i="0">
                 <a:solidFill>
-                  <a:srgbClr val="FFFFFF"/>
-                </a:solidFill>
-                <a:latin typeface="Calibri"/>
+                  <a:srgbClr val="212121"/>
+                </a:solidFill>
+                <a:latin typeface="Poppins"/>
               </a:rPr>
               <a:t>Live staging environment</a:t>
             </a:r>
@@ -3319,18 +3276,18 @@
             <a:r>
               <a:rPr sz="1200" b="1" i="0">
                 <a:solidFill>
-                  <a:srgbClr val="D97306"/>
-                </a:solidFill>
-                <a:latin typeface="Calibri"/>
+                  <a:srgbClr val="0064FF"/>
+                </a:solidFill>
+                <a:latin typeface="Poppins"/>
               </a:rPr>
               <a:t>Audience    </a:t>
             </a:r>
             <a:r>
               <a:rPr sz="1400" b="0" i="0">
                 <a:solidFill>
-                  <a:srgbClr val="FFFFFF"/>
-                </a:solidFill>
-                <a:latin typeface="Calibri"/>
+                  <a:srgbClr val="212121"/>
+                </a:solidFill>
+                <a:latin typeface="Poppins"/>
               </a:rPr>
               <a:t>Credit Cards leadership + technical stakeholders</a:t>
             </a:r>
@@ -3344,18 +3301,18 @@
             <a:r>
               <a:rPr sz="1200" b="1" i="0">
                 <a:solidFill>
-                  <a:srgbClr val="D97306"/>
-                </a:solidFill>
-                <a:latin typeface="Calibri"/>
+                  <a:srgbClr val="0064FF"/>
+                </a:solidFill>
+                <a:latin typeface="Poppins"/>
               </a:rPr>
               <a:t>Date    </a:t>
             </a:r>
             <a:r>
               <a:rPr sz="1400" b="0" i="0">
                 <a:solidFill>
-                  <a:srgbClr val="FFFFFF"/>
-                </a:solidFill>
-                <a:latin typeface="Calibri"/>
+                  <a:srgbClr val="212121"/>
+                </a:solidFill>
+                <a:latin typeface="Poppins"/>
               </a:rPr>
               <a:t>2026-05-19</a:t>
             </a:r>
@@ -3369,9 +3326,9 @@
             <a:r>
               <a:rPr sz="800" b="0" i="0">
                 <a:solidFill>
-                  <a:srgbClr val="333F52"/>
-                </a:solidFill>
-                <a:latin typeface="Calibri"/>
+                  <a:srgbClr val="212121"/>
+                </a:solidFill>
+                <a:latin typeface="Poppins"/>
               </a:rPr>
               <a:t> </a:t>
             </a:r>
@@ -3380,18 +3337,18 @@
             <a:r>
               <a:rPr sz="1100" b="1" i="0">
                 <a:solidFill>
-                  <a:srgbClr val="D97306"/>
-                </a:solidFill>
-                <a:latin typeface="Calibri"/>
+                  <a:srgbClr val="0064FF"/>
+                </a:solidFill>
+                <a:latin typeface="Poppins"/>
               </a:rPr>
               <a:t>Live dashboard:  </a:t>
             </a:r>
             <a:r>
               <a:rPr sz="1100" b="0" i="0">
                 <a:solidFill>
-                  <a:srgbClr val="F4F6FA"/>
-                </a:solidFill>
-                <a:latin typeface="Calibri"/>
+                  <a:srgbClr val="7D7D7D"/>
+                </a:solidFill>
+                <a:latin typeface="Poppins"/>
               </a:rPr>
               <a:t>https://dashboard-staging-794974391956.europe-west2.run.app</a:t>
             </a:r>
@@ -3431,7 +3388,7 @@
             <a:avLst/>
           </a:prstGeom>
           <a:solidFill>
-            <a:srgbClr val="0B1F3A"/>
+            <a:srgbClr val="002659"/>
           </a:solidFill>
           <a:ln>
             <a:noFill/>
@@ -3459,9 +3416,9 @@
             <a:r>
               <a:rPr sz="1000" b="1" i="0">
                 <a:solidFill>
-                  <a:srgbClr val="D97306"/>
-                </a:solidFill>
-                <a:latin typeface="Calibri"/>
+                  <a:srgbClr val="0064FF"/>
+                </a:solidFill>
+                <a:latin typeface="Poppins"/>
               </a:rPr>
               <a:t>THREE ASKS, IN PRIORITY ORDER</a:t>
             </a:r>
@@ -3472,7 +3429,7 @@
                 <a:solidFill>
                   <a:srgbClr val="FFFFFF"/>
                 </a:solidFill>
-                <a:latin typeface="Calibri"/>
+                <a:latin typeface="Poppins"/>
               </a:rPr>
               <a:t>What we need from you</a:t>
             </a:r>
@@ -3494,7 +3451,7 @@
             <a:avLst/>
           </a:prstGeom>
           <a:solidFill>
-            <a:srgbClr val="D97306"/>
+            <a:srgbClr val="0064FF"/>
           </a:solidFill>
           <a:ln>
             <a:noFill/>
@@ -3539,7 +3496,7 @@
             </a:avLst>
           </a:prstGeom>
           <a:solidFill>
-            <a:srgbClr val="0F6E7A"/>
+            <a:srgbClr val="0064FF"/>
           </a:solidFill>
           <a:ln>
             <a:noFill/>
@@ -3569,7 +3526,7 @@
                 <a:solidFill>
                   <a:srgbClr val="FFFFFF"/>
                 </a:solidFill>
-                <a:latin typeface="Calibri"/>
+                <a:latin typeface="Poppins"/>
               </a:rPr>
               <a:t>1</a:t>
             </a:r>
@@ -3606,18 +3563,18 @@
             <a:r>
               <a:rPr sz="1000" b="1" i="0">
                 <a:solidFill>
-                  <a:srgbClr val="0F6E7A"/>
-                </a:solidFill>
-                <a:latin typeface="Calibri"/>
+                  <a:srgbClr val="0064FF"/>
+                </a:solidFill>
+                <a:latin typeface="Poppins"/>
               </a:rPr>
               <a:t>CRITICAL PATH    </a:t>
             </a:r>
             <a:r>
               <a:rPr sz="1800" b="1" i="0">
                 <a:solidFill>
-                  <a:srgbClr val="0B1F3A"/>
-                </a:solidFill>
-                <a:latin typeface="Calibri"/>
+                  <a:srgbClr val="002659"/>
+                </a:solidFill>
+                <a:latin typeface="Poppins"/>
               </a:rPr>
               <a:t>GA4 access to your Credit Cards property</a:t>
             </a:r>
@@ -3634,9 +3591,9 @@
             <a:r>
               <a:rPr sz="1100" b="0" i="0">
                 <a:solidFill>
-                  <a:srgbClr val="333F52"/>
-                </a:solidFill>
-                <a:latin typeface="Calibri"/>
+                  <a:srgbClr val="212121"/>
+                </a:solidFill>
+                <a:latin typeface="Poppins"/>
               </a:rPr>
               <a:t>OQ-11 — read on the analytics_&lt;property&gt; BigQuery export. Every week this slides is a week off cutover.</a:t>
             </a:r>
@@ -3660,7 +3617,7 @@
             </a:avLst>
           </a:prstGeom>
           <a:solidFill>
-            <a:srgbClr val="D97306"/>
+            <a:srgbClr val="0064FF"/>
           </a:solidFill>
           <a:ln>
             <a:noFill/>
@@ -3690,7 +3647,7 @@
                 <a:solidFill>
                   <a:srgbClr val="FFFFFF"/>
                 </a:solidFill>
-                <a:latin typeface="Calibri"/>
+                <a:latin typeface="Poppins"/>
               </a:rPr>
               <a:t>2</a:t>
             </a:r>
@@ -3727,18 +3684,18 @@
             <a:r>
               <a:rPr sz="1000" b="1" i="0">
                 <a:solidFill>
-                  <a:srgbClr val="D97306"/>
-                </a:solidFill>
-                <a:latin typeface="Calibri"/>
+                  <a:srgbClr val="0064FF"/>
+                </a:solidFill>
+                <a:latin typeface="Poppins"/>
               </a:rPr>
               <a:t>WORKING SESSION    </a:t>
             </a:r>
             <a:r>
               <a:rPr sz="1800" b="1" i="0">
                 <a:solidFill>
-                  <a:srgbClr val="0B1F3A"/>
-                </a:solidFill>
-                <a:latin typeface="Calibri"/>
+                  <a:srgbClr val="002659"/>
+                </a:solidFill>
+                <a:latin typeface="Poppins"/>
               </a:rPr>
               <a:t>Confirm the GA4 event taxonomy + click→cookie join key</a:t>
             </a:r>
@@ -3755,9 +3712,9 @@
             <a:r>
               <a:rPr sz="1100" b="0" i="0">
                 <a:solidFill>
-                  <a:srgbClr val="333F52"/>
-                </a:solidFill>
-                <a:latin typeface="Calibri"/>
+                  <a:srgbClr val="212121"/>
+                </a:solidFill>
+                <a:latin typeface="Poppins"/>
               </a:rPr>
               <a:t>OQ-12 + OQ-13 — one 60-minute call validates our best-current-guess mappings against your real events.</a:t>
             </a:r>
@@ -3781,7 +3738,7 @@
             </a:avLst>
           </a:prstGeom>
           <a:solidFill>
-            <a:srgbClr val="1F8A4F"/>
+            <a:srgbClr val="4285F4"/>
           </a:solidFill>
           <a:ln>
             <a:noFill/>
@@ -3811,7 +3768,7 @@
                 <a:solidFill>
                   <a:srgbClr val="FFFFFF"/>
                 </a:solidFill>
-                <a:latin typeface="Calibri"/>
+                <a:latin typeface="Poppins"/>
               </a:rPr>
               <a:t>3</a:t>
             </a:r>
@@ -3848,20 +3805,20 @@
             <a:r>
               <a:rPr sz="1000" b="1" i="0">
                 <a:solidFill>
-                  <a:srgbClr val="1F8A4F"/>
-                </a:solidFill>
-                <a:latin typeface="Calibri"/>
+                  <a:srgbClr val="4285F4"/>
+                </a:solidFill>
+                <a:latin typeface="Poppins"/>
               </a:rPr>
               <a:t>SIGN-OFFS    </a:t>
             </a:r>
             <a:r>
               <a:rPr sz="1800" b="1" i="0">
                 <a:solidFill>
-                  <a:srgbClr val="0B1F3A"/>
-                </a:solidFill>
-                <a:latin typeface="Calibri"/>
-              </a:rPr>
-              <a:t>GCP project decision + compliance sign-off on ADRs 0004 and 0005</a:t>
+                  <a:srgbClr val="002659"/>
+                </a:solidFill>
+                <a:latin typeface="Poppins"/>
+              </a:rPr>
+              <a:t>GCP project decision + compliance sign-off on the bid-optimisation + GA4 PII boundaries</a:t>
             </a:r>
           </a:p>
           <a:p>
@@ -3876,9 +3833,9 @@
             <a:r>
               <a:rPr sz="1100" b="0" i="0">
                 <a:solidFill>
-                  <a:srgbClr val="333F52"/>
-                </a:solidFill>
-                <a:latin typeface="Calibri"/>
+                  <a:srgbClr val="212121"/>
+                </a:solidFill>
+                <a:latin typeface="Poppins"/>
               </a:rPr>
               <a:t>OQ-1 — client project or namespaced env. The CD job is wired and gated. Two named contacts: one data owner + one engineering lead.</a:t>
             </a:r>
@@ -3900,7 +3857,7 @@
             <a:avLst/>
           </a:prstGeom>
           <a:solidFill>
-            <a:srgbClr val="0B1F3A"/>
+            <a:srgbClr val="002659"/>
           </a:solidFill>
           <a:ln>
             <a:noFill/>
@@ -3928,18 +3885,18 @@
             <a:r>
               <a:rPr sz="1000" b="1" i="0">
                 <a:solidFill>
-                  <a:srgbClr val="D97306"/>
-                </a:solidFill>
-                <a:latin typeface="Calibri"/>
+                  <a:srgbClr val="0064FF"/>
+                </a:solidFill>
+                <a:latin typeface="Poppins"/>
               </a:rPr>
               <a:t>WHAT YOU GET    </a:t>
             </a:r>
             <a:r>
               <a:rPr sz="1100" b="0" i="0">
                 <a:solidFill>
-                  <a:srgbClr val="F4F6FA"/>
-                </a:solidFill>
-                <a:latin typeface="Calibri"/>
+                  <a:srgbClr val="E7F0FE"/>
+                </a:solidFill>
+                <a:latin typeface="Poppins"/>
               </a:rPr>
               <a:t>A production service on your data, your on-call team in the cockpit, signed handover by end-August 2026.</a:t>
             </a:r>
@@ -3961,7 +3918,7 @@
             <a:avLst/>
           </a:prstGeom>
           <a:solidFill>
-            <a:srgbClr val="F4F6FA"/>
+            <a:srgbClr val="E7F0FE"/>
           </a:solidFill>
           <a:ln>
             <a:noFill/>
@@ -3989,9 +3946,9 @@
             <a:r>
               <a:rPr sz="900" b="0" i="0">
                 <a:solidFill>
-                  <a:srgbClr val="6B7380"/>
-                </a:solidFill>
-                <a:latin typeface="Calibri"/>
+                  <a:srgbClr val="7D7D7D"/>
+                </a:solidFill>
+                <a:latin typeface="Poppins"/>
               </a:rPr>
               <a:t>Predictive RPC Estimator — Client Demo</a:t>
             </a:r>
@@ -4024,9 +3981,9 @@
             <a:r>
               <a:rPr sz="900" b="0" i="0">
                 <a:solidFill>
-                  <a:srgbClr val="6B7380"/>
-                </a:solidFill>
-                <a:latin typeface="Calibri"/>
+                  <a:srgbClr val="7D7D7D"/>
+                </a:solidFill>
+                <a:latin typeface="Poppins"/>
               </a:rPr>
               <a:t>10 / 11</a:t>
             </a:r>
@@ -4059,14 +4016,14 @@
         </p:nvSpPr>
         <p:spPr>
           <a:xfrm>
-            <a:off x="0" y="0"/>
-            <a:ext cx="12191695" cy="6858000"/>
+            <a:off x="0" y="3291840"/>
+            <a:ext cx="12191695" cy="54864"/>
           </a:xfrm>
           <a:prstGeom prst="rect">
             <a:avLst/>
           </a:prstGeom>
           <a:solidFill>
-            <a:srgbClr val="0B1F3A"/>
+            <a:srgbClr val="0064FF"/>
           </a:solidFill>
           <a:ln>
             <a:noFill/>
@@ -4096,50 +4053,7 @@
       </p:sp>
       <p:sp>
         <p:nvSpPr>
-          <p:cNvPr id="3" name="Rectangle 2"/>
-          <p:cNvSpPr/>
-          <p:nvPr/>
-        </p:nvSpPr>
-        <p:spPr>
-          <a:xfrm>
-            <a:off x="0" y="3291840"/>
-            <a:ext cx="12191695" cy="91440"/>
-          </a:xfrm>
-          <a:prstGeom prst="rect">
-            <a:avLst/>
-          </a:prstGeom>
-          <a:solidFill>
-            <a:srgbClr val="D97306"/>
-          </a:solidFill>
-          <a:ln>
-            <a:noFill/>
-          </a:ln>
-        </p:spPr>
-        <p:style>
-          <a:lnRef idx="1">
-            <a:schemeClr val="accent1"/>
-          </a:lnRef>
-          <a:fillRef idx="3">
-            <a:schemeClr val="accent1"/>
-          </a:fillRef>
-          <a:effectRef idx="2">
-            <a:schemeClr val="accent1"/>
-          </a:effectRef>
-          <a:fontRef idx="minor">
-            <a:schemeClr val="lt1"/>
-          </a:fontRef>
-        </p:style>
-        <p:txBody>
-          <a:bodyPr rtlCol="0" anchor="ctr"/>
-          <a:lstStyle/>
-          <a:p>
-            <a:pPr algn="ctr"/>
-          </a:p>
-        </p:txBody>
-      </p:sp>
-      <p:sp>
-        <p:nvSpPr>
-          <p:cNvPr id="4" name="TextBox 3"/>
+          <p:cNvPr id="3" name="TextBox 2"/>
           <p:cNvSpPr txBox="1"/>
           <p:nvPr/>
         </p:nvSpPr>
@@ -4162,9 +4076,9 @@
             <a:r>
               <a:rPr sz="1300" b="1" i="0">
                 <a:solidFill>
-                  <a:srgbClr val="D97306"/>
-                </a:solidFill>
-                <a:latin typeface="Calibri"/>
+                  <a:srgbClr val="0064FF"/>
+                </a:solidFill>
+                <a:latin typeface="Poppins"/>
               </a:rPr>
               <a:t>OVER TO YOU</a:t>
             </a:r>
@@ -4173,7 +4087,7 @@
       </p:sp>
       <p:sp>
         <p:nvSpPr>
-          <p:cNvPr id="5" name="TextBox 4"/>
+          <p:cNvPr id="4" name="TextBox 3"/>
           <p:cNvSpPr txBox="1"/>
           <p:nvPr/>
         </p:nvSpPr>
@@ -4196,9 +4110,9 @@
             <a:r>
               <a:rPr sz="6000" b="1" i="0">
                 <a:solidFill>
-                  <a:srgbClr val="FFFFFF"/>
-                </a:solidFill>
-                <a:latin typeface="Calibri"/>
+                  <a:srgbClr val="002659"/>
+                </a:solidFill>
+                <a:latin typeface="Poppins"/>
               </a:rPr>
               <a:t>Let's get the data flowing.</a:t>
             </a:r>
@@ -4207,7 +4121,7 @@
       </p:sp>
       <p:sp>
         <p:nvSpPr>
-          <p:cNvPr id="6" name="TextBox 5"/>
+          <p:cNvPr id="5" name="TextBox 4"/>
           <p:cNvSpPr txBox="1"/>
           <p:nvPr/>
         </p:nvSpPr>
@@ -4235,18 +4149,18 @@
             <a:r>
               <a:rPr sz="2000" b="0" i="0">
                 <a:solidFill>
-                  <a:srgbClr val="F4F6FA"/>
-                </a:solidFill>
-                <a:latin typeface="Calibri"/>
+                  <a:srgbClr val="212121"/>
+                </a:solidFill>
+                <a:latin typeface="Poppins"/>
               </a:rPr>
               <a:t>GA4 access this week. Event taxonomy next. </a:t>
             </a:r>
             <a:r>
               <a:rPr sz="2000" b="1" i="0">
                 <a:solidFill>
-                  <a:srgbClr val="D97306"/>
-                </a:solidFill>
-                <a:latin typeface="Calibri"/>
+                  <a:srgbClr val="0064FF"/>
+                </a:solidFill>
+                <a:latin typeface="Poppins"/>
               </a:rPr>
               <a:t>Cutover end-August.</a:t>
             </a:r>
@@ -4255,7 +4169,7 @@
       </p:sp>
       <p:sp>
         <p:nvSpPr>
-          <p:cNvPr id="7" name="TextBox 6"/>
+          <p:cNvPr id="6" name="TextBox 5"/>
           <p:cNvSpPr txBox="1"/>
           <p:nvPr/>
         </p:nvSpPr>
@@ -4278,9 +4192,9 @@
             <a:r>
               <a:rPr sz="1100" b="0" i="0">
                 <a:solidFill>
-                  <a:srgbClr val="F4F6FA"/>
-                </a:solidFill>
-                <a:latin typeface="Calibri"/>
+                  <a:srgbClr val="7D7D7D"/>
+                </a:solidFill>
+                <a:latin typeface="Poppins"/>
               </a:rPr>
               <a:t>Live dashboard  ·  https://dashboard-staging-794974391956.europe-west2.run.app</a:t>
             </a:r>
@@ -4307,20 +4221,234 @@
       <p:grpSpPr/>
       <p:sp>
         <p:nvSpPr>
-          <p:cNvPr id="2" name="Rectangle 1"/>
+          <p:cNvPr id="2" name="TextBox 1"/>
+          <p:cNvSpPr txBox="1"/>
+          <p:nvPr/>
+        </p:nvSpPr>
+        <p:spPr>
+          <a:xfrm>
+            <a:off x="640080" y="1280160"/>
+            <a:ext cx="10911535" cy="365760"/>
+          </a:xfrm>
+          <a:prstGeom prst="rect">
+            <a:avLst/>
+          </a:prstGeom>
+          <a:noFill/>
+        </p:spPr>
+        <p:txBody>
+          <a:bodyPr wrap="none">
+            <a:spAutoFit/>
+          </a:bodyPr>
+          <a:lstStyle/>
+          <a:p>
+            <a:r>
+              <a:rPr sz="1300" b="1" i="0">
+                <a:solidFill>
+                  <a:srgbClr val="0064FF"/>
+                </a:solidFill>
+                <a:latin typeface="Poppins"/>
+              </a:rPr>
+              <a:t>THE OPPORTUNITY</a:t>
+            </a:r>
+          </a:p>
+        </p:txBody>
+      </p:sp>
+      <p:sp>
+        <p:nvSpPr>
+          <p:cNvPr id="3" name="TextBox 2"/>
+          <p:cNvSpPr txBox="1"/>
+          <p:nvPr/>
+        </p:nvSpPr>
+        <p:spPr>
+          <a:xfrm>
+            <a:off x="640080" y="1920240"/>
+            <a:ext cx="10911535" cy="2011680"/>
+          </a:xfrm>
+          <a:prstGeom prst="rect">
+            <a:avLst/>
+          </a:prstGeom>
+          <a:noFill/>
+        </p:spPr>
+        <p:txBody>
+          <a:bodyPr wrap="square">
+            <a:spAutoFit/>
+          </a:bodyPr>
+          <a:lstStyle/>
+          <a:p>
+            <a:pPr>
+              <a:lnSpc>
+                <a:spcPct val="105000"/>
+              </a:lnSpc>
+            </a:pPr>
+            <a:r>
+              <a:rPr sz="5400" b="1" i="0">
+                <a:solidFill>
+                  <a:srgbClr val="002659"/>
+                </a:solidFill>
+                <a:latin typeface="Poppins"/>
+              </a:rPr>
+              <a:t>Today every Credit Cards click is priced the same.</a:t>
+            </a:r>
+          </a:p>
+        </p:txBody>
+      </p:sp>
+      <p:sp>
+        <p:nvSpPr>
+          <p:cNvPr id="4" name="TextBox 3"/>
+          <p:cNvSpPr txBox="1"/>
+          <p:nvPr/>
+        </p:nvSpPr>
+        <p:spPr>
+          <a:xfrm>
+            <a:off x="640080" y="4297680"/>
+            <a:ext cx="10911535" cy="1645920"/>
+          </a:xfrm>
+          <a:prstGeom prst="rect">
+            <a:avLst/>
+          </a:prstGeom>
+          <a:noFill/>
+        </p:spPr>
+        <p:txBody>
+          <a:bodyPr wrap="square">
+            <a:spAutoFit/>
+          </a:bodyPr>
+          <a:lstStyle/>
+          <a:p>
+            <a:pPr>
+              <a:lnSpc>
+                <a:spcPct val="135000"/>
+              </a:lnSpc>
+            </a:pPr>
+            <a:r>
+              <a:rPr sz="2200" b="0" i="0">
+                <a:solidFill>
+                  <a:srgbClr val="212121"/>
+                </a:solidFill>
+                <a:latin typeface="Poppins"/>
+              </a:rPr>
+              <a:t>You overpay for the minnow. You underbid the whale and a rival takes them. You see the bill 90 days later — when the ledger reconciles, and the budget is gone.</a:t>
+            </a:r>
+          </a:p>
+        </p:txBody>
+      </p:sp>
+      <p:sp>
+        <p:nvSpPr>
+          <p:cNvPr id="5" name="TextBox 4"/>
+          <p:cNvSpPr txBox="1"/>
+          <p:nvPr/>
+        </p:nvSpPr>
+        <p:spPr>
+          <a:xfrm>
+            <a:off x="640080" y="5577840"/>
+            <a:ext cx="10911535" cy="640080"/>
+          </a:xfrm>
+          <a:prstGeom prst="rect">
+            <a:avLst/>
+          </a:prstGeom>
+          <a:noFill/>
+        </p:spPr>
+        <p:txBody>
+          <a:bodyPr wrap="square">
+            <a:spAutoFit/>
+          </a:bodyPr>
+          <a:lstStyle/>
+          <a:p>
+            <a:pPr>
+              <a:lnSpc>
+                <a:spcPct val="130000"/>
+              </a:lnSpc>
+            </a:pPr>
+            <a:r>
+              <a:rPr sz="1000" b="1" i="0">
+                <a:solidFill>
+                  <a:srgbClr val="0064FF"/>
+                </a:solidFill>
+                <a:latin typeface="Poppins"/>
+              </a:rPr>
+              <a:t>WHY CC  </a:t>
+            </a:r>
+            <a:r>
+              <a:rPr sz="1100" b="0" i="0">
+                <a:solidFill>
+                  <a:srgbClr val="212121"/>
+                </a:solidFill>
+                <a:latin typeface="Poppins"/>
+              </a:rPr>
+              <a:t>Near-term commercial pressure on the channel.</a:t>
+            </a:r>
+            <a:r>
+              <a:rPr sz="1100" b="0" i="0">
+                <a:solidFill>
+                  <a:srgbClr val="7D7D7D"/>
+                </a:solidFill>
+                <a:latin typeface="Poppins"/>
+              </a:rPr>
+              <a:t>      </a:t>
+            </a:r>
+            <a:r>
+              <a:rPr sz="1000" b="1" i="0">
+                <a:solidFill>
+                  <a:srgbClr val="0064FF"/>
+                </a:solidFill>
+                <a:latin typeface="Poppins"/>
+              </a:rPr>
+              <a:t>WHY NOW  </a:t>
+            </a:r>
+            <a:r>
+              <a:rPr sz="1100" b="0" i="0">
+                <a:solidFill>
+                  <a:srgbClr val="212121"/>
+                </a:solidFill>
+                <a:latin typeface="Poppins"/>
+              </a:rPr>
+              <a:t>Sales coverage rising 50% → 80% by end-June.</a:t>
+            </a:r>
+            <a:r>
+              <a:rPr sz="1100" b="0" i="0">
+                <a:solidFill>
+                  <a:srgbClr val="7D7D7D"/>
+                </a:solidFill>
+                <a:latin typeface="Poppins"/>
+              </a:rPr>
+              <a:t>      </a:t>
+            </a:r>
+            <a:r>
+              <a:rPr sz="1000" b="1" i="0">
+                <a:solidFill>
+                  <a:srgbClr val="0064FF"/>
+                </a:solidFill>
+                <a:latin typeface="Poppins"/>
+              </a:rPr>
+              <a:t>WHY SAFE  </a:t>
+            </a:r>
+            <a:r>
+              <a:rPr sz="1100" b="0" i="0">
+                <a:solidFill>
+                  <a:srgbClr val="212121"/>
+                </a:solidFill>
+                <a:latin typeface="Poppins"/>
+              </a:rPr>
+              <a:t>Bid-optimisation only — model output never touches customer terms.</a:t>
+            </a:r>
+          </a:p>
+        </p:txBody>
+      </p:sp>
+      <p:sp>
+        <p:nvSpPr>
+          <p:cNvPr id="6" name="Rectangle 5"/>
           <p:cNvSpPr/>
           <p:nvPr/>
         </p:nvSpPr>
         <p:spPr>
           <a:xfrm>
-            <a:off x="0" y="0"/>
-            <a:ext cx="12191695" cy="6858000"/>
+            <a:off x="0" y="6537960"/>
+            <a:ext cx="12191695" cy="320040"/>
           </a:xfrm>
           <a:prstGeom prst="rect">
             <a:avLst/>
           </a:prstGeom>
           <a:solidFill>
-            <a:srgbClr val="0B1F3A"/>
+            <a:srgbClr val="E7F0FE"/>
           </a:solidFill>
           <a:ln>
             <a:noFill/>
@@ -4341,66 +4469,32 @@
           </a:fontRef>
         </p:style>
         <p:txBody>
-          <a:bodyPr rtlCol="0" anchor="ctr"/>
+          <a:bodyPr rtlCol="0" anchor="ctr" lIns="548640" tIns="54864"/>
           <a:lstStyle/>
           <a:p>
             <a:pPr algn="ctr"/>
-          </a:p>
-        </p:txBody>
-      </p:sp>
-      <p:sp>
-        <p:nvSpPr>
-          <p:cNvPr id="3" name="Rectangle 2"/>
-          <p:cNvSpPr/>
-          <p:nvPr/>
-        </p:nvSpPr>
-        <p:spPr>
-          <a:xfrm>
-            <a:off x="0" y="3840480"/>
-            <a:ext cx="12191695" cy="54864"/>
-          </a:xfrm>
-          <a:prstGeom prst="rect">
-            <a:avLst/>
-          </a:prstGeom>
-          <a:solidFill>
-            <a:srgbClr val="D97306"/>
-          </a:solidFill>
-          <a:ln>
-            <a:noFill/>
-          </a:ln>
-        </p:spPr>
-        <p:style>
-          <a:lnRef idx="1">
-            <a:schemeClr val="accent1"/>
-          </a:lnRef>
-          <a:fillRef idx="3">
-            <a:schemeClr val="accent1"/>
-          </a:fillRef>
-          <a:effectRef idx="2">
-            <a:schemeClr val="accent1"/>
-          </a:effectRef>
-          <a:fontRef idx="minor">
-            <a:schemeClr val="lt1"/>
-          </a:fontRef>
-        </p:style>
-        <p:txBody>
-          <a:bodyPr rtlCol="0" anchor="ctr"/>
-          <a:lstStyle/>
-          <a:p>
-            <a:pPr algn="ctr"/>
-          </a:p>
-        </p:txBody>
-      </p:sp>
-      <p:sp>
-        <p:nvSpPr>
-          <p:cNvPr id="4" name="TextBox 3"/>
+            <a:r>
+              <a:rPr sz="900" b="0" i="0">
+                <a:solidFill>
+                  <a:srgbClr val="7D7D7D"/>
+                </a:solidFill>
+                <a:latin typeface="Poppins"/>
+              </a:rPr>
+              <a:t>Predictive RPC Estimator — Client Demo</a:t>
+            </a:r>
+          </a:p>
+        </p:txBody>
+      </p:sp>
+      <p:sp>
+        <p:nvSpPr>
+          <p:cNvPr id="7" name="TextBox 6"/>
           <p:cNvSpPr txBox="1"/>
           <p:nvPr/>
         </p:nvSpPr>
         <p:spPr>
           <a:xfrm>
-            <a:off x="640080" y="1280160"/>
-            <a:ext cx="10911535" cy="365760"/>
+            <a:off x="11094415" y="6547104"/>
+            <a:ext cx="914400" cy="274320"/>
           </a:xfrm>
           <a:prstGeom prst="rect">
             <a:avLst/>
@@ -4413,279 +4507,13 @@
           </a:bodyPr>
           <a:lstStyle/>
           <a:p>
-            <a:r>
-              <a:rPr sz="1300" b="1" i="0">
-                <a:solidFill>
-                  <a:srgbClr val="D97306"/>
-                </a:solidFill>
-                <a:latin typeface="Calibri"/>
-              </a:rPr>
-              <a:t>THE OPPORTUNITY</a:t>
-            </a:r>
-          </a:p>
-        </p:txBody>
-      </p:sp>
-      <p:sp>
-        <p:nvSpPr>
-          <p:cNvPr id="5" name="TextBox 4"/>
-          <p:cNvSpPr txBox="1"/>
-          <p:nvPr/>
-        </p:nvSpPr>
-        <p:spPr>
-          <a:xfrm>
-            <a:off x="640080" y="1920240"/>
-            <a:ext cx="10911535" cy="2011680"/>
-          </a:xfrm>
-          <a:prstGeom prst="rect">
-            <a:avLst/>
-          </a:prstGeom>
-          <a:noFill/>
-        </p:spPr>
-        <p:txBody>
-          <a:bodyPr wrap="square">
-            <a:spAutoFit/>
-          </a:bodyPr>
-          <a:lstStyle/>
-          <a:p>
-            <a:pPr>
-              <a:lnSpc>
-                <a:spcPct val="105000"/>
-              </a:lnSpc>
-            </a:pPr>
-            <a:r>
-              <a:rPr sz="5400" b="1" i="0">
-                <a:solidFill>
-                  <a:srgbClr val="FFFFFF"/>
-                </a:solidFill>
-                <a:latin typeface="Calibri"/>
-              </a:rPr>
-              <a:t>Today every Credit Cards click is priced the same.</a:t>
-            </a:r>
-          </a:p>
-        </p:txBody>
-      </p:sp>
-      <p:sp>
-        <p:nvSpPr>
-          <p:cNvPr id="6" name="TextBox 5"/>
-          <p:cNvSpPr txBox="1"/>
-          <p:nvPr/>
-        </p:nvSpPr>
-        <p:spPr>
-          <a:xfrm>
-            <a:off x="640080" y="4297680"/>
-            <a:ext cx="10911535" cy="1645920"/>
-          </a:xfrm>
-          <a:prstGeom prst="rect">
-            <a:avLst/>
-          </a:prstGeom>
-          <a:noFill/>
-        </p:spPr>
-        <p:txBody>
-          <a:bodyPr wrap="square">
-            <a:spAutoFit/>
-          </a:bodyPr>
-          <a:lstStyle/>
-          <a:p>
-            <a:pPr>
-              <a:lnSpc>
-                <a:spcPct val="135000"/>
-              </a:lnSpc>
-            </a:pPr>
-            <a:r>
-              <a:rPr sz="2200" b="0" i="0">
-                <a:solidFill>
-                  <a:srgbClr val="F4F6FA"/>
-                </a:solidFill>
-                <a:latin typeface="Calibri"/>
-              </a:rPr>
-              <a:t>You overpay for the minnow. You underbid the whale and a rival takes them. You see the bill 90 days later — when the ledger reconciles, and the budget is gone.</a:t>
-            </a:r>
-          </a:p>
-        </p:txBody>
-      </p:sp>
-      <p:sp>
-        <p:nvSpPr>
-          <p:cNvPr id="7" name="TextBox 6"/>
-          <p:cNvSpPr txBox="1"/>
-          <p:nvPr/>
-        </p:nvSpPr>
-        <p:spPr>
-          <a:xfrm>
-            <a:off x="640080" y="5577840"/>
-            <a:ext cx="10911535" cy="640080"/>
-          </a:xfrm>
-          <a:prstGeom prst="rect">
-            <a:avLst/>
-          </a:prstGeom>
-          <a:noFill/>
-        </p:spPr>
-        <p:txBody>
-          <a:bodyPr wrap="square">
-            <a:spAutoFit/>
-          </a:bodyPr>
-          <a:lstStyle/>
-          <a:p>
-            <a:pPr>
-              <a:lnSpc>
-                <a:spcPct val="130000"/>
-              </a:lnSpc>
-            </a:pPr>
-            <a:r>
-              <a:rPr sz="1000" b="1" i="0">
-                <a:solidFill>
-                  <a:srgbClr val="D97306"/>
-                </a:solidFill>
-                <a:latin typeface="Calibri"/>
-              </a:rPr>
-              <a:t>WHY CC  </a:t>
-            </a:r>
-            <a:r>
-              <a:rPr sz="1100" b="0" i="0">
-                <a:solidFill>
-                  <a:srgbClr val="F4F6FA"/>
-                </a:solidFill>
-                <a:latin typeface="Calibri"/>
-              </a:rPr>
-              <a:t>Near-term commercial pressure on the channel.</a:t>
-            </a:r>
-            <a:r>
-              <a:rPr sz="1100" b="0" i="0">
-                <a:solidFill>
-                  <a:srgbClr val="FFFFFF"/>
-                </a:solidFill>
-                <a:latin typeface="Calibri"/>
-              </a:rPr>
-              <a:t>      </a:t>
-            </a:r>
-            <a:r>
-              <a:rPr sz="1000" b="1" i="0">
-                <a:solidFill>
-                  <a:srgbClr val="D97306"/>
-                </a:solidFill>
-                <a:latin typeface="Calibri"/>
-              </a:rPr>
-              <a:t>WHY NOW  </a:t>
-            </a:r>
-            <a:r>
-              <a:rPr sz="1100" b="0" i="0">
-                <a:solidFill>
-                  <a:srgbClr val="F4F6FA"/>
-                </a:solidFill>
-                <a:latin typeface="Calibri"/>
-              </a:rPr>
-              <a:t>Sales coverage rising 50% → 80% by end-June.</a:t>
-            </a:r>
-            <a:r>
-              <a:rPr sz="1100" b="0" i="0">
-                <a:solidFill>
-                  <a:srgbClr val="FFFFFF"/>
-                </a:solidFill>
-                <a:latin typeface="Calibri"/>
-              </a:rPr>
-              <a:t>      </a:t>
-            </a:r>
-            <a:r>
-              <a:rPr sz="1000" b="1" i="0">
-                <a:solidFill>
-                  <a:srgbClr val="D97306"/>
-                </a:solidFill>
-                <a:latin typeface="Calibri"/>
-              </a:rPr>
-              <a:t>WHY SAFE  </a:t>
-            </a:r>
-            <a:r>
-              <a:rPr sz="1100" b="0" i="0">
-                <a:solidFill>
-                  <a:srgbClr val="F4F6FA"/>
-                </a:solidFill>
-                <a:latin typeface="Calibri"/>
-              </a:rPr>
-              <a:t>Bid-optimisation only; ADR 0004 keeps the FCA boundary.</a:t>
-            </a:r>
-          </a:p>
-        </p:txBody>
-      </p:sp>
-      <p:sp>
-        <p:nvSpPr>
-          <p:cNvPr id="8" name="Rectangle 7"/>
-          <p:cNvSpPr/>
-          <p:nvPr/>
-        </p:nvSpPr>
-        <p:spPr>
-          <a:xfrm>
-            <a:off x="0" y="6537960"/>
-            <a:ext cx="12191695" cy="320040"/>
-          </a:xfrm>
-          <a:prstGeom prst="rect">
-            <a:avLst/>
-          </a:prstGeom>
-          <a:solidFill>
-            <a:srgbClr val="F4F6FA"/>
-          </a:solidFill>
-          <a:ln>
-            <a:noFill/>
-          </a:ln>
-        </p:spPr>
-        <p:style>
-          <a:lnRef idx="1">
-            <a:schemeClr val="accent1"/>
-          </a:lnRef>
-          <a:fillRef idx="3">
-            <a:schemeClr val="accent1"/>
-          </a:fillRef>
-          <a:effectRef idx="2">
-            <a:schemeClr val="accent1"/>
-          </a:effectRef>
-          <a:fontRef idx="minor">
-            <a:schemeClr val="lt1"/>
-          </a:fontRef>
-        </p:style>
-        <p:txBody>
-          <a:bodyPr rtlCol="0" anchor="ctr" lIns="548640" tIns="54864"/>
-          <a:lstStyle/>
-          <a:p>
-            <a:pPr algn="ctr"/>
+            <a:pPr algn="r"/>
             <a:r>
               <a:rPr sz="900" b="0" i="0">
                 <a:solidFill>
-                  <a:srgbClr val="6B7380"/>
-                </a:solidFill>
-                <a:latin typeface="Calibri"/>
-              </a:rPr>
-              <a:t>Predictive RPC Estimator — Client Demo</a:t>
-            </a:r>
-          </a:p>
-        </p:txBody>
-      </p:sp>
-      <p:sp>
-        <p:nvSpPr>
-          <p:cNvPr id="9" name="TextBox 8"/>
-          <p:cNvSpPr txBox="1"/>
-          <p:nvPr/>
-        </p:nvSpPr>
-        <p:spPr>
-          <a:xfrm>
-            <a:off x="11094415" y="6547104"/>
-            <a:ext cx="914400" cy="274320"/>
-          </a:xfrm>
-          <a:prstGeom prst="rect">
-            <a:avLst/>
-          </a:prstGeom>
-          <a:noFill/>
-        </p:spPr>
-        <p:txBody>
-          <a:bodyPr wrap="none">
-            <a:spAutoFit/>
-          </a:bodyPr>
-          <a:lstStyle/>
-          <a:p>
-            <a:pPr algn="r"/>
-            <a:r>
-              <a:rPr sz="900" b="0" i="0">
-                <a:solidFill>
-                  <a:srgbClr val="6B7380"/>
-                </a:solidFill>
-                <a:latin typeface="Calibri"/>
+                  <a:srgbClr val="7D7D7D"/>
+                </a:solidFill>
+                <a:latin typeface="Poppins"/>
               </a:rPr>
               <a:t>2 / 11</a:t>
             </a:r>
@@ -4725,7 +4553,7 @@
             <a:avLst/>
           </a:prstGeom>
           <a:solidFill>
-            <a:srgbClr val="0B1F3A"/>
+            <a:srgbClr val="002659"/>
           </a:solidFill>
           <a:ln>
             <a:noFill/>
@@ -4753,9 +4581,9 @@
             <a:r>
               <a:rPr sz="1000" b="1" i="0">
                 <a:solidFill>
-                  <a:srgbClr val="D97306"/>
-                </a:solidFill>
-                <a:latin typeface="Calibri"/>
+                  <a:srgbClr val="0064FF"/>
+                </a:solidFill>
+                <a:latin typeface="Poppins"/>
               </a:rPr>
               <a:t>WHAT YOU CAN SEE — AND WHAT'S RUNNING UNDERNEATH</a:t>
             </a:r>
@@ -4766,7 +4594,7 @@
                 <a:solidFill>
                   <a:srgbClr val="FFFFFF"/>
                 </a:solidFill>
-                <a:latin typeface="Calibri"/>
+                <a:latin typeface="Poppins"/>
               </a:rPr>
               <a:t>We've built it. It's live.</a:t>
             </a:r>
@@ -4788,7 +4616,7 @@
             <a:avLst/>
           </a:prstGeom>
           <a:solidFill>
-            <a:srgbClr val="D97306"/>
+            <a:srgbClr val="0064FF"/>
           </a:solidFill>
           <a:ln>
             <a:noFill/>
@@ -4837,7 +4665,7 @@
           </a:solidFill>
           <a:ln w="9525">
             <a:solidFill>
-              <a:srgbClr val="D7DBE3"/>
+              <a:srgbClr val="D2E3FC"/>
             </a:solidFill>
           </a:ln>
         </p:spPr>
@@ -4878,7 +4706,7 @@
             <a:avLst/>
           </a:prstGeom>
           <a:solidFill>
-            <a:srgbClr val="0F6E7A"/>
+            <a:srgbClr val="0064FF"/>
           </a:solidFill>
           <a:ln>
             <a:noFill/>
@@ -4921,7 +4749,7 @@
             <a:avLst/>
           </a:prstGeom>
           <a:solidFill>
-            <a:srgbClr val="0F6E7A"/>
+            <a:srgbClr val="0064FF"/>
           </a:solidFill>
           <a:ln>
             <a:noFill/>
@@ -4951,7 +4779,7 @@
                 <a:solidFill>
                   <a:srgbClr val="FFFFFF"/>
                 </a:solidFill>
-                <a:latin typeface="Calibri"/>
+                <a:latin typeface="Poppins"/>
               </a:rPr>
               <a:t>1</a:t>
             </a:r>
@@ -4988,9 +4816,9 @@
             <a:r>
               <a:rPr sz="2000" b="1" i="0">
                 <a:solidFill>
-                  <a:srgbClr val="0B1F3A"/>
-                </a:solidFill>
-                <a:latin typeface="Calibri"/>
+                  <a:srgbClr val="002659"/>
+                </a:solidFill>
+                <a:latin typeface="Poppins"/>
               </a:rPr>
               <a:t>A bidder with a crystal ball</a:t>
             </a:r>
@@ -5007,9 +4835,9 @@
             <a:r>
               <a:rPr sz="1200" b="0" i="0">
                 <a:solidFill>
-                  <a:srgbClr val="333F52"/>
-                </a:solidFill>
-                <a:latin typeface="Calibri"/>
+                  <a:srgbClr val="212121"/>
+                </a:solidFill>
+                <a:latin typeface="Poppins"/>
               </a:rPr>
               <a:t>Every Credit Cards click is priced in under a second, on its actual likely revenue.</a:t>
             </a:r>
@@ -5026,18 +4854,18 @@
             <a:r>
               <a:rPr sz="900" b="1" i="0">
                 <a:solidFill>
-                  <a:srgbClr val="0F6E7A"/>
-                </a:solidFill>
-                <a:latin typeface="Calibri"/>
+                  <a:srgbClr val="0064FF"/>
+                </a:solidFill>
+                <a:latin typeface="Poppins"/>
               </a:rPr>
               <a:t>Underneath:  </a:t>
             </a:r>
             <a:r>
               <a:rPr sz="900" b="0" i="0">
                 <a:solidFill>
-                  <a:srgbClr val="6B7380"/>
-                </a:solidFill>
-                <a:latin typeface="Calibri"/>
+                  <a:srgbClr val="7D7D7D"/>
+                </a:solidFill>
+                <a:latin typeface="Poppins"/>
               </a:rPr>
               <a:t>scoring-api (Rust on Cloud Run)  ·  Vertex AI XGBoost endpoint  ·  p95 &lt; 1 s on staging.</a:t>
             </a:r>
@@ -5065,7 +4893,7 @@
           </a:solidFill>
           <a:ln w="9525">
             <a:solidFill>
-              <a:srgbClr val="D7DBE3"/>
+              <a:srgbClr val="D2E3FC"/>
             </a:solidFill>
           </a:ln>
         </p:spPr>
@@ -5106,7 +4934,7 @@
             <a:avLst/>
           </a:prstGeom>
           <a:solidFill>
-            <a:srgbClr val="D97306"/>
+            <a:srgbClr val="0064FF"/>
           </a:solidFill>
           <a:ln>
             <a:noFill/>
@@ -5149,7 +4977,7 @@
             <a:avLst/>
           </a:prstGeom>
           <a:solidFill>
-            <a:srgbClr val="D97306"/>
+            <a:srgbClr val="0064FF"/>
           </a:solidFill>
           <a:ln>
             <a:noFill/>
@@ -5179,7 +5007,7 @@
                 <a:solidFill>
                   <a:srgbClr val="FFFFFF"/>
                 </a:solidFill>
-                <a:latin typeface="Calibri"/>
+                <a:latin typeface="Poppins"/>
               </a:rPr>
               <a:t>2</a:t>
             </a:r>
@@ -5216,9 +5044,9 @@
             <a:r>
               <a:rPr sz="2000" b="1" i="0">
                 <a:solidFill>
-                  <a:srgbClr val="0B1F3A"/>
-                </a:solidFill>
-                <a:latin typeface="Calibri"/>
+                  <a:srgbClr val="002659"/>
+                </a:solidFill>
+                <a:latin typeface="Poppins"/>
               </a:rPr>
               <a:t>Every prediction explainable</a:t>
             </a:r>
@@ -5235,9 +5063,9 @@
             <a:r>
               <a:rPr sz="1200" b="0" i="0">
                 <a:solidFill>
-                  <a:srgbClr val="333F52"/>
-                </a:solidFill>
-                <a:latin typeface="Calibri"/>
+                  <a:srgbClr val="212121"/>
+                </a:solidFill>
+                <a:latin typeface="Poppins"/>
               </a:rPr>
               <a:t>Plain-English attribution chart on every score — auditable for finance and compliance.</a:t>
             </a:r>
@@ -5254,20 +5082,20 @@
             <a:r>
               <a:rPr sz="900" b="1" i="0">
                 <a:solidFill>
-                  <a:srgbClr val="D97306"/>
-                </a:solidFill>
-                <a:latin typeface="Calibri"/>
+                  <a:srgbClr val="0064FF"/>
+                </a:solidFill>
+                <a:latin typeface="Poppins"/>
               </a:rPr>
               <a:t>Underneath:  </a:t>
             </a:r>
             <a:r>
               <a:rPr sz="900" b="0" i="0">
                 <a:solidFill>
-                  <a:srgbClr val="6B7380"/>
-                </a:solidFill>
-                <a:latin typeface="Calibri"/>
-              </a:rPr>
-              <a:t>Native SHAP via Vertex explanationSpec  ·  ADR 0004 blocks output from reaching customer terms.</a:t>
+                  <a:srgbClr val="7D7D7D"/>
+                </a:solidFill>
+                <a:latin typeface="Poppins"/>
+              </a:rPr>
+              <a:t>Native SHAP via Vertex explanationSpec  ·  bid-optimisation only, never customer terms.</a:t>
             </a:r>
           </a:p>
         </p:txBody>
@@ -5293,7 +5121,7 @@
           </a:solidFill>
           <a:ln w="9525">
             <a:solidFill>
-              <a:srgbClr val="D7DBE3"/>
+              <a:srgbClr val="D2E3FC"/>
             </a:solidFill>
           </a:ln>
         </p:spPr>
@@ -5334,7 +5162,7 @@
             <a:avLst/>
           </a:prstGeom>
           <a:solidFill>
-            <a:srgbClr val="1F8A4F"/>
+            <a:srgbClr val="4285F4"/>
           </a:solidFill>
           <a:ln>
             <a:noFill/>
@@ -5377,7 +5205,7 @@
             <a:avLst/>
           </a:prstGeom>
           <a:solidFill>
-            <a:srgbClr val="1F8A4F"/>
+            <a:srgbClr val="4285F4"/>
           </a:solidFill>
           <a:ln>
             <a:noFill/>
@@ -5407,7 +5235,7 @@
                 <a:solidFill>
                   <a:srgbClr val="FFFFFF"/>
                 </a:solidFill>
-                <a:latin typeface="Calibri"/>
+                <a:latin typeface="Poppins"/>
               </a:rPr>
               <a:t>3</a:t>
             </a:r>
@@ -5444,9 +5272,9 @@
             <a:r>
               <a:rPr sz="2000" b="1" i="0">
                 <a:solidFill>
-                  <a:srgbClr val="0B1F3A"/>
-                </a:solidFill>
-                <a:latin typeface="Calibri"/>
+                  <a:srgbClr val="002659"/>
+                </a:solidFill>
+                <a:latin typeface="Poppins"/>
               </a:rPr>
               <a:t>Behavioural intent, day one</a:t>
             </a:r>
@@ -5463,9 +5291,9 @@
             <a:r>
               <a:rPr sz="1200" b="0" i="0">
                 <a:solidFill>
-                  <a:srgbClr val="333F52"/>
-                </a:solidFill>
-                <a:latin typeface="Calibri"/>
+                  <a:srgbClr val="212121"/>
+                </a:solidFill>
+                <a:latin typeface="Poppins"/>
               </a:rPr>
               <a:t>The user's session — calculator, guides, compare-N — drives the bid in real time.</a:t>
             </a:r>
@@ -5482,18 +5310,18 @@
             <a:r>
               <a:rPr sz="900" b="1" i="0">
                 <a:solidFill>
-                  <a:srgbClr val="1F8A4F"/>
-                </a:solidFill>
-                <a:latin typeface="Calibri"/>
+                  <a:srgbClr val="4285F4"/>
+                </a:solidFill>
+                <a:latin typeface="Poppins"/>
               </a:rPr>
               <a:t>Underneath:  </a:t>
             </a:r>
             <a:r>
               <a:rPr sz="900" b="0" i="0">
                 <a:solidFill>
-                  <a:srgbClr val="6B7380"/>
-                </a:solidFill>
-                <a:latin typeface="Calibri"/>
+                  <a:srgbClr val="7D7D7D"/>
+                </a:solidFill>
+                <a:latin typeface="Poppins"/>
               </a:rPr>
               <a:t>Phoebe / GA4 nightly rollup  ·  Vertex Feature Store at serving time.</a:t>
             </a:r>
@@ -5521,7 +5349,7 @@
           </a:solidFill>
           <a:ln w="9525">
             <a:solidFill>
-              <a:srgbClr val="D7DBE3"/>
+              <a:srgbClr val="D2E3FC"/>
             </a:solidFill>
           </a:ln>
         </p:spPr>
@@ -5562,7 +5390,7 @@
             <a:avLst/>
           </a:prstGeom>
           <a:solidFill>
-            <a:srgbClr val="0B1F3A"/>
+            <a:srgbClr val="002659"/>
           </a:solidFill>
           <a:ln>
             <a:noFill/>
@@ -5605,7 +5433,7 @@
             <a:avLst/>
           </a:prstGeom>
           <a:solidFill>
-            <a:srgbClr val="0B1F3A"/>
+            <a:srgbClr val="002659"/>
           </a:solidFill>
           <a:ln>
             <a:noFill/>
@@ -5635,7 +5463,7 @@
                 <a:solidFill>
                   <a:srgbClr val="FFFFFF"/>
                 </a:solidFill>
-                <a:latin typeface="Calibri"/>
+                <a:latin typeface="Poppins"/>
               </a:rPr>
               <a:t>4</a:t>
             </a:r>
@@ -5672,9 +5500,9 @@
             <a:r>
               <a:rPr sz="2000" b="1" i="0">
                 <a:solidFill>
-                  <a:srgbClr val="0B1F3A"/>
-                </a:solidFill>
-                <a:latin typeface="Calibri"/>
+                  <a:srgbClr val="002659"/>
+                </a:solidFill>
+                <a:latin typeface="Poppins"/>
               </a:rPr>
               <a:t>A safety net you can demo</a:t>
             </a:r>
@@ -5691,9 +5519,9 @@
             <a:r>
               <a:rPr sz="1200" b="0" i="0">
                 <a:solidFill>
-                  <a:srgbClr val="333F52"/>
-                </a:solidFill>
-                <a:latin typeface="Calibri"/>
+                  <a:srgbClr val="212121"/>
+                </a:solidFill>
+                <a:latin typeface="Poppins"/>
               </a:rPr>
               <a:t>Bounds, circuit breaker, kill switch, anomaly window — the failure modes have already been thought through.</a:t>
             </a:r>
@@ -5710,18 +5538,18 @@
             <a:r>
               <a:rPr sz="900" b="1" i="0">
                 <a:solidFill>
-                  <a:srgbClr val="0B1F3A"/>
-                </a:solidFill>
-                <a:latin typeface="Calibri"/>
+                  <a:srgbClr val="002659"/>
+                </a:solidFill>
+                <a:latin typeface="Poppins"/>
               </a:rPr>
               <a:t>Underneath:  </a:t>
             </a:r>
             <a:r>
               <a:rPr sz="900" b="0" i="0">
                 <a:solidFill>
-                  <a:srgbClr val="6B7380"/>
-                </a:solidFill>
-                <a:latin typeface="Calibri"/>
+                  <a:srgbClr val="7D7D7D"/>
+                </a:solidFill>
+                <a:latin typeface="Poppins"/>
               </a:rPr>
               <a:t>Six Cloud Monitoring alerts  ·  six runbooks  ·  rollback is a Vertex traffic-split.</a:t>
             </a:r>
@@ -5743,7 +5571,7 @@
             <a:avLst/>
           </a:prstGeom>
           <a:solidFill>
-            <a:srgbClr val="0B1F3A"/>
+            <a:srgbClr val="002659"/>
           </a:solidFill>
           <a:ln>
             <a:noFill/>
@@ -5771,18 +5599,18 @@
             <a:r>
               <a:rPr sz="1000" b="0" i="0">
                 <a:solidFill>
-                  <a:srgbClr val="F4F6FA"/>
-                </a:solidFill>
-                <a:latin typeface="Calibri"/>
+                  <a:srgbClr val="E7F0FE"/>
+                </a:solidFill>
+                <a:latin typeface="Poppins"/>
               </a:rPr>
               <a:t>Live on staging  ·  europe-west2  ·  </a:t>
             </a:r>
             <a:r>
               <a:rPr sz="1000" b="1" i="0">
                 <a:solidFill>
-                  <a:srgbClr val="D97306"/>
-                </a:solidFill>
-                <a:latin typeface="Calibri"/>
+                  <a:srgbClr val="0064FF"/>
+                </a:solidFill>
+                <a:latin typeface="Poppins"/>
               </a:rPr>
               <a:t>https://dashboard-staging-794974391956.europe-west2.run.app</a:t>
             </a:r>
@@ -5804,7 +5632,7 @@
             <a:avLst/>
           </a:prstGeom>
           <a:solidFill>
-            <a:srgbClr val="F4F6FA"/>
+            <a:srgbClr val="E7F0FE"/>
           </a:solidFill>
           <a:ln>
             <a:noFill/>
@@ -5832,9 +5660,9 @@
             <a:r>
               <a:rPr sz="900" b="0" i="0">
                 <a:solidFill>
-                  <a:srgbClr val="6B7380"/>
-                </a:solidFill>
-                <a:latin typeface="Calibri"/>
+                  <a:srgbClr val="7D7D7D"/>
+                </a:solidFill>
+                <a:latin typeface="Poppins"/>
               </a:rPr>
               <a:t>Predictive RPC Estimator — Client Demo</a:t>
             </a:r>
@@ -5867,9 +5695,9 @@
             <a:r>
               <a:rPr sz="900" b="0" i="0">
                 <a:solidFill>
-                  <a:srgbClr val="6B7380"/>
-                </a:solidFill>
-                <a:latin typeface="Calibri"/>
+                  <a:srgbClr val="7D7D7D"/>
+                </a:solidFill>
+                <a:latin typeface="Poppins"/>
               </a:rPr>
               <a:t>3 / 11</a:t>
             </a:r>
@@ -5909,7 +5737,7 @@
             <a:avLst/>
           </a:prstGeom>
           <a:solidFill>
-            <a:srgbClr val="0B1F3A"/>
+            <a:srgbClr val="002659"/>
           </a:solidFill>
           <a:ln>
             <a:noFill/>
@@ -5937,9 +5765,9 @@
             <a:r>
               <a:rPr sz="1000" b="1" i="0">
                 <a:solidFill>
-                  <a:srgbClr val="D97306"/>
-                </a:solidFill>
-                <a:latin typeface="Calibri"/>
+                  <a:srgbClr val="0064FF"/>
+                </a:solidFill>
+                <a:latin typeface="Poppins"/>
               </a:rPr>
               <a:t>CREDIT CARDS STACK ON GOOGLE CLOUD</a:t>
             </a:r>
@@ -5950,7 +5778,7 @@
                 <a:solidFill>
                   <a:srgbClr val="FFFFFF"/>
                 </a:solidFill>
-                <a:latin typeface="Calibri"/>
+                <a:latin typeface="Poppins"/>
               </a:rPr>
               <a:t>End-to-end architecture</a:t>
             </a:r>
@@ -5972,7 +5800,7 @@
             <a:avLst/>
           </a:prstGeom>
           <a:solidFill>
-            <a:srgbClr val="D97306"/>
+            <a:srgbClr val="0064FF"/>
           </a:solidFill>
           <a:ln>
             <a:noFill/>
@@ -6021,7 +5849,7 @@
           </a:solidFill>
           <a:ln w="9525">
             <a:solidFill>
-              <a:srgbClr val="D7DBE3"/>
+              <a:srgbClr val="D2E3FC"/>
             </a:solidFill>
           </a:ln>
         </p:spPr>
@@ -6062,7 +5890,7 @@
             <a:avLst/>
           </a:prstGeom>
           <a:solidFill>
-            <a:srgbClr val="0B1F3A"/>
+            <a:srgbClr val="002659"/>
           </a:solidFill>
           <a:ln>
             <a:noFill/>
@@ -6117,7 +5945,7 @@
                 <a:solidFill>
                   <a:srgbClr val="FFFFFF"/>
                 </a:solidFill>
-                <a:latin typeface="Calibri"/>
+                <a:latin typeface="Poppins"/>
               </a:rPr>
               <a:t>SOURCES</a:t>
             </a:r>
@@ -6141,11 +5969,11 @@
             </a:avLst>
           </a:prstGeom>
           <a:solidFill>
-            <a:srgbClr val="F4F6FA"/>
+            <a:srgbClr val="E7F0FE"/>
           </a:solidFill>
           <a:ln w="6350">
             <a:solidFill>
-              <a:srgbClr val="D7DBE3"/>
+              <a:srgbClr val="D2E3FC"/>
             </a:solidFill>
           </a:ln>
         </p:spPr>
@@ -6171,9 +5999,9 @@
             <a:r>
               <a:rPr sz="1100" b="1" i="0">
                 <a:solidFill>
-                  <a:srgbClr val="0B1F3A"/>
-                </a:solidFill>
-                <a:latin typeface="Calibri"/>
+                  <a:srgbClr val="002659"/>
+                </a:solidFill>
+                <a:latin typeface="Poppins"/>
               </a:rPr>
               <a:t>CM360 click stream</a:t>
             </a:r>
@@ -6187,9 +6015,9 @@
             <a:r>
               <a:rPr sz="900" b="0" i="0">
                 <a:solidFill>
-                  <a:srgbClr val="333F52"/>
-                </a:solidFill>
-                <a:latin typeface="Calibri"/>
+                  <a:srgbClr val="212121"/>
+                </a:solidFill>
+                <a:latin typeface="Poppins"/>
               </a:rPr>
               <a:t>Pub/Sub → BigQuery</a:t>
             </a:r>
@@ -6213,11 +6041,11 @@
             </a:avLst>
           </a:prstGeom>
           <a:solidFill>
-            <a:srgbClr val="F4F6FA"/>
+            <a:srgbClr val="E7F0FE"/>
           </a:solidFill>
           <a:ln w="6350">
             <a:solidFill>
-              <a:srgbClr val="D7DBE3"/>
+              <a:srgbClr val="D2E3FC"/>
             </a:solidFill>
           </a:ln>
         </p:spPr>
@@ -6243,9 +6071,9 @@
             <a:r>
               <a:rPr sz="1100" b="1" i="0">
                 <a:solidFill>
-                  <a:srgbClr val="0B1F3A"/>
-                </a:solidFill>
-                <a:latin typeface="Calibri"/>
+                  <a:srgbClr val="002659"/>
+                </a:solidFill>
+                <a:latin typeface="Poppins"/>
               </a:rPr>
               <a:t>Sales ledger</a:t>
             </a:r>
@@ -6259,9 +6087,9 @@
             <a:r>
               <a:rPr sz="900" b="0" i="0">
                 <a:solidFill>
-                  <a:srgbClr val="333F52"/>
-                </a:solidFill>
-                <a:latin typeface="Calibri"/>
+                  <a:srgbClr val="212121"/>
+                </a:solidFill>
+                <a:latin typeface="Poppins"/>
               </a:rPr>
               <a:t>BigQuery, multi-stage events</a:t>
             </a:r>
@@ -6285,11 +6113,11 @@
             </a:avLst>
           </a:prstGeom>
           <a:solidFill>
-            <a:srgbClr val="F4F6FA"/>
+            <a:srgbClr val="E7F0FE"/>
           </a:solidFill>
           <a:ln w="6350">
             <a:solidFill>
-              <a:srgbClr val="D7DBE3"/>
+              <a:srgbClr val="D2E3FC"/>
             </a:solidFill>
           </a:ln>
         </p:spPr>
@@ -6315,9 +6143,9 @@
             <a:r>
               <a:rPr sz="1100" b="1" i="0">
                 <a:solidFill>
-                  <a:srgbClr val="0B1F3A"/>
-                </a:solidFill>
-                <a:latin typeface="Calibri"/>
+                  <a:srgbClr val="002659"/>
+                </a:solidFill>
+                <a:latin typeface="Poppins"/>
               </a:rPr>
               <a:t>GA4 events (Phoebe)</a:t>
             </a:r>
@@ -6331,9 +6159,9 @@
             <a:r>
               <a:rPr sz="900" b="0" i="0">
                 <a:solidFill>
-                  <a:srgbClr val="333F52"/>
-                </a:solidFill>
-                <a:latin typeface="Calibri"/>
+                  <a:srgbClr val="212121"/>
+                </a:solidFill>
+                <a:latin typeface="Poppins"/>
               </a:rPr>
               <a:t>Daily BigQuery export</a:t>
             </a:r>
@@ -6356,7 +6184,7 @@
           </a:prstGeom>
           <a:ln w="25400">
             <a:solidFill>
-              <a:srgbClr val="6B7380"/>
+              <a:srgbClr val="7D7D7D"/>
             </a:solidFill>
           </a:ln>
         </p:spPr>
@@ -6396,7 +6224,7 @@
           </a:solidFill>
           <a:ln w="9525">
             <a:solidFill>
-              <a:srgbClr val="D7DBE3"/>
+              <a:srgbClr val="D2E3FC"/>
             </a:solidFill>
           </a:ln>
         </p:spPr>
@@ -6437,7 +6265,7 @@
             <a:avLst/>
           </a:prstGeom>
           <a:solidFill>
-            <a:srgbClr val="0F6E7A"/>
+            <a:srgbClr val="0064FF"/>
           </a:solidFill>
           <a:ln>
             <a:noFill/>
@@ -6492,7 +6320,7 @@
                 <a:solidFill>
                   <a:srgbClr val="FFFFFF"/>
                 </a:solidFill>
-                <a:latin typeface="Calibri"/>
+                <a:latin typeface="Poppins"/>
               </a:rPr>
               <a:t>REAL-TIME HOT PATH</a:t>
             </a:r>
@@ -6516,11 +6344,11 @@
             </a:avLst>
           </a:prstGeom>
           <a:solidFill>
-            <a:srgbClr val="F4F6FA"/>
+            <a:srgbClr val="E7F0FE"/>
           </a:solidFill>
           <a:ln w="6350">
             <a:solidFill>
-              <a:srgbClr val="D7DBE3"/>
+              <a:srgbClr val="D2E3FC"/>
             </a:solidFill>
           </a:ln>
         </p:spPr>
@@ -6546,9 +6374,9 @@
             <a:r>
               <a:rPr sz="1100" b="1" i="0">
                 <a:solidFill>
-                  <a:srgbClr val="0B1F3A"/>
-                </a:solidFill>
-                <a:latin typeface="Calibri"/>
+                  <a:srgbClr val="002659"/>
+                </a:solidFill>
+                <a:latin typeface="Poppins"/>
               </a:rPr>
               <a:t>scoring-api (Rust, Cloud Run)</a:t>
             </a:r>
@@ -6562,9 +6390,9 @@
             <a:r>
               <a:rPr sz="900" b="0" i="0">
                 <a:solidFill>
-                  <a:srgbClr val="333F52"/>
-                </a:solidFill>
-                <a:latin typeface="Calibri"/>
+                  <a:srgbClr val="212121"/>
+                </a:solidFill>
+                <a:latin typeface="Poppins"/>
               </a:rPr>
               <a:t>p95 &lt; 1s, /v1/score + /v1/explain</a:t>
             </a:r>
@@ -6588,11 +6416,11 @@
             </a:avLst>
           </a:prstGeom>
           <a:solidFill>
-            <a:srgbClr val="F4F6FA"/>
+            <a:srgbClr val="E7F0FE"/>
           </a:solidFill>
           <a:ln w="6350">
             <a:solidFill>
-              <a:srgbClr val="D7DBE3"/>
+              <a:srgbClr val="D2E3FC"/>
             </a:solidFill>
           </a:ln>
         </p:spPr>
@@ -6618,9 +6446,9 @@
             <a:r>
               <a:rPr sz="1100" b="1" i="0">
                 <a:solidFill>
-                  <a:srgbClr val="0B1F3A"/>
-                </a:solidFill>
-                <a:latin typeface="Calibri"/>
+                  <a:srgbClr val="002659"/>
+                </a:solidFill>
+                <a:latin typeface="Poppins"/>
               </a:rPr>
               <a:t>Safety net</a:t>
             </a:r>
@@ -6634,9 +6462,9 @@
             <a:r>
               <a:rPr sz="900" b="0" i="0">
                 <a:solidFill>
-                  <a:srgbClr val="333F52"/>
-                </a:solidFill>
-                <a:latin typeface="Calibri"/>
+                  <a:srgbClr val="212121"/>
+                </a:solidFill>
+                <a:latin typeface="Poppins"/>
               </a:rPr>
               <a:t>Bounds, breaker, kill switch, anomaly window</a:t>
             </a:r>
@@ -6660,11 +6488,11 @@
             </a:avLst>
           </a:prstGeom>
           <a:solidFill>
-            <a:srgbClr val="F4F6FA"/>
+            <a:srgbClr val="E7F0FE"/>
           </a:solidFill>
           <a:ln w="6350">
             <a:solidFill>
-              <a:srgbClr val="D7DBE3"/>
+              <a:srgbClr val="D2E3FC"/>
             </a:solidFill>
           </a:ln>
         </p:spPr>
@@ -6690,9 +6518,9 @@
             <a:r>
               <a:rPr sz="1100" b="1" i="0">
                 <a:solidFill>
-                  <a:srgbClr val="0B1F3A"/>
-                </a:solidFill>
-                <a:latin typeface="Calibri"/>
+                  <a:srgbClr val="002659"/>
+                </a:solidFill>
+                <a:latin typeface="Poppins"/>
               </a:rPr>
               <a:t>Vertex AI endpoint</a:t>
             </a:r>
@@ -6706,9 +6534,9 @@
             <a:r>
               <a:rPr sz="900" b="0" i="0">
                 <a:solidFill>
-                  <a:srgbClr val="333F52"/>
-                </a:solidFill>
-                <a:latin typeface="Calibri"/>
+                  <a:srgbClr val="212121"/>
+                </a:solidFill>
+                <a:latin typeface="Poppins"/>
               </a:rPr>
               <a:t>XGBoost + native SHAP</a:t>
             </a:r>
@@ -6732,11 +6560,11 @@
             </a:avLst>
           </a:prstGeom>
           <a:solidFill>
-            <a:srgbClr val="F4F6FA"/>
+            <a:srgbClr val="E7F0FE"/>
           </a:solidFill>
           <a:ln w="6350">
             <a:solidFill>
-              <a:srgbClr val="D7DBE3"/>
+              <a:srgbClr val="D2E3FC"/>
             </a:solidFill>
           </a:ln>
         </p:spPr>
@@ -6762,9 +6590,9 @@
             <a:r>
               <a:rPr sz="1100" b="1" i="0">
                 <a:solidFill>
-                  <a:srgbClr val="0B1F3A"/>
-                </a:solidFill>
-                <a:latin typeface="Calibri"/>
+                  <a:srgbClr val="002659"/>
+                </a:solidFill>
+                <a:latin typeface="Poppins"/>
               </a:rPr>
               <a:t>Feature store</a:t>
             </a:r>
@@ -6778,9 +6606,9 @@
             <a:r>
               <a:rPr sz="900" b="0" i="0">
                 <a:solidFill>
-                  <a:srgbClr val="333F52"/>
-                </a:solidFill>
-                <a:latin typeface="Calibri"/>
+                  <a:srgbClr val="212121"/>
+                </a:solidFill>
+                <a:latin typeface="Poppins"/>
               </a:rPr>
               <a:t>Phoebe lookup at scoring time</a:t>
             </a:r>
@@ -6803,7 +6631,7 @@
           </a:prstGeom>
           <a:ln w="25400">
             <a:solidFill>
-              <a:srgbClr val="6B7380"/>
+              <a:srgbClr val="7D7D7D"/>
             </a:solidFill>
           </a:ln>
         </p:spPr>
@@ -6843,7 +6671,7 @@
           </a:solidFill>
           <a:ln w="9525">
             <a:solidFill>
-              <a:srgbClr val="D7DBE3"/>
+              <a:srgbClr val="D2E3FC"/>
             </a:solidFill>
           </a:ln>
         </p:spPr>
@@ -6884,7 +6712,7 @@
             <a:avLst/>
           </a:prstGeom>
           <a:solidFill>
-            <a:srgbClr val="D97306"/>
+            <a:srgbClr val="0064FF"/>
           </a:solidFill>
           <a:ln>
             <a:noFill/>
@@ -6939,7 +6767,7 @@
                 <a:solidFill>
                   <a:srgbClr val="FFFFFF"/>
                 </a:solidFill>
-                <a:latin typeface="Calibri"/>
+                <a:latin typeface="Poppins"/>
               </a:rPr>
               <a:t>RECONCILIATION + ML</a:t>
             </a:r>
@@ -6963,11 +6791,11 @@
             </a:avLst>
           </a:prstGeom>
           <a:solidFill>
-            <a:srgbClr val="F4F6FA"/>
+            <a:srgbClr val="E7F0FE"/>
           </a:solidFill>
           <a:ln w="6350">
             <a:solidFill>
-              <a:srgbClr val="D7DBE3"/>
+              <a:srgbClr val="D2E3FC"/>
             </a:solidFill>
           </a:ln>
         </p:spPr>
@@ -6993,9 +6821,9 @@
             <a:r>
               <a:rPr sz="1100" b="1" i="0">
                 <a:solidFill>
-                  <a:srgbClr val="0B1F3A"/>
-                </a:solidFill>
-                <a:latin typeface="Calibri"/>
+                  <a:srgbClr val="002659"/>
+                </a:solidFill>
+                <a:latin typeface="Poppins"/>
               </a:rPr>
               <a:t>BigQuery views</a:t>
             </a:r>
@@ -7009,9 +6837,9 @@
             <a:r>
               <a:rPr sz="900" b="0" i="0">
                 <a:solidFill>
-                  <a:srgbClr val="333F52"/>
-                </a:solidFill>
-                <a:latin typeface="Calibri"/>
+                  <a:srgbClr val="212121"/>
+                </a:solidFill>
+                <a:latin typeface="Poppins"/>
               </a:rPr>
               <a:t>predictions_vs_revenue, coverage_audit</a:t>
             </a:r>
@@ -7035,11 +6863,11 @@
             </a:avLst>
           </a:prstGeom>
           <a:solidFill>
-            <a:srgbClr val="F4F6FA"/>
+            <a:srgbClr val="E7F0FE"/>
           </a:solidFill>
           <a:ln w="6350">
             <a:solidFill>
-              <a:srgbClr val="D7DBE3"/>
+              <a:srgbClr val="D2E3FC"/>
             </a:solidFill>
           </a:ln>
         </p:spPr>
@@ -7065,9 +6893,9 @@
             <a:r>
               <a:rPr sz="1100" b="1" i="0">
                 <a:solidFill>
-                  <a:srgbClr val="0B1F3A"/>
-                </a:solidFill>
-                <a:latin typeface="Calibri"/>
+                  <a:srgbClr val="002659"/>
+                </a:solidFill>
+                <a:latin typeface="Poppins"/>
               </a:rPr>
               <a:t>Dataform</a:t>
             </a:r>
@@ -7081,9 +6909,9 @@
             <a:r>
               <a:rPr sz="900" b="0" i="0">
                 <a:solidFill>
-                  <a:srgbClr val="333F52"/>
-                </a:solidFill>
-                <a:latin typeface="Calibri"/>
+                  <a:srgbClr val="212121"/>
+                </a:solidFill>
+                <a:latin typeface="Poppins"/>
               </a:rPr>
               <a:t>residuals_by_segment, drift_breaches</a:t>
             </a:r>
@@ -7107,11 +6935,11 @@
             </a:avLst>
           </a:prstGeom>
           <a:solidFill>
-            <a:srgbClr val="F4F6FA"/>
+            <a:srgbClr val="E7F0FE"/>
           </a:solidFill>
           <a:ln w="6350">
             <a:solidFill>
-              <a:srgbClr val="D7DBE3"/>
+              <a:srgbClr val="D2E3FC"/>
             </a:solidFill>
           </a:ln>
         </p:spPr>
@@ -7137,9 +6965,9 @@
             <a:r>
               <a:rPr sz="1100" b="1" i="0">
                 <a:solidFill>
-                  <a:srgbClr val="0B1F3A"/>
-                </a:solidFill>
-                <a:latin typeface="Calibri"/>
+                  <a:srgbClr val="002659"/>
+                </a:solidFill>
+                <a:latin typeface="Poppins"/>
               </a:rPr>
               <a:t>ml-pipeline</a:t>
             </a:r>
@@ -7153,9 +6981,9 @@
             <a:r>
               <a:rPr sz="900" b="0" i="0">
                 <a:solidFill>
-                  <a:srgbClr val="333F52"/>
-                </a:solidFill>
-                <a:latin typeface="Calibri"/>
+                  <a:srgbClr val="212121"/>
+                </a:solidFill>
+                <a:latin typeface="Poppins"/>
               </a:rPr>
               <a:t>Vertex Pipelines retrain on tag</a:t>
             </a:r>
@@ -7179,11 +7007,11 @@
             </a:avLst>
           </a:prstGeom>
           <a:solidFill>
-            <a:srgbClr val="F4F6FA"/>
+            <a:srgbClr val="E7F0FE"/>
           </a:solidFill>
           <a:ln w="6350">
             <a:solidFill>
-              <a:srgbClr val="D7DBE3"/>
+              <a:srgbClr val="D2E3FC"/>
             </a:solidFill>
           </a:ln>
         </p:spPr>
@@ -7209,9 +7037,9 @@
             <a:r>
               <a:rPr sz="1100" b="1" i="0">
                 <a:solidFill>
-                  <a:srgbClr val="0B1F3A"/>
-                </a:solidFill>
-                <a:latin typeface="Calibri"/>
+                  <a:srgbClr val="002659"/>
+                </a:solidFill>
+                <a:latin typeface="Poppins"/>
               </a:rPr>
               <a:t>breach_emitter</a:t>
             </a:r>
@@ -7225,9 +7053,9 @@
             <a:r>
               <a:rPr sz="900" b="0" i="0">
                 <a:solidFill>
-                  <a:srgbClr val="333F52"/>
-                </a:solidFill>
-                <a:latin typeface="Calibri"/>
+                  <a:srgbClr val="212121"/>
+                </a:solidFill>
+                <a:latin typeface="Poppins"/>
               </a:rPr>
               <a:t>Daily scheduler → log → alerts</a:t>
             </a:r>
@@ -7250,7 +7078,7 @@
           </a:prstGeom>
           <a:ln w="25400">
             <a:solidFill>
-              <a:srgbClr val="6B7380"/>
+              <a:srgbClr val="7D7D7D"/>
             </a:solidFill>
           </a:ln>
         </p:spPr>
@@ -7290,7 +7118,7 @@
           </a:solidFill>
           <a:ln w="9525">
             <a:solidFill>
-              <a:srgbClr val="D7DBE3"/>
+              <a:srgbClr val="D2E3FC"/>
             </a:solidFill>
           </a:ln>
         </p:spPr>
@@ -7331,7 +7159,7 @@
             <a:avLst/>
           </a:prstGeom>
           <a:solidFill>
-            <a:srgbClr val="1F8A4F"/>
+            <a:srgbClr val="4285F4"/>
           </a:solidFill>
           <a:ln>
             <a:noFill/>
@@ -7386,7 +7214,7 @@
                 <a:solidFill>
                   <a:srgbClr val="FFFFFF"/>
                 </a:solidFill>
-                <a:latin typeface="Calibri"/>
+                <a:latin typeface="Poppins"/>
               </a:rPr>
               <a:t>SURFACES + ACTIVATION</a:t>
             </a:r>
@@ -7410,11 +7238,11 @@
             </a:avLst>
           </a:prstGeom>
           <a:solidFill>
-            <a:srgbClr val="F4F6FA"/>
+            <a:srgbClr val="E7F0FE"/>
           </a:solidFill>
           <a:ln w="6350">
             <a:solidFill>
-              <a:srgbClr val="D7DBE3"/>
+              <a:srgbClr val="D2E3FC"/>
             </a:solidFill>
           </a:ln>
         </p:spPr>
@@ -7440,9 +7268,9 @@
             <a:r>
               <a:rPr sz="1100" b="1" i="0">
                 <a:solidFill>
-                  <a:srgbClr val="0B1F3A"/>
-                </a:solidFill>
-                <a:latin typeface="Calibri"/>
+                  <a:srgbClr val="002659"/>
+                </a:solidFill>
+                <a:latin typeface="Poppins"/>
               </a:rPr>
               <a:t>Executive dashboard</a:t>
             </a:r>
@@ -7456,9 +7284,9 @@
             <a:r>
               <a:rPr sz="900" b="0" i="0">
                 <a:solidFill>
-                  <a:srgbClr val="333F52"/>
-                </a:solidFill>
-                <a:latin typeface="Calibri"/>
+                  <a:srgbClr val="212121"/>
+                </a:solidFill>
+                <a:latin typeface="Poppins"/>
               </a:rPr>
               <a:t>React + nginx on Cloud Run</a:t>
             </a:r>
@@ -7482,11 +7310,11 @@
             </a:avLst>
           </a:prstGeom>
           <a:solidFill>
-            <a:srgbClr val="F4F6FA"/>
+            <a:srgbClr val="E7F0FE"/>
           </a:solidFill>
           <a:ln w="6350">
             <a:solidFill>
-              <a:srgbClr val="D7DBE3"/>
+              <a:srgbClr val="D2E3FC"/>
             </a:solidFill>
           </a:ln>
         </p:spPr>
@@ -7512,9 +7340,9 @@
             <a:r>
               <a:rPr sz="1100" b="1" i="0">
                 <a:solidFill>
-                  <a:srgbClr val="0B1F3A"/>
-                </a:solidFill>
-                <a:latin typeface="Calibri"/>
+                  <a:srgbClr val="002659"/>
+                </a:solidFill>
+                <a:latin typeface="Poppins"/>
               </a:rPr>
               <a:t>Activation API</a:t>
             </a:r>
@@ -7528,9 +7356,9 @@
             <a:r>
               <a:rPr sz="900" b="0" i="0">
                 <a:solidFill>
-                  <a:srgbClr val="333F52"/>
-                </a:solidFill>
-                <a:latin typeface="Calibri"/>
+                  <a:srgbClr val="212121"/>
+                </a:solidFill>
+                <a:latin typeface="Poppins"/>
               </a:rPr>
               <a:t>SA360 / SSGTM / OCI push</a:t>
             </a:r>
@@ -7554,11 +7382,11 @@
             </a:avLst>
           </a:prstGeom>
           <a:solidFill>
-            <a:srgbClr val="F4F6FA"/>
+            <a:srgbClr val="E7F0FE"/>
           </a:solidFill>
           <a:ln w="6350">
             <a:solidFill>
-              <a:srgbClr val="D7DBE3"/>
+              <a:srgbClr val="D2E3FC"/>
             </a:solidFill>
           </a:ln>
         </p:spPr>
@@ -7584,9 +7412,9 @@
             <a:r>
               <a:rPr sz="1100" b="1" i="0">
                 <a:solidFill>
-                  <a:srgbClr val="0B1F3A"/>
-                </a:solidFill>
-                <a:latin typeface="Calibri"/>
+                  <a:srgbClr val="002659"/>
+                </a:solidFill>
+                <a:latin typeface="Poppins"/>
               </a:rPr>
               <a:t>Cloud Monitoring</a:t>
             </a:r>
@@ -7600,9 +7428,9 @@
             <a:r>
               <a:rPr sz="900" b="0" i="0">
                 <a:solidFill>
-                  <a:srgbClr val="333F52"/>
-                </a:solidFill>
-                <a:latin typeface="Calibri"/>
+                  <a:srgbClr val="212121"/>
+                </a:solidFill>
+                <a:latin typeface="Poppins"/>
               </a:rPr>
               <a:t>6 alert policies → on-call</a:t>
             </a:r>
@@ -7624,7 +7452,7 @@
             <a:avLst/>
           </a:prstGeom>
           <a:solidFill>
-            <a:srgbClr val="F4F6FA"/>
+            <a:srgbClr val="E7F0FE"/>
           </a:solidFill>
           <a:ln>
             <a:noFill/>
@@ -7652,9 +7480,9 @@
             <a:r>
               <a:rPr sz="900" b="0" i="0">
                 <a:solidFill>
-                  <a:srgbClr val="6B7380"/>
-                </a:solidFill>
-                <a:latin typeface="Calibri"/>
+                  <a:srgbClr val="7D7D7D"/>
+                </a:solidFill>
+                <a:latin typeface="Poppins"/>
               </a:rPr>
               <a:t>Predictive RPC Estimator — Client Demo</a:t>
             </a:r>
@@ -7687,9 +7515,9 @@
             <a:r>
               <a:rPr sz="900" b="0" i="0">
                 <a:solidFill>
-                  <a:srgbClr val="6B7380"/>
-                </a:solidFill>
-                <a:latin typeface="Calibri"/>
+                  <a:srgbClr val="7D7D7D"/>
+                </a:solidFill>
+                <a:latin typeface="Poppins"/>
               </a:rPr>
               <a:t>4 / 11</a:t>
             </a:r>
@@ -7729,7 +7557,7 @@
             <a:avLst/>
           </a:prstGeom>
           <a:solidFill>
-            <a:srgbClr val="0B1F3A"/>
+            <a:srgbClr val="002659"/>
           </a:solidFill>
           <a:ln>
             <a:noFill/>
@@ -7757,9 +7585,9 @@
             <a:r>
               <a:rPr sz="1000" b="1" i="0">
                 <a:solidFill>
-                  <a:srgbClr val="D97306"/>
-                </a:solidFill>
-                <a:latin typeface="Calibri"/>
+                  <a:srgbClr val="0064FF"/>
+                </a:solidFill>
+                <a:latin typeface="Poppins"/>
               </a:rPr>
               <a:t>SEVEN MINUTES, ONE URL</a:t>
             </a:r>
@@ -7770,7 +7598,7 @@
                 <a:solidFill>
                   <a:srgbClr val="FFFFFF"/>
                 </a:solidFill>
-                <a:latin typeface="Calibri"/>
+                <a:latin typeface="Poppins"/>
               </a:rPr>
               <a:t>What you'll see, in seven beats</a:t>
             </a:r>
@@ -7792,7 +7620,7 @@
             <a:avLst/>
           </a:prstGeom>
           <a:solidFill>
-            <a:srgbClr val="D97306"/>
+            <a:srgbClr val="0064FF"/>
           </a:solidFill>
           <a:ln>
             <a:noFill/>
@@ -7841,7 +7669,7 @@
           </a:solidFill>
           <a:ln w="9525">
             <a:solidFill>
-              <a:srgbClr val="D7DBE3"/>
+              <a:srgbClr val="D2E3FC"/>
             </a:solidFill>
           </a:ln>
         </p:spPr>
@@ -7892,9 +7720,9 @@
             <a:r>
               <a:rPr sz="2800" b="1" i="0">
                 <a:solidFill>
-                  <a:srgbClr val="D97306"/>
-                </a:solidFill>
-                <a:latin typeface="Calibri"/>
+                  <a:srgbClr val="0064FF"/>
+                </a:solidFill>
+                <a:latin typeface="Poppins"/>
               </a:rPr>
               <a:t>01</a:t>
             </a:r>
@@ -7931,9 +7759,9 @@
             <a:r>
               <a:rPr sz="1500" b="1" i="0">
                 <a:solidFill>
-                  <a:srgbClr val="0B1F3A"/>
-                </a:solidFill>
-                <a:latin typeface="Calibri"/>
+                  <a:srgbClr val="002659"/>
+                </a:solidFill>
+                <a:latin typeface="Poppins"/>
               </a:rPr>
               <a:t>KPIs in pounds</a:t>
             </a:r>
@@ -7970,9 +7798,9 @@
             <a:r>
               <a:rPr sz="1100" b="0" i="0">
                 <a:solidFill>
-                  <a:srgbClr val="333F52"/>
-                </a:solidFill>
-                <a:latin typeface="Calibri"/>
+                  <a:srgbClr val="212121"/>
+                </a:solidFill>
+                <a:latin typeface="Poppins"/>
               </a:rPr>
               <a:t>Five tiles. 90-day window. Product-type filter.</a:t>
             </a:r>
@@ -8000,7 +7828,7 @@
           </a:solidFill>
           <a:ln w="9525">
             <a:solidFill>
-              <a:srgbClr val="D7DBE3"/>
+              <a:srgbClr val="D2E3FC"/>
             </a:solidFill>
           </a:ln>
         </p:spPr>
@@ -8051,9 +7879,9 @@
             <a:r>
               <a:rPr sz="2800" b="1" i="0">
                 <a:solidFill>
-                  <a:srgbClr val="D97306"/>
-                </a:solidFill>
-                <a:latin typeface="Calibri"/>
+                  <a:srgbClr val="0064FF"/>
+                </a:solidFill>
+                <a:latin typeface="Poppins"/>
               </a:rPr>
               <a:t>02</a:t>
             </a:r>
@@ -8090,9 +7918,9 @@
             <a:r>
               <a:rPr sz="1500" b="1" i="0">
                 <a:solidFill>
-                  <a:srgbClr val="0B1F3A"/>
-                </a:solidFill>
-                <a:latin typeface="Calibri"/>
+                  <a:srgbClr val="002659"/>
+                </a:solidFill>
+                <a:latin typeface="Poppins"/>
               </a:rPr>
               <a:t>Coverage, slice by slice</a:t>
             </a:r>
@@ -8129,9 +7957,9 @@
             <a:r>
               <a:rPr sz="1100" b="0" i="0">
                 <a:solidFill>
-                  <a:srgbClr val="333F52"/>
-                </a:solidFill>
-                <a:latin typeface="Calibri"/>
+                  <a:srgbClr val="212121"/>
+                </a:solidFill>
+                <a:latin typeface="Poppins"/>
               </a:rPr>
               <a:t>Red bars are the slices that need backfill before retraining.</a:t>
             </a:r>
@@ -8159,7 +7987,7 @@
           </a:solidFill>
           <a:ln w="9525">
             <a:solidFill>
-              <a:srgbClr val="D7DBE3"/>
+              <a:srgbClr val="D2E3FC"/>
             </a:solidFill>
           </a:ln>
         </p:spPr>
@@ -8210,9 +8038,9 @@
             <a:r>
               <a:rPr sz="2800" b="1" i="0">
                 <a:solidFill>
-                  <a:srgbClr val="D97306"/>
-                </a:solidFill>
-                <a:latin typeface="Calibri"/>
+                  <a:srgbClr val="0064FF"/>
+                </a:solidFill>
+                <a:latin typeface="Poppins"/>
               </a:rPr>
               <a:t>03</a:t>
             </a:r>
@@ -8249,9 +8077,9 @@
             <a:r>
               <a:rPr sz="1500" b="1" i="0">
                 <a:solidFill>
-                  <a:srgbClr val="0B1F3A"/>
-                </a:solidFill>
-                <a:latin typeface="Calibri"/>
+                  <a:srgbClr val="002659"/>
+                </a:solidFill>
+                <a:latin typeface="Poppins"/>
               </a:rPr>
               <a:t>Same click, two worlds</a:t>
             </a:r>
@@ -8288,9 +8116,9 @@
             <a:r>
               <a:rPr sz="1100" b="0" i="0">
                 <a:solidFill>
-                  <a:srgbClr val="333F52"/>
-                </a:solidFill>
-                <a:latin typeface="Calibri"/>
+                  <a:srgbClr val="212121"/>
+                </a:solidFill>
+                <a:latin typeface="Poppins"/>
               </a:rPr>
               <a:t>Flat target-CPA vs value-based bid vs the £ difference, with a running counter.</a:t>
             </a:r>
@@ -8318,7 +8146,7 @@
           </a:solidFill>
           <a:ln w="9525">
             <a:solidFill>
-              <a:srgbClr val="D7DBE3"/>
+              <a:srgbClr val="D2E3FC"/>
             </a:solidFill>
           </a:ln>
         </p:spPr>
@@ -8369,9 +8197,9 @@
             <a:r>
               <a:rPr sz="2800" b="1" i="0">
                 <a:solidFill>
-                  <a:srgbClr val="D97306"/>
-                </a:solidFill>
-                <a:latin typeface="Calibri"/>
+                  <a:srgbClr val="0064FF"/>
+                </a:solidFill>
+                <a:latin typeface="Poppins"/>
               </a:rPr>
               <a:t>04</a:t>
             </a:r>
@@ -8408,9 +8236,9 @@
             <a:r>
               <a:rPr sz="1500" b="1" i="0">
                 <a:solidFill>
-                  <a:srgbClr val="0B1F3A"/>
-                </a:solidFill>
-                <a:latin typeface="Calibri"/>
+                  <a:srgbClr val="002659"/>
+                </a:solidFill>
+                <a:latin typeface="Poppins"/>
               </a:rPr>
               <a:t>You drive the model</a:t>
             </a:r>
@@ -8447,9 +8275,9 @@
             <a:r>
               <a:rPr sz="1100" b="0" i="0">
                 <a:solidFill>
-                  <a:srgbClr val="333F52"/>
-                </a:solidFill>
-                <a:latin typeface="Calibri"/>
+                  <a:srgbClr val="212121"/>
+                </a:solidFill>
+                <a:latin typeface="Poppins"/>
               </a:rPr>
               <a:t>Predict in CC language; the pipeline trace lights up live.</a:t>
             </a:r>
@@ -8477,7 +8305,7 @@
           </a:solidFill>
           <a:ln w="9525">
             <a:solidFill>
-              <a:srgbClr val="D7DBE3"/>
+              <a:srgbClr val="D2E3FC"/>
             </a:solidFill>
           </a:ln>
         </p:spPr>
@@ -8528,9 +8356,9 @@
             <a:r>
               <a:rPr sz="2800" b="1" i="0">
                 <a:solidFill>
-                  <a:srgbClr val="D97306"/>
-                </a:solidFill>
-                <a:latin typeface="Calibri"/>
+                  <a:srgbClr val="0064FF"/>
+                </a:solidFill>
+                <a:latin typeface="Poppins"/>
               </a:rPr>
               <a:t>05</a:t>
             </a:r>
@@ -8567,9 +8395,9 @@
             <a:r>
               <a:rPr sz="1500" b="1" i="0">
                 <a:solidFill>
-                  <a:srgbClr val="0B1F3A"/>
-                </a:solidFill>
-                <a:latin typeface="Calibri"/>
+                  <a:srgbClr val="002659"/>
+                </a:solidFill>
+                <a:latin typeface="Poppins"/>
               </a:rPr>
               <a:t>The bouncer with a crystal ball</a:t>
             </a:r>
@@ -8606,9 +8434,9 @@
             <a:r>
               <a:rPr sz="1100" b="0" i="0">
                 <a:solidFill>
-                  <a:srgbClr val="333F52"/>
-                </a:solidFill>
-                <a:latin typeface="Calibri"/>
+                  <a:srgbClr val="212121"/>
+                </a:solidFill>
+                <a:latin typeface="Poppins"/>
               </a:rPr>
               <a:t>Press Play — a user's intent builds up, the bid follows.</a:t>
             </a:r>
@@ -8636,7 +8464,7 @@
           </a:solidFill>
           <a:ln w="9525">
             <a:solidFill>
-              <a:srgbClr val="D7DBE3"/>
+              <a:srgbClr val="D2E3FC"/>
             </a:solidFill>
           </a:ln>
         </p:spPr>
@@ -8687,9 +8515,9 @@
             <a:r>
               <a:rPr sz="2800" b="1" i="0">
                 <a:solidFill>
-                  <a:srgbClr val="D97306"/>
-                </a:solidFill>
-                <a:latin typeface="Calibri"/>
+                  <a:srgbClr val="0064FF"/>
+                </a:solidFill>
+                <a:latin typeface="Poppins"/>
               </a:rPr>
               <a:t>06</a:t>
             </a:r>
@@ -8726,9 +8554,9 @@
             <a:r>
               <a:rPr sz="1500" b="1" i="0">
                 <a:solidFill>
-                  <a:srgbClr val="0B1F3A"/>
-                </a:solidFill>
-                <a:latin typeface="Calibri"/>
+                  <a:srgbClr val="002659"/>
+                </a:solidFill>
+                <a:latin typeface="Poppins"/>
               </a:rPr>
               <a:t>Why the model said that</a:t>
             </a:r>
@@ -8765,9 +8593,9 @@
             <a:r>
               <a:rPr sz="1100" b="0" i="0">
                 <a:solidFill>
-                  <a:srgbClr val="333F52"/>
-                </a:solidFill>
-                <a:latin typeface="Calibri"/>
+                  <a:srgbClr val="212121"/>
+                </a:solidFill>
+                <a:latin typeface="Poppins"/>
               </a:rPr>
               <a:t>Plain-English SHAP under every prediction.</a:t>
             </a:r>
@@ -8795,7 +8623,7 @@
           </a:solidFill>
           <a:ln w="9525">
             <a:solidFill>
-              <a:srgbClr val="D7DBE3"/>
+              <a:srgbClr val="D2E3FC"/>
             </a:solidFill>
           </a:ln>
         </p:spPr>
@@ -8846,9 +8674,9 @@
             <a:r>
               <a:rPr sz="2800" b="1" i="0">
                 <a:solidFill>
-                  <a:srgbClr val="D97306"/>
-                </a:solidFill>
-                <a:latin typeface="Calibri"/>
+                  <a:srgbClr val="0064FF"/>
+                </a:solidFill>
+                <a:latin typeface="Poppins"/>
               </a:rPr>
               <a:t>07</a:t>
             </a:r>
@@ -8885,9 +8713,9 @@
             <a:r>
               <a:rPr sz="1500" b="1" i="0">
                 <a:solidFill>
-                  <a:srgbClr val="0B1F3A"/>
-                </a:solidFill>
-                <a:latin typeface="Calibri"/>
+                  <a:srgbClr val="002659"/>
+                </a:solidFill>
+                <a:latin typeface="Poppins"/>
               </a:rPr>
               <a:t>What we've designed against</a:t>
             </a:r>
@@ -8924,9 +8752,9 @@
             <a:r>
               <a:rPr sz="1100" b="0" i="0">
                 <a:solidFill>
-                  <a:srgbClr val="333F52"/>
-                </a:solidFill>
-                <a:latin typeface="Calibri"/>
+                  <a:srgbClr val="212121"/>
+                </a:solidFill>
+                <a:latin typeface="Poppins"/>
               </a:rPr>
               <a:t>Three failure modes named; the verticals after CC named.</a:t>
             </a:r>
@@ -8950,7 +8778,7 @@
             </a:avLst>
           </a:prstGeom>
           <a:solidFill>
-            <a:srgbClr val="0B1F3A"/>
+            <a:srgbClr val="002659"/>
           </a:solidFill>
           <a:ln>
             <a:noFill/>
@@ -8978,9 +8806,9 @@
             <a:r>
               <a:rPr sz="1100" b="1" i="0">
                 <a:solidFill>
-                  <a:srgbClr val="D97306"/>
-                </a:solidFill>
-                <a:latin typeface="Calibri"/>
+                  <a:srgbClr val="0064FF"/>
+                </a:solidFill>
+                <a:latin typeface="Poppins"/>
               </a:rPr>
               <a:t>Live dashboard</a:t>
             </a:r>
@@ -9016,9 +8844,9 @@
             <a:r>
               <a:rPr sz="1000" b="0" i="0">
                 <a:solidFill>
-                  <a:srgbClr val="F4F6FA"/>
-                </a:solidFill>
-                <a:latin typeface="Calibri"/>
+                  <a:srgbClr val="E7F0FE"/>
+                </a:solidFill>
+                <a:latin typeface="Poppins"/>
               </a:rPr>
               <a:t>One URL. The dashboard auto-calls /v1/score, /v1/explain and /coverage via nginx — nothing else to open.</a:t>
             </a:r>
@@ -9040,7 +8868,7 @@
             <a:avLst/>
           </a:prstGeom>
           <a:solidFill>
-            <a:srgbClr val="F4F6FA"/>
+            <a:srgbClr val="E7F0FE"/>
           </a:solidFill>
           <a:ln>
             <a:noFill/>
@@ -9068,9 +8896,9 @@
             <a:r>
               <a:rPr sz="900" b="0" i="0">
                 <a:solidFill>
-                  <a:srgbClr val="6B7380"/>
-                </a:solidFill>
-                <a:latin typeface="Calibri"/>
+                  <a:srgbClr val="7D7D7D"/>
+                </a:solidFill>
+                <a:latin typeface="Poppins"/>
               </a:rPr>
               <a:t>Predictive RPC Estimator — Client Demo</a:t>
             </a:r>
@@ -9103,9 +8931,9 @@
             <a:r>
               <a:rPr sz="900" b="0" i="0">
                 <a:solidFill>
-                  <a:srgbClr val="6B7380"/>
-                </a:solidFill>
-                <a:latin typeface="Calibri"/>
+                  <a:srgbClr val="7D7D7D"/>
+                </a:solidFill>
+                <a:latin typeface="Poppins"/>
               </a:rPr>
               <a:t>5 / 11</a:t>
             </a:r>
@@ -9145,7 +8973,7 @@
             <a:avLst/>
           </a:prstGeom>
           <a:solidFill>
-            <a:srgbClr val="0B1F3A"/>
+            <a:srgbClr val="002659"/>
           </a:solidFill>
           <a:ln>
             <a:noFill/>
@@ -9173,9 +9001,9 @@
             <a:r>
               <a:rPr sz="1000" b="1" i="0">
                 <a:solidFill>
-                  <a:srgbClr val="D97306"/>
-                </a:solidFill>
-                <a:latin typeface="Calibri"/>
+                  <a:srgbClr val="0064FF"/>
+                </a:solidFill>
+                <a:latin typeface="Poppins"/>
               </a:rPr>
               <a:t>THE HEADLINE ANSWER TO EVERY CTO QUESTION</a:t>
             </a:r>
@@ -9186,7 +9014,7 @@
                 <a:solidFill>
                   <a:srgbClr val="FFFFFF"/>
                 </a:solidFill>
-                <a:latin typeface="Calibri"/>
+                <a:latin typeface="Poppins"/>
               </a:rPr>
               <a:t>Why this stack</a:t>
             </a:r>
@@ -9208,7 +9036,7 @@
             <a:avLst/>
           </a:prstGeom>
           <a:solidFill>
-            <a:srgbClr val="D97306"/>
+            <a:srgbClr val="0064FF"/>
           </a:solidFill>
           <a:ln>
             <a:noFill/>
@@ -9257,7 +9085,7 @@
           </a:solidFill>
           <a:ln w="9525">
             <a:solidFill>
-              <a:srgbClr val="D7DBE3"/>
+              <a:srgbClr val="D2E3FC"/>
             </a:solidFill>
           </a:ln>
         </p:spPr>
@@ -9298,7 +9126,7 @@
             <a:avLst/>
           </a:prstGeom>
           <a:solidFill>
-            <a:srgbClr val="0F6E7A"/>
+            <a:srgbClr val="0064FF"/>
           </a:solidFill>
           <a:ln>
             <a:noFill/>
@@ -9356,9 +9184,9 @@
             <a:r>
               <a:rPr sz="1600" b="1" i="0">
                 <a:solidFill>
-                  <a:srgbClr val="0B1F3A"/>
-                </a:solidFill>
-                <a:latin typeface="Calibri"/>
+                  <a:srgbClr val="002659"/>
+                </a:solidFill>
+                <a:latin typeface="Poppins"/>
               </a:rPr>
               <a:t>Rust on Cloud Run</a:t>
             </a:r>
@@ -9375,9 +9203,9 @@
             <a:r>
               <a:rPr sz="1200" b="1" i="0">
                 <a:solidFill>
-                  <a:srgbClr val="333F52"/>
-                </a:solidFill>
-                <a:latin typeface="Calibri"/>
+                  <a:srgbClr val="212121"/>
+                </a:solidFill>
+                <a:latin typeface="Poppins"/>
               </a:rPr>
               <a:t>We need every millisecond Vertex doesn't take.</a:t>
             </a:r>
@@ -9394,9 +9222,9 @@
             <a:r>
               <a:rPr sz="1000" b="0" i="0">
                 <a:solidFill>
-                  <a:srgbClr val="6B7380"/>
-                </a:solidFill>
-                <a:latin typeface="Calibri"/>
+                  <a:srgbClr val="7D7D7D"/>
+                </a:solidFill>
+                <a:latin typeface="Poppins"/>
               </a:rPr>
               <a:t>GC jitter would eat the safety-net budget. Considered Go and Python and rejected both.</a:t>
             </a:r>
@@ -9424,7 +9252,7 @@
           </a:solidFill>
           <a:ln w="9525">
             <a:solidFill>
-              <a:srgbClr val="D7DBE3"/>
+              <a:srgbClr val="D2E3FC"/>
             </a:solidFill>
           </a:ln>
         </p:spPr>
@@ -9465,7 +9293,7 @@
             <a:avLst/>
           </a:prstGeom>
           <a:solidFill>
-            <a:srgbClr val="D97306"/>
+            <a:srgbClr val="0064FF"/>
           </a:solidFill>
           <a:ln>
             <a:noFill/>
@@ -9523,9 +9351,9 @@
             <a:r>
               <a:rPr sz="1600" b="1" i="0">
                 <a:solidFill>
-                  <a:srgbClr val="0B1F3A"/>
-                </a:solidFill>
-                <a:latin typeface="Calibri"/>
+                  <a:srgbClr val="002659"/>
+                </a:solidFill>
+                <a:latin typeface="Poppins"/>
               </a:rPr>
               <a:t>XGBoost on Vertex AI</a:t>
             </a:r>
@@ -9542,9 +9370,9 @@
             <a:r>
               <a:rPr sz="1200" b="1" i="0">
                 <a:solidFill>
-                  <a:srgbClr val="333F52"/>
-                </a:solidFill>
-                <a:latin typeface="Calibri"/>
+                  <a:srgbClr val="212121"/>
+                </a:solidFill>
+                <a:latin typeface="Poppins"/>
               </a:rPr>
               <a:t>Tabular data + auditable predictions + a circuit breaker that has to compose.</a:t>
             </a:r>
@@ -9561,9 +9389,9 @@
             <a:r>
               <a:rPr sz="1000" b="0" i="0">
                 <a:solidFill>
-                  <a:srgbClr val="6B7380"/>
-                </a:solidFill>
-                <a:latin typeface="Calibri"/>
+                  <a:srgbClr val="7D7D7D"/>
+                </a:solidFill>
+                <a:latin typeface="Poppins"/>
               </a:rPr>
               <a:t>GBDT wins tabular. Native SHAP comes free. Transformers' stateful decoding breaks the breaker.</a:t>
             </a:r>
@@ -9591,7 +9419,7 @@
           </a:solidFill>
           <a:ln w="9525">
             <a:solidFill>
-              <a:srgbClr val="D7DBE3"/>
+              <a:srgbClr val="D2E3FC"/>
             </a:solidFill>
           </a:ln>
         </p:spPr>
@@ -9632,7 +9460,7 @@
             <a:avLst/>
           </a:prstGeom>
           <a:solidFill>
-            <a:srgbClr val="0F6E7A"/>
+            <a:srgbClr val="0064FF"/>
           </a:solidFill>
           <a:ln>
             <a:noFill/>
@@ -9690,9 +9518,9 @@
             <a:r>
               <a:rPr sz="1600" b="1" i="0">
                 <a:solidFill>
-                  <a:srgbClr val="0B1F3A"/>
-                </a:solidFill>
-                <a:latin typeface="Calibri"/>
+                  <a:srgbClr val="002659"/>
+                </a:solidFill>
+                <a:latin typeface="Poppins"/>
               </a:rPr>
               <a:t>TypeScript + React + Vite</a:t>
             </a:r>
@@ -9709,9 +9537,9 @@
             <a:r>
               <a:rPr sz="1200" b="1" i="0">
                 <a:solidFill>
-                  <a:srgbClr val="333F52"/>
-                </a:solidFill>
-                <a:latin typeface="Calibri"/>
+                  <a:srgbClr val="212121"/>
+                </a:solidFill>
+                <a:latin typeface="Poppins"/>
               </a:rPr>
               <a:t>One URL with realtime interactivity, no server-side rendering.</a:t>
             </a:r>
@@ -9728,9 +9556,9 @@
             <a:r>
               <a:rPr sz="1000" b="0" i="0">
                 <a:solidFill>
-                  <a:srgbClr val="6B7380"/>
-                </a:solidFill>
-                <a:latin typeface="Calibri"/>
+                  <a:srgbClr val="7D7D7D"/>
+                </a:solidFill>
+                <a:latin typeface="Poppins"/>
               </a:rPr>
               <a:t>Zod validates JSON at the boundary. The dashboard is a static-asset deploy.</a:t>
             </a:r>
@@ -9758,7 +9586,7 @@
           </a:solidFill>
           <a:ln w="9525">
             <a:solidFill>
-              <a:srgbClr val="D7DBE3"/>
+              <a:srgbClr val="D2E3FC"/>
             </a:solidFill>
           </a:ln>
         </p:spPr>
@@ -9799,7 +9627,7 @@
             <a:avLst/>
           </a:prstGeom>
           <a:solidFill>
-            <a:srgbClr val="D97306"/>
+            <a:srgbClr val="0064FF"/>
           </a:solidFill>
           <a:ln>
             <a:noFill/>
@@ -9857,9 +9685,9 @@
             <a:r>
               <a:rPr sz="1600" b="1" i="0">
                 <a:solidFill>
-                  <a:srgbClr val="0B1F3A"/>
-                </a:solidFill>
-                <a:latin typeface="Calibri"/>
+                  <a:srgbClr val="002659"/>
+                </a:solidFill>
+                <a:latin typeface="Poppins"/>
               </a:rPr>
               <a:t>Protobuf</a:t>
             </a:r>
@@ -9876,9 +9704,9 @@
             <a:r>
               <a:rPr sz="1200" b="1" i="0">
                 <a:solidFill>
-                  <a:srgbClr val="333F52"/>
-                </a:solidFill>
-                <a:latin typeface="Calibri"/>
+                  <a:srgbClr val="212121"/>
+                </a:solidFill>
+                <a:latin typeface="Poppins"/>
               </a:rPr>
               <a:t>Wire stability across Rust ↔ Python; CI parity test guards drift.</a:t>
             </a:r>
@@ -9895,9 +9723,9 @@
             <a:r>
               <a:rPr sz="1000" b="0" i="0">
                 <a:solidFill>
-                  <a:srgbClr val="6B7380"/>
-                </a:solidFill>
-                <a:latin typeface="Calibri"/>
+                  <a:srgbClr val="7D7D7D"/>
+                </a:solidFill>
+                <a:latin typeface="Poppins"/>
               </a:rPr>
               <a:t>Considered JSON Schema and rejected — loses on-wire byte-stability.</a:t>
             </a:r>
@@ -9925,7 +9753,7 @@
           </a:solidFill>
           <a:ln w="9525">
             <a:solidFill>
-              <a:srgbClr val="D7DBE3"/>
+              <a:srgbClr val="D2E3FC"/>
             </a:solidFill>
           </a:ln>
         </p:spPr>
@@ -9966,7 +9794,7 @@
             <a:avLst/>
           </a:prstGeom>
           <a:solidFill>
-            <a:srgbClr val="0F6E7A"/>
+            <a:srgbClr val="0064FF"/>
           </a:solidFill>
           <a:ln>
             <a:noFill/>
@@ -10024,9 +9852,9 @@
             <a:r>
               <a:rPr sz="1600" b="1" i="0">
                 <a:solidFill>
-                  <a:srgbClr val="0B1F3A"/>
-                </a:solidFill>
-                <a:latin typeface="Calibri"/>
+                  <a:srgbClr val="002659"/>
+                </a:solidFill>
+                <a:latin typeface="Poppins"/>
               </a:rPr>
               <a:t>Dataform on BigQuery</a:t>
             </a:r>
@@ -10043,9 +9871,9 @@
             <a:r>
               <a:rPr sz="1200" b="1" i="0">
                 <a:solidFill>
-                  <a:srgbClr val="333F52"/>
-                </a:solidFill>
-                <a:latin typeface="Calibri"/>
+                  <a:srgbClr val="212121"/>
+                </a:solidFill>
+                <a:latin typeface="Poppins"/>
               </a:rPr>
               <a:t>Same primitives as dbt; one fewer tool for the client to install.</a:t>
             </a:r>
@@ -10062,9 +9890,9 @@
             <a:r>
               <a:rPr sz="1000" b="0" i="0">
                 <a:solidFill>
-                  <a:srgbClr val="6B7380"/>
-                </a:solidFill>
-                <a:latin typeface="Calibri"/>
+                  <a:srgbClr val="7D7D7D"/>
+                </a:solidFill>
+                <a:latin typeface="Poppins"/>
               </a:rPr>
               <a:t>Type-safe ref()s give us the DAG automatically. coverage_audit, drift_breaches, residuals all light up in order.</a:t>
             </a:r>
@@ -10092,7 +9920,7 @@
           </a:solidFill>
           <a:ln w="9525">
             <a:solidFill>
-              <a:srgbClr val="D7DBE3"/>
+              <a:srgbClr val="D2E3FC"/>
             </a:solidFill>
           </a:ln>
         </p:spPr>
@@ -10133,7 +9961,7 @@
             <a:avLst/>
           </a:prstGeom>
           <a:solidFill>
-            <a:srgbClr val="D97306"/>
+            <a:srgbClr val="0064FF"/>
           </a:solidFill>
           <a:ln>
             <a:noFill/>
@@ -10191,9 +10019,9 @@
             <a:r>
               <a:rPr sz="1600" b="1" i="0">
                 <a:solidFill>
-                  <a:srgbClr val="0B1F3A"/>
-                </a:solidFill>
-                <a:latin typeface="Calibri"/>
+                  <a:srgbClr val="002659"/>
+                </a:solidFill>
+                <a:latin typeface="Poppins"/>
               </a:rPr>
               <a:t>Workload Identity Federation</a:t>
             </a:r>
@@ -10210,9 +10038,9 @@
             <a:r>
               <a:rPr sz="1200" b="1" i="0">
                 <a:solidFill>
-                  <a:srgbClr val="333F52"/>
-                </a:solidFill>
-                <a:latin typeface="Calibri"/>
+                  <a:srgbClr val="212121"/>
+                </a:solidFill>
+                <a:latin typeface="Poppins"/>
               </a:rPr>
               <a:t>No long-lived secrets in CI. No keys to rotate, leak, or audit.</a:t>
             </a:r>
@@ -10229,9 +10057,9 @@
             <a:r>
               <a:rPr sz="1000" b="0" i="0">
                 <a:solidFill>
-                  <a:srgbClr val="6B7380"/>
-                </a:solidFill>
-                <a:latin typeface="Calibri"/>
+                  <a:srgbClr val="7D7D7D"/>
+                </a:solidFill>
+                <a:latin typeface="Poppins"/>
               </a:rPr>
               <a:t>GitHub OIDC federates into GCP. Every IAM grant is in Terraform.</a:t>
             </a:r>
@@ -10253,7 +10081,7 @@
             <a:avLst/>
           </a:prstGeom>
           <a:solidFill>
-            <a:srgbClr val="F4F6FA"/>
+            <a:srgbClr val="E7F0FE"/>
           </a:solidFill>
           <a:ln>
             <a:noFill/>
@@ -10281,9 +10109,9 @@
             <a:r>
               <a:rPr sz="900" b="0" i="0">
                 <a:solidFill>
-                  <a:srgbClr val="6B7380"/>
-                </a:solidFill>
-                <a:latin typeface="Calibri"/>
+                  <a:srgbClr val="7D7D7D"/>
+                </a:solidFill>
+                <a:latin typeface="Poppins"/>
               </a:rPr>
               <a:t>Predictive RPC Estimator — Client Demo</a:t>
             </a:r>
@@ -10316,9 +10144,9 @@
             <a:r>
               <a:rPr sz="900" b="0" i="0">
                 <a:solidFill>
-                  <a:srgbClr val="6B7380"/>
-                </a:solidFill>
-                <a:latin typeface="Calibri"/>
+                  <a:srgbClr val="7D7D7D"/>
+                </a:solidFill>
+                <a:latin typeface="Poppins"/>
               </a:rPr>
               <a:t>6 / 11</a:t>
             </a:r>
@@ -10358,7 +10186,7 @@
             <a:avLst/>
           </a:prstGeom>
           <a:solidFill>
-            <a:srgbClr val="0B1F3A"/>
+            <a:srgbClr val="002659"/>
           </a:solidFill>
           <a:ln>
             <a:noFill/>
@@ -10386,9 +10214,9 @@
             <a:r>
               <a:rPr sz="1000" b="1" i="0">
                 <a:solidFill>
-                  <a:srgbClr val="D97306"/>
-                </a:solidFill>
-                <a:latin typeface="Calibri"/>
+                  <a:srgbClr val="0064FF"/>
+                </a:solidFill>
+                <a:latin typeface="Poppins"/>
               </a:rPr>
               <a:t>THE BORING SLIDE THAT MAKES THE SYSTEM BULLETPROOF</a:t>
             </a:r>
@@ -10399,7 +10227,7 @@
                 <a:solidFill>
                   <a:srgbClr val="FFFFFF"/>
                 </a:solidFill>
-                <a:latin typeface="Calibri"/>
+                <a:latin typeface="Poppins"/>
               </a:rPr>
               <a:t>Production-grade engineering</a:t>
             </a:r>
@@ -10421,7 +10249,7 @@
             <a:avLst/>
           </a:prstGeom>
           <a:solidFill>
-            <a:srgbClr val="D97306"/>
+            <a:srgbClr val="0064FF"/>
           </a:solidFill>
           <a:ln>
             <a:noFill/>
@@ -10470,7 +10298,7 @@
           </a:solidFill>
           <a:ln w="9525">
             <a:solidFill>
-              <a:srgbClr val="D7DBE3"/>
+              <a:srgbClr val="D2E3FC"/>
             </a:solidFill>
           </a:ln>
         </p:spPr>
@@ -10511,7 +10339,7 @@
             <a:avLst/>
           </a:prstGeom>
           <a:solidFill>
-            <a:srgbClr val="0F6E7A"/>
+            <a:srgbClr val="0064FF"/>
           </a:solidFill>
           <a:ln>
             <a:noFill/>
@@ -10541,7 +10369,7 @@
                 <a:solidFill>
                   <a:srgbClr val="FFFFFF"/>
                 </a:solidFill>
-                <a:latin typeface="Calibri"/>
+                <a:latin typeface="Poppins"/>
               </a:rPr>
               <a:t>✓</a:t>
             </a:r>
@@ -10573,9 +10401,9 @@
             <a:r>
               <a:rPr sz="1800" b="1" i="0">
                 <a:solidFill>
-                  <a:srgbClr val="0B1F3A"/>
-                </a:solidFill>
-                <a:latin typeface="Calibri"/>
+                  <a:srgbClr val="002659"/>
+                </a:solidFill>
+                <a:latin typeface="Poppins"/>
               </a:rPr>
               <a:t>Reliability</a:t>
             </a:r>
@@ -10615,18 +10443,18 @@
             <a:r>
               <a:rPr sz="1100" b="1" i="0">
                 <a:solidFill>
-                  <a:srgbClr val="0F6E7A"/>
-                </a:solidFill>
-                <a:latin typeface="Calibri"/>
+                  <a:srgbClr val="0064FF"/>
+                </a:solidFill>
+                <a:latin typeface="Poppins"/>
               </a:rPr>
               <a:t>•  </a:t>
             </a:r>
             <a:r>
               <a:rPr sz="1000" b="0" i="0">
                 <a:solidFill>
-                  <a:srgbClr val="333F52"/>
-                </a:solidFill>
-                <a:latin typeface="Calibri"/>
+                  <a:srgbClr val="212121"/>
+                </a:solidFill>
+                <a:latin typeface="Poppins"/>
               </a:rPr>
               <a:t>Bounds → flat-tCPA fallback on every prediction</a:t>
             </a:r>
@@ -10643,18 +10471,18 @@
             <a:r>
               <a:rPr sz="1100" b="1" i="0">
                 <a:solidFill>
-                  <a:srgbClr val="0F6E7A"/>
-                </a:solidFill>
-                <a:latin typeface="Calibri"/>
+                  <a:srgbClr val="0064FF"/>
+                </a:solidFill>
+                <a:latin typeface="Poppins"/>
               </a:rPr>
               <a:t>•  </a:t>
             </a:r>
             <a:r>
               <a:rPr sz="1000" b="0" i="0">
                 <a:solidFill>
-                  <a:srgbClr val="333F52"/>
-                </a:solidFill>
-                <a:latin typeface="Calibri"/>
+                  <a:srgbClr val="212121"/>
+                </a:solidFill>
+                <a:latin typeface="Poppins"/>
               </a:rPr>
               <a:t>Circuit breaker auto-recovers; kill switch is a single flag, no redeploy</a:t>
             </a:r>
@@ -10671,18 +10499,18 @@
             <a:r>
               <a:rPr sz="1100" b="1" i="0">
                 <a:solidFill>
-                  <a:srgbClr val="0F6E7A"/>
-                </a:solidFill>
-                <a:latin typeface="Calibri"/>
+                  <a:srgbClr val="0064FF"/>
+                </a:solidFill>
+                <a:latin typeface="Poppins"/>
               </a:rPr>
               <a:t>•  </a:t>
             </a:r>
             <a:r>
               <a:rPr sz="1000" b="0" i="0">
                 <a:solidFill>
-                  <a:srgbClr val="333F52"/>
-                </a:solidFill>
-                <a:latin typeface="Calibri"/>
+                  <a:srgbClr val="212121"/>
+                </a:solidFill>
+                <a:latin typeface="Poppins"/>
               </a:rPr>
               <a:t>Per-call timeouts on model + warehouse — no request hangs</a:t>
             </a:r>
@@ -10710,7 +10538,7 @@
           </a:solidFill>
           <a:ln w="9525">
             <a:solidFill>
-              <a:srgbClr val="D7DBE3"/>
+              <a:srgbClr val="D2E3FC"/>
             </a:solidFill>
           </a:ln>
         </p:spPr>
@@ -10751,7 +10579,7 @@
             <a:avLst/>
           </a:prstGeom>
           <a:solidFill>
-            <a:srgbClr val="D97306"/>
+            <a:srgbClr val="0064FF"/>
           </a:solidFill>
           <a:ln>
             <a:noFill/>
@@ -10781,7 +10609,7 @@
                 <a:solidFill>
                   <a:srgbClr val="FFFFFF"/>
                 </a:solidFill>
-                <a:latin typeface="Calibri"/>
+                <a:latin typeface="Poppins"/>
               </a:rPr>
               <a:t>✓</a:t>
             </a:r>
@@ -10813,9 +10641,9 @@
             <a:r>
               <a:rPr sz="1800" b="1" i="0">
                 <a:solidFill>
-                  <a:srgbClr val="0B1F3A"/>
-                </a:solidFill>
-                <a:latin typeface="Calibri"/>
+                  <a:srgbClr val="002659"/>
+                </a:solidFill>
+                <a:latin typeface="Poppins"/>
               </a:rPr>
               <a:t>Observability</a:t>
             </a:r>
@@ -10855,18 +10683,18 @@
             <a:r>
               <a:rPr sz="1100" b="1" i="0">
                 <a:solidFill>
-                  <a:srgbClr val="D97306"/>
-                </a:solidFill>
-                <a:latin typeface="Calibri"/>
+                  <a:srgbClr val="0064FF"/>
+                </a:solidFill>
+                <a:latin typeface="Poppins"/>
               </a:rPr>
               <a:t>•  </a:t>
             </a:r>
             <a:r>
               <a:rPr sz="1000" b="0" i="0">
                 <a:solidFill>
-                  <a:srgbClr val="333F52"/>
-                </a:solidFill>
-                <a:latin typeface="Calibri"/>
+                  <a:srgbClr val="212121"/>
+                </a:solidFill>
+                <a:latin typeface="Poppins"/>
               </a:rPr>
               <a:t>Six Cloud Monitoring alerts: latency, 5xx, breaker, anomaly, per-segment drift, coverage drop</a:t>
             </a:r>
@@ -10883,18 +10711,18 @@
             <a:r>
               <a:rPr sz="1100" b="1" i="0">
                 <a:solidFill>
-                  <a:srgbClr val="D97306"/>
-                </a:solidFill>
-                <a:latin typeface="Calibri"/>
+                  <a:srgbClr val="0064FF"/>
+                </a:solidFill>
+                <a:latin typeface="Poppins"/>
               </a:rPr>
               <a:t>•  </a:t>
             </a:r>
             <a:r>
               <a:rPr sz="1000" b="0" i="0">
                 <a:solidFill>
-                  <a:srgbClr val="333F52"/>
-                </a:solidFill>
-                <a:latin typeface="Calibri"/>
+                  <a:srgbClr val="212121"/>
+                </a:solidFill>
+                <a:latin typeface="Poppins"/>
               </a:rPr>
               <a:t>Cloud Logging + Trace baked in</a:t>
             </a:r>
@@ -10911,18 +10739,18 @@
             <a:r>
               <a:rPr sz="1100" b="1" i="0">
                 <a:solidFill>
-                  <a:srgbClr val="D97306"/>
-                </a:solidFill>
-                <a:latin typeface="Calibri"/>
+                  <a:srgbClr val="0064FF"/>
+                </a:solidFill>
+                <a:latin typeface="Poppins"/>
               </a:rPr>
               <a:t>•  </a:t>
             </a:r>
             <a:r>
               <a:rPr sz="1000" b="0" i="0">
                 <a:solidFill>
-                  <a:srgbClr val="333F52"/>
-                </a:solidFill>
-                <a:latin typeface="Calibri"/>
+                  <a:srgbClr val="212121"/>
+                </a:solidFill>
+                <a:latin typeface="Poppins"/>
               </a:rPr>
               <a:t>SLO: 99.5% availability on /v1/score, 30-day rolling</a:t>
             </a:r>
@@ -10950,7 +10778,7 @@
           </a:solidFill>
           <a:ln w="9525">
             <a:solidFill>
-              <a:srgbClr val="D7DBE3"/>
+              <a:srgbClr val="D2E3FC"/>
             </a:solidFill>
           </a:ln>
         </p:spPr>
@@ -10991,7 +10819,7 @@
             <a:avLst/>
           </a:prstGeom>
           <a:solidFill>
-            <a:srgbClr val="1F8A4F"/>
+            <a:srgbClr val="4285F4"/>
           </a:solidFill>
           <a:ln>
             <a:noFill/>
@@ -11021,7 +10849,7 @@
                 <a:solidFill>
                   <a:srgbClr val="FFFFFF"/>
                 </a:solidFill>
-                <a:latin typeface="Calibri"/>
+                <a:latin typeface="Poppins"/>
               </a:rPr>
               <a:t>✓</a:t>
             </a:r>
@@ -11053,9 +10881,9 @@
             <a:r>
               <a:rPr sz="1800" b="1" i="0">
                 <a:solidFill>
-                  <a:srgbClr val="0B1F3A"/>
-                </a:solidFill>
-                <a:latin typeface="Calibri"/>
+                  <a:srgbClr val="002659"/>
+                </a:solidFill>
+                <a:latin typeface="Poppins"/>
               </a:rPr>
               <a:t>Security + compliance</a:t>
             </a:r>
@@ -11095,18 +10923,18 @@
             <a:r>
               <a:rPr sz="1100" b="1" i="0">
                 <a:solidFill>
-                  <a:srgbClr val="1F8A4F"/>
-                </a:solidFill>
-                <a:latin typeface="Calibri"/>
+                  <a:srgbClr val="4285F4"/>
+                </a:solidFill>
+                <a:latin typeface="Poppins"/>
               </a:rPr>
               <a:t>•  </a:t>
             </a:r>
             <a:r>
               <a:rPr sz="1000" b="0" i="0">
                 <a:solidFill>
-                  <a:srgbClr val="333F52"/>
-                </a:solidFill>
-                <a:latin typeface="Calibri"/>
+                  <a:srgbClr val="212121"/>
+                </a:solidFill>
+                <a:latin typeface="Poppins"/>
               </a:rPr>
               <a:t>Per-service service accounts; least-privilege IAM in Terraform</a:t>
             </a:r>
@@ -11123,18 +10951,18 @@
             <a:r>
               <a:rPr sz="1100" b="1" i="0">
                 <a:solidFill>
-                  <a:srgbClr val="1F8A4F"/>
-                </a:solidFill>
-                <a:latin typeface="Calibri"/>
+                  <a:srgbClr val="4285F4"/>
+                </a:solidFill>
+                <a:latin typeface="Poppins"/>
               </a:rPr>
               <a:t>•  </a:t>
             </a:r>
             <a:r>
               <a:rPr sz="1000" b="0" i="0">
                 <a:solidFill>
-                  <a:srgbClr val="333F52"/>
-                </a:solidFill>
-                <a:latin typeface="Calibri"/>
+                  <a:srgbClr val="212121"/>
+                </a:solidFill>
+                <a:latin typeface="Poppins"/>
               </a:rPr>
               <a:t>Workload Identity Federation — no long-lived keys in CI</a:t>
             </a:r>
@@ -11151,20 +10979,20 @@
             <a:r>
               <a:rPr sz="1100" b="1" i="0">
                 <a:solidFill>
-                  <a:srgbClr val="1F8A4F"/>
-                </a:solidFill>
-                <a:latin typeface="Calibri"/>
+                  <a:srgbClr val="4285F4"/>
+                </a:solidFill>
+                <a:latin typeface="Poppins"/>
               </a:rPr>
               <a:t>•  </a:t>
             </a:r>
             <a:r>
               <a:rPr sz="1000" b="0" i="0">
                 <a:solidFill>
-                  <a:srgbClr val="333F52"/>
-                </a:solidFill>
-                <a:latin typeface="Calibri"/>
-              </a:rPr>
-              <a:t>ADR 0004 — bid-optimisation only, no customer-decisioning surface</a:t>
+                  <a:srgbClr val="212121"/>
+                </a:solidFill>
+                <a:latin typeface="Poppins"/>
+              </a:rPr>
+              <a:t>Bid-optimisation only — no customer-decisioning surface, model output never reaches customer terms</a:t>
             </a:r>
           </a:p>
           <a:p>
@@ -11179,20 +11007,20 @@
             <a:r>
               <a:rPr sz="1100" b="1" i="0">
                 <a:solidFill>
-                  <a:srgbClr val="1F8A4F"/>
-                </a:solidFill>
-                <a:latin typeface="Calibri"/>
+                  <a:srgbClr val="4285F4"/>
+                </a:solidFill>
+                <a:latin typeface="Poppins"/>
               </a:rPr>
               <a:t>•  </a:t>
             </a:r>
             <a:r>
               <a:rPr sz="1000" b="0" i="0">
                 <a:solidFill>
-                  <a:srgbClr val="333F52"/>
-                </a:solidFill>
-                <a:latin typeface="Calibri"/>
-              </a:rPr>
-              <a:t>ADR 0005 — GA4 PII boundary: hashed user_pseudo_id only</a:t>
+                  <a:srgbClr val="212121"/>
+                </a:solidFill>
+                <a:latin typeface="Poppins"/>
+              </a:rPr>
+              <a:t>GA4 PII boundary — hashed identifiers only, raw user IDs and PII params stripped at ingest</a:t>
             </a:r>
           </a:p>
         </p:txBody>
@@ -11218,7 +11046,7 @@
           </a:solidFill>
           <a:ln w="9525">
             <a:solidFill>
-              <a:srgbClr val="D7DBE3"/>
+              <a:srgbClr val="D2E3FC"/>
             </a:solidFill>
           </a:ln>
         </p:spPr>
@@ -11259,7 +11087,7 @@
             <a:avLst/>
           </a:prstGeom>
           <a:solidFill>
-            <a:srgbClr val="0B1F3A"/>
+            <a:srgbClr val="002659"/>
           </a:solidFill>
           <a:ln>
             <a:noFill/>
@@ -11289,7 +11117,7 @@
                 <a:solidFill>
                   <a:srgbClr val="FFFFFF"/>
                 </a:solidFill>
-                <a:latin typeface="Calibri"/>
+                <a:latin typeface="Poppins"/>
               </a:rPr>
               <a:t>✓</a:t>
             </a:r>
@@ -11321,9 +11149,9 @@
             <a:r>
               <a:rPr sz="1800" b="1" i="0">
                 <a:solidFill>
-                  <a:srgbClr val="0B1F3A"/>
-                </a:solidFill>
-                <a:latin typeface="Calibri"/>
+                  <a:srgbClr val="002659"/>
+                </a:solidFill>
+                <a:latin typeface="Poppins"/>
               </a:rPr>
               <a:t>Operability</a:t>
             </a:r>
@@ -11363,18 +11191,18 @@
             <a:r>
               <a:rPr sz="1100" b="1" i="0">
                 <a:solidFill>
-                  <a:srgbClr val="0B1F3A"/>
-                </a:solidFill>
-                <a:latin typeface="Calibri"/>
+                  <a:srgbClr val="002659"/>
+                </a:solidFill>
+                <a:latin typeface="Poppins"/>
               </a:rPr>
               <a:t>•  </a:t>
             </a:r>
             <a:r>
               <a:rPr sz="1000" b="0" i="0">
                 <a:solidFill>
-                  <a:srgbClr val="333F52"/>
-                </a:solidFill>
-                <a:latin typeface="Calibri"/>
+                  <a:srgbClr val="212121"/>
+                </a:solidFill>
+                <a:latin typeface="Poppins"/>
               </a:rPr>
               <a:t>Tag-push CI → CD → smoke; rollback is a single Vertex traffic-split</a:t>
             </a:r>
@@ -11391,18 +11219,18 @@
             <a:r>
               <a:rPr sz="1100" b="1" i="0">
                 <a:solidFill>
-                  <a:srgbClr val="0B1F3A"/>
-                </a:solidFill>
-                <a:latin typeface="Calibri"/>
+                  <a:srgbClr val="002659"/>
+                </a:solidFill>
+                <a:latin typeface="Poppins"/>
               </a:rPr>
               <a:t>•  </a:t>
             </a:r>
             <a:r>
               <a:rPr sz="1000" b="0" i="0">
                 <a:solidFill>
-                  <a:srgbClr val="333F52"/>
-                </a:solidFill>
-                <a:latin typeface="Calibri"/>
+                  <a:srgbClr val="212121"/>
+                </a:solidFill>
+                <a:latin typeface="Poppins"/>
               </a:rPr>
               <a:t>Six runbooks committed: breaker reset, model rollback, secret rotation, coverage audit, BQ schema migration, endpoint scale-down</a:t>
             </a:r>
@@ -11424,7 +11252,7 @@
             <a:avLst/>
           </a:prstGeom>
           <a:solidFill>
-            <a:srgbClr val="F4F6FA"/>
+            <a:srgbClr val="E7F0FE"/>
           </a:solidFill>
           <a:ln>
             <a:noFill/>
@@ -11452,9 +11280,9 @@
             <a:r>
               <a:rPr sz="900" b="0" i="0">
                 <a:solidFill>
-                  <a:srgbClr val="6B7380"/>
-                </a:solidFill>
-                <a:latin typeface="Calibri"/>
+                  <a:srgbClr val="7D7D7D"/>
+                </a:solidFill>
+                <a:latin typeface="Poppins"/>
               </a:rPr>
               <a:t>Predictive RPC Estimator — Client Demo</a:t>
             </a:r>
@@ -11487,9 +11315,9 @@
             <a:r>
               <a:rPr sz="900" b="0" i="0">
                 <a:solidFill>
-                  <a:srgbClr val="6B7380"/>
-                </a:solidFill>
-                <a:latin typeface="Calibri"/>
+                  <a:srgbClr val="7D7D7D"/>
+                </a:solidFill>
+                <a:latin typeface="Poppins"/>
               </a:rPr>
               <a:t>7 / 11</a:t>
             </a:r>
@@ -11529,7 +11357,7 @@
             <a:avLst/>
           </a:prstGeom>
           <a:solidFill>
-            <a:srgbClr val="0B1F3A"/>
+            <a:srgbClr val="002659"/>
           </a:solidFill>
           <a:ln>
             <a:noFill/>
@@ -11557,9 +11385,9 @@
             <a:r>
               <a:rPr sz="1000" b="1" i="0">
                 <a:solidFill>
-                  <a:srgbClr val="D97306"/>
-                </a:solidFill>
-                <a:latin typeface="Calibri"/>
+                  <a:srgbClr val="0064FF"/>
+                </a:solidFill>
+                <a:latin typeface="Poppins"/>
               </a:rPr>
               <a:t>FROM YOUR LEDGER TO A LIVE PREDICTION</a:t>
             </a:r>
@@ -11570,7 +11398,7 @@
                 <a:solidFill>
                   <a:srgbClr val="FFFFFF"/>
                 </a:solidFill>
-                <a:latin typeface="Calibri"/>
+                <a:latin typeface="Poppins"/>
               </a:rPr>
               <a:t>Data and model lifecycle</a:t>
             </a:r>
@@ -11592,7 +11420,7 @@
             <a:avLst/>
           </a:prstGeom>
           <a:solidFill>
-            <a:srgbClr val="D97306"/>
+            <a:srgbClr val="0064FF"/>
           </a:solidFill>
           <a:ln>
             <a:noFill/>
@@ -11653,9 +11481,9 @@
             <a:r>
               <a:rPr sz="1500" b="1" i="0">
                 <a:solidFill>
-                  <a:srgbClr val="0F6E7A"/>
-                </a:solidFill>
-                <a:latin typeface="Calibri"/>
+                  <a:srgbClr val="0064FF"/>
+                </a:solidFill>
+                <a:latin typeface="Poppins"/>
               </a:rPr>
               <a:t>Three feeds, one model</a:t>
             </a:r>
@@ -11672,18 +11500,18 @@
             <a:r>
               <a:rPr sz="1100" b="1" i="0">
                 <a:solidFill>
-                  <a:srgbClr val="D97306"/>
-                </a:solidFill>
-                <a:latin typeface="Calibri"/>
+                  <a:srgbClr val="0064FF"/>
+                </a:solidFill>
+                <a:latin typeface="Poppins"/>
               </a:rPr>
               <a:t>•  </a:t>
             </a:r>
             <a:r>
               <a:rPr sz="1100" b="0" i="0">
                 <a:solidFill>
-                  <a:srgbClr val="333F52"/>
-                </a:solidFill>
-                <a:latin typeface="Calibri"/>
+                  <a:srgbClr val="212121"/>
+                </a:solidFill>
+                <a:latin typeface="Poppins"/>
               </a:rPr>
               <a:t>Click stream (CM360, CC schema): product_type, card_product_id, query_intent, affinity_score, prior_applicant, income_band_bucket, rpc_14d/60d.</a:t>
             </a:r>
@@ -11700,18 +11528,18 @@
             <a:r>
               <a:rPr sz="1100" b="1" i="0">
                 <a:solidFill>
-                  <a:srgbClr val="D97306"/>
-                </a:solidFill>
-                <a:latin typeface="Calibri"/>
+                  <a:srgbClr val="0064FF"/>
+                </a:solidFill>
+                <a:latin typeface="Poppins"/>
               </a:rPr>
               <a:t>•  </a:t>
             </a:r>
             <a:r>
               <a:rPr sz="1100" b="0" i="0">
                 <a:solidFill>
-                  <a:srgbClr val="333F52"/>
-                </a:solidFill>
-                <a:latin typeface="Calibri"/>
+                  <a:srgbClr val="212121"/>
+                </a:solidFill>
+                <a:latin typeface="Poppins"/>
               </a:rPr>
               <a:t>Sales ledger: multi-stage events (application_started → submitted → approved → activated → first_spend → chargeback) with revenue, margin_rate (profit-ready), card_product_id, currency.</a:t>
             </a:r>
@@ -11728,18 +11556,18 @@
             <a:r>
               <a:rPr sz="1100" b="1" i="0">
                 <a:solidFill>
-                  <a:srgbClr val="D97306"/>
-                </a:solidFill>
-                <a:latin typeface="Calibri"/>
+                  <a:srgbClr val="0064FF"/>
+                </a:solidFill>
+                <a:latin typeface="Poppins"/>
               </a:rPr>
               <a:t>•  </a:t>
             </a:r>
             <a:r>
               <a:rPr sz="1100" b="0" i="0">
                 <a:solidFill>
-                  <a:srgbClr val="333F52"/>
-                </a:solidFill>
-                <a:latin typeface="Calibri"/>
+                  <a:srgbClr val="212121"/>
+                </a:solidFill>
+                <a:latin typeface="Poppins"/>
               </a:rPr>
               <a:t>GA4 / Phoebe: per-cookie 30-day rollup — calculator_used, guides_read, cards_compared, session_engagement_s. Joined at training; looked up at serving.</a:t>
             </a:r>
@@ -11756,9 +11584,9 @@
             <a:r>
               <a:rPr sz="1500" b="1" i="0">
                 <a:solidFill>
-                  <a:srgbClr val="0F6E7A"/>
-                </a:solidFill>
-                <a:latin typeface="Calibri"/>
+                  <a:srgbClr val="0064FF"/>
+                </a:solidFill>
+                <a:latin typeface="Poppins"/>
               </a:rPr>
               <a:t>Label and reconciliation window</a:t>
             </a:r>
@@ -11775,20 +11603,20 @@
             <a:r>
               <a:rPr sz="1100" b="1" i="0">
                 <a:solidFill>
-                  <a:srgbClr val="D97306"/>
-                </a:solidFill>
-                <a:latin typeface="Calibri"/>
+                  <a:srgbClr val="0064FF"/>
+                </a:solidFill>
+                <a:latin typeface="Poppins"/>
               </a:rPr>
               <a:t>•  </a:t>
             </a:r>
             <a:r>
               <a:rPr sz="1100" b="0" i="0">
                 <a:solidFill>
-                  <a:srgbClr val="333F52"/>
-                </a:solidFill>
-                <a:latin typeface="Calibri"/>
-              </a:rPr>
-              <a:t>Sum-of-rewards over a 90-day window (ADR 0003 — fits the CC consideration tail). Profit-ready label: SUM(revenue × COALESCE(margin_rate, 1.0)).</a:t>
+                  <a:srgbClr val="212121"/>
+                </a:solidFill>
+                <a:latin typeface="Poppins"/>
+              </a:rPr>
+              <a:t>Sum-of-rewards label over a 90-day window — fits the Credit Cards consideration tail. Profit-ready: when the commission table lands the same view becomes margin-aware with no rewrite.</a:t>
             </a:r>
           </a:p>
           <a:p>
@@ -11803,9 +11631,9 @@
             <a:r>
               <a:rPr sz="1500" b="1" i="0">
                 <a:solidFill>
-                  <a:srgbClr val="0F6E7A"/>
-                </a:solidFill>
-                <a:latin typeface="Calibri"/>
+                  <a:srgbClr val="0064FF"/>
+                </a:solidFill>
+                <a:latin typeface="Poppins"/>
               </a:rPr>
               <a:t>Training and release</a:t>
             </a:r>
@@ -11822,18 +11650,18 @@
             <a:r>
               <a:rPr sz="1100" b="1" i="0">
                 <a:solidFill>
-                  <a:srgbClr val="D97306"/>
-                </a:solidFill>
-                <a:latin typeface="Calibri"/>
+                  <a:srgbClr val="0064FF"/>
+                </a:solidFill>
+                <a:latin typeface="Poppins"/>
               </a:rPr>
               <a:t>•  </a:t>
             </a:r>
             <a:r>
               <a:rPr sz="1100" b="0" i="0">
                 <a:solidFill>
-                  <a:srgbClr val="333F52"/>
-                </a:solidFill>
-                <a:latin typeface="Calibri"/>
+                  <a:srgbClr val="212121"/>
+                </a:solidFill>
+                <a:latin typeface="Poppins"/>
               </a:rPr>
               <a:t>Vertex AI Pipelines run from the same monorepo — reproducible from a commit. Every version in the Vertex Model Registry.</a:t>
             </a:r>
@@ -11850,18 +11678,18 @@
             <a:r>
               <a:rPr sz="1100" b="1" i="0">
                 <a:solidFill>
-                  <a:srgbClr val="D97306"/>
-                </a:solidFill>
-                <a:latin typeface="Calibri"/>
+                  <a:srgbClr val="0064FF"/>
+                </a:solidFill>
+                <a:latin typeface="Poppins"/>
               </a:rPr>
               <a:t>•  </a:t>
             </a:r>
             <a:r>
               <a:rPr sz="1100" b="0" i="0">
                 <a:solidFill>
-                  <a:srgbClr val="333F52"/>
-                </a:solidFill>
-                <a:latin typeface="Calibri"/>
+                  <a:srgbClr val="212121"/>
+                </a:solidFill>
+                <a:latin typeface="Poppins"/>
               </a:rPr>
               <a:t>Canary 10% → 50% over 48h → 100%. Active-versions panel shows the share and rolling MAE side-by-side.</a:t>
             </a:r>
@@ -11878,9 +11706,9 @@
             <a:r>
               <a:rPr sz="1500" b="1" i="0">
                 <a:solidFill>
-                  <a:srgbClr val="0F6E7A"/>
-                </a:solidFill>
-                <a:latin typeface="Calibri"/>
+                  <a:srgbClr val="0064FF"/>
+                </a:solidFill>
+                <a:latin typeface="Poppins"/>
               </a:rPr>
               <a:t>Drift, four ways</a:t>
             </a:r>
@@ -11897,18 +11725,18 @@
             <a:r>
               <a:rPr sz="1100" b="1" i="0">
                 <a:solidFill>
-                  <a:srgbClr val="D97306"/>
-                </a:solidFill>
-                <a:latin typeface="Calibri"/>
+                  <a:srgbClr val="0064FF"/>
+                </a:solidFill>
+                <a:latin typeface="Poppins"/>
               </a:rPr>
               <a:t>•  </a:t>
             </a:r>
             <a:r>
               <a:rPr sz="1100" b="0" i="0">
                 <a:solidFill>
-                  <a:srgbClr val="333F52"/>
-                </a:solidFill>
-                <a:latin typeface="Calibri"/>
+                  <a:srgbClr val="212121"/>
+                </a:solidFill>
+                <a:latin typeface="Poppins"/>
               </a:rPr>
               <a:t>Inputs (PSI per feature); outputs (residuals_daily); per-segment MAE (product × device × geo); coverage drop W-o-W per slice.</a:t>
             </a:r>
@@ -11922,9 +11750,9 @@
             <a:r>
               <a:rPr sz="900" b="0" i="1">
                 <a:solidFill>
-                  <a:srgbClr val="6B7380"/>
-                </a:solidFill>
-                <a:latin typeface="Calibri"/>
+                  <a:srgbClr val="7D7D7D"/>
+                </a:solidFill>
+                <a:latin typeface="Poppins"/>
               </a:rPr>
               <a:t>Today's model is trained on synthetic data mirroring the CC schema. First work item once OQ-11 (GA4 access) and the data contract land is retrain on real.</a:t>
             </a:r>
@@ -11946,7 +11774,7 @@
             <a:avLst/>
           </a:prstGeom>
           <a:solidFill>
-            <a:srgbClr val="F4F6FA"/>
+            <a:srgbClr val="E7F0FE"/>
           </a:solidFill>
           <a:ln>
             <a:noFill/>
@@ -11974,9 +11802,9 @@
             <a:r>
               <a:rPr sz="900" b="0" i="0">
                 <a:solidFill>
-                  <a:srgbClr val="6B7380"/>
-                </a:solidFill>
-                <a:latin typeface="Calibri"/>
+                  <a:srgbClr val="7D7D7D"/>
+                </a:solidFill>
+                <a:latin typeface="Poppins"/>
               </a:rPr>
               <a:t>Predictive RPC Estimator — Client Demo</a:t>
             </a:r>
@@ -12009,9 +11837,9 @@
             <a:r>
               <a:rPr sz="900" b="0" i="0">
                 <a:solidFill>
-                  <a:srgbClr val="6B7380"/>
-                </a:solidFill>
-                <a:latin typeface="Calibri"/>
+                  <a:srgbClr val="7D7D7D"/>
+                </a:solidFill>
+                <a:latin typeface="Poppins"/>
               </a:rPr>
               <a:t>8 / 11</a:t>
             </a:r>
@@ -12051,7 +11879,7 @@
             <a:avLst/>
           </a:prstGeom>
           <a:solidFill>
-            <a:srgbClr val="0B1F3A"/>
+            <a:srgbClr val="002659"/>
           </a:solidFill>
           <a:ln>
             <a:noFill/>
@@ -12079,9 +11907,9 @@
             <a:r>
               <a:rPr sz="1000" b="1" i="0">
                 <a:solidFill>
-                  <a:srgbClr val="D97306"/>
-                </a:solidFill>
-                <a:latin typeface="Calibri"/>
+                  <a:srgbClr val="0064FF"/>
+                </a:solidFill>
+                <a:latin typeface="Poppins"/>
               </a:rPr>
               <a:t>FROM HERE TO CUTOVER</a:t>
             </a:r>
@@ -12092,7 +11920,7 @@
                 <a:solidFill>
                   <a:srgbClr val="FFFFFF"/>
                 </a:solidFill>
-                <a:latin typeface="Calibri"/>
+                <a:latin typeface="Poppins"/>
               </a:rPr>
               <a:t>Delivery roadmap</a:t>
             </a:r>
@@ -12114,7 +11942,7 @@
             <a:avLst/>
           </a:prstGeom>
           <a:solidFill>
-            <a:srgbClr val="D97306"/>
+            <a:srgbClr val="0064FF"/>
           </a:solidFill>
           <a:ln>
             <a:noFill/>
@@ -12163,7 +11991,7 @@
           </a:solidFill>
           <a:ln w="9525">
             <a:solidFill>
-              <a:srgbClr val="D7DBE3"/>
+              <a:srgbClr val="D2E3FC"/>
             </a:solidFill>
           </a:ln>
         </p:spPr>
@@ -12204,7 +12032,7 @@
             <a:avLst/>
           </a:prstGeom>
           <a:solidFill>
-            <a:srgbClr val="1F8A4F"/>
+            <a:srgbClr val="4285F4"/>
           </a:solidFill>
           <a:ln>
             <a:noFill/>
@@ -12259,7 +12087,7 @@
                 <a:solidFill>
                   <a:srgbClr val="FFFFFF"/>
                 </a:solidFill>
-                <a:latin typeface="Calibri"/>
+                <a:latin typeface="Poppins"/>
               </a:rPr>
               <a:t>Phase 1</a:t>
             </a:r>
@@ -12270,7 +12098,7 @@
                 <a:solidFill>
                   <a:srgbClr val="FFFFFF"/>
                 </a:solidFill>
-                <a:latin typeface="Calibri"/>
+                <a:latin typeface="Poppins"/>
               </a:rPr>
               <a:t>Platform &amp; schema</a:t>
             </a:r>
@@ -12302,9 +12130,9 @@
             <a:r>
               <a:rPr sz="1000" b="1" i="0">
                 <a:solidFill>
-                  <a:srgbClr val="1F8A4F"/>
-                </a:solidFill>
-                <a:latin typeface="Calibri"/>
+                  <a:srgbClr val="4285F4"/>
+                </a:solidFill>
+                <a:latin typeface="Poppins"/>
               </a:rPr>
               <a:t>COMPLETE</a:t>
             </a:r>
@@ -12344,18 +12172,18 @@
             <a:r>
               <a:rPr sz="1200" b="1" i="0">
                 <a:solidFill>
-                  <a:srgbClr val="1F8A4F"/>
-                </a:solidFill>
-                <a:latin typeface="Calibri"/>
+                  <a:srgbClr val="4285F4"/>
+                </a:solidFill>
+                <a:latin typeface="Poppins"/>
               </a:rPr>
               <a:t>✓  </a:t>
             </a:r>
             <a:r>
               <a:rPr sz="1200" b="0" i="0">
                 <a:solidFill>
-                  <a:srgbClr val="333F52"/>
-                </a:solidFill>
-                <a:latin typeface="Calibri"/>
+                  <a:srgbClr val="212121"/>
+                </a:solidFill>
+                <a:latin typeface="Poppins"/>
               </a:rPr>
               <a:t>CC schema end-to-end</a:t>
             </a:r>
@@ -12372,18 +12200,18 @@
             <a:r>
               <a:rPr sz="1200" b="1" i="0">
                 <a:solidFill>
-                  <a:srgbClr val="1F8A4F"/>
-                </a:solidFill>
-                <a:latin typeface="Calibri"/>
+                  <a:srgbClr val="4285F4"/>
+                </a:solidFill>
+                <a:latin typeface="Poppins"/>
               </a:rPr>
               <a:t>✓  </a:t>
             </a:r>
             <a:r>
               <a:rPr sz="1200" b="0" i="0">
                 <a:solidFill>
-                  <a:srgbClr val="333F52"/>
-                </a:solidFill>
-                <a:latin typeface="Calibri"/>
+                  <a:srgbClr val="212121"/>
+                </a:solidFill>
+                <a:latin typeface="Poppins"/>
               </a:rPr>
               <a:t>Phoebe features wired</a:t>
             </a:r>
@@ -12400,18 +12228,18 @@
             <a:r>
               <a:rPr sz="1200" b="1" i="0">
                 <a:solidFill>
-                  <a:srgbClr val="1F8A4F"/>
-                </a:solidFill>
-                <a:latin typeface="Calibri"/>
+                  <a:srgbClr val="4285F4"/>
+                </a:solidFill>
+                <a:latin typeface="Poppins"/>
               </a:rPr>
               <a:t>✓  </a:t>
             </a:r>
             <a:r>
               <a:rPr sz="1200" b="0" i="0">
                 <a:solidFill>
-                  <a:srgbClr val="333F52"/>
-                </a:solidFill>
-                <a:latin typeface="Calibri"/>
+                  <a:srgbClr val="212121"/>
+                </a:solidFill>
+                <a:latin typeface="Poppins"/>
               </a:rPr>
               <a:t>Demo dashboard live</a:t>
             </a:r>
@@ -12428,18 +12256,18 @@
             <a:r>
               <a:rPr sz="1200" b="1" i="0">
                 <a:solidFill>
-                  <a:srgbClr val="1F8A4F"/>
-                </a:solidFill>
-                <a:latin typeface="Calibri"/>
+                  <a:srgbClr val="4285F4"/>
+                </a:solidFill>
+                <a:latin typeface="Poppins"/>
               </a:rPr>
               <a:t>✓  </a:t>
             </a:r>
             <a:r>
               <a:rPr sz="1200" b="0" i="0">
                 <a:solidFill>
-                  <a:srgbClr val="333F52"/>
-                </a:solidFill>
-                <a:latin typeface="Calibri"/>
+                  <a:srgbClr val="212121"/>
+                </a:solidFill>
+                <a:latin typeface="Poppins"/>
               </a:rPr>
               <a:t>Drift + coverage alerts</a:t>
             </a:r>
@@ -12467,7 +12295,7 @@
           </a:solidFill>
           <a:ln w="9525">
             <a:solidFill>
-              <a:srgbClr val="D7DBE3"/>
+              <a:srgbClr val="D2E3FC"/>
             </a:solidFill>
           </a:ln>
         </p:spPr>
@@ -12508,7 +12336,7 @@
             <a:avLst/>
           </a:prstGeom>
           <a:solidFill>
-            <a:srgbClr val="D97306"/>
+            <a:srgbClr val="0064FF"/>
           </a:solidFill>
           <a:ln>
             <a:noFill/>
@@ -12563,7 +12391,7 @@
                 <a:solidFill>
                   <a:srgbClr val="FFFFFF"/>
                 </a:solidFill>
-                <a:latin typeface="Calibri"/>
+                <a:latin typeface="Poppins"/>
               </a:rPr>
               <a:t>Phase 2</a:t>
             </a:r>
@@ -12574,7 +12402,7 @@
                 <a:solidFill>
                   <a:srgbClr val="FFFFFF"/>
                 </a:solidFill>
-                <a:latin typeface="Calibri"/>
+                <a:latin typeface="Poppins"/>
               </a:rPr>
               <a:t>Real data</a:t>
             </a:r>
@@ -12606,9 +12434,9 @@
             <a:r>
               <a:rPr sz="1000" b="1" i="0">
                 <a:solidFill>
-                  <a:srgbClr val="D97306"/>
-                </a:solidFill>
-                <a:latin typeface="Calibri"/>
+                  <a:srgbClr val="0064FF"/>
+                </a:solidFill>
+                <a:latin typeface="Poppins"/>
               </a:rPr>
               <a:t>PENDING CLIENT</a:t>
             </a:r>
@@ -12648,18 +12476,18 @@
             <a:r>
               <a:rPr sz="1200" b="1" i="0">
                 <a:solidFill>
-                  <a:srgbClr val="D97306"/>
-                </a:solidFill>
-                <a:latin typeface="Calibri"/>
+                  <a:srgbClr val="0064FF"/>
+                </a:solidFill>
+                <a:latin typeface="Poppins"/>
               </a:rPr>
               <a:t>•  </a:t>
             </a:r>
             <a:r>
               <a:rPr sz="1200" b="0" i="0">
                 <a:solidFill>
-                  <a:srgbClr val="333F52"/>
-                </a:solidFill>
-                <a:latin typeface="Calibri"/>
+                  <a:srgbClr val="212121"/>
+                </a:solidFill>
+                <a:latin typeface="Poppins"/>
               </a:rPr>
               <a:t>GA4 access (OQ-11)</a:t>
             </a:r>
@@ -12676,18 +12504,18 @@
             <a:r>
               <a:rPr sz="1200" b="1" i="0">
                 <a:solidFill>
-                  <a:srgbClr val="D97306"/>
-                </a:solidFill>
-                <a:latin typeface="Calibri"/>
+                  <a:srgbClr val="0064FF"/>
+                </a:solidFill>
+                <a:latin typeface="Poppins"/>
               </a:rPr>
               <a:t>•  </a:t>
             </a:r>
             <a:r>
               <a:rPr sz="1200" b="0" i="0">
                 <a:solidFill>
-                  <a:srgbClr val="333F52"/>
-                </a:solidFill>
-                <a:latin typeface="Calibri"/>
+                  <a:srgbClr val="212121"/>
+                </a:solidFill>
+                <a:latin typeface="Poppins"/>
               </a:rPr>
               <a:t>Sample data export</a:t>
             </a:r>
@@ -12704,18 +12532,18 @@
             <a:r>
               <a:rPr sz="1200" b="1" i="0">
                 <a:solidFill>
-                  <a:srgbClr val="D97306"/>
-                </a:solidFill>
-                <a:latin typeface="Calibri"/>
+                  <a:srgbClr val="0064FF"/>
+                </a:solidFill>
+                <a:latin typeface="Poppins"/>
               </a:rPr>
               <a:t>•  </a:t>
             </a:r>
             <a:r>
               <a:rPr sz="1200" b="0" i="0">
                 <a:solidFill>
-                  <a:srgbClr val="333F52"/>
-                </a:solidFill>
-                <a:latin typeface="Calibri"/>
+                  <a:srgbClr val="212121"/>
+                </a:solidFill>
+                <a:latin typeface="Poppins"/>
               </a:rPr>
               <a:t>v1 on 50% coverage</a:t>
             </a:r>
@@ -12732,18 +12560,18 @@
             <a:r>
               <a:rPr sz="1200" b="1" i="0">
                 <a:solidFill>
-                  <a:srgbClr val="D97306"/>
-                </a:solidFill>
-                <a:latin typeface="Calibri"/>
+                  <a:srgbClr val="0064FF"/>
+                </a:solidFill>
+                <a:latin typeface="Poppins"/>
               </a:rPr>
               <a:t>•  </a:t>
             </a:r>
             <a:r>
               <a:rPr sz="1200" b="0" i="0">
                 <a:solidFill>
-                  <a:srgbClr val="333F52"/>
-                </a:solidFill>
-                <a:latin typeface="Calibri"/>
+                  <a:srgbClr val="212121"/>
+                </a:solidFill>
+                <a:latin typeface="Poppins"/>
               </a:rPr>
               <a:t>Canary 10% → 100%</a:t>
             </a:r>
@@ -12771,7 +12599,7 @@
           </a:solidFill>
           <a:ln w="9525">
             <a:solidFill>
-              <a:srgbClr val="D7DBE3"/>
+              <a:srgbClr val="D2E3FC"/>
             </a:solidFill>
           </a:ln>
         </p:spPr>
@@ -12812,7 +12640,7 @@
             <a:avLst/>
           </a:prstGeom>
           <a:solidFill>
-            <a:srgbClr val="0F6E7A"/>
+            <a:srgbClr val="0064FF"/>
           </a:solidFill>
           <a:ln>
             <a:noFill/>
@@ -12867,7 +12695,7 @@
                 <a:solidFill>
                   <a:srgbClr val="FFFFFF"/>
                 </a:solidFill>
-                <a:latin typeface="Calibri"/>
+                <a:latin typeface="Poppins"/>
               </a:rPr>
               <a:t>Phase 3</a:t>
             </a:r>
@@ -12878,7 +12706,7 @@
                 <a:solidFill>
                   <a:srgbClr val="FFFFFF"/>
                 </a:solidFill>
-                <a:latin typeface="Calibri"/>
+                <a:latin typeface="Poppins"/>
               </a:rPr>
               <a:t>Cutover</a:t>
             </a:r>
@@ -12910,9 +12738,9 @@
             <a:r>
               <a:rPr sz="1000" b="1" i="0">
                 <a:solidFill>
-                  <a:srgbClr val="0F6E7A"/>
-                </a:solidFill>
-                <a:latin typeface="Calibri"/>
+                  <a:srgbClr val="0064FF"/>
+                </a:solidFill>
+                <a:latin typeface="Poppins"/>
               </a:rPr>
               <a:t>END-AUGUST 2026</a:t>
             </a:r>
@@ -12952,18 +12780,18 @@
             <a:r>
               <a:rPr sz="1200" b="1" i="0">
                 <a:solidFill>
-                  <a:srgbClr val="0F6E7A"/>
-                </a:solidFill>
-                <a:latin typeface="Calibri"/>
+                  <a:srgbClr val="0064FF"/>
+                </a:solidFill>
+                <a:latin typeface="Poppins"/>
               </a:rPr>
               <a:t>•  </a:t>
             </a:r>
             <a:r>
               <a:rPr sz="1200" b="0" i="0">
                 <a:solidFill>
-                  <a:srgbClr val="333F52"/>
-                </a:solidFill>
-                <a:latin typeface="Calibri"/>
+                  <a:srgbClr val="212121"/>
+                </a:solidFill>
+                <a:latin typeface="Poppins"/>
               </a:rPr>
               <a:t>v2 on 80% coverage</a:t>
             </a:r>
@@ -12980,18 +12808,18 @@
             <a:r>
               <a:rPr sz="1200" b="1" i="0">
                 <a:solidFill>
-                  <a:srgbClr val="0F6E7A"/>
-                </a:solidFill>
-                <a:latin typeface="Calibri"/>
+                  <a:srgbClr val="0064FF"/>
+                </a:solidFill>
+                <a:latin typeface="Poppins"/>
               </a:rPr>
               <a:t>•  </a:t>
             </a:r>
             <a:r>
               <a:rPr sz="1200" b="0" i="0">
                 <a:solidFill>
-                  <a:srgbClr val="333F52"/>
-                </a:solidFill>
-                <a:latin typeface="Calibri"/>
+                  <a:srgbClr val="212121"/>
+                </a:solidFill>
+                <a:latin typeface="Poppins"/>
               </a:rPr>
               <a:t>Rollback rehearsed</a:t>
             </a:r>
@@ -13008,20 +12836,20 @@
             <a:r>
               <a:rPr sz="1200" b="1" i="0">
                 <a:solidFill>
-                  <a:srgbClr val="0F6E7A"/>
-                </a:solidFill>
-                <a:latin typeface="Calibri"/>
+                  <a:srgbClr val="0064FF"/>
+                </a:solidFill>
+                <a:latin typeface="Poppins"/>
               </a:rPr>
               <a:t>•  </a:t>
             </a:r>
             <a:r>
               <a:rPr sz="1200" b="0" i="0">
                 <a:solidFill>
-                  <a:srgbClr val="333F52"/>
-                </a:solidFill>
-                <a:latin typeface="Calibri"/>
-              </a:rPr>
-              <a:t>ADR 0004 / 0005 sign-off</a:t>
+                  <a:srgbClr val="212121"/>
+                </a:solidFill>
+                <a:latin typeface="Poppins"/>
+              </a:rPr>
+              <a:t>Compliance sign-off</a:t>
             </a:r>
           </a:p>
           <a:p>
@@ -13036,18 +12864,18 @@
             <a:r>
               <a:rPr sz="1200" b="1" i="0">
                 <a:solidFill>
-                  <a:srgbClr val="0F6E7A"/>
-                </a:solidFill>
-                <a:latin typeface="Calibri"/>
+                  <a:srgbClr val="0064FF"/>
+                </a:solidFill>
+                <a:latin typeface="Poppins"/>
               </a:rPr>
               <a:t>•  </a:t>
             </a:r>
             <a:r>
               <a:rPr sz="1200" b="0" i="0">
                 <a:solidFill>
-                  <a:srgbClr val="333F52"/>
-                </a:solidFill>
-                <a:latin typeface="Calibri"/>
+                  <a:srgbClr val="212121"/>
+                </a:solidFill>
+                <a:latin typeface="Poppins"/>
               </a:rPr>
               <a:t>Handover to on-call</a:t>
             </a:r>
@@ -13080,9 +12908,9 @@
             <a:r>
               <a:rPr sz="1000" b="0" i="1">
                 <a:solidFill>
-                  <a:srgbClr val="6B7380"/>
-                </a:solidFill>
-                <a:latin typeface="Calibri"/>
+                  <a:srgbClr val="7D7D7D"/>
+                </a:solidFill>
+                <a:latin typeface="Poppins"/>
               </a:rPr>
               <a:t>Timeline measured from data-sample arrival, not kickoff. Phase 2 starts the day GA4 access + a sample data export land.</a:t>
             </a:r>
@@ -13104,7 +12932,7 @@
             <a:avLst/>
           </a:prstGeom>
           <a:solidFill>
-            <a:srgbClr val="F4F6FA"/>
+            <a:srgbClr val="E7F0FE"/>
           </a:solidFill>
           <a:ln>
             <a:noFill/>
@@ -13132,9 +12960,9 @@
             <a:r>
               <a:rPr sz="900" b="0" i="0">
                 <a:solidFill>
-                  <a:srgbClr val="6B7380"/>
-                </a:solidFill>
-                <a:latin typeface="Calibri"/>
+                  <a:srgbClr val="7D7D7D"/>
+                </a:solidFill>
+                <a:latin typeface="Poppins"/>
               </a:rPr>
               <a:t>Predictive RPC Estimator — Client Demo</a:t>
             </a:r>
@@ -13167,9 +12995,9 @@
             <a:r>
               <a:rPr sz="900" b="0" i="0">
                 <a:solidFill>
-                  <a:srgbClr val="6B7380"/>
-                </a:solidFill>
-                <a:latin typeface="Calibri"/>
+                  <a:srgbClr val="7D7D7D"/>
+                </a:solidFill>
+                <a:latin typeface="Poppins"/>
               </a:rPr>
               <a:t>9 / 11</a:t>
             </a:r>

--- a/docs/client-demo-deck.pptx
+++ b/docs/client-demo-deck.pptx
@@ -6176,8 +6176,8 @@
         </p:nvCxnSpPr>
         <p:spPr>
           <a:xfrm>
-            <a:off x="2981883.75" y="3634740.0"/>
-            <a:ext cx="314960.0" cy="0.0"/>
+            <a:off x="2981883" y="3634740"/>
+            <a:ext cx="314960" cy="0"/>
           </a:xfrm>
           <a:prstGeom prst="bentConnector3">
             <a:avLst/>
@@ -6623,8 +6623,8 @@
         </p:nvCxnSpPr>
         <p:spPr>
           <a:xfrm>
-            <a:off x="5938367.5" y="3634740.0"/>
-            <a:ext cx="314960.0" cy="0.0"/>
+            <a:off x="5938367" y="3634740"/>
+            <a:ext cx="314960" cy="0"/>
           </a:xfrm>
           <a:prstGeom prst="bentConnector3">
             <a:avLst/>
@@ -7070,8 +7070,8 @@
         </p:nvCxnSpPr>
         <p:spPr>
           <a:xfrm>
-            <a:off x="8894851.25" y="3634740.0"/>
-            <a:ext cx="314960.0" cy="0.0"/>
+            <a:off x="8894851" y="3634740"/>
+            <a:ext cx="314960" cy="0"/>
           </a:xfrm>
           <a:prstGeom prst="bentConnector3">
             <a:avLst/>
